--- a/Arquitectura de Sistemas Computacionales/Clases/Clase 10 - Costos y sostenibilidad cloud/Presentacion.pptx
+++ b/Arquitectura de Sistemas Computacionales/Clases/Clase 10 - Costos y sostenibilidad cloud/Presentacion.pptx
@@ -15,6 +15,18 @@
     <p:sldId id="263" r:id="rId14"/>
     <p:sldId id="264" r:id="rId15"/>
     <p:sldId id="265" r:id="rId16"/>
+    <p:sldId id="266" r:id="rId17"/>
+    <p:sldId id="267" r:id="rId18"/>
+    <p:sldId id="268" r:id="rId19"/>
+    <p:sldId id="269" r:id="rId20"/>
+    <p:sldId id="270" r:id="rId21"/>
+    <p:sldId id="271" r:id="rId22"/>
+    <p:sldId id="272" r:id="rId23"/>
+    <p:sldId id="273" r:id="rId24"/>
+    <p:sldId id="274" r:id="rId25"/>
+    <p:sldId id="275" r:id="rId26"/>
+    <p:sldId id="276" r:id="rId27"/>
+    <p:sldId id="277" r:id="rId28"/>
   </p:sldIdLst>
   <p:sldSz cx="12191695" cy="6858000" type="screen4x3"/>
   <p:notesSz cx="6858000" cy="9144000"/>
@@ -3467,13 +3479,13 @@
         <p:spPr>
           <a:xfrm>
             <a:off x="0" y="0"/>
-            <a:ext cx="12191695" cy="164592"/>
+            <a:ext cx="12191695" cy="960120"/>
           </a:xfrm>
           <a:prstGeom prst="rect">
             <a:avLst/>
           </a:prstGeom>
           <a:solidFill>
-            <a:srgbClr val="269CCB"/>
+            <a:srgbClr val="095292"/>
           </a:solidFill>
           <a:ln>
             <a:noFill/>
@@ -3501,9 +3513,2507 @@
           </a:p>
         </p:txBody>
       </p:sp>
+      <p:sp>
+        <p:nvSpPr>
+          <p:cNvPr id="3" name="Rectangle 2"/>
+          <p:cNvSpPr/>
+          <p:nvPr/>
+        </p:nvSpPr>
+        <p:spPr>
+          <a:xfrm>
+            <a:off x="0" y="960120"/>
+            <a:ext cx="12191695" cy="41148"/>
+          </a:xfrm>
+          <a:prstGeom prst="rect">
+            <a:avLst/>
+          </a:prstGeom>
+          <a:solidFill>
+            <a:srgbClr val="FFD000"/>
+          </a:solidFill>
+          <a:ln>
+            <a:noFill/>
+          </a:ln>
+        </p:spPr>
+        <p:style>
+          <a:lnRef idx="1">
+            <a:schemeClr val="accent1"/>
+          </a:lnRef>
+          <a:fillRef idx="3">
+            <a:schemeClr val="accent1"/>
+          </a:fillRef>
+          <a:effectRef idx="2">
+            <a:schemeClr val="accent1"/>
+          </a:effectRef>
+          <a:fontRef idx="minor">
+            <a:schemeClr val="lt1"/>
+          </a:fontRef>
+        </p:style>
+        <p:txBody>
+          <a:bodyPr rtlCol="0" anchor="ctr"/>
+          <a:lstStyle/>
+          <a:p>
+            <a:pPr algn="ctr"/>
+          </a:p>
+        </p:txBody>
+      </p:sp>
+      <p:sp>
+        <p:nvSpPr>
+          <p:cNvPr id="4" name="TextBox 3"/>
+          <p:cNvSpPr txBox="1"/>
+          <p:nvPr/>
+        </p:nvSpPr>
+        <p:spPr>
+          <a:xfrm>
+            <a:off x="457200" y="164592"/>
+            <a:ext cx="11277295" cy="502920"/>
+          </a:xfrm>
+          <a:prstGeom prst="rect">
+            <a:avLst/>
+          </a:prstGeom>
+          <a:noFill/>
+        </p:spPr>
+        <p:txBody>
+          <a:bodyPr wrap="square">
+            <a:spAutoFit/>
+          </a:bodyPr>
+          <a:lstStyle/>
+          <a:p>
+            <a:r>
+              <a:rPr sz="2600" b="1" i="0">
+                <a:solidFill>
+                  <a:srgbClr val="FFFFFF"/>
+                </a:solidFill>
+                <a:latin typeface="Calibri"/>
+              </a:rPr>
+              <a:t>Segundo ejemplo: por que el driver importa mas que el nivel (1/2)</a:t>
+            </a:r>
+          </a:p>
+        </p:txBody>
+      </p:sp>
+      <p:sp>
+        <p:nvSpPr>
+          <p:cNvPr id="5" name="TextBox 4"/>
+          <p:cNvSpPr txBox="1"/>
+          <p:nvPr/>
+        </p:nvSpPr>
+        <p:spPr>
+          <a:xfrm>
+            <a:off x="457200" y="1170432"/>
+            <a:ext cx="11277295" cy="5230368"/>
+          </a:xfrm>
+          <a:prstGeom prst="rect">
+            <a:avLst/>
+          </a:prstGeom>
+          <a:noFill/>
+        </p:spPr>
+        <p:txBody>
+          <a:bodyPr wrap="square">
+            <a:spAutoFit/>
+          </a:bodyPr>
+          <a:lstStyle/>
+          <a:p>
+            <a:pPr>
+              <a:spcAft>
+                <a:spcPts val="800"/>
+              </a:spcAft>
+            </a:pPr>
+            <a:r>
+              <a:rPr sz="2000" b="0" i="0">
+                <a:solidFill>
+                  <a:srgbClr val="333333"/>
+                </a:solidFill>
+                <a:latin typeface="Calibri"/>
+              </a:rPr>
+              <a:t>–   El segundo ejemplo muestra por que el driver importa mas que el nivel.</a:t>
+            </a:r>
+          </a:p>
+          <a:p>
+            <a:pPr>
+              <a:spcAft>
+                <a:spcPts val="800"/>
+              </a:spcAft>
+            </a:pPr>
+            <a:r>
+              <a:rPr sz="2000" b="0" i="0">
+                <a:solidFill>
+                  <a:srgbClr val="333333"/>
+                </a:solidFill>
+                <a:latin typeface="Calibri"/>
+              </a:rPr>
+              <a:t>–   Suponga que CloudLite permite subir comprobantes en PDF o imagenes y que en un semestre acumula 5000 archivos de 2 MB, o sea 10 GB.</a:t>
+            </a:r>
+          </a:p>
+          <a:p>
+            <a:pPr>
+              <a:spcAft>
+                <a:spcPts val="800"/>
+              </a:spcAft>
+            </a:pPr>
+            <a:r>
+              <a:rPr sz="2000" b="0" i="0">
+                <a:solidFill>
+                  <a:srgbClr val="333333"/>
+                </a:solidFill>
+                <a:latin typeface="Calibri"/>
+              </a:rPr>
+              <a:t>–   Guardarlos cuesta unos 0.25 dolares al mes, despreciable.</a:t>
+            </a:r>
+          </a:p>
+          <a:p>
+            <a:pPr>
+              <a:spcAft>
+                <a:spcPts val="800"/>
+              </a:spcAft>
+            </a:pPr>
+            <a:r>
+              <a:rPr sz="2000" b="0" i="0">
+                <a:solidFill>
+                  <a:srgbClr val="333333"/>
+                </a:solidFill>
+                <a:latin typeface="Calibri"/>
+              </a:rPr>
+              <a:t>–   Pero si cada archivo se descarga en promedio 20 veces, el sistema mueve 200 GB de egress al mes, que a 0.09 dolares por gigabyte son unos 18 dolares: setenta veces mas que el almacenamiento.</a:t>
+            </a:r>
+          </a:p>
+          <a:p>
+            <a:pPr>
+              <a:spcAft>
+                <a:spcPts val="800"/>
+              </a:spcAft>
+            </a:pPr>
+            <a:r>
+              <a:rPr sz="2000" b="0" i="0">
+                <a:solidFill>
+                  <a:srgbClr val="333333"/>
+                </a:solidFill>
+                <a:latin typeface="Calibri"/>
+              </a:rPr>
+              <a:t>–   La conclusion es contraintuitiva y por eso vale en clase: el driver del componente "almacenamiento de archivos" no es el almacenamiento, es el trafico</a:t>
+            </a:r>
+          </a:p>
+        </p:txBody>
+      </p:sp>
+      <p:sp>
+        <p:nvSpPr>
+          <p:cNvPr id="6" name="TextBox 5"/>
+          <p:cNvSpPr txBox="1"/>
+          <p:nvPr/>
+        </p:nvSpPr>
+        <p:spPr>
+          <a:xfrm>
+            <a:off x="11185855" y="6473952"/>
+            <a:ext cx="640080" cy="274320"/>
+          </a:xfrm>
+          <a:prstGeom prst="rect">
+            <a:avLst/>
+          </a:prstGeom>
+          <a:noFill/>
+        </p:spPr>
+        <p:txBody>
+          <a:bodyPr wrap="square">
+            <a:spAutoFit/>
+          </a:bodyPr>
+          <a:lstStyle/>
+          <a:p>
+            <a:pPr algn="r"/>
+            <a:r>
+              <a:rPr sz="1100" b="0" i="0">
+                <a:solidFill>
+                  <a:srgbClr val="666666"/>
+                </a:solidFill>
+                <a:latin typeface="Calibri"/>
+              </a:rPr>
+              <a:t>10</a:t>
+            </a:r>
+          </a:p>
+        </p:txBody>
+      </p:sp>
+    </p:spTree>
+  </p:cSld>
+  <p:clrMapOvr>
+    <a:masterClrMapping/>
+  </p:clrMapOvr>
+</p:sld>
+</file>
+
+<file path=ppt/slides/slide11.xml><?xml version="1.0" encoding="utf-8"?>
+<p:sld xmlns:a="http://schemas.openxmlformats.org/drawingml/2006/main" xmlns:p="http://schemas.openxmlformats.org/presentationml/2006/main" xmlns:r="http://schemas.openxmlformats.org/officeDocument/2006/relationships">
+  <p:cSld>
+    <p:bg>
+      <p:bgPr>
+        <a:solidFill>
+          <a:srgbClr val="FFFFFF"/>
+        </a:solidFill>
+        <a:effectLst/>
+      </p:bgPr>
+    </p:bg>
+    <p:spTree>
+      <p:nvGrpSpPr>
+        <p:cNvPr id="1" name=""/>
+        <p:cNvGrpSpPr/>
+        <p:nvPr/>
+      </p:nvGrpSpPr>
+      <p:grpSpPr/>
+      <p:sp>
+        <p:nvSpPr>
+          <p:cNvPr id="2" name="Rectangle 1"/>
+          <p:cNvSpPr/>
+          <p:nvPr/>
+        </p:nvSpPr>
+        <p:spPr>
+          <a:xfrm>
+            <a:off x="0" y="0"/>
+            <a:ext cx="12191695" cy="960120"/>
+          </a:xfrm>
+          <a:prstGeom prst="rect">
+            <a:avLst/>
+          </a:prstGeom>
+          <a:solidFill>
+            <a:srgbClr val="095292"/>
+          </a:solidFill>
+          <a:ln>
+            <a:noFill/>
+          </a:ln>
+        </p:spPr>
+        <p:style>
+          <a:lnRef idx="1">
+            <a:schemeClr val="accent1"/>
+          </a:lnRef>
+          <a:fillRef idx="3">
+            <a:schemeClr val="accent1"/>
+          </a:fillRef>
+          <a:effectRef idx="2">
+            <a:schemeClr val="accent1"/>
+          </a:effectRef>
+          <a:fontRef idx="minor">
+            <a:schemeClr val="lt1"/>
+          </a:fontRef>
+        </p:style>
+        <p:txBody>
+          <a:bodyPr rtlCol="0" anchor="ctr"/>
+          <a:lstStyle/>
+          <a:p>
+            <a:pPr algn="ctr"/>
+          </a:p>
+        </p:txBody>
+      </p:sp>
+      <p:sp>
+        <p:nvSpPr>
+          <p:cNvPr id="3" name="Rectangle 2"/>
+          <p:cNvSpPr/>
+          <p:nvPr/>
+        </p:nvSpPr>
+        <p:spPr>
+          <a:xfrm>
+            <a:off x="0" y="960120"/>
+            <a:ext cx="12191695" cy="41148"/>
+          </a:xfrm>
+          <a:prstGeom prst="rect">
+            <a:avLst/>
+          </a:prstGeom>
+          <a:solidFill>
+            <a:srgbClr val="FFD000"/>
+          </a:solidFill>
+          <a:ln>
+            <a:noFill/>
+          </a:ln>
+        </p:spPr>
+        <p:style>
+          <a:lnRef idx="1">
+            <a:schemeClr val="accent1"/>
+          </a:lnRef>
+          <a:fillRef idx="3">
+            <a:schemeClr val="accent1"/>
+          </a:fillRef>
+          <a:effectRef idx="2">
+            <a:schemeClr val="accent1"/>
+          </a:effectRef>
+          <a:fontRef idx="minor">
+            <a:schemeClr val="lt1"/>
+          </a:fontRef>
+        </p:style>
+        <p:txBody>
+          <a:bodyPr rtlCol="0" anchor="ctr"/>
+          <a:lstStyle/>
+          <a:p>
+            <a:pPr algn="ctr"/>
+          </a:p>
+        </p:txBody>
+      </p:sp>
+      <p:sp>
+        <p:nvSpPr>
+          <p:cNvPr id="4" name="TextBox 3"/>
+          <p:cNvSpPr txBox="1"/>
+          <p:nvPr/>
+        </p:nvSpPr>
+        <p:spPr>
+          <a:xfrm>
+            <a:off x="457200" y="164592"/>
+            <a:ext cx="11277295" cy="502920"/>
+          </a:xfrm>
+          <a:prstGeom prst="rect">
+            <a:avLst/>
+          </a:prstGeom>
+          <a:noFill/>
+        </p:spPr>
+        <p:txBody>
+          <a:bodyPr wrap="square">
+            <a:spAutoFit/>
+          </a:bodyPr>
+          <a:lstStyle/>
+          <a:p>
+            <a:r>
+              <a:rPr sz="2600" b="1" i="0">
+                <a:solidFill>
+                  <a:srgbClr val="FFFFFF"/>
+                </a:solidFill>
+                <a:latin typeface="Calibri"/>
+              </a:rPr>
+              <a:t>Segundo ejemplo: por que el driver importa mas que el nivel (2/2)</a:t>
+            </a:r>
+          </a:p>
+        </p:txBody>
+      </p:sp>
+      <p:sp>
+        <p:nvSpPr>
+          <p:cNvPr id="5" name="TextBox 4"/>
+          <p:cNvSpPr txBox="1"/>
+          <p:nvPr/>
+        </p:nvSpPr>
+        <p:spPr>
+          <a:xfrm>
+            <a:off x="457200" y="1170432"/>
+            <a:ext cx="11277295" cy="5230368"/>
+          </a:xfrm>
+          <a:prstGeom prst="rect">
+            <a:avLst/>
+          </a:prstGeom>
+          <a:noFill/>
+        </p:spPr>
+        <p:txBody>
+          <a:bodyPr wrap="square">
+            <a:spAutoFit/>
+          </a:bodyPr>
+          <a:lstStyle/>
+          <a:p>
+            <a:pPr>
+              <a:spcAft>
+                <a:spcPts val="800"/>
+              </a:spcAft>
+            </a:pPr>
+            <a:r>
+              <a:rPr sz="2000" b="0" i="0">
+                <a:solidFill>
+                  <a:srgbClr val="333333"/>
+                </a:solidFill>
+                <a:latin typeface="Calibri"/>
+              </a:rPr>
+              <a:t>–   Y la mitigacion no es contable sino arquitectonica, poner una cache o una red de distribucion de contenido delante para que el mismo archivo no salga del origen veinte veces.</a:t>
+            </a:r>
+          </a:p>
+          <a:p>
+            <a:pPr>
+              <a:spcAft>
+                <a:spcPts val="800"/>
+              </a:spcAft>
+            </a:pPr>
+            <a:r>
+              <a:rPr sz="2000" b="0" i="0">
+                <a:solidFill>
+                  <a:srgbClr val="333333"/>
+                </a:solidFill>
+                <a:latin typeface="Calibri"/>
+              </a:rPr>
+              <a:t>–   Esto tambien desarma la intuicion mas comun del estudiante, que si nadie usa el sistema el sistema no cuesta.</a:t>
+            </a:r>
+          </a:p>
+          <a:p>
+            <a:pPr>
+              <a:spcAft>
+                <a:spcPts val="800"/>
+              </a:spcAft>
+            </a:pPr>
+            <a:r>
+              <a:rPr sz="2000" b="0" i="0">
+                <a:solidFill>
+                  <a:srgbClr val="333333"/>
+                </a:solidFill>
+                <a:latin typeface="Calibri"/>
+              </a:rPr>
+              <a:t>–   Hay dos familias de recursos: los que cobran por uso y los que cobran por existir.</a:t>
+            </a:r>
+          </a:p>
+          <a:p>
+            <a:pPr>
+              <a:spcAft>
+                <a:spcPts val="800"/>
+              </a:spcAft>
+            </a:pPr>
+            <a:r>
+              <a:rPr sz="2000" b="0" i="0">
+                <a:solidFill>
+                  <a:srgbClr val="333333"/>
+                </a:solidFill>
+                <a:latin typeface="Calibri"/>
+              </a:rPr>
+              <a:t>–   La base de datos gestionada, el balanceador, las IP reservadas, los volumenes huerfanos y las instantaneas viejas son de la segunda y facturan aunque el ultimo usuario se haya ido hace meses.</a:t>
+            </a:r>
+          </a:p>
+        </p:txBody>
+      </p:sp>
+      <p:sp>
+        <p:nvSpPr>
+          <p:cNvPr id="6" name="TextBox 5"/>
+          <p:cNvSpPr txBox="1"/>
+          <p:nvPr/>
+        </p:nvSpPr>
+        <p:spPr>
+          <a:xfrm>
+            <a:off x="11185855" y="6473952"/>
+            <a:ext cx="640080" cy="274320"/>
+          </a:xfrm>
+          <a:prstGeom prst="rect">
+            <a:avLst/>
+          </a:prstGeom>
+          <a:noFill/>
+        </p:spPr>
+        <p:txBody>
+          <a:bodyPr wrap="square">
+            <a:spAutoFit/>
+          </a:bodyPr>
+          <a:lstStyle/>
+          <a:p>
+            <a:pPr algn="r"/>
+            <a:r>
+              <a:rPr sz="1100" b="0" i="0">
+                <a:solidFill>
+                  <a:srgbClr val="666666"/>
+                </a:solidFill>
+                <a:latin typeface="Calibri"/>
+              </a:rPr>
+              <a:t>11</a:t>
+            </a:r>
+          </a:p>
+        </p:txBody>
+      </p:sp>
+    </p:spTree>
+  </p:cSld>
+  <p:clrMapOvr>
+    <a:masterClrMapping/>
+  </p:clrMapOvr>
+</p:sld>
+</file>
+
+<file path=ppt/slides/slide12.xml><?xml version="1.0" encoding="utf-8"?>
+<p:sld xmlns:a="http://schemas.openxmlformats.org/drawingml/2006/main" xmlns:p="http://schemas.openxmlformats.org/presentationml/2006/main" xmlns:r="http://schemas.openxmlformats.org/officeDocument/2006/relationships">
+  <p:cSld>
+    <p:bg>
+      <p:bgPr>
+        <a:solidFill>
+          <a:srgbClr val="FFFFFF"/>
+        </a:solidFill>
+        <a:effectLst/>
+      </p:bgPr>
+    </p:bg>
+    <p:spTree>
+      <p:nvGrpSpPr>
+        <p:cNvPr id="1" name=""/>
+        <p:cNvGrpSpPr/>
+        <p:nvPr/>
+      </p:nvGrpSpPr>
+      <p:grpSpPr/>
+      <p:sp>
+        <p:nvSpPr>
+          <p:cNvPr id="2" name="Rectangle 1"/>
+          <p:cNvSpPr/>
+          <p:nvPr/>
+        </p:nvSpPr>
+        <p:spPr>
+          <a:xfrm>
+            <a:off x="0" y="0"/>
+            <a:ext cx="12191695" cy="960120"/>
+          </a:xfrm>
+          <a:prstGeom prst="rect">
+            <a:avLst/>
+          </a:prstGeom>
+          <a:solidFill>
+            <a:srgbClr val="095292"/>
+          </a:solidFill>
+          <a:ln>
+            <a:noFill/>
+          </a:ln>
+        </p:spPr>
+        <p:style>
+          <a:lnRef idx="1">
+            <a:schemeClr val="accent1"/>
+          </a:lnRef>
+          <a:fillRef idx="3">
+            <a:schemeClr val="accent1"/>
+          </a:fillRef>
+          <a:effectRef idx="2">
+            <a:schemeClr val="accent1"/>
+          </a:effectRef>
+          <a:fontRef idx="minor">
+            <a:schemeClr val="lt1"/>
+          </a:fontRef>
+        </p:style>
+        <p:txBody>
+          <a:bodyPr rtlCol="0" anchor="ctr"/>
+          <a:lstStyle/>
+          <a:p>
+            <a:pPr algn="ctr"/>
+          </a:p>
+        </p:txBody>
+      </p:sp>
+      <p:sp>
+        <p:nvSpPr>
+          <p:cNvPr id="3" name="Rectangle 2"/>
+          <p:cNvSpPr/>
+          <p:nvPr/>
+        </p:nvSpPr>
+        <p:spPr>
+          <a:xfrm>
+            <a:off x="0" y="960120"/>
+            <a:ext cx="12191695" cy="41148"/>
+          </a:xfrm>
+          <a:prstGeom prst="rect">
+            <a:avLst/>
+          </a:prstGeom>
+          <a:solidFill>
+            <a:srgbClr val="FFD000"/>
+          </a:solidFill>
+          <a:ln>
+            <a:noFill/>
+          </a:ln>
+        </p:spPr>
+        <p:style>
+          <a:lnRef idx="1">
+            <a:schemeClr val="accent1"/>
+          </a:lnRef>
+          <a:fillRef idx="3">
+            <a:schemeClr val="accent1"/>
+          </a:fillRef>
+          <a:effectRef idx="2">
+            <a:schemeClr val="accent1"/>
+          </a:effectRef>
+          <a:fontRef idx="minor">
+            <a:schemeClr val="lt1"/>
+          </a:fontRef>
+        </p:style>
+        <p:txBody>
+          <a:bodyPr rtlCol="0" anchor="ctr"/>
+          <a:lstStyle/>
+          <a:p>
+            <a:pPr algn="ctr"/>
+          </a:p>
+        </p:txBody>
+      </p:sp>
+      <p:sp>
+        <p:nvSpPr>
+          <p:cNvPr id="4" name="TextBox 3"/>
+          <p:cNvSpPr txBox="1"/>
+          <p:nvPr/>
+        </p:nvSpPr>
+        <p:spPr>
+          <a:xfrm>
+            <a:off x="457200" y="164592"/>
+            <a:ext cx="11277295" cy="502920"/>
+          </a:xfrm>
+          <a:prstGeom prst="rect">
+            <a:avLst/>
+          </a:prstGeom>
+          <a:noFill/>
+        </p:spPr>
+        <p:txBody>
+          <a:bodyPr wrap="square">
+            <a:spAutoFit/>
+          </a:bodyPr>
+          <a:lstStyle/>
+          <a:p>
+            <a:r>
+              <a:rPr sz="2600" b="1" i="0">
+                <a:solidFill>
+                  <a:srgbClr val="FFFFFF"/>
+                </a:solidFill>
+                <a:latin typeface="Calibri"/>
+              </a:rPr>
+              <a:t>Right-sizing: tres acciones ancladas en observacion (1/2)</a:t>
+            </a:r>
+          </a:p>
+        </p:txBody>
+      </p:sp>
+      <p:sp>
+        <p:nvSpPr>
+          <p:cNvPr id="5" name="TextBox 4"/>
+          <p:cNvSpPr txBox="1"/>
+          <p:nvPr/>
+        </p:nvSpPr>
+        <p:spPr>
+          <a:xfrm>
+            <a:off x="457200" y="1170432"/>
+            <a:ext cx="11277295" cy="5230368"/>
+          </a:xfrm>
+          <a:prstGeom prst="rect">
+            <a:avLst/>
+          </a:prstGeom>
+          <a:noFill/>
+        </p:spPr>
+        <p:txBody>
+          <a:bodyPr wrap="square">
+            <a:spAutoFit/>
+          </a:bodyPr>
+          <a:lstStyle/>
+          <a:p>
+            <a:pPr>
+              <a:spcAft>
+                <a:spcPts val="800"/>
+              </a:spcAft>
+            </a:pPr>
+            <a:r>
+              <a:rPr sz="2000" b="0" i="0">
+                <a:solidFill>
+                  <a:srgbClr val="333333"/>
+                </a:solidFill>
+                <a:latin typeface="Calibri"/>
+              </a:rPr>
+              <a:t>–   De ahi sale el segundo bloque del entregable: tres acciones de right-sizing.</a:t>
+            </a:r>
+          </a:p>
+          <a:p>
+            <a:pPr>
+              <a:spcAft>
+                <a:spcPts val="800"/>
+              </a:spcAft>
+            </a:pPr>
+            <a:r>
+              <a:rPr sz="2000" b="0" i="0">
+                <a:solidFill>
+                  <a:srgbClr val="333333"/>
+                </a:solidFill>
+                <a:latin typeface="Calibri"/>
+              </a:rPr>
+              <a:t>–   Right-sizing es ajustar la capacidad aprovisionada a la demanda observada, y la palabra clave es observada: sin medicion es adivinanza, y la medicion viene de las senales doradas de la Clase 8, en particular la saturacion.</a:t>
+            </a:r>
+          </a:p>
+          <a:p>
+            <a:pPr>
+              <a:spcAft>
+                <a:spcPts val="800"/>
+              </a:spcAft>
+            </a:pPr>
+            <a:r>
+              <a:rPr sz="2000" b="0" i="0">
+                <a:solidFill>
+                  <a:srgbClr val="333333"/>
+                </a:solidFill>
+                <a:latin typeface="Calibri"/>
+              </a:rPr>
+              <a:t>–   La metrica que lo gobierna es la utilizacion, el porcentaje de la capacidad pagada que efectivamente se usa; una maquina al 5 por ciento de CPU durante un mes desperdicia el 95 por ciento de lo pagado.</a:t>
+            </a:r>
+          </a:p>
+          <a:p>
+            <a:pPr>
+              <a:spcAft>
+                <a:spcPts val="800"/>
+              </a:spcAft>
+            </a:pPr>
+            <a:r>
+              <a:rPr sz="2000" b="0" i="0">
+                <a:solidFill>
+                  <a:srgbClr val="333333"/>
+                </a:solidFill>
+                <a:latin typeface="Calibri"/>
+              </a:rPr>
+              <a:t>–   La convencion de industria, que es convencion y no regla, apunta a una utilizacion sostenida entre el 40 y el 70 por ciento: por debajo hay sobreaprovisionamiento y por encima no queda holgura para picos.</a:t>
+            </a:r>
+          </a:p>
+          <a:p>
+            <a:pPr>
+              <a:spcAft>
+                <a:spcPts val="800"/>
+              </a:spcAft>
+            </a:pPr>
+            <a:r>
+              <a:rPr sz="2000" b="0" i="0">
+                <a:solidFill>
+                  <a:srgbClr val="333333"/>
+                </a:solidFill>
+                <a:latin typeface="Calibri"/>
+              </a:rPr>
+              <a:t>–   La primera accion tipica es reducir tamano o numero de replicas hasta acercarse a ese rango.</a:t>
+            </a:r>
+          </a:p>
+        </p:txBody>
+      </p:sp>
+      <p:sp>
+        <p:nvSpPr>
+          <p:cNvPr id="6" name="TextBox 5"/>
+          <p:cNvSpPr txBox="1"/>
+          <p:nvPr/>
+        </p:nvSpPr>
+        <p:spPr>
+          <a:xfrm>
+            <a:off x="11185855" y="6473952"/>
+            <a:ext cx="640080" cy="274320"/>
+          </a:xfrm>
+          <a:prstGeom prst="rect">
+            <a:avLst/>
+          </a:prstGeom>
+          <a:noFill/>
+        </p:spPr>
+        <p:txBody>
+          <a:bodyPr wrap="square">
+            <a:spAutoFit/>
+          </a:bodyPr>
+          <a:lstStyle/>
+          <a:p>
+            <a:pPr algn="r"/>
+            <a:r>
+              <a:rPr sz="1100" b="0" i="0">
+                <a:solidFill>
+                  <a:srgbClr val="666666"/>
+                </a:solidFill>
+                <a:latin typeface="Calibri"/>
+              </a:rPr>
+              <a:t>12</a:t>
+            </a:r>
+          </a:p>
+        </p:txBody>
+      </p:sp>
+    </p:spTree>
+  </p:cSld>
+  <p:clrMapOvr>
+    <a:masterClrMapping/>
+  </p:clrMapOvr>
+</p:sld>
+</file>
+
+<file path=ppt/slides/slide13.xml><?xml version="1.0" encoding="utf-8"?>
+<p:sld xmlns:a="http://schemas.openxmlformats.org/drawingml/2006/main" xmlns:p="http://schemas.openxmlformats.org/presentationml/2006/main" xmlns:r="http://schemas.openxmlformats.org/officeDocument/2006/relationships">
+  <p:cSld>
+    <p:bg>
+      <p:bgPr>
+        <a:solidFill>
+          <a:srgbClr val="FFFFFF"/>
+        </a:solidFill>
+        <a:effectLst/>
+      </p:bgPr>
+    </p:bg>
+    <p:spTree>
+      <p:nvGrpSpPr>
+        <p:cNvPr id="1" name=""/>
+        <p:cNvGrpSpPr/>
+        <p:nvPr/>
+      </p:nvGrpSpPr>
+      <p:grpSpPr/>
+      <p:sp>
+        <p:nvSpPr>
+          <p:cNvPr id="2" name="Rectangle 1"/>
+          <p:cNvSpPr/>
+          <p:nvPr/>
+        </p:nvSpPr>
+        <p:spPr>
+          <a:xfrm>
+            <a:off x="0" y="0"/>
+            <a:ext cx="12191695" cy="960120"/>
+          </a:xfrm>
+          <a:prstGeom prst="rect">
+            <a:avLst/>
+          </a:prstGeom>
+          <a:solidFill>
+            <a:srgbClr val="095292"/>
+          </a:solidFill>
+          <a:ln>
+            <a:noFill/>
+          </a:ln>
+        </p:spPr>
+        <p:style>
+          <a:lnRef idx="1">
+            <a:schemeClr val="accent1"/>
+          </a:lnRef>
+          <a:fillRef idx="3">
+            <a:schemeClr val="accent1"/>
+          </a:fillRef>
+          <a:effectRef idx="2">
+            <a:schemeClr val="accent1"/>
+          </a:effectRef>
+          <a:fontRef idx="minor">
+            <a:schemeClr val="lt1"/>
+          </a:fontRef>
+        </p:style>
+        <p:txBody>
+          <a:bodyPr rtlCol="0" anchor="ctr"/>
+          <a:lstStyle/>
+          <a:p>
+            <a:pPr algn="ctr"/>
+          </a:p>
+        </p:txBody>
+      </p:sp>
+      <p:sp>
+        <p:nvSpPr>
+          <p:cNvPr id="3" name="Rectangle 2"/>
+          <p:cNvSpPr/>
+          <p:nvPr/>
+        </p:nvSpPr>
+        <p:spPr>
+          <a:xfrm>
+            <a:off x="0" y="960120"/>
+            <a:ext cx="12191695" cy="41148"/>
+          </a:xfrm>
+          <a:prstGeom prst="rect">
+            <a:avLst/>
+          </a:prstGeom>
+          <a:solidFill>
+            <a:srgbClr val="FFD000"/>
+          </a:solidFill>
+          <a:ln>
+            <a:noFill/>
+          </a:ln>
+        </p:spPr>
+        <p:style>
+          <a:lnRef idx="1">
+            <a:schemeClr val="accent1"/>
+          </a:lnRef>
+          <a:fillRef idx="3">
+            <a:schemeClr val="accent1"/>
+          </a:fillRef>
+          <a:effectRef idx="2">
+            <a:schemeClr val="accent1"/>
+          </a:effectRef>
+          <a:fontRef idx="minor">
+            <a:schemeClr val="lt1"/>
+          </a:fontRef>
+        </p:style>
+        <p:txBody>
+          <a:bodyPr rtlCol="0" anchor="ctr"/>
+          <a:lstStyle/>
+          <a:p>
+            <a:pPr algn="ctr"/>
+          </a:p>
+        </p:txBody>
+      </p:sp>
+      <p:sp>
+        <p:nvSpPr>
+          <p:cNvPr id="4" name="TextBox 3"/>
+          <p:cNvSpPr txBox="1"/>
+          <p:nvPr/>
+        </p:nvSpPr>
+        <p:spPr>
+          <a:xfrm>
+            <a:off x="457200" y="164592"/>
+            <a:ext cx="11277295" cy="502920"/>
+          </a:xfrm>
+          <a:prstGeom prst="rect">
+            <a:avLst/>
+          </a:prstGeom>
+          <a:noFill/>
+        </p:spPr>
+        <p:txBody>
+          <a:bodyPr wrap="square">
+            <a:spAutoFit/>
+          </a:bodyPr>
+          <a:lstStyle/>
+          <a:p>
+            <a:r>
+              <a:rPr sz="2600" b="1" i="0">
+                <a:solidFill>
+                  <a:srgbClr val="FFFFFF"/>
+                </a:solidFill>
+                <a:latin typeface="Calibri"/>
+              </a:rPr>
+              <a:t>Right-sizing: tres acciones ancladas en observacion (2/2)</a:t>
+            </a:r>
+          </a:p>
+        </p:txBody>
+      </p:sp>
+      <p:sp>
+        <p:nvSpPr>
+          <p:cNvPr id="5" name="TextBox 4"/>
+          <p:cNvSpPr txBox="1"/>
+          <p:nvPr/>
+        </p:nvSpPr>
+        <p:spPr>
+          <a:xfrm>
+            <a:off x="457200" y="1170432"/>
+            <a:ext cx="11277295" cy="5230368"/>
+          </a:xfrm>
+          <a:prstGeom prst="rect">
+            <a:avLst/>
+          </a:prstGeom>
+          <a:noFill/>
+        </p:spPr>
+        <p:txBody>
+          <a:bodyPr wrap="square">
+            <a:spAutoFit/>
+          </a:bodyPr>
+          <a:lstStyle/>
+          <a:p>
+            <a:pPr>
+              <a:spcAft>
+                <a:spcPts val="800"/>
+              </a:spcAft>
+            </a:pPr>
+            <a:r>
+              <a:rPr sz="2000" b="0" i="0">
+                <a:solidFill>
+                  <a:srgbClr val="333333"/>
+                </a:solidFill>
+                <a:latin typeface="Calibri"/>
+              </a:rPr>
+              <a:t>–   La segunda es apagar por horario lo que no es produccion: un ambiente encendido las 24 horas los siete dias consume 168 horas semanales, y encendido solo de 8 a 6 en dias habiles consume 50, un ahorro cercano al 70 por ciento sin tocar codigo.</a:t>
+            </a:r>
+          </a:p>
+          <a:p>
+            <a:pPr>
+              <a:spcAft>
+                <a:spcPts val="800"/>
+              </a:spcAft>
+            </a:pPr>
+            <a:r>
+              <a:rPr sz="2000" b="0" i="0">
+                <a:solidFill>
+                  <a:srgbClr val="333333"/>
+                </a:solidFill>
+                <a:latin typeface="Calibri"/>
+              </a:rPr>
+              <a:t>–   La tercera es adelgazar el artefacto, que amarra con la Clase 3: una imagen basada en python:3.12 pesa del orden de 1 GB, la variante slim unos 150 MB y una construida sobre alpine puede bajar a decenas de megabytes</a:t>
+            </a:r>
+          </a:p>
+          <a:p>
+            <a:pPr>
+              <a:spcAft>
+                <a:spcPts val="800"/>
+              </a:spcAft>
+            </a:pPr>
+            <a:r>
+              <a:rPr sz="2000" b="0" i="0">
+                <a:solidFill>
+                  <a:srgbClr val="333333"/>
+                </a:solidFill>
+                <a:latin typeface="Calibri"/>
+              </a:rPr>
+              <a:t>–   Eso es menos registro, menos transferencia en cada despliegue y menos tiempo de arranque, dato que reaparece en la Clase 13.</a:t>
+            </a:r>
+          </a:p>
+          <a:p>
+            <a:pPr>
+              <a:spcAft>
+                <a:spcPts val="800"/>
+              </a:spcAft>
+            </a:pPr>
+            <a:r>
+              <a:rPr sz="2000" b="0" i="0">
+                <a:solidFill>
+                  <a:srgbClr val="333333"/>
+                </a:solidFill>
+                <a:latin typeface="Calibri"/>
+              </a:rPr>
+              <a:t>–   Igual de validos son fijar retencion de logs a 30 dias en vez de para siempre y borrar volumenes e instantaneas sin dueno.</a:t>
+            </a:r>
+          </a:p>
+        </p:txBody>
+      </p:sp>
+      <p:sp>
+        <p:nvSpPr>
+          <p:cNvPr id="6" name="TextBox 5"/>
+          <p:cNvSpPr txBox="1"/>
+          <p:nvPr/>
+        </p:nvSpPr>
+        <p:spPr>
+          <a:xfrm>
+            <a:off x="11185855" y="6473952"/>
+            <a:ext cx="640080" cy="274320"/>
+          </a:xfrm>
+          <a:prstGeom prst="rect">
+            <a:avLst/>
+          </a:prstGeom>
+          <a:noFill/>
+        </p:spPr>
+        <p:txBody>
+          <a:bodyPr wrap="square">
+            <a:spAutoFit/>
+          </a:bodyPr>
+          <a:lstStyle/>
+          <a:p>
+            <a:pPr algn="r"/>
+            <a:r>
+              <a:rPr sz="1100" b="0" i="0">
+                <a:solidFill>
+                  <a:srgbClr val="666666"/>
+                </a:solidFill>
+                <a:latin typeface="Calibri"/>
+              </a:rPr>
+              <a:t>13</a:t>
+            </a:r>
+          </a:p>
+        </p:txBody>
+      </p:sp>
+    </p:spTree>
+  </p:cSld>
+  <p:clrMapOvr>
+    <a:masterClrMapping/>
+  </p:clrMapOvr>
+</p:sld>
+</file>
+
+<file path=ppt/slides/slide14.xml><?xml version="1.0" encoding="utf-8"?>
+<p:sld xmlns:a="http://schemas.openxmlformats.org/drawingml/2006/main" xmlns:p="http://schemas.openxmlformats.org/presentationml/2006/main" xmlns:r="http://schemas.openxmlformats.org/officeDocument/2006/relationships">
+  <p:cSld>
+    <p:bg>
+      <p:bgPr>
+        <a:solidFill>
+          <a:srgbClr val="FFFFFF"/>
+        </a:solidFill>
+        <a:effectLst/>
+      </p:bgPr>
+    </p:bg>
+    <p:spTree>
+      <p:nvGrpSpPr>
+        <p:cNvPr id="1" name=""/>
+        <p:cNvGrpSpPr/>
+        <p:nvPr/>
+      </p:nvGrpSpPr>
+      <p:grpSpPr/>
+      <p:sp>
+        <p:nvSpPr>
+          <p:cNvPr id="2" name="Rectangle 1"/>
+          <p:cNvSpPr/>
+          <p:nvPr/>
+        </p:nvSpPr>
+        <p:spPr>
+          <a:xfrm>
+            <a:off x="0" y="0"/>
+            <a:ext cx="12191695" cy="960120"/>
+          </a:xfrm>
+          <a:prstGeom prst="rect">
+            <a:avLst/>
+          </a:prstGeom>
+          <a:solidFill>
+            <a:srgbClr val="095292"/>
+          </a:solidFill>
+          <a:ln>
+            <a:noFill/>
+          </a:ln>
+        </p:spPr>
+        <p:style>
+          <a:lnRef idx="1">
+            <a:schemeClr val="accent1"/>
+          </a:lnRef>
+          <a:fillRef idx="3">
+            <a:schemeClr val="accent1"/>
+          </a:fillRef>
+          <a:effectRef idx="2">
+            <a:schemeClr val="accent1"/>
+          </a:effectRef>
+          <a:fontRef idx="minor">
+            <a:schemeClr val="lt1"/>
+          </a:fontRef>
+        </p:style>
+        <p:txBody>
+          <a:bodyPr rtlCol="0" anchor="ctr"/>
+          <a:lstStyle/>
+          <a:p>
+            <a:pPr algn="ctr"/>
+          </a:p>
+        </p:txBody>
+      </p:sp>
+      <p:sp>
+        <p:nvSpPr>
+          <p:cNvPr id="3" name="Rectangle 2"/>
+          <p:cNvSpPr/>
+          <p:nvPr/>
+        </p:nvSpPr>
+        <p:spPr>
+          <a:xfrm>
+            <a:off x="0" y="960120"/>
+            <a:ext cx="12191695" cy="41148"/>
+          </a:xfrm>
+          <a:prstGeom prst="rect">
+            <a:avLst/>
+          </a:prstGeom>
+          <a:solidFill>
+            <a:srgbClr val="FFD000"/>
+          </a:solidFill>
+          <a:ln>
+            <a:noFill/>
+          </a:ln>
+        </p:spPr>
+        <p:style>
+          <a:lnRef idx="1">
+            <a:schemeClr val="accent1"/>
+          </a:lnRef>
+          <a:fillRef idx="3">
+            <a:schemeClr val="accent1"/>
+          </a:fillRef>
+          <a:effectRef idx="2">
+            <a:schemeClr val="accent1"/>
+          </a:effectRef>
+          <a:fontRef idx="minor">
+            <a:schemeClr val="lt1"/>
+          </a:fontRef>
+        </p:style>
+        <p:txBody>
+          <a:bodyPr rtlCol="0" anchor="ctr"/>
+          <a:lstStyle/>
+          <a:p>
+            <a:pPr algn="ctr"/>
+          </a:p>
+        </p:txBody>
+      </p:sp>
+      <p:sp>
+        <p:nvSpPr>
+          <p:cNvPr id="4" name="TextBox 3"/>
+          <p:cNvSpPr txBox="1"/>
+          <p:nvPr/>
+        </p:nvSpPr>
+        <p:spPr>
+          <a:xfrm>
+            <a:off x="457200" y="164592"/>
+            <a:ext cx="11277295" cy="502920"/>
+          </a:xfrm>
+          <a:prstGeom prst="rect">
+            <a:avLst/>
+          </a:prstGeom>
+          <a:noFill/>
+        </p:spPr>
+        <p:txBody>
+          <a:bodyPr wrap="square">
+            <a:spAutoFit/>
+          </a:bodyPr>
+          <a:lstStyle/>
+          <a:p>
+            <a:r>
+              <a:rPr sz="2600" b="1" i="0">
+                <a:solidFill>
+                  <a:srgbClr val="FFFFFF"/>
+                </a:solidFill>
+                <a:latin typeface="Calibri"/>
+              </a:rPr>
+              <a:t>Sostenibilidad tecnica antes que ambiental</a:t>
+            </a:r>
+          </a:p>
+        </p:txBody>
+      </p:sp>
+      <p:sp>
+        <p:nvSpPr>
+          <p:cNvPr id="5" name="TextBox 4"/>
+          <p:cNvSpPr txBox="1"/>
+          <p:nvPr/>
+        </p:nvSpPr>
+        <p:spPr>
+          <a:xfrm>
+            <a:off x="457200" y="1170432"/>
+            <a:ext cx="11277295" cy="5230368"/>
+          </a:xfrm>
+          <a:prstGeom prst="rect">
+            <a:avLst/>
+          </a:prstGeom>
+          <a:noFill/>
+        </p:spPr>
+        <p:txBody>
+          <a:bodyPr wrap="square">
+            <a:spAutoFit/>
+          </a:bodyPr>
+          <a:lstStyle/>
+          <a:p>
+            <a:pPr>
+              <a:spcAft>
+                <a:spcPts val="800"/>
+              </a:spcAft>
+            </a:pPr>
+            <a:r>
+              <a:rPr sz="2000" b="0" i="0">
+                <a:solidFill>
+                  <a:srgbClr val="333333"/>
+                </a:solidFill>
+                <a:latin typeface="Calibri"/>
+              </a:rPr>
+              <a:t>–   La sostenibilidad en este curso es tecnica antes que ambiental, y conviene decirlo asi para no caer en discurso vacio.</a:t>
+            </a:r>
+          </a:p>
+          <a:p>
+            <a:pPr>
+              <a:spcAft>
+                <a:spcPts val="800"/>
+              </a:spcAft>
+            </a:pPr>
+            <a:r>
+              <a:rPr sz="2000" b="0" i="0">
+                <a:solidFill>
+                  <a:srgbClr val="333333"/>
+                </a:solidFill>
+                <a:latin typeface="Calibri"/>
+              </a:rPr>
+              <a:t>–   La energia que consume un servidor depende sobre todo de la capacidad encendida, no de la usada: una maquina al 5 por ciento no consume el 5 por ciento de la energia, consume mucho mas</a:t>
+            </a:r>
+          </a:p>
+          <a:p>
+            <a:pPr>
+              <a:spcAft>
+                <a:spcPts val="800"/>
+              </a:spcAft>
+            </a:pPr>
+            <a:r>
+              <a:rPr sz="2000" b="0" i="0">
+                <a:solidFill>
+                  <a:srgbClr val="333333"/>
+                </a:solidFill>
+                <a:latin typeface="Calibri"/>
+              </a:rPr>
+              <a:t>–   Porque el consumo en reposo de un servidor moderno ronda la mitad del consumo a plena carga.</a:t>
+            </a:r>
+          </a:p>
+          <a:p>
+            <a:pPr>
+              <a:spcAft>
+                <a:spcPts val="800"/>
+              </a:spcAft>
+            </a:pPr>
+            <a:r>
+              <a:rPr sz="2000" b="0" i="0">
+                <a:solidFill>
+                  <a:srgbClr val="333333"/>
+                </a:solidFill>
+                <a:latin typeface="Calibri"/>
+              </a:rPr>
+              <a:t>–   Por eso las mismas tres acciones sirven a la vez para la factura y para la huella.</a:t>
+            </a:r>
+          </a:p>
+          <a:p>
+            <a:pPr>
+              <a:spcAft>
+                <a:spcPts val="800"/>
+              </a:spcAft>
+            </a:pPr>
+            <a:r>
+              <a:rPr sz="2000" b="0" i="0">
+                <a:solidFill>
+                  <a:srgbClr val="333333"/>
+                </a:solidFill>
+                <a:latin typeface="Calibri"/>
+              </a:rPr>
+              <a:t>–   Hay ademas una decision de arquitectura con efecto directo: la intensidad de carbono de la electricidad varia fuerte entre regiones, asi que elegir region no es solo latencia y cumplimiento normativo.</a:t>
+            </a:r>
+          </a:p>
+          <a:p>
+            <a:pPr>
+              <a:spcAft>
+                <a:spcPts val="800"/>
+              </a:spcAft>
+            </a:pPr>
+            <a:r>
+              <a:rPr sz="2000" b="0" i="0">
+                <a:solidFill>
+                  <a:srgbClr val="333333"/>
+                </a:solidFill>
+                <a:latin typeface="Calibri"/>
+              </a:rPr>
+              <a:t>–   Y hay una tercera cara que el estudiante ignora: el costo humano de mantener el diseno.</a:t>
+            </a:r>
+          </a:p>
+          <a:p>
+            <a:pPr>
+              <a:spcAft>
+                <a:spcPts val="800"/>
+              </a:spcAft>
+            </a:pPr>
+            <a:r>
+              <a:rPr sz="2000" b="0" i="0">
+                <a:solidFill>
+                  <a:srgbClr val="333333"/>
+                </a:solidFill>
+                <a:latin typeface="Calibri"/>
+              </a:rPr>
+              <a:t>–   Una arquitectura de ocho servicios que un equipo de tres personas no puede operar es insostenible aunque la infraestructura sea gratis.</a:t>
+            </a:r>
+          </a:p>
+        </p:txBody>
+      </p:sp>
+      <p:sp>
+        <p:nvSpPr>
+          <p:cNvPr id="6" name="TextBox 5"/>
+          <p:cNvSpPr txBox="1"/>
+          <p:nvPr/>
+        </p:nvSpPr>
+        <p:spPr>
+          <a:xfrm>
+            <a:off x="11185855" y="6473952"/>
+            <a:ext cx="640080" cy="274320"/>
+          </a:xfrm>
+          <a:prstGeom prst="rect">
+            <a:avLst/>
+          </a:prstGeom>
+          <a:noFill/>
+        </p:spPr>
+        <p:txBody>
+          <a:bodyPr wrap="square">
+            <a:spAutoFit/>
+          </a:bodyPr>
+          <a:lstStyle/>
+          <a:p>
+            <a:pPr algn="r"/>
+            <a:r>
+              <a:rPr sz="1100" b="0" i="0">
+                <a:solidFill>
+                  <a:srgbClr val="666666"/>
+                </a:solidFill>
+                <a:latin typeface="Calibri"/>
+              </a:rPr>
+              <a:t>14</a:t>
+            </a:r>
+          </a:p>
+        </p:txBody>
+      </p:sp>
+    </p:spTree>
+  </p:cSld>
+  <p:clrMapOvr>
+    <a:masterClrMapping/>
+  </p:clrMapOvr>
+</p:sld>
+</file>
+
+<file path=ppt/slides/slide15.xml><?xml version="1.0" encoding="utf-8"?>
+<p:sld xmlns:a="http://schemas.openxmlformats.org/drawingml/2006/main" xmlns:p="http://schemas.openxmlformats.org/presentationml/2006/main" xmlns:r="http://schemas.openxmlformats.org/officeDocument/2006/relationships">
+  <p:cSld>
+    <p:bg>
+      <p:bgPr>
+        <a:solidFill>
+          <a:srgbClr val="FFFFFF"/>
+        </a:solidFill>
+        <a:effectLst/>
+      </p:bgPr>
+    </p:bg>
+    <p:spTree>
+      <p:nvGrpSpPr>
+        <p:cNvPr id="1" name=""/>
+        <p:cNvGrpSpPr/>
+        <p:nvPr/>
+      </p:nvGrpSpPr>
+      <p:grpSpPr/>
+      <p:sp>
+        <p:nvSpPr>
+          <p:cNvPr id="2" name="Rectangle 1"/>
+          <p:cNvSpPr/>
+          <p:nvPr/>
+        </p:nvSpPr>
+        <p:spPr>
+          <a:xfrm>
+            <a:off x="0" y="0"/>
+            <a:ext cx="12191695" cy="960120"/>
+          </a:xfrm>
+          <a:prstGeom prst="rect">
+            <a:avLst/>
+          </a:prstGeom>
+          <a:solidFill>
+            <a:srgbClr val="095292"/>
+          </a:solidFill>
+          <a:ln>
+            <a:noFill/>
+          </a:ln>
+        </p:spPr>
+        <p:style>
+          <a:lnRef idx="1">
+            <a:schemeClr val="accent1"/>
+          </a:lnRef>
+          <a:fillRef idx="3">
+            <a:schemeClr val="accent1"/>
+          </a:fillRef>
+          <a:effectRef idx="2">
+            <a:schemeClr val="accent1"/>
+          </a:effectRef>
+          <a:fontRef idx="minor">
+            <a:schemeClr val="lt1"/>
+          </a:fontRef>
+        </p:style>
+        <p:txBody>
+          <a:bodyPr rtlCol="0" anchor="ctr"/>
+          <a:lstStyle/>
+          <a:p>
+            <a:pPr algn="ctr"/>
+          </a:p>
+        </p:txBody>
+      </p:sp>
+      <p:sp>
+        <p:nvSpPr>
+          <p:cNvPr id="3" name="Rectangle 2"/>
+          <p:cNvSpPr/>
+          <p:nvPr/>
+        </p:nvSpPr>
+        <p:spPr>
+          <a:xfrm>
+            <a:off x="0" y="960120"/>
+            <a:ext cx="12191695" cy="41148"/>
+          </a:xfrm>
+          <a:prstGeom prst="rect">
+            <a:avLst/>
+          </a:prstGeom>
+          <a:solidFill>
+            <a:srgbClr val="FFD000"/>
+          </a:solidFill>
+          <a:ln>
+            <a:noFill/>
+          </a:ln>
+        </p:spPr>
+        <p:style>
+          <a:lnRef idx="1">
+            <a:schemeClr val="accent1"/>
+          </a:lnRef>
+          <a:fillRef idx="3">
+            <a:schemeClr val="accent1"/>
+          </a:fillRef>
+          <a:effectRef idx="2">
+            <a:schemeClr val="accent1"/>
+          </a:effectRef>
+          <a:fontRef idx="minor">
+            <a:schemeClr val="lt1"/>
+          </a:fontRef>
+        </p:style>
+        <p:txBody>
+          <a:bodyPr rtlCol="0" anchor="ctr"/>
+          <a:lstStyle/>
+          <a:p>
+            <a:pPr algn="ctr"/>
+          </a:p>
+        </p:txBody>
+      </p:sp>
+      <p:sp>
+        <p:nvSpPr>
+          <p:cNvPr id="4" name="TextBox 3"/>
+          <p:cNvSpPr txBox="1"/>
+          <p:nvPr/>
+        </p:nvSpPr>
+        <p:spPr>
+          <a:xfrm>
+            <a:off x="457200" y="164592"/>
+            <a:ext cx="11277295" cy="502920"/>
+          </a:xfrm>
+          <a:prstGeom prst="rect">
+            <a:avLst/>
+          </a:prstGeom>
+          <a:noFill/>
+        </p:spPr>
+        <p:txBody>
+          <a:bodyPr wrap="square">
+            <a:spAutoFit/>
+          </a:bodyPr>
+          <a:lstStyle/>
+          <a:p>
+            <a:r>
+              <a:rPr sz="2600" b="1" i="0">
+                <a:solidFill>
+                  <a:srgbClr val="FFFFFF"/>
+                </a:solidFill>
+                <a:latin typeface="Calibri"/>
+              </a:rPr>
+              <a:t>Preguntas frecuentes y cierre conceptual () (1/3)</a:t>
+            </a:r>
+          </a:p>
+        </p:txBody>
+      </p:sp>
+      <p:sp>
+        <p:nvSpPr>
+          <p:cNvPr id="5" name="TextBox 4"/>
+          <p:cNvSpPr txBox="1"/>
+          <p:nvPr/>
+        </p:nvSpPr>
+        <p:spPr>
+          <a:xfrm>
+            <a:off x="457200" y="1170432"/>
+            <a:ext cx="11277295" cy="5230368"/>
+          </a:xfrm>
+          <a:prstGeom prst="rect">
+            <a:avLst/>
+          </a:prstGeom>
+          <a:noFill/>
+        </p:spPr>
+        <p:txBody>
+          <a:bodyPr wrap="square">
+            <a:spAutoFit/>
+          </a:bodyPr>
+          <a:lstStyle/>
+          <a:p>
+            <a:pPr>
+              <a:spcAft>
+                <a:spcPts val="800"/>
+              </a:spcAft>
+            </a:pPr>
+            <a:r>
+              <a:rPr sz="2000" b="0" i="0">
+                <a:solidFill>
+                  <a:srgbClr val="333333"/>
+                </a:solidFill>
+                <a:latin typeface="Calibri"/>
+              </a:rPr>
+              <a:t>–   La primera es si tiene sentido estimar costos cuando nadie va a pagar nada; la respuesta es que la estimacion no cambia la factura, cambia el diseno, y que en un trabajo real la segunda pregunta despues de "funciona" es "cuanto cuesta al mes".</a:t>
+            </a:r>
+          </a:p>
+          <a:p>
+            <a:pPr>
+              <a:spcAft>
+                <a:spcPts val="800"/>
+              </a:spcAft>
+            </a:pPr>
+            <a:r>
+              <a:rPr sz="2000" b="0" i="0">
+                <a:solidFill>
+                  <a:srgbClr val="333333"/>
+                </a:solidFill>
+                <a:latin typeface="Calibri"/>
+              </a:rPr>
+              <a:t>–   Ademas el costo es un atributo de calidad como la latencia, de los enumerados en la Clase 1, y compite con los demas: el objetivo de p95 que se definira en la Clase 12 casi siempre se compra con dinero.</a:t>
+            </a:r>
+          </a:p>
+          <a:p>
+            <a:pPr>
+              <a:spcAft>
+                <a:spcPts val="800"/>
+              </a:spcAft>
+            </a:pPr>
+            <a:r>
+              <a:rPr sz="2000" b="0" i="0">
+                <a:solidFill>
+                  <a:srgbClr val="333333"/>
+                </a:solidFill>
+                <a:latin typeface="Calibri"/>
+              </a:rPr>
+              <a:t>–   La segunda es si entonces lo mas barato es siempre lo mejor, y la respuesta es no</a:t>
+            </a:r>
+          </a:p>
+          <a:p>
+            <a:pPr>
+              <a:spcAft>
+                <a:spcPts val="800"/>
+              </a:spcAft>
+            </a:pPr>
+            <a:r>
+              <a:rPr sz="2000" b="0" i="0">
+                <a:solidFill>
+                  <a:srgbClr val="333333"/>
+                </a:solidFill>
+                <a:latin typeface="Calibri"/>
+              </a:rPr>
+              <a:t>–   Porque lo mas barato suele mover el costo hacia la operacion humana; el concepto a nombrar es costo total de propiedad, que suma infraestructura mas operacion mas incidentes mas migraciones</a:t>
+            </a:r>
+          </a:p>
+          <a:p>
+            <a:pPr>
+              <a:spcAft>
+                <a:spcPts val="800"/>
+              </a:spcAft>
+            </a:pPr>
+            <a:r>
+              <a:rPr sz="2000" b="0" i="0">
+                <a:solidFill>
+                  <a:srgbClr val="333333"/>
+                </a:solidFill>
+                <a:latin typeface="Calibri"/>
+              </a:rPr>
+              <a:t>–   Y bajo esa lente una base de datos autoadministrada en una maquina desnuda es mas barata al mes y mas cara al ano cuando alguien debe parcharla, respaldarla y atender su caida a las tres de la manana.</a:t>
+            </a:r>
+          </a:p>
+        </p:txBody>
+      </p:sp>
+      <p:sp>
+        <p:nvSpPr>
+          <p:cNvPr id="6" name="TextBox 5"/>
+          <p:cNvSpPr txBox="1"/>
+          <p:nvPr/>
+        </p:nvSpPr>
+        <p:spPr>
+          <a:xfrm>
+            <a:off x="11185855" y="6473952"/>
+            <a:ext cx="640080" cy="274320"/>
+          </a:xfrm>
+          <a:prstGeom prst="rect">
+            <a:avLst/>
+          </a:prstGeom>
+          <a:noFill/>
+        </p:spPr>
+        <p:txBody>
+          <a:bodyPr wrap="square">
+            <a:spAutoFit/>
+          </a:bodyPr>
+          <a:lstStyle/>
+          <a:p>
+            <a:pPr algn="r"/>
+            <a:r>
+              <a:rPr sz="1100" b="0" i="0">
+                <a:solidFill>
+                  <a:srgbClr val="666666"/>
+                </a:solidFill>
+                <a:latin typeface="Calibri"/>
+              </a:rPr>
+              <a:t>15</a:t>
+            </a:r>
+          </a:p>
+        </p:txBody>
+      </p:sp>
+    </p:spTree>
+  </p:cSld>
+  <p:clrMapOvr>
+    <a:masterClrMapping/>
+  </p:clrMapOvr>
+</p:sld>
+</file>
+
+<file path=ppt/slides/slide16.xml><?xml version="1.0" encoding="utf-8"?>
+<p:sld xmlns:a="http://schemas.openxmlformats.org/drawingml/2006/main" xmlns:p="http://schemas.openxmlformats.org/presentationml/2006/main" xmlns:r="http://schemas.openxmlformats.org/officeDocument/2006/relationships">
+  <p:cSld>
+    <p:bg>
+      <p:bgPr>
+        <a:solidFill>
+          <a:srgbClr val="FFFFFF"/>
+        </a:solidFill>
+        <a:effectLst/>
+      </p:bgPr>
+    </p:bg>
+    <p:spTree>
+      <p:nvGrpSpPr>
+        <p:cNvPr id="1" name=""/>
+        <p:cNvGrpSpPr/>
+        <p:nvPr/>
+      </p:nvGrpSpPr>
+      <p:grpSpPr/>
+      <p:sp>
+        <p:nvSpPr>
+          <p:cNvPr id="2" name="Rectangle 1"/>
+          <p:cNvSpPr/>
+          <p:nvPr/>
+        </p:nvSpPr>
+        <p:spPr>
+          <a:xfrm>
+            <a:off x="0" y="0"/>
+            <a:ext cx="12191695" cy="960120"/>
+          </a:xfrm>
+          <a:prstGeom prst="rect">
+            <a:avLst/>
+          </a:prstGeom>
+          <a:solidFill>
+            <a:srgbClr val="095292"/>
+          </a:solidFill>
+          <a:ln>
+            <a:noFill/>
+          </a:ln>
+        </p:spPr>
+        <p:style>
+          <a:lnRef idx="1">
+            <a:schemeClr val="accent1"/>
+          </a:lnRef>
+          <a:fillRef idx="3">
+            <a:schemeClr val="accent1"/>
+          </a:fillRef>
+          <a:effectRef idx="2">
+            <a:schemeClr val="accent1"/>
+          </a:effectRef>
+          <a:fontRef idx="minor">
+            <a:schemeClr val="lt1"/>
+          </a:fontRef>
+        </p:style>
+        <p:txBody>
+          <a:bodyPr rtlCol="0" anchor="ctr"/>
+          <a:lstStyle/>
+          <a:p>
+            <a:pPr algn="ctr"/>
+          </a:p>
+        </p:txBody>
+      </p:sp>
+      <p:sp>
+        <p:nvSpPr>
+          <p:cNvPr id="3" name="Rectangle 2"/>
+          <p:cNvSpPr/>
+          <p:nvPr/>
+        </p:nvSpPr>
+        <p:spPr>
+          <a:xfrm>
+            <a:off x="0" y="960120"/>
+            <a:ext cx="12191695" cy="41148"/>
+          </a:xfrm>
+          <a:prstGeom prst="rect">
+            <a:avLst/>
+          </a:prstGeom>
+          <a:solidFill>
+            <a:srgbClr val="FFD000"/>
+          </a:solidFill>
+          <a:ln>
+            <a:noFill/>
+          </a:ln>
+        </p:spPr>
+        <p:style>
+          <a:lnRef idx="1">
+            <a:schemeClr val="accent1"/>
+          </a:lnRef>
+          <a:fillRef idx="3">
+            <a:schemeClr val="accent1"/>
+          </a:fillRef>
+          <a:effectRef idx="2">
+            <a:schemeClr val="accent1"/>
+          </a:effectRef>
+          <a:fontRef idx="minor">
+            <a:schemeClr val="lt1"/>
+          </a:fontRef>
+        </p:style>
+        <p:txBody>
+          <a:bodyPr rtlCol="0" anchor="ctr"/>
+          <a:lstStyle/>
+          <a:p>
+            <a:pPr algn="ctr"/>
+          </a:p>
+        </p:txBody>
+      </p:sp>
+      <p:sp>
+        <p:nvSpPr>
+          <p:cNvPr id="4" name="TextBox 3"/>
+          <p:cNvSpPr txBox="1"/>
+          <p:nvPr/>
+        </p:nvSpPr>
+        <p:spPr>
+          <a:xfrm>
+            <a:off x="457200" y="164592"/>
+            <a:ext cx="11277295" cy="502920"/>
+          </a:xfrm>
+          <a:prstGeom prst="rect">
+            <a:avLst/>
+          </a:prstGeom>
+          <a:noFill/>
+        </p:spPr>
+        <p:txBody>
+          <a:bodyPr wrap="square">
+            <a:spAutoFit/>
+          </a:bodyPr>
+          <a:lstStyle/>
+          <a:p>
+            <a:r>
+              <a:rPr sz="2600" b="1" i="0">
+                <a:solidFill>
+                  <a:srgbClr val="FFFFFF"/>
+                </a:solidFill>
+                <a:latin typeface="Calibri"/>
+              </a:rPr>
+              <a:t>Preguntas frecuentes y cierre conceptual () (2/3)</a:t>
+            </a:r>
+          </a:p>
+        </p:txBody>
+      </p:sp>
+      <p:sp>
+        <p:nvSpPr>
+          <p:cNvPr id="5" name="TextBox 4"/>
+          <p:cNvSpPr txBox="1"/>
+          <p:nvPr/>
+        </p:nvSpPr>
+        <p:spPr>
+          <a:xfrm>
+            <a:off x="457200" y="1170432"/>
+            <a:ext cx="11277295" cy="5230368"/>
+          </a:xfrm>
+          <a:prstGeom prst="rect">
+            <a:avLst/>
+          </a:prstGeom>
+          <a:noFill/>
+        </p:spPr>
+        <p:txBody>
+          <a:bodyPr wrap="square">
+            <a:spAutoFit/>
+          </a:bodyPr>
+          <a:lstStyle/>
+          <a:p>
+            <a:pPr>
+              <a:spcAft>
+                <a:spcPts val="800"/>
+              </a:spcAft>
+            </a:pPr>
+            <a:r>
+              <a:rPr sz="2000" b="0" i="0">
+                <a:solidFill>
+                  <a:srgbClr val="333333"/>
+                </a:solidFill>
+                <a:latin typeface="Calibri"/>
+              </a:rPr>
+              <a:t>–   La tercera es como asignar los niveles sin factura: se asignan comparando componentes entre si con el driver como argumento y escribiendo el supuesto</a:t>
+            </a:r>
+          </a:p>
+          <a:p>
+            <a:pPr>
+              <a:spcAft>
+                <a:spcPts val="800"/>
+              </a:spcAft>
+            </a:pPr>
+            <a:r>
+              <a:rPr sz="2000" b="0" i="0">
+                <a:solidFill>
+                  <a:srgbClr val="333333"/>
+                </a:solidFill>
+                <a:latin typeface="Calibri"/>
+              </a:rPr>
+              <a:t>–   "Alto porque es computo 24/7 mas almacenamiento acumulativo mas respaldos" es defendible, "Alto porque suena caro" no.</a:t>
+            </a:r>
+          </a:p>
+          <a:p>
+            <a:pPr>
+              <a:spcAft>
+                <a:spcPts val="800"/>
+              </a:spcAft>
+            </a:pPr>
+            <a:r>
+              <a:rPr sz="2000" b="0" i="0">
+                <a:solidFill>
+                  <a:srgbClr val="333333"/>
+                </a:solidFill>
+                <a:latin typeface="Calibri"/>
+              </a:rPr>
+              <a:t>–   Error tipico del docente que no domina el tema: tratar el costo como asunto "de negocio, no tecnico" y despacharlo en cinco minutos.</a:t>
+            </a:r>
+          </a:p>
+          <a:p>
+            <a:pPr>
+              <a:spcAft>
+                <a:spcPts val="800"/>
+              </a:spcAft>
+            </a:pPr>
+            <a:r>
+              <a:rPr sz="2000" b="0" i="0">
+                <a:solidFill>
+                  <a:srgbClr val="333333"/>
+                </a:solidFill>
+                <a:latin typeface="Calibri"/>
+              </a:rPr>
+              <a:t>–   Las decisiones que mas mueven la factura son decisiones de arquitectura, tomadas por quien dibuja el diagrama: gestionado o autoadministrado, con cache o sin cache, sincronico o con cola, replicas fijas o autoescalado.</a:t>
+            </a:r>
+          </a:p>
+          <a:p>
+            <a:pPr>
+              <a:spcAft>
+                <a:spcPts val="800"/>
+              </a:spcAft>
+            </a:pPr>
+            <a:r>
+              <a:rPr sz="2000" b="0" i="0">
+                <a:solidFill>
+                  <a:srgbClr val="333333"/>
+                </a:solidFill>
+                <a:latin typeface="Calibri"/>
+              </a:rPr>
+              <a:t>–   Si esta clase se salta, la consecuencia aparece dos clases despues: en la Clase 13 los estudiantes escriben politicas de autoescalado sin limite superior</a:t>
+            </a:r>
+          </a:p>
+          <a:p>
+            <a:pPr>
+              <a:spcAft>
+                <a:spcPts val="800"/>
+              </a:spcAft>
+            </a:pPr>
+            <a:r>
+              <a:rPr sz="2000" b="0" i="0">
+                <a:solidFill>
+                  <a:srgbClr val="333333"/>
+                </a:solidFill>
+                <a:latin typeface="Calibri"/>
+              </a:rPr>
+              <a:t>–   En la Clase 15 defienden arquitecturas que nadie podria pagar y en el Parcial 3 responden la pregunta de drivers con generalidades sobre "optimizar recursos".</a:t>
+            </a:r>
+          </a:p>
+        </p:txBody>
+      </p:sp>
+      <p:sp>
+        <p:nvSpPr>
+          <p:cNvPr id="6" name="TextBox 5"/>
+          <p:cNvSpPr txBox="1"/>
+          <p:nvPr/>
+        </p:nvSpPr>
+        <p:spPr>
+          <a:xfrm>
+            <a:off x="11185855" y="6473952"/>
+            <a:ext cx="640080" cy="274320"/>
+          </a:xfrm>
+          <a:prstGeom prst="rect">
+            <a:avLst/>
+          </a:prstGeom>
+          <a:noFill/>
+        </p:spPr>
+        <p:txBody>
+          <a:bodyPr wrap="square">
+            <a:spAutoFit/>
+          </a:bodyPr>
+          <a:lstStyle/>
+          <a:p>
+            <a:pPr algn="r"/>
+            <a:r>
+              <a:rPr sz="1100" b="0" i="0">
+                <a:solidFill>
+                  <a:srgbClr val="666666"/>
+                </a:solidFill>
+                <a:latin typeface="Calibri"/>
+              </a:rPr>
+              <a:t>16</a:t>
+            </a:r>
+          </a:p>
+        </p:txBody>
+      </p:sp>
+    </p:spTree>
+  </p:cSld>
+  <p:clrMapOvr>
+    <a:masterClrMapping/>
+  </p:clrMapOvr>
+</p:sld>
+</file>
+
+<file path=ppt/slides/slide17.xml><?xml version="1.0" encoding="utf-8"?>
+<p:sld xmlns:a="http://schemas.openxmlformats.org/drawingml/2006/main" xmlns:p="http://schemas.openxmlformats.org/presentationml/2006/main" xmlns:r="http://schemas.openxmlformats.org/officeDocument/2006/relationships">
+  <p:cSld>
+    <p:bg>
+      <p:bgPr>
+        <a:solidFill>
+          <a:srgbClr val="FFFFFF"/>
+        </a:solidFill>
+        <a:effectLst/>
+      </p:bgPr>
+    </p:bg>
+    <p:spTree>
+      <p:nvGrpSpPr>
+        <p:cNvPr id="1" name=""/>
+        <p:cNvGrpSpPr/>
+        <p:nvPr/>
+      </p:nvGrpSpPr>
+      <p:grpSpPr/>
+      <p:sp>
+        <p:nvSpPr>
+          <p:cNvPr id="2" name="Rectangle 1"/>
+          <p:cNvSpPr/>
+          <p:nvPr/>
+        </p:nvSpPr>
+        <p:spPr>
+          <a:xfrm>
+            <a:off x="0" y="0"/>
+            <a:ext cx="12191695" cy="960120"/>
+          </a:xfrm>
+          <a:prstGeom prst="rect">
+            <a:avLst/>
+          </a:prstGeom>
+          <a:solidFill>
+            <a:srgbClr val="095292"/>
+          </a:solidFill>
+          <a:ln>
+            <a:noFill/>
+          </a:ln>
+        </p:spPr>
+        <p:style>
+          <a:lnRef idx="1">
+            <a:schemeClr val="accent1"/>
+          </a:lnRef>
+          <a:fillRef idx="3">
+            <a:schemeClr val="accent1"/>
+          </a:fillRef>
+          <a:effectRef idx="2">
+            <a:schemeClr val="accent1"/>
+          </a:effectRef>
+          <a:fontRef idx="minor">
+            <a:schemeClr val="lt1"/>
+          </a:fontRef>
+        </p:style>
+        <p:txBody>
+          <a:bodyPr rtlCol="0" anchor="ctr"/>
+          <a:lstStyle/>
+          <a:p>
+            <a:pPr algn="ctr"/>
+          </a:p>
+        </p:txBody>
+      </p:sp>
+      <p:sp>
+        <p:nvSpPr>
+          <p:cNvPr id="3" name="Rectangle 2"/>
+          <p:cNvSpPr/>
+          <p:nvPr/>
+        </p:nvSpPr>
+        <p:spPr>
+          <a:xfrm>
+            <a:off x="0" y="960120"/>
+            <a:ext cx="12191695" cy="41148"/>
+          </a:xfrm>
+          <a:prstGeom prst="rect">
+            <a:avLst/>
+          </a:prstGeom>
+          <a:solidFill>
+            <a:srgbClr val="FFD000"/>
+          </a:solidFill>
+          <a:ln>
+            <a:noFill/>
+          </a:ln>
+        </p:spPr>
+        <p:style>
+          <a:lnRef idx="1">
+            <a:schemeClr val="accent1"/>
+          </a:lnRef>
+          <a:fillRef idx="3">
+            <a:schemeClr val="accent1"/>
+          </a:fillRef>
+          <a:effectRef idx="2">
+            <a:schemeClr val="accent1"/>
+          </a:effectRef>
+          <a:fontRef idx="minor">
+            <a:schemeClr val="lt1"/>
+          </a:fontRef>
+        </p:style>
+        <p:txBody>
+          <a:bodyPr rtlCol="0" anchor="ctr"/>
+          <a:lstStyle/>
+          <a:p>
+            <a:pPr algn="ctr"/>
+          </a:p>
+        </p:txBody>
+      </p:sp>
+      <p:sp>
+        <p:nvSpPr>
+          <p:cNvPr id="4" name="TextBox 3"/>
+          <p:cNvSpPr txBox="1"/>
+          <p:nvPr/>
+        </p:nvSpPr>
+        <p:spPr>
+          <a:xfrm>
+            <a:off x="457200" y="164592"/>
+            <a:ext cx="11277295" cy="502920"/>
+          </a:xfrm>
+          <a:prstGeom prst="rect">
+            <a:avLst/>
+          </a:prstGeom>
+          <a:noFill/>
+        </p:spPr>
+        <p:txBody>
+          <a:bodyPr wrap="square">
+            <a:spAutoFit/>
+          </a:bodyPr>
+          <a:lstStyle/>
+          <a:p>
+            <a:r>
+              <a:rPr sz="2600" b="1" i="0">
+                <a:solidFill>
+                  <a:srgbClr val="FFFFFF"/>
+                </a:solidFill>
+                <a:latin typeface="Calibri"/>
+              </a:rPr>
+              <a:t>Preguntas frecuentes y cierre conceptual () (3/3)</a:t>
+            </a:r>
+          </a:p>
+        </p:txBody>
+      </p:sp>
+      <p:sp>
+        <p:nvSpPr>
+          <p:cNvPr id="5" name="TextBox 4"/>
+          <p:cNvSpPr txBox="1"/>
+          <p:nvPr/>
+        </p:nvSpPr>
+        <p:spPr>
+          <a:xfrm>
+            <a:off x="457200" y="1170432"/>
+            <a:ext cx="11277295" cy="5230368"/>
+          </a:xfrm>
+          <a:prstGeom prst="rect">
+            <a:avLst/>
+          </a:prstGeom>
+          <a:noFill/>
+        </p:spPr>
+        <p:txBody>
+          <a:bodyPr wrap="square">
+            <a:spAutoFit/>
+          </a:bodyPr>
+          <a:lstStyle/>
+          <a:p>
+            <a:pPr>
+              <a:spcAft>
+                <a:spcPts val="800"/>
+              </a:spcAft>
+            </a:pPr>
+            <a:r>
+              <a:rPr sz="2000" b="0" i="0">
+                <a:solidFill>
+                  <a:srgbClr val="333333"/>
+                </a:solidFill>
+                <a:latin typeface="Calibri"/>
+              </a:rPr>
+              <a:t>–   El segundo error es el opuesto e igual de danino: exigir cifras exactas en dolares.</a:t>
+            </a:r>
+          </a:p>
+          <a:p>
+            <a:pPr>
+              <a:spcAft>
+                <a:spcPts val="800"/>
+              </a:spcAft>
+            </a:pPr>
+            <a:r>
+              <a:rPr sz="2000" b="0" i="0">
+                <a:solidFill>
+                  <a:srgbClr val="333333"/>
+                </a:solidFill>
+                <a:latin typeface="Calibri"/>
+              </a:rPr>
+              <a:t>–   Con eso la clase se vuelve una caceria de calculadoras de precios, el estudiante copia numeros que no entiende y las acciones de right-sizing quedan cosmeticas.</a:t>
+            </a:r>
+          </a:p>
+          <a:p>
+            <a:pPr>
+              <a:spcAft>
+                <a:spcPts val="800"/>
+              </a:spcAft>
+            </a:pPr>
+            <a:r>
+              <a:rPr sz="2000" b="0" i="0">
+                <a:solidFill>
+                  <a:srgbClr val="333333"/>
+                </a:solidFill>
+                <a:latin typeface="Calibri"/>
+              </a:rPr>
+              <a:t>–   El criterio de aprobacion no es la precision del numero sino que cada componente tenga driver nombrado y que cada accion sea verificable: "reducir a una replica el worker de notificaciones y usar imagen slim" se puede revisar, "optimizar el codigo" no.</a:t>
+            </a:r>
+          </a:p>
+        </p:txBody>
+      </p:sp>
+      <p:sp>
+        <p:nvSpPr>
+          <p:cNvPr id="6" name="TextBox 5"/>
+          <p:cNvSpPr txBox="1"/>
+          <p:nvPr/>
+        </p:nvSpPr>
+        <p:spPr>
+          <a:xfrm>
+            <a:off x="11185855" y="6473952"/>
+            <a:ext cx="640080" cy="274320"/>
+          </a:xfrm>
+          <a:prstGeom prst="rect">
+            <a:avLst/>
+          </a:prstGeom>
+          <a:noFill/>
+        </p:spPr>
+        <p:txBody>
+          <a:bodyPr wrap="square">
+            <a:spAutoFit/>
+          </a:bodyPr>
+          <a:lstStyle/>
+          <a:p>
+            <a:pPr algn="r"/>
+            <a:r>
+              <a:rPr sz="1100" b="0" i="0">
+                <a:solidFill>
+                  <a:srgbClr val="666666"/>
+                </a:solidFill>
+                <a:latin typeface="Calibri"/>
+              </a:rPr>
+              <a:t>17</a:t>
+            </a:r>
+          </a:p>
+        </p:txBody>
+      </p:sp>
+    </p:spTree>
+  </p:cSld>
+  <p:clrMapOvr>
+    <a:masterClrMapping/>
+  </p:clrMapOvr>
+</p:sld>
+</file>
+
+<file path=ppt/slides/slide18.xml><?xml version="1.0" encoding="utf-8"?>
+<p:sld xmlns:a="http://schemas.openxmlformats.org/drawingml/2006/main" xmlns:p="http://schemas.openxmlformats.org/presentationml/2006/main" xmlns:r="http://schemas.openxmlformats.org/officeDocument/2006/relationships">
+  <p:cSld>
+    <p:bg>
+      <p:bgPr>
+        <a:solidFill>
+          <a:srgbClr val="FFFFFF"/>
+        </a:solidFill>
+        <a:effectLst/>
+      </p:bgPr>
+    </p:bg>
+    <p:spTree>
+      <p:nvGrpSpPr>
+        <p:cNvPr id="1" name=""/>
+        <p:cNvGrpSpPr/>
+        <p:nvPr/>
+      </p:nvGrpSpPr>
+      <p:grpSpPr/>
+      <p:sp>
+        <p:nvSpPr>
+          <p:cNvPr id="2" name="Rectangle 1"/>
+          <p:cNvSpPr/>
+          <p:nvPr/>
+        </p:nvSpPr>
+        <p:spPr>
+          <a:xfrm>
+            <a:off x="0" y="0"/>
+            <a:ext cx="12191695" cy="1170432"/>
+          </a:xfrm>
+          <a:prstGeom prst="rect">
+            <a:avLst/>
+          </a:prstGeom>
+          <a:solidFill>
+            <a:srgbClr val="095292"/>
+          </a:solidFill>
+          <a:ln>
+            <a:noFill/>
+          </a:ln>
+        </p:spPr>
+        <p:style>
+          <a:lnRef idx="1">
+            <a:schemeClr val="accent1"/>
+          </a:lnRef>
+          <a:fillRef idx="3">
+            <a:schemeClr val="accent1"/>
+          </a:fillRef>
+          <a:effectRef idx="2">
+            <a:schemeClr val="accent1"/>
+          </a:effectRef>
+          <a:fontRef idx="minor">
+            <a:schemeClr val="lt1"/>
+          </a:fontRef>
+        </p:style>
+        <p:txBody>
+          <a:bodyPr rtlCol="0" anchor="ctr"/>
+          <a:lstStyle/>
+          <a:p>
+            <a:pPr algn="ctr"/>
+          </a:p>
+        </p:txBody>
+      </p:sp>
+      <p:sp>
+        <p:nvSpPr>
+          <p:cNvPr id="3" name="Rectangle 2"/>
+          <p:cNvSpPr/>
+          <p:nvPr/>
+        </p:nvSpPr>
+        <p:spPr>
+          <a:xfrm>
+            <a:off x="0" y="1170432"/>
+            <a:ext cx="12191695" cy="41148"/>
+          </a:xfrm>
+          <a:prstGeom prst="rect">
+            <a:avLst/>
+          </a:prstGeom>
+          <a:solidFill>
+            <a:srgbClr val="FFD000"/>
+          </a:solidFill>
+          <a:ln>
+            <a:noFill/>
+          </a:ln>
+        </p:spPr>
+        <p:style>
+          <a:lnRef idx="1">
+            <a:schemeClr val="accent1"/>
+          </a:lnRef>
+          <a:fillRef idx="3">
+            <a:schemeClr val="accent1"/>
+          </a:fillRef>
+          <a:effectRef idx="2">
+            <a:schemeClr val="accent1"/>
+          </a:effectRef>
+          <a:fontRef idx="minor">
+            <a:schemeClr val="lt1"/>
+          </a:fontRef>
+        </p:style>
+        <p:txBody>
+          <a:bodyPr rtlCol="0" anchor="ctr"/>
+          <a:lstStyle/>
+          <a:p>
+            <a:pPr algn="ctr"/>
+          </a:p>
+        </p:txBody>
+      </p:sp>
+      <p:sp>
+        <p:nvSpPr>
+          <p:cNvPr id="4" name="TextBox 3"/>
+          <p:cNvSpPr txBox="1"/>
+          <p:nvPr/>
+        </p:nvSpPr>
+        <p:spPr>
+          <a:xfrm>
+            <a:off x="457200" y="164592"/>
+            <a:ext cx="11277295" cy="384048"/>
+          </a:xfrm>
+          <a:prstGeom prst="rect">
+            <a:avLst/>
+          </a:prstGeom>
+          <a:noFill/>
+        </p:spPr>
+        <p:txBody>
+          <a:bodyPr wrap="square">
+            <a:spAutoFit/>
+          </a:bodyPr>
+          <a:lstStyle/>
+          <a:p>
+            <a:r>
+              <a:rPr sz="2600" b="1" i="0">
+                <a:solidFill>
+                  <a:srgbClr val="FFFFFF"/>
+                </a:solidFill>
+                <a:latin typeface="Calibri"/>
+              </a:rPr>
+              <a:t>Herramientas de hoy</a:t>
+            </a:r>
+          </a:p>
+        </p:txBody>
+      </p:sp>
+      <p:sp>
+        <p:nvSpPr>
+          <p:cNvPr id="5" name="TextBox 4"/>
+          <p:cNvSpPr txBox="1"/>
+          <p:nvPr/>
+        </p:nvSpPr>
+        <p:spPr>
+          <a:xfrm>
+            <a:off x="457200" y="566928"/>
+            <a:ext cx="11277295" cy="411480"/>
+          </a:xfrm>
+          <a:prstGeom prst="rect">
+            <a:avLst/>
+          </a:prstGeom>
+          <a:noFill/>
+        </p:spPr>
+        <p:txBody>
+          <a:bodyPr wrap="square">
+            <a:spAutoFit/>
+          </a:bodyPr>
+          <a:lstStyle/>
+          <a:p>
+            <a:r>
+              <a:rPr sz="1400" b="0" i="0">
+                <a:solidFill>
+                  <a:srgbClr val="B8D8EE"/>
+                </a:solidFill>
+                <a:latin typeface="Calibri"/>
+              </a:rPr>
+              <a:t>Gratis · navegador o free tier · sin cuenta de pago</a:t>
+            </a:r>
+          </a:p>
+        </p:txBody>
+      </p:sp>
+      <p:sp>
+        <p:nvSpPr>
+          <p:cNvPr id="6" name="Rounded Rectangle 5"/>
+          <p:cNvSpPr/>
+          <p:nvPr/>
+        </p:nvSpPr>
+        <p:spPr>
+          <a:xfrm>
+            <a:off x="457200" y="1591056"/>
+            <a:ext cx="5538063" cy="2331720"/>
+          </a:xfrm>
+          <a:prstGeom prst="roundRect">
+            <a:avLst>
+              <a:gd name="adj" fmla="val 12000"/>
+            </a:avLst>
+          </a:prstGeom>
+          <a:solidFill>
+            <a:srgbClr val="F2F2F2"/>
+          </a:solidFill>
+          <a:ln>
+            <a:noFill/>
+          </a:ln>
+        </p:spPr>
+        <p:style>
+          <a:lnRef idx="1">
+            <a:schemeClr val="accent1"/>
+          </a:lnRef>
+          <a:fillRef idx="3">
+            <a:schemeClr val="accent1"/>
+          </a:fillRef>
+          <a:effectRef idx="2">
+            <a:schemeClr val="accent1"/>
+          </a:effectRef>
+          <a:fontRef idx="minor">
+            <a:schemeClr val="lt1"/>
+          </a:fontRef>
+        </p:style>
+        <p:txBody>
+          <a:bodyPr rtlCol="0" anchor="ctr"/>
+          <a:lstStyle/>
+          <a:p>
+            <a:pPr algn="ctr"/>
+          </a:p>
+        </p:txBody>
+      </p:sp>
+      <p:sp>
+        <p:nvSpPr>
+          <p:cNvPr id="7" name="Rectangle 6"/>
+          <p:cNvSpPr/>
+          <p:nvPr/>
+        </p:nvSpPr>
+        <p:spPr>
+          <a:xfrm>
+            <a:off x="457200" y="1591056"/>
+            <a:ext cx="5538063" cy="64008"/>
+          </a:xfrm>
+          <a:prstGeom prst="rect">
+            <a:avLst/>
+          </a:prstGeom>
+          <a:solidFill>
+            <a:srgbClr val="095292"/>
+          </a:solidFill>
+          <a:ln>
+            <a:noFill/>
+          </a:ln>
+        </p:spPr>
+        <p:style>
+          <a:lnRef idx="1">
+            <a:schemeClr val="accent1"/>
+          </a:lnRef>
+          <a:fillRef idx="3">
+            <a:schemeClr val="accent1"/>
+          </a:fillRef>
+          <a:effectRef idx="2">
+            <a:schemeClr val="accent1"/>
+          </a:effectRef>
+          <a:fontRef idx="minor">
+            <a:schemeClr val="lt1"/>
+          </a:fontRef>
+        </p:style>
+        <p:txBody>
+          <a:bodyPr rtlCol="0" anchor="ctr"/>
+          <a:lstStyle/>
+          <a:p>
+            <a:pPr algn="ctr"/>
+          </a:p>
+        </p:txBody>
+      </p:sp>
+      <p:sp>
+        <p:nvSpPr>
+          <p:cNvPr id="8" name="Rectangle 7"/>
+          <p:cNvSpPr/>
+          <p:nvPr/>
+        </p:nvSpPr>
+        <p:spPr>
+          <a:xfrm>
+            <a:off x="457200" y="1655064"/>
+            <a:ext cx="5538063" cy="27432"/>
+          </a:xfrm>
+          <a:prstGeom prst="rect">
+            <a:avLst/>
+          </a:prstGeom>
+          <a:solidFill>
+            <a:srgbClr val="FFD000"/>
+          </a:solidFill>
+          <a:ln>
+            <a:noFill/>
+          </a:ln>
+        </p:spPr>
+        <p:style>
+          <a:lnRef idx="1">
+            <a:schemeClr val="accent1"/>
+          </a:lnRef>
+          <a:fillRef idx="3">
+            <a:schemeClr val="accent1"/>
+          </a:fillRef>
+          <a:effectRef idx="2">
+            <a:schemeClr val="accent1"/>
+          </a:effectRef>
+          <a:fontRef idx="minor">
+            <a:schemeClr val="lt1"/>
+          </a:fontRef>
+        </p:style>
+        <p:txBody>
+          <a:bodyPr rtlCol="0" anchor="ctr"/>
+          <a:lstStyle/>
+          <a:p>
+            <a:pPr algn="ctr"/>
+          </a:p>
+        </p:txBody>
+      </p:sp>
       <p:pic>
         <p:nvPicPr>
-          <p:cNvPr id="3" name="Picture 2" descr="logo_uniajc_color.png"/>
+          <p:cNvPr id="9" name="Picture 8" descr="google_docs.png"/>
           <p:cNvPicPr>
             <a:picLocks noChangeAspect="1"/>
           </p:cNvPicPr>
@@ -3517,8 +6027,8 @@
         </p:blipFill>
         <p:spPr>
           <a:xfrm>
-            <a:off x="10271455" y="5998464"/>
-            <a:ext cx="1463040" cy="643233"/>
+            <a:off x="2599867" y="1847087"/>
+            <a:ext cx="1252728" cy="1252728"/>
           </a:xfrm>
           <a:prstGeom prst="rect">
             <a:avLst/>
@@ -3527,14 +6037,14 @@
       </p:pic>
       <p:sp>
         <p:nvSpPr>
-          <p:cNvPr id="4" name="TextBox 3"/>
+          <p:cNvPr id="10" name="TextBox 9"/>
           <p:cNvSpPr txBox="1"/>
           <p:nvPr/>
         </p:nvSpPr>
         <p:spPr>
           <a:xfrm>
-            <a:off x="457200" y="1737360"/>
-            <a:ext cx="11277295" cy="1097280"/>
+            <a:off x="530352" y="3191256"/>
+            <a:ext cx="5391759" cy="621792"/>
           </a:xfrm>
           <a:prstGeom prst="rect">
             <a:avLst/>
@@ -3542,32 +6052,252 @@
           <a:noFill/>
         </p:spPr>
         <p:txBody>
-          <a:bodyPr wrap="square" anchor="ctr"/>
+          <a:bodyPr wrap="square" anchor="t"/>
           <a:lstStyle/>
           <a:p>
             <a:pPr algn="ctr"/>
             <a:r>
-              <a:rPr sz="3400" b="1" i="0">
+              <a:rPr sz="1300" b="1" i="0">
                 <a:solidFill>
                   <a:srgbClr val="095292"/>
                 </a:solidFill>
                 <a:latin typeface="Calibri"/>
               </a:rPr>
-              <a:t>Clase 10 · PI en movimiento</a:t>
-            </a:r>
-          </a:p>
-        </p:txBody>
-      </p:sp>
-      <p:sp>
-        <p:nvSpPr>
-          <p:cNvPr id="5" name="TextBox 4"/>
+              <a:t>Google Docs</a:t>
+            </a:r>
+          </a:p>
+          <a:p>
+            <a:pPr algn="ctr">
+              <a:spcBef>
+                <a:spcPts val="200"/>
+              </a:spcBef>
+            </a:pPr>
+            <a:r>
+              <a:rPr sz="1000" b="0" i="0">
+                <a:solidFill>
+                  <a:srgbClr val="666666"/>
+                </a:solidFill>
+                <a:latin typeface="Calibri"/>
+              </a:rPr>
+              <a:t>Tabla de costos</a:t>
+            </a:r>
+          </a:p>
+        </p:txBody>
+      </p:sp>
+      <p:sp>
+        <p:nvSpPr>
+          <p:cNvPr id="11" name="Rounded Rectangle 10"/>
+          <p:cNvSpPr/>
+          <p:nvPr/>
+        </p:nvSpPr>
+        <p:spPr>
+          <a:xfrm>
+            <a:off x="6196431" y="1591056"/>
+            <a:ext cx="5538063" cy="2331720"/>
+          </a:xfrm>
+          <a:prstGeom prst="roundRect">
+            <a:avLst>
+              <a:gd name="adj" fmla="val 12000"/>
+            </a:avLst>
+          </a:prstGeom>
+          <a:solidFill>
+            <a:srgbClr val="F2F2F2"/>
+          </a:solidFill>
+          <a:ln>
+            <a:noFill/>
+          </a:ln>
+        </p:spPr>
+        <p:style>
+          <a:lnRef idx="1">
+            <a:schemeClr val="accent1"/>
+          </a:lnRef>
+          <a:fillRef idx="3">
+            <a:schemeClr val="accent1"/>
+          </a:fillRef>
+          <a:effectRef idx="2">
+            <a:schemeClr val="accent1"/>
+          </a:effectRef>
+          <a:fontRef idx="minor">
+            <a:schemeClr val="lt1"/>
+          </a:fontRef>
+        </p:style>
+        <p:txBody>
+          <a:bodyPr rtlCol="0" anchor="ctr"/>
+          <a:lstStyle/>
+          <a:p>
+            <a:pPr algn="ctr"/>
+          </a:p>
+        </p:txBody>
+      </p:sp>
+      <p:sp>
+        <p:nvSpPr>
+          <p:cNvPr id="12" name="Rectangle 11"/>
+          <p:cNvSpPr/>
+          <p:nvPr/>
+        </p:nvSpPr>
+        <p:spPr>
+          <a:xfrm>
+            <a:off x="6196431" y="1591056"/>
+            <a:ext cx="5538063" cy="64008"/>
+          </a:xfrm>
+          <a:prstGeom prst="rect">
+            <a:avLst/>
+          </a:prstGeom>
+          <a:solidFill>
+            <a:srgbClr val="095292"/>
+          </a:solidFill>
+          <a:ln>
+            <a:noFill/>
+          </a:ln>
+        </p:spPr>
+        <p:style>
+          <a:lnRef idx="1">
+            <a:schemeClr val="accent1"/>
+          </a:lnRef>
+          <a:fillRef idx="3">
+            <a:schemeClr val="accent1"/>
+          </a:fillRef>
+          <a:effectRef idx="2">
+            <a:schemeClr val="accent1"/>
+          </a:effectRef>
+          <a:fontRef idx="minor">
+            <a:schemeClr val="lt1"/>
+          </a:fontRef>
+        </p:style>
+        <p:txBody>
+          <a:bodyPr rtlCol="0" anchor="ctr"/>
+          <a:lstStyle/>
+          <a:p>
+            <a:pPr algn="ctr"/>
+          </a:p>
+        </p:txBody>
+      </p:sp>
+      <p:sp>
+        <p:nvSpPr>
+          <p:cNvPr id="13" name="Rectangle 12"/>
+          <p:cNvSpPr/>
+          <p:nvPr/>
+        </p:nvSpPr>
+        <p:spPr>
+          <a:xfrm>
+            <a:off x="6196431" y="1655064"/>
+            <a:ext cx="5538063" cy="27432"/>
+          </a:xfrm>
+          <a:prstGeom prst="rect">
+            <a:avLst/>
+          </a:prstGeom>
+          <a:solidFill>
+            <a:srgbClr val="FFD000"/>
+          </a:solidFill>
+          <a:ln>
+            <a:noFill/>
+          </a:ln>
+        </p:spPr>
+        <p:style>
+          <a:lnRef idx="1">
+            <a:schemeClr val="accent1"/>
+          </a:lnRef>
+          <a:fillRef idx="3">
+            <a:schemeClr val="accent1"/>
+          </a:fillRef>
+          <a:effectRef idx="2">
+            <a:schemeClr val="accent1"/>
+          </a:effectRef>
+          <a:fontRef idx="minor">
+            <a:schemeClr val="lt1"/>
+          </a:fontRef>
+        </p:style>
+        <p:txBody>
+          <a:bodyPr rtlCol="0" anchor="ctr"/>
+          <a:lstStyle/>
+          <a:p>
+            <a:pPr algn="ctr"/>
+          </a:p>
+        </p:txBody>
+      </p:sp>
+      <p:pic>
+        <p:nvPicPr>
+          <p:cNvPr id="14" name="Picture 13" descr="examlab.png"/>
+          <p:cNvPicPr>
+            <a:picLocks noChangeAspect="1"/>
+          </p:cNvPicPr>
+          <p:nvPr/>
+        </p:nvPicPr>
+        <p:blipFill>
+          <a:blip r:embed="rId3"/>
+          <a:stretch>
+            <a:fillRect/>
+          </a:stretch>
+        </p:blipFill>
+        <p:spPr>
+          <a:xfrm>
+            <a:off x="8339099" y="1847087"/>
+            <a:ext cx="1252728" cy="1252728"/>
+          </a:xfrm>
+          <a:prstGeom prst="rect">
+            <a:avLst/>
+          </a:prstGeom>
+        </p:spPr>
+      </p:pic>
+      <p:sp>
+        <p:nvSpPr>
+          <p:cNvPr id="15" name="TextBox 14"/>
           <p:cNvSpPr txBox="1"/>
           <p:nvPr/>
         </p:nvSpPr>
         <p:spPr>
           <a:xfrm>
-            <a:off x="457200" y="3017520"/>
-            <a:ext cx="11277295" cy="1645920"/>
+            <a:off x="6269583" y="3191256"/>
+            <a:ext cx="5391759" cy="621792"/>
+          </a:xfrm>
+          <a:prstGeom prst="rect">
+            <a:avLst/>
+          </a:prstGeom>
+          <a:noFill/>
+        </p:spPr>
+        <p:txBody>
+          <a:bodyPr wrap="square" anchor="t"/>
+          <a:lstStyle/>
+          <a:p>
+            <a:pPr algn="ctr"/>
+            <a:r>
+              <a:rPr sz="1300" b="1" i="0">
+                <a:solidFill>
+                  <a:srgbClr val="095292"/>
+                </a:solidFill>
+                <a:latin typeface="Calibri"/>
+              </a:rPr>
+              <a:t>la plataforma del curso</a:t>
+            </a:r>
+          </a:p>
+          <a:p>
+            <a:pPr algn="ctr">
+              <a:spcBef>
+                <a:spcPts val="200"/>
+              </a:spcBef>
+            </a:pPr>
+            <a:r>
+              <a:rPr sz="1000" b="0" i="0">
+                <a:solidFill>
+                  <a:srgbClr val="666666"/>
+                </a:solidFill>
+                <a:latin typeface="Calibri"/>
+              </a:rPr>
+              <a:t>Donde se entrega</a:t>
+            </a:r>
+          </a:p>
+        </p:txBody>
+      </p:sp>
+      <p:sp>
+        <p:nvSpPr>
+          <p:cNvPr id="16" name="TextBox 15"/>
+          <p:cNvSpPr txBox="1"/>
+          <p:nvPr/>
+        </p:nvSpPr>
+        <p:spPr>
+          <a:xfrm>
+            <a:off x="11185855" y="6473952"/>
+            <a:ext cx="640080" cy="274320"/>
           </a:xfrm>
           <a:prstGeom prst="rect">
             <a:avLst/>
@@ -3580,65 +6310,141 @@
           </a:bodyPr>
           <a:lstStyle/>
           <a:p>
-            <a:pPr algn="ctr">
-              <a:spcAft>
-                <a:spcPts val="600"/>
-              </a:spcAft>
-            </a:pPr>
-            <a:r>
-              <a:rPr sz="1600" b="0" i="0">
-                <a:solidFill>
-                  <a:srgbClr val="333333"/>
-                </a:solidFill>
-                <a:latin typeface="Calibri"/>
-              </a:rPr>
-              <a:t>Estimación cualitativa de costos + notas de sostenibilidad</a:t>
-            </a:r>
-          </a:p>
-          <a:p>
-            <a:pPr algn="ctr">
-              <a:spcAft>
-                <a:spcPts val="600"/>
-              </a:spcAft>
-            </a:pPr>
-            <a:r>
-              <a:rPr sz="1600" b="0" i="0">
-                <a:solidFill>
-                  <a:srgbClr val="333333"/>
-                </a:solidFill>
-                <a:latin typeface="Calibri"/>
-              </a:rPr>
-              <a:t>Evidencia: Sección Costos/Sostenibilidad del informe (bajo/medio + drivers)</a:t>
-            </a:r>
-          </a:p>
-          <a:p>
-            <a:pPr algn="ctr">
-              <a:spcAft>
-                <a:spcPts val="600"/>
-              </a:spcAft>
-            </a:pPr>
-            <a:r>
-              <a:rPr sz="1600" b="0" i="0">
-                <a:solidFill>
-                  <a:srgbClr val="333333"/>
-                </a:solidFill>
-                <a:latin typeface="Calibri"/>
-              </a:rPr>
-              <a:t>Siguiente paso = siguiente hito del PI CloudLite</a:t>
-            </a:r>
-          </a:p>
-        </p:txBody>
-      </p:sp>
-      <p:sp>
-        <p:nvSpPr>
-          <p:cNvPr id="6" name="TextBox 5"/>
+            <a:pPr algn="r"/>
+            <a:r>
+              <a:rPr sz="1100" b="0" i="0">
+                <a:solidFill>
+                  <a:srgbClr val="666666"/>
+                </a:solidFill>
+                <a:latin typeface="Calibri"/>
+              </a:rPr>
+              <a:t>18</a:t>
+            </a:r>
+          </a:p>
+        </p:txBody>
+      </p:sp>
+    </p:spTree>
+  </p:cSld>
+  <p:clrMapOvr>
+    <a:masterClrMapping/>
+  </p:clrMapOvr>
+</p:sld>
+</file>
+
+<file path=ppt/slides/slide19.xml><?xml version="1.0" encoding="utf-8"?>
+<p:sld xmlns:a="http://schemas.openxmlformats.org/drawingml/2006/main" xmlns:p="http://schemas.openxmlformats.org/presentationml/2006/main" xmlns:r="http://schemas.openxmlformats.org/officeDocument/2006/relationships">
+  <p:cSld>
+    <p:bg>
+      <p:bgPr>
+        <a:solidFill>
+          <a:srgbClr val="FFFFFF"/>
+        </a:solidFill>
+        <a:effectLst/>
+      </p:bgPr>
+    </p:bg>
+    <p:spTree>
+      <p:nvGrpSpPr>
+        <p:cNvPr id="1" name=""/>
+        <p:cNvGrpSpPr/>
+        <p:nvPr/>
+      </p:nvGrpSpPr>
+      <p:grpSpPr/>
+      <p:sp>
+        <p:nvSpPr>
+          <p:cNvPr id="2" name="Rectangle 1"/>
+          <p:cNvSpPr/>
+          <p:nvPr/>
+        </p:nvSpPr>
+        <p:spPr>
+          <a:xfrm>
+            <a:off x="0" y="0"/>
+            <a:ext cx="12191695" cy="960120"/>
+          </a:xfrm>
+          <a:prstGeom prst="rect">
+            <a:avLst/>
+          </a:prstGeom>
+          <a:solidFill>
+            <a:srgbClr val="095292"/>
+          </a:solidFill>
+          <a:ln>
+            <a:noFill/>
+          </a:ln>
+        </p:spPr>
+        <p:style>
+          <a:lnRef idx="1">
+            <a:schemeClr val="accent1"/>
+          </a:lnRef>
+          <a:fillRef idx="3">
+            <a:schemeClr val="accent1"/>
+          </a:fillRef>
+          <a:effectRef idx="2">
+            <a:schemeClr val="accent1"/>
+          </a:effectRef>
+          <a:fontRef idx="minor">
+            <a:schemeClr val="lt1"/>
+          </a:fontRef>
+        </p:style>
+        <p:txBody>
+          <a:bodyPr rtlCol="0" anchor="ctr"/>
+          <a:lstStyle/>
+          <a:p>
+            <a:pPr algn="ctr"/>
+          </a:p>
+        </p:txBody>
+      </p:sp>
+      <p:sp>
+        <p:nvSpPr>
+          <p:cNvPr id="3" name="Rectangle 2"/>
+          <p:cNvSpPr/>
+          <p:nvPr/>
+        </p:nvSpPr>
+        <p:spPr>
+          <a:xfrm>
+            <a:off x="0" y="960120"/>
+            <a:ext cx="12191695" cy="41148"/>
+          </a:xfrm>
+          <a:prstGeom prst="rect">
+            <a:avLst/>
+          </a:prstGeom>
+          <a:solidFill>
+            <a:srgbClr val="FFD000"/>
+          </a:solidFill>
+          <a:ln>
+            <a:noFill/>
+          </a:ln>
+        </p:spPr>
+        <p:style>
+          <a:lnRef idx="1">
+            <a:schemeClr val="accent1"/>
+          </a:lnRef>
+          <a:fillRef idx="3">
+            <a:schemeClr val="accent1"/>
+          </a:fillRef>
+          <a:effectRef idx="2">
+            <a:schemeClr val="accent1"/>
+          </a:effectRef>
+          <a:fontRef idx="minor">
+            <a:schemeClr val="lt1"/>
+          </a:fontRef>
+        </p:style>
+        <p:txBody>
+          <a:bodyPr rtlCol="0" anchor="ctr"/>
+          <a:lstStyle/>
+          <a:p>
+            <a:pPr algn="ctr"/>
+          </a:p>
+        </p:txBody>
+      </p:sp>
+      <p:sp>
+        <p:nvSpPr>
+          <p:cNvPr id="4" name="TextBox 3"/>
           <p:cNvSpPr txBox="1"/>
           <p:nvPr/>
         </p:nvSpPr>
         <p:spPr>
           <a:xfrm>
-            <a:off x="457200" y="4754880"/>
-            <a:ext cx="11277295" cy="640080"/>
+            <a:off x="457200" y="164592"/>
+            <a:ext cx="11277295" cy="502920"/>
           </a:xfrm>
           <a:prstGeom prst="rect">
             <a:avLst/>
@@ -3651,15 +6457,181 @@
           </a:bodyPr>
           <a:lstStyle/>
           <a:p>
-            <a:pPr algn="ctr"/>
+            <a:r>
+              <a:rPr sz="2600" b="1" i="0">
+                <a:solidFill>
+                  <a:srgbClr val="FFFFFF"/>
+                </a:solidFill>
+                <a:latin typeface="Calibri"/>
+              </a:rPr>
+              <a:t>PI CloudLite — entregable de hoy</a:t>
+            </a:r>
+          </a:p>
+        </p:txBody>
+      </p:sp>
+      <p:sp>
+        <p:nvSpPr>
+          <p:cNvPr id="5" name="TextBox 4"/>
+          <p:cNvSpPr txBox="1"/>
+          <p:nvPr/>
+        </p:nvSpPr>
+        <p:spPr>
+          <a:xfrm>
+            <a:off x="457200" y="1170432"/>
+            <a:ext cx="11277295" cy="5230368"/>
+          </a:xfrm>
+          <a:prstGeom prst="rect">
+            <a:avLst/>
+          </a:prstGeom>
+          <a:noFill/>
+        </p:spPr>
+        <p:txBody>
+          <a:bodyPr wrap="square">
+            <a:spAutoFit/>
+          </a:bodyPr>
+          <a:lstStyle/>
+          <a:p>
+            <a:pPr>
+              <a:spcAft>
+                <a:spcPts val="800"/>
+              </a:spcAft>
+            </a:pPr>
+            <a:r>
+              <a:rPr sz="2000" b="0" i="0">
+                <a:solidFill>
+                  <a:srgbClr val="333333"/>
+                </a:solidFill>
+                <a:latin typeface="Calibri"/>
+              </a:rPr>
+              <a:t>–   </a:t>
+            </a:r>
             <a:r>
               <a:rPr sz="2000" b="1" i="0">
                 <a:solidFill>
-                  <a:srgbClr val="269CCB"/>
-                </a:solidFill>
-                <a:latin typeface="Calibri"/>
-              </a:rPr>
-              <a:t>Teoría al servicio del proyecto</a:t>
+                  <a:srgbClr val="333333"/>
+                </a:solidFill>
+                <a:latin typeface="Calibri"/>
+              </a:rPr>
+              <a:t>Entregable:</a:t>
+            </a:r>
+            <a:r>
+              <a:rPr sz="2000" b="0" i="0">
+                <a:solidFill>
+                  <a:srgbClr val="333333"/>
+                </a:solidFill>
+                <a:latin typeface="Calibri"/>
+              </a:rPr>
+              <a:t> Sección Costos/Sostenibilidad del informe (bajo/medio + drivers)</a:t>
+            </a:r>
+          </a:p>
+          <a:p>
+            <a:pPr>
+              <a:spcAft>
+                <a:spcPts val="800"/>
+              </a:spcAft>
+            </a:pPr>
+            <a:r>
+              <a:rPr sz="2000" b="0" i="0">
+                <a:solidFill>
+                  <a:srgbClr val="333333"/>
+                </a:solidFill>
+                <a:latin typeface="Calibri"/>
+              </a:rPr>
+              <a:t>–   Herramienta: </a:t>
+            </a:r>
+            <a:r>
+              <a:rPr sz="2000" b="1" i="0">
+                <a:solidFill>
+                  <a:srgbClr val="333333"/>
+                </a:solidFill>
+                <a:latin typeface="Calibri"/>
+              </a:rPr>
+              <a:t>Google Docs</a:t>
+            </a:r>
+          </a:p>
+          <a:p>
+            <a:pPr>
+              <a:spcAft>
+                <a:spcPts val="800"/>
+              </a:spcAft>
+            </a:pPr>
+            <a:r>
+              <a:rPr sz="2000" b="0" i="0">
+                <a:solidFill>
+                  <a:srgbClr val="333333"/>
+                </a:solidFill>
+                <a:latin typeface="Calibri"/>
+              </a:rPr>
+              <a:t>–   Todo lo que construyan hoy entra al </a:t>
+            </a:r>
+            <a:r>
+              <a:rPr sz="2000" b="1" i="0">
+                <a:solidFill>
+                  <a:srgbClr val="333333"/>
+                </a:solidFill>
+                <a:latin typeface="Calibri"/>
+              </a:rPr>
+              <a:t>informe/repo del PI</a:t>
+            </a:r>
+            <a:r>
+              <a:rPr sz="2000" b="0" i="0">
+                <a:solidFill>
+                  <a:srgbClr val="333333"/>
+                </a:solidFill>
+                <a:latin typeface="Calibri"/>
+              </a:rPr>
+              <a:t> (no es lab suelto).</a:t>
+            </a:r>
+          </a:p>
+          <a:p>
+            <a:pPr>
+              <a:spcAft>
+                <a:spcPts val="800"/>
+              </a:spcAft>
+            </a:pPr>
+            <a:r>
+              <a:rPr sz="2000" b="0" i="0">
+                <a:solidFill>
+                  <a:srgbClr val="333333"/>
+                </a:solidFill>
+                <a:latin typeface="Calibri"/>
+              </a:rPr>
+              <a:t>–   Individual por defecto · el docente puede autorizar equipos de 2–3; la entrega en la plataforma del curso siempre es individual.</a:t>
+            </a:r>
+          </a:p>
+        </p:txBody>
+      </p:sp>
+      <p:sp>
+        <p:nvSpPr>
+          <p:cNvPr id="6" name="TextBox 5"/>
+          <p:cNvSpPr txBox="1"/>
+          <p:nvPr/>
+        </p:nvSpPr>
+        <p:spPr>
+          <a:xfrm>
+            <a:off x="11185855" y="6473952"/>
+            <a:ext cx="640080" cy="274320"/>
+          </a:xfrm>
+          <a:prstGeom prst="rect">
+            <a:avLst/>
+          </a:prstGeom>
+          <a:noFill/>
+        </p:spPr>
+        <p:txBody>
+          <a:bodyPr wrap="square">
+            <a:spAutoFit/>
+          </a:bodyPr>
+          <a:lstStyle/>
+          <a:p>
+            <a:pPr algn="r"/>
+            <a:r>
+              <a:rPr sz="1100" b="0" i="0">
+                <a:solidFill>
+                  <a:srgbClr val="666666"/>
+                </a:solidFill>
+                <a:latin typeface="Calibri"/>
+              </a:rPr>
+              <a:t>19</a:t>
             </a:r>
           </a:p>
         </p:txBody>
@@ -4019,6 +6991,1164 @@
 </p:sld>
 </file>
 
+<file path=ppt/slides/slide20.xml><?xml version="1.0" encoding="utf-8"?>
+<p:sld xmlns:a="http://schemas.openxmlformats.org/drawingml/2006/main" xmlns:p="http://schemas.openxmlformats.org/presentationml/2006/main" xmlns:r="http://schemas.openxmlformats.org/officeDocument/2006/relationships">
+  <p:cSld>
+    <p:bg>
+      <p:bgPr>
+        <a:solidFill>
+          <a:srgbClr val="FFFFFF"/>
+        </a:solidFill>
+        <a:effectLst/>
+      </p:bgPr>
+    </p:bg>
+    <p:spTree>
+      <p:nvGrpSpPr>
+        <p:cNvPr id="1" name=""/>
+        <p:cNvGrpSpPr/>
+        <p:nvPr/>
+      </p:nvGrpSpPr>
+      <p:grpSpPr/>
+      <p:sp>
+        <p:nvSpPr>
+          <p:cNvPr id="2" name="Rectangle 1"/>
+          <p:cNvSpPr/>
+          <p:nvPr/>
+        </p:nvSpPr>
+        <p:spPr>
+          <a:xfrm>
+            <a:off x="0" y="0"/>
+            <a:ext cx="12191695" cy="960120"/>
+          </a:xfrm>
+          <a:prstGeom prst="rect">
+            <a:avLst/>
+          </a:prstGeom>
+          <a:solidFill>
+            <a:srgbClr val="095292"/>
+          </a:solidFill>
+          <a:ln>
+            <a:noFill/>
+          </a:ln>
+        </p:spPr>
+        <p:style>
+          <a:lnRef idx="1">
+            <a:schemeClr val="accent1"/>
+          </a:lnRef>
+          <a:fillRef idx="3">
+            <a:schemeClr val="accent1"/>
+          </a:fillRef>
+          <a:effectRef idx="2">
+            <a:schemeClr val="accent1"/>
+          </a:effectRef>
+          <a:fontRef idx="minor">
+            <a:schemeClr val="lt1"/>
+          </a:fontRef>
+        </p:style>
+        <p:txBody>
+          <a:bodyPr rtlCol="0" anchor="ctr"/>
+          <a:lstStyle/>
+          <a:p>
+            <a:pPr algn="ctr"/>
+          </a:p>
+        </p:txBody>
+      </p:sp>
+      <p:sp>
+        <p:nvSpPr>
+          <p:cNvPr id="3" name="Rectangle 2"/>
+          <p:cNvSpPr/>
+          <p:nvPr/>
+        </p:nvSpPr>
+        <p:spPr>
+          <a:xfrm>
+            <a:off x="0" y="960120"/>
+            <a:ext cx="12191695" cy="41148"/>
+          </a:xfrm>
+          <a:prstGeom prst="rect">
+            <a:avLst/>
+          </a:prstGeom>
+          <a:solidFill>
+            <a:srgbClr val="FFD000"/>
+          </a:solidFill>
+          <a:ln>
+            <a:noFill/>
+          </a:ln>
+        </p:spPr>
+        <p:style>
+          <a:lnRef idx="1">
+            <a:schemeClr val="accent1"/>
+          </a:lnRef>
+          <a:fillRef idx="3">
+            <a:schemeClr val="accent1"/>
+          </a:fillRef>
+          <a:effectRef idx="2">
+            <a:schemeClr val="accent1"/>
+          </a:effectRef>
+          <a:fontRef idx="minor">
+            <a:schemeClr val="lt1"/>
+          </a:fontRef>
+        </p:style>
+        <p:txBody>
+          <a:bodyPr rtlCol="0" anchor="ctr"/>
+          <a:lstStyle/>
+          <a:p>
+            <a:pPr algn="ctr"/>
+          </a:p>
+        </p:txBody>
+      </p:sp>
+      <p:sp>
+        <p:nvSpPr>
+          <p:cNvPr id="4" name="TextBox 3"/>
+          <p:cNvSpPr txBox="1"/>
+          <p:nvPr/>
+        </p:nvSpPr>
+        <p:spPr>
+          <a:xfrm>
+            <a:off x="457200" y="164592"/>
+            <a:ext cx="11277295" cy="502920"/>
+          </a:xfrm>
+          <a:prstGeom prst="rect">
+            <a:avLst/>
+          </a:prstGeom>
+          <a:noFill/>
+        </p:spPr>
+        <p:txBody>
+          <a:bodyPr wrap="square">
+            <a:spAutoFit/>
+          </a:bodyPr>
+          <a:lstStyle/>
+          <a:p>
+            <a:r>
+              <a:rPr sz="2600" b="1" i="0">
+                <a:solidFill>
+                  <a:srgbClr val="FFFFFF"/>
+                </a:solidFill>
+                <a:latin typeface="Calibri"/>
+              </a:rPr>
+              <a:t>Manos a la obra (paso a paso)</a:t>
+            </a:r>
+          </a:p>
+        </p:txBody>
+      </p:sp>
+      <p:sp>
+        <p:nvSpPr>
+          <p:cNvPr id="5" name="TextBox 4"/>
+          <p:cNvSpPr txBox="1"/>
+          <p:nvPr/>
+        </p:nvSpPr>
+        <p:spPr>
+          <a:xfrm>
+            <a:off x="457200" y="1170432"/>
+            <a:ext cx="11277295" cy="5230368"/>
+          </a:xfrm>
+          <a:prstGeom prst="rect">
+            <a:avLst/>
+          </a:prstGeom>
+          <a:noFill/>
+        </p:spPr>
+        <p:txBody>
+          <a:bodyPr wrap="square">
+            <a:spAutoFit/>
+          </a:bodyPr>
+          <a:lstStyle/>
+          <a:p>
+            <a:pPr>
+              <a:spcAft>
+                <a:spcPts val="800"/>
+              </a:spcAft>
+            </a:pPr>
+            <a:r>
+              <a:rPr sz="2000" b="1" i="0">
+                <a:solidFill>
+                  <a:srgbClr val="333333"/>
+                </a:solidFill>
+                <a:latin typeface="Calibri"/>
+              </a:rPr>
+              <a:t>1.</a:t>
+            </a:r>
+            <a:r>
+              <a:rPr sz="2000" b="0" i="0">
+                <a:solidFill>
+                  <a:srgbClr val="333333"/>
+                </a:solidFill>
+                <a:latin typeface="Calibri"/>
+              </a:rPr>
+              <a:t> Paso 1: construya en la pregunta 11 la tabla de costos con una fila por cada componente de su despliegue y las columnas componente, driver, nivel B/M/A y apalancamiento; verifique que cada driver sea una variable contable (horas encendidas, GB de salida, GB almacenados, minutos de CI) y no «el uso».</a:t>
+            </a:r>
+          </a:p>
+          <a:p>
+            <a:pPr>
+              <a:spcAft>
+                <a:spcPts val="800"/>
+              </a:spcAft>
+            </a:pPr>
+            <a:r>
+              <a:rPr sz="2000" b="0" i="0">
+                <a:solidFill>
+                  <a:srgbClr val="333333"/>
+                </a:solidFill>
+                <a:latin typeface="Calibri"/>
+              </a:rPr>
+              <a:t>–   </a:t>
+            </a:r>
+            <a:r>
+              <a:rPr sz="2000" b="1" i="0">
+                <a:solidFill>
+                  <a:srgbClr val="333333"/>
+                </a:solidFill>
+                <a:latin typeface="Calibri"/>
+              </a:rPr>
+              <a:t>2.</a:t>
+            </a:r>
+            <a:r>
+              <a:rPr sz="2000" b="0" i="0">
+                <a:solidFill>
+                  <a:srgbClr val="333333"/>
+                </a:solidFill>
+                <a:latin typeface="Calibri"/>
+              </a:rPr>
+              <a:t> Paso 2: fuerce al menos un Alto y un Bajo con su justificacion. Marcar todo como Medio para no decidir es lo que la pregunta busca descartar, y ese criterio vale cero si todas las filas quedan iguales.</a:t>
+            </a:r>
+          </a:p>
+          <a:p>
+            <a:pPr>
+              <a:spcAft>
+                <a:spcPts val="800"/>
+              </a:spcAft>
+            </a:pPr>
+            <a:r>
+              <a:rPr sz="2000" b="0" i="0">
+                <a:solidFill>
+                  <a:srgbClr val="333333"/>
+                </a:solidFill>
+                <a:latin typeface="Calibri"/>
+              </a:rPr>
+              <a:t>–   </a:t>
+            </a:r>
+            <a:r>
+              <a:rPr sz="2000" b="1" i="0">
+                <a:solidFill>
+                  <a:srgbClr val="333333"/>
+                </a:solidFill>
+                <a:latin typeface="Calibri"/>
+              </a:rPr>
+              <a:t>3.</a:t>
+            </a:r>
+            <a:r>
+              <a:rPr sz="2000" b="0" i="0">
+                <a:solidFill>
+                  <a:srgbClr val="333333"/>
+                </a:solidFill>
+                <a:latin typeface="Calibri"/>
+              </a:rPr>
+              <a:t> Paso 3: escriba en la pregunta 12 tres acciones de sostenibilidad, cada una con el artefacto donde se comprueba y como se comprueba; aplique la prueba de que otra persona pueda decir en seis meses, mirando el repositorio, si la accion se aplico.</a:t>
+            </a:r>
+          </a:p>
+          <a:p>
+            <a:pPr>
+              <a:spcAft>
+                <a:spcPts val="800"/>
+              </a:spcAft>
+            </a:pPr>
+            <a:r>
+              <a:rPr sz="2000" b="0" i="0">
+                <a:solidFill>
+                  <a:srgbClr val="333333"/>
+                </a:solidFill>
+                <a:latin typeface="Calibri"/>
+              </a:rPr>
+              <a:t>–   </a:t>
+            </a:r>
+            <a:r>
+              <a:rPr sz="2000" b="1" i="0">
+                <a:solidFill>
+                  <a:srgbClr val="333333"/>
+                </a:solidFill>
+                <a:latin typeface="Calibri"/>
+              </a:rPr>
+              <a:t>4.</a:t>
+            </a:r>
+            <a:r>
+              <a:rPr sz="2000" b="0" i="0">
+                <a:solidFill>
+                  <a:srgbClr val="333333"/>
+                </a:solidFill>
+                <a:latin typeface="Calibri"/>
+              </a:rPr>
+              <a:t> Paso 4: ate al menos una de las tres acciones a un driver de costo de la pregunta 11 y suba la actividad completa del Corte 2 a la plataforma del curso antes del en la fecha que indique el docente. Es una clase autonoma: no hay encuentro sincrono, y las dudas van por el foro.</a:t>
+            </a:r>
+          </a:p>
+        </p:txBody>
+      </p:sp>
+      <p:sp>
+        <p:nvSpPr>
+          <p:cNvPr id="6" name="TextBox 5"/>
+          <p:cNvSpPr txBox="1"/>
+          <p:nvPr/>
+        </p:nvSpPr>
+        <p:spPr>
+          <a:xfrm>
+            <a:off x="11185855" y="6473952"/>
+            <a:ext cx="640080" cy="274320"/>
+          </a:xfrm>
+          <a:prstGeom prst="rect">
+            <a:avLst/>
+          </a:prstGeom>
+          <a:noFill/>
+        </p:spPr>
+        <p:txBody>
+          <a:bodyPr wrap="square">
+            <a:spAutoFit/>
+          </a:bodyPr>
+          <a:lstStyle/>
+          <a:p>
+            <a:pPr algn="r"/>
+            <a:r>
+              <a:rPr sz="1100" b="0" i="0">
+                <a:solidFill>
+                  <a:srgbClr val="666666"/>
+                </a:solidFill>
+                <a:latin typeface="Calibri"/>
+              </a:rPr>
+              <a:t>20</a:t>
+            </a:r>
+          </a:p>
+        </p:txBody>
+      </p:sp>
+    </p:spTree>
+  </p:cSld>
+  <p:clrMapOvr>
+    <a:masterClrMapping/>
+  </p:clrMapOvr>
+</p:sld>
+</file>
+
+<file path=ppt/slides/slide21.xml><?xml version="1.0" encoding="utf-8"?>
+<p:sld xmlns:a="http://schemas.openxmlformats.org/drawingml/2006/main" xmlns:p="http://schemas.openxmlformats.org/presentationml/2006/main" xmlns:r="http://schemas.openxmlformats.org/officeDocument/2006/relationships">
+  <p:cSld>
+    <p:bg>
+      <p:bgPr>
+        <a:solidFill>
+          <a:srgbClr val="FFFFFF"/>
+        </a:solidFill>
+        <a:effectLst/>
+      </p:bgPr>
+    </p:bg>
+    <p:spTree>
+      <p:nvGrpSpPr>
+        <p:cNvPr id="1" name=""/>
+        <p:cNvGrpSpPr/>
+        <p:nvPr/>
+      </p:nvGrpSpPr>
+      <p:grpSpPr/>
+      <p:sp>
+        <p:nvSpPr>
+          <p:cNvPr id="2" name="Rectangle 1"/>
+          <p:cNvSpPr/>
+          <p:nvPr/>
+        </p:nvSpPr>
+        <p:spPr>
+          <a:xfrm>
+            <a:off x="0" y="0"/>
+            <a:ext cx="12191695" cy="960120"/>
+          </a:xfrm>
+          <a:prstGeom prst="rect">
+            <a:avLst/>
+          </a:prstGeom>
+          <a:solidFill>
+            <a:srgbClr val="095292"/>
+          </a:solidFill>
+          <a:ln>
+            <a:noFill/>
+          </a:ln>
+        </p:spPr>
+        <p:style>
+          <a:lnRef idx="1">
+            <a:schemeClr val="accent1"/>
+          </a:lnRef>
+          <a:fillRef idx="3">
+            <a:schemeClr val="accent1"/>
+          </a:fillRef>
+          <a:effectRef idx="2">
+            <a:schemeClr val="accent1"/>
+          </a:effectRef>
+          <a:fontRef idx="minor">
+            <a:schemeClr val="lt1"/>
+          </a:fontRef>
+        </p:style>
+        <p:txBody>
+          <a:bodyPr rtlCol="0" anchor="ctr"/>
+          <a:lstStyle/>
+          <a:p>
+            <a:pPr algn="ctr"/>
+          </a:p>
+        </p:txBody>
+      </p:sp>
+      <p:sp>
+        <p:nvSpPr>
+          <p:cNvPr id="3" name="Rectangle 2"/>
+          <p:cNvSpPr/>
+          <p:nvPr/>
+        </p:nvSpPr>
+        <p:spPr>
+          <a:xfrm>
+            <a:off x="0" y="960120"/>
+            <a:ext cx="12191695" cy="41148"/>
+          </a:xfrm>
+          <a:prstGeom prst="rect">
+            <a:avLst/>
+          </a:prstGeom>
+          <a:solidFill>
+            <a:srgbClr val="FFD000"/>
+          </a:solidFill>
+          <a:ln>
+            <a:noFill/>
+          </a:ln>
+        </p:spPr>
+        <p:style>
+          <a:lnRef idx="1">
+            <a:schemeClr val="accent1"/>
+          </a:lnRef>
+          <a:fillRef idx="3">
+            <a:schemeClr val="accent1"/>
+          </a:fillRef>
+          <a:effectRef idx="2">
+            <a:schemeClr val="accent1"/>
+          </a:effectRef>
+          <a:fontRef idx="minor">
+            <a:schemeClr val="lt1"/>
+          </a:fontRef>
+        </p:style>
+        <p:txBody>
+          <a:bodyPr rtlCol="0" anchor="ctr"/>
+          <a:lstStyle/>
+          <a:p>
+            <a:pPr algn="ctr"/>
+          </a:p>
+        </p:txBody>
+      </p:sp>
+      <p:sp>
+        <p:nvSpPr>
+          <p:cNvPr id="4" name="TextBox 3"/>
+          <p:cNvSpPr txBox="1"/>
+          <p:nvPr/>
+        </p:nvSpPr>
+        <p:spPr>
+          <a:xfrm>
+            <a:off x="457200" y="164592"/>
+            <a:ext cx="11277295" cy="502920"/>
+          </a:xfrm>
+          <a:prstGeom prst="rect">
+            <a:avLst/>
+          </a:prstGeom>
+          <a:noFill/>
+        </p:spPr>
+        <p:txBody>
+          <a:bodyPr wrap="square">
+            <a:spAutoFit/>
+          </a:bodyPr>
+          <a:lstStyle/>
+          <a:p>
+            <a:r>
+              <a:rPr sz="2600" b="1" i="0">
+                <a:solidFill>
+                  <a:srgbClr val="FFFFFF"/>
+                </a:solidFill>
+                <a:latin typeface="Calibri"/>
+              </a:rPr>
+              <a:t>Para continuar (PI)</a:t>
+            </a:r>
+          </a:p>
+        </p:txBody>
+      </p:sp>
+      <p:sp>
+        <p:nvSpPr>
+          <p:cNvPr id="5" name="Rounded Rectangle 4"/>
+          <p:cNvSpPr/>
+          <p:nvPr/>
+        </p:nvSpPr>
+        <p:spPr>
+          <a:xfrm>
+            <a:off x="457200" y="1261872"/>
+            <a:ext cx="11277295" cy="1051560"/>
+          </a:xfrm>
+          <a:prstGeom prst="roundRect">
+            <a:avLst>
+              <a:gd name="adj" fmla="val 12000"/>
+            </a:avLst>
+          </a:prstGeom>
+          <a:solidFill>
+            <a:srgbClr val="E8F4FA"/>
+          </a:solidFill>
+          <a:ln>
+            <a:noFill/>
+          </a:ln>
+        </p:spPr>
+        <p:style>
+          <a:lnRef idx="1">
+            <a:schemeClr val="accent1"/>
+          </a:lnRef>
+          <a:fillRef idx="3">
+            <a:schemeClr val="accent1"/>
+          </a:fillRef>
+          <a:effectRef idx="2">
+            <a:schemeClr val="accent1"/>
+          </a:effectRef>
+          <a:fontRef idx="minor">
+            <a:schemeClr val="lt1"/>
+          </a:fontRef>
+        </p:style>
+        <p:txBody>
+          <a:bodyPr rtlCol="0" anchor="ctr"/>
+          <a:lstStyle/>
+          <a:p>
+            <a:pPr algn="ctr"/>
+          </a:p>
+        </p:txBody>
+      </p:sp>
+      <p:sp>
+        <p:nvSpPr>
+          <p:cNvPr id="6" name="Rectangle 5"/>
+          <p:cNvSpPr/>
+          <p:nvPr/>
+        </p:nvSpPr>
+        <p:spPr>
+          <a:xfrm>
+            <a:off x="457200" y="1261872"/>
+            <a:ext cx="128016" cy="1051560"/>
+          </a:xfrm>
+          <a:prstGeom prst="rect">
+            <a:avLst/>
+          </a:prstGeom>
+          <a:solidFill>
+            <a:srgbClr val="269CCB"/>
+          </a:solidFill>
+          <a:ln>
+            <a:noFill/>
+          </a:ln>
+        </p:spPr>
+        <p:style>
+          <a:lnRef idx="1">
+            <a:schemeClr val="accent1"/>
+          </a:lnRef>
+          <a:fillRef idx="3">
+            <a:schemeClr val="accent1"/>
+          </a:fillRef>
+          <a:effectRef idx="2">
+            <a:schemeClr val="accent1"/>
+          </a:effectRef>
+          <a:fontRef idx="minor">
+            <a:schemeClr val="lt1"/>
+          </a:fontRef>
+        </p:style>
+        <p:txBody>
+          <a:bodyPr rtlCol="0" anchor="ctr"/>
+          <a:lstStyle/>
+          <a:p>
+            <a:pPr algn="ctr"/>
+          </a:p>
+        </p:txBody>
+      </p:sp>
+      <p:sp>
+        <p:nvSpPr>
+          <p:cNvPr id="7" name="TextBox 6"/>
+          <p:cNvSpPr txBox="1"/>
+          <p:nvPr/>
+        </p:nvSpPr>
+        <p:spPr>
+          <a:xfrm>
+            <a:off x="777240" y="1399031"/>
+            <a:ext cx="10774375" cy="822959"/>
+          </a:xfrm>
+          <a:prstGeom prst="rect">
+            <a:avLst/>
+          </a:prstGeom>
+          <a:noFill/>
+        </p:spPr>
+        <p:txBody>
+          <a:bodyPr wrap="square">
+            <a:spAutoFit/>
+          </a:bodyPr>
+          <a:lstStyle/>
+          <a:p>
+            <a:r>
+              <a:rPr sz="1200" b="1" i="0">
+                <a:solidFill>
+                  <a:srgbClr val="269CCB"/>
+                </a:solidFill>
+                <a:latin typeface="Calibri"/>
+              </a:rPr>
+              <a:t>Info</a:t>
+            </a:r>
+          </a:p>
+          <a:p>
+            <a:pPr>
+              <a:spcBef>
+                <a:spcPts val="400"/>
+              </a:spcBef>
+            </a:pPr>
+            <a:r>
+              <a:rPr sz="1400" b="0" i="0">
+                <a:solidFill>
+                  <a:srgbClr val="333333"/>
+                </a:solidFill>
+                <a:latin typeface="Calibri"/>
+              </a:rPr>
+              <a:t>Entregable: Sección Costos/Sostenibilidad del informe (bajo/medio + drivers)</a:t>
+            </a:r>
+          </a:p>
+        </p:txBody>
+      </p:sp>
+      <p:sp>
+        <p:nvSpPr>
+          <p:cNvPr id="8" name="Rounded Rectangle 7"/>
+          <p:cNvSpPr/>
+          <p:nvPr/>
+        </p:nvSpPr>
+        <p:spPr>
+          <a:xfrm>
+            <a:off x="457200" y="2478024"/>
+            <a:ext cx="11277295" cy="1051560"/>
+          </a:xfrm>
+          <a:prstGeom prst="roundRect">
+            <a:avLst>
+              <a:gd name="adj" fmla="val 12000"/>
+            </a:avLst>
+          </a:prstGeom>
+          <a:solidFill>
+            <a:srgbClr val="FFF8E1"/>
+          </a:solidFill>
+          <a:ln>
+            <a:noFill/>
+          </a:ln>
+        </p:spPr>
+        <p:style>
+          <a:lnRef idx="1">
+            <a:schemeClr val="accent1"/>
+          </a:lnRef>
+          <a:fillRef idx="3">
+            <a:schemeClr val="accent1"/>
+          </a:fillRef>
+          <a:effectRef idx="2">
+            <a:schemeClr val="accent1"/>
+          </a:effectRef>
+          <a:fontRef idx="minor">
+            <a:schemeClr val="lt1"/>
+          </a:fontRef>
+        </p:style>
+        <p:txBody>
+          <a:bodyPr rtlCol="0" anchor="ctr"/>
+          <a:lstStyle/>
+          <a:p>
+            <a:pPr algn="ctr"/>
+          </a:p>
+        </p:txBody>
+      </p:sp>
+      <p:sp>
+        <p:nvSpPr>
+          <p:cNvPr id="9" name="Rectangle 8"/>
+          <p:cNvSpPr/>
+          <p:nvPr/>
+        </p:nvSpPr>
+        <p:spPr>
+          <a:xfrm>
+            <a:off x="457200" y="2478024"/>
+            <a:ext cx="128016" cy="1051560"/>
+          </a:xfrm>
+          <a:prstGeom prst="rect">
+            <a:avLst/>
+          </a:prstGeom>
+          <a:solidFill>
+            <a:srgbClr val="FFD000"/>
+          </a:solidFill>
+          <a:ln>
+            <a:noFill/>
+          </a:ln>
+        </p:spPr>
+        <p:style>
+          <a:lnRef idx="1">
+            <a:schemeClr val="accent1"/>
+          </a:lnRef>
+          <a:fillRef idx="3">
+            <a:schemeClr val="accent1"/>
+          </a:fillRef>
+          <a:effectRef idx="2">
+            <a:schemeClr val="accent1"/>
+          </a:effectRef>
+          <a:fontRef idx="minor">
+            <a:schemeClr val="lt1"/>
+          </a:fontRef>
+        </p:style>
+        <p:txBody>
+          <a:bodyPr rtlCol="0" anchor="ctr"/>
+          <a:lstStyle/>
+          <a:p>
+            <a:pPr algn="ctr"/>
+          </a:p>
+        </p:txBody>
+      </p:sp>
+      <p:sp>
+        <p:nvSpPr>
+          <p:cNvPr id="10" name="TextBox 9"/>
+          <p:cNvSpPr txBox="1"/>
+          <p:nvPr/>
+        </p:nvSpPr>
+        <p:spPr>
+          <a:xfrm>
+            <a:off x="777240" y="2615184"/>
+            <a:ext cx="10774375" cy="822959"/>
+          </a:xfrm>
+          <a:prstGeom prst="rect">
+            <a:avLst/>
+          </a:prstGeom>
+          <a:noFill/>
+        </p:spPr>
+        <p:txBody>
+          <a:bodyPr wrap="square">
+            <a:spAutoFit/>
+          </a:bodyPr>
+          <a:lstStyle/>
+          <a:p>
+            <a:r>
+              <a:rPr sz="1200" b="1" i="0">
+                <a:solidFill>
+                  <a:srgbClr val="FFD000"/>
+                </a:solidFill>
+                <a:latin typeface="Calibri"/>
+              </a:rPr>
+              <a:t>Aclaración</a:t>
+            </a:r>
+          </a:p>
+          <a:p>
+            <a:pPr>
+              <a:spcBef>
+                <a:spcPts val="400"/>
+              </a:spcBef>
+            </a:pPr>
+            <a:r>
+              <a:rPr sz="1400" b="0" i="0">
+                <a:solidFill>
+                  <a:srgbClr val="333333"/>
+                </a:solidFill>
+                <a:latin typeface="Calibri"/>
+              </a:rPr>
+              <a:t>Subir evidencias al paquete CloudLite (Drive/repo) y a la plataforma del curso en la fecha que indique el docente.</a:t>
+            </a:r>
+          </a:p>
+        </p:txBody>
+      </p:sp>
+      <p:sp>
+        <p:nvSpPr>
+          <p:cNvPr id="11" name="Rounded Rectangle 10"/>
+          <p:cNvSpPr/>
+          <p:nvPr/>
+        </p:nvSpPr>
+        <p:spPr>
+          <a:xfrm>
+            <a:off x="457200" y="3694176"/>
+            <a:ext cx="11277295" cy="1051560"/>
+          </a:xfrm>
+          <a:prstGeom prst="roundRect">
+            <a:avLst>
+              <a:gd name="adj" fmla="val 12000"/>
+            </a:avLst>
+          </a:prstGeom>
+          <a:solidFill>
+            <a:srgbClr val="FBE4E4"/>
+          </a:solidFill>
+          <a:ln>
+            <a:noFill/>
+          </a:ln>
+        </p:spPr>
+        <p:style>
+          <a:lnRef idx="1">
+            <a:schemeClr val="accent1"/>
+          </a:lnRef>
+          <a:fillRef idx="3">
+            <a:schemeClr val="accent1"/>
+          </a:fillRef>
+          <a:effectRef idx="2">
+            <a:schemeClr val="accent1"/>
+          </a:effectRef>
+          <a:fontRef idx="minor">
+            <a:schemeClr val="lt1"/>
+          </a:fontRef>
+        </p:style>
+        <p:txBody>
+          <a:bodyPr rtlCol="0" anchor="ctr"/>
+          <a:lstStyle/>
+          <a:p>
+            <a:pPr algn="ctr"/>
+          </a:p>
+        </p:txBody>
+      </p:sp>
+      <p:sp>
+        <p:nvSpPr>
+          <p:cNvPr id="12" name="Rectangle 11"/>
+          <p:cNvSpPr/>
+          <p:nvPr/>
+        </p:nvSpPr>
+        <p:spPr>
+          <a:xfrm>
+            <a:off x="457200" y="3694176"/>
+            <a:ext cx="128016" cy="1051560"/>
+          </a:xfrm>
+          <a:prstGeom prst="rect">
+            <a:avLst/>
+          </a:prstGeom>
+          <a:solidFill>
+            <a:srgbClr val="A02030"/>
+          </a:solidFill>
+          <a:ln>
+            <a:noFill/>
+          </a:ln>
+        </p:spPr>
+        <p:style>
+          <a:lnRef idx="1">
+            <a:schemeClr val="accent1"/>
+          </a:lnRef>
+          <a:fillRef idx="3">
+            <a:schemeClr val="accent1"/>
+          </a:fillRef>
+          <a:effectRef idx="2">
+            <a:schemeClr val="accent1"/>
+          </a:effectRef>
+          <a:fontRef idx="minor">
+            <a:schemeClr val="lt1"/>
+          </a:fontRef>
+        </p:style>
+        <p:txBody>
+          <a:bodyPr rtlCol="0" anchor="ctr"/>
+          <a:lstStyle/>
+          <a:p>
+            <a:pPr algn="ctr"/>
+          </a:p>
+        </p:txBody>
+      </p:sp>
+      <p:sp>
+        <p:nvSpPr>
+          <p:cNvPr id="13" name="TextBox 12"/>
+          <p:cNvSpPr txBox="1"/>
+          <p:nvPr/>
+        </p:nvSpPr>
+        <p:spPr>
+          <a:xfrm>
+            <a:off x="777240" y="3831336"/>
+            <a:ext cx="10774375" cy="822959"/>
+          </a:xfrm>
+          <a:prstGeom prst="rect">
+            <a:avLst/>
+          </a:prstGeom>
+          <a:noFill/>
+        </p:spPr>
+        <p:txBody>
+          <a:bodyPr wrap="square">
+            <a:spAutoFit/>
+          </a:bodyPr>
+          <a:lstStyle/>
+          <a:p>
+            <a:r>
+              <a:rPr sz="1200" b="1" i="0">
+                <a:solidFill>
+                  <a:srgbClr val="A02030"/>
+                </a:solidFill>
+                <a:latin typeface="Calibri"/>
+              </a:rPr>
+              <a:t>Atención</a:t>
+            </a:r>
+          </a:p>
+          <a:p>
+            <a:pPr>
+              <a:spcBef>
+                <a:spcPts val="400"/>
+              </a:spcBef>
+            </a:pPr>
+            <a:r>
+              <a:rPr sz="1400" b="0" i="0">
+                <a:solidFill>
+                  <a:srgbClr val="333333"/>
+                </a:solidFill>
+                <a:latin typeface="Calibri"/>
+              </a:rPr>
+              <a:t>Sin cloud de pago ni instalaciones obligatorias de hipervisores/Docker Desktop.</a:t>
+            </a:r>
+          </a:p>
+        </p:txBody>
+      </p:sp>
+      <p:sp>
+        <p:nvSpPr>
+          <p:cNvPr id="14" name="TextBox 13"/>
+          <p:cNvSpPr txBox="1"/>
+          <p:nvPr/>
+        </p:nvSpPr>
+        <p:spPr>
+          <a:xfrm>
+            <a:off x="11185855" y="6473952"/>
+            <a:ext cx="640080" cy="274320"/>
+          </a:xfrm>
+          <a:prstGeom prst="rect">
+            <a:avLst/>
+          </a:prstGeom>
+          <a:noFill/>
+        </p:spPr>
+        <p:txBody>
+          <a:bodyPr wrap="square">
+            <a:spAutoFit/>
+          </a:bodyPr>
+          <a:lstStyle/>
+          <a:p>
+            <a:pPr algn="r"/>
+            <a:r>
+              <a:rPr sz="1100" b="0" i="0">
+                <a:solidFill>
+                  <a:srgbClr val="666666"/>
+                </a:solidFill>
+                <a:latin typeface="Calibri"/>
+              </a:rPr>
+              <a:t>21</a:t>
+            </a:r>
+          </a:p>
+        </p:txBody>
+      </p:sp>
+    </p:spTree>
+  </p:cSld>
+  <p:clrMapOvr>
+    <a:masterClrMapping/>
+  </p:clrMapOvr>
+</p:sld>
+</file>
+
+<file path=ppt/slides/slide22.xml><?xml version="1.0" encoding="utf-8"?>
+<p:sld xmlns:a="http://schemas.openxmlformats.org/drawingml/2006/main" xmlns:p="http://schemas.openxmlformats.org/presentationml/2006/main" xmlns:r="http://schemas.openxmlformats.org/officeDocument/2006/relationships">
+  <p:cSld>
+    <p:bg>
+      <p:bgPr>
+        <a:solidFill>
+          <a:srgbClr val="FFFFFF"/>
+        </a:solidFill>
+        <a:effectLst/>
+      </p:bgPr>
+    </p:bg>
+    <p:spTree>
+      <p:nvGrpSpPr>
+        <p:cNvPr id="1" name=""/>
+        <p:cNvGrpSpPr/>
+        <p:nvPr/>
+      </p:nvGrpSpPr>
+      <p:grpSpPr/>
+      <p:sp>
+        <p:nvSpPr>
+          <p:cNvPr id="2" name="Rectangle 1"/>
+          <p:cNvSpPr/>
+          <p:nvPr/>
+        </p:nvSpPr>
+        <p:spPr>
+          <a:xfrm>
+            <a:off x="0" y="0"/>
+            <a:ext cx="12191695" cy="164592"/>
+          </a:xfrm>
+          <a:prstGeom prst="rect">
+            <a:avLst/>
+          </a:prstGeom>
+          <a:solidFill>
+            <a:srgbClr val="269CCB"/>
+          </a:solidFill>
+          <a:ln>
+            <a:noFill/>
+          </a:ln>
+        </p:spPr>
+        <p:style>
+          <a:lnRef idx="1">
+            <a:schemeClr val="accent1"/>
+          </a:lnRef>
+          <a:fillRef idx="3">
+            <a:schemeClr val="accent1"/>
+          </a:fillRef>
+          <a:effectRef idx="2">
+            <a:schemeClr val="accent1"/>
+          </a:effectRef>
+          <a:fontRef idx="minor">
+            <a:schemeClr val="lt1"/>
+          </a:fontRef>
+        </p:style>
+        <p:txBody>
+          <a:bodyPr rtlCol="0" anchor="ctr"/>
+          <a:lstStyle/>
+          <a:p>
+            <a:pPr algn="ctr"/>
+          </a:p>
+        </p:txBody>
+      </p:sp>
+      <p:pic>
+        <p:nvPicPr>
+          <p:cNvPr id="3" name="Picture 2" descr="logo_uniajc_color.png"/>
+          <p:cNvPicPr>
+            <a:picLocks noChangeAspect="1"/>
+          </p:cNvPicPr>
+          <p:nvPr/>
+        </p:nvPicPr>
+        <p:blipFill>
+          <a:blip r:embed="rId2"/>
+          <a:stretch>
+            <a:fillRect/>
+          </a:stretch>
+        </p:blipFill>
+        <p:spPr>
+          <a:xfrm>
+            <a:off x="10271455" y="5998464"/>
+            <a:ext cx="1463040" cy="643233"/>
+          </a:xfrm>
+          <a:prstGeom prst="rect">
+            <a:avLst/>
+          </a:prstGeom>
+        </p:spPr>
+      </p:pic>
+      <p:sp>
+        <p:nvSpPr>
+          <p:cNvPr id="4" name="TextBox 3"/>
+          <p:cNvSpPr txBox="1"/>
+          <p:nvPr/>
+        </p:nvSpPr>
+        <p:spPr>
+          <a:xfrm>
+            <a:off x="457200" y="1737360"/>
+            <a:ext cx="11277295" cy="1097280"/>
+          </a:xfrm>
+          <a:prstGeom prst="rect">
+            <a:avLst/>
+          </a:prstGeom>
+          <a:noFill/>
+        </p:spPr>
+        <p:txBody>
+          <a:bodyPr wrap="square" anchor="ctr"/>
+          <a:lstStyle/>
+          <a:p>
+            <a:pPr algn="ctr"/>
+            <a:r>
+              <a:rPr sz="3400" b="1" i="0">
+                <a:solidFill>
+                  <a:srgbClr val="095292"/>
+                </a:solidFill>
+                <a:latin typeface="Calibri"/>
+              </a:rPr>
+              <a:t>Clase 10 · PI en movimiento</a:t>
+            </a:r>
+          </a:p>
+        </p:txBody>
+      </p:sp>
+      <p:sp>
+        <p:nvSpPr>
+          <p:cNvPr id="5" name="TextBox 4"/>
+          <p:cNvSpPr txBox="1"/>
+          <p:nvPr/>
+        </p:nvSpPr>
+        <p:spPr>
+          <a:xfrm>
+            <a:off x="457200" y="3017520"/>
+            <a:ext cx="11277295" cy="1645920"/>
+          </a:xfrm>
+          <a:prstGeom prst="rect">
+            <a:avLst/>
+          </a:prstGeom>
+          <a:noFill/>
+        </p:spPr>
+        <p:txBody>
+          <a:bodyPr wrap="square">
+            <a:spAutoFit/>
+          </a:bodyPr>
+          <a:lstStyle/>
+          <a:p>
+            <a:pPr algn="ctr">
+              <a:spcAft>
+                <a:spcPts val="600"/>
+              </a:spcAft>
+            </a:pPr>
+            <a:r>
+              <a:rPr sz="1600" b="0" i="0">
+                <a:solidFill>
+                  <a:srgbClr val="333333"/>
+                </a:solidFill>
+                <a:latin typeface="Calibri"/>
+              </a:rPr>
+              <a:t>Estimación cualitativa de costos + notas de sostenibilidad</a:t>
+            </a:r>
+          </a:p>
+          <a:p>
+            <a:pPr algn="ctr">
+              <a:spcAft>
+                <a:spcPts val="600"/>
+              </a:spcAft>
+            </a:pPr>
+            <a:r>
+              <a:rPr sz="1600" b="0" i="0">
+                <a:solidFill>
+                  <a:srgbClr val="333333"/>
+                </a:solidFill>
+                <a:latin typeface="Calibri"/>
+              </a:rPr>
+              <a:t>Evidencia: Sección Costos/Sostenibilidad del informe (bajo/medio + drivers)</a:t>
+            </a:r>
+          </a:p>
+          <a:p>
+            <a:pPr algn="ctr">
+              <a:spcAft>
+                <a:spcPts val="600"/>
+              </a:spcAft>
+            </a:pPr>
+            <a:r>
+              <a:rPr sz="1600" b="0" i="0">
+                <a:solidFill>
+                  <a:srgbClr val="333333"/>
+                </a:solidFill>
+                <a:latin typeface="Calibri"/>
+              </a:rPr>
+              <a:t>Siguiente paso = siguiente hito del PI CloudLite</a:t>
+            </a:r>
+          </a:p>
+        </p:txBody>
+      </p:sp>
+      <p:sp>
+        <p:nvSpPr>
+          <p:cNvPr id="6" name="TextBox 5"/>
+          <p:cNvSpPr txBox="1"/>
+          <p:nvPr/>
+        </p:nvSpPr>
+        <p:spPr>
+          <a:xfrm>
+            <a:off x="457200" y="4754880"/>
+            <a:ext cx="11277295" cy="640080"/>
+          </a:xfrm>
+          <a:prstGeom prst="rect">
+            <a:avLst/>
+          </a:prstGeom>
+          <a:noFill/>
+        </p:spPr>
+        <p:txBody>
+          <a:bodyPr wrap="square">
+            <a:spAutoFit/>
+          </a:bodyPr>
+          <a:lstStyle/>
+          <a:p>
+            <a:pPr algn="ctr"/>
+            <a:r>
+              <a:rPr sz="2000" b="1" i="0">
+                <a:solidFill>
+                  <a:srgbClr val="269CCB"/>
+                </a:solidFill>
+                <a:latin typeface="Calibri"/>
+              </a:rPr>
+              <a:t>Teoría al servicio del proyecto</a:t>
+            </a:r>
+          </a:p>
+        </p:txBody>
+      </p:sp>
+    </p:spTree>
+  </p:cSld>
+  <p:clrMapOvr>
+    <a:masterClrMapping/>
+  </p:clrMapOvr>
+</p:sld>
+</file>
+
 <file path=ppt/slides/slide3.xml><?xml version="1.0" encoding="utf-8"?>
 <p:sld xmlns:a="http://schemas.openxmlformats.org/drawingml/2006/main" xmlns:p="http://schemas.openxmlformats.org/presentationml/2006/main" xmlns:r="http://schemas.openxmlformats.org/officeDocument/2006/relationships">
   <p:cSld>
@@ -4786,7 +8916,7 @@
         <p:spPr>
           <a:xfrm>
             <a:off x="0" y="0"/>
-            <a:ext cx="12191695" cy="1170432"/>
+            <a:ext cx="12191695" cy="960120"/>
           </a:xfrm>
           <a:prstGeom prst="rect">
             <a:avLst/>
@@ -4828,7 +8958,7 @@
         </p:nvSpPr>
         <p:spPr>
           <a:xfrm>
-            <a:off x="0" y="1170432"/>
+            <a:off x="0" y="960120"/>
             <a:ext cx="12191695" cy="41148"/>
           </a:xfrm>
           <a:prstGeom prst="rect">
@@ -4872,7 +9002,7 @@
         <p:spPr>
           <a:xfrm>
             <a:off x="457200" y="164592"/>
-            <a:ext cx="11277295" cy="384048"/>
+            <a:ext cx="11277295" cy="502920"/>
           </a:xfrm>
           <a:prstGeom prst="rect">
             <a:avLst/>
@@ -4892,7 +9022,7 @@
                 </a:solidFill>
                 <a:latin typeface="Calibri"/>
               </a:rPr>
-              <a:t>Herramientas de hoy</a:t>
+              <a:t>Clase autonoma: de gasto de capital a gasto operativo medido</a:t>
             </a:r>
           </a:p>
         </p:txBody>
@@ -4905,8 +9035,8 @@
         </p:nvSpPr>
         <p:spPr>
           <a:xfrm>
-            <a:off x="457200" y="566928"/>
-            <a:ext cx="11277295" cy="411480"/>
+            <a:off x="457200" y="1170432"/>
+            <a:ext cx="11277295" cy="5230368"/>
           </a:xfrm>
           <a:prstGeom prst="rect">
             <a:avLst/>
@@ -4919,429 +9049,106 @@
           </a:bodyPr>
           <a:lstStyle/>
           <a:p>
-            <a:r>
-              <a:rPr sz="1400" b="0" i="0">
-                <a:solidFill>
-                  <a:srgbClr val="B8D8EE"/>
-                </a:solidFill>
-                <a:latin typeface="Calibri"/>
-              </a:rPr>
-              <a:t>Gratis · navegador o free tier · sin cuenta de pago</a:t>
-            </a:r>
-          </a:p>
-        </p:txBody>
-      </p:sp>
-      <p:sp>
-        <p:nvSpPr>
-          <p:cNvPr id="6" name="Rounded Rectangle 5"/>
-          <p:cNvSpPr/>
-          <p:nvPr/>
-        </p:nvSpPr>
-        <p:spPr>
-          <a:xfrm>
-            <a:off x="457200" y="1591056"/>
-            <a:ext cx="5538063" cy="2331720"/>
-          </a:xfrm>
-          <a:prstGeom prst="roundRect">
-            <a:avLst>
-              <a:gd name="adj" fmla="val 12000"/>
-            </a:avLst>
-          </a:prstGeom>
-          <a:solidFill>
-            <a:srgbClr val="F2F2F2"/>
-          </a:solidFill>
-          <a:ln>
-            <a:noFill/>
-          </a:ln>
-        </p:spPr>
-        <p:style>
-          <a:lnRef idx="1">
-            <a:schemeClr val="accent1"/>
-          </a:lnRef>
-          <a:fillRef idx="3">
-            <a:schemeClr val="accent1"/>
-          </a:fillRef>
-          <a:effectRef idx="2">
-            <a:schemeClr val="accent1"/>
-          </a:effectRef>
-          <a:fontRef idx="minor">
-            <a:schemeClr val="lt1"/>
-          </a:fontRef>
-        </p:style>
-        <p:txBody>
-          <a:bodyPr rtlCol="0" anchor="ctr"/>
-          <a:lstStyle/>
-          <a:p>
-            <a:pPr algn="ctr"/>
-          </a:p>
-        </p:txBody>
-      </p:sp>
-      <p:sp>
-        <p:nvSpPr>
-          <p:cNvPr id="7" name="Rectangle 6"/>
-          <p:cNvSpPr/>
-          <p:nvPr/>
-        </p:nvSpPr>
-        <p:spPr>
-          <a:xfrm>
-            <a:off x="457200" y="1591056"/>
-            <a:ext cx="5538063" cy="64008"/>
-          </a:xfrm>
-          <a:prstGeom prst="rect">
-            <a:avLst/>
-          </a:prstGeom>
-          <a:solidFill>
-            <a:srgbClr val="095292"/>
-          </a:solidFill>
-          <a:ln>
-            <a:noFill/>
-          </a:ln>
-        </p:spPr>
-        <p:style>
-          <a:lnRef idx="1">
-            <a:schemeClr val="accent1"/>
-          </a:lnRef>
-          <a:fillRef idx="3">
-            <a:schemeClr val="accent1"/>
-          </a:fillRef>
-          <a:effectRef idx="2">
-            <a:schemeClr val="accent1"/>
-          </a:effectRef>
-          <a:fontRef idx="minor">
-            <a:schemeClr val="lt1"/>
-          </a:fontRef>
-        </p:style>
-        <p:txBody>
-          <a:bodyPr rtlCol="0" anchor="ctr"/>
-          <a:lstStyle/>
-          <a:p>
-            <a:pPr algn="ctr"/>
-          </a:p>
-        </p:txBody>
-      </p:sp>
-      <p:sp>
-        <p:nvSpPr>
-          <p:cNvPr id="8" name="Rectangle 7"/>
-          <p:cNvSpPr/>
-          <p:nvPr/>
-        </p:nvSpPr>
-        <p:spPr>
-          <a:xfrm>
-            <a:off x="457200" y="1655064"/>
-            <a:ext cx="5538063" cy="27432"/>
-          </a:xfrm>
-          <a:prstGeom prst="rect">
-            <a:avLst/>
-          </a:prstGeom>
-          <a:solidFill>
-            <a:srgbClr val="FFD000"/>
-          </a:solidFill>
-          <a:ln>
-            <a:noFill/>
-          </a:ln>
-        </p:spPr>
-        <p:style>
-          <a:lnRef idx="1">
-            <a:schemeClr val="accent1"/>
-          </a:lnRef>
-          <a:fillRef idx="3">
-            <a:schemeClr val="accent1"/>
-          </a:fillRef>
-          <a:effectRef idx="2">
-            <a:schemeClr val="accent1"/>
-          </a:effectRef>
-          <a:fontRef idx="minor">
-            <a:schemeClr val="lt1"/>
-          </a:fontRef>
-        </p:style>
-        <p:txBody>
-          <a:bodyPr rtlCol="0" anchor="ctr"/>
-          <a:lstStyle/>
-          <a:p>
-            <a:pPr algn="ctr"/>
-          </a:p>
-        </p:txBody>
-      </p:sp>
-      <p:pic>
-        <p:nvPicPr>
-          <p:cNvPr id="9" name="Picture 8" descr="google_docs.png"/>
-          <p:cNvPicPr>
-            <a:picLocks noChangeAspect="1"/>
-          </p:cNvPicPr>
-          <p:nvPr/>
-        </p:nvPicPr>
-        <p:blipFill>
-          <a:blip r:embed="rId2"/>
-          <a:stretch>
-            <a:fillRect/>
-          </a:stretch>
-        </p:blipFill>
-        <p:spPr>
-          <a:xfrm>
-            <a:off x="2599867" y="1847087"/>
-            <a:ext cx="1252728" cy="1252728"/>
-          </a:xfrm>
-          <a:prstGeom prst="rect">
-            <a:avLst/>
-          </a:prstGeom>
-        </p:spPr>
-      </p:pic>
-      <p:sp>
-        <p:nvSpPr>
-          <p:cNvPr id="10" name="TextBox 9"/>
-          <p:cNvSpPr txBox="1"/>
-          <p:nvPr/>
-        </p:nvSpPr>
-        <p:spPr>
-          <a:xfrm>
-            <a:off x="530352" y="3191256"/>
-            <a:ext cx="5391759" cy="621792"/>
-          </a:xfrm>
-          <a:prstGeom prst="rect">
-            <a:avLst/>
-          </a:prstGeom>
-          <a:noFill/>
-        </p:spPr>
-        <p:txBody>
-          <a:bodyPr wrap="square" anchor="t"/>
-          <a:lstStyle/>
-          <a:p>
-            <a:pPr algn="ctr"/>
-            <a:r>
-              <a:rPr sz="1300" b="1" i="0">
-                <a:solidFill>
-                  <a:srgbClr val="095292"/>
-                </a:solidFill>
-                <a:latin typeface="Calibri"/>
-              </a:rPr>
-              <a:t>Google Docs</a:t>
-            </a:r>
-          </a:p>
-          <a:p>
-            <a:pPr algn="ctr">
-              <a:spcBef>
-                <a:spcPts val="200"/>
-              </a:spcBef>
+            <a:pPr>
+              <a:spcAft>
+                <a:spcPts val="800"/>
+              </a:spcAft>
             </a:pPr>
             <a:r>
-              <a:rPr sz="1000" b="0" i="0">
-                <a:solidFill>
-                  <a:srgbClr val="666666"/>
-                </a:solidFill>
-                <a:latin typeface="Calibri"/>
-              </a:rPr>
-              <a:t>Tabla de costos</a:t>
-            </a:r>
-          </a:p>
-        </p:txBody>
-      </p:sp>
-      <p:sp>
-        <p:nvSpPr>
-          <p:cNvPr id="11" name="Rounded Rectangle 10"/>
-          <p:cNvSpPr/>
-          <p:nvPr/>
-        </p:nvSpPr>
-        <p:spPr>
-          <a:xfrm>
-            <a:off x="6196431" y="1591056"/>
-            <a:ext cx="5538063" cy="2331720"/>
-          </a:xfrm>
-          <a:prstGeom prst="roundRect">
-            <a:avLst>
-              <a:gd name="adj" fmla="val 12000"/>
-            </a:avLst>
-          </a:prstGeom>
-          <a:solidFill>
-            <a:srgbClr val="F2F2F2"/>
-          </a:solidFill>
-          <a:ln>
-            <a:noFill/>
-          </a:ln>
-        </p:spPr>
-        <p:style>
-          <a:lnRef idx="1">
-            <a:schemeClr val="accent1"/>
-          </a:lnRef>
-          <a:fillRef idx="3">
-            <a:schemeClr val="accent1"/>
-          </a:fillRef>
-          <a:effectRef idx="2">
-            <a:schemeClr val="accent1"/>
-          </a:effectRef>
-          <a:fontRef idx="minor">
-            <a:schemeClr val="lt1"/>
-          </a:fontRef>
-        </p:style>
-        <p:txBody>
-          <a:bodyPr rtlCol="0" anchor="ctr"/>
-          <a:lstStyle/>
-          <a:p>
-            <a:pPr algn="ctr"/>
-          </a:p>
-        </p:txBody>
-      </p:sp>
-      <p:sp>
-        <p:nvSpPr>
-          <p:cNvPr id="12" name="Rectangle 11"/>
-          <p:cNvSpPr/>
-          <p:nvPr/>
-        </p:nvSpPr>
-        <p:spPr>
-          <a:xfrm>
-            <a:off x="6196431" y="1591056"/>
-            <a:ext cx="5538063" cy="64008"/>
-          </a:xfrm>
-          <a:prstGeom prst="rect">
-            <a:avLst/>
-          </a:prstGeom>
-          <a:solidFill>
-            <a:srgbClr val="095292"/>
-          </a:solidFill>
-          <a:ln>
-            <a:noFill/>
-          </a:ln>
-        </p:spPr>
-        <p:style>
-          <a:lnRef idx="1">
-            <a:schemeClr val="accent1"/>
-          </a:lnRef>
-          <a:fillRef idx="3">
-            <a:schemeClr val="accent1"/>
-          </a:fillRef>
-          <a:effectRef idx="2">
-            <a:schemeClr val="accent1"/>
-          </a:effectRef>
-          <a:fontRef idx="minor">
-            <a:schemeClr val="lt1"/>
-          </a:fontRef>
-        </p:style>
-        <p:txBody>
-          <a:bodyPr rtlCol="0" anchor="ctr"/>
-          <a:lstStyle/>
-          <a:p>
-            <a:pPr algn="ctr"/>
-          </a:p>
-        </p:txBody>
-      </p:sp>
-      <p:sp>
-        <p:nvSpPr>
-          <p:cNvPr id="13" name="Rectangle 12"/>
-          <p:cNvSpPr/>
-          <p:nvPr/>
-        </p:nvSpPr>
-        <p:spPr>
-          <a:xfrm>
-            <a:off x="6196431" y="1655064"/>
-            <a:ext cx="5538063" cy="27432"/>
-          </a:xfrm>
-          <a:prstGeom prst="rect">
-            <a:avLst/>
-          </a:prstGeom>
-          <a:solidFill>
-            <a:srgbClr val="FFD000"/>
-          </a:solidFill>
-          <a:ln>
-            <a:noFill/>
-          </a:ln>
-        </p:spPr>
-        <p:style>
-          <a:lnRef idx="1">
-            <a:schemeClr val="accent1"/>
-          </a:lnRef>
-          <a:fillRef idx="3">
-            <a:schemeClr val="accent1"/>
-          </a:fillRef>
-          <a:effectRef idx="2">
-            <a:schemeClr val="accent1"/>
-          </a:effectRef>
-          <a:fontRef idx="minor">
-            <a:schemeClr val="lt1"/>
-          </a:fontRef>
-        </p:style>
-        <p:txBody>
-          <a:bodyPr rtlCol="0" anchor="ctr"/>
-          <a:lstStyle/>
-          <a:p>
-            <a:pPr algn="ctr"/>
-          </a:p>
-        </p:txBody>
-      </p:sp>
-      <p:pic>
-        <p:nvPicPr>
-          <p:cNvPr id="14" name="Picture 13" descr="examlab.png"/>
-          <p:cNvPicPr>
-            <a:picLocks noChangeAspect="1"/>
-          </p:cNvPicPr>
-          <p:nvPr/>
-        </p:nvPicPr>
-        <p:blipFill>
-          <a:blip r:embed="rId3"/>
-          <a:stretch>
-            <a:fillRect/>
-          </a:stretch>
-        </p:blipFill>
-        <p:spPr>
-          <a:xfrm>
-            <a:off x="8339099" y="1847087"/>
-            <a:ext cx="1252728" cy="1252728"/>
-          </a:xfrm>
-          <a:prstGeom prst="rect">
-            <a:avLst/>
-          </a:prstGeom>
-        </p:spPr>
-      </p:pic>
-      <p:sp>
-        <p:nvSpPr>
-          <p:cNvPr id="15" name="TextBox 14"/>
-          <p:cNvSpPr txBox="1"/>
-          <p:nvPr/>
-        </p:nvSpPr>
-        <p:spPr>
-          <a:xfrm>
-            <a:off x="6269583" y="3191256"/>
-            <a:ext cx="5391759" cy="621792"/>
-          </a:xfrm>
-          <a:prstGeom prst="rect">
-            <a:avLst/>
-          </a:prstGeom>
-          <a:noFill/>
-        </p:spPr>
-        <p:txBody>
-          <a:bodyPr wrap="square" anchor="t"/>
-          <a:lstStyle/>
-          <a:p>
-            <a:pPr algn="ctr"/>
-            <a:r>
-              <a:rPr sz="1300" b="1" i="0">
-                <a:solidFill>
-                  <a:srgbClr val="095292"/>
-                </a:solidFill>
-                <a:latin typeface="Calibri"/>
-              </a:rPr>
-              <a:t>la plataforma del curso</a:t>
-            </a:r>
-          </a:p>
-          <a:p>
-            <a:pPr algn="ctr">
-              <a:spcBef>
-                <a:spcPts val="200"/>
-              </a:spcBef>
+              <a:rPr sz="2000" b="0" i="0">
+                <a:solidFill>
+                  <a:srgbClr val="333333"/>
+                </a:solidFill>
+                <a:latin typeface="Calibri"/>
+              </a:rPr>
+              <a:t>–   Esta clase es autonoma por festivo: no hay encuentro sincronico y este fundamento se publica tal cual como material de lectura, asi que debe sostener por si solo la comprension del tema.</a:t>
+            </a:r>
+          </a:p>
+          <a:p>
+            <a:pPr>
+              <a:spcAft>
+                <a:spcPts val="800"/>
+              </a:spcAft>
             </a:pPr>
             <a:r>
-              <a:rPr sz="1000" b="0" i="0">
-                <a:solidFill>
-                  <a:srgbClr val="666666"/>
-                </a:solidFill>
-                <a:latin typeface="Calibri"/>
-              </a:rPr>
-              <a:t>Donde se entrega</a:t>
-            </a:r>
-          </a:p>
-        </p:txBody>
-      </p:sp>
-      <p:sp>
-        <p:nvSpPr>
-          <p:cNvPr id="16" name="TextBox 15"/>
+              <a:rPr sz="2000" b="0" i="0">
+                <a:solidFill>
+                  <a:srgbClr val="333333"/>
+                </a:solidFill>
+                <a:latin typeface="Calibri"/>
+              </a:rPr>
+              <a:t>–   En un centro de datos propio el gasto es de capital: se compra un servidor, se paga por adelantado, se amortiza en tres o cinco anos, y desde ese momento dejarlo encendido una hora mas no aparece en ninguna factura visible.</a:t>
+            </a:r>
+          </a:p>
+          <a:p>
+            <a:pPr>
+              <a:spcAft>
+                <a:spcPts val="800"/>
+              </a:spcAft>
+            </a:pPr>
+            <a:r>
+              <a:rPr sz="2000" b="0" i="0">
+                <a:solidFill>
+                  <a:srgbClr val="333333"/>
+                </a:solidFill>
+                <a:latin typeface="Calibri"/>
+              </a:rPr>
+              <a:t>–   En la nube el gasto es operativo y medido: se paga por segundo de computo, por gigabyte almacenado al mes, por gigabyte que sale hacia internet y por peticion atendida.</a:t>
+            </a:r>
+          </a:p>
+          <a:p>
+            <a:pPr>
+              <a:spcAft>
+                <a:spcPts val="800"/>
+              </a:spcAft>
+            </a:pPr>
+            <a:r>
+              <a:rPr sz="2000" b="0" i="0">
+                <a:solidFill>
+                  <a:srgbClr val="333333"/>
+                </a:solidFill>
+                <a:latin typeface="Calibri"/>
+              </a:rPr>
+              <a:t>–   El cambio no es contable sino arquitectonico.</a:t>
+            </a:r>
+          </a:p>
+          <a:p>
+            <a:pPr>
+              <a:spcAft>
+                <a:spcPts val="800"/>
+              </a:spcAft>
+            </a:pPr>
+            <a:r>
+              <a:rPr sz="2000" b="0" i="0">
+                <a:solidFill>
+                  <a:srgbClr val="333333"/>
+                </a:solidFill>
+                <a:latin typeface="Calibri"/>
+              </a:rPr>
+              <a:t>–   Cuando cada recurso tiene precio unitario, casi cualquier decision de diseno se convierte en una cifra mensual y el arquitecto pasa a ser corresponsable del gasto.</a:t>
+            </a:r>
+          </a:p>
+          <a:p>
+            <a:pPr>
+              <a:spcAft>
+                <a:spcPts val="800"/>
+              </a:spcAft>
+            </a:pPr>
+            <a:r>
+              <a:rPr sz="2000" b="0" i="0">
+                <a:solidFill>
+                  <a:srgbClr val="333333"/>
+                </a:solidFill>
+                <a:latin typeface="Calibri"/>
+              </a:rPr>
+              <a:t>–   Esa es la razon por la que este tema vive en un curso de arquitectura y no en uno de administracion.</a:t>
+            </a:r>
+          </a:p>
+        </p:txBody>
+      </p:sp>
+      <p:sp>
+        <p:nvSpPr>
+          <p:cNvPr id="6" name="TextBox 5"/>
           <p:cNvSpPr txBox="1"/>
           <p:nvPr/>
         </p:nvSpPr>
@@ -5515,7 +9322,7 @@
                 </a:solidFill>
                 <a:latin typeface="Calibri"/>
               </a:rPr>
-              <a:t>PI CloudLite — entregable de hoy</a:t>
+              <a:t>CloudLite no tiene factura real, y por que igual se estima</a:t>
             </a:r>
           </a:p>
         </p:txBody>
@@ -5554,25 +9361,7 @@
                 </a:solidFill>
                 <a:latin typeface="Calibri"/>
               </a:rPr>
-              <a:t>–   </a:t>
-            </a:r>
-            <a:r>
-              <a:rPr sz="2000" b="1" i="0">
-                <a:solidFill>
-                  <a:srgbClr val="333333"/>
-                </a:solidFill>
-                <a:latin typeface="Calibri"/>
-              </a:rPr>
-              <a:t>Entregable:</a:t>
-            </a:r>
-            <a:r>
-              <a:rPr sz="2000" b="0" i="0">
-                <a:solidFill>
-                  <a:srgbClr val="333333"/>
-                </a:solidFill>
-                <a:latin typeface="Calibri"/>
-              </a:rPr>
-              <a:t> Sección Costos/Sostenibilidad del informe (bajo/medio + drivers)</a:t>
+              <a:t>–   CloudLite App no tiene facturacion real y no la va a tener: el curso prohibe cuentas cloud de pago y tarjetas de credito, y todo se trabaja con draw.io, Excalidraw, Killercoda y el free tier de GitHub Actions.</a:t>
             </a:r>
           </a:p>
           <a:p>
@@ -5588,16 +9377,7 @@
                 </a:solidFill>
                 <a:latin typeface="Calibri"/>
               </a:rPr>
-              <a:t>–   Herramienta: </a:t>
-            </a:r>
-            <a:r>
-              <a:rPr sz="2000" b="1" i="0">
-                <a:solidFill>
-                  <a:srgbClr val="333333"/>
-                </a:solidFill>
-                <a:latin typeface="Calibri"/>
-              </a:rPr>
-              <a:t>Google Docs</a:t>
+              <a:t>–   Eso no impide el analisis de costo, solo cambia la escala de medida.</a:t>
             </a:r>
           </a:p>
           <a:p>
@@ -5613,25 +9393,7 @@
                 </a:solidFill>
                 <a:latin typeface="Calibri"/>
               </a:rPr>
-              <a:t>–   Todo lo que construyan hoy entra al </a:t>
-            </a:r>
-            <a:r>
-              <a:rPr sz="2000" b="1" i="0">
-                <a:solidFill>
-                  <a:srgbClr val="333333"/>
-                </a:solidFill>
-                <a:latin typeface="Calibri"/>
-              </a:rPr>
-              <a:t>informe/repo del PI</a:t>
-            </a:r>
-            <a:r>
-              <a:rPr sz="2000" b="0" i="0">
-                <a:solidFill>
-                  <a:srgbClr val="333333"/>
-                </a:solidFill>
-                <a:latin typeface="Calibri"/>
-              </a:rPr>
-              <a:t> (no es lab suelto).</a:t>
+              <a:t>–   En vez de pesos se usa una escala ordinal de tres niveles, Bajo, Medio y Alto, asignada componente por componente.</a:t>
             </a:r>
           </a:p>
           <a:p>
@@ -5647,7 +9409,71 @@
                 </a:solidFill>
                 <a:latin typeface="Calibri"/>
               </a:rPr>
-              <a:t>–   Individual por defecto · el docente puede autorizar equipos de 2–3; la entrega en la plataforma del curso siempre es individual.</a:t>
+              <a:t>–   Una escala ordinal ordena pero no mide distancias: decir que la base de datos es Alto y el frontend estatico es Bajo afirma que uno cuesta mas que el otro, no cuantas veces mas.</a:t>
+            </a:r>
+          </a:p>
+          <a:p>
+            <a:pPr>
+              <a:spcAft>
+                <a:spcPts val="800"/>
+              </a:spcAft>
+            </a:pPr>
+            <a:r>
+              <a:rPr sz="2000" b="0" i="0">
+                <a:solidFill>
+                  <a:srgbClr val="333333"/>
+                </a:solidFill>
+                <a:latin typeface="Calibri"/>
+              </a:rPr>
+              <a:t>–   Alcanza de sobra para el objetivo real, que es identificar el driver de costo de cada componente.</a:t>
+            </a:r>
+          </a:p>
+          <a:p>
+            <a:pPr>
+              <a:spcAft>
+                <a:spcPts val="800"/>
+              </a:spcAft>
+            </a:pPr>
+            <a:r>
+              <a:rPr sz="2000" b="0" i="0">
+                <a:solidFill>
+                  <a:srgbClr val="333333"/>
+                </a:solidFill>
+                <a:latin typeface="Calibri"/>
+              </a:rPr>
+              <a:t>–   Un driver de costo es la variable concreta que, si crece, hace crecer la factura de ese componente</a:t>
+            </a:r>
+          </a:p>
+          <a:p>
+            <a:pPr>
+              <a:spcAft>
+                <a:spcPts val="800"/>
+              </a:spcAft>
+            </a:pPr>
+            <a:r>
+              <a:rPr sz="2000" b="0" i="0">
+                <a:solidFill>
+                  <a:srgbClr val="333333"/>
+                </a:solidFill>
+                <a:latin typeface="Calibri"/>
+              </a:rPr>
+              <a:t>–   No es "el uso" en abstracto sino algo contable: instancias encendidas, horas encendidas, gigabytes almacenados, gigabytes de trafico de salida, numero de peticiones, gigabytes de logs ingeridos.</a:t>
+            </a:r>
+          </a:p>
+          <a:p>
+            <a:pPr>
+              <a:spcAft>
+                <a:spcPts val="800"/>
+              </a:spcAft>
+            </a:pPr>
+            <a:r>
+              <a:rPr sz="2000" b="0" i="0">
+                <a:solidFill>
+                  <a:srgbClr val="333333"/>
+                </a:solidFill>
+                <a:latin typeface="Calibri"/>
+              </a:rPr>
+              <a:t>–   Un componente al que el estudiante no le sabe poner driver es un componente que todavia no entiende.</a:t>
             </a:r>
           </a:p>
         </p:txBody>
@@ -5828,7 +9654,7 @@
                 </a:solidFill>
                 <a:latin typeface="Calibri"/>
               </a:rPr>
-              <a:t>Manos a la obra (paso a paso)</a:t>
+              <a:t>Ordenes de magnitud que el docente debe poder citar</a:t>
             </a:r>
           </a:p>
         </p:txBody>
@@ -5861,22 +9687,13 @@
               </a:spcAft>
             </a:pPr>
             <a:r>
-              <a:rPr sz="2000" b="1" i="0">
-                <a:solidFill>
-                  <a:srgbClr val="333333"/>
-                </a:solidFill>
-                <a:latin typeface="Calibri"/>
-              </a:rPr>
-              <a:t>1.</a:t>
-            </a:r>
-            <a:r>
               <a:rPr sz="2000" b="0" i="0">
                 <a:solidFill>
                   <a:srgbClr val="333333"/>
                 </a:solidFill>
                 <a:latin typeface="Calibri"/>
               </a:rPr>
-              <a:t> Paso 1: construya en la pregunta 11 la tabla de costos con una fila por cada componente de su despliegue y las columnas componente, driver, nivel B/M/A y apalancamiento; verifique que cada driver sea una variable contable (horas encendidas, GB de salida, GB almacenados, minutos de CI) y no «el uso».</a:t>
+              <a:t>–   Una instancia pequena de 2 vCPU y 4 GB encendida todo el mes cuesta del orden de 25 a 40 dolares.</a:t>
             </a:r>
           </a:p>
           <a:p>
@@ -5892,25 +9709,7 @@
                 </a:solidFill>
                 <a:latin typeface="Calibri"/>
               </a:rPr>
-              <a:t>–   </a:t>
-            </a:r>
-            <a:r>
-              <a:rPr sz="2000" b="1" i="0">
-                <a:solidFill>
-                  <a:srgbClr val="333333"/>
-                </a:solidFill>
-                <a:latin typeface="Calibri"/>
-              </a:rPr>
-              <a:t>2.</a:t>
-            </a:r>
-            <a:r>
-              <a:rPr sz="2000" b="0" i="0">
-                <a:solidFill>
-                  <a:srgbClr val="333333"/>
-                </a:solidFill>
-                <a:latin typeface="Calibri"/>
-              </a:rPr>
-              <a:t> Paso 2: fuerce al menos un Alto y un Bajo con su justificacion. Marcar todo como Medio para no decidir es lo que la pregunta busca descartar, y ese criterio vale cero si todas las filas quedan iguales.</a:t>
+              <a:t>–   El almacenamiento de objetos cuesta del orden de 0.02 a 0.03 dolares por gigabyte al mes, es decir casi nada.</a:t>
             </a:r>
           </a:p>
           <a:p>
@@ -5926,25 +9725,7 @@
                 </a:solidFill>
                 <a:latin typeface="Calibri"/>
               </a:rPr>
-              <a:t>–   </a:t>
-            </a:r>
-            <a:r>
-              <a:rPr sz="2000" b="1" i="0">
-                <a:solidFill>
-                  <a:srgbClr val="333333"/>
-                </a:solidFill>
-                <a:latin typeface="Calibri"/>
-              </a:rPr>
-              <a:t>3.</a:t>
-            </a:r>
-            <a:r>
-              <a:rPr sz="2000" b="0" i="0">
-                <a:solidFill>
-                  <a:srgbClr val="333333"/>
-                </a:solidFill>
-                <a:latin typeface="Calibri"/>
-              </a:rPr>
-              <a:t> Paso 3: escriba en la pregunta 12 tres acciones de sostenibilidad, cada una con el artefacto donde se comprueba y como se comprueba; aplique la prueba de que otra persona pueda decir en seis meses, mirando el repositorio, si la accion se aplico.</a:t>
+              <a:t>–   El trafico de salida hacia internet, llamado egress, cuesta del orden de 0.08 a 0.12 dolares por gigabyte: unas cuatro veces mas caro por gigabyte que guardarlo un mes entero.</a:t>
             </a:r>
           </a:p>
           <a:p>
@@ -5960,17 +9741,15 @@
                 </a:solidFill>
                 <a:latin typeface="Calibri"/>
               </a:rPr>
-              <a:t>–   </a:t>
-            </a:r>
-            <a:r>
-              <a:rPr sz="2000" b="1" i="0">
-                <a:solidFill>
-                  <a:srgbClr val="333333"/>
-                </a:solidFill>
-                <a:latin typeface="Calibri"/>
-              </a:rPr>
-              <a:t>4.</a:t>
-            </a:r>
+              <a:t>–   Una base de datos gestionada cuesta entre dos y tres veces la maquina desnuda equivalente, porque incluye respaldos, parches y conmutacion por falla.</a:t>
+            </a:r>
+          </a:p>
+          <a:p>
+            <a:pPr>
+              <a:spcAft>
+                <a:spcPts val="800"/>
+              </a:spcAft>
+            </a:pPr>
             <a:r>
               <a:rPr sz="2000" b="0" i="0">
                 <a:solidFill>
@@ -5978,7 +9757,39 @@
                 </a:solidFill>
                 <a:latin typeface="Calibri"/>
               </a:rPr>
-              <a:t> Paso 4: ate al menos una de las tres acciones a un driver de costo de la pregunta 11 y suba la actividad completa del Corte 2 a la plataforma del curso antes del en la fecha que indique el docente. Es una clase autonoma: no hay encuentro sincrono, y las dudas van por el foro.</a:t>
+              <a:t>–   Un balanceador de carga cobra una tarifa fija de 18 a 25 dolares al mes incluso con cero trafico.</a:t>
+            </a:r>
+          </a:p>
+          <a:p>
+            <a:pPr>
+              <a:spcAft>
+                <a:spcPts val="800"/>
+              </a:spcAft>
+            </a:pPr>
+            <a:r>
+              <a:rPr sz="2000" b="0" i="0">
+                <a:solidFill>
+                  <a:srgbClr val="333333"/>
+                </a:solidFill>
+                <a:latin typeface="Calibri"/>
+              </a:rPr>
+              <a:t>–   Una funcion serverless suele traer free tier de alrededor de un millon de invocaciones mensuales, asi que un componente poco usado cuesta cero de verdad.</a:t>
+            </a:r>
+          </a:p>
+          <a:p>
+            <a:pPr>
+              <a:spcAft>
+                <a:spcPts val="800"/>
+              </a:spcAft>
+            </a:pPr>
+            <a:r>
+              <a:rPr sz="2000" b="0" i="0">
+                <a:solidFill>
+                  <a:srgbClr val="333333"/>
+                </a:solidFill>
+                <a:latin typeface="Calibri"/>
+              </a:rPr>
+              <a:t>–   La leccion durable son tres proporciones: guardar es barato, mover datos hacia afuera es caro, y estar prendido sin hacer nada tambien cuesta.</a:t>
             </a:r>
           </a:p>
         </p:txBody>
@@ -6159,109 +9970,21 @@
                 </a:solidFill>
                 <a:latin typeface="Calibri"/>
               </a:rPr>
-              <a:t>Para continuar (PI)</a:t>
-            </a:r>
-          </a:p>
-        </p:txBody>
-      </p:sp>
-      <p:sp>
-        <p:nvSpPr>
-          <p:cNvPr id="5" name="Rounded Rectangle 4"/>
-          <p:cNvSpPr/>
-          <p:nvPr/>
-        </p:nvSpPr>
-        <p:spPr>
-          <a:xfrm>
-            <a:off x="457200" y="1261872"/>
-            <a:ext cx="11277295" cy="1051560"/>
-          </a:xfrm>
-          <a:prstGeom prst="roundRect">
-            <a:avLst>
-              <a:gd name="adj" fmla="val 12000"/>
-            </a:avLst>
-          </a:prstGeom>
-          <a:solidFill>
-            <a:srgbClr val="E8F4FA"/>
-          </a:solidFill>
-          <a:ln>
-            <a:noFill/>
-          </a:ln>
-        </p:spPr>
-        <p:style>
-          <a:lnRef idx="1">
-            <a:schemeClr val="accent1"/>
-          </a:lnRef>
-          <a:fillRef idx="3">
-            <a:schemeClr val="accent1"/>
-          </a:fillRef>
-          <a:effectRef idx="2">
-            <a:schemeClr val="accent1"/>
-          </a:effectRef>
-          <a:fontRef idx="minor">
-            <a:schemeClr val="lt1"/>
-          </a:fontRef>
-        </p:style>
-        <p:txBody>
-          <a:bodyPr rtlCol="0" anchor="ctr"/>
-          <a:lstStyle/>
-          <a:p>
-            <a:pPr algn="ctr"/>
-          </a:p>
-        </p:txBody>
-      </p:sp>
-      <p:sp>
-        <p:nvSpPr>
-          <p:cNvPr id="6" name="Rectangle 5"/>
-          <p:cNvSpPr/>
-          <p:nvPr/>
-        </p:nvSpPr>
-        <p:spPr>
-          <a:xfrm>
-            <a:off x="457200" y="1261872"/>
-            <a:ext cx="128016" cy="1051560"/>
-          </a:xfrm>
-          <a:prstGeom prst="rect">
-            <a:avLst/>
-          </a:prstGeom>
-          <a:solidFill>
-            <a:srgbClr val="269CCB"/>
-          </a:solidFill>
-          <a:ln>
-            <a:noFill/>
-          </a:ln>
-        </p:spPr>
-        <p:style>
-          <a:lnRef idx="1">
-            <a:schemeClr val="accent1"/>
-          </a:lnRef>
-          <a:fillRef idx="3">
-            <a:schemeClr val="accent1"/>
-          </a:fillRef>
-          <a:effectRef idx="2">
-            <a:schemeClr val="accent1"/>
-          </a:effectRef>
-          <a:fontRef idx="minor">
-            <a:schemeClr val="lt1"/>
-          </a:fontRef>
-        </p:style>
-        <p:txBody>
-          <a:bodyPr rtlCol="0" anchor="ctr"/>
-          <a:lstStyle/>
-          <a:p>
-            <a:pPr algn="ctr"/>
-          </a:p>
-        </p:txBody>
-      </p:sp>
-      <p:sp>
-        <p:nvSpPr>
-          <p:cNvPr id="7" name="TextBox 6"/>
+              <a:t>Primer ejemplo: la tabla del entregable, componente por componente</a:t>
+            </a:r>
+          </a:p>
+        </p:txBody>
+      </p:sp>
+      <p:sp>
+        <p:nvSpPr>
+          <p:cNvPr id="5" name="TextBox 4"/>
           <p:cNvSpPr txBox="1"/>
           <p:nvPr/>
         </p:nvSpPr>
         <p:spPr>
           <a:xfrm>
-            <a:off x="777240" y="1399031"/>
-            <a:ext cx="10774375" cy="822959"/>
+            <a:off x="457200" y="1170432"/>
+            <a:ext cx="11277295" cy="5230368"/>
           </a:xfrm>
           <a:prstGeom prst="rect">
             <a:avLst/>
@@ -6274,313 +9997,122 @@
           </a:bodyPr>
           <a:lstStyle/>
           <a:p>
-            <a:r>
-              <a:rPr sz="1200" b="1" i="0">
-                <a:solidFill>
-                  <a:srgbClr val="269CCB"/>
-                </a:solidFill>
-                <a:latin typeface="Calibri"/>
-              </a:rPr>
-              <a:t>Info</a:t>
-            </a:r>
-          </a:p>
-          <a:p>
             <a:pPr>
-              <a:spcBef>
-                <a:spcPts val="400"/>
-              </a:spcBef>
+              <a:spcAft>
+                <a:spcPts val="800"/>
+              </a:spcAft>
             </a:pPr>
             <a:r>
-              <a:rPr sz="1400" b="0" i="0">
-                <a:solidFill>
-                  <a:srgbClr val="333333"/>
-                </a:solidFill>
-                <a:latin typeface="Calibri"/>
-              </a:rPr>
-              <a:t>Entregable: Sección Costos/Sostenibilidad del informe (bajo/medio + drivers)</a:t>
-            </a:r>
-          </a:p>
-        </p:txBody>
-      </p:sp>
-      <p:sp>
-        <p:nvSpPr>
-          <p:cNvPr id="8" name="Rounded Rectangle 7"/>
-          <p:cNvSpPr/>
-          <p:nvPr/>
-        </p:nvSpPr>
-        <p:spPr>
-          <a:xfrm>
-            <a:off x="457200" y="2478024"/>
-            <a:ext cx="11277295" cy="1051560"/>
-          </a:xfrm>
-          <a:prstGeom prst="roundRect">
-            <a:avLst>
-              <a:gd name="adj" fmla="val 12000"/>
-            </a:avLst>
-          </a:prstGeom>
-          <a:solidFill>
-            <a:srgbClr val="FFF8E1"/>
-          </a:solidFill>
-          <a:ln>
-            <a:noFill/>
-          </a:ln>
-        </p:spPr>
-        <p:style>
-          <a:lnRef idx="1">
-            <a:schemeClr val="accent1"/>
-          </a:lnRef>
-          <a:fillRef idx="3">
-            <a:schemeClr val="accent1"/>
-          </a:fillRef>
-          <a:effectRef idx="2">
-            <a:schemeClr val="accent1"/>
-          </a:effectRef>
-          <a:fontRef idx="minor">
-            <a:schemeClr val="lt1"/>
-          </a:fontRef>
-        </p:style>
-        <p:txBody>
-          <a:bodyPr rtlCol="0" anchor="ctr"/>
-          <a:lstStyle/>
-          <a:p>
-            <a:pPr algn="ctr"/>
-          </a:p>
-        </p:txBody>
-      </p:sp>
-      <p:sp>
-        <p:nvSpPr>
-          <p:cNvPr id="9" name="Rectangle 8"/>
-          <p:cNvSpPr/>
-          <p:nvPr/>
-        </p:nvSpPr>
-        <p:spPr>
-          <a:xfrm>
-            <a:off x="457200" y="2478024"/>
-            <a:ext cx="128016" cy="1051560"/>
-          </a:xfrm>
-          <a:prstGeom prst="rect">
-            <a:avLst/>
-          </a:prstGeom>
-          <a:solidFill>
-            <a:srgbClr val="FFD000"/>
-          </a:solidFill>
-          <a:ln>
-            <a:noFill/>
-          </a:ln>
-        </p:spPr>
-        <p:style>
-          <a:lnRef idx="1">
-            <a:schemeClr val="accent1"/>
-          </a:lnRef>
-          <a:fillRef idx="3">
-            <a:schemeClr val="accent1"/>
-          </a:fillRef>
-          <a:effectRef idx="2">
-            <a:schemeClr val="accent1"/>
-          </a:effectRef>
-          <a:fontRef idx="minor">
-            <a:schemeClr val="lt1"/>
-          </a:fontRef>
-        </p:style>
-        <p:txBody>
-          <a:bodyPr rtlCol="0" anchor="ctr"/>
-          <a:lstStyle/>
-          <a:p>
-            <a:pPr algn="ctr"/>
-          </a:p>
-        </p:txBody>
-      </p:sp>
-      <p:sp>
-        <p:nvSpPr>
-          <p:cNvPr id="10" name="TextBox 9"/>
-          <p:cNvSpPr txBox="1"/>
-          <p:nvPr/>
-        </p:nvSpPr>
-        <p:spPr>
-          <a:xfrm>
-            <a:off x="777240" y="2615184"/>
-            <a:ext cx="10774375" cy="822959"/>
-          </a:xfrm>
-          <a:prstGeom prst="rect">
-            <a:avLst/>
-          </a:prstGeom>
-          <a:noFill/>
-        </p:spPr>
-        <p:txBody>
-          <a:bodyPr wrap="square">
-            <a:spAutoFit/>
-          </a:bodyPr>
-          <a:lstStyle/>
-          <a:p>
-            <a:r>
-              <a:rPr sz="1200" b="1" i="0">
-                <a:solidFill>
-                  <a:srgbClr val="FFD000"/>
-                </a:solidFill>
-                <a:latin typeface="Calibri"/>
-              </a:rPr>
-              <a:t>Aclaración</a:t>
+              <a:rPr sz="2000" b="0" i="0">
+                <a:solidFill>
+                  <a:srgbClr val="333333"/>
+                </a:solidFill>
+                <a:latin typeface="Calibri"/>
+              </a:rPr>
+              <a:t>–   El contenedor de la API queda en Medio, con driver instancias por horas encendidas.</a:t>
             </a:r>
           </a:p>
           <a:p>
             <a:pPr>
-              <a:spcBef>
-                <a:spcPts val="400"/>
-              </a:spcBef>
+              <a:spcAft>
+                <a:spcPts val="800"/>
+              </a:spcAft>
             </a:pPr>
             <a:r>
-              <a:rPr sz="1400" b="0" i="0">
-                <a:solidFill>
-                  <a:srgbClr val="333333"/>
-                </a:solidFill>
-                <a:latin typeface="Calibri"/>
-              </a:rPr>
-              <a:t>Subir evidencias al paquete CloudLite (Drive/repo) y a la plataforma del curso en la fecha que indique el docente.</a:t>
-            </a:r>
-          </a:p>
-        </p:txBody>
-      </p:sp>
-      <p:sp>
-        <p:nvSpPr>
-          <p:cNvPr id="11" name="Rounded Rectangle 10"/>
-          <p:cNvSpPr/>
-          <p:nvPr/>
-        </p:nvSpPr>
-        <p:spPr>
-          <a:xfrm>
-            <a:off x="457200" y="3694176"/>
-            <a:ext cx="11277295" cy="1051560"/>
-          </a:xfrm>
-          <a:prstGeom prst="roundRect">
-            <a:avLst>
-              <a:gd name="adj" fmla="val 12000"/>
-            </a:avLst>
-          </a:prstGeom>
-          <a:solidFill>
-            <a:srgbClr val="FBE4E4"/>
-          </a:solidFill>
-          <a:ln>
-            <a:noFill/>
-          </a:ln>
-        </p:spPr>
-        <p:style>
-          <a:lnRef idx="1">
-            <a:schemeClr val="accent1"/>
-          </a:lnRef>
-          <a:fillRef idx="3">
-            <a:schemeClr val="accent1"/>
-          </a:fillRef>
-          <a:effectRef idx="2">
-            <a:schemeClr val="accent1"/>
-          </a:effectRef>
-          <a:fontRef idx="minor">
-            <a:schemeClr val="lt1"/>
-          </a:fontRef>
-        </p:style>
-        <p:txBody>
-          <a:bodyPr rtlCol="0" anchor="ctr"/>
-          <a:lstStyle/>
-          <a:p>
-            <a:pPr algn="ctr"/>
-          </a:p>
-        </p:txBody>
-      </p:sp>
-      <p:sp>
-        <p:nvSpPr>
-          <p:cNvPr id="12" name="Rectangle 11"/>
-          <p:cNvSpPr/>
-          <p:nvPr/>
-        </p:nvSpPr>
-        <p:spPr>
-          <a:xfrm>
-            <a:off x="457200" y="3694176"/>
-            <a:ext cx="128016" cy="1051560"/>
-          </a:xfrm>
-          <a:prstGeom prst="rect">
-            <a:avLst/>
-          </a:prstGeom>
-          <a:solidFill>
-            <a:srgbClr val="A02030"/>
-          </a:solidFill>
-          <a:ln>
-            <a:noFill/>
-          </a:ln>
-        </p:spPr>
-        <p:style>
-          <a:lnRef idx="1">
-            <a:schemeClr val="accent1"/>
-          </a:lnRef>
-          <a:fillRef idx="3">
-            <a:schemeClr val="accent1"/>
-          </a:fillRef>
-          <a:effectRef idx="2">
-            <a:schemeClr val="accent1"/>
-          </a:effectRef>
-          <a:fontRef idx="minor">
-            <a:schemeClr val="lt1"/>
-          </a:fontRef>
-        </p:style>
-        <p:txBody>
-          <a:bodyPr rtlCol="0" anchor="ctr"/>
-          <a:lstStyle/>
-          <a:p>
-            <a:pPr algn="ctr"/>
-          </a:p>
-        </p:txBody>
-      </p:sp>
-      <p:sp>
-        <p:nvSpPr>
-          <p:cNvPr id="13" name="TextBox 12"/>
-          <p:cNvSpPr txBox="1"/>
-          <p:nvPr/>
-        </p:nvSpPr>
-        <p:spPr>
-          <a:xfrm>
-            <a:off x="777240" y="3831336"/>
-            <a:ext cx="10774375" cy="822959"/>
-          </a:xfrm>
-          <a:prstGeom prst="rect">
-            <a:avLst/>
-          </a:prstGeom>
-          <a:noFill/>
-        </p:spPr>
-        <p:txBody>
-          <a:bodyPr wrap="square">
-            <a:spAutoFit/>
-          </a:bodyPr>
-          <a:lstStyle/>
-          <a:p>
-            <a:r>
-              <a:rPr sz="1200" b="1" i="0">
-                <a:solidFill>
-                  <a:srgbClr val="A02030"/>
-                </a:solidFill>
-                <a:latin typeface="Calibri"/>
-              </a:rPr>
-              <a:t>Atención</a:t>
+              <a:rPr sz="2000" b="0" i="0">
+                <a:solidFill>
+                  <a:srgbClr val="333333"/>
+                </a:solidFill>
+                <a:latin typeface="Calibri"/>
+              </a:rPr>
+              <a:t>–   La base de datos queda en Alto con un argumento preciso: paga computo las 24 horas de los 30 dias aunque nadie consulte, mas almacenamiento que nunca baja, mas respaldos.</a:t>
             </a:r>
           </a:p>
           <a:p>
             <a:pPr>
-              <a:spcBef>
-                <a:spcPts val="400"/>
-              </a:spcBef>
+              <a:spcAft>
+                <a:spcPts val="800"/>
+              </a:spcAft>
             </a:pPr>
             <a:r>
-              <a:rPr sz="1400" b="0" i="0">
-                <a:solidFill>
-                  <a:srgbClr val="333333"/>
-                </a:solidFill>
-                <a:latin typeface="Calibri"/>
-              </a:rPr>
-              <a:t>Sin cloud de pago ni instalaciones obligatorias de hipervisores/Docker Desktop.</a:t>
-            </a:r>
-          </a:p>
-        </p:txBody>
-      </p:sp>
-      <p:sp>
-        <p:nvSpPr>
-          <p:cNvPr id="14" name="TextBox 13"/>
+              <a:rPr sz="2000" b="0" i="0">
+                <a:solidFill>
+                  <a:srgbClr val="333333"/>
+                </a:solidFill>
+                <a:latin typeface="Calibri"/>
+              </a:rPr>
+              <a:t>–   El frontend estatico queda en Bajo porque es almacenamiento mas trafico y no tiene computo propio.</a:t>
+            </a:r>
+          </a:p>
+          <a:p>
+            <a:pPr>
+              <a:spcAft>
+                <a:spcPts val="800"/>
+              </a:spcAft>
+            </a:pPr>
+            <a:r>
+              <a:rPr sz="2000" b="0" i="0">
+                <a:solidFill>
+                  <a:srgbClr val="333333"/>
+                </a:solidFill>
+                <a:latin typeface="Calibri"/>
+              </a:rPr>
+              <a:t>–   Las notificaciones quedan en Bajo si se modelan como funcion serverless de volumen pequeno</a:t>
+            </a:r>
+          </a:p>
+          <a:p>
+            <a:pPr>
+              <a:spcAft>
+                <a:spcPts val="800"/>
+              </a:spcAft>
+            </a:pPr>
+            <a:r>
+              <a:rPr sz="2000" b="0" i="0">
+                <a:solidFill>
+                  <a:srgbClr val="333333"/>
+                </a:solidFill>
+                <a:latin typeface="Calibri"/>
+              </a:rPr>
+              <a:t>–   Y pasan a Medio si se implementan como un worker encendido de forma permanente: el mismo requisito con dos disenos y dos costos, que es exactamente el razonamiento que se evalua.</a:t>
+            </a:r>
+          </a:p>
+          <a:p>
+            <a:pPr>
+              <a:spcAft>
+                <a:spcPts val="800"/>
+              </a:spcAft>
+            </a:pPr>
+            <a:r>
+              <a:rPr sz="2000" b="0" i="0">
+                <a:solidFill>
+                  <a:srgbClr val="333333"/>
+                </a:solidFill>
+                <a:latin typeface="Calibri"/>
+              </a:rPr>
+              <a:t>–   Y hay un componente que sorprende, el monitoreo de la Clase 8: un sistema que registra cada peticion con detalle puede generar mas gigabytes de logs que de datos de negocio</a:t>
+            </a:r>
+          </a:p>
+          <a:p>
+            <a:pPr>
+              <a:spcAft>
+                <a:spcPts val="800"/>
+              </a:spcAft>
+            </a:pPr>
+            <a:r>
+              <a:rPr sz="2000" b="0" i="0">
+                <a:solidFill>
+                  <a:srgbClr val="333333"/>
+                </a:solidFill>
+                <a:latin typeface="Calibri"/>
+              </a:rPr>
+              <a:t>–   Y la ingesta de logs se cobra por gigabyte; existen casos reales de equipos cuya observabilidad costaba mas que la aplicacion observada.</a:t>
+            </a:r>
+          </a:p>
+        </p:txBody>
+      </p:sp>
+      <p:sp>
+        <p:nvSpPr>
+          <p:cNvPr id="6" name="TextBox 5"/>
           <p:cNvSpPr txBox="1"/>
           <p:nvPr/>
         </p:nvSpPr>

--- a/Arquitectura de Sistemas Computacionales/Clases/Clase 10 - Costos y sostenibilidad cloud/Presentacion.pptx
+++ b/Arquitectura de Sistemas Computacionales/Clases/Clase 10 - Costos y sostenibilidad cloud/Presentacion.pptx
@@ -27,6 +27,9 @@
     <p:sldId id="275" r:id="rId26"/>
     <p:sldId id="276" r:id="rId27"/>
     <p:sldId id="277" r:id="rId28"/>
+    <p:sldId id="278" r:id="rId29"/>
+    <p:sldId id="279" r:id="rId30"/>
+    <p:sldId id="280" r:id="rId31"/>
   </p:sldIdLst>
   <p:sldSz cx="12191695" cy="6858000" type="screen4x3"/>
   <p:notesSz cx="6858000" cy="9144000"/>
@@ -3585,7 +3588,7 @@
                 </a:solidFill>
                 <a:latin typeface="Calibri"/>
               </a:rPr>
-              <a:t>Segundo ejemplo: por que el driver importa mas que el nivel (1/2)</a:t>
+              <a:t>Primer ejemplo: la tabla del entregable, componente por componente (1/2)</a:t>
             </a:r>
           </a:p>
         </p:txBody>
@@ -3624,7 +3627,7 @@
                 </a:solidFill>
                 <a:latin typeface="Calibri"/>
               </a:rPr>
-              <a:t>–   El segundo ejemplo muestra por que el driver importa mas que el nivel.</a:t>
+              <a:t>–   La base de datos queda en Alto con un argumento preciso: paga computo las 24 horas de los 30 dias aunque nadie consulte, mas almacenamiento que nunca baja, mas respaldos.</a:t>
             </a:r>
           </a:p>
           <a:p>
@@ -3640,7 +3643,7 @@
                 </a:solidFill>
                 <a:latin typeface="Calibri"/>
               </a:rPr>
-              <a:t>–   Suponga que CloudLite permite subir comprobantes en PDF o imagenes y que en un semestre acumula 5000 archivos de 2 MB, o sea 10 GB.</a:t>
+              <a:t>–   El frontend estatico queda en Bajo porque es almacenamiento mas trafico y no tiene computo propio.</a:t>
             </a:r>
           </a:p>
           <a:p>
@@ -3656,7 +3659,7 @@
                 </a:solidFill>
                 <a:latin typeface="Calibri"/>
               </a:rPr>
-              <a:t>–   Guardarlos cuesta unos 0.25 dolares al mes, despreciable.</a:t>
+              <a:t>–   Las notificaciones quedan en Bajo si se modelan como funcion serverless de volumen pequeno</a:t>
             </a:r>
           </a:p>
           <a:p>
@@ -3672,23 +3675,7 @@
                 </a:solidFill>
                 <a:latin typeface="Calibri"/>
               </a:rPr>
-              <a:t>–   Pero si cada archivo se descarga en promedio 20 veces, el sistema mueve 200 GB de egress al mes, que a 0.09 dolares por gigabyte son unos 18 dolares: setenta veces mas que el almacenamiento.</a:t>
-            </a:r>
-          </a:p>
-          <a:p>
-            <a:pPr>
-              <a:spcAft>
-                <a:spcPts val="800"/>
-              </a:spcAft>
-            </a:pPr>
-            <a:r>
-              <a:rPr sz="2000" b="0" i="0">
-                <a:solidFill>
-                  <a:srgbClr val="333333"/>
-                </a:solidFill>
-                <a:latin typeface="Calibri"/>
-              </a:rPr>
-              <a:t>–   La conclusion es contraintuitiva y por eso vale en clase: el driver del componente "almacenamiento de archivos" no es el almacenamiento, es el trafico</a:t>
+              <a:t>–   Y pasan a Medio si se implementan como un worker encendido de forma permanente: el mismo requisito con dos disenos y dos costos, que es exactamente el razonamiento que se evalua.</a:t>
             </a:r>
           </a:p>
         </p:txBody>
@@ -3869,7 +3856,7 @@
                 </a:solidFill>
                 <a:latin typeface="Calibri"/>
               </a:rPr>
-              <a:t>Segundo ejemplo: por que el driver importa mas que el nivel (2/2)</a:t>
+              <a:t>Primer ejemplo: la tabla del entregable, componente por componente (2/2)</a:t>
             </a:r>
           </a:p>
         </p:txBody>
@@ -3908,7 +3895,7 @@
                 </a:solidFill>
                 <a:latin typeface="Calibri"/>
               </a:rPr>
-              <a:t>–   Y la mitigacion no es contable sino arquitectonica, poner una cache o una red de distribucion de contenido delante para que el mismo archivo no salga del origen veinte veces.</a:t>
+              <a:t>–   Y hay un componente que sorprende, el monitoreo de la Clase 8: un sistema que registra cada peticion con detalle puede generar mas gigabytes de logs que de datos de negocio</a:t>
             </a:r>
           </a:p>
           <a:p>
@@ -3924,39 +3911,7 @@
                 </a:solidFill>
                 <a:latin typeface="Calibri"/>
               </a:rPr>
-              <a:t>–   Esto tambien desarma la intuicion mas comun del estudiante, que si nadie usa el sistema el sistema no cuesta.</a:t>
-            </a:r>
-          </a:p>
-          <a:p>
-            <a:pPr>
-              <a:spcAft>
-                <a:spcPts val="800"/>
-              </a:spcAft>
-            </a:pPr>
-            <a:r>
-              <a:rPr sz="2000" b="0" i="0">
-                <a:solidFill>
-                  <a:srgbClr val="333333"/>
-                </a:solidFill>
-                <a:latin typeface="Calibri"/>
-              </a:rPr>
-              <a:t>–   Hay dos familias de recursos: los que cobran por uso y los que cobran por existir.</a:t>
-            </a:r>
-          </a:p>
-          <a:p>
-            <a:pPr>
-              <a:spcAft>
-                <a:spcPts val="800"/>
-              </a:spcAft>
-            </a:pPr>
-            <a:r>
-              <a:rPr sz="2000" b="0" i="0">
-                <a:solidFill>
-                  <a:srgbClr val="333333"/>
-                </a:solidFill>
-                <a:latin typeface="Calibri"/>
-              </a:rPr>
-              <a:t>–   La base de datos gestionada, el balanceador, las IP reservadas, los volumenes huerfanos y las instantaneas viejas son de la segunda y facturan aunque el ultimo usuario se haya ido hace meses.</a:t>
+              <a:t>–   Y la ingesta de logs se cobra por gigabyte; existen casos reales de equipos cuya observabilidad costaba mas que la aplicacion observada.</a:t>
             </a:r>
           </a:p>
         </p:txBody>
@@ -4137,7 +4092,7 @@
                 </a:solidFill>
                 <a:latin typeface="Calibri"/>
               </a:rPr>
-              <a:t>Right-sizing: tres acciones ancladas en observacion (1/2)</a:t>
+              <a:t>Segundo ejemplo: por que el driver importa mas que el nivel (1/2)</a:t>
             </a:r>
           </a:p>
         </p:txBody>
@@ -4176,7 +4131,7 @@
                 </a:solidFill>
                 <a:latin typeface="Calibri"/>
               </a:rPr>
-              <a:t>–   De ahi sale el segundo bloque del entregable: tres acciones de right-sizing.</a:t>
+              <a:t>–   Suponga que CloudLite permite subir comprobantes en PDF o imagenes y que en un semestre acumula 5000 archivos de 2 MB, o sea 10 GB.</a:t>
             </a:r>
           </a:p>
           <a:p>
@@ -4192,7 +4147,7 @@
                 </a:solidFill>
                 <a:latin typeface="Calibri"/>
               </a:rPr>
-              <a:t>–   Right-sizing es ajustar la capacidad aprovisionada a la demanda observada, y la palabra clave es observada: sin medicion es adivinanza, y la medicion viene de las senales doradas de la Clase 8, en particular la saturacion.</a:t>
+              <a:t>–   Guardarlos cuesta unos 0.25 dolares al mes, despreciable.</a:t>
             </a:r>
           </a:p>
           <a:p>
@@ -4208,7 +4163,7 @@
                 </a:solidFill>
                 <a:latin typeface="Calibri"/>
               </a:rPr>
-              <a:t>–   La metrica que lo gobierna es la utilizacion, el porcentaje de la capacidad pagada que efectivamente se usa; una maquina al 5 por ciento de CPU durante un mes desperdicia el 95 por ciento de lo pagado.</a:t>
+              <a:t>–   Pero si cada archivo se descarga en promedio 20 veces, el sistema mueve 200 GB de egress al mes, que a 0.09 dolares por gigabyte son unos 18 dolares: setenta veces mas que el almacenamiento.</a:t>
             </a:r>
           </a:p>
           <a:p>
@@ -4224,23 +4179,7 @@
                 </a:solidFill>
                 <a:latin typeface="Calibri"/>
               </a:rPr>
-              <a:t>–   La convencion de industria, que es convencion y no regla, apunta a una utilizacion sostenida entre el 40 y el 70 por ciento: por debajo hay sobreaprovisionamiento y por encima no queda holgura para picos.</a:t>
-            </a:r>
-          </a:p>
-          <a:p>
-            <a:pPr>
-              <a:spcAft>
-                <a:spcPts val="800"/>
-              </a:spcAft>
-            </a:pPr>
-            <a:r>
-              <a:rPr sz="2000" b="0" i="0">
-                <a:solidFill>
-                  <a:srgbClr val="333333"/>
-                </a:solidFill>
-                <a:latin typeface="Calibri"/>
-              </a:rPr>
-              <a:t>–   La primera accion tipica es reducir tamano o numero de replicas hasta acercarse a ese rango.</a:t>
+              <a:t>–   La conclusion es contraintuitiva y por eso vale en clase: el driver del componente "almacenamiento de archivos" no es el almacenamiento, es el trafico</a:t>
             </a:r>
           </a:p>
         </p:txBody>
@@ -4421,7 +4360,7 @@
                 </a:solidFill>
                 <a:latin typeface="Calibri"/>
               </a:rPr>
-              <a:t>Right-sizing: tres acciones ancladas en observacion (2/2)</a:t>
+              <a:t>Segundo ejemplo: por que el driver importa mas que el nivel (2/2)</a:t>
             </a:r>
           </a:p>
         </p:txBody>
@@ -4460,7 +4399,7 @@
                 </a:solidFill>
                 <a:latin typeface="Calibri"/>
               </a:rPr>
-              <a:t>–   La segunda es apagar por horario lo que no es produccion: un ambiente encendido las 24 horas los siete dias consume 168 horas semanales, y encendido solo de 8 a 6 en dias habiles consume 50, un ahorro cercano al 70 por ciento sin tocar codigo.</a:t>
+              <a:t>–   Y la mitigacion no es contable sino arquitectonica, poner una cache o una red de distribucion de contenido delante para que el mismo archivo no salga del origen veinte veces.</a:t>
             </a:r>
           </a:p>
           <a:p>
@@ -4476,7 +4415,7 @@
                 </a:solidFill>
                 <a:latin typeface="Calibri"/>
               </a:rPr>
-              <a:t>–   La tercera es adelgazar el artefacto, que amarra con la Clase 3: una imagen basada en python:3.12 pesa del orden de 1 GB, la variante slim unos 150 MB y una construida sobre alpine puede bajar a decenas de megabytes</a:t>
+              <a:t>–   Hay dos familias de recursos: los que cobran por uso y los que cobran por existir.</a:t>
             </a:r>
           </a:p>
           <a:p>
@@ -4492,23 +4431,7 @@
                 </a:solidFill>
                 <a:latin typeface="Calibri"/>
               </a:rPr>
-              <a:t>–   Eso es menos registro, menos transferencia en cada despliegue y menos tiempo de arranque, dato que reaparece en la Clase 13.</a:t>
-            </a:r>
-          </a:p>
-          <a:p>
-            <a:pPr>
-              <a:spcAft>
-                <a:spcPts val="800"/>
-              </a:spcAft>
-            </a:pPr>
-            <a:r>
-              <a:rPr sz="2000" b="0" i="0">
-                <a:solidFill>
-                  <a:srgbClr val="333333"/>
-                </a:solidFill>
-                <a:latin typeface="Calibri"/>
-              </a:rPr>
-              <a:t>–   Igual de validos son fijar retencion de logs a 30 dias en vez de para siempre y borrar volumenes e instantaneas sin dueno.</a:t>
+              <a:t>–   La base de datos gestionada, el balanceador, las IP reservadas, los volumenes huerfanos y las instantaneas viejas son de la segunda y facturan aunque el ultimo usuario se haya ido hace meses.</a:t>
             </a:r>
           </a:p>
         </p:txBody>
@@ -4689,7 +4612,7 @@
                 </a:solidFill>
                 <a:latin typeface="Calibri"/>
               </a:rPr>
-              <a:t>Sostenibilidad tecnica antes que ambiental</a:t>
+              <a:t>Right-sizing: tres acciones ancladas en observacion (1/2)</a:t>
             </a:r>
           </a:p>
         </p:txBody>
@@ -4728,7 +4651,7 @@
                 </a:solidFill>
                 <a:latin typeface="Calibri"/>
               </a:rPr>
-              <a:t>–   La sostenibilidad en este curso es tecnica antes que ambiental, y conviene decirlo asi para no caer en discurso vacio.</a:t>
+              <a:t>–   Right-sizing es ajustar la capacidad aprovisionada a la demanda observada, y la palabra clave es observada: sin medicion es adivinanza, y la medicion viene de las senales doradas de la Clase 8, en particular la saturacion.</a:t>
             </a:r>
           </a:p>
           <a:p>
@@ -4744,7 +4667,7 @@
                 </a:solidFill>
                 <a:latin typeface="Calibri"/>
               </a:rPr>
-              <a:t>–   La energia que consume un servidor depende sobre todo de la capacidad encendida, no de la usada: una maquina al 5 por ciento no consume el 5 por ciento de la energia, consume mucho mas</a:t>
+              <a:t>–   La metrica que lo gobierna es la utilizacion, el porcentaje de la capacidad pagada que efectivamente se usa; una maquina al 5 por ciento de CPU durante un mes desperdicia el 95 por ciento de lo pagado.</a:t>
             </a:r>
           </a:p>
           <a:p>
@@ -4760,7 +4683,7 @@
                 </a:solidFill>
                 <a:latin typeface="Calibri"/>
               </a:rPr>
-              <a:t>–   Porque el consumo en reposo de un servidor moderno ronda la mitad del consumo a plena carga.</a:t>
+              <a:t>–   La convencion de industria, que es convencion y no regla, apunta a una utilizacion sostenida entre el 40 y el 70 por ciento: por debajo hay sobreaprovisionamiento y por encima no queda holgura para picos.</a:t>
             </a:r>
           </a:p>
           <a:p>
@@ -4776,55 +4699,7 @@
                 </a:solidFill>
                 <a:latin typeface="Calibri"/>
               </a:rPr>
-              <a:t>–   Por eso las mismas tres acciones sirven a la vez para la factura y para la huella.</a:t>
-            </a:r>
-          </a:p>
-          <a:p>
-            <a:pPr>
-              <a:spcAft>
-                <a:spcPts val="800"/>
-              </a:spcAft>
-            </a:pPr>
-            <a:r>
-              <a:rPr sz="2000" b="0" i="0">
-                <a:solidFill>
-                  <a:srgbClr val="333333"/>
-                </a:solidFill>
-                <a:latin typeface="Calibri"/>
-              </a:rPr>
-              <a:t>–   Hay ademas una decision de arquitectura con efecto directo: la intensidad de carbono de la electricidad varia fuerte entre regiones, asi que elegir region no es solo latencia y cumplimiento normativo.</a:t>
-            </a:r>
-          </a:p>
-          <a:p>
-            <a:pPr>
-              <a:spcAft>
-                <a:spcPts val="800"/>
-              </a:spcAft>
-            </a:pPr>
-            <a:r>
-              <a:rPr sz="2000" b="0" i="0">
-                <a:solidFill>
-                  <a:srgbClr val="333333"/>
-                </a:solidFill>
-                <a:latin typeface="Calibri"/>
-              </a:rPr>
-              <a:t>–   Y hay una tercera cara que el estudiante ignora: el costo humano de mantener el diseno.</a:t>
-            </a:r>
-          </a:p>
-          <a:p>
-            <a:pPr>
-              <a:spcAft>
-                <a:spcPts val="800"/>
-              </a:spcAft>
-            </a:pPr>
-            <a:r>
-              <a:rPr sz="2000" b="0" i="0">
-                <a:solidFill>
-                  <a:srgbClr val="333333"/>
-                </a:solidFill>
-                <a:latin typeface="Calibri"/>
-              </a:rPr>
-              <a:t>–   Una arquitectura de ocho servicios que un equipo de tres personas no puede operar es insostenible aunque la infraestructura sea gratis.</a:t>
+              <a:t>–   La primera accion tipica es reducir tamano o numero de replicas hasta acercarse a ese rango.</a:t>
             </a:r>
           </a:p>
         </p:txBody>
@@ -5005,7 +4880,7 @@
                 </a:solidFill>
                 <a:latin typeface="Calibri"/>
               </a:rPr>
-              <a:t>Preguntas frecuentes y cierre conceptual () (1/3)</a:t>
+              <a:t>Right-sizing: tres acciones ancladas en observacion (2/2)</a:t>
             </a:r>
           </a:p>
         </p:txBody>
@@ -5044,7 +4919,7 @@
                 </a:solidFill>
                 <a:latin typeface="Calibri"/>
               </a:rPr>
-              <a:t>–   La primera es si tiene sentido estimar costos cuando nadie va a pagar nada; la respuesta es que la estimacion no cambia la factura, cambia el diseno, y que en un trabajo real la segunda pregunta despues de "funciona" es "cuanto cuesta al mes".</a:t>
+              <a:t>–   La segunda es apagar por horario lo que no es produccion: un ambiente encendido las 24 horas los siete dias consume 168 horas semanales, y encendido solo de 8 a 6 en dias habiles consume 50, un ahorro cercano al 70 por ciento sin tocar codigo.</a:t>
             </a:r>
           </a:p>
           <a:p>
@@ -5060,7 +4935,7 @@
                 </a:solidFill>
                 <a:latin typeface="Calibri"/>
               </a:rPr>
-              <a:t>–   Ademas el costo es un atributo de calidad como la latencia, de los enumerados en la Clase 1, y compite con los demas: el objetivo de p95 que se definira en la Clase 12 casi siempre se compra con dinero.</a:t>
+              <a:t>–   La tercera es adelgazar el artefacto, que amarra con la Clase 3: una imagen basada en python:3.12 pesa del orden de 1 GB, la variante slim unos 150 MB y una construida sobre alpine puede bajar a decenas de megabytes</a:t>
             </a:r>
           </a:p>
           <a:p>
@@ -5076,7 +4951,7 @@
                 </a:solidFill>
                 <a:latin typeface="Calibri"/>
               </a:rPr>
-              <a:t>–   La segunda es si entonces lo mas barato es siempre lo mejor, y la respuesta es no</a:t>
+              <a:t>–   Eso es menos registro, menos transferencia en cada despliegue y menos tiempo de arranque, dato que reaparece en la Clase 13.</a:t>
             </a:r>
           </a:p>
           <a:p>
@@ -5092,23 +4967,7 @@
                 </a:solidFill>
                 <a:latin typeface="Calibri"/>
               </a:rPr>
-              <a:t>–   Porque lo mas barato suele mover el costo hacia la operacion humana; el concepto a nombrar es costo total de propiedad, que suma infraestructura mas operacion mas incidentes mas migraciones</a:t>
-            </a:r>
-          </a:p>
-          <a:p>
-            <a:pPr>
-              <a:spcAft>
-                <a:spcPts val="800"/>
-              </a:spcAft>
-            </a:pPr>
-            <a:r>
-              <a:rPr sz="2000" b="0" i="0">
-                <a:solidFill>
-                  <a:srgbClr val="333333"/>
-                </a:solidFill>
-                <a:latin typeface="Calibri"/>
-              </a:rPr>
-              <a:t>–   Y bajo esa lente una base de datos autoadministrada en una maquina desnuda es mas barata al mes y mas cara al ano cuando alguien debe parcharla, respaldarla y atender su caida a las tres de la manana.</a:t>
+              <a:t>–   Igual de validos son fijar retencion de logs a 30 dias en vez de para siempre y borrar volumenes e instantaneas sin dueno.</a:t>
             </a:r>
           </a:p>
         </p:txBody>
@@ -5289,7 +5148,7 @@
                 </a:solidFill>
                 <a:latin typeface="Calibri"/>
               </a:rPr>
-              <a:t>Preguntas frecuentes y cierre conceptual () (2/3)</a:t>
+              <a:t>Sostenibilidad tecnica antes que ambiental (1/2)</a:t>
             </a:r>
           </a:p>
         </p:txBody>
@@ -5328,7 +5187,7 @@
                 </a:solidFill>
                 <a:latin typeface="Calibri"/>
               </a:rPr>
-              <a:t>–   La tercera es como asignar los niveles sin factura: se asignan comparando componentes entre si con el driver como argumento y escribiendo el supuesto</a:t>
+              <a:t>–   La sostenibilidad en este curso es tecnica antes que ambiental, y conviene decirlo asi para no caer en discurso vacio.</a:t>
             </a:r>
           </a:p>
           <a:p>
@@ -5344,7 +5203,7 @@
                 </a:solidFill>
                 <a:latin typeface="Calibri"/>
               </a:rPr>
-              <a:t>–   "Alto porque es computo 24/7 mas almacenamiento acumulativo mas respaldos" es defendible, "Alto porque suena caro" no.</a:t>
+              <a:t>–   La energia que consume un servidor depende sobre todo de la capacidad encendida, no de la usada: una maquina al 5 por ciento no consume el 5 por ciento de la energia, consume mucho mas</a:t>
             </a:r>
           </a:p>
           <a:p>
@@ -5360,7 +5219,7 @@
                 </a:solidFill>
                 <a:latin typeface="Calibri"/>
               </a:rPr>
-              <a:t>–   Error tipico del docente que no domina el tema: tratar el costo como asunto "de negocio, no tecnico" y despacharlo en cinco minutos.</a:t>
+              <a:t>–   Porque el consumo en reposo de un servidor moderno ronda la mitad del consumo a plena carga.</a:t>
             </a:r>
           </a:p>
           <a:p>
@@ -5376,39 +5235,7 @@
                 </a:solidFill>
                 <a:latin typeface="Calibri"/>
               </a:rPr>
-              <a:t>–   Las decisiones que mas mueven la factura son decisiones de arquitectura, tomadas por quien dibuja el diagrama: gestionado o autoadministrado, con cache o sin cache, sincronico o con cola, replicas fijas o autoescalado.</a:t>
-            </a:r>
-          </a:p>
-          <a:p>
-            <a:pPr>
-              <a:spcAft>
-                <a:spcPts val="800"/>
-              </a:spcAft>
-            </a:pPr>
-            <a:r>
-              <a:rPr sz="2000" b="0" i="0">
-                <a:solidFill>
-                  <a:srgbClr val="333333"/>
-                </a:solidFill>
-                <a:latin typeface="Calibri"/>
-              </a:rPr>
-              <a:t>–   Si esta clase se salta, la consecuencia aparece dos clases despues: en la Clase 13 los estudiantes escriben politicas de autoescalado sin limite superior</a:t>
-            </a:r>
-          </a:p>
-          <a:p>
-            <a:pPr>
-              <a:spcAft>
-                <a:spcPts val="800"/>
-              </a:spcAft>
-            </a:pPr>
-            <a:r>
-              <a:rPr sz="2000" b="0" i="0">
-                <a:solidFill>
-                  <a:srgbClr val="333333"/>
-                </a:solidFill>
-                <a:latin typeface="Calibri"/>
-              </a:rPr>
-              <a:t>–   En la Clase 15 defienden arquitecturas que nadie podria pagar y en el Parcial 3 responden la pregunta de drivers con generalidades sobre "optimizar recursos".</a:t>
+              <a:t>–   Hay ademas una decision de arquitectura con efecto directo: la intensidad de carbono de la electricidad varia fuerte entre regiones, asi que elegir region no es solo latencia y cumplimiento normativo.</a:t>
             </a:r>
           </a:p>
         </p:txBody>
@@ -5589,7 +5416,7 @@
                 </a:solidFill>
                 <a:latin typeface="Calibri"/>
               </a:rPr>
-              <a:t>Preguntas frecuentes y cierre conceptual () (3/3)</a:t>
+              <a:t>Sostenibilidad tecnica antes que ambiental (2/2)</a:t>
             </a:r>
           </a:p>
         </p:txBody>
@@ -5628,7 +5455,7 @@
                 </a:solidFill>
                 <a:latin typeface="Calibri"/>
               </a:rPr>
-              <a:t>–   El segundo error es el opuesto e igual de danino: exigir cifras exactas en dolares.</a:t>
+              <a:t>–   Y hay una tercera cara que el estudiante ignora: el costo humano de mantener el diseno.</a:t>
             </a:r>
           </a:p>
           <a:p>
@@ -5644,23 +5471,7 @@
                 </a:solidFill>
                 <a:latin typeface="Calibri"/>
               </a:rPr>
-              <a:t>–   Con eso la clase se vuelve una caceria de calculadoras de precios, el estudiante copia numeros que no entiende y las acciones de right-sizing quedan cosmeticas.</a:t>
-            </a:r>
-          </a:p>
-          <a:p>
-            <a:pPr>
-              <a:spcAft>
-                <a:spcPts val="800"/>
-              </a:spcAft>
-            </a:pPr>
-            <a:r>
-              <a:rPr sz="2000" b="0" i="0">
-                <a:solidFill>
-                  <a:srgbClr val="333333"/>
-                </a:solidFill>
-                <a:latin typeface="Calibri"/>
-              </a:rPr>
-              <a:t>–   El criterio de aprobacion no es la precision del numero sino que cada componente tenga driver nombrado y que cada accion sea verificable: "reducir a una replica el worker de notificaciones y usar imagen slim" se puede revisar, "optimizar el codigo" no.</a:t>
+              <a:t>–   Una arquitectura de ocho servicios que un equipo de tres personas no puede operar es insostenible aunque la infraestructura sea gratis.</a:t>
             </a:r>
           </a:p>
         </p:txBody>
@@ -5735,7 +5546,7 @@
         <p:spPr>
           <a:xfrm>
             <a:off x="0" y="0"/>
-            <a:ext cx="12191695" cy="1170432"/>
+            <a:ext cx="12191695" cy="960120"/>
           </a:xfrm>
           <a:prstGeom prst="rect">
             <a:avLst/>
@@ -5777,7 +5588,7 @@
         </p:nvSpPr>
         <p:spPr>
           <a:xfrm>
-            <a:off x="0" y="1170432"/>
+            <a:off x="0" y="960120"/>
             <a:ext cx="12191695" cy="41148"/>
           </a:xfrm>
           <a:prstGeom prst="rect">
@@ -5821,7 +5632,7 @@
         <p:spPr>
           <a:xfrm>
             <a:off x="457200" y="164592"/>
-            <a:ext cx="11277295" cy="384048"/>
+            <a:ext cx="11277295" cy="502920"/>
           </a:xfrm>
           <a:prstGeom prst="rect">
             <a:avLst/>
@@ -5841,7 +5652,7 @@
                 </a:solidFill>
                 <a:latin typeface="Calibri"/>
               </a:rPr>
-              <a:t>Herramientas de hoy</a:t>
+              <a:t>Preguntas frecuentes y cierre conceptual () (1/3)</a:t>
             </a:r>
           </a:p>
         </p:txBody>
@@ -5854,8 +5665,8 @@
         </p:nvSpPr>
         <p:spPr>
           <a:xfrm>
-            <a:off x="457200" y="566928"/>
-            <a:ext cx="11277295" cy="411480"/>
+            <a:off x="457200" y="1170432"/>
+            <a:ext cx="11277295" cy="5230368"/>
           </a:xfrm>
           <a:prstGeom prst="rect">
             <a:avLst/>
@@ -5868,429 +5679,90 @@
           </a:bodyPr>
           <a:lstStyle/>
           <a:p>
-            <a:r>
-              <a:rPr sz="1400" b="0" i="0">
-                <a:solidFill>
-                  <a:srgbClr val="B8D8EE"/>
-                </a:solidFill>
-                <a:latin typeface="Calibri"/>
-              </a:rPr>
-              <a:t>Gratis · navegador o free tier · sin cuenta de pago</a:t>
-            </a:r>
-          </a:p>
-        </p:txBody>
-      </p:sp>
-      <p:sp>
-        <p:nvSpPr>
-          <p:cNvPr id="6" name="Rounded Rectangle 5"/>
-          <p:cNvSpPr/>
-          <p:nvPr/>
-        </p:nvSpPr>
-        <p:spPr>
-          <a:xfrm>
-            <a:off x="457200" y="1591056"/>
-            <a:ext cx="5538063" cy="2331720"/>
-          </a:xfrm>
-          <a:prstGeom prst="roundRect">
-            <a:avLst>
-              <a:gd name="adj" fmla="val 12000"/>
-            </a:avLst>
-          </a:prstGeom>
-          <a:solidFill>
-            <a:srgbClr val="F2F2F2"/>
-          </a:solidFill>
-          <a:ln>
-            <a:noFill/>
-          </a:ln>
-        </p:spPr>
-        <p:style>
-          <a:lnRef idx="1">
-            <a:schemeClr val="accent1"/>
-          </a:lnRef>
-          <a:fillRef idx="3">
-            <a:schemeClr val="accent1"/>
-          </a:fillRef>
-          <a:effectRef idx="2">
-            <a:schemeClr val="accent1"/>
-          </a:effectRef>
-          <a:fontRef idx="minor">
-            <a:schemeClr val="lt1"/>
-          </a:fontRef>
-        </p:style>
-        <p:txBody>
-          <a:bodyPr rtlCol="0" anchor="ctr"/>
-          <a:lstStyle/>
-          <a:p>
-            <a:pPr algn="ctr"/>
-          </a:p>
-        </p:txBody>
-      </p:sp>
-      <p:sp>
-        <p:nvSpPr>
-          <p:cNvPr id="7" name="Rectangle 6"/>
-          <p:cNvSpPr/>
-          <p:nvPr/>
-        </p:nvSpPr>
-        <p:spPr>
-          <a:xfrm>
-            <a:off x="457200" y="1591056"/>
-            <a:ext cx="5538063" cy="64008"/>
-          </a:xfrm>
-          <a:prstGeom prst="rect">
-            <a:avLst/>
-          </a:prstGeom>
-          <a:solidFill>
-            <a:srgbClr val="095292"/>
-          </a:solidFill>
-          <a:ln>
-            <a:noFill/>
-          </a:ln>
-        </p:spPr>
-        <p:style>
-          <a:lnRef idx="1">
-            <a:schemeClr val="accent1"/>
-          </a:lnRef>
-          <a:fillRef idx="3">
-            <a:schemeClr val="accent1"/>
-          </a:fillRef>
-          <a:effectRef idx="2">
-            <a:schemeClr val="accent1"/>
-          </a:effectRef>
-          <a:fontRef idx="minor">
-            <a:schemeClr val="lt1"/>
-          </a:fontRef>
-        </p:style>
-        <p:txBody>
-          <a:bodyPr rtlCol="0" anchor="ctr"/>
-          <a:lstStyle/>
-          <a:p>
-            <a:pPr algn="ctr"/>
-          </a:p>
-        </p:txBody>
-      </p:sp>
-      <p:sp>
-        <p:nvSpPr>
-          <p:cNvPr id="8" name="Rectangle 7"/>
-          <p:cNvSpPr/>
-          <p:nvPr/>
-        </p:nvSpPr>
-        <p:spPr>
-          <a:xfrm>
-            <a:off x="457200" y="1655064"/>
-            <a:ext cx="5538063" cy="27432"/>
-          </a:xfrm>
-          <a:prstGeom prst="rect">
-            <a:avLst/>
-          </a:prstGeom>
-          <a:solidFill>
-            <a:srgbClr val="FFD000"/>
-          </a:solidFill>
-          <a:ln>
-            <a:noFill/>
-          </a:ln>
-        </p:spPr>
-        <p:style>
-          <a:lnRef idx="1">
-            <a:schemeClr val="accent1"/>
-          </a:lnRef>
-          <a:fillRef idx="3">
-            <a:schemeClr val="accent1"/>
-          </a:fillRef>
-          <a:effectRef idx="2">
-            <a:schemeClr val="accent1"/>
-          </a:effectRef>
-          <a:fontRef idx="minor">
-            <a:schemeClr val="lt1"/>
-          </a:fontRef>
-        </p:style>
-        <p:txBody>
-          <a:bodyPr rtlCol="0" anchor="ctr"/>
-          <a:lstStyle/>
-          <a:p>
-            <a:pPr algn="ctr"/>
-          </a:p>
-        </p:txBody>
-      </p:sp>
-      <p:pic>
-        <p:nvPicPr>
-          <p:cNvPr id="9" name="Picture 8" descr="google_docs.png"/>
-          <p:cNvPicPr>
-            <a:picLocks noChangeAspect="1"/>
-          </p:cNvPicPr>
-          <p:nvPr/>
-        </p:nvPicPr>
-        <p:blipFill>
-          <a:blip r:embed="rId2"/>
-          <a:stretch>
-            <a:fillRect/>
-          </a:stretch>
-        </p:blipFill>
-        <p:spPr>
-          <a:xfrm>
-            <a:off x="2599867" y="1847087"/>
-            <a:ext cx="1252728" cy="1252728"/>
-          </a:xfrm>
-          <a:prstGeom prst="rect">
-            <a:avLst/>
-          </a:prstGeom>
-        </p:spPr>
-      </p:pic>
-      <p:sp>
-        <p:nvSpPr>
-          <p:cNvPr id="10" name="TextBox 9"/>
-          <p:cNvSpPr txBox="1"/>
-          <p:nvPr/>
-        </p:nvSpPr>
-        <p:spPr>
-          <a:xfrm>
-            <a:off x="530352" y="3191256"/>
-            <a:ext cx="5391759" cy="621792"/>
-          </a:xfrm>
-          <a:prstGeom prst="rect">
-            <a:avLst/>
-          </a:prstGeom>
-          <a:noFill/>
-        </p:spPr>
-        <p:txBody>
-          <a:bodyPr wrap="square" anchor="t"/>
-          <a:lstStyle/>
-          <a:p>
-            <a:pPr algn="ctr"/>
-            <a:r>
-              <a:rPr sz="1300" b="1" i="0">
-                <a:solidFill>
-                  <a:srgbClr val="095292"/>
-                </a:solidFill>
-                <a:latin typeface="Calibri"/>
-              </a:rPr>
-              <a:t>Google Docs</a:t>
-            </a:r>
-          </a:p>
-          <a:p>
-            <a:pPr algn="ctr">
-              <a:spcBef>
-                <a:spcPts val="200"/>
-              </a:spcBef>
+            <a:pPr>
+              <a:spcAft>
+                <a:spcPts val="800"/>
+              </a:spcAft>
             </a:pPr>
             <a:r>
-              <a:rPr sz="1000" b="0" i="0">
-                <a:solidFill>
-                  <a:srgbClr val="666666"/>
-                </a:solidFill>
-                <a:latin typeface="Calibri"/>
-              </a:rPr>
-              <a:t>Tabla de costos</a:t>
-            </a:r>
-          </a:p>
-        </p:txBody>
-      </p:sp>
-      <p:sp>
-        <p:nvSpPr>
-          <p:cNvPr id="11" name="Rounded Rectangle 10"/>
-          <p:cNvSpPr/>
-          <p:nvPr/>
-        </p:nvSpPr>
-        <p:spPr>
-          <a:xfrm>
-            <a:off x="6196431" y="1591056"/>
-            <a:ext cx="5538063" cy="2331720"/>
-          </a:xfrm>
-          <a:prstGeom prst="roundRect">
-            <a:avLst>
-              <a:gd name="adj" fmla="val 12000"/>
-            </a:avLst>
-          </a:prstGeom>
-          <a:solidFill>
-            <a:srgbClr val="F2F2F2"/>
-          </a:solidFill>
-          <a:ln>
-            <a:noFill/>
-          </a:ln>
-        </p:spPr>
-        <p:style>
-          <a:lnRef idx="1">
-            <a:schemeClr val="accent1"/>
-          </a:lnRef>
-          <a:fillRef idx="3">
-            <a:schemeClr val="accent1"/>
-          </a:fillRef>
-          <a:effectRef idx="2">
-            <a:schemeClr val="accent1"/>
-          </a:effectRef>
-          <a:fontRef idx="minor">
-            <a:schemeClr val="lt1"/>
-          </a:fontRef>
-        </p:style>
-        <p:txBody>
-          <a:bodyPr rtlCol="0" anchor="ctr"/>
-          <a:lstStyle/>
-          <a:p>
-            <a:pPr algn="ctr"/>
-          </a:p>
-        </p:txBody>
-      </p:sp>
-      <p:sp>
-        <p:nvSpPr>
-          <p:cNvPr id="12" name="Rectangle 11"/>
-          <p:cNvSpPr/>
-          <p:nvPr/>
-        </p:nvSpPr>
-        <p:spPr>
-          <a:xfrm>
-            <a:off x="6196431" y="1591056"/>
-            <a:ext cx="5538063" cy="64008"/>
-          </a:xfrm>
-          <a:prstGeom prst="rect">
-            <a:avLst/>
-          </a:prstGeom>
-          <a:solidFill>
-            <a:srgbClr val="095292"/>
-          </a:solidFill>
-          <a:ln>
-            <a:noFill/>
-          </a:ln>
-        </p:spPr>
-        <p:style>
-          <a:lnRef idx="1">
-            <a:schemeClr val="accent1"/>
-          </a:lnRef>
-          <a:fillRef idx="3">
-            <a:schemeClr val="accent1"/>
-          </a:fillRef>
-          <a:effectRef idx="2">
-            <a:schemeClr val="accent1"/>
-          </a:effectRef>
-          <a:fontRef idx="minor">
-            <a:schemeClr val="lt1"/>
-          </a:fontRef>
-        </p:style>
-        <p:txBody>
-          <a:bodyPr rtlCol="0" anchor="ctr"/>
-          <a:lstStyle/>
-          <a:p>
-            <a:pPr algn="ctr"/>
-          </a:p>
-        </p:txBody>
-      </p:sp>
-      <p:sp>
-        <p:nvSpPr>
-          <p:cNvPr id="13" name="Rectangle 12"/>
-          <p:cNvSpPr/>
-          <p:nvPr/>
-        </p:nvSpPr>
-        <p:spPr>
-          <a:xfrm>
-            <a:off x="6196431" y="1655064"/>
-            <a:ext cx="5538063" cy="27432"/>
-          </a:xfrm>
-          <a:prstGeom prst="rect">
-            <a:avLst/>
-          </a:prstGeom>
-          <a:solidFill>
-            <a:srgbClr val="FFD000"/>
-          </a:solidFill>
-          <a:ln>
-            <a:noFill/>
-          </a:ln>
-        </p:spPr>
-        <p:style>
-          <a:lnRef idx="1">
-            <a:schemeClr val="accent1"/>
-          </a:lnRef>
-          <a:fillRef idx="3">
-            <a:schemeClr val="accent1"/>
-          </a:fillRef>
-          <a:effectRef idx="2">
-            <a:schemeClr val="accent1"/>
-          </a:effectRef>
-          <a:fontRef idx="minor">
-            <a:schemeClr val="lt1"/>
-          </a:fontRef>
-        </p:style>
-        <p:txBody>
-          <a:bodyPr rtlCol="0" anchor="ctr"/>
-          <a:lstStyle/>
-          <a:p>
-            <a:pPr algn="ctr"/>
-          </a:p>
-        </p:txBody>
-      </p:sp>
-      <p:pic>
-        <p:nvPicPr>
-          <p:cNvPr id="14" name="Picture 13" descr="examlab.png"/>
-          <p:cNvPicPr>
-            <a:picLocks noChangeAspect="1"/>
-          </p:cNvPicPr>
-          <p:nvPr/>
-        </p:nvPicPr>
-        <p:blipFill>
-          <a:blip r:embed="rId3"/>
-          <a:stretch>
-            <a:fillRect/>
-          </a:stretch>
-        </p:blipFill>
-        <p:spPr>
-          <a:xfrm>
-            <a:off x="8339099" y="1847087"/>
-            <a:ext cx="1252728" cy="1252728"/>
-          </a:xfrm>
-          <a:prstGeom prst="rect">
-            <a:avLst/>
-          </a:prstGeom>
-        </p:spPr>
-      </p:pic>
-      <p:sp>
-        <p:nvSpPr>
-          <p:cNvPr id="15" name="TextBox 14"/>
-          <p:cNvSpPr txBox="1"/>
-          <p:nvPr/>
-        </p:nvSpPr>
-        <p:spPr>
-          <a:xfrm>
-            <a:off x="6269583" y="3191256"/>
-            <a:ext cx="5391759" cy="621792"/>
-          </a:xfrm>
-          <a:prstGeom prst="rect">
-            <a:avLst/>
-          </a:prstGeom>
-          <a:noFill/>
-        </p:spPr>
-        <p:txBody>
-          <a:bodyPr wrap="square" anchor="t"/>
-          <a:lstStyle/>
-          <a:p>
-            <a:pPr algn="ctr"/>
-            <a:r>
-              <a:rPr sz="1300" b="1" i="0">
-                <a:solidFill>
-                  <a:srgbClr val="095292"/>
-                </a:solidFill>
-                <a:latin typeface="Calibri"/>
-              </a:rPr>
-              <a:t>la plataforma del curso</a:t>
-            </a:r>
-          </a:p>
-          <a:p>
-            <a:pPr algn="ctr">
-              <a:spcBef>
-                <a:spcPts val="200"/>
-              </a:spcBef>
+              <a:rPr sz="2000" b="0" i="0">
+                <a:solidFill>
+                  <a:srgbClr val="333333"/>
+                </a:solidFill>
+                <a:latin typeface="Calibri"/>
+              </a:rPr>
+              <a:t>–   La primera es si tiene sentido estimar costos cuando nadie va a pagar nada; la respuesta es que la estimacion no cambia la factura, cambia el diseno, y que en un trabajo real la segunda pregunta despues de "funciona" es "cuanto cuesta al mes".</a:t>
+            </a:r>
+          </a:p>
+          <a:p>
+            <a:pPr>
+              <a:spcAft>
+                <a:spcPts val="800"/>
+              </a:spcAft>
             </a:pPr>
             <a:r>
-              <a:rPr sz="1000" b="0" i="0">
-                <a:solidFill>
-                  <a:srgbClr val="666666"/>
-                </a:solidFill>
-                <a:latin typeface="Calibri"/>
-              </a:rPr>
-              <a:t>Donde se entrega</a:t>
-            </a:r>
-          </a:p>
-        </p:txBody>
-      </p:sp>
-      <p:sp>
-        <p:nvSpPr>
-          <p:cNvPr id="16" name="TextBox 15"/>
+              <a:rPr sz="2000" b="0" i="0">
+                <a:solidFill>
+                  <a:srgbClr val="333333"/>
+                </a:solidFill>
+                <a:latin typeface="Calibri"/>
+              </a:rPr>
+              <a:t>–   Ademas el costo es un atributo de calidad como la latencia, de los enumerados en la Clase 1, y compite con los demas: el objetivo de p95 que se definira en la Clase 12 casi siempre se compra con dinero.</a:t>
+            </a:r>
+          </a:p>
+          <a:p>
+            <a:pPr>
+              <a:spcAft>
+                <a:spcPts val="800"/>
+              </a:spcAft>
+            </a:pPr>
+            <a:r>
+              <a:rPr sz="2000" b="0" i="0">
+                <a:solidFill>
+                  <a:srgbClr val="333333"/>
+                </a:solidFill>
+                <a:latin typeface="Calibri"/>
+              </a:rPr>
+              <a:t>–   La segunda es si entonces lo mas barato es siempre lo mejor, y la respuesta es no</a:t>
+            </a:r>
+          </a:p>
+          <a:p>
+            <a:pPr>
+              <a:spcAft>
+                <a:spcPts val="800"/>
+              </a:spcAft>
+            </a:pPr>
+            <a:r>
+              <a:rPr sz="2000" b="0" i="0">
+                <a:solidFill>
+                  <a:srgbClr val="333333"/>
+                </a:solidFill>
+                <a:latin typeface="Calibri"/>
+              </a:rPr>
+              <a:t>–   Porque lo mas barato suele mover el costo hacia la operacion humana; el concepto a nombrar es costo total de propiedad, que suma infraestructura mas operacion mas incidentes mas migraciones</a:t>
+            </a:r>
+          </a:p>
+          <a:p>
+            <a:pPr>
+              <a:spcAft>
+                <a:spcPts val="800"/>
+              </a:spcAft>
+            </a:pPr>
+            <a:r>
+              <a:rPr sz="2000" b="0" i="0">
+                <a:solidFill>
+                  <a:srgbClr val="333333"/>
+                </a:solidFill>
+                <a:latin typeface="Calibri"/>
+              </a:rPr>
+              <a:t>–   Y bajo esa lente una base de datos autoadministrada en una maquina desnuda es mas barata al mes y mas cara al ano cuando alguien debe parcharla, respaldarla y atender su caida a las tres de la manana.</a:t>
+            </a:r>
+          </a:p>
+        </p:txBody>
+      </p:sp>
+      <p:sp>
+        <p:nvSpPr>
+          <p:cNvPr id="6" name="TextBox 5"/>
           <p:cNvSpPr txBox="1"/>
           <p:nvPr/>
         </p:nvSpPr>
@@ -6464,7 +5936,7 @@
                 </a:solidFill>
                 <a:latin typeface="Calibri"/>
               </a:rPr>
-              <a:t>PI CloudLite — entregable de hoy</a:t>
+              <a:t>Preguntas frecuentes y cierre conceptual () (2/3)</a:t>
             </a:r>
           </a:p>
         </p:txBody>
@@ -6503,25 +5975,7 @@
                 </a:solidFill>
                 <a:latin typeface="Calibri"/>
               </a:rPr>
-              <a:t>–   </a:t>
-            </a:r>
-            <a:r>
-              <a:rPr sz="2000" b="1" i="0">
-                <a:solidFill>
-                  <a:srgbClr val="333333"/>
-                </a:solidFill>
-                <a:latin typeface="Calibri"/>
-              </a:rPr>
-              <a:t>Entregable:</a:t>
-            </a:r>
-            <a:r>
-              <a:rPr sz="2000" b="0" i="0">
-                <a:solidFill>
-                  <a:srgbClr val="333333"/>
-                </a:solidFill>
-                <a:latin typeface="Calibri"/>
-              </a:rPr>
-              <a:t> Sección Costos/Sostenibilidad del informe (bajo/medio + drivers)</a:t>
+              <a:t>–   La tercera es como asignar los niveles sin factura: se asignan comparando componentes entre si con el driver como argumento y escribiendo el supuesto</a:t>
             </a:r>
           </a:p>
           <a:p>
@@ -6537,16 +5991,7 @@
                 </a:solidFill>
                 <a:latin typeface="Calibri"/>
               </a:rPr>
-              <a:t>–   Herramienta: </a:t>
-            </a:r>
-            <a:r>
-              <a:rPr sz="2000" b="1" i="0">
-                <a:solidFill>
-                  <a:srgbClr val="333333"/>
-                </a:solidFill>
-                <a:latin typeface="Calibri"/>
-              </a:rPr>
-              <a:t>Google Docs</a:t>
+              <a:t>–   "Alto porque es computo 24/7 mas almacenamiento acumulativo mas respaldos" es defendible, "Alto porque suena caro" no.</a:t>
             </a:r>
           </a:p>
           <a:p>
@@ -6562,25 +6007,7 @@
                 </a:solidFill>
                 <a:latin typeface="Calibri"/>
               </a:rPr>
-              <a:t>–   Todo lo que construyan hoy entra al </a:t>
-            </a:r>
-            <a:r>
-              <a:rPr sz="2000" b="1" i="0">
-                <a:solidFill>
-                  <a:srgbClr val="333333"/>
-                </a:solidFill>
-                <a:latin typeface="Calibri"/>
-              </a:rPr>
-              <a:t>informe/repo del PI</a:t>
-            </a:r>
-            <a:r>
-              <a:rPr sz="2000" b="0" i="0">
-                <a:solidFill>
-                  <a:srgbClr val="333333"/>
-                </a:solidFill>
-                <a:latin typeface="Calibri"/>
-              </a:rPr>
-              <a:t> (no es lab suelto).</a:t>
+              <a:t>–   Error tipico del docente que no domina el tema: tratar el costo como asunto "de negocio, no tecnico" y despacharlo en cinco minutos.</a:t>
             </a:r>
           </a:p>
           <a:p>
@@ -6596,7 +6023,23 @@
                 </a:solidFill>
                 <a:latin typeface="Calibri"/>
               </a:rPr>
-              <a:t>–   Individual por defecto · el docente puede autorizar equipos de 2–3; la entrega en la plataforma del curso siempre es individual.</a:t>
+              <a:t>–   Las decisiones que mas mueven la factura son decisiones de arquitectura, tomadas por quien dibuja el diagrama: gestionado o autoadministrado, con cache o sin cache, sincronico o con cola, replicas fijas o autoescalado.</a:t>
+            </a:r>
+          </a:p>
+          <a:p>
+            <a:pPr>
+              <a:spcAft>
+                <a:spcPts val="800"/>
+              </a:spcAft>
+            </a:pPr>
+            <a:r>
+              <a:rPr sz="2000" b="0" i="0">
+                <a:solidFill>
+                  <a:srgbClr val="333333"/>
+                </a:solidFill>
+                <a:latin typeface="Calibri"/>
+              </a:rPr>
+              <a:t>–   Si esta clase se salta, la consecuencia aparece dos clases despues: en la Clase 13 los estudiantes escriben politicas de autoescalado sin limite superior</a:t>
             </a:r>
           </a:p>
         </p:txBody>
@@ -7124,7 +6567,7 @@
                 </a:solidFill>
                 <a:latin typeface="Calibri"/>
               </a:rPr>
-              <a:t>Manos a la obra (paso a paso)</a:t>
+              <a:t>Preguntas frecuentes y cierre conceptual () (3/3)</a:t>
             </a:r>
           </a:p>
         </p:txBody>
@@ -7157,22 +6600,13 @@
               </a:spcAft>
             </a:pPr>
             <a:r>
-              <a:rPr sz="2000" b="1" i="0">
+              <a:rPr sz="2000" b="0" i="0">
                 <a:solidFill>
                   <a:srgbClr val="333333"/>
                 </a:solidFill>
                 <a:latin typeface="Calibri"/>
               </a:rPr>
-              <a:t>1.</a:t>
-            </a:r>
-            <a:r>
-              <a:rPr sz="2000" b="0" i="0">
-                <a:solidFill>
-                  <a:srgbClr val="333333"/>
-                </a:solidFill>
-                <a:latin typeface="Calibri"/>
-              </a:rPr>
-              <a:t> Paso 1: construya en la pregunta 11 la tabla de costos con una fila por cada componente de su despliegue y las columnas componente, driver, nivel B/M/A y apalancamiento; verifique que cada driver sea una variable contable (horas encendidas, GB de salida, GB almacenados, minutos de CI) y no «el uso».</a:t>
+              <a:t>–   En la Clase 15 defienden arquitecturas que nadie podria pagar y en el Parcial 3 responden la pregunta de drivers con generalidades sobre "optimizar recursos".</a:t>
             </a:r>
           </a:p>
           <a:p>
@@ -7188,25 +6622,7 @@
                 </a:solidFill>
                 <a:latin typeface="Calibri"/>
               </a:rPr>
-              <a:t>–   </a:t>
-            </a:r>
-            <a:r>
-              <a:rPr sz="2000" b="1" i="0">
-                <a:solidFill>
-                  <a:srgbClr val="333333"/>
-                </a:solidFill>
-                <a:latin typeface="Calibri"/>
-              </a:rPr>
-              <a:t>2.</a:t>
-            </a:r>
-            <a:r>
-              <a:rPr sz="2000" b="0" i="0">
-                <a:solidFill>
-                  <a:srgbClr val="333333"/>
-                </a:solidFill>
-                <a:latin typeface="Calibri"/>
-              </a:rPr>
-              <a:t> Paso 2: fuerce al menos un Alto y un Bajo con su justificacion. Marcar todo como Medio para no decidir es lo que la pregunta busca descartar, y ese criterio vale cero si todas las filas quedan iguales.</a:t>
+              <a:t>–   El segundo error es el opuesto e igual de danino: exigir cifras exactas en dolares.</a:t>
             </a:r>
           </a:p>
           <a:p>
@@ -7222,59 +6638,7 @@
                 </a:solidFill>
                 <a:latin typeface="Calibri"/>
               </a:rPr>
-              <a:t>–   </a:t>
-            </a:r>
-            <a:r>
-              <a:rPr sz="2000" b="1" i="0">
-                <a:solidFill>
-                  <a:srgbClr val="333333"/>
-                </a:solidFill>
-                <a:latin typeface="Calibri"/>
-              </a:rPr>
-              <a:t>3.</a:t>
-            </a:r>
-            <a:r>
-              <a:rPr sz="2000" b="0" i="0">
-                <a:solidFill>
-                  <a:srgbClr val="333333"/>
-                </a:solidFill>
-                <a:latin typeface="Calibri"/>
-              </a:rPr>
-              <a:t> Paso 3: escriba en la pregunta 12 tres acciones de sostenibilidad, cada una con el artefacto donde se comprueba y como se comprueba; aplique la prueba de que otra persona pueda decir en seis meses, mirando el repositorio, si la accion se aplico.</a:t>
-            </a:r>
-          </a:p>
-          <a:p>
-            <a:pPr>
-              <a:spcAft>
-                <a:spcPts val="800"/>
-              </a:spcAft>
-            </a:pPr>
-            <a:r>
-              <a:rPr sz="2000" b="0" i="0">
-                <a:solidFill>
-                  <a:srgbClr val="333333"/>
-                </a:solidFill>
-                <a:latin typeface="Calibri"/>
-              </a:rPr>
-              <a:t>–   </a:t>
-            </a:r>
-            <a:r>
-              <a:rPr sz="2000" b="1" i="0">
-                <a:solidFill>
-                  <a:srgbClr val="333333"/>
-                </a:solidFill>
-                <a:latin typeface="Calibri"/>
-              </a:rPr>
-              <a:t>4.</a:t>
-            </a:r>
-            <a:r>
-              <a:rPr sz="2000" b="0" i="0">
-                <a:solidFill>
-                  <a:srgbClr val="333333"/>
-                </a:solidFill>
-                <a:latin typeface="Calibri"/>
-              </a:rPr>
-              <a:t> Paso 4: ate al menos una de las tres acciones a un driver de costo de la pregunta 11 y suba la actividad completa del Corte 2 a la plataforma del curso antes del en la fecha que indique el docente. Es una clase autonoma: no hay encuentro sincrono, y las dudas van por el foro.</a:t>
+              <a:t>–   El criterio de aprobacion no es la precision del numero sino que cada componente tenga driver nombrado y que cada accion sea verificable: "reducir a una replica el worker de notificaciones y usar imagen slim" se puede revisar, "optimizar el codigo" no.</a:t>
             </a:r>
           </a:p>
         </p:txBody>
@@ -7349,7 +6713,7 @@
         <p:spPr>
           <a:xfrm>
             <a:off x="0" y="0"/>
-            <a:ext cx="12191695" cy="960120"/>
+            <a:ext cx="12191695" cy="1170432"/>
           </a:xfrm>
           <a:prstGeom prst="rect">
             <a:avLst/>
@@ -7391,7 +6755,7 @@
         </p:nvSpPr>
         <p:spPr>
           <a:xfrm>
-            <a:off x="0" y="960120"/>
+            <a:off x="0" y="1170432"/>
             <a:ext cx="12191695" cy="41148"/>
           </a:xfrm>
           <a:prstGeom prst="rect">
@@ -7435,7 +6799,7 @@
         <p:spPr>
           <a:xfrm>
             <a:off x="457200" y="164592"/>
-            <a:ext cx="11277295" cy="502920"/>
+            <a:ext cx="11277295" cy="384048"/>
           </a:xfrm>
           <a:prstGeom prst="rect">
             <a:avLst/>
@@ -7455,21 +6819,55 @@
                 </a:solidFill>
                 <a:latin typeface="Calibri"/>
               </a:rPr>
-              <a:t>Para continuar (PI)</a:t>
-            </a:r>
-          </a:p>
-        </p:txBody>
-      </p:sp>
-      <p:sp>
-        <p:nvSpPr>
-          <p:cNvPr id="5" name="Rounded Rectangle 4"/>
+              <a:t>Herramientas de hoy</a:t>
+            </a:r>
+          </a:p>
+        </p:txBody>
+      </p:sp>
+      <p:sp>
+        <p:nvSpPr>
+          <p:cNvPr id="5" name="TextBox 4"/>
+          <p:cNvSpPr txBox="1"/>
+          <p:nvPr/>
+        </p:nvSpPr>
+        <p:spPr>
+          <a:xfrm>
+            <a:off x="457200" y="566928"/>
+            <a:ext cx="11277295" cy="411480"/>
+          </a:xfrm>
+          <a:prstGeom prst="rect">
+            <a:avLst/>
+          </a:prstGeom>
+          <a:noFill/>
+        </p:spPr>
+        <p:txBody>
+          <a:bodyPr wrap="square">
+            <a:spAutoFit/>
+          </a:bodyPr>
+          <a:lstStyle/>
+          <a:p>
+            <a:r>
+              <a:rPr sz="1400" b="0" i="0">
+                <a:solidFill>
+                  <a:srgbClr val="B8D8EE"/>
+                </a:solidFill>
+                <a:latin typeface="Calibri"/>
+              </a:rPr>
+              <a:t>Gratis · navegador o free tier · sin cuenta de pago</a:t>
+            </a:r>
+          </a:p>
+        </p:txBody>
+      </p:sp>
+      <p:sp>
+        <p:nvSpPr>
+          <p:cNvPr id="6" name="Rounded Rectangle 5"/>
           <p:cNvSpPr/>
           <p:nvPr/>
         </p:nvSpPr>
         <p:spPr>
           <a:xfrm>
-            <a:off x="457200" y="1261872"/>
-            <a:ext cx="11277295" cy="1051560"/>
+            <a:off x="457200" y="1591056"/>
+            <a:ext cx="5538063" cy="2331720"/>
           </a:xfrm>
           <a:prstGeom prst="roundRect">
             <a:avLst>
@@ -7477,7 +6875,7 @@
             </a:avLst>
           </a:prstGeom>
           <a:solidFill>
-            <a:srgbClr val="E8F4FA"/>
+            <a:srgbClr val="F2F2F2"/>
           </a:solidFill>
           <a:ln>
             <a:noFill/>
@@ -7507,20 +6905,20 @@
       </p:sp>
       <p:sp>
         <p:nvSpPr>
-          <p:cNvPr id="6" name="Rectangle 5"/>
+          <p:cNvPr id="7" name="Rectangle 6"/>
           <p:cNvSpPr/>
           <p:nvPr/>
         </p:nvSpPr>
         <p:spPr>
           <a:xfrm>
-            <a:off x="457200" y="1261872"/>
-            <a:ext cx="128016" cy="1051560"/>
+            <a:off x="457200" y="1591056"/>
+            <a:ext cx="5538063" cy="64008"/>
           </a:xfrm>
           <a:prstGeom prst="rect">
             <a:avLst/>
           </a:prstGeom>
           <a:solidFill>
-            <a:srgbClr val="269CCB"/>
+            <a:srgbClr val="095292"/>
           </a:solidFill>
           <a:ln>
             <a:noFill/>
@@ -7550,109 +6948,14 @@
       </p:sp>
       <p:sp>
         <p:nvSpPr>
-          <p:cNvPr id="7" name="TextBox 6"/>
-          <p:cNvSpPr txBox="1"/>
-          <p:nvPr/>
-        </p:nvSpPr>
-        <p:spPr>
-          <a:xfrm>
-            <a:off x="777240" y="1399031"/>
-            <a:ext cx="10774375" cy="822959"/>
-          </a:xfrm>
-          <a:prstGeom prst="rect">
-            <a:avLst/>
-          </a:prstGeom>
-          <a:noFill/>
-        </p:spPr>
-        <p:txBody>
-          <a:bodyPr wrap="square">
-            <a:spAutoFit/>
-          </a:bodyPr>
-          <a:lstStyle/>
-          <a:p>
-            <a:r>
-              <a:rPr sz="1200" b="1" i="0">
-                <a:solidFill>
-                  <a:srgbClr val="269CCB"/>
-                </a:solidFill>
-                <a:latin typeface="Calibri"/>
-              </a:rPr>
-              <a:t>Info</a:t>
-            </a:r>
-          </a:p>
-          <a:p>
-            <a:pPr>
-              <a:spcBef>
-                <a:spcPts val="400"/>
-              </a:spcBef>
-            </a:pPr>
-            <a:r>
-              <a:rPr sz="1400" b="0" i="0">
-                <a:solidFill>
-                  <a:srgbClr val="333333"/>
-                </a:solidFill>
-                <a:latin typeface="Calibri"/>
-              </a:rPr>
-              <a:t>Entregable: Sección Costos/Sostenibilidad del informe (bajo/medio + drivers)</a:t>
-            </a:r>
-          </a:p>
-        </p:txBody>
-      </p:sp>
-      <p:sp>
-        <p:nvSpPr>
-          <p:cNvPr id="8" name="Rounded Rectangle 7"/>
+          <p:cNvPr id="8" name="Rectangle 7"/>
           <p:cNvSpPr/>
           <p:nvPr/>
         </p:nvSpPr>
         <p:spPr>
           <a:xfrm>
-            <a:off x="457200" y="2478024"/>
-            <a:ext cx="11277295" cy="1051560"/>
-          </a:xfrm>
-          <a:prstGeom prst="roundRect">
-            <a:avLst>
-              <a:gd name="adj" fmla="val 12000"/>
-            </a:avLst>
-          </a:prstGeom>
-          <a:solidFill>
-            <a:srgbClr val="FFF8E1"/>
-          </a:solidFill>
-          <a:ln>
-            <a:noFill/>
-          </a:ln>
-        </p:spPr>
-        <p:style>
-          <a:lnRef idx="1">
-            <a:schemeClr val="accent1"/>
-          </a:lnRef>
-          <a:fillRef idx="3">
-            <a:schemeClr val="accent1"/>
-          </a:fillRef>
-          <a:effectRef idx="2">
-            <a:schemeClr val="accent1"/>
-          </a:effectRef>
-          <a:fontRef idx="minor">
-            <a:schemeClr val="lt1"/>
-          </a:fontRef>
-        </p:style>
-        <p:txBody>
-          <a:bodyPr rtlCol="0" anchor="ctr"/>
-          <a:lstStyle/>
-          <a:p>
-            <a:pPr algn="ctr"/>
-          </a:p>
-        </p:txBody>
-      </p:sp>
-      <p:sp>
-        <p:nvSpPr>
-          <p:cNvPr id="9" name="Rectangle 8"/>
-          <p:cNvSpPr/>
-          <p:nvPr/>
-        </p:nvSpPr>
-        <p:spPr>
-          <a:xfrm>
-            <a:off x="457200" y="2478024"/>
-            <a:ext cx="128016" cy="1051560"/>
+            <a:off x="457200" y="1655064"/>
+            <a:ext cx="5538063" cy="27432"/>
           </a:xfrm>
           <a:prstGeom prst="rect">
             <a:avLst/>
@@ -7686,6 +6989,30 @@
           </a:p>
         </p:txBody>
       </p:sp>
+      <p:pic>
+        <p:nvPicPr>
+          <p:cNvPr id="9" name="Picture 8" descr="google_docs.png"/>
+          <p:cNvPicPr>
+            <a:picLocks noChangeAspect="1"/>
+          </p:cNvPicPr>
+          <p:nvPr/>
+        </p:nvPicPr>
+        <p:blipFill>
+          <a:blip r:embed="rId2"/>
+          <a:stretch>
+            <a:fillRect/>
+          </a:stretch>
+        </p:blipFill>
+        <p:spPr>
+          <a:xfrm>
+            <a:off x="2599867" y="1847087"/>
+            <a:ext cx="1252728" cy="1252728"/>
+          </a:xfrm>
+          <a:prstGeom prst="rect">
+            <a:avLst/>
+          </a:prstGeom>
+        </p:spPr>
+      </p:pic>
       <p:sp>
         <p:nvSpPr>
           <p:cNvPr id="10" name="TextBox 9"/>
@@ -7694,8 +7021,8 @@
         </p:nvSpPr>
         <p:spPr>
           <a:xfrm>
-            <a:off x="777240" y="2615184"/>
-            <a:ext cx="10774375" cy="822959"/>
+            <a:off x="530352" y="3191256"/>
+            <a:ext cx="5391759" cy="621792"/>
           </a:xfrm>
           <a:prstGeom prst="rect">
             <a:avLst/>
@@ -7703,35 +7030,34 @@
           <a:noFill/>
         </p:spPr>
         <p:txBody>
-          <a:bodyPr wrap="square">
-            <a:spAutoFit/>
-          </a:bodyPr>
-          <a:lstStyle/>
-          <a:p>
-            <a:r>
-              <a:rPr sz="1200" b="1" i="0">
-                <a:solidFill>
-                  <a:srgbClr val="FFD000"/>
-                </a:solidFill>
-                <a:latin typeface="Calibri"/>
-              </a:rPr>
-              <a:t>Aclaración</a:t>
-            </a:r>
-          </a:p>
-          <a:p>
-            <a:pPr>
+          <a:bodyPr wrap="square" anchor="t"/>
+          <a:lstStyle/>
+          <a:p>
+            <a:pPr algn="ctr"/>
+            <a:r>
+              <a:rPr sz="1300" b="1" i="0">
+                <a:solidFill>
+                  <a:srgbClr val="095292"/>
+                </a:solidFill>
+                <a:latin typeface="Calibri"/>
+              </a:rPr>
+              <a:t>Google Docs</a:t>
+            </a:r>
+          </a:p>
+          <a:p>
+            <a:pPr algn="ctr">
               <a:spcBef>
-                <a:spcPts val="400"/>
+                <a:spcPts val="200"/>
               </a:spcBef>
             </a:pPr>
             <a:r>
-              <a:rPr sz="1400" b="0" i="0">
-                <a:solidFill>
-                  <a:srgbClr val="333333"/>
-                </a:solidFill>
-                <a:latin typeface="Calibri"/>
-              </a:rPr>
-              <a:t>Subir evidencias al paquete CloudLite (Drive/repo) y a la plataforma del curso en la fecha que indique el docente.</a:t>
+              <a:rPr sz="1000" b="0" i="0">
+                <a:solidFill>
+                  <a:srgbClr val="666666"/>
+                </a:solidFill>
+                <a:latin typeface="Calibri"/>
+              </a:rPr>
+              <a:t>Tabla de costos</a:t>
             </a:r>
           </a:p>
         </p:txBody>
@@ -7744,8 +7070,8 @@
         </p:nvSpPr>
         <p:spPr>
           <a:xfrm>
-            <a:off x="457200" y="3694176"/>
-            <a:ext cx="11277295" cy="1051560"/>
+            <a:off x="6196431" y="1591056"/>
+            <a:ext cx="5538063" cy="2331720"/>
           </a:xfrm>
           <a:prstGeom prst="roundRect">
             <a:avLst>
@@ -7753,7 +7079,7 @@
             </a:avLst>
           </a:prstGeom>
           <a:solidFill>
-            <a:srgbClr val="FBE4E4"/>
+            <a:srgbClr val="F2F2F2"/>
           </a:solidFill>
           <a:ln>
             <a:noFill/>
@@ -7789,14 +7115,14 @@
         </p:nvSpPr>
         <p:spPr>
           <a:xfrm>
-            <a:off x="457200" y="3694176"/>
-            <a:ext cx="128016" cy="1051560"/>
+            <a:off x="6196431" y="1591056"/>
+            <a:ext cx="5538063" cy="64008"/>
           </a:xfrm>
           <a:prstGeom prst="rect">
             <a:avLst/>
           </a:prstGeom>
           <a:solidFill>
-            <a:srgbClr val="A02030"/>
+            <a:srgbClr val="095292"/>
           </a:solidFill>
           <a:ln>
             <a:noFill/>
@@ -7826,14 +7152,81 @@
       </p:sp>
       <p:sp>
         <p:nvSpPr>
-          <p:cNvPr id="13" name="TextBox 12"/>
+          <p:cNvPr id="13" name="Rectangle 12"/>
+          <p:cNvSpPr/>
+          <p:nvPr/>
+        </p:nvSpPr>
+        <p:spPr>
+          <a:xfrm>
+            <a:off x="6196431" y="1655064"/>
+            <a:ext cx="5538063" cy="27432"/>
+          </a:xfrm>
+          <a:prstGeom prst="rect">
+            <a:avLst/>
+          </a:prstGeom>
+          <a:solidFill>
+            <a:srgbClr val="FFD000"/>
+          </a:solidFill>
+          <a:ln>
+            <a:noFill/>
+          </a:ln>
+        </p:spPr>
+        <p:style>
+          <a:lnRef idx="1">
+            <a:schemeClr val="accent1"/>
+          </a:lnRef>
+          <a:fillRef idx="3">
+            <a:schemeClr val="accent1"/>
+          </a:fillRef>
+          <a:effectRef idx="2">
+            <a:schemeClr val="accent1"/>
+          </a:effectRef>
+          <a:fontRef idx="minor">
+            <a:schemeClr val="lt1"/>
+          </a:fontRef>
+        </p:style>
+        <p:txBody>
+          <a:bodyPr rtlCol="0" anchor="ctr"/>
+          <a:lstStyle/>
+          <a:p>
+            <a:pPr algn="ctr"/>
+          </a:p>
+        </p:txBody>
+      </p:sp>
+      <p:pic>
+        <p:nvPicPr>
+          <p:cNvPr id="14" name="Picture 13" descr="examlab.png"/>
+          <p:cNvPicPr>
+            <a:picLocks noChangeAspect="1"/>
+          </p:cNvPicPr>
+          <p:nvPr/>
+        </p:nvPicPr>
+        <p:blipFill>
+          <a:blip r:embed="rId3"/>
+          <a:stretch>
+            <a:fillRect/>
+          </a:stretch>
+        </p:blipFill>
+        <p:spPr>
+          <a:xfrm>
+            <a:off x="8339099" y="1847087"/>
+            <a:ext cx="1252728" cy="1252728"/>
+          </a:xfrm>
+          <a:prstGeom prst="rect">
+            <a:avLst/>
+          </a:prstGeom>
+        </p:spPr>
+      </p:pic>
+      <p:sp>
+        <p:nvSpPr>
+          <p:cNvPr id="15" name="TextBox 14"/>
           <p:cNvSpPr txBox="1"/>
           <p:nvPr/>
         </p:nvSpPr>
         <p:spPr>
           <a:xfrm>
-            <a:off x="777240" y="3831336"/>
-            <a:ext cx="10774375" cy="822959"/>
+            <a:off x="6269583" y="3191256"/>
+            <a:ext cx="5391759" cy="621792"/>
           </a:xfrm>
           <a:prstGeom prst="rect">
             <a:avLst/>
@@ -7841,42 +7234,41 @@
           <a:noFill/>
         </p:spPr>
         <p:txBody>
-          <a:bodyPr wrap="square">
-            <a:spAutoFit/>
-          </a:bodyPr>
-          <a:lstStyle/>
-          <a:p>
-            <a:r>
-              <a:rPr sz="1200" b="1" i="0">
-                <a:solidFill>
-                  <a:srgbClr val="A02030"/>
-                </a:solidFill>
-                <a:latin typeface="Calibri"/>
-              </a:rPr>
-              <a:t>Atención</a:t>
-            </a:r>
-          </a:p>
-          <a:p>
-            <a:pPr>
+          <a:bodyPr wrap="square" anchor="t"/>
+          <a:lstStyle/>
+          <a:p>
+            <a:pPr algn="ctr"/>
+            <a:r>
+              <a:rPr sz="1300" b="1" i="0">
+                <a:solidFill>
+                  <a:srgbClr val="095292"/>
+                </a:solidFill>
+                <a:latin typeface="Calibri"/>
+              </a:rPr>
+              <a:t>la plataforma del curso</a:t>
+            </a:r>
+          </a:p>
+          <a:p>
+            <a:pPr algn="ctr">
               <a:spcBef>
-                <a:spcPts val="400"/>
+                <a:spcPts val="200"/>
               </a:spcBef>
             </a:pPr>
             <a:r>
-              <a:rPr sz="1400" b="0" i="0">
-                <a:solidFill>
-                  <a:srgbClr val="333333"/>
-                </a:solidFill>
-                <a:latin typeface="Calibri"/>
-              </a:rPr>
-              <a:t>Sin cloud de pago ni instalaciones obligatorias de hipervisores/Docker Desktop.</a:t>
-            </a:r>
-          </a:p>
-        </p:txBody>
-      </p:sp>
-      <p:sp>
-        <p:nvSpPr>
-          <p:cNvPr id="14" name="TextBox 13"/>
+              <a:rPr sz="1000" b="0" i="0">
+                <a:solidFill>
+                  <a:srgbClr val="666666"/>
+                </a:solidFill>
+                <a:latin typeface="Calibri"/>
+              </a:rPr>
+              <a:t>Donde se entrega</a:t>
+            </a:r>
+          </a:p>
+        </p:txBody>
+      </p:sp>
+      <p:sp>
+        <p:nvSpPr>
+          <p:cNvPr id="16" name="TextBox 15"/>
           <p:cNvSpPr txBox="1"/>
           <p:nvPr/>
         </p:nvSpPr>
@@ -7944,6 +7336,1245 @@
         <p:spPr>
           <a:xfrm>
             <a:off x="0" y="0"/>
+            <a:ext cx="12191695" cy="960120"/>
+          </a:xfrm>
+          <a:prstGeom prst="rect">
+            <a:avLst/>
+          </a:prstGeom>
+          <a:solidFill>
+            <a:srgbClr val="095292"/>
+          </a:solidFill>
+          <a:ln>
+            <a:noFill/>
+          </a:ln>
+        </p:spPr>
+        <p:style>
+          <a:lnRef idx="1">
+            <a:schemeClr val="accent1"/>
+          </a:lnRef>
+          <a:fillRef idx="3">
+            <a:schemeClr val="accent1"/>
+          </a:fillRef>
+          <a:effectRef idx="2">
+            <a:schemeClr val="accent1"/>
+          </a:effectRef>
+          <a:fontRef idx="minor">
+            <a:schemeClr val="lt1"/>
+          </a:fontRef>
+        </p:style>
+        <p:txBody>
+          <a:bodyPr rtlCol="0" anchor="ctr"/>
+          <a:lstStyle/>
+          <a:p>
+            <a:pPr algn="ctr"/>
+          </a:p>
+        </p:txBody>
+      </p:sp>
+      <p:sp>
+        <p:nvSpPr>
+          <p:cNvPr id="3" name="Rectangle 2"/>
+          <p:cNvSpPr/>
+          <p:nvPr/>
+        </p:nvSpPr>
+        <p:spPr>
+          <a:xfrm>
+            <a:off x="0" y="960120"/>
+            <a:ext cx="12191695" cy="41148"/>
+          </a:xfrm>
+          <a:prstGeom prst="rect">
+            <a:avLst/>
+          </a:prstGeom>
+          <a:solidFill>
+            <a:srgbClr val="FFD000"/>
+          </a:solidFill>
+          <a:ln>
+            <a:noFill/>
+          </a:ln>
+        </p:spPr>
+        <p:style>
+          <a:lnRef idx="1">
+            <a:schemeClr val="accent1"/>
+          </a:lnRef>
+          <a:fillRef idx="3">
+            <a:schemeClr val="accent1"/>
+          </a:fillRef>
+          <a:effectRef idx="2">
+            <a:schemeClr val="accent1"/>
+          </a:effectRef>
+          <a:fontRef idx="minor">
+            <a:schemeClr val="lt1"/>
+          </a:fontRef>
+        </p:style>
+        <p:txBody>
+          <a:bodyPr rtlCol="0" anchor="ctr"/>
+          <a:lstStyle/>
+          <a:p>
+            <a:pPr algn="ctr"/>
+          </a:p>
+        </p:txBody>
+      </p:sp>
+      <p:sp>
+        <p:nvSpPr>
+          <p:cNvPr id="4" name="TextBox 3"/>
+          <p:cNvSpPr txBox="1"/>
+          <p:nvPr/>
+        </p:nvSpPr>
+        <p:spPr>
+          <a:xfrm>
+            <a:off x="457200" y="164592"/>
+            <a:ext cx="11277295" cy="502920"/>
+          </a:xfrm>
+          <a:prstGeom prst="rect">
+            <a:avLst/>
+          </a:prstGeom>
+          <a:noFill/>
+        </p:spPr>
+        <p:txBody>
+          <a:bodyPr wrap="square">
+            <a:spAutoFit/>
+          </a:bodyPr>
+          <a:lstStyle/>
+          <a:p>
+            <a:r>
+              <a:rPr sz="2600" b="1" i="0">
+                <a:solidFill>
+                  <a:srgbClr val="FFFFFF"/>
+                </a:solidFill>
+                <a:latin typeface="Calibri"/>
+              </a:rPr>
+              <a:t>PI CloudLite — entregable de hoy</a:t>
+            </a:r>
+          </a:p>
+        </p:txBody>
+      </p:sp>
+      <p:sp>
+        <p:nvSpPr>
+          <p:cNvPr id="5" name="TextBox 4"/>
+          <p:cNvSpPr txBox="1"/>
+          <p:nvPr/>
+        </p:nvSpPr>
+        <p:spPr>
+          <a:xfrm>
+            <a:off x="457200" y="1170432"/>
+            <a:ext cx="11277295" cy="5230368"/>
+          </a:xfrm>
+          <a:prstGeom prst="rect">
+            <a:avLst/>
+          </a:prstGeom>
+          <a:noFill/>
+        </p:spPr>
+        <p:txBody>
+          <a:bodyPr wrap="square">
+            <a:spAutoFit/>
+          </a:bodyPr>
+          <a:lstStyle/>
+          <a:p>
+            <a:pPr>
+              <a:spcAft>
+                <a:spcPts val="800"/>
+              </a:spcAft>
+            </a:pPr>
+            <a:r>
+              <a:rPr sz="2000" b="0" i="0">
+                <a:solidFill>
+                  <a:srgbClr val="333333"/>
+                </a:solidFill>
+                <a:latin typeface="Calibri"/>
+              </a:rPr>
+              <a:t>–   </a:t>
+            </a:r>
+            <a:r>
+              <a:rPr sz="2000" b="1" i="0">
+                <a:solidFill>
+                  <a:srgbClr val="333333"/>
+                </a:solidFill>
+                <a:latin typeface="Calibri"/>
+              </a:rPr>
+              <a:t>Entregable:</a:t>
+            </a:r>
+            <a:r>
+              <a:rPr sz="2000" b="0" i="0">
+                <a:solidFill>
+                  <a:srgbClr val="333333"/>
+                </a:solidFill>
+                <a:latin typeface="Calibri"/>
+              </a:rPr>
+              <a:t> Sección Costos/Sostenibilidad del informe (bajo/medio + drivers)</a:t>
+            </a:r>
+          </a:p>
+          <a:p>
+            <a:pPr>
+              <a:spcAft>
+                <a:spcPts val="800"/>
+              </a:spcAft>
+            </a:pPr>
+            <a:r>
+              <a:rPr sz="2000" b="0" i="0">
+                <a:solidFill>
+                  <a:srgbClr val="333333"/>
+                </a:solidFill>
+                <a:latin typeface="Calibri"/>
+              </a:rPr>
+              <a:t>–   Herramienta: </a:t>
+            </a:r>
+            <a:r>
+              <a:rPr sz="2000" b="1" i="0">
+                <a:solidFill>
+                  <a:srgbClr val="333333"/>
+                </a:solidFill>
+                <a:latin typeface="Calibri"/>
+              </a:rPr>
+              <a:t>Google Docs</a:t>
+            </a:r>
+          </a:p>
+          <a:p>
+            <a:pPr>
+              <a:spcAft>
+                <a:spcPts val="800"/>
+              </a:spcAft>
+            </a:pPr>
+            <a:r>
+              <a:rPr sz="2000" b="0" i="0">
+                <a:solidFill>
+                  <a:srgbClr val="333333"/>
+                </a:solidFill>
+                <a:latin typeface="Calibri"/>
+              </a:rPr>
+              <a:t>–   Todo lo que construyan hoy entra al </a:t>
+            </a:r>
+            <a:r>
+              <a:rPr sz="2000" b="1" i="0">
+                <a:solidFill>
+                  <a:srgbClr val="333333"/>
+                </a:solidFill>
+                <a:latin typeface="Calibri"/>
+              </a:rPr>
+              <a:t>informe/repo del PI</a:t>
+            </a:r>
+            <a:r>
+              <a:rPr sz="2000" b="0" i="0">
+                <a:solidFill>
+                  <a:srgbClr val="333333"/>
+                </a:solidFill>
+                <a:latin typeface="Calibri"/>
+              </a:rPr>
+              <a:t> (no es lab suelto).</a:t>
+            </a:r>
+          </a:p>
+          <a:p>
+            <a:pPr>
+              <a:spcAft>
+                <a:spcPts val="800"/>
+              </a:spcAft>
+            </a:pPr>
+            <a:r>
+              <a:rPr sz="2000" b="0" i="0">
+                <a:solidFill>
+                  <a:srgbClr val="333333"/>
+                </a:solidFill>
+                <a:latin typeface="Calibri"/>
+              </a:rPr>
+              <a:t>–   Individual por defecto · el docente puede autorizar equipos de 2–3; la entrega en la plataforma del curso siempre es individual.</a:t>
+            </a:r>
+          </a:p>
+        </p:txBody>
+      </p:sp>
+      <p:sp>
+        <p:nvSpPr>
+          <p:cNvPr id="6" name="TextBox 5"/>
+          <p:cNvSpPr txBox="1"/>
+          <p:nvPr/>
+        </p:nvSpPr>
+        <p:spPr>
+          <a:xfrm>
+            <a:off x="11185855" y="6473952"/>
+            <a:ext cx="640080" cy="274320"/>
+          </a:xfrm>
+          <a:prstGeom prst="rect">
+            <a:avLst/>
+          </a:prstGeom>
+          <a:noFill/>
+        </p:spPr>
+        <p:txBody>
+          <a:bodyPr wrap="square">
+            <a:spAutoFit/>
+          </a:bodyPr>
+          <a:lstStyle/>
+          <a:p>
+            <a:pPr algn="r"/>
+            <a:r>
+              <a:rPr sz="1100" b="0" i="0">
+                <a:solidFill>
+                  <a:srgbClr val="666666"/>
+                </a:solidFill>
+                <a:latin typeface="Calibri"/>
+              </a:rPr>
+              <a:t>22</a:t>
+            </a:r>
+          </a:p>
+        </p:txBody>
+      </p:sp>
+    </p:spTree>
+  </p:cSld>
+  <p:clrMapOvr>
+    <a:masterClrMapping/>
+  </p:clrMapOvr>
+</p:sld>
+</file>
+
+<file path=ppt/slides/slide23.xml><?xml version="1.0" encoding="utf-8"?>
+<p:sld xmlns:a="http://schemas.openxmlformats.org/drawingml/2006/main" xmlns:p="http://schemas.openxmlformats.org/presentationml/2006/main" xmlns:r="http://schemas.openxmlformats.org/officeDocument/2006/relationships">
+  <p:cSld>
+    <p:bg>
+      <p:bgPr>
+        <a:solidFill>
+          <a:srgbClr val="FFFFFF"/>
+        </a:solidFill>
+        <a:effectLst/>
+      </p:bgPr>
+    </p:bg>
+    <p:spTree>
+      <p:nvGrpSpPr>
+        <p:cNvPr id="1" name=""/>
+        <p:cNvGrpSpPr/>
+        <p:nvPr/>
+      </p:nvGrpSpPr>
+      <p:grpSpPr/>
+      <p:sp>
+        <p:nvSpPr>
+          <p:cNvPr id="2" name="Rectangle 1"/>
+          <p:cNvSpPr/>
+          <p:nvPr/>
+        </p:nvSpPr>
+        <p:spPr>
+          <a:xfrm>
+            <a:off x="0" y="0"/>
+            <a:ext cx="12191695" cy="960120"/>
+          </a:xfrm>
+          <a:prstGeom prst="rect">
+            <a:avLst/>
+          </a:prstGeom>
+          <a:solidFill>
+            <a:srgbClr val="095292"/>
+          </a:solidFill>
+          <a:ln>
+            <a:noFill/>
+          </a:ln>
+        </p:spPr>
+        <p:style>
+          <a:lnRef idx="1">
+            <a:schemeClr val="accent1"/>
+          </a:lnRef>
+          <a:fillRef idx="3">
+            <a:schemeClr val="accent1"/>
+          </a:fillRef>
+          <a:effectRef idx="2">
+            <a:schemeClr val="accent1"/>
+          </a:effectRef>
+          <a:fontRef idx="minor">
+            <a:schemeClr val="lt1"/>
+          </a:fontRef>
+        </p:style>
+        <p:txBody>
+          <a:bodyPr rtlCol="0" anchor="ctr"/>
+          <a:lstStyle/>
+          <a:p>
+            <a:pPr algn="ctr"/>
+          </a:p>
+        </p:txBody>
+      </p:sp>
+      <p:sp>
+        <p:nvSpPr>
+          <p:cNvPr id="3" name="Rectangle 2"/>
+          <p:cNvSpPr/>
+          <p:nvPr/>
+        </p:nvSpPr>
+        <p:spPr>
+          <a:xfrm>
+            <a:off x="0" y="960120"/>
+            <a:ext cx="12191695" cy="41148"/>
+          </a:xfrm>
+          <a:prstGeom prst="rect">
+            <a:avLst/>
+          </a:prstGeom>
+          <a:solidFill>
+            <a:srgbClr val="FFD000"/>
+          </a:solidFill>
+          <a:ln>
+            <a:noFill/>
+          </a:ln>
+        </p:spPr>
+        <p:style>
+          <a:lnRef idx="1">
+            <a:schemeClr val="accent1"/>
+          </a:lnRef>
+          <a:fillRef idx="3">
+            <a:schemeClr val="accent1"/>
+          </a:fillRef>
+          <a:effectRef idx="2">
+            <a:schemeClr val="accent1"/>
+          </a:effectRef>
+          <a:fontRef idx="minor">
+            <a:schemeClr val="lt1"/>
+          </a:fontRef>
+        </p:style>
+        <p:txBody>
+          <a:bodyPr rtlCol="0" anchor="ctr"/>
+          <a:lstStyle/>
+          <a:p>
+            <a:pPr algn="ctr"/>
+          </a:p>
+        </p:txBody>
+      </p:sp>
+      <p:sp>
+        <p:nvSpPr>
+          <p:cNvPr id="4" name="TextBox 3"/>
+          <p:cNvSpPr txBox="1"/>
+          <p:nvPr/>
+        </p:nvSpPr>
+        <p:spPr>
+          <a:xfrm>
+            <a:off x="457200" y="164592"/>
+            <a:ext cx="11277295" cy="502920"/>
+          </a:xfrm>
+          <a:prstGeom prst="rect">
+            <a:avLst/>
+          </a:prstGeom>
+          <a:noFill/>
+        </p:spPr>
+        <p:txBody>
+          <a:bodyPr wrap="square">
+            <a:spAutoFit/>
+          </a:bodyPr>
+          <a:lstStyle/>
+          <a:p>
+            <a:r>
+              <a:rPr sz="2600" b="1" i="0">
+                <a:solidFill>
+                  <a:srgbClr val="FFFFFF"/>
+                </a:solidFill>
+                <a:latin typeface="Calibri"/>
+              </a:rPr>
+              <a:t>Manos a la obra (paso a paso)</a:t>
+            </a:r>
+          </a:p>
+        </p:txBody>
+      </p:sp>
+      <p:sp>
+        <p:nvSpPr>
+          <p:cNvPr id="5" name="TextBox 4"/>
+          <p:cNvSpPr txBox="1"/>
+          <p:nvPr/>
+        </p:nvSpPr>
+        <p:spPr>
+          <a:xfrm>
+            <a:off x="457200" y="1170432"/>
+            <a:ext cx="11277295" cy="5230368"/>
+          </a:xfrm>
+          <a:prstGeom prst="rect">
+            <a:avLst/>
+          </a:prstGeom>
+          <a:noFill/>
+        </p:spPr>
+        <p:txBody>
+          <a:bodyPr wrap="square">
+            <a:spAutoFit/>
+          </a:bodyPr>
+          <a:lstStyle/>
+          <a:p>
+            <a:pPr>
+              <a:spcAft>
+                <a:spcPts val="800"/>
+              </a:spcAft>
+            </a:pPr>
+            <a:r>
+              <a:rPr sz="2000" b="1" i="0">
+                <a:solidFill>
+                  <a:srgbClr val="333333"/>
+                </a:solidFill>
+                <a:latin typeface="Calibri"/>
+              </a:rPr>
+              <a:t>1.</a:t>
+            </a:r>
+            <a:r>
+              <a:rPr sz="2000" b="0" i="0">
+                <a:solidFill>
+                  <a:srgbClr val="333333"/>
+                </a:solidFill>
+                <a:latin typeface="Calibri"/>
+              </a:rPr>
+              <a:t> Paso 1: construya en la pregunta 11 la tabla de costos con una fila por cada componente de su despliegue y las columnas componente, driver, nivel B/M/A y apalancamiento; verifique que cada driver sea una variable contable (horas encendidas, GB de salida, GB almacenados, minutos de CI) y no «el uso».</a:t>
+            </a:r>
+          </a:p>
+          <a:p>
+            <a:pPr>
+              <a:spcAft>
+                <a:spcPts val="800"/>
+              </a:spcAft>
+            </a:pPr>
+            <a:r>
+              <a:rPr sz="2000" b="0" i="0">
+                <a:solidFill>
+                  <a:srgbClr val="333333"/>
+                </a:solidFill>
+                <a:latin typeface="Calibri"/>
+              </a:rPr>
+              <a:t>–   </a:t>
+            </a:r>
+            <a:r>
+              <a:rPr sz="2000" b="1" i="0">
+                <a:solidFill>
+                  <a:srgbClr val="333333"/>
+                </a:solidFill>
+                <a:latin typeface="Calibri"/>
+              </a:rPr>
+              <a:t>2.</a:t>
+            </a:r>
+            <a:r>
+              <a:rPr sz="2000" b="0" i="0">
+                <a:solidFill>
+                  <a:srgbClr val="333333"/>
+                </a:solidFill>
+                <a:latin typeface="Calibri"/>
+              </a:rPr>
+              <a:t> Paso 2: fuerce al menos un Alto y un Bajo con su justificacion. Marcar todo como Medio para no decidir es lo que la pregunta busca descartar, y ese criterio vale cero si todas las filas quedan iguales.</a:t>
+            </a:r>
+          </a:p>
+          <a:p>
+            <a:pPr>
+              <a:spcAft>
+                <a:spcPts val="800"/>
+              </a:spcAft>
+            </a:pPr>
+            <a:r>
+              <a:rPr sz="2000" b="0" i="0">
+                <a:solidFill>
+                  <a:srgbClr val="333333"/>
+                </a:solidFill>
+                <a:latin typeface="Calibri"/>
+              </a:rPr>
+              <a:t>–   </a:t>
+            </a:r>
+            <a:r>
+              <a:rPr sz="2000" b="1" i="0">
+                <a:solidFill>
+                  <a:srgbClr val="333333"/>
+                </a:solidFill>
+                <a:latin typeface="Calibri"/>
+              </a:rPr>
+              <a:t>3.</a:t>
+            </a:r>
+            <a:r>
+              <a:rPr sz="2000" b="0" i="0">
+                <a:solidFill>
+                  <a:srgbClr val="333333"/>
+                </a:solidFill>
+                <a:latin typeface="Calibri"/>
+              </a:rPr>
+              <a:t> Paso 3: escriba en la pregunta 12 tres acciones de sostenibilidad, cada una con el artefacto donde se comprueba y como se comprueba; aplique la prueba de que otra persona pueda decir en seis meses, mirando el repositorio, si la accion se aplico.</a:t>
+            </a:r>
+          </a:p>
+          <a:p>
+            <a:pPr>
+              <a:spcAft>
+                <a:spcPts val="800"/>
+              </a:spcAft>
+            </a:pPr>
+            <a:r>
+              <a:rPr sz="2000" b="0" i="0">
+                <a:solidFill>
+                  <a:srgbClr val="333333"/>
+                </a:solidFill>
+                <a:latin typeface="Calibri"/>
+              </a:rPr>
+              <a:t>–   </a:t>
+            </a:r>
+            <a:r>
+              <a:rPr sz="2000" b="1" i="0">
+                <a:solidFill>
+                  <a:srgbClr val="333333"/>
+                </a:solidFill>
+                <a:latin typeface="Calibri"/>
+              </a:rPr>
+              <a:t>4.</a:t>
+            </a:r>
+            <a:r>
+              <a:rPr sz="2000" b="0" i="0">
+                <a:solidFill>
+                  <a:srgbClr val="333333"/>
+                </a:solidFill>
+                <a:latin typeface="Calibri"/>
+              </a:rPr>
+              <a:t> Paso 4: ate al menos una de las tres acciones a un driver de costo de la pregunta 11 y suba la actividad completa del Corte 2 a la plataforma del curso antes del en la fecha que indique el docente. Es una clase autonoma: no hay encuentro sincrono, y las dudas van por el foro.</a:t>
+            </a:r>
+          </a:p>
+        </p:txBody>
+      </p:sp>
+      <p:sp>
+        <p:nvSpPr>
+          <p:cNvPr id="6" name="TextBox 5"/>
+          <p:cNvSpPr txBox="1"/>
+          <p:nvPr/>
+        </p:nvSpPr>
+        <p:spPr>
+          <a:xfrm>
+            <a:off x="11185855" y="6473952"/>
+            <a:ext cx="640080" cy="274320"/>
+          </a:xfrm>
+          <a:prstGeom prst="rect">
+            <a:avLst/>
+          </a:prstGeom>
+          <a:noFill/>
+        </p:spPr>
+        <p:txBody>
+          <a:bodyPr wrap="square">
+            <a:spAutoFit/>
+          </a:bodyPr>
+          <a:lstStyle/>
+          <a:p>
+            <a:pPr algn="r"/>
+            <a:r>
+              <a:rPr sz="1100" b="0" i="0">
+                <a:solidFill>
+                  <a:srgbClr val="666666"/>
+                </a:solidFill>
+                <a:latin typeface="Calibri"/>
+              </a:rPr>
+              <a:t>23</a:t>
+            </a:r>
+          </a:p>
+        </p:txBody>
+      </p:sp>
+    </p:spTree>
+  </p:cSld>
+  <p:clrMapOvr>
+    <a:masterClrMapping/>
+  </p:clrMapOvr>
+</p:sld>
+</file>
+
+<file path=ppt/slides/slide24.xml><?xml version="1.0" encoding="utf-8"?>
+<p:sld xmlns:a="http://schemas.openxmlformats.org/drawingml/2006/main" xmlns:p="http://schemas.openxmlformats.org/presentationml/2006/main" xmlns:r="http://schemas.openxmlformats.org/officeDocument/2006/relationships">
+  <p:cSld>
+    <p:bg>
+      <p:bgPr>
+        <a:solidFill>
+          <a:srgbClr val="FFFFFF"/>
+        </a:solidFill>
+        <a:effectLst/>
+      </p:bgPr>
+    </p:bg>
+    <p:spTree>
+      <p:nvGrpSpPr>
+        <p:cNvPr id="1" name=""/>
+        <p:cNvGrpSpPr/>
+        <p:nvPr/>
+      </p:nvGrpSpPr>
+      <p:grpSpPr/>
+      <p:sp>
+        <p:nvSpPr>
+          <p:cNvPr id="2" name="Rectangle 1"/>
+          <p:cNvSpPr/>
+          <p:nvPr/>
+        </p:nvSpPr>
+        <p:spPr>
+          <a:xfrm>
+            <a:off x="0" y="0"/>
+            <a:ext cx="12191695" cy="960120"/>
+          </a:xfrm>
+          <a:prstGeom prst="rect">
+            <a:avLst/>
+          </a:prstGeom>
+          <a:solidFill>
+            <a:srgbClr val="095292"/>
+          </a:solidFill>
+          <a:ln>
+            <a:noFill/>
+          </a:ln>
+        </p:spPr>
+        <p:style>
+          <a:lnRef idx="1">
+            <a:schemeClr val="accent1"/>
+          </a:lnRef>
+          <a:fillRef idx="3">
+            <a:schemeClr val="accent1"/>
+          </a:fillRef>
+          <a:effectRef idx="2">
+            <a:schemeClr val="accent1"/>
+          </a:effectRef>
+          <a:fontRef idx="minor">
+            <a:schemeClr val="lt1"/>
+          </a:fontRef>
+        </p:style>
+        <p:txBody>
+          <a:bodyPr rtlCol="0" anchor="ctr"/>
+          <a:lstStyle/>
+          <a:p>
+            <a:pPr algn="ctr"/>
+          </a:p>
+        </p:txBody>
+      </p:sp>
+      <p:sp>
+        <p:nvSpPr>
+          <p:cNvPr id="3" name="Rectangle 2"/>
+          <p:cNvSpPr/>
+          <p:nvPr/>
+        </p:nvSpPr>
+        <p:spPr>
+          <a:xfrm>
+            <a:off x="0" y="960120"/>
+            <a:ext cx="12191695" cy="41148"/>
+          </a:xfrm>
+          <a:prstGeom prst="rect">
+            <a:avLst/>
+          </a:prstGeom>
+          <a:solidFill>
+            <a:srgbClr val="FFD000"/>
+          </a:solidFill>
+          <a:ln>
+            <a:noFill/>
+          </a:ln>
+        </p:spPr>
+        <p:style>
+          <a:lnRef idx="1">
+            <a:schemeClr val="accent1"/>
+          </a:lnRef>
+          <a:fillRef idx="3">
+            <a:schemeClr val="accent1"/>
+          </a:fillRef>
+          <a:effectRef idx="2">
+            <a:schemeClr val="accent1"/>
+          </a:effectRef>
+          <a:fontRef idx="minor">
+            <a:schemeClr val="lt1"/>
+          </a:fontRef>
+        </p:style>
+        <p:txBody>
+          <a:bodyPr rtlCol="0" anchor="ctr"/>
+          <a:lstStyle/>
+          <a:p>
+            <a:pPr algn="ctr"/>
+          </a:p>
+        </p:txBody>
+      </p:sp>
+      <p:sp>
+        <p:nvSpPr>
+          <p:cNvPr id="4" name="TextBox 3"/>
+          <p:cNvSpPr txBox="1"/>
+          <p:nvPr/>
+        </p:nvSpPr>
+        <p:spPr>
+          <a:xfrm>
+            <a:off x="457200" y="164592"/>
+            <a:ext cx="11277295" cy="502920"/>
+          </a:xfrm>
+          <a:prstGeom prst="rect">
+            <a:avLst/>
+          </a:prstGeom>
+          <a:noFill/>
+        </p:spPr>
+        <p:txBody>
+          <a:bodyPr wrap="square">
+            <a:spAutoFit/>
+          </a:bodyPr>
+          <a:lstStyle/>
+          <a:p>
+            <a:r>
+              <a:rPr sz="2600" b="1" i="0">
+                <a:solidFill>
+                  <a:srgbClr val="FFFFFF"/>
+                </a:solidFill>
+                <a:latin typeface="Calibri"/>
+              </a:rPr>
+              <a:t>Para continuar (PI)</a:t>
+            </a:r>
+          </a:p>
+        </p:txBody>
+      </p:sp>
+      <p:sp>
+        <p:nvSpPr>
+          <p:cNvPr id="5" name="Rounded Rectangle 4"/>
+          <p:cNvSpPr/>
+          <p:nvPr/>
+        </p:nvSpPr>
+        <p:spPr>
+          <a:xfrm>
+            <a:off x="457200" y="1261872"/>
+            <a:ext cx="11277295" cy="1051560"/>
+          </a:xfrm>
+          <a:prstGeom prst="roundRect">
+            <a:avLst>
+              <a:gd name="adj" fmla="val 12000"/>
+            </a:avLst>
+          </a:prstGeom>
+          <a:solidFill>
+            <a:srgbClr val="E8F4FA"/>
+          </a:solidFill>
+          <a:ln>
+            <a:noFill/>
+          </a:ln>
+        </p:spPr>
+        <p:style>
+          <a:lnRef idx="1">
+            <a:schemeClr val="accent1"/>
+          </a:lnRef>
+          <a:fillRef idx="3">
+            <a:schemeClr val="accent1"/>
+          </a:fillRef>
+          <a:effectRef idx="2">
+            <a:schemeClr val="accent1"/>
+          </a:effectRef>
+          <a:fontRef idx="minor">
+            <a:schemeClr val="lt1"/>
+          </a:fontRef>
+        </p:style>
+        <p:txBody>
+          <a:bodyPr rtlCol="0" anchor="ctr"/>
+          <a:lstStyle/>
+          <a:p>
+            <a:pPr algn="ctr"/>
+          </a:p>
+        </p:txBody>
+      </p:sp>
+      <p:sp>
+        <p:nvSpPr>
+          <p:cNvPr id="6" name="Rectangle 5"/>
+          <p:cNvSpPr/>
+          <p:nvPr/>
+        </p:nvSpPr>
+        <p:spPr>
+          <a:xfrm>
+            <a:off x="457200" y="1261872"/>
+            <a:ext cx="128016" cy="1051560"/>
+          </a:xfrm>
+          <a:prstGeom prst="rect">
+            <a:avLst/>
+          </a:prstGeom>
+          <a:solidFill>
+            <a:srgbClr val="269CCB"/>
+          </a:solidFill>
+          <a:ln>
+            <a:noFill/>
+          </a:ln>
+        </p:spPr>
+        <p:style>
+          <a:lnRef idx="1">
+            <a:schemeClr val="accent1"/>
+          </a:lnRef>
+          <a:fillRef idx="3">
+            <a:schemeClr val="accent1"/>
+          </a:fillRef>
+          <a:effectRef idx="2">
+            <a:schemeClr val="accent1"/>
+          </a:effectRef>
+          <a:fontRef idx="minor">
+            <a:schemeClr val="lt1"/>
+          </a:fontRef>
+        </p:style>
+        <p:txBody>
+          <a:bodyPr rtlCol="0" anchor="ctr"/>
+          <a:lstStyle/>
+          <a:p>
+            <a:pPr algn="ctr"/>
+          </a:p>
+        </p:txBody>
+      </p:sp>
+      <p:sp>
+        <p:nvSpPr>
+          <p:cNvPr id="7" name="TextBox 6"/>
+          <p:cNvSpPr txBox="1"/>
+          <p:nvPr/>
+        </p:nvSpPr>
+        <p:spPr>
+          <a:xfrm>
+            <a:off x="777240" y="1399031"/>
+            <a:ext cx="10774375" cy="822959"/>
+          </a:xfrm>
+          <a:prstGeom prst="rect">
+            <a:avLst/>
+          </a:prstGeom>
+          <a:noFill/>
+        </p:spPr>
+        <p:txBody>
+          <a:bodyPr wrap="square">
+            <a:spAutoFit/>
+          </a:bodyPr>
+          <a:lstStyle/>
+          <a:p>
+            <a:r>
+              <a:rPr sz="1200" b="1" i="0">
+                <a:solidFill>
+                  <a:srgbClr val="269CCB"/>
+                </a:solidFill>
+                <a:latin typeface="Calibri"/>
+              </a:rPr>
+              <a:t>Info</a:t>
+            </a:r>
+          </a:p>
+          <a:p>
+            <a:pPr>
+              <a:spcBef>
+                <a:spcPts val="400"/>
+              </a:spcBef>
+            </a:pPr>
+            <a:r>
+              <a:rPr sz="1400" b="0" i="0">
+                <a:solidFill>
+                  <a:srgbClr val="333333"/>
+                </a:solidFill>
+                <a:latin typeface="Calibri"/>
+              </a:rPr>
+              <a:t>Entregable: Sección Costos/Sostenibilidad del informe (bajo/medio + drivers)</a:t>
+            </a:r>
+          </a:p>
+        </p:txBody>
+      </p:sp>
+      <p:sp>
+        <p:nvSpPr>
+          <p:cNvPr id="8" name="Rounded Rectangle 7"/>
+          <p:cNvSpPr/>
+          <p:nvPr/>
+        </p:nvSpPr>
+        <p:spPr>
+          <a:xfrm>
+            <a:off x="457200" y="2478024"/>
+            <a:ext cx="11277295" cy="1051560"/>
+          </a:xfrm>
+          <a:prstGeom prst="roundRect">
+            <a:avLst>
+              <a:gd name="adj" fmla="val 12000"/>
+            </a:avLst>
+          </a:prstGeom>
+          <a:solidFill>
+            <a:srgbClr val="FFF8E1"/>
+          </a:solidFill>
+          <a:ln>
+            <a:noFill/>
+          </a:ln>
+        </p:spPr>
+        <p:style>
+          <a:lnRef idx="1">
+            <a:schemeClr val="accent1"/>
+          </a:lnRef>
+          <a:fillRef idx="3">
+            <a:schemeClr val="accent1"/>
+          </a:fillRef>
+          <a:effectRef idx="2">
+            <a:schemeClr val="accent1"/>
+          </a:effectRef>
+          <a:fontRef idx="minor">
+            <a:schemeClr val="lt1"/>
+          </a:fontRef>
+        </p:style>
+        <p:txBody>
+          <a:bodyPr rtlCol="0" anchor="ctr"/>
+          <a:lstStyle/>
+          <a:p>
+            <a:pPr algn="ctr"/>
+          </a:p>
+        </p:txBody>
+      </p:sp>
+      <p:sp>
+        <p:nvSpPr>
+          <p:cNvPr id="9" name="Rectangle 8"/>
+          <p:cNvSpPr/>
+          <p:nvPr/>
+        </p:nvSpPr>
+        <p:spPr>
+          <a:xfrm>
+            <a:off x="457200" y="2478024"/>
+            <a:ext cx="128016" cy="1051560"/>
+          </a:xfrm>
+          <a:prstGeom prst="rect">
+            <a:avLst/>
+          </a:prstGeom>
+          <a:solidFill>
+            <a:srgbClr val="FFD000"/>
+          </a:solidFill>
+          <a:ln>
+            <a:noFill/>
+          </a:ln>
+        </p:spPr>
+        <p:style>
+          <a:lnRef idx="1">
+            <a:schemeClr val="accent1"/>
+          </a:lnRef>
+          <a:fillRef idx="3">
+            <a:schemeClr val="accent1"/>
+          </a:fillRef>
+          <a:effectRef idx="2">
+            <a:schemeClr val="accent1"/>
+          </a:effectRef>
+          <a:fontRef idx="minor">
+            <a:schemeClr val="lt1"/>
+          </a:fontRef>
+        </p:style>
+        <p:txBody>
+          <a:bodyPr rtlCol="0" anchor="ctr"/>
+          <a:lstStyle/>
+          <a:p>
+            <a:pPr algn="ctr"/>
+          </a:p>
+        </p:txBody>
+      </p:sp>
+      <p:sp>
+        <p:nvSpPr>
+          <p:cNvPr id="10" name="TextBox 9"/>
+          <p:cNvSpPr txBox="1"/>
+          <p:nvPr/>
+        </p:nvSpPr>
+        <p:spPr>
+          <a:xfrm>
+            <a:off x="777240" y="2615184"/>
+            <a:ext cx="10774375" cy="822959"/>
+          </a:xfrm>
+          <a:prstGeom prst="rect">
+            <a:avLst/>
+          </a:prstGeom>
+          <a:noFill/>
+        </p:spPr>
+        <p:txBody>
+          <a:bodyPr wrap="square">
+            <a:spAutoFit/>
+          </a:bodyPr>
+          <a:lstStyle/>
+          <a:p>
+            <a:r>
+              <a:rPr sz="1200" b="1" i="0">
+                <a:solidFill>
+                  <a:srgbClr val="FFD000"/>
+                </a:solidFill>
+                <a:latin typeface="Calibri"/>
+              </a:rPr>
+              <a:t>Aclaración</a:t>
+            </a:r>
+          </a:p>
+          <a:p>
+            <a:pPr>
+              <a:spcBef>
+                <a:spcPts val="400"/>
+              </a:spcBef>
+            </a:pPr>
+            <a:r>
+              <a:rPr sz="1400" b="0" i="0">
+                <a:solidFill>
+                  <a:srgbClr val="333333"/>
+                </a:solidFill>
+                <a:latin typeface="Calibri"/>
+              </a:rPr>
+              <a:t>Subir evidencias al paquete CloudLite (Drive/repo) y a la plataforma del curso en la fecha que indique el docente.</a:t>
+            </a:r>
+          </a:p>
+        </p:txBody>
+      </p:sp>
+      <p:sp>
+        <p:nvSpPr>
+          <p:cNvPr id="11" name="Rounded Rectangle 10"/>
+          <p:cNvSpPr/>
+          <p:nvPr/>
+        </p:nvSpPr>
+        <p:spPr>
+          <a:xfrm>
+            <a:off x="457200" y="3694176"/>
+            <a:ext cx="11277295" cy="1051560"/>
+          </a:xfrm>
+          <a:prstGeom prst="roundRect">
+            <a:avLst>
+              <a:gd name="adj" fmla="val 12000"/>
+            </a:avLst>
+          </a:prstGeom>
+          <a:solidFill>
+            <a:srgbClr val="FBE4E4"/>
+          </a:solidFill>
+          <a:ln>
+            <a:noFill/>
+          </a:ln>
+        </p:spPr>
+        <p:style>
+          <a:lnRef idx="1">
+            <a:schemeClr val="accent1"/>
+          </a:lnRef>
+          <a:fillRef idx="3">
+            <a:schemeClr val="accent1"/>
+          </a:fillRef>
+          <a:effectRef idx="2">
+            <a:schemeClr val="accent1"/>
+          </a:effectRef>
+          <a:fontRef idx="minor">
+            <a:schemeClr val="lt1"/>
+          </a:fontRef>
+        </p:style>
+        <p:txBody>
+          <a:bodyPr rtlCol="0" anchor="ctr"/>
+          <a:lstStyle/>
+          <a:p>
+            <a:pPr algn="ctr"/>
+          </a:p>
+        </p:txBody>
+      </p:sp>
+      <p:sp>
+        <p:nvSpPr>
+          <p:cNvPr id="12" name="Rectangle 11"/>
+          <p:cNvSpPr/>
+          <p:nvPr/>
+        </p:nvSpPr>
+        <p:spPr>
+          <a:xfrm>
+            <a:off x="457200" y="3694176"/>
+            <a:ext cx="128016" cy="1051560"/>
+          </a:xfrm>
+          <a:prstGeom prst="rect">
+            <a:avLst/>
+          </a:prstGeom>
+          <a:solidFill>
+            <a:srgbClr val="A02030"/>
+          </a:solidFill>
+          <a:ln>
+            <a:noFill/>
+          </a:ln>
+        </p:spPr>
+        <p:style>
+          <a:lnRef idx="1">
+            <a:schemeClr val="accent1"/>
+          </a:lnRef>
+          <a:fillRef idx="3">
+            <a:schemeClr val="accent1"/>
+          </a:fillRef>
+          <a:effectRef idx="2">
+            <a:schemeClr val="accent1"/>
+          </a:effectRef>
+          <a:fontRef idx="minor">
+            <a:schemeClr val="lt1"/>
+          </a:fontRef>
+        </p:style>
+        <p:txBody>
+          <a:bodyPr rtlCol="0" anchor="ctr"/>
+          <a:lstStyle/>
+          <a:p>
+            <a:pPr algn="ctr"/>
+          </a:p>
+        </p:txBody>
+      </p:sp>
+      <p:sp>
+        <p:nvSpPr>
+          <p:cNvPr id="13" name="TextBox 12"/>
+          <p:cNvSpPr txBox="1"/>
+          <p:nvPr/>
+        </p:nvSpPr>
+        <p:spPr>
+          <a:xfrm>
+            <a:off x="777240" y="3831336"/>
+            <a:ext cx="10774375" cy="822959"/>
+          </a:xfrm>
+          <a:prstGeom prst="rect">
+            <a:avLst/>
+          </a:prstGeom>
+          <a:noFill/>
+        </p:spPr>
+        <p:txBody>
+          <a:bodyPr wrap="square">
+            <a:spAutoFit/>
+          </a:bodyPr>
+          <a:lstStyle/>
+          <a:p>
+            <a:r>
+              <a:rPr sz="1200" b="1" i="0">
+                <a:solidFill>
+                  <a:srgbClr val="A02030"/>
+                </a:solidFill>
+                <a:latin typeface="Calibri"/>
+              </a:rPr>
+              <a:t>Atención</a:t>
+            </a:r>
+          </a:p>
+          <a:p>
+            <a:pPr>
+              <a:spcBef>
+                <a:spcPts val="400"/>
+              </a:spcBef>
+            </a:pPr>
+            <a:r>
+              <a:rPr sz="1400" b="0" i="0">
+                <a:solidFill>
+                  <a:srgbClr val="333333"/>
+                </a:solidFill>
+                <a:latin typeface="Calibri"/>
+              </a:rPr>
+              <a:t>Sin cloud de pago ni instalaciones obligatorias de hipervisores/Docker Desktop.</a:t>
+            </a:r>
+          </a:p>
+        </p:txBody>
+      </p:sp>
+      <p:sp>
+        <p:nvSpPr>
+          <p:cNvPr id="14" name="TextBox 13"/>
+          <p:cNvSpPr txBox="1"/>
+          <p:nvPr/>
+        </p:nvSpPr>
+        <p:spPr>
+          <a:xfrm>
+            <a:off x="11185855" y="6473952"/>
+            <a:ext cx="640080" cy="274320"/>
+          </a:xfrm>
+          <a:prstGeom prst="rect">
+            <a:avLst/>
+          </a:prstGeom>
+          <a:noFill/>
+        </p:spPr>
+        <p:txBody>
+          <a:bodyPr wrap="square">
+            <a:spAutoFit/>
+          </a:bodyPr>
+          <a:lstStyle/>
+          <a:p>
+            <a:pPr algn="r"/>
+            <a:r>
+              <a:rPr sz="1100" b="0" i="0">
+                <a:solidFill>
+                  <a:srgbClr val="666666"/>
+                </a:solidFill>
+                <a:latin typeface="Calibri"/>
+              </a:rPr>
+              <a:t>24</a:t>
+            </a:r>
+          </a:p>
+        </p:txBody>
+      </p:sp>
+    </p:spTree>
+  </p:cSld>
+  <p:clrMapOvr>
+    <a:masterClrMapping/>
+  </p:clrMapOvr>
+</p:sld>
+</file>
+
+<file path=ppt/slides/slide25.xml><?xml version="1.0" encoding="utf-8"?>
+<p:sld xmlns:a="http://schemas.openxmlformats.org/drawingml/2006/main" xmlns:p="http://schemas.openxmlformats.org/presentationml/2006/main" xmlns:r="http://schemas.openxmlformats.org/officeDocument/2006/relationships">
+  <p:cSld>
+    <p:bg>
+      <p:bgPr>
+        <a:solidFill>
+          <a:srgbClr val="FFFFFF"/>
+        </a:solidFill>
+        <a:effectLst/>
+      </p:bgPr>
+    </p:bg>
+    <p:spTree>
+      <p:nvGrpSpPr>
+        <p:cNvPr id="1" name=""/>
+        <p:cNvGrpSpPr/>
+        <p:nvPr/>
+      </p:nvGrpSpPr>
+      <p:grpSpPr/>
+      <p:sp>
+        <p:nvSpPr>
+          <p:cNvPr id="2" name="Rectangle 1"/>
+          <p:cNvSpPr/>
+          <p:nvPr/>
+        </p:nvSpPr>
+        <p:spPr>
+          <a:xfrm>
+            <a:off x="0" y="0"/>
             <a:ext cx="12191695" cy="164592"/>
           </a:xfrm>
           <a:prstGeom prst="rect">
@@ -9112,38 +9743,6 @@
               <a:t>–   El cambio no es contable sino arquitectonico.</a:t>
             </a:r>
           </a:p>
-          <a:p>
-            <a:pPr>
-              <a:spcAft>
-                <a:spcPts val="800"/>
-              </a:spcAft>
-            </a:pPr>
-            <a:r>
-              <a:rPr sz="2000" b="0" i="0">
-                <a:solidFill>
-                  <a:srgbClr val="333333"/>
-                </a:solidFill>
-                <a:latin typeface="Calibri"/>
-              </a:rPr>
-              <a:t>–   Cuando cada recurso tiene precio unitario, casi cualquier decision de diseno se convierte en una cifra mensual y el arquitecto pasa a ser corresponsable del gasto.</a:t>
-            </a:r>
-          </a:p>
-          <a:p>
-            <a:pPr>
-              <a:spcAft>
-                <a:spcPts val="800"/>
-              </a:spcAft>
-            </a:pPr>
-            <a:r>
-              <a:rPr sz="2000" b="0" i="0">
-                <a:solidFill>
-                  <a:srgbClr val="333333"/>
-                </a:solidFill>
-                <a:latin typeface="Calibri"/>
-              </a:rPr>
-              <a:t>–   Esa es la razon por la que este tema vive en un curso de arquitectura y no en uno de administracion.</a:t>
-            </a:r>
-          </a:p>
         </p:txBody>
       </p:sp>
       <p:sp>
@@ -9322,7 +9921,7 @@
                 </a:solidFill>
                 <a:latin typeface="Calibri"/>
               </a:rPr>
-              <a:t>CloudLite no tiene factura real, y por que igual se estima</a:t>
+              <a:t>CloudLite no tiene factura real, y por que igual se estima (1/2)</a:t>
             </a:r>
           </a:p>
         </p:txBody>
@@ -9377,7 +9976,7 @@
                 </a:solidFill>
                 <a:latin typeface="Calibri"/>
               </a:rPr>
-              <a:t>–   Eso no impide el analisis de costo, solo cambia la escala de medida.</a:t>
+              <a:t>–   En vez de pesos se usa una escala ordinal de tres niveles, Bajo, Medio y Alto, asignada componente por componente.</a:t>
             </a:r>
           </a:p>
           <a:p>
@@ -9393,87 +9992,7 @@
                 </a:solidFill>
                 <a:latin typeface="Calibri"/>
               </a:rPr>
-              <a:t>–   En vez de pesos se usa una escala ordinal de tres niveles, Bajo, Medio y Alto, asignada componente por componente.</a:t>
-            </a:r>
-          </a:p>
-          <a:p>
-            <a:pPr>
-              <a:spcAft>
-                <a:spcPts val="800"/>
-              </a:spcAft>
-            </a:pPr>
-            <a:r>
-              <a:rPr sz="2000" b="0" i="0">
-                <a:solidFill>
-                  <a:srgbClr val="333333"/>
-                </a:solidFill>
-                <a:latin typeface="Calibri"/>
-              </a:rPr>
               <a:t>–   Una escala ordinal ordena pero no mide distancias: decir que la base de datos es Alto y el frontend estatico es Bajo afirma que uno cuesta mas que el otro, no cuantas veces mas.</a:t>
-            </a:r>
-          </a:p>
-          <a:p>
-            <a:pPr>
-              <a:spcAft>
-                <a:spcPts val="800"/>
-              </a:spcAft>
-            </a:pPr>
-            <a:r>
-              <a:rPr sz="2000" b="0" i="0">
-                <a:solidFill>
-                  <a:srgbClr val="333333"/>
-                </a:solidFill>
-                <a:latin typeface="Calibri"/>
-              </a:rPr>
-              <a:t>–   Alcanza de sobra para el objetivo real, que es identificar el driver de costo de cada componente.</a:t>
-            </a:r>
-          </a:p>
-          <a:p>
-            <a:pPr>
-              <a:spcAft>
-                <a:spcPts val="800"/>
-              </a:spcAft>
-            </a:pPr>
-            <a:r>
-              <a:rPr sz="2000" b="0" i="0">
-                <a:solidFill>
-                  <a:srgbClr val="333333"/>
-                </a:solidFill>
-                <a:latin typeface="Calibri"/>
-              </a:rPr>
-              <a:t>–   Un driver de costo es la variable concreta que, si crece, hace crecer la factura de ese componente</a:t>
-            </a:r>
-          </a:p>
-          <a:p>
-            <a:pPr>
-              <a:spcAft>
-                <a:spcPts val="800"/>
-              </a:spcAft>
-            </a:pPr>
-            <a:r>
-              <a:rPr sz="2000" b="0" i="0">
-                <a:solidFill>
-                  <a:srgbClr val="333333"/>
-                </a:solidFill>
-                <a:latin typeface="Calibri"/>
-              </a:rPr>
-              <a:t>–   No es "el uso" en abstracto sino algo contable: instancias encendidas, horas encendidas, gigabytes almacenados, gigabytes de trafico de salida, numero de peticiones, gigabytes de logs ingeridos.</a:t>
-            </a:r>
-          </a:p>
-          <a:p>
-            <a:pPr>
-              <a:spcAft>
-                <a:spcPts val="800"/>
-              </a:spcAft>
-            </a:pPr>
-            <a:r>
-              <a:rPr sz="2000" b="0" i="0">
-                <a:solidFill>
-                  <a:srgbClr val="333333"/>
-                </a:solidFill>
-                <a:latin typeface="Calibri"/>
-              </a:rPr>
-              <a:t>–   Un componente al que el estudiante no le sabe poner driver es un componente que todavia no entiende.</a:t>
             </a:r>
           </a:p>
         </p:txBody>
@@ -9654,7 +10173,7 @@
                 </a:solidFill>
                 <a:latin typeface="Calibri"/>
               </a:rPr>
-              <a:t>Ordenes de magnitud que el docente debe poder citar</a:t>
+              <a:t>CloudLite no tiene factura real, y por que igual se estima (2/2)</a:t>
             </a:r>
           </a:p>
         </p:txBody>
@@ -9693,7 +10212,7 @@
                 </a:solidFill>
                 <a:latin typeface="Calibri"/>
               </a:rPr>
-              <a:t>–   Una instancia pequena de 2 vCPU y 4 GB encendida todo el mes cuesta del orden de 25 a 40 dolares.</a:t>
+              <a:t>–   Alcanza de sobra para el objetivo real, que es identificar el driver de costo de cada componente.</a:t>
             </a:r>
           </a:p>
           <a:p>
@@ -9709,7 +10228,7 @@
                 </a:solidFill>
                 <a:latin typeface="Calibri"/>
               </a:rPr>
-              <a:t>–   El almacenamiento de objetos cuesta del orden de 0.02 a 0.03 dolares por gigabyte al mes, es decir casi nada.</a:t>
+              <a:t>–   Un driver de costo es la variable concreta que, si crece, hace crecer la factura de ese componente</a:t>
             </a:r>
           </a:p>
           <a:p>
@@ -9725,7 +10244,7 @@
                 </a:solidFill>
                 <a:latin typeface="Calibri"/>
               </a:rPr>
-              <a:t>–   El trafico de salida hacia internet, llamado egress, cuesta del orden de 0.08 a 0.12 dolares por gigabyte: unas cuatro veces mas caro por gigabyte que guardarlo un mes entero.</a:t>
+              <a:t>–   No es "el uso" en abstracto sino algo contable: instancias encendidas, horas encendidas, gigabytes almacenados, gigabytes de trafico de salida, numero de peticiones, gigabytes de logs ingeridos.</a:t>
             </a:r>
           </a:p>
           <a:p>
@@ -9741,55 +10260,7 @@
                 </a:solidFill>
                 <a:latin typeface="Calibri"/>
               </a:rPr>
-              <a:t>–   Una base de datos gestionada cuesta entre dos y tres veces la maquina desnuda equivalente, porque incluye respaldos, parches y conmutacion por falla.</a:t>
-            </a:r>
-          </a:p>
-          <a:p>
-            <a:pPr>
-              <a:spcAft>
-                <a:spcPts val="800"/>
-              </a:spcAft>
-            </a:pPr>
-            <a:r>
-              <a:rPr sz="2000" b="0" i="0">
-                <a:solidFill>
-                  <a:srgbClr val="333333"/>
-                </a:solidFill>
-                <a:latin typeface="Calibri"/>
-              </a:rPr>
-              <a:t>–   Un balanceador de carga cobra una tarifa fija de 18 a 25 dolares al mes incluso con cero trafico.</a:t>
-            </a:r>
-          </a:p>
-          <a:p>
-            <a:pPr>
-              <a:spcAft>
-                <a:spcPts val="800"/>
-              </a:spcAft>
-            </a:pPr>
-            <a:r>
-              <a:rPr sz="2000" b="0" i="0">
-                <a:solidFill>
-                  <a:srgbClr val="333333"/>
-                </a:solidFill>
-                <a:latin typeface="Calibri"/>
-              </a:rPr>
-              <a:t>–   Una funcion serverless suele traer free tier de alrededor de un millon de invocaciones mensuales, asi que un componente poco usado cuesta cero de verdad.</a:t>
-            </a:r>
-          </a:p>
-          <a:p>
-            <a:pPr>
-              <a:spcAft>
-                <a:spcPts val="800"/>
-              </a:spcAft>
-            </a:pPr>
-            <a:r>
-              <a:rPr sz="2000" b="0" i="0">
-                <a:solidFill>
-                  <a:srgbClr val="333333"/>
-                </a:solidFill>
-                <a:latin typeface="Calibri"/>
-              </a:rPr>
-              <a:t>–   La leccion durable son tres proporciones: guardar es barato, mover datos hacia afuera es caro, y estar prendido sin hacer nada tambien cuesta.</a:t>
+              <a:t>–   Un componente al que el estudiante no le sabe poner driver es un componente que todavia no entiende.</a:t>
             </a:r>
           </a:p>
         </p:txBody>
@@ -9970,7 +10441,7 @@
                 </a:solidFill>
                 <a:latin typeface="Calibri"/>
               </a:rPr>
-              <a:t>Primer ejemplo: la tabla del entregable, componente por componente</a:t>
+              <a:t>Ordenes de magnitud que el docente debe poder citar</a:t>
             </a:r>
           </a:p>
         </p:txBody>
@@ -10009,7 +10480,7 @@
                 </a:solidFill>
                 <a:latin typeface="Calibri"/>
               </a:rPr>
-              <a:t>–   El contenedor de la API queda en Medio, con driver instancias por horas encendidas.</a:t>
+              <a:t>–   Una instancia pequena de 2 vCPU y 4 GB encendida todo el mes cuesta del orden de 25 a 40 dolares.</a:t>
             </a:r>
           </a:p>
           <a:p>
@@ -10025,7 +10496,7 @@
                 </a:solidFill>
                 <a:latin typeface="Calibri"/>
               </a:rPr>
-              <a:t>–   La base de datos queda en Alto con un argumento preciso: paga computo las 24 horas de los 30 dias aunque nadie consulte, mas almacenamiento que nunca baja, mas respaldos.</a:t>
+              <a:t>–   El almacenamiento de objetos cuesta del orden de 0.02 a 0.03 dolares por gigabyte al mes, es decir casi nada.</a:t>
             </a:r>
           </a:p>
           <a:p>
@@ -10041,7 +10512,7 @@
                 </a:solidFill>
                 <a:latin typeface="Calibri"/>
               </a:rPr>
-              <a:t>–   El frontend estatico queda en Bajo porque es almacenamiento mas trafico y no tiene computo propio.</a:t>
+              <a:t>–   El trafico de salida hacia internet, llamado egress, cuesta del orden de 0.08 a 0.12 dolares por gigabyte: unas cuatro veces mas caro por gigabyte que guardarlo un mes entero.</a:t>
             </a:r>
           </a:p>
           <a:p>
@@ -10057,7 +10528,7 @@
                 </a:solidFill>
                 <a:latin typeface="Calibri"/>
               </a:rPr>
-              <a:t>–   Las notificaciones quedan en Bajo si se modelan como funcion serverless de volumen pequeno</a:t>
+              <a:t>–   Un balanceador de carga cobra una tarifa fija de 18 a 25 dolares al mes incluso con cero trafico.</a:t>
             </a:r>
           </a:p>
           <a:p>
@@ -10073,39 +10544,7 @@
                 </a:solidFill>
                 <a:latin typeface="Calibri"/>
               </a:rPr>
-              <a:t>–   Y pasan a Medio si se implementan como un worker encendido de forma permanente: el mismo requisito con dos disenos y dos costos, que es exactamente el razonamiento que se evalua.</a:t>
-            </a:r>
-          </a:p>
-          <a:p>
-            <a:pPr>
-              <a:spcAft>
-                <a:spcPts val="800"/>
-              </a:spcAft>
-            </a:pPr>
-            <a:r>
-              <a:rPr sz="2000" b="0" i="0">
-                <a:solidFill>
-                  <a:srgbClr val="333333"/>
-                </a:solidFill>
-                <a:latin typeface="Calibri"/>
-              </a:rPr>
-              <a:t>–   Y hay un componente que sorprende, el monitoreo de la Clase 8: un sistema que registra cada peticion con detalle puede generar mas gigabytes de logs que de datos de negocio</a:t>
-            </a:r>
-          </a:p>
-          <a:p>
-            <a:pPr>
-              <a:spcAft>
-                <a:spcPts val="800"/>
-              </a:spcAft>
-            </a:pPr>
-            <a:r>
-              <a:rPr sz="2000" b="0" i="0">
-                <a:solidFill>
-                  <a:srgbClr val="333333"/>
-                </a:solidFill>
-                <a:latin typeface="Calibri"/>
-              </a:rPr>
-              <a:t>–   Y la ingesta de logs se cobra por gigabyte; existen casos reales de equipos cuya observabilidad costaba mas que la aplicacion observada.</a:t>
+              <a:t>–   La leccion durable son tres proporciones: guardar es barato, mover datos hacia afuera es caro, y estar prendido sin hacer nada tambien cuesta.</a:t>
             </a:r>
           </a:p>
         </p:txBody>

--- a/Arquitectura de Sistemas Computacionales/Clases/Clase 10 - Costos y sostenibilidad cloud/Presentacion.pptx
+++ b/Arquitectura de Sistemas Computacionales/Clases/Clase 10 - Costos y sostenibilidad cloud/Presentacion.pptx
@@ -7524,7 +7524,7 @@
                 </a:solidFill>
                 <a:latin typeface="Calibri"/>
               </a:rPr>
-              <a:t>Google Docs</a:t>
+              <a:t>Navegador · editor de texto del curso</a:t>
             </a:r>
           </a:p>
           <a:p>
@@ -8362,7 +8362,7 @@
                 </a:solidFill>
                 <a:latin typeface="Calibri"/>
               </a:rPr>
-              <a:t>Subir evidencias al paquete CloudLite (Drive/repo) y a la plataforma del curso en la fecha que indique el docente.</a:t>
+              <a:t>Subir evidencias al paquete CloudLite (Drive/repo) y a la plataforma del curso (la plataforma del curso) en la fecha que indique el docente.</a:t>
             </a:r>
           </a:p>
         </p:txBody>

--- a/Arquitectura de Sistemas Computacionales/Clases/Clase 10 - Costos y sostenibilidad cloud/Presentacion.pptx
+++ b/Arquitectura de Sistemas Computacionales/Clases/Clase 10 - Costos y sostenibilidad cloud/Presentacion.pptx
@@ -11,25 +11,21 @@
     <p:sldId id="259" r:id="rId10"/>
     <p:sldId id="260" r:id="rId11"/>
     <p:sldId id="261" r:id="rId12"/>
-    <p:sldId id="262" r:id="rId13"/>
-    <p:sldId id="263" r:id="rId14"/>
-    <p:sldId id="264" r:id="rId15"/>
-    <p:sldId id="265" r:id="rId16"/>
-    <p:sldId id="266" r:id="rId17"/>
-    <p:sldId id="267" r:id="rId18"/>
-    <p:sldId id="268" r:id="rId19"/>
-    <p:sldId id="269" r:id="rId20"/>
-    <p:sldId id="270" r:id="rId21"/>
-    <p:sldId id="271" r:id="rId22"/>
-    <p:sldId id="272" r:id="rId23"/>
-    <p:sldId id="273" r:id="rId24"/>
-    <p:sldId id="274" r:id="rId25"/>
-    <p:sldId id="275" r:id="rId26"/>
-    <p:sldId id="276" r:id="rId27"/>
-    <p:sldId id="277" r:id="rId28"/>
-    <p:sldId id="278" r:id="rId29"/>
-    <p:sldId id="279" r:id="rId30"/>
-    <p:sldId id="280" r:id="rId31"/>
+    <p:sldId id="262" r:id="rId14"/>
+    <p:sldId id="263" r:id="rId15"/>
+    <p:sldId id="264" r:id="rId16"/>
+    <p:sldId id="265" r:id="rId17"/>
+    <p:sldId id="266" r:id="rId18"/>
+    <p:sldId id="267" r:id="rId19"/>
+    <p:sldId id="268" r:id="rId20"/>
+    <p:sldId id="269" r:id="rId21"/>
+    <p:sldId id="270" r:id="rId22"/>
+    <p:sldId id="271" r:id="rId23"/>
+    <p:sldId id="272" r:id="rId24"/>
+    <p:sldId id="273" r:id="rId25"/>
+    <p:sldId id="274" r:id="rId26"/>
+    <p:sldId id="275" r:id="rId27"/>
+    <p:sldId id="276" r:id="rId28"/>
   </p:sldIdLst>
   <p:sldSz cx="12191695" cy="6858000" type="screen4x3"/>
   <p:notesSz cx="6858000" cy="9144000"/>
@@ -129,6 +125,964 @@
     </a:lvl9pPr>
   </p:defaultTextStyle>
 </p:presentation>
+</file>
+
+<file path=ppt/notesMasters/notesMaster1.xml><?xml version="1.0" encoding="utf-8"?>
+<p:notesMaster xmlns:a="http://schemas.openxmlformats.org/drawingml/2006/main" xmlns:p="http://schemas.openxmlformats.org/presentationml/2006/main" xmlns:r="http://schemas.openxmlformats.org/officeDocument/2006/relationships">
+  <p:cSld>
+    <p:bg>
+      <p:bgRef idx="1001">
+        <a:schemeClr val="bg1"/>
+      </p:bgRef>
+    </p:bg>
+    <p:spTree>
+      <p:nvGrpSpPr>
+        <p:cNvPr id="1" name=""/>
+        <p:cNvGrpSpPr/>
+        <p:nvPr/>
+      </p:nvGrpSpPr>
+      <p:grpSpPr>
+        <a:xfrm>
+          <a:off x="0" y="0"/>
+          <a:ext cx="0" cy="0"/>
+          <a:chOff x="0" y="0"/>
+          <a:chExt cx="0" cy="0"/>
+        </a:xfrm>
+      </p:grpSpPr>
+      <p:sp>
+        <p:nvSpPr>
+          <p:cNvPr id="2" name="Header Placeholder 1"/>
+          <p:cNvSpPr>
+            <a:spLocks noGrp="1"/>
+          </p:cNvSpPr>
+          <p:nvPr>
+            <p:ph type="hdr" sz="quarter"/>
+          </p:nvPr>
+        </p:nvSpPr>
+        <p:spPr>
+          <a:xfrm>
+            <a:off x="0" y="0"/>
+            <a:ext cx="2971800" cy="457200"/>
+          </a:xfrm>
+          <a:prstGeom prst="rect">
+            <a:avLst/>
+          </a:prstGeom>
+        </p:spPr>
+        <p:txBody>
+          <a:bodyPr vert="horz" lIns="91440" tIns="45720" rIns="91440" bIns="45720" rtlCol="0"/>
+          <a:lstStyle>
+            <a:lvl1pPr algn="l">
+              <a:defRPr sz="1200"/>
+            </a:lvl1pPr>
+          </a:lstStyle>
+          <a:p>
+            <a:endParaRPr lang="en-US"/>
+          </a:p>
+        </p:txBody>
+      </p:sp>
+      <p:sp>
+        <p:nvSpPr>
+          <p:cNvPr id="3" name="Date Placeholder 2"/>
+          <p:cNvSpPr>
+            <a:spLocks noGrp="1"/>
+          </p:cNvSpPr>
+          <p:nvPr>
+            <p:ph type="dt" idx="1"/>
+          </p:nvPr>
+        </p:nvSpPr>
+        <p:spPr>
+          <a:xfrm>
+            <a:off x="3884613" y="0"/>
+            <a:ext cx="2971800" cy="457200"/>
+          </a:xfrm>
+          <a:prstGeom prst="rect">
+            <a:avLst/>
+          </a:prstGeom>
+        </p:spPr>
+        <p:txBody>
+          <a:bodyPr vert="horz" lIns="91440" tIns="45720" rIns="91440" bIns="45720" rtlCol="0"/>
+          <a:lstStyle>
+            <a:lvl1pPr algn="r">
+              <a:defRPr sz="1200"/>
+            </a:lvl1pPr>
+          </a:lstStyle>
+          <a:p>
+            <a:fld id="{0F89C1C7-3DCD-1040-A9CF-14679D8B5DDD}" type="datetimeFigureOut">
+              <a:rPr lang="en-US" smtClean="0"/>
+              <a:t>10/17/16</a:t>
+            </a:fld>
+            <a:endParaRPr lang="en-US"/>
+          </a:p>
+        </p:txBody>
+      </p:sp>
+      <p:sp>
+        <p:nvSpPr>
+          <p:cNvPr id="4" name="Slide Image Placeholder 3"/>
+          <p:cNvSpPr>
+            <a:spLocks noGrp="1" noRot="1" noChangeAspect="1"/>
+          </p:cNvSpPr>
+          <p:nvPr>
+            <p:ph type="sldImg" idx="2"/>
+          </p:nvPr>
+        </p:nvSpPr>
+        <p:spPr>
+          <a:xfrm>
+            <a:off x="1143000" y="685800"/>
+            <a:ext cx="4572000" cy="3429000"/>
+          </a:xfrm>
+          <a:prstGeom prst="rect">
+            <a:avLst/>
+          </a:prstGeom>
+          <a:noFill/>
+          <a:ln w="12700">
+            <a:solidFill>
+              <a:prstClr val="black"/>
+            </a:solidFill>
+          </a:ln>
+        </p:spPr>
+        <p:txBody>
+          <a:bodyPr vert="horz" lIns="91440" tIns="45720" rIns="91440" bIns="45720" rtlCol="0" anchor="ctr"/>
+          <a:lstStyle/>
+          <a:p>
+            <a:endParaRPr lang="en-US"/>
+          </a:p>
+        </p:txBody>
+      </p:sp>
+      <p:sp>
+        <p:nvSpPr>
+          <p:cNvPr id="5" name="Notes Placeholder 4"/>
+          <p:cNvSpPr>
+            <a:spLocks noGrp="1"/>
+          </p:cNvSpPr>
+          <p:nvPr>
+            <p:ph type="body" sz="quarter" idx="3"/>
+          </p:nvPr>
+        </p:nvSpPr>
+        <p:spPr>
+          <a:xfrm>
+            <a:off x="685800" y="4343400"/>
+            <a:ext cx="5486400" cy="4114800"/>
+          </a:xfrm>
+          <a:prstGeom prst="rect">
+            <a:avLst/>
+          </a:prstGeom>
+        </p:spPr>
+        <p:txBody>
+          <a:bodyPr vert="horz" lIns="91440" tIns="45720" rIns="91440" bIns="45720" rtlCol="0"/>
+          <a:lstStyle/>
+          <a:p>
+            <a:pPr lvl="0"/>
+            <a:r>
+              <a:rPr lang="en-US" smtClean="0"/>
+              <a:t>Click to edit Master text styles</a:t>
+            </a:r>
+          </a:p>
+          <a:p>
+            <a:pPr lvl="1"/>
+            <a:r>
+              <a:rPr lang="en-US" smtClean="0"/>
+              <a:t>Second level</a:t>
+            </a:r>
+          </a:p>
+          <a:p>
+            <a:pPr lvl="2"/>
+            <a:r>
+              <a:rPr lang="en-US" smtClean="0"/>
+              <a:t>Third level</a:t>
+            </a:r>
+          </a:p>
+          <a:p>
+            <a:pPr lvl="3"/>
+            <a:r>
+              <a:rPr lang="en-US" smtClean="0"/>
+              <a:t>Fourth level</a:t>
+            </a:r>
+          </a:p>
+          <a:p>
+            <a:pPr lvl="4"/>
+            <a:r>
+              <a:rPr lang="en-US" smtClean="0"/>
+              <a:t>Fifth level</a:t>
+            </a:r>
+            <a:endParaRPr lang="en-US"/>
+          </a:p>
+        </p:txBody>
+      </p:sp>
+      <p:sp>
+        <p:nvSpPr>
+          <p:cNvPr id="6" name="Footer Placeholder 5"/>
+          <p:cNvSpPr>
+            <a:spLocks noGrp="1"/>
+          </p:cNvSpPr>
+          <p:nvPr>
+            <p:ph type="ftr" sz="quarter" idx="4"/>
+          </p:nvPr>
+        </p:nvSpPr>
+        <p:spPr>
+          <a:xfrm>
+            <a:off x="0" y="8685213"/>
+            <a:ext cx="2971800" cy="457200"/>
+          </a:xfrm>
+          <a:prstGeom prst="rect">
+            <a:avLst/>
+          </a:prstGeom>
+        </p:spPr>
+        <p:txBody>
+          <a:bodyPr vert="horz" lIns="91440" tIns="45720" rIns="91440" bIns="45720" rtlCol="0" anchor="b"/>
+          <a:lstStyle>
+            <a:lvl1pPr algn="l">
+              <a:defRPr sz="1200"/>
+            </a:lvl1pPr>
+          </a:lstStyle>
+          <a:p>
+            <a:endParaRPr lang="en-US"/>
+          </a:p>
+        </p:txBody>
+      </p:sp>
+      <p:sp>
+        <p:nvSpPr>
+          <p:cNvPr id="7" name="Slide Number Placeholder 6"/>
+          <p:cNvSpPr>
+            <a:spLocks noGrp="1"/>
+          </p:cNvSpPr>
+          <p:nvPr>
+            <p:ph type="sldNum" sz="quarter" idx="5"/>
+          </p:nvPr>
+        </p:nvSpPr>
+        <p:spPr>
+          <a:xfrm>
+            <a:off x="3884613" y="8685213"/>
+            <a:ext cx="2971800" cy="457200"/>
+          </a:xfrm>
+          <a:prstGeom prst="rect">
+            <a:avLst/>
+          </a:prstGeom>
+        </p:spPr>
+        <p:txBody>
+          <a:bodyPr vert="horz" lIns="91440" tIns="45720" rIns="91440" bIns="45720" rtlCol="0" anchor="b"/>
+          <a:lstStyle>
+            <a:lvl1pPr algn="r">
+              <a:defRPr sz="1200"/>
+            </a:lvl1pPr>
+          </a:lstStyle>
+          <a:p>
+            <a:fld id="{BB5E49A5-4136-284D-997B-48E1D791AD67}" type="slidenum">
+              <a:rPr lang="en-US" smtClean="0"/>
+              <a:t>‹#›</a:t>
+            </a:fld>
+            <a:endParaRPr lang="en-US"/>
+          </a:p>
+        </p:txBody>
+      </p:sp>
+    </p:spTree>
+    <p:extLst>
+      <p:ext uri="{BB962C8B-B14F-4D97-AF65-F5344CB8AC3E}">
+        <p14:creationId xmlns:p14="http://schemas.microsoft.com/office/powerpoint/2010/main" val="2623252185"/>
+      </p:ext>
+    </p:extLst>
+  </p:cSld>
+  <p:clrMap bg1="lt1" tx1="dk1" bg2="lt2" tx2="dk2" accent1="accent1" accent2="accent2" accent3="accent3" accent4="accent4" accent5="accent5" accent6="accent6" hlink="hlink" folHlink="folHlink"/>
+  <p:notesStyle>
+    <a:lvl1pPr marL="0" algn="l" defTabSz="457200" rtl="0" eaLnBrk="1" latinLnBrk="0" hangingPunct="1">
+      <a:defRPr sz="1200" kern="1200">
+        <a:solidFill>
+          <a:schemeClr val="tx1"/>
+        </a:solidFill>
+        <a:latin typeface="+mn-lt"/>
+        <a:ea typeface="+mn-ea"/>
+        <a:cs typeface="+mn-cs"/>
+      </a:defRPr>
+    </a:lvl1pPr>
+    <a:lvl2pPr marL="457200" algn="l" defTabSz="457200" rtl="0" eaLnBrk="1" latinLnBrk="0" hangingPunct="1">
+      <a:defRPr sz="1200" kern="1200">
+        <a:solidFill>
+          <a:schemeClr val="tx1"/>
+        </a:solidFill>
+        <a:latin typeface="+mn-lt"/>
+        <a:ea typeface="+mn-ea"/>
+        <a:cs typeface="+mn-cs"/>
+      </a:defRPr>
+    </a:lvl2pPr>
+    <a:lvl3pPr marL="914400" algn="l" defTabSz="457200" rtl="0" eaLnBrk="1" latinLnBrk="0" hangingPunct="1">
+      <a:defRPr sz="1200" kern="1200">
+        <a:solidFill>
+          <a:schemeClr val="tx1"/>
+        </a:solidFill>
+        <a:latin typeface="+mn-lt"/>
+        <a:ea typeface="+mn-ea"/>
+        <a:cs typeface="+mn-cs"/>
+      </a:defRPr>
+    </a:lvl3pPr>
+    <a:lvl4pPr marL="1371600" algn="l" defTabSz="457200" rtl="0" eaLnBrk="1" latinLnBrk="0" hangingPunct="1">
+      <a:defRPr sz="1200" kern="1200">
+        <a:solidFill>
+          <a:schemeClr val="tx1"/>
+        </a:solidFill>
+        <a:latin typeface="+mn-lt"/>
+        <a:ea typeface="+mn-ea"/>
+        <a:cs typeface="+mn-cs"/>
+      </a:defRPr>
+    </a:lvl4pPr>
+    <a:lvl5pPr marL="1828800" algn="l" defTabSz="457200" rtl="0" eaLnBrk="1" latinLnBrk="0" hangingPunct="1">
+      <a:defRPr sz="1200" kern="1200">
+        <a:solidFill>
+          <a:schemeClr val="tx1"/>
+        </a:solidFill>
+        <a:latin typeface="+mn-lt"/>
+        <a:ea typeface="+mn-ea"/>
+        <a:cs typeface="+mn-cs"/>
+      </a:defRPr>
+    </a:lvl5pPr>
+    <a:lvl6pPr marL="2286000" algn="l" defTabSz="457200" rtl="0" eaLnBrk="1" latinLnBrk="0" hangingPunct="1">
+      <a:defRPr sz="1200" kern="1200">
+        <a:solidFill>
+          <a:schemeClr val="tx1"/>
+        </a:solidFill>
+        <a:latin typeface="+mn-lt"/>
+        <a:ea typeface="+mn-ea"/>
+        <a:cs typeface="+mn-cs"/>
+      </a:defRPr>
+    </a:lvl6pPr>
+    <a:lvl7pPr marL="2743200" algn="l" defTabSz="457200" rtl="0" eaLnBrk="1" latinLnBrk="0" hangingPunct="1">
+      <a:defRPr sz="1200" kern="1200">
+        <a:solidFill>
+          <a:schemeClr val="tx1"/>
+        </a:solidFill>
+        <a:latin typeface="+mn-lt"/>
+        <a:ea typeface="+mn-ea"/>
+        <a:cs typeface="+mn-cs"/>
+      </a:defRPr>
+    </a:lvl7pPr>
+    <a:lvl8pPr marL="3200400" algn="l" defTabSz="457200" rtl="0" eaLnBrk="1" latinLnBrk="0" hangingPunct="1">
+      <a:defRPr sz="1200" kern="1200">
+        <a:solidFill>
+          <a:schemeClr val="tx1"/>
+        </a:solidFill>
+        <a:latin typeface="+mn-lt"/>
+        <a:ea typeface="+mn-ea"/>
+        <a:cs typeface="+mn-cs"/>
+      </a:defRPr>
+    </a:lvl8pPr>
+    <a:lvl9pPr marL="3657600" algn="l" defTabSz="457200" rtl="0" eaLnBrk="1" latinLnBrk="0" hangingPunct="1">
+      <a:defRPr sz="1200" kern="1200">
+        <a:solidFill>
+          <a:schemeClr val="tx1"/>
+        </a:solidFill>
+        <a:latin typeface="+mn-lt"/>
+        <a:ea typeface="+mn-ea"/>
+        <a:cs typeface="+mn-cs"/>
+      </a:defRPr>
+    </a:lvl9pPr>
+  </p:notesStyle>
+</p:notesMaster>
+</file>
+
+<file path=ppt/notesSlides/notesSlide1.xml><?xml version="1.0" encoding="utf-8"?>
+<p:notes xmlns:a="http://schemas.openxmlformats.org/drawingml/2006/main" xmlns:p="http://schemas.openxmlformats.org/presentationml/2006/main" xmlns:r="http://schemas.openxmlformats.org/officeDocument/2006/relationships">
+  <p:cSld>
+    <p:spTree>
+      <p:nvGrpSpPr>
+        <p:cNvPr id="1" name=""/>
+        <p:cNvGrpSpPr/>
+        <p:nvPr/>
+      </p:nvGrpSpPr>
+      <p:grpSpPr>
+        <a:xfrm>
+          <a:off x="0" y="0"/>
+          <a:ext cx="0" cy="0"/>
+          <a:chOff x="0" y="0"/>
+          <a:chExt cx="0" cy="0"/>
+        </a:xfrm>
+      </p:grpSpPr>
+      <p:sp>
+        <p:nvSpPr>
+          <p:cNvPr id="2" name="Slide Image Placeholder 1"/>
+          <p:cNvSpPr>
+            <a:spLocks noGrp="1"/>
+          </p:cNvSpPr>
+          <p:nvPr>
+            <p:ph type="sldImg" idx="2"/>
+          </p:nvPr>
+        </p:nvSpPr>
+        <p:spPr/>
+      </p:sp>
+      <p:sp>
+        <p:nvSpPr>
+          <p:cNvPr id="3" name="Notes Placeholder 2"/>
+          <p:cNvSpPr>
+            <a:spLocks noGrp="1"/>
+          </p:cNvSpPr>
+          <p:nvPr>
+            <p:ph type="body" idx="3" sz="quarter"/>
+          </p:nvPr>
+        </p:nvSpPr>
+        <p:spPr/>
+        <p:txBody>
+          <a:bodyPr/>
+          <a:lstStyle/>
+          <a:p>
+            <a:r>
+              <a:t>Conviene empezar por la economia, porque sin ella el tema suena a contabilidad.</a:t>
+            </a:r>
+          </a:p>
+          <a:p/>
+          <a:p>
+            <a:r>
+              <a:t>Cuando cada recurso tiene precio unitario, casi cualquier decision de diseno se convierte en una cifra mensual y el arquitecto pasa a ser corresponsable del gasto.</a:t>
+            </a:r>
+          </a:p>
+          <a:p/>
+          <a:p>
+            <a:r>
+              <a:t>Esa es la razon por la que este tema vive en un curso de arquitectura y no en uno de administracion.</a:t>
+            </a:r>
+          </a:p>
+        </p:txBody>
+      </p:sp>
+      <p:sp>
+        <p:nvSpPr>
+          <p:cNvPr id="4" name="Slide Number Placeholder 3"/>
+          <p:cNvSpPr>
+            <a:spLocks noGrp="1"/>
+          </p:cNvSpPr>
+          <p:nvPr>
+            <p:ph type="sldNum" idx="5" sz="quarter"/>
+          </p:nvPr>
+        </p:nvSpPr>
+        <p:spPr/>
+      </p:sp>
+    </p:spTree>
+  </p:cSld>
+  <p:clrMapOvr>
+    <a:masterClrMapping/>
+  </p:clrMapOvr>
+</p:notes>
+</file>
+
+<file path=ppt/notesSlides/notesSlide2.xml><?xml version="1.0" encoding="utf-8"?>
+<p:notes xmlns:a="http://schemas.openxmlformats.org/drawingml/2006/main" xmlns:p="http://schemas.openxmlformats.org/presentationml/2006/main" xmlns:r="http://schemas.openxmlformats.org/officeDocument/2006/relationships">
+  <p:cSld>
+    <p:spTree>
+      <p:nvGrpSpPr>
+        <p:cNvPr id="1" name=""/>
+        <p:cNvGrpSpPr/>
+        <p:nvPr/>
+      </p:nvGrpSpPr>
+      <p:grpSpPr>
+        <a:xfrm>
+          <a:off x="0" y="0"/>
+          <a:ext cx="0" cy="0"/>
+          <a:chOff x="0" y="0"/>
+          <a:chExt cx="0" cy="0"/>
+        </a:xfrm>
+      </p:grpSpPr>
+      <p:sp>
+        <p:nvSpPr>
+          <p:cNvPr id="2" name="Slide Image Placeholder 1"/>
+          <p:cNvSpPr>
+            <a:spLocks noGrp="1"/>
+          </p:cNvSpPr>
+          <p:nvPr>
+            <p:ph type="sldImg" idx="2"/>
+          </p:nvPr>
+        </p:nvSpPr>
+        <p:spPr/>
+      </p:sp>
+      <p:sp>
+        <p:nvSpPr>
+          <p:cNvPr id="3" name="Notes Placeholder 2"/>
+          <p:cNvSpPr>
+            <a:spLocks noGrp="1"/>
+          </p:cNvSpPr>
+          <p:nvPr>
+            <p:ph type="body" idx="3" sz="quarter"/>
+          </p:nvPr>
+        </p:nvSpPr>
+        <p:spPr/>
+        <p:txBody>
+          <a:bodyPr/>
+          <a:lstStyle/>
+          <a:p>
+            <a:r>
+              <a:t>Eso no impide el analisis de costo, solo cambia la escala de medida.</a:t>
+            </a:r>
+          </a:p>
+        </p:txBody>
+      </p:sp>
+      <p:sp>
+        <p:nvSpPr>
+          <p:cNvPr id="4" name="Slide Number Placeholder 3"/>
+          <p:cNvSpPr>
+            <a:spLocks noGrp="1"/>
+          </p:cNvSpPr>
+          <p:nvPr>
+            <p:ph type="sldNum" idx="5" sz="quarter"/>
+          </p:nvPr>
+        </p:nvSpPr>
+        <p:spPr/>
+      </p:sp>
+    </p:spTree>
+  </p:cSld>
+  <p:clrMapOvr>
+    <a:masterClrMapping/>
+  </p:clrMapOvr>
+</p:notes>
+</file>
+
+<file path=ppt/notesSlides/notesSlide3.xml><?xml version="1.0" encoding="utf-8"?>
+<p:notes xmlns:a="http://schemas.openxmlformats.org/drawingml/2006/main" xmlns:p="http://schemas.openxmlformats.org/presentationml/2006/main" xmlns:r="http://schemas.openxmlformats.org/officeDocument/2006/relationships">
+  <p:cSld>
+    <p:spTree>
+      <p:nvGrpSpPr>
+        <p:cNvPr id="1" name=""/>
+        <p:cNvGrpSpPr/>
+        <p:nvPr/>
+      </p:nvGrpSpPr>
+      <p:grpSpPr>
+        <a:xfrm>
+          <a:off x="0" y="0"/>
+          <a:ext cx="0" cy="0"/>
+          <a:chOff x="0" y="0"/>
+          <a:chExt cx="0" cy="0"/>
+        </a:xfrm>
+      </p:grpSpPr>
+      <p:sp>
+        <p:nvSpPr>
+          <p:cNvPr id="2" name="Slide Image Placeholder 1"/>
+          <p:cNvSpPr>
+            <a:spLocks noGrp="1"/>
+          </p:cNvSpPr>
+          <p:nvPr>
+            <p:ph type="sldImg" idx="2"/>
+          </p:nvPr>
+        </p:nvSpPr>
+        <p:spPr/>
+      </p:sp>
+      <p:sp>
+        <p:nvSpPr>
+          <p:cNvPr id="3" name="Notes Placeholder 2"/>
+          <p:cNvSpPr>
+            <a:spLocks noGrp="1"/>
+          </p:cNvSpPr>
+          <p:nvPr>
+            <p:ph type="body" idx="3" sz="quarter"/>
+          </p:nvPr>
+        </p:nvSpPr>
+        <p:spPr/>
+        <p:txBody>
+          <a:bodyPr/>
+          <a:lstStyle/>
+          <a:p>
+            <a:r>
+              <a:t>El docente debe poder citar ordenes de magnitud, y conviene decir en voz alta que son convenciones aproximadas de precios de lista y no reglas duras: las cifras cambian por proveedor, region y ano, pero las proporciones se mantienen estables.</a:t>
+            </a:r>
+          </a:p>
+          <a:p/>
+          <a:p>
+            <a:r>
+              <a:t>Una base de datos gestionada cuesta entre dos y tres veces la maquina desnuda equivalente, porque incluye respaldos, parches y conmutacion por falla.</a:t>
+            </a:r>
+          </a:p>
+          <a:p/>
+          <a:p>
+            <a:r>
+              <a:t>Una funcion serverless suele traer free tier de alrededor de un millon de invocaciones mensuales, asi que un componente poco usado cuesta cero de verdad.</a:t>
+            </a:r>
+          </a:p>
+        </p:txBody>
+      </p:sp>
+      <p:sp>
+        <p:nvSpPr>
+          <p:cNvPr id="4" name="Slide Number Placeholder 3"/>
+          <p:cNvSpPr>
+            <a:spLocks noGrp="1"/>
+          </p:cNvSpPr>
+          <p:nvPr>
+            <p:ph type="sldNum" idx="5" sz="quarter"/>
+          </p:nvPr>
+        </p:nvSpPr>
+        <p:spPr/>
+      </p:sp>
+    </p:spTree>
+  </p:cSld>
+  <p:clrMapOvr>
+    <a:masterClrMapping/>
+  </p:clrMapOvr>
+</p:notes>
+</file>
+
+<file path=ppt/notesSlides/notesSlide4.xml><?xml version="1.0" encoding="utf-8"?>
+<p:notes xmlns:a="http://schemas.openxmlformats.org/drawingml/2006/main" xmlns:p="http://schemas.openxmlformats.org/presentationml/2006/main" xmlns:r="http://schemas.openxmlformats.org/officeDocument/2006/relationships">
+  <p:cSld>
+    <p:spTree>
+      <p:nvGrpSpPr>
+        <p:cNvPr id="1" name=""/>
+        <p:cNvGrpSpPr/>
+        <p:nvPr/>
+      </p:nvGrpSpPr>
+      <p:grpSpPr>
+        <a:xfrm>
+          <a:off x="0" y="0"/>
+          <a:ext cx="0" cy="0"/>
+          <a:chOff x="0" y="0"/>
+          <a:chExt cx="0" cy="0"/>
+        </a:xfrm>
+      </p:grpSpPr>
+      <p:sp>
+        <p:nvSpPr>
+          <p:cNvPr id="2" name="Slide Image Placeholder 1"/>
+          <p:cNvSpPr>
+            <a:spLocks noGrp="1"/>
+          </p:cNvSpPr>
+          <p:nvPr>
+            <p:ph type="sldImg" idx="2"/>
+          </p:nvPr>
+        </p:nvSpPr>
+        <p:spPr/>
+      </p:sp>
+      <p:sp>
+        <p:nvSpPr>
+          <p:cNvPr id="3" name="Notes Placeholder 2"/>
+          <p:cNvSpPr>
+            <a:spLocks noGrp="1"/>
+          </p:cNvSpPr>
+          <p:nvPr>
+            <p:ph type="body" idx="3" sz="quarter"/>
+          </p:nvPr>
+        </p:nvSpPr>
+        <p:spPr/>
+        <p:txBody>
+          <a:bodyPr/>
+          <a:lstStyle/>
+          <a:p>
+            <a:r>
+              <a:t>El primer ejemplo anclado en CloudLite es la tabla del entregable, y el docente deberia recorrerla componente por componente.</a:t>
+            </a:r>
+          </a:p>
+          <a:p/>
+          <a:p>
+            <a:r>
+              <a:t>El contenedor de la API queda en Medio, con driver instancias por horas encendidas.</a:t>
+            </a:r>
+          </a:p>
+        </p:txBody>
+      </p:sp>
+      <p:sp>
+        <p:nvSpPr>
+          <p:cNvPr id="4" name="Slide Number Placeholder 3"/>
+          <p:cNvSpPr>
+            <a:spLocks noGrp="1"/>
+          </p:cNvSpPr>
+          <p:nvPr>
+            <p:ph type="sldNum" idx="5" sz="quarter"/>
+          </p:nvPr>
+        </p:nvSpPr>
+        <p:spPr/>
+      </p:sp>
+    </p:spTree>
+  </p:cSld>
+  <p:clrMapOvr>
+    <a:masterClrMapping/>
+  </p:clrMapOvr>
+</p:notes>
+</file>
+
+<file path=ppt/notesSlides/notesSlide5.xml><?xml version="1.0" encoding="utf-8"?>
+<p:notes xmlns:a="http://schemas.openxmlformats.org/drawingml/2006/main" xmlns:p="http://schemas.openxmlformats.org/presentationml/2006/main" xmlns:r="http://schemas.openxmlformats.org/officeDocument/2006/relationships">
+  <p:cSld>
+    <p:spTree>
+      <p:nvGrpSpPr>
+        <p:cNvPr id="1" name=""/>
+        <p:cNvGrpSpPr/>
+        <p:nvPr/>
+      </p:nvGrpSpPr>
+      <p:grpSpPr>
+        <a:xfrm>
+          <a:off x="0" y="0"/>
+          <a:ext cx="0" cy="0"/>
+          <a:chOff x="0" y="0"/>
+          <a:chExt cx="0" cy="0"/>
+        </a:xfrm>
+      </p:grpSpPr>
+      <p:sp>
+        <p:nvSpPr>
+          <p:cNvPr id="2" name="Slide Image Placeholder 1"/>
+          <p:cNvSpPr>
+            <a:spLocks noGrp="1"/>
+          </p:cNvSpPr>
+          <p:nvPr>
+            <p:ph type="sldImg" idx="2"/>
+          </p:nvPr>
+        </p:nvSpPr>
+        <p:spPr/>
+      </p:sp>
+      <p:sp>
+        <p:nvSpPr>
+          <p:cNvPr id="3" name="Notes Placeholder 2"/>
+          <p:cNvSpPr>
+            <a:spLocks noGrp="1"/>
+          </p:cNvSpPr>
+          <p:nvPr>
+            <p:ph type="body" idx="3" sz="quarter"/>
+          </p:nvPr>
+        </p:nvSpPr>
+        <p:spPr/>
+        <p:txBody>
+          <a:bodyPr/>
+          <a:lstStyle/>
+          <a:p>
+            <a:r>
+              <a:t>El segundo ejemplo muestra por que el driver importa mas que el nivel.</a:t>
+            </a:r>
+          </a:p>
+          <a:p/>
+          <a:p>
+            <a:r>
+              <a:t>Esto tambien desarma la intuicion mas comun del estudiante, que si nadie usa el sistema el sistema no cuesta.</a:t>
+            </a:r>
+          </a:p>
+        </p:txBody>
+      </p:sp>
+      <p:sp>
+        <p:nvSpPr>
+          <p:cNvPr id="4" name="Slide Number Placeholder 3"/>
+          <p:cNvSpPr>
+            <a:spLocks noGrp="1"/>
+          </p:cNvSpPr>
+          <p:nvPr>
+            <p:ph type="sldNum" idx="5" sz="quarter"/>
+          </p:nvPr>
+        </p:nvSpPr>
+        <p:spPr/>
+      </p:sp>
+    </p:spTree>
+  </p:cSld>
+  <p:clrMapOvr>
+    <a:masterClrMapping/>
+  </p:clrMapOvr>
+</p:notes>
+</file>
+
+<file path=ppt/notesSlides/notesSlide6.xml><?xml version="1.0" encoding="utf-8"?>
+<p:notes xmlns:a="http://schemas.openxmlformats.org/drawingml/2006/main" xmlns:p="http://schemas.openxmlformats.org/presentationml/2006/main" xmlns:r="http://schemas.openxmlformats.org/officeDocument/2006/relationships">
+  <p:cSld>
+    <p:spTree>
+      <p:nvGrpSpPr>
+        <p:cNvPr id="1" name=""/>
+        <p:cNvGrpSpPr/>
+        <p:nvPr/>
+      </p:nvGrpSpPr>
+      <p:grpSpPr>
+        <a:xfrm>
+          <a:off x="0" y="0"/>
+          <a:ext cx="0" cy="0"/>
+          <a:chOff x="0" y="0"/>
+          <a:chExt cx="0" cy="0"/>
+        </a:xfrm>
+      </p:grpSpPr>
+      <p:sp>
+        <p:nvSpPr>
+          <p:cNvPr id="2" name="Slide Image Placeholder 1"/>
+          <p:cNvSpPr>
+            <a:spLocks noGrp="1"/>
+          </p:cNvSpPr>
+          <p:nvPr>
+            <p:ph type="sldImg" idx="2"/>
+          </p:nvPr>
+        </p:nvSpPr>
+        <p:spPr/>
+      </p:sp>
+      <p:sp>
+        <p:nvSpPr>
+          <p:cNvPr id="3" name="Notes Placeholder 2"/>
+          <p:cNvSpPr>
+            <a:spLocks noGrp="1"/>
+          </p:cNvSpPr>
+          <p:nvPr>
+            <p:ph type="body" idx="3" sz="quarter"/>
+          </p:nvPr>
+        </p:nvSpPr>
+        <p:spPr/>
+        <p:txBody>
+          <a:bodyPr/>
+          <a:lstStyle/>
+          <a:p>
+            <a:r>
+              <a:t>De ahi sale el segundo bloque del entregable: tres acciones de right-sizing.</a:t>
+            </a:r>
+          </a:p>
+        </p:txBody>
+      </p:sp>
+      <p:sp>
+        <p:nvSpPr>
+          <p:cNvPr id="4" name="Slide Number Placeholder 3"/>
+          <p:cNvSpPr>
+            <a:spLocks noGrp="1"/>
+          </p:cNvSpPr>
+          <p:nvPr>
+            <p:ph type="sldNum" idx="5" sz="quarter"/>
+          </p:nvPr>
+        </p:nvSpPr>
+        <p:spPr/>
+      </p:sp>
+    </p:spTree>
+  </p:cSld>
+  <p:clrMapOvr>
+    <a:masterClrMapping/>
+  </p:clrMapOvr>
+</p:notes>
+</file>
+
+<file path=ppt/notesSlides/notesSlide7.xml><?xml version="1.0" encoding="utf-8"?>
+<p:notes xmlns:a="http://schemas.openxmlformats.org/drawingml/2006/main" xmlns:p="http://schemas.openxmlformats.org/presentationml/2006/main" xmlns:r="http://schemas.openxmlformats.org/officeDocument/2006/relationships">
+  <p:cSld>
+    <p:spTree>
+      <p:nvGrpSpPr>
+        <p:cNvPr id="1" name=""/>
+        <p:cNvGrpSpPr/>
+        <p:nvPr/>
+      </p:nvGrpSpPr>
+      <p:grpSpPr>
+        <a:xfrm>
+          <a:off x="0" y="0"/>
+          <a:ext cx="0" cy="0"/>
+          <a:chOff x="0" y="0"/>
+          <a:chExt cx="0" cy="0"/>
+        </a:xfrm>
+      </p:grpSpPr>
+      <p:sp>
+        <p:nvSpPr>
+          <p:cNvPr id="2" name="Slide Image Placeholder 1"/>
+          <p:cNvSpPr>
+            <a:spLocks noGrp="1"/>
+          </p:cNvSpPr>
+          <p:nvPr>
+            <p:ph type="sldImg" idx="2"/>
+          </p:nvPr>
+        </p:nvSpPr>
+        <p:spPr/>
+      </p:sp>
+      <p:sp>
+        <p:nvSpPr>
+          <p:cNvPr id="3" name="Notes Placeholder 2"/>
+          <p:cNvSpPr>
+            <a:spLocks noGrp="1"/>
+          </p:cNvSpPr>
+          <p:nvPr>
+            <p:ph type="body" idx="3" sz="quarter"/>
+          </p:nvPr>
+        </p:nvSpPr>
+        <p:spPr/>
+        <p:txBody>
+          <a:bodyPr/>
+          <a:lstStyle/>
+          <a:p>
+            <a:r>
+              <a:t>Por eso las mismas tres acciones sirven a la vez para la factura y para la huella.</a:t>
+            </a:r>
+          </a:p>
+        </p:txBody>
+      </p:sp>
+      <p:sp>
+        <p:nvSpPr>
+          <p:cNvPr id="4" name="Slide Number Placeholder 3"/>
+          <p:cNvSpPr>
+            <a:spLocks noGrp="1"/>
+          </p:cNvSpPr>
+          <p:nvPr>
+            <p:ph type="sldNum" idx="5" sz="quarter"/>
+          </p:nvPr>
+        </p:nvSpPr>
+        <p:spPr/>
+      </p:sp>
+    </p:spTree>
+  </p:cSld>
+  <p:clrMapOvr>
+    <a:masterClrMapping/>
+  </p:clrMapOvr>
+</p:notes>
+</file>
+
+<file path=ppt/notesSlides/notesSlide8.xml><?xml version="1.0" encoding="utf-8"?>
+<p:notes xmlns:a="http://schemas.openxmlformats.org/drawingml/2006/main" xmlns:p="http://schemas.openxmlformats.org/presentationml/2006/main" xmlns:r="http://schemas.openxmlformats.org/officeDocument/2006/relationships">
+  <p:cSld>
+    <p:spTree>
+      <p:nvGrpSpPr>
+        <p:cNvPr id="1" name=""/>
+        <p:cNvGrpSpPr/>
+        <p:nvPr/>
+      </p:nvGrpSpPr>
+      <p:grpSpPr>
+        <a:xfrm>
+          <a:off x="0" y="0"/>
+          <a:ext cx="0" cy="0"/>
+          <a:chOff x="0" y="0"/>
+          <a:chExt cx="0" cy="0"/>
+        </a:xfrm>
+      </p:grpSpPr>
+      <p:sp>
+        <p:nvSpPr>
+          <p:cNvPr id="2" name="Slide Image Placeholder 1"/>
+          <p:cNvSpPr>
+            <a:spLocks noGrp="1"/>
+          </p:cNvSpPr>
+          <p:nvPr>
+            <p:ph type="sldImg" idx="2"/>
+          </p:nvPr>
+        </p:nvSpPr>
+        <p:spPr/>
+      </p:sp>
+      <p:sp>
+        <p:nvSpPr>
+          <p:cNvPr id="3" name="Notes Placeholder 2"/>
+          <p:cNvSpPr>
+            <a:spLocks noGrp="1"/>
+          </p:cNvSpPr>
+          <p:nvPr>
+            <p:ph type="body" idx="3" sz="quarter"/>
+          </p:nvPr>
+        </p:nvSpPr>
+        <p:spPr/>
+        <p:txBody>
+          <a:bodyPr/>
+          <a:lstStyle/>
+          <a:p>
+            <a:r>
+              <a:t>Tres preguntas aparecen siempre.</a:t>
+            </a:r>
+          </a:p>
+          <a:p/>
+          <a:p>
+            <a:r>
+              <a:t>Conviene advertir que en la Clase 11 la auditoria exigira que los componentes de esta tabla se llamen igual que los contenedores del C4 de la Clase 4 y las piezas del despliegue de la Clase 7, y que en la Clase 13 el limite maximo del autoescalado sera el techo de costo que se decide hoy.</a:t>
+            </a:r>
+          </a:p>
+          <a:p/>
+          <a:p>
+            <a:r>
+              <a:t>Con eso la clase se vuelve una caceria de calculadoras de precios, el estudiante copia numeros que no entiende y las acciones de right-sizing quedan cosmeticas.</a:t>
+            </a:r>
+          </a:p>
+        </p:txBody>
+      </p:sp>
+      <p:sp>
+        <p:nvSpPr>
+          <p:cNvPr id="4" name="Slide Number Placeholder 3"/>
+          <p:cNvSpPr>
+            <a:spLocks noGrp="1"/>
+          </p:cNvSpPr>
+          <p:nvPr>
+            <p:ph type="sldNum" idx="5" sz="quarter"/>
+          </p:nvPr>
+        </p:nvSpPr>
+        <p:spPr/>
+      </p:sp>
+    </p:spTree>
+  </p:cSld>
+  <p:clrMapOvr>
+    <a:masterClrMapping/>
+  </p:clrMapOvr>
+</p:notes>
 </file>
 
 <file path=ppt/slideLayouts/slideLayout1.xml><?xml version="1.0" encoding="utf-8"?>
@@ -3342,13 +4296,22 @@
               </a:spcAft>
             </a:pPr>
             <a:r>
+              <a:rPr sz="1500" b="0" i="0">
+                <a:solidFill>
+                  <a:srgbClr val="333333"/>
+                </a:solidFill>
+                <a:latin typeface="Calibri"/>
+              </a:rPr>
+              <a:t>Bloque </a:t>
+            </a:r>
+            <a:r>
               <a:rPr sz="1500" b="1" i="0">
                 <a:solidFill>
                   <a:srgbClr val="333333"/>
                 </a:solidFill>
                 <a:latin typeface="Calibri"/>
               </a:rPr>
-              <a:t>Hoy avanzamos el PI en:</a:t>
+              <a:t>120 min</a:t>
             </a:r>
             <a:r>
               <a:rPr sz="1500" b="0" i="0">
@@ -3357,7 +4320,25 @@
                 </a:solidFill>
                 <a:latin typeface="Calibri"/>
               </a:rPr>
-              <a:t> Estimación cualitativa de costos + notas de sostenibilidad</a:t>
+              <a:t> · sesión </a:t>
+            </a:r>
+            <a:r>
+              <a:rPr sz="1500" b="1" i="0">
+                <a:solidFill>
+                  <a:srgbClr val="333333"/>
+                </a:solidFill>
+                <a:latin typeface="Calibri"/>
+              </a:rPr>
+              <a:t>virtual síncrona</a:t>
+            </a:r>
+            <a:r>
+              <a:rPr sz="1500" b="0" i="0">
+                <a:solidFill>
+                  <a:srgbClr val="333333"/>
+                </a:solidFill>
+                <a:latin typeface="Calibri"/>
+              </a:rPr>
+              <a:t> por Google Meet.</a:t>
             </a:r>
           </a:p>
           <a:p>
@@ -3373,41 +4354,7 @@
                 </a:solidFill>
                 <a:latin typeface="Calibri"/>
               </a:rPr>
-              <a:t>Bloque </a:t>
-            </a:r>
-            <a:r>
-              <a:rPr sz="1500" b="1" i="0">
-                <a:solidFill>
-                  <a:srgbClr val="333333"/>
-                </a:solidFill>
-                <a:latin typeface="Calibri"/>
-              </a:rPr>
-              <a:t>120 min</a:t>
-            </a:r>
-            <a:r>
-              <a:rPr sz="1500" b="0" i="0">
-                <a:solidFill>
-                  <a:srgbClr val="333333"/>
-                </a:solidFill>
-                <a:latin typeface="Calibri"/>
-              </a:rPr>
-              <a:t> · Teoría breve · Taller PI · cierre.</a:t>
-            </a:r>
-          </a:p>
-          <a:p>
-            <a:pPr>
-              <a:spcAft>
-                <a:spcPts val="800"/>
-              </a:spcAft>
-            </a:pPr>
-            <a:r>
-              <a:rPr sz="1500" b="0" i="0">
-                <a:solidFill>
-                  <a:srgbClr val="333333"/>
-                </a:solidFill>
-                <a:latin typeface="Calibri"/>
-              </a:rPr>
-              <a:t>Herramientas gratis + navegador · sin AWS/GCP/Oracle Cloud.</a:t>
+              <a:t>Conceptos del tema, ejemplos resueltos sobre CloudLite y cierre conceptual.</a:t>
             </a:r>
           </a:p>
         </p:txBody>
@@ -6277,7 +7224,7 @@
                 </a:solidFill>
                 <a:latin typeface="Calibri"/>
               </a:rPr>
-              <a:t> Encuadre: hoy avanzamos el PI en… + entregable concreto.</a:t>
+              <a:t> Encuadre del tema y objetivos de la clase.</a:t>
             </a:r>
           </a:p>
           <a:p>
@@ -6293,7 +7240,7 @@
                 </a:solidFill>
                 <a:latin typeface="Calibri"/>
               </a:rPr>
-              <a:t>10–40</a:t>
+              <a:t>10–70</a:t>
             </a:r>
             <a:r>
               <a:rPr sz="2000" b="0" i="0">
@@ -6302,7 +7249,7 @@
                 </a:solidFill>
                 <a:latin typeface="Calibri"/>
               </a:rPr>
-              <a:t> Teoría Core breve (solo lo necesario para el taller PI).</a:t>
+              <a:t> Conceptos del tema, uno por lámina, con ejemplos sobre CloudLite.</a:t>
             </a:r>
           </a:p>
           <a:p>
@@ -6327,7 +7274,7 @@
                 </a:solidFill>
                 <a:latin typeface="Calibri"/>
               </a:rPr>
-              <a:t>40–100</a:t>
+              <a:t>70–100</a:t>
             </a:r>
             <a:r>
               <a:rPr sz="2000" b="0" i="0">
@@ -6336,7 +7283,7 @@
                 </a:solidFill>
                 <a:latin typeface="Calibri"/>
               </a:rPr>
-              <a:t> Trabajo guiado del PI (demo en vivo + avance individual).</a:t>
+              <a:t> Ejemplos resueltos y demo del docente sobre el tema.</a:t>
             </a:r>
           </a:p>
           <a:p>
@@ -6361,7 +7308,7 @@
                 </a:solidFill>
                 <a:latin typeface="Calibri"/>
               </a:rPr>
-              <a:t> Revisión de evidencias del PI.</a:t>
+              <a:t> Práctica (opcional, guía en la carpeta de la clase).</a:t>
             </a:r>
           </a:p>
           <a:p>
@@ -6386,7 +7333,7 @@
                 </a:solidFill>
                 <a:latin typeface="Calibri"/>
               </a:rPr>
-              <a:t> Cierre: criterio de éxito + plazo en la fecha que indique el docente.</a:t>
+              <a:t> Preguntas y cierre conceptual.</a:t>
             </a:r>
           </a:p>
         </p:txBody>
@@ -6713,13 +7660,13 @@
         <p:spPr>
           <a:xfrm>
             <a:off x="0" y="0"/>
-            <a:ext cx="12191695" cy="1170432"/>
+            <a:ext cx="12191695" cy="164592"/>
           </a:xfrm>
           <a:prstGeom prst="rect">
             <a:avLst/>
           </a:prstGeom>
           <a:solidFill>
-            <a:srgbClr val="095292"/>
+            <a:srgbClr val="269CCB"/>
           </a:solidFill>
           <a:ln>
             <a:noFill/>
@@ -6747,251 +7694,9 @@
           </a:p>
         </p:txBody>
       </p:sp>
-      <p:sp>
-        <p:nvSpPr>
-          <p:cNvPr id="3" name="Rectangle 2"/>
-          <p:cNvSpPr/>
-          <p:nvPr/>
-        </p:nvSpPr>
-        <p:spPr>
-          <a:xfrm>
-            <a:off x="0" y="1170432"/>
-            <a:ext cx="12191695" cy="41148"/>
-          </a:xfrm>
-          <a:prstGeom prst="rect">
-            <a:avLst/>
-          </a:prstGeom>
-          <a:solidFill>
-            <a:srgbClr val="FFD000"/>
-          </a:solidFill>
-          <a:ln>
-            <a:noFill/>
-          </a:ln>
-        </p:spPr>
-        <p:style>
-          <a:lnRef idx="1">
-            <a:schemeClr val="accent1"/>
-          </a:lnRef>
-          <a:fillRef idx="3">
-            <a:schemeClr val="accent1"/>
-          </a:fillRef>
-          <a:effectRef idx="2">
-            <a:schemeClr val="accent1"/>
-          </a:effectRef>
-          <a:fontRef idx="minor">
-            <a:schemeClr val="lt1"/>
-          </a:fontRef>
-        </p:style>
-        <p:txBody>
-          <a:bodyPr rtlCol="0" anchor="ctr"/>
-          <a:lstStyle/>
-          <a:p>
-            <a:pPr algn="ctr"/>
-          </a:p>
-        </p:txBody>
-      </p:sp>
-      <p:sp>
-        <p:nvSpPr>
-          <p:cNvPr id="4" name="TextBox 3"/>
-          <p:cNvSpPr txBox="1"/>
-          <p:nvPr/>
-        </p:nvSpPr>
-        <p:spPr>
-          <a:xfrm>
-            <a:off x="457200" y="164592"/>
-            <a:ext cx="11277295" cy="384048"/>
-          </a:xfrm>
-          <a:prstGeom prst="rect">
-            <a:avLst/>
-          </a:prstGeom>
-          <a:noFill/>
-        </p:spPr>
-        <p:txBody>
-          <a:bodyPr wrap="square">
-            <a:spAutoFit/>
-          </a:bodyPr>
-          <a:lstStyle/>
-          <a:p>
-            <a:r>
-              <a:rPr sz="2600" b="1" i="0">
-                <a:solidFill>
-                  <a:srgbClr val="FFFFFF"/>
-                </a:solidFill>
-                <a:latin typeface="Calibri"/>
-              </a:rPr>
-              <a:t>Herramientas de hoy</a:t>
-            </a:r>
-          </a:p>
-        </p:txBody>
-      </p:sp>
-      <p:sp>
-        <p:nvSpPr>
-          <p:cNvPr id="5" name="TextBox 4"/>
-          <p:cNvSpPr txBox="1"/>
-          <p:nvPr/>
-        </p:nvSpPr>
-        <p:spPr>
-          <a:xfrm>
-            <a:off x="457200" y="566928"/>
-            <a:ext cx="11277295" cy="411480"/>
-          </a:xfrm>
-          <a:prstGeom prst="rect">
-            <a:avLst/>
-          </a:prstGeom>
-          <a:noFill/>
-        </p:spPr>
-        <p:txBody>
-          <a:bodyPr wrap="square">
-            <a:spAutoFit/>
-          </a:bodyPr>
-          <a:lstStyle/>
-          <a:p>
-            <a:r>
-              <a:rPr sz="1400" b="0" i="0">
-                <a:solidFill>
-                  <a:srgbClr val="B8D8EE"/>
-                </a:solidFill>
-                <a:latin typeface="Calibri"/>
-              </a:rPr>
-              <a:t>Gratis · navegador o free tier · sin cuenta de pago</a:t>
-            </a:r>
-          </a:p>
-        </p:txBody>
-      </p:sp>
-      <p:sp>
-        <p:nvSpPr>
-          <p:cNvPr id="6" name="Rounded Rectangle 5"/>
-          <p:cNvSpPr/>
-          <p:nvPr/>
-        </p:nvSpPr>
-        <p:spPr>
-          <a:xfrm>
-            <a:off x="457200" y="1591056"/>
-            <a:ext cx="5538063" cy="2331720"/>
-          </a:xfrm>
-          <a:prstGeom prst="roundRect">
-            <a:avLst>
-              <a:gd name="adj" fmla="val 12000"/>
-            </a:avLst>
-          </a:prstGeom>
-          <a:solidFill>
-            <a:srgbClr val="F2F2F2"/>
-          </a:solidFill>
-          <a:ln>
-            <a:noFill/>
-          </a:ln>
-        </p:spPr>
-        <p:style>
-          <a:lnRef idx="1">
-            <a:schemeClr val="accent1"/>
-          </a:lnRef>
-          <a:fillRef idx="3">
-            <a:schemeClr val="accent1"/>
-          </a:fillRef>
-          <a:effectRef idx="2">
-            <a:schemeClr val="accent1"/>
-          </a:effectRef>
-          <a:fontRef idx="minor">
-            <a:schemeClr val="lt1"/>
-          </a:fontRef>
-        </p:style>
-        <p:txBody>
-          <a:bodyPr rtlCol="0" anchor="ctr"/>
-          <a:lstStyle/>
-          <a:p>
-            <a:pPr algn="ctr"/>
-          </a:p>
-        </p:txBody>
-      </p:sp>
-      <p:sp>
-        <p:nvSpPr>
-          <p:cNvPr id="7" name="Rectangle 6"/>
-          <p:cNvSpPr/>
-          <p:nvPr/>
-        </p:nvSpPr>
-        <p:spPr>
-          <a:xfrm>
-            <a:off x="457200" y="1591056"/>
-            <a:ext cx="5538063" cy="64008"/>
-          </a:xfrm>
-          <a:prstGeom prst="rect">
-            <a:avLst/>
-          </a:prstGeom>
-          <a:solidFill>
-            <a:srgbClr val="095292"/>
-          </a:solidFill>
-          <a:ln>
-            <a:noFill/>
-          </a:ln>
-        </p:spPr>
-        <p:style>
-          <a:lnRef idx="1">
-            <a:schemeClr val="accent1"/>
-          </a:lnRef>
-          <a:fillRef idx="3">
-            <a:schemeClr val="accent1"/>
-          </a:fillRef>
-          <a:effectRef idx="2">
-            <a:schemeClr val="accent1"/>
-          </a:effectRef>
-          <a:fontRef idx="minor">
-            <a:schemeClr val="lt1"/>
-          </a:fontRef>
-        </p:style>
-        <p:txBody>
-          <a:bodyPr rtlCol="0" anchor="ctr"/>
-          <a:lstStyle/>
-          <a:p>
-            <a:pPr algn="ctr"/>
-          </a:p>
-        </p:txBody>
-      </p:sp>
-      <p:sp>
-        <p:nvSpPr>
-          <p:cNvPr id="8" name="Rectangle 7"/>
-          <p:cNvSpPr/>
-          <p:nvPr/>
-        </p:nvSpPr>
-        <p:spPr>
-          <a:xfrm>
-            <a:off x="457200" y="1655064"/>
-            <a:ext cx="5538063" cy="27432"/>
-          </a:xfrm>
-          <a:prstGeom prst="rect">
-            <a:avLst/>
-          </a:prstGeom>
-          <a:solidFill>
-            <a:srgbClr val="FFD000"/>
-          </a:solidFill>
-          <a:ln>
-            <a:noFill/>
-          </a:ln>
-        </p:spPr>
-        <p:style>
-          <a:lnRef idx="1">
-            <a:schemeClr val="accent1"/>
-          </a:lnRef>
-          <a:fillRef idx="3">
-            <a:schemeClr val="accent1"/>
-          </a:fillRef>
-          <a:effectRef idx="2">
-            <a:schemeClr val="accent1"/>
-          </a:effectRef>
-          <a:fontRef idx="minor">
-            <a:schemeClr val="lt1"/>
-          </a:fontRef>
-        </p:style>
-        <p:txBody>
-          <a:bodyPr rtlCol="0" anchor="ctr"/>
-          <a:lstStyle/>
-          <a:p>
-            <a:pPr algn="ctr"/>
-          </a:p>
-        </p:txBody>
-      </p:sp>
       <p:pic>
         <p:nvPicPr>
-          <p:cNvPr id="9" name="Picture 8" descr="google_docs.png"/>
+          <p:cNvPr id="3" name="Picture 2" descr="logo_uniajc_color.png"/>
           <p:cNvPicPr>
             <a:picLocks noChangeAspect="1"/>
           </p:cNvPicPr>
@@ -7005,414 +7710,14 @@
         </p:blipFill>
         <p:spPr>
           <a:xfrm>
-            <a:off x="2599867" y="1847087"/>
-            <a:ext cx="1252728" cy="1252728"/>
+            <a:off x="10271455" y="5998464"/>
+            <a:ext cx="1463040" cy="643233"/>
           </a:xfrm>
           <a:prstGeom prst="rect">
             <a:avLst/>
           </a:prstGeom>
         </p:spPr>
       </p:pic>
-      <p:sp>
-        <p:nvSpPr>
-          <p:cNvPr id="10" name="TextBox 9"/>
-          <p:cNvSpPr txBox="1"/>
-          <p:nvPr/>
-        </p:nvSpPr>
-        <p:spPr>
-          <a:xfrm>
-            <a:off x="530352" y="3191256"/>
-            <a:ext cx="5391759" cy="621792"/>
-          </a:xfrm>
-          <a:prstGeom prst="rect">
-            <a:avLst/>
-          </a:prstGeom>
-          <a:noFill/>
-        </p:spPr>
-        <p:txBody>
-          <a:bodyPr wrap="square" anchor="t"/>
-          <a:lstStyle/>
-          <a:p>
-            <a:pPr algn="ctr"/>
-            <a:r>
-              <a:rPr sz="1300" b="1" i="0">
-                <a:solidFill>
-                  <a:srgbClr val="095292"/>
-                </a:solidFill>
-                <a:latin typeface="Calibri"/>
-              </a:rPr>
-              <a:t>Google Docs</a:t>
-            </a:r>
-          </a:p>
-          <a:p>
-            <a:pPr algn="ctr">
-              <a:spcBef>
-                <a:spcPts val="200"/>
-              </a:spcBef>
-            </a:pPr>
-            <a:r>
-              <a:rPr sz="1000" b="0" i="0">
-                <a:solidFill>
-                  <a:srgbClr val="666666"/>
-                </a:solidFill>
-                <a:latin typeface="Calibri"/>
-              </a:rPr>
-              <a:t>Tabla de costos</a:t>
-            </a:r>
-          </a:p>
-        </p:txBody>
-      </p:sp>
-      <p:sp>
-        <p:nvSpPr>
-          <p:cNvPr id="11" name="Rounded Rectangle 10"/>
-          <p:cNvSpPr/>
-          <p:nvPr/>
-        </p:nvSpPr>
-        <p:spPr>
-          <a:xfrm>
-            <a:off x="6196431" y="1591056"/>
-            <a:ext cx="5538063" cy="2331720"/>
-          </a:xfrm>
-          <a:prstGeom prst="roundRect">
-            <a:avLst>
-              <a:gd name="adj" fmla="val 12000"/>
-            </a:avLst>
-          </a:prstGeom>
-          <a:solidFill>
-            <a:srgbClr val="F2F2F2"/>
-          </a:solidFill>
-          <a:ln>
-            <a:noFill/>
-          </a:ln>
-        </p:spPr>
-        <p:style>
-          <a:lnRef idx="1">
-            <a:schemeClr val="accent1"/>
-          </a:lnRef>
-          <a:fillRef idx="3">
-            <a:schemeClr val="accent1"/>
-          </a:fillRef>
-          <a:effectRef idx="2">
-            <a:schemeClr val="accent1"/>
-          </a:effectRef>
-          <a:fontRef idx="minor">
-            <a:schemeClr val="lt1"/>
-          </a:fontRef>
-        </p:style>
-        <p:txBody>
-          <a:bodyPr rtlCol="0" anchor="ctr"/>
-          <a:lstStyle/>
-          <a:p>
-            <a:pPr algn="ctr"/>
-          </a:p>
-        </p:txBody>
-      </p:sp>
-      <p:sp>
-        <p:nvSpPr>
-          <p:cNvPr id="12" name="Rectangle 11"/>
-          <p:cNvSpPr/>
-          <p:nvPr/>
-        </p:nvSpPr>
-        <p:spPr>
-          <a:xfrm>
-            <a:off x="6196431" y="1591056"/>
-            <a:ext cx="5538063" cy="64008"/>
-          </a:xfrm>
-          <a:prstGeom prst="rect">
-            <a:avLst/>
-          </a:prstGeom>
-          <a:solidFill>
-            <a:srgbClr val="095292"/>
-          </a:solidFill>
-          <a:ln>
-            <a:noFill/>
-          </a:ln>
-        </p:spPr>
-        <p:style>
-          <a:lnRef idx="1">
-            <a:schemeClr val="accent1"/>
-          </a:lnRef>
-          <a:fillRef idx="3">
-            <a:schemeClr val="accent1"/>
-          </a:fillRef>
-          <a:effectRef idx="2">
-            <a:schemeClr val="accent1"/>
-          </a:effectRef>
-          <a:fontRef idx="minor">
-            <a:schemeClr val="lt1"/>
-          </a:fontRef>
-        </p:style>
-        <p:txBody>
-          <a:bodyPr rtlCol="0" anchor="ctr"/>
-          <a:lstStyle/>
-          <a:p>
-            <a:pPr algn="ctr"/>
-          </a:p>
-        </p:txBody>
-      </p:sp>
-      <p:sp>
-        <p:nvSpPr>
-          <p:cNvPr id="13" name="Rectangle 12"/>
-          <p:cNvSpPr/>
-          <p:nvPr/>
-        </p:nvSpPr>
-        <p:spPr>
-          <a:xfrm>
-            <a:off x="6196431" y="1655064"/>
-            <a:ext cx="5538063" cy="27432"/>
-          </a:xfrm>
-          <a:prstGeom prst="rect">
-            <a:avLst/>
-          </a:prstGeom>
-          <a:solidFill>
-            <a:srgbClr val="FFD000"/>
-          </a:solidFill>
-          <a:ln>
-            <a:noFill/>
-          </a:ln>
-        </p:spPr>
-        <p:style>
-          <a:lnRef idx="1">
-            <a:schemeClr val="accent1"/>
-          </a:lnRef>
-          <a:fillRef idx="3">
-            <a:schemeClr val="accent1"/>
-          </a:fillRef>
-          <a:effectRef idx="2">
-            <a:schemeClr val="accent1"/>
-          </a:effectRef>
-          <a:fontRef idx="minor">
-            <a:schemeClr val="lt1"/>
-          </a:fontRef>
-        </p:style>
-        <p:txBody>
-          <a:bodyPr rtlCol="0" anchor="ctr"/>
-          <a:lstStyle/>
-          <a:p>
-            <a:pPr algn="ctr"/>
-          </a:p>
-        </p:txBody>
-      </p:sp>
-      <p:pic>
-        <p:nvPicPr>
-          <p:cNvPr id="14" name="Picture 13" descr="examlab.png"/>
-          <p:cNvPicPr>
-            <a:picLocks noChangeAspect="1"/>
-          </p:cNvPicPr>
-          <p:nvPr/>
-        </p:nvPicPr>
-        <p:blipFill>
-          <a:blip r:embed="rId3"/>
-          <a:stretch>
-            <a:fillRect/>
-          </a:stretch>
-        </p:blipFill>
-        <p:spPr>
-          <a:xfrm>
-            <a:off x="8339099" y="1847087"/>
-            <a:ext cx="1252728" cy="1252728"/>
-          </a:xfrm>
-          <a:prstGeom prst="rect">
-            <a:avLst/>
-          </a:prstGeom>
-        </p:spPr>
-      </p:pic>
-      <p:sp>
-        <p:nvSpPr>
-          <p:cNvPr id="15" name="TextBox 14"/>
-          <p:cNvSpPr txBox="1"/>
-          <p:nvPr/>
-        </p:nvSpPr>
-        <p:spPr>
-          <a:xfrm>
-            <a:off x="6269583" y="3191256"/>
-            <a:ext cx="5391759" cy="621792"/>
-          </a:xfrm>
-          <a:prstGeom prst="rect">
-            <a:avLst/>
-          </a:prstGeom>
-          <a:noFill/>
-        </p:spPr>
-        <p:txBody>
-          <a:bodyPr wrap="square" anchor="t"/>
-          <a:lstStyle/>
-          <a:p>
-            <a:pPr algn="ctr"/>
-            <a:r>
-              <a:rPr sz="1300" b="1" i="0">
-                <a:solidFill>
-                  <a:srgbClr val="095292"/>
-                </a:solidFill>
-                <a:latin typeface="Calibri"/>
-              </a:rPr>
-              <a:t>la plataforma del curso</a:t>
-            </a:r>
-          </a:p>
-          <a:p>
-            <a:pPr algn="ctr">
-              <a:spcBef>
-                <a:spcPts val="200"/>
-              </a:spcBef>
-            </a:pPr>
-            <a:r>
-              <a:rPr sz="1000" b="0" i="0">
-                <a:solidFill>
-                  <a:srgbClr val="666666"/>
-                </a:solidFill>
-                <a:latin typeface="Calibri"/>
-              </a:rPr>
-              <a:t>Donde se entrega</a:t>
-            </a:r>
-          </a:p>
-        </p:txBody>
-      </p:sp>
-      <p:sp>
-        <p:nvSpPr>
-          <p:cNvPr id="16" name="TextBox 15"/>
-          <p:cNvSpPr txBox="1"/>
-          <p:nvPr/>
-        </p:nvSpPr>
-        <p:spPr>
-          <a:xfrm>
-            <a:off x="11185855" y="6473952"/>
-            <a:ext cx="640080" cy="274320"/>
-          </a:xfrm>
-          <a:prstGeom prst="rect">
-            <a:avLst/>
-          </a:prstGeom>
-          <a:noFill/>
-        </p:spPr>
-        <p:txBody>
-          <a:bodyPr wrap="square">
-            <a:spAutoFit/>
-          </a:bodyPr>
-          <a:lstStyle/>
-          <a:p>
-            <a:pPr algn="r"/>
-            <a:r>
-              <a:rPr sz="1100" b="0" i="0">
-                <a:solidFill>
-                  <a:srgbClr val="666666"/>
-                </a:solidFill>
-                <a:latin typeface="Calibri"/>
-              </a:rPr>
-              <a:t>21</a:t>
-            </a:r>
-          </a:p>
-        </p:txBody>
-      </p:sp>
-    </p:spTree>
-  </p:cSld>
-  <p:clrMapOvr>
-    <a:masterClrMapping/>
-  </p:clrMapOvr>
-</p:sld>
-</file>
-
-<file path=ppt/slides/slide22.xml><?xml version="1.0" encoding="utf-8"?>
-<p:sld xmlns:a="http://schemas.openxmlformats.org/drawingml/2006/main" xmlns:p="http://schemas.openxmlformats.org/presentationml/2006/main" xmlns:r="http://schemas.openxmlformats.org/officeDocument/2006/relationships">
-  <p:cSld>
-    <p:bg>
-      <p:bgPr>
-        <a:solidFill>
-          <a:srgbClr val="FFFFFF"/>
-        </a:solidFill>
-        <a:effectLst/>
-      </p:bgPr>
-    </p:bg>
-    <p:spTree>
-      <p:nvGrpSpPr>
-        <p:cNvPr id="1" name=""/>
-        <p:cNvGrpSpPr/>
-        <p:nvPr/>
-      </p:nvGrpSpPr>
-      <p:grpSpPr/>
-      <p:sp>
-        <p:nvSpPr>
-          <p:cNvPr id="2" name="Rectangle 1"/>
-          <p:cNvSpPr/>
-          <p:nvPr/>
-        </p:nvSpPr>
-        <p:spPr>
-          <a:xfrm>
-            <a:off x="0" y="0"/>
-            <a:ext cx="12191695" cy="960120"/>
-          </a:xfrm>
-          <a:prstGeom prst="rect">
-            <a:avLst/>
-          </a:prstGeom>
-          <a:solidFill>
-            <a:srgbClr val="095292"/>
-          </a:solidFill>
-          <a:ln>
-            <a:noFill/>
-          </a:ln>
-        </p:spPr>
-        <p:style>
-          <a:lnRef idx="1">
-            <a:schemeClr val="accent1"/>
-          </a:lnRef>
-          <a:fillRef idx="3">
-            <a:schemeClr val="accent1"/>
-          </a:fillRef>
-          <a:effectRef idx="2">
-            <a:schemeClr val="accent1"/>
-          </a:effectRef>
-          <a:fontRef idx="minor">
-            <a:schemeClr val="lt1"/>
-          </a:fontRef>
-        </p:style>
-        <p:txBody>
-          <a:bodyPr rtlCol="0" anchor="ctr"/>
-          <a:lstStyle/>
-          <a:p>
-            <a:pPr algn="ctr"/>
-          </a:p>
-        </p:txBody>
-      </p:sp>
-      <p:sp>
-        <p:nvSpPr>
-          <p:cNvPr id="3" name="Rectangle 2"/>
-          <p:cNvSpPr/>
-          <p:nvPr/>
-        </p:nvSpPr>
-        <p:spPr>
-          <a:xfrm>
-            <a:off x="0" y="960120"/>
-            <a:ext cx="12191695" cy="41148"/>
-          </a:xfrm>
-          <a:prstGeom prst="rect">
-            <a:avLst/>
-          </a:prstGeom>
-          <a:solidFill>
-            <a:srgbClr val="FFD000"/>
-          </a:solidFill>
-          <a:ln>
-            <a:noFill/>
-          </a:ln>
-        </p:spPr>
-        <p:style>
-          <a:lnRef idx="1">
-            <a:schemeClr val="accent1"/>
-          </a:lnRef>
-          <a:fillRef idx="3">
-            <a:schemeClr val="accent1"/>
-          </a:fillRef>
-          <a:effectRef idx="2">
-            <a:schemeClr val="accent1"/>
-          </a:effectRef>
-          <a:fontRef idx="minor">
-            <a:schemeClr val="lt1"/>
-          </a:fontRef>
-        </p:style>
-        <p:txBody>
-          <a:bodyPr rtlCol="0" anchor="ctr"/>
-          <a:lstStyle/>
-          <a:p>
-            <a:pPr algn="ctr"/>
-          </a:p>
-        </p:txBody>
-      </p:sp>
       <p:sp>
         <p:nvSpPr>
           <p:cNvPr id="4" name="TextBox 3"/>
@@ -7421,1226 +7726,6 @@
         </p:nvSpPr>
         <p:spPr>
           <a:xfrm>
-            <a:off x="457200" y="164592"/>
-            <a:ext cx="11277295" cy="502920"/>
-          </a:xfrm>
-          <a:prstGeom prst="rect">
-            <a:avLst/>
-          </a:prstGeom>
-          <a:noFill/>
-        </p:spPr>
-        <p:txBody>
-          <a:bodyPr wrap="square">
-            <a:spAutoFit/>
-          </a:bodyPr>
-          <a:lstStyle/>
-          <a:p>
-            <a:r>
-              <a:rPr sz="2600" b="1" i="0">
-                <a:solidFill>
-                  <a:srgbClr val="FFFFFF"/>
-                </a:solidFill>
-                <a:latin typeface="Calibri"/>
-              </a:rPr>
-              <a:t>PI CloudLite — entregable de hoy</a:t>
-            </a:r>
-          </a:p>
-        </p:txBody>
-      </p:sp>
-      <p:sp>
-        <p:nvSpPr>
-          <p:cNvPr id="5" name="TextBox 4"/>
-          <p:cNvSpPr txBox="1"/>
-          <p:nvPr/>
-        </p:nvSpPr>
-        <p:spPr>
-          <a:xfrm>
-            <a:off x="457200" y="1170432"/>
-            <a:ext cx="11277295" cy="5230368"/>
-          </a:xfrm>
-          <a:prstGeom prst="rect">
-            <a:avLst/>
-          </a:prstGeom>
-          <a:noFill/>
-        </p:spPr>
-        <p:txBody>
-          <a:bodyPr wrap="square">
-            <a:spAutoFit/>
-          </a:bodyPr>
-          <a:lstStyle/>
-          <a:p>
-            <a:pPr>
-              <a:spcAft>
-                <a:spcPts val="800"/>
-              </a:spcAft>
-            </a:pPr>
-            <a:r>
-              <a:rPr sz="2000" b="0" i="0">
-                <a:solidFill>
-                  <a:srgbClr val="333333"/>
-                </a:solidFill>
-                <a:latin typeface="Calibri"/>
-              </a:rPr>
-              <a:t>–   </a:t>
-            </a:r>
-            <a:r>
-              <a:rPr sz="2000" b="1" i="0">
-                <a:solidFill>
-                  <a:srgbClr val="333333"/>
-                </a:solidFill>
-                <a:latin typeface="Calibri"/>
-              </a:rPr>
-              <a:t>Entregable:</a:t>
-            </a:r>
-            <a:r>
-              <a:rPr sz="2000" b="0" i="0">
-                <a:solidFill>
-                  <a:srgbClr val="333333"/>
-                </a:solidFill>
-                <a:latin typeface="Calibri"/>
-              </a:rPr>
-              <a:t> Sección Costos/Sostenibilidad del informe (bajo/medio + drivers)</a:t>
-            </a:r>
-          </a:p>
-          <a:p>
-            <a:pPr>
-              <a:spcAft>
-                <a:spcPts val="800"/>
-              </a:spcAft>
-            </a:pPr>
-            <a:r>
-              <a:rPr sz="2000" b="0" i="0">
-                <a:solidFill>
-                  <a:srgbClr val="333333"/>
-                </a:solidFill>
-                <a:latin typeface="Calibri"/>
-              </a:rPr>
-              <a:t>–   Herramienta: </a:t>
-            </a:r>
-            <a:r>
-              <a:rPr sz="2000" b="1" i="0">
-                <a:solidFill>
-                  <a:srgbClr val="333333"/>
-                </a:solidFill>
-                <a:latin typeface="Calibri"/>
-              </a:rPr>
-              <a:t>Navegador · editor de texto del curso</a:t>
-            </a:r>
-          </a:p>
-          <a:p>
-            <a:pPr>
-              <a:spcAft>
-                <a:spcPts val="800"/>
-              </a:spcAft>
-            </a:pPr>
-            <a:r>
-              <a:rPr sz="2000" b="0" i="0">
-                <a:solidFill>
-                  <a:srgbClr val="333333"/>
-                </a:solidFill>
-                <a:latin typeface="Calibri"/>
-              </a:rPr>
-              <a:t>–   Todo lo que construyan hoy entra al </a:t>
-            </a:r>
-            <a:r>
-              <a:rPr sz="2000" b="1" i="0">
-                <a:solidFill>
-                  <a:srgbClr val="333333"/>
-                </a:solidFill>
-                <a:latin typeface="Calibri"/>
-              </a:rPr>
-              <a:t>informe/repo del PI</a:t>
-            </a:r>
-            <a:r>
-              <a:rPr sz="2000" b="0" i="0">
-                <a:solidFill>
-                  <a:srgbClr val="333333"/>
-                </a:solidFill>
-                <a:latin typeface="Calibri"/>
-              </a:rPr>
-              <a:t> (no es lab suelto).</a:t>
-            </a:r>
-          </a:p>
-          <a:p>
-            <a:pPr>
-              <a:spcAft>
-                <a:spcPts val="800"/>
-              </a:spcAft>
-            </a:pPr>
-            <a:r>
-              <a:rPr sz="2000" b="0" i="0">
-                <a:solidFill>
-                  <a:srgbClr val="333333"/>
-                </a:solidFill>
-                <a:latin typeface="Calibri"/>
-              </a:rPr>
-              <a:t>–   Individual por defecto · el docente puede autorizar equipos de 2–3; la entrega en la plataforma del curso siempre es individual.</a:t>
-            </a:r>
-          </a:p>
-        </p:txBody>
-      </p:sp>
-      <p:sp>
-        <p:nvSpPr>
-          <p:cNvPr id="6" name="TextBox 5"/>
-          <p:cNvSpPr txBox="1"/>
-          <p:nvPr/>
-        </p:nvSpPr>
-        <p:spPr>
-          <a:xfrm>
-            <a:off x="11185855" y="6473952"/>
-            <a:ext cx="640080" cy="274320"/>
-          </a:xfrm>
-          <a:prstGeom prst="rect">
-            <a:avLst/>
-          </a:prstGeom>
-          <a:noFill/>
-        </p:spPr>
-        <p:txBody>
-          <a:bodyPr wrap="square">
-            <a:spAutoFit/>
-          </a:bodyPr>
-          <a:lstStyle/>
-          <a:p>
-            <a:pPr algn="r"/>
-            <a:r>
-              <a:rPr sz="1100" b="0" i="0">
-                <a:solidFill>
-                  <a:srgbClr val="666666"/>
-                </a:solidFill>
-                <a:latin typeface="Calibri"/>
-              </a:rPr>
-              <a:t>22</a:t>
-            </a:r>
-          </a:p>
-        </p:txBody>
-      </p:sp>
-    </p:spTree>
-  </p:cSld>
-  <p:clrMapOvr>
-    <a:masterClrMapping/>
-  </p:clrMapOvr>
-</p:sld>
-</file>
-
-<file path=ppt/slides/slide23.xml><?xml version="1.0" encoding="utf-8"?>
-<p:sld xmlns:a="http://schemas.openxmlformats.org/drawingml/2006/main" xmlns:p="http://schemas.openxmlformats.org/presentationml/2006/main" xmlns:r="http://schemas.openxmlformats.org/officeDocument/2006/relationships">
-  <p:cSld>
-    <p:bg>
-      <p:bgPr>
-        <a:solidFill>
-          <a:srgbClr val="FFFFFF"/>
-        </a:solidFill>
-        <a:effectLst/>
-      </p:bgPr>
-    </p:bg>
-    <p:spTree>
-      <p:nvGrpSpPr>
-        <p:cNvPr id="1" name=""/>
-        <p:cNvGrpSpPr/>
-        <p:nvPr/>
-      </p:nvGrpSpPr>
-      <p:grpSpPr/>
-      <p:sp>
-        <p:nvSpPr>
-          <p:cNvPr id="2" name="Rectangle 1"/>
-          <p:cNvSpPr/>
-          <p:nvPr/>
-        </p:nvSpPr>
-        <p:spPr>
-          <a:xfrm>
-            <a:off x="0" y="0"/>
-            <a:ext cx="12191695" cy="960120"/>
-          </a:xfrm>
-          <a:prstGeom prst="rect">
-            <a:avLst/>
-          </a:prstGeom>
-          <a:solidFill>
-            <a:srgbClr val="095292"/>
-          </a:solidFill>
-          <a:ln>
-            <a:noFill/>
-          </a:ln>
-        </p:spPr>
-        <p:style>
-          <a:lnRef idx="1">
-            <a:schemeClr val="accent1"/>
-          </a:lnRef>
-          <a:fillRef idx="3">
-            <a:schemeClr val="accent1"/>
-          </a:fillRef>
-          <a:effectRef idx="2">
-            <a:schemeClr val="accent1"/>
-          </a:effectRef>
-          <a:fontRef idx="minor">
-            <a:schemeClr val="lt1"/>
-          </a:fontRef>
-        </p:style>
-        <p:txBody>
-          <a:bodyPr rtlCol="0" anchor="ctr"/>
-          <a:lstStyle/>
-          <a:p>
-            <a:pPr algn="ctr"/>
-          </a:p>
-        </p:txBody>
-      </p:sp>
-      <p:sp>
-        <p:nvSpPr>
-          <p:cNvPr id="3" name="Rectangle 2"/>
-          <p:cNvSpPr/>
-          <p:nvPr/>
-        </p:nvSpPr>
-        <p:spPr>
-          <a:xfrm>
-            <a:off x="0" y="960120"/>
-            <a:ext cx="12191695" cy="41148"/>
-          </a:xfrm>
-          <a:prstGeom prst="rect">
-            <a:avLst/>
-          </a:prstGeom>
-          <a:solidFill>
-            <a:srgbClr val="FFD000"/>
-          </a:solidFill>
-          <a:ln>
-            <a:noFill/>
-          </a:ln>
-        </p:spPr>
-        <p:style>
-          <a:lnRef idx="1">
-            <a:schemeClr val="accent1"/>
-          </a:lnRef>
-          <a:fillRef idx="3">
-            <a:schemeClr val="accent1"/>
-          </a:fillRef>
-          <a:effectRef idx="2">
-            <a:schemeClr val="accent1"/>
-          </a:effectRef>
-          <a:fontRef idx="minor">
-            <a:schemeClr val="lt1"/>
-          </a:fontRef>
-        </p:style>
-        <p:txBody>
-          <a:bodyPr rtlCol="0" anchor="ctr"/>
-          <a:lstStyle/>
-          <a:p>
-            <a:pPr algn="ctr"/>
-          </a:p>
-        </p:txBody>
-      </p:sp>
-      <p:sp>
-        <p:nvSpPr>
-          <p:cNvPr id="4" name="TextBox 3"/>
-          <p:cNvSpPr txBox="1"/>
-          <p:nvPr/>
-        </p:nvSpPr>
-        <p:spPr>
-          <a:xfrm>
-            <a:off x="457200" y="164592"/>
-            <a:ext cx="11277295" cy="502920"/>
-          </a:xfrm>
-          <a:prstGeom prst="rect">
-            <a:avLst/>
-          </a:prstGeom>
-          <a:noFill/>
-        </p:spPr>
-        <p:txBody>
-          <a:bodyPr wrap="square">
-            <a:spAutoFit/>
-          </a:bodyPr>
-          <a:lstStyle/>
-          <a:p>
-            <a:r>
-              <a:rPr sz="2600" b="1" i="0">
-                <a:solidFill>
-                  <a:srgbClr val="FFFFFF"/>
-                </a:solidFill>
-                <a:latin typeface="Calibri"/>
-              </a:rPr>
-              <a:t>Manos a la obra (paso a paso)</a:t>
-            </a:r>
-          </a:p>
-        </p:txBody>
-      </p:sp>
-      <p:sp>
-        <p:nvSpPr>
-          <p:cNvPr id="5" name="TextBox 4"/>
-          <p:cNvSpPr txBox="1"/>
-          <p:nvPr/>
-        </p:nvSpPr>
-        <p:spPr>
-          <a:xfrm>
-            <a:off x="457200" y="1170432"/>
-            <a:ext cx="11277295" cy="5230368"/>
-          </a:xfrm>
-          <a:prstGeom prst="rect">
-            <a:avLst/>
-          </a:prstGeom>
-          <a:noFill/>
-        </p:spPr>
-        <p:txBody>
-          <a:bodyPr wrap="square">
-            <a:spAutoFit/>
-          </a:bodyPr>
-          <a:lstStyle/>
-          <a:p>
-            <a:pPr>
-              <a:spcAft>
-                <a:spcPts val="800"/>
-              </a:spcAft>
-            </a:pPr>
-            <a:r>
-              <a:rPr sz="2000" b="1" i="0">
-                <a:solidFill>
-                  <a:srgbClr val="333333"/>
-                </a:solidFill>
-                <a:latin typeface="Calibri"/>
-              </a:rPr>
-              <a:t>1.</a:t>
-            </a:r>
-            <a:r>
-              <a:rPr sz="2000" b="0" i="0">
-                <a:solidFill>
-                  <a:srgbClr val="333333"/>
-                </a:solidFill>
-                <a:latin typeface="Calibri"/>
-              </a:rPr>
-              <a:t> Paso 1: construya en la pregunta 11 la tabla de costos con una fila por cada componente de su despliegue y las columnas componente, driver, nivel B/M/A y apalancamiento; verifique que cada driver sea una variable contable (horas encendidas, GB de salida, GB almacenados, minutos de CI) y no «el uso».</a:t>
-            </a:r>
-          </a:p>
-          <a:p>
-            <a:pPr>
-              <a:spcAft>
-                <a:spcPts val="800"/>
-              </a:spcAft>
-            </a:pPr>
-            <a:r>
-              <a:rPr sz="2000" b="0" i="0">
-                <a:solidFill>
-                  <a:srgbClr val="333333"/>
-                </a:solidFill>
-                <a:latin typeface="Calibri"/>
-              </a:rPr>
-              <a:t>–   </a:t>
-            </a:r>
-            <a:r>
-              <a:rPr sz="2000" b="1" i="0">
-                <a:solidFill>
-                  <a:srgbClr val="333333"/>
-                </a:solidFill>
-                <a:latin typeface="Calibri"/>
-              </a:rPr>
-              <a:t>2.</a:t>
-            </a:r>
-            <a:r>
-              <a:rPr sz="2000" b="0" i="0">
-                <a:solidFill>
-                  <a:srgbClr val="333333"/>
-                </a:solidFill>
-                <a:latin typeface="Calibri"/>
-              </a:rPr>
-              <a:t> Paso 2: fuerce al menos un Alto y un Bajo con su justificacion. Marcar todo como Medio para no decidir es lo que la pregunta busca descartar, y ese criterio vale cero si todas las filas quedan iguales.</a:t>
-            </a:r>
-          </a:p>
-          <a:p>
-            <a:pPr>
-              <a:spcAft>
-                <a:spcPts val="800"/>
-              </a:spcAft>
-            </a:pPr>
-            <a:r>
-              <a:rPr sz="2000" b="0" i="0">
-                <a:solidFill>
-                  <a:srgbClr val="333333"/>
-                </a:solidFill>
-                <a:latin typeface="Calibri"/>
-              </a:rPr>
-              <a:t>–   </a:t>
-            </a:r>
-            <a:r>
-              <a:rPr sz="2000" b="1" i="0">
-                <a:solidFill>
-                  <a:srgbClr val="333333"/>
-                </a:solidFill>
-                <a:latin typeface="Calibri"/>
-              </a:rPr>
-              <a:t>3.</a:t>
-            </a:r>
-            <a:r>
-              <a:rPr sz="2000" b="0" i="0">
-                <a:solidFill>
-                  <a:srgbClr val="333333"/>
-                </a:solidFill>
-                <a:latin typeface="Calibri"/>
-              </a:rPr>
-              <a:t> Paso 3: escriba en la pregunta 12 tres acciones de sostenibilidad, cada una con el artefacto donde se comprueba y como se comprueba; aplique la prueba de que otra persona pueda decir en seis meses, mirando el repositorio, si la accion se aplico.</a:t>
-            </a:r>
-          </a:p>
-          <a:p>
-            <a:pPr>
-              <a:spcAft>
-                <a:spcPts val="800"/>
-              </a:spcAft>
-            </a:pPr>
-            <a:r>
-              <a:rPr sz="2000" b="0" i="0">
-                <a:solidFill>
-                  <a:srgbClr val="333333"/>
-                </a:solidFill>
-                <a:latin typeface="Calibri"/>
-              </a:rPr>
-              <a:t>–   </a:t>
-            </a:r>
-            <a:r>
-              <a:rPr sz="2000" b="1" i="0">
-                <a:solidFill>
-                  <a:srgbClr val="333333"/>
-                </a:solidFill>
-                <a:latin typeface="Calibri"/>
-              </a:rPr>
-              <a:t>4.</a:t>
-            </a:r>
-            <a:r>
-              <a:rPr sz="2000" b="0" i="0">
-                <a:solidFill>
-                  <a:srgbClr val="333333"/>
-                </a:solidFill>
-                <a:latin typeface="Calibri"/>
-              </a:rPr>
-              <a:t> Paso 4: ate al menos una de las tres acciones a un driver de costo de la pregunta 11 y suba la actividad completa del Corte 2 a la plataforma del curso antes del en la fecha que indique el docente. Es una clase autonoma: no hay encuentro sincrono, y las dudas van por el foro.</a:t>
-            </a:r>
-          </a:p>
-        </p:txBody>
-      </p:sp>
-      <p:sp>
-        <p:nvSpPr>
-          <p:cNvPr id="6" name="TextBox 5"/>
-          <p:cNvSpPr txBox="1"/>
-          <p:nvPr/>
-        </p:nvSpPr>
-        <p:spPr>
-          <a:xfrm>
-            <a:off x="11185855" y="6473952"/>
-            <a:ext cx="640080" cy="274320"/>
-          </a:xfrm>
-          <a:prstGeom prst="rect">
-            <a:avLst/>
-          </a:prstGeom>
-          <a:noFill/>
-        </p:spPr>
-        <p:txBody>
-          <a:bodyPr wrap="square">
-            <a:spAutoFit/>
-          </a:bodyPr>
-          <a:lstStyle/>
-          <a:p>
-            <a:pPr algn="r"/>
-            <a:r>
-              <a:rPr sz="1100" b="0" i="0">
-                <a:solidFill>
-                  <a:srgbClr val="666666"/>
-                </a:solidFill>
-                <a:latin typeface="Calibri"/>
-              </a:rPr>
-              <a:t>23</a:t>
-            </a:r>
-          </a:p>
-        </p:txBody>
-      </p:sp>
-    </p:spTree>
-  </p:cSld>
-  <p:clrMapOvr>
-    <a:masterClrMapping/>
-  </p:clrMapOvr>
-</p:sld>
-</file>
-
-<file path=ppt/slides/slide24.xml><?xml version="1.0" encoding="utf-8"?>
-<p:sld xmlns:a="http://schemas.openxmlformats.org/drawingml/2006/main" xmlns:p="http://schemas.openxmlformats.org/presentationml/2006/main" xmlns:r="http://schemas.openxmlformats.org/officeDocument/2006/relationships">
-  <p:cSld>
-    <p:bg>
-      <p:bgPr>
-        <a:solidFill>
-          <a:srgbClr val="FFFFFF"/>
-        </a:solidFill>
-        <a:effectLst/>
-      </p:bgPr>
-    </p:bg>
-    <p:spTree>
-      <p:nvGrpSpPr>
-        <p:cNvPr id="1" name=""/>
-        <p:cNvGrpSpPr/>
-        <p:nvPr/>
-      </p:nvGrpSpPr>
-      <p:grpSpPr/>
-      <p:sp>
-        <p:nvSpPr>
-          <p:cNvPr id="2" name="Rectangle 1"/>
-          <p:cNvSpPr/>
-          <p:nvPr/>
-        </p:nvSpPr>
-        <p:spPr>
-          <a:xfrm>
-            <a:off x="0" y="0"/>
-            <a:ext cx="12191695" cy="960120"/>
-          </a:xfrm>
-          <a:prstGeom prst="rect">
-            <a:avLst/>
-          </a:prstGeom>
-          <a:solidFill>
-            <a:srgbClr val="095292"/>
-          </a:solidFill>
-          <a:ln>
-            <a:noFill/>
-          </a:ln>
-        </p:spPr>
-        <p:style>
-          <a:lnRef idx="1">
-            <a:schemeClr val="accent1"/>
-          </a:lnRef>
-          <a:fillRef idx="3">
-            <a:schemeClr val="accent1"/>
-          </a:fillRef>
-          <a:effectRef idx="2">
-            <a:schemeClr val="accent1"/>
-          </a:effectRef>
-          <a:fontRef idx="minor">
-            <a:schemeClr val="lt1"/>
-          </a:fontRef>
-        </p:style>
-        <p:txBody>
-          <a:bodyPr rtlCol="0" anchor="ctr"/>
-          <a:lstStyle/>
-          <a:p>
-            <a:pPr algn="ctr"/>
-          </a:p>
-        </p:txBody>
-      </p:sp>
-      <p:sp>
-        <p:nvSpPr>
-          <p:cNvPr id="3" name="Rectangle 2"/>
-          <p:cNvSpPr/>
-          <p:nvPr/>
-        </p:nvSpPr>
-        <p:spPr>
-          <a:xfrm>
-            <a:off x="0" y="960120"/>
-            <a:ext cx="12191695" cy="41148"/>
-          </a:xfrm>
-          <a:prstGeom prst="rect">
-            <a:avLst/>
-          </a:prstGeom>
-          <a:solidFill>
-            <a:srgbClr val="FFD000"/>
-          </a:solidFill>
-          <a:ln>
-            <a:noFill/>
-          </a:ln>
-        </p:spPr>
-        <p:style>
-          <a:lnRef idx="1">
-            <a:schemeClr val="accent1"/>
-          </a:lnRef>
-          <a:fillRef idx="3">
-            <a:schemeClr val="accent1"/>
-          </a:fillRef>
-          <a:effectRef idx="2">
-            <a:schemeClr val="accent1"/>
-          </a:effectRef>
-          <a:fontRef idx="minor">
-            <a:schemeClr val="lt1"/>
-          </a:fontRef>
-        </p:style>
-        <p:txBody>
-          <a:bodyPr rtlCol="0" anchor="ctr"/>
-          <a:lstStyle/>
-          <a:p>
-            <a:pPr algn="ctr"/>
-          </a:p>
-        </p:txBody>
-      </p:sp>
-      <p:sp>
-        <p:nvSpPr>
-          <p:cNvPr id="4" name="TextBox 3"/>
-          <p:cNvSpPr txBox="1"/>
-          <p:nvPr/>
-        </p:nvSpPr>
-        <p:spPr>
-          <a:xfrm>
-            <a:off x="457200" y="164592"/>
-            <a:ext cx="11277295" cy="502920"/>
-          </a:xfrm>
-          <a:prstGeom prst="rect">
-            <a:avLst/>
-          </a:prstGeom>
-          <a:noFill/>
-        </p:spPr>
-        <p:txBody>
-          <a:bodyPr wrap="square">
-            <a:spAutoFit/>
-          </a:bodyPr>
-          <a:lstStyle/>
-          <a:p>
-            <a:r>
-              <a:rPr sz="2600" b="1" i="0">
-                <a:solidFill>
-                  <a:srgbClr val="FFFFFF"/>
-                </a:solidFill>
-                <a:latin typeface="Calibri"/>
-              </a:rPr>
-              <a:t>Para continuar (PI)</a:t>
-            </a:r>
-          </a:p>
-        </p:txBody>
-      </p:sp>
-      <p:sp>
-        <p:nvSpPr>
-          <p:cNvPr id="5" name="Rounded Rectangle 4"/>
-          <p:cNvSpPr/>
-          <p:nvPr/>
-        </p:nvSpPr>
-        <p:spPr>
-          <a:xfrm>
-            <a:off x="457200" y="1261872"/>
-            <a:ext cx="11277295" cy="1051560"/>
-          </a:xfrm>
-          <a:prstGeom prst="roundRect">
-            <a:avLst>
-              <a:gd name="adj" fmla="val 12000"/>
-            </a:avLst>
-          </a:prstGeom>
-          <a:solidFill>
-            <a:srgbClr val="E8F4FA"/>
-          </a:solidFill>
-          <a:ln>
-            <a:noFill/>
-          </a:ln>
-        </p:spPr>
-        <p:style>
-          <a:lnRef idx="1">
-            <a:schemeClr val="accent1"/>
-          </a:lnRef>
-          <a:fillRef idx="3">
-            <a:schemeClr val="accent1"/>
-          </a:fillRef>
-          <a:effectRef idx="2">
-            <a:schemeClr val="accent1"/>
-          </a:effectRef>
-          <a:fontRef idx="minor">
-            <a:schemeClr val="lt1"/>
-          </a:fontRef>
-        </p:style>
-        <p:txBody>
-          <a:bodyPr rtlCol="0" anchor="ctr"/>
-          <a:lstStyle/>
-          <a:p>
-            <a:pPr algn="ctr"/>
-          </a:p>
-        </p:txBody>
-      </p:sp>
-      <p:sp>
-        <p:nvSpPr>
-          <p:cNvPr id="6" name="Rectangle 5"/>
-          <p:cNvSpPr/>
-          <p:nvPr/>
-        </p:nvSpPr>
-        <p:spPr>
-          <a:xfrm>
-            <a:off x="457200" y="1261872"/>
-            <a:ext cx="128016" cy="1051560"/>
-          </a:xfrm>
-          <a:prstGeom prst="rect">
-            <a:avLst/>
-          </a:prstGeom>
-          <a:solidFill>
-            <a:srgbClr val="269CCB"/>
-          </a:solidFill>
-          <a:ln>
-            <a:noFill/>
-          </a:ln>
-        </p:spPr>
-        <p:style>
-          <a:lnRef idx="1">
-            <a:schemeClr val="accent1"/>
-          </a:lnRef>
-          <a:fillRef idx="3">
-            <a:schemeClr val="accent1"/>
-          </a:fillRef>
-          <a:effectRef idx="2">
-            <a:schemeClr val="accent1"/>
-          </a:effectRef>
-          <a:fontRef idx="minor">
-            <a:schemeClr val="lt1"/>
-          </a:fontRef>
-        </p:style>
-        <p:txBody>
-          <a:bodyPr rtlCol="0" anchor="ctr"/>
-          <a:lstStyle/>
-          <a:p>
-            <a:pPr algn="ctr"/>
-          </a:p>
-        </p:txBody>
-      </p:sp>
-      <p:sp>
-        <p:nvSpPr>
-          <p:cNvPr id="7" name="TextBox 6"/>
-          <p:cNvSpPr txBox="1"/>
-          <p:nvPr/>
-        </p:nvSpPr>
-        <p:spPr>
-          <a:xfrm>
-            <a:off x="777240" y="1399031"/>
-            <a:ext cx="10774375" cy="822959"/>
-          </a:xfrm>
-          <a:prstGeom prst="rect">
-            <a:avLst/>
-          </a:prstGeom>
-          <a:noFill/>
-        </p:spPr>
-        <p:txBody>
-          <a:bodyPr wrap="square">
-            <a:spAutoFit/>
-          </a:bodyPr>
-          <a:lstStyle/>
-          <a:p>
-            <a:r>
-              <a:rPr sz="1200" b="1" i="0">
-                <a:solidFill>
-                  <a:srgbClr val="269CCB"/>
-                </a:solidFill>
-                <a:latin typeface="Calibri"/>
-              </a:rPr>
-              <a:t>Info</a:t>
-            </a:r>
-          </a:p>
-          <a:p>
-            <a:pPr>
-              <a:spcBef>
-                <a:spcPts val="400"/>
-              </a:spcBef>
-            </a:pPr>
-            <a:r>
-              <a:rPr sz="1400" b="0" i="0">
-                <a:solidFill>
-                  <a:srgbClr val="333333"/>
-                </a:solidFill>
-                <a:latin typeface="Calibri"/>
-              </a:rPr>
-              <a:t>Entregable: Sección Costos/Sostenibilidad del informe (bajo/medio + drivers)</a:t>
-            </a:r>
-          </a:p>
-        </p:txBody>
-      </p:sp>
-      <p:sp>
-        <p:nvSpPr>
-          <p:cNvPr id="8" name="Rounded Rectangle 7"/>
-          <p:cNvSpPr/>
-          <p:nvPr/>
-        </p:nvSpPr>
-        <p:spPr>
-          <a:xfrm>
-            <a:off x="457200" y="2478024"/>
-            <a:ext cx="11277295" cy="1051560"/>
-          </a:xfrm>
-          <a:prstGeom prst="roundRect">
-            <a:avLst>
-              <a:gd name="adj" fmla="val 12000"/>
-            </a:avLst>
-          </a:prstGeom>
-          <a:solidFill>
-            <a:srgbClr val="FFF8E1"/>
-          </a:solidFill>
-          <a:ln>
-            <a:noFill/>
-          </a:ln>
-        </p:spPr>
-        <p:style>
-          <a:lnRef idx="1">
-            <a:schemeClr val="accent1"/>
-          </a:lnRef>
-          <a:fillRef idx="3">
-            <a:schemeClr val="accent1"/>
-          </a:fillRef>
-          <a:effectRef idx="2">
-            <a:schemeClr val="accent1"/>
-          </a:effectRef>
-          <a:fontRef idx="minor">
-            <a:schemeClr val="lt1"/>
-          </a:fontRef>
-        </p:style>
-        <p:txBody>
-          <a:bodyPr rtlCol="0" anchor="ctr"/>
-          <a:lstStyle/>
-          <a:p>
-            <a:pPr algn="ctr"/>
-          </a:p>
-        </p:txBody>
-      </p:sp>
-      <p:sp>
-        <p:nvSpPr>
-          <p:cNvPr id="9" name="Rectangle 8"/>
-          <p:cNvSpPr/>
-          <p:nvPr/>
-        </p:nvSpPr>
-        <p:spPr>
-          <a:xfrm>
-            <a:off x="457200" y="2478024"/>
-            <a:ext cx="128016" cy="1051560"/>
-          </a:xfrm>
-          <a:prstGeom prst="rect">
-            <a:avLst/>
-          </a:prstGeom>
-          <a:solidFill>
-            <a:srgbClr val="FFD000"/>
-          </a:solidFill>
-          <a:ln>
-            <a:noFill/>
-          </a:ln>
-        </p:spPr>
-        <p:style>
-          <a:lnRef idx="1">
-            <a:schemeClr val="accent1"/>
-          </a:lnRef>
-          <a:fillRef idx="3">
-            <a:schemeClr val="accent1"/>
-          </a:fillRef>
-          <a:effectRef idx="2">
-            <a:schemeClr val="accent1"/>
-          </a:effectRef>
-          <a:fontRef idx="minor">
-            <a:schemeClr val="lt1"/>
-          </a:fontRef>
-        </p:style>
-        <p:txBody>
-          <a:bodyPr rtlCol="0" anchor="ctr"/>
-          <a:lstStyle/>
-          <a:p>
-            <a:pPr algn="ctr"/>
-          </a:p>
-        </p:txBody>
-      </p:sp>
-      <p:sp>
-        <p:nvSpPr>
-          <p:cNvPr id="10" name="TextBox 9"/>
-          <p:cNvSpPr txBox="1"/>
-          <p:nvPr/>
-        </p:nvSpPr>
-        <p:spPr>
-          <a:xfrm>
-            <a:off x="777240" y="2615184"/>
-            <a:ext cx="10774375" cy="822959"/>
-          </a:xfrm>
-          <a:prstGeom prst="rect">
-            <a:avLst/>
-          </a:prstGeom>
-          <a:noFill/>
-        </p:spPr>
-        <p:txBody>
-          <a:bodyPr wrap="square">
-            <a:spAutoFit/>
-          </a:bodyPr>
-          <a:lstStyle/>
-          <a:p>
-            <a:r>
-              <a:rPr sz="1200" b="1" i="0">
-                <a:solidFill>
-                  <a:srgbClr val="FFD000"/>
-                </a:solidFill>
-                <a:latin typeface="Calibri"/>
-              </a:rPr>
-              <a:t>Aclaración</a:t>
-            </a:r>
-          </a:p>
-          <a:p>
-            <a:pPr>
-              <a:spcBef>
-                <a:spcPts val="400"/>
-              </a:spcBef>
-            </a:pPr>
-            <a:r>
-              <a:rPr sz="1400" b="0" i="0">
-                <a:solidFill>
-                  <a:srgbClr val="333333"/>
-                </a:solidFill>
-                <a:latin typeface="Calibri"/>
-              </a:rPr>
-              <a:t>Subir evidencias al paquete CloudLite (Drive/repo) y a la plataforma del curso (la plataforma del curso) en la fecha que indique el docente.</a:t>
-            </a:r>
-          </a:p>
-        </p:txBody>
-      </p:sp>
-      <p:sp>
-        <p:nvSpPr>
-          <p:cNvPr id="11" name="Rounded Rectangle 10"/>
-          <p:cNvSpPr/>
-          <p:nvPr/>
-        </p:nvSpPr>
-        <p:spPr>
-          <a:xfrm>
-            <a:off x="457200" y="3694176"/>
-            <a:ext cx="11277295" cy="1051560"/>
-          </a:xfrm>
-          <a:prstGeom prst="roundRect">
-            <a:avLst>
-              <a:gd name="adj" fmla="val 12000"/>
-            </a:avLst>
-          </a:prstGeom>
-          <a:solidFill>
-            <a:srgbClr val="FBE4E4"/>
-          </a:solidFill>
-          <a:ln>
-            <a:noFill/>
-          </a:ln>
-        </p:spPr>
-        <p:style>
-          <a:lnRef idx="1">
-            <a:schemeClr val="accent1"/>
-          </a:lnRef>
-          <a:fillRef idx="3">
-            <a:schemeClr val="accent1"/>
-          </a:fillRef>
-          <a:effectRef idx="2">
-            <a:schemeClr val="accent1"/>
-          </a:effectRef>
-          <a:fontRef idx="minor">
-            <a:schemeClr val="lt1"/>
-          </a:fontRef>
-        </p:style>
-        <p:txBody>
-          <a:bodyPr rtlCol="0" anchor="ctr"/>
-          <a:lstStyle/>
-          <a:p>
-            <a:pPr algn="ctr"/>
-          </a:p>
-        </p:txBody>
-      </p:sp>
-      <p:sp>
-        <p:nvSpPr>
-          <p:cNvPr id="12" name="Rectangle 11"/>
-          <p:cNvSpPr/>
-          <p:nvPr/>
-        </p:nvSpPr>
-        <p:spPr>
-          <a:xfrm>
-            <a:off x="457200" y="3694176"/>
-            <a:ext cx="128016" cy="1051560"/>
-          </a:xfrm>
-          <a:prstGeom prst="rect">
-            <a:avLst/>
-          </a:prstGeom>
-          <a:solidFill>
-            <a:srgbClr val="A02030"/>
-          </a:solidFill>
-          <a:ln>
-            <a:noFill/>
-          </a:ln>
-        </p:spPr>
-        <p:style>
-          <a:lnRef idx="1">
-            <a:schemeClr val="accent1"/>
-          </a:lnRef>
-          <a:fillRef idx="3">
-            <a:schemeClr val="accent1"/>
-          </a:fillRef>
-          <a:effectRef idx="2">
-            <a:schemeClr val="accent1"/>
-          </a:effectRef>
-          <a:fontRef idx="minor">
-            <a:schemeClr val="lt1"/>
-          </a:fontRef>
-        </p:style>
-        <p:txBody>
-          <a:bodyPr rtlCol="0" anchor="ctr"/>
-          <a:lstStyle/>
-          <a:p>
-            <a:pPr algn="ctr"/>
-          </a:p>
-        </p:txBody>
-      </p:sp>
-      <p:sp>
-        <p:nvSpPr>
-          <p:cNvPr id="13" name="TextBox 12"/>
-          <p:cNvSpPr txBox="1"/>
-          <p:nvPr/>
-        </p:nvSpPr>
-        <p:spPr>
-          <a:xfrm>
-            <a:off x="777240" y="3831336"/>
-            <a:ext cx="10774375" cy="822959"/>
-          </a:xfrm>
-          <a:prstGeom prst="rect">
-            <a:avLst/>
-          </a:prstGeom>
-          <a:noFill/>
-        </p:spPr>
-        <p:txBody>
-          <a:bodyPr wrap="square">
-            <a:spAutoFit/>
-          </a:bodyPr>
-          <a:lstStyle/>
-          <a:p>
-            <a:r>
-              <a:rPr sz="1200" b="1" i="0">
-                <a:solidFill>
-                  <a:srgbClr val="A02030"/>
-                </a:solidFill>
-                <a:latin typeface="Calibri"/>
-              </a:rPr>
-              <a:t>Atención</a:t>
-            </a:r>
-          </a:p>
-          <a:p>
-            <a:pPr>
-              <a:spcBef>
-                <a:spcPts val="400"/>
-              </a:spcBef>
-            </a:pPr>
-            <a:r>
-              <a:rPr sz="1400" b="0" i="0">
-                <a:solidFill>
-                  <a:srgbClr val="333333"/>
-                </a:solidFill>
-                <a:latin typeface="Calibri"/>
-              </a:rPr>
-              <a:t>Sin cloud de pago ni instalaciones obligatorias de hipervisores/Docker Desktop.</a:t>
-            </a:r>
-          </a:p>
-        </p:txBody>
-      </p:sp>
-      <p:sp>
-        <p:nvSpPr>
-          <p:cNvPr id="14" name="TextBox 13"/>
-          <p:cNvSpPr txBox="1"/>
-          <p:nvPr/>
-        </p:nvSpPr>
-        <p:spPr>
-          <a:xfrm>
-            <a:off x="11185855" y="6473952"/>
-            <a:ext cx="640080" cy="274320"/>
-          </a:xfrm>
-          <a:prstGeom prst="rect">
-            <a:avLst/>
-          </a:prstGeom>
-          <a:noFill/>
-        </p:spPr>
-        <p:txBody>
-          <a:bodyPr wrap="square">
-            <a:spAutoFit/>
-          </a:bodyPr>
-          <a:lstStyle/>
-          <a:p>
-            <a:pPr algn="r"/>
-            <a:r>
-              <a:rPr sz="1100" b="0" i="0">
-                <a:solidFill>
-                  <a:srgbClr val="666666"/>
-                </a:solidFill>
-                <a:latin typeface="Calibri"/>
-              </a:rPr>
-              <a:t>24</a:t>
-            </a:r>
-          </a:p>
-        </p:txBody>
-      </p:sp>
-    </p:spTree>
-  </p:cSld>
-  <p:clrMapOvr>
-    <a:masterClrMapping/>
-  </p:clrMapOvr>
-</p:sld>
-</file>
-
-<file path=ppt/slides/slide25.xml><?xml version="1.0" encoding="utf-8"?>
-<p:sld xmlns:a="http://schemas.openxmlformats.org/drawingml/2006/main" xmlns:p="http://schemas.openxmlformats.org/presentationml/2006/main" xmlns:r="http://schemas.openxmlformats.org/officeDocument/2006/relationships">
-  <p:cSld>
-    <p:bg>
-      <p:bgPr>
-        <a:solidFill>
-          <a:srgbClr val="FFFFFF"/>
-        </a:solidFill>
-        <a:effectLst/>
-      </p:bgPr>
-    </p:bg>
-    <p:spTree>
-      <p:nvGrpSpPr>
-        <p:cNvPr id="1" name=""/>
-        <p:cNvGrpSpPr/>
-        <p:nvPr/>
-      </p:nvGrpSpPr>
-      <p:grpSpPr/>
-      <p:sp>
-        <p:nvSpPr>
-          <p:cNvPr id="2" name="Rectangle 1"/>
-          <p:cNvSpPr/>
-          <p:nvPr/>
-        </p:nvSpPr>
-        <p:spPr>
-          <a:xfrm>
-            <a:off x="0" y="0"/>
-            <a:ext cx="12191695" cy="164592"/>
-          </a:xfrm>
-          <a:prstGeom prst="rect">
-            <a:avLst/>
-          </a:prstGeom>
-          <a:solidFill>
-            <a:srgbClr val="269CCB"/>
-          </a:solidFill>
-          <a:ln>
-            <a:noFill/>
-          </a:ln>
-        </p:spPr>
-        <p:style>
-          <a:lnRef idx="1">
-            <a:schemeClr val="accent1"/>
-          </a:lnRef>
-          <a:fillRef idx="3">
-            <a:schemeClr val="accent1"/>
-          </a:fillRef>
-          <a:effectRef idx="2">
-            <a:schemeClr val="accent1"/>
-          </a:effectRef>
-          <a:fontRef idx="minor">
-            <a:schemeClr val="lt1"/>
-          </a:fontRef>
-        </p:style>
-        <p:txBody>
-          <a:bodyPr rtlCol="0" anchor="ctr"/>
-          <a:lstStyle/>
-          <a:p>
-            <a:pPr algn="ctr"/>
-          </a:p>
-        </p:txBody>
-      </p:sp>
-      <p:pic>
-        <p:nvPicPr>
-          <p:cNvPr id="3" name="Picture 2" descr="logo_uniajc_color.png"/>
-          <p:cNvPicPr>
-            <a:picLocks noChangeAspect="1"/>
-          </p:cNvPicPr>
-          <p:nvPr/>
-        </p:nvPicPr>
-        <p:blipFill>
-          <a:blip r:embed="rId2"/>
-          <a:stretch>
-            <a:fillRect/>
-          </a:stretch>
-        </p:blipFill>
-        <p:spPr>
-          <a:xfrm>
-            <a:off x="10271455" y="5998464"/>
-            <a:ext cx="1463040" cy="643233"/>
-          </a:xfrm>
-          <a:prstGeom prst="rect">
-            <a:avLst/>
-          </a:prstGeom>
-        </p:spPr>
-      </p:pic>
-      <p:sp>
-        <p:nvSpPr>
-          <p:cNvPr id="4" name="TextBox 3"/>
-          <p:cNvSpPr txBox="1"/>
-          <p:nvPr/>
-        </p:nvSpPr>
-        <p:spPr>
-          <a:xfrm>
             <a:off x="457200" y="1737360"/>
             <a:ext cx="11277295" cy="1097280"/>
           </a:xfrm>
@@ -8661,7 +7746,7 @@
                 </a:solidFill>
                 <a:latin typeface="Calibri"/>
               </a:rPr>
-              <a:t>Clase 10 · PI en movimiento</a:t>
+              <a:t>Clase 10 · cierre conceptual</a:t>
             </a:r>
           </a:p>
         </p:txBody>
@@ -8700,7 +7785,7 @@
                 </a:solidFill>
                 <a:latin typeface="Calibri"/>
               </a:rPr>
-              <a:t>Estimación cualitativa de costos + notas de sostenibilidad</a:t>
+              <a:t>Identificar drivers de costo (cómputo, datos, transferencia, idle).</a:t>
             </a:r>
           </a:p>
           <a:p>
@@ -8716,7 +7801,7 @@
                 </a:solidFill>
                 <a:latin typeface="Calibri"/>
               </a:rPr>
-              <a:t>Evidencia: Sección Costos/Sostenibilidad del informe (bajo/medio + drivers)</a:t>
+              <a:t>Proponer 3 apalancamientos de ahorro sin romper el diseño.</a:t>
             </a:r>
           </a:p>
           <a:p>
@@ -8732,7 +7817,7 @@
                 </a:solidFill>
                 <a:latin typeface="Calibri"/>
               </a:rPr>
-              <a:t>Siguiente paso = siguiente hito del PI CloudLite</a:t>
+              <a:t>Redactar sostenibilidad (apagado de labs, imágenes ligeras, sobredimensionamiento).</a:t>
             </a:r>
           </a:p>
         </p:txBody>
@@ -8767,7 +7852,7 @@
                 </a:solidFill>
                 <a:latin typeface="Calibri"/>
               </a:rPr>
-              <a:t>Teoría al servicio del proyecto</a:t>
+              <a:t>Teoría al servicio del diseño</a:t>
             </a:r>
           </a:p>
         </p:txBody>
@@ -10910,4 +9995,324 @@
   </a:objectDefaults>
   <a:extraClrSchemeLst/>
 </a:theme>
+</file>
+
+<file path=ppt/theme/theme2.xml><?xml version="1.0" encoding="utf-8"?>
+<a:theme xmlns:a="http://schemas.openxmlformats.org/drawingml/2006/main" name="Office Theme">
+  <a:themeElements>
+    <a:clrScheme name="Office">
+      <a:dk1>
+        <a:sysClr val="windowText" lastClr="000000"/>
+      </a:dk1>
+      <a:lt1>
+        <a:sysClr val="window" lastClr="FFFFFF"/>
+      </a:lt1>
+      <a:dk2>
+        <a:srgbClr val="1F497D"/>
+      </a:dk2>
+      <a:lt2>
+        <a:srgbClr val="EEECE1"/>
+      </a:lt2>
+      <a:accent1>
+        <a:srgbClr val="4F81BD"/>
+      </a:accent1>
+      <a:accent2>
+        <a:srgbClr val="C0504D"/>
+      </a:accent2>
+      <a:accent3>
+        <a:srgbClr val="9BBB59"/>
+      </a:accent3>
+      <a:accent4>
+        <a:srgbClr val="8064A2"/>
+      </a:accent4>
+      <a:accent5>
+        <a:srgbClr val="4BACC6"/>
+      </a:accent5>
+      <a:accent6>
+        <a:srgbClr val="F79646"/>
+      </a:accent6>
+      <a:hlink>
+        <a:srgbClr val="0000FF"/>
+      </a:hlink>
+      <a:folHlink>
+        <a:srgbClr val="800080"/>
+      </a:folHlink>
+    </a:clrScheme>
+    <a:fontScheme name="Office">
+      <a:majorFont>
+        <a:latin typeface="Calibri"/>
+        <a:ea typeface=""/>
+        <a:cs typeface=""/>
+        <a:font script="Jpan" typeface="ＭＳ Ｐゴシック"/>
+        <a:font script="Hang" typeface="맑은 고딕"/>
+        <a:font script="Hans" typeface="宋体"/>
+        <a:font script="Hant" typeface="新細明體"/>
+        <a:font script="Arab" typeface="Times New Roman"/>
+        <a:font script="Hebr" typeface="Times New Roman"/>
+        <a:font script="Thai" typeface="Angsana New"/>
+        <a:font script="Ethi" typeface="Nyala"/>
+        <a:font script="Beng" typeface="Vrinda"/>
+        <a:font script="Gujr" typeface="Shruti"/>
+        <a:font script="Khmr" typeface="MoolBoran"/>
+        <a:font script="Knda" typeface="Tunga"/>
+        <a:font script="Guru" typeface="Raavi"/>
+        <a:font script="Cans" typeface="Euphemia"/>
+        <a:font script="Cher" typeface="Plantagenet Cherokee"/>
+        <a:font script="Yiii" typeface="Microsoft Yi Baiti"/>
+        <a:font script="Tibt" typeface="Microsoft Himalaya"/>
+        <a:font script="Thaa" typeface="MV Boli"/>
+        <a:font script="Deva" typeface="Mangal"/>
+        <a:font script="Telu" typeface="Gautami"/>
+        <a:font script="Taml" typeface="Latha"/>
+        <a:font script="Syrc" typeface="Estrangelo Edessa"/>
+        <a:font script="Orya" typeface="Kalinga"/>
+        <a:font script="Mlym" typeface="Kartika"/>
+        <a:font script="Laoo" typeface="DokChampa"/>
+        <a:font script="Sinh" typeface="Iskoola Pota"/>
+        <a:font script="Mong" typeface="Mongolian Baiti"/>
+        <a:font script="Viet" typeface="Times New Roman"/>
+        <a:font script="Uigh" typeface="Microsoft Uighur"/>
+        <a:font script="Geor" typeface="Sylfaen"/>
+      </a:majorFont>
+      <a:minorFont>
+        <a:latin typeface="Calibri"/>
+        <a:ea typeface=""/>
+        <a:cs typeface=""/>
+        <a:font script="Jpan" typeface="ＭＳ Ｐゴシック"/>
+        <a:font script="Hang" typeface="맑은 고딕"/>
+        <a:font script="Hans" typeface="宋体"/>
+        <a:font script="Hant" typeface="新細明體"/>
+        <a:font script="Arab" typeface="Arial"/>
+        <a:font script="Hebr" typeface="Arial"/>
+        <a:font script="Thai" typeface="Cordia New"/>
+        <a:font script="Ethi" typeface="Nyala"/>
+        <a:font script="Beng" typeface="Vrinda"/>
+        <a:font script="Gujr" typeface="Shruti"/>
+        <a:font script="Khmr" typeface="DaunPenh"/>
+        <a:font script="Knda" typeface="Tunga"/>
+        <a:font script="Guru" typeface="Raavi"/>
+        <a:font script="Cans" typeface="Euphemia"/>
+        <a:font script="Cher" typeface="Plantagenet Cherokee"/>
+        <a:font script="Yiii" typeface="Microsoft Yi Baiti"/>
+        <a:font script="Tibt" typeface="Microsoft Himalaya"/>
+        <a:font script="Thaa" typeface="MV Boli"/>
+        <a:font script="Deva" typeface="Mangal"/>
+        <a:font script="Telu" typeface="Gautami"/>
+        <a:font script="Taml" typeface="Latha"/>
+        <a:font script="Syrc" typeface="Estrangelo Edessa"/>
+        <a:font script="Orya" typeface="Kalinga"/>
+        <a:font script="Mlym" typeface="Kartika"/>
+        <a:font script="Laoo" typeface="DokChampa"/>
+        <a:font script="Sinh" typeface="Iskoola Pota"/>
+        <a:font script="Mong" typeface="Mongolian Baiti"/>
+        <a:font script="Viet" typeface="Arial"/>
+        <a:font script="Uigh" typeface="Microsoft Uighur"/>
+        <a:font script="Geor" typeface="Sylfaen"/>
+      </a:minorFont>
+    </a:fontScheme>
+    <a:fmtScheme name="Office">
+      <a:fillStyleLst>
+        <a:solidFill>
+          <a:schemeClr val="phClr"/>
+        </a:solidFill>
+        <a:gradFill rotWithShape="1">
+          <a:gsLst>
+            <a:gs pos="0">
+              <a:schemeClr val="phClr">
+                <a:tint val="50000"/>
+                <a:satMod val="300000"/>
+              </a:schemeClr>
+            </a:gs>
+            <a:gs pos="35000">
+              <a:schemeClr val="phClr">
+                <a:tint val="37000"/>
+                <a:satMod val="300000"/>
+              </a:schemeClr>
+            </a:gs>
+            <a:gs pos="100000">
+              <a:schemeClr val="phClr">
+                <a:tint val="15000"/>
+                <a:satMod val="350000"/>
+              </a:schemeClr>
+            </a:gs>
+          </a:gsLst>
+          <a:lin ang="16200000" scaled="1"/>
+        </a:gradFill>
+        <a:gradFill rotWithShape="1">
+          <a:gsLst>
+            <a:gs pos="0">
+              <a:schemeClr val="phClr">
+                <a:tint val="100000"/>
+                <a:shade val="100000"/>
+                <a:satMod val="130000"/>
+              </a:schemeClr>
+            </a:gs>
+            <a:gs pos="100000">
+              <a:schemeClr val="phClr">
+                <a:tint val="50000"/>
+                <a:shade val="100000"/>
+                <a:satMod val="350000"/>
+              </a:schemeClr>
+            </a:gs>
+          </a:gsLst>
+          <a:lin ang="16200000" scaled="0"/>
+        </a:gradFill>
+      </a:fillStyleLst>
+      <a:lnStyleLst>
+        <a:ln w="9525" cap="flat" cmpd="sng" algn="ctr">
+          <a:solidFill>
+            <a:schemeClr val="phClr">
+              <a:shade val="95000"/>
+              <a:satMod val="105000"/>
+            </a:schemeClr>
+          </a:solidFill>
+          <a:prstDash val="solid"/>
+        </a:ln>
+        <a:ln w="25400" cap="flat" cmpd="sng" algn="ctr">
+          <a:solidFill>
+            <a:schemeClr val="phClr"/>
+          </a:solidFill>
+          <a:prstDash val="solid"/>
+        </a:ln>
+        <a:ln w="38100" cap="flat" cmpd="sng" algn="ctr">
+          <a:solidFill>
+            <a:schemeClr val="phClr"/>
+          </a:solidFill>
+          <a:prstDash val="solid"/>
+        </a:ln>
+      </a:lnStyleLst>
+      <a:effectStyleLst>
+        <a:effectStyle>
+          <a:effectLst>
+            <a:outerShdw blurRad="40000" dist="20000" dir="5400000" rotWithShape="0">
+              <a:srgbClr val="000000">
+                <a:alpha val="38000"/>
+              </a:srgbClr>
+            </a:outerShdw>
+          </a:effectLst>
+        </a:effectStyle>
+        <a:effectStyle>
+          <a:effectLst>
+            <a:outerShdw blurRad="40000" dist="23000" dir="5400000" rotWithShape="0">
+              <a:srgbClr val="000000">
+                <a:alpha val="35000"/>
+              </a:srgbClr>
+            </a:outerShdw>
+          </a:effectLst>
+        </a:effectStyle>
+        <a:effectStyle>
+          <a:effectLst>
+            <a:outerShdw blurRad="40000" dist="23000" dir="5400000" rotWithShape="0">
+              <a:srgbClr val="000000">
+                <a:alpha val="35000"/>
+              </a:srgbClr>
+            </a:outerShdw>
+          </a:effectLst>
+          <a:scene3d>
+            <a:camera prst="orthographicFront">
+              <a:rot lat="0" lon="0" rev="0"/>
+            </a:camera>
+            <a:lightRig rig="threePt" dir="t">
+              <a:rot lat="0" lon="0" rev="1200000"/>
+            </a:lightRig>
+          </a:scene3d>
+          <a:sp3d>
+            <a:bevelT w="63500" h="25400"/>
+          </a:sp3d>
+        </a:effectStyle>
+      </a:effectStyleLst>
+      <a:bgFillStyleLst>
+        <a:solidFill>
+          <a:schemeClr val="phClr"/>
+        </a:solidFill>
+        <a:gradFill rotWithShape="1">
+          <a:gsLst>
+            <a:gs pos="0">
+              <a:schemeClr val="phClr">
+                <a:tint val="40000"/>
+                <a:satMod val="350000"/>
+              </a:schemeClr>
+            </a:gs>
+            <a:gs pos="40000">
+              <a:schemeClr val="phClr">
+                <a:tint val="45000"/>
+                <a:shade val="99000"/>
+                <a:satMod val="350000"/>
+              </a:schemeClr>
+            </a:gs>
+            <a:gs pos="100000">
+              <a:schemeClr val="phClr">
+                <a:shade val="20000"/>
+                <a:satMod val="255000"/>
+              </a:schemeClr>
+            </a:gs>
+          </a:gsLst>
+          <a:path path="circle">
+            <a:fillToRect l="50000" t="-80000" r="50000" b="180000"/>
+          </a:path>
+        </a:gradFill>
+        <a:gradFill rotWithShape="1">
+          <a:gsLst>
+            <a:gs pos="0">
+              <a:schemeClr val="phClr">
+                <a:tint val="80000"/>
+                <a:satMod val="300000"/>
+              </a:schemeClr>
+            </a:gs>
+            <a:gs pos="100000">
+              <a:schemeClr val="phClr">
+                <a:shade val="30000"/>
+                <a:satMod val="200000"/>
+              </a:schemeClr>
+            </a:gs>
+          </a:gsLst>
+          <a:path path="circle">
+            <a:fillToRect l="50000" t="50000" r="50000" b="50000"/>
+          </a:path>
+        </a:gradFill>
+      </a:bgFillStyleLst>
+    </a:fmtScheme>
+  </a:themeElements>
+  <a:objectDefaults>
+    <a:spDef>
+      <a:spPr/>
+      <a:bodyPr/>
+      <a:lstStyle/>
+      <a:style>
+        <a:lnRef idx="1">
+          <a:schemeClr val="accent1"/>
+        </a:lnRef>
+        <a:fillRef idx="3">
+          <a:schemeClr val="accent1"/>
+        </a:fillRef>
+        <a:effectRef idx="2">
+          <a:schemeClr val="accent1"/>
+        </a:effectRef>
+        <a:fontRef idx="minor">
+          <a:schemeClr val="lt1"/>
+        </a:fontRef>
+      </a:style>
+    </a:spDef>
+    <a:lnDef>
+      <a:spPr/>
+      <a:bodyPr/>
+      <a:lstStyle/>
+      <a:style>
+        <a:lnRef idx="2">
+          <a:schemeClr val="accent1"/>
+        </a:lnRef>
+        <a:fillRef idx="0">
+          <a:schemeClr val="accent1"/>
+        </a:fillRef>
+        <a:effectRef idx="1">
+          <a:schemeClr val="accent1"/>
+        </a:effectRef>
+        <a:fontRef idx="minor">
+          <a:schemeClr val="tx1"/>
+        </a:fontRef>
+      </a:style>
+    </a:lnDef>
+  </a:objectDefaults>
+  <a:extraClrSchemeLst/>
+</a:theme>
 </file>
--- a/Arquitectura de Sistemas Computacionales/Clases/Clase 10 - Costos y sostenibilidad cloud/Presentacion.pptx
+++ b/Arquitectura de Sistemas Computacionales/Clases/Clase 10 - Costos y sostenibilidad cloud/Presentacion.pptx
@@ -756,12 +756,6 @@
           <a:lstStyle/>
           <a:p>
             <a:r>
-              <a:t>El primer ejemplo anclado en CloudLite es la tabla del entregable, y el docente deberia recorrerla componente por componente.</a:t>
-            </a:r>
-          </a:p>
-          <a:p/>
-          <a:p>
-            <a:r>
               <a:t>El contenedor de la API queda en Medio, con driver instancias por horas encendidas.</a:t>
             </a:r>
           </a:p>
@@ -908,7 +902,7 @@
           <a:lstStyle/>
           <a:p>
             <a:r>
-              <a:t>De ahi sale el segundo bloque del entregable: tres acciones de right-sizing.</a:t>
+              <a:t>De ahi salen tres acciones de right-sizing.</a:t>
             </a:r>
           </a:p>
         </p:txBody>
@@ -4535,7 +4529,7 @@
                 </a:solidFill>
                 <a:latin typeface="Calibri"/>
               </a:rPr>
-              <a:t>Primer ejemplo: la tabla del entregable, componente por componente (1/2)</a:t>
+              <a:t>Primer ejemplo: la tabla de costos, componente por componente (1/2)</a:t>
             </a:r>
           </a:p>
         </p:txBody>
@@ -4561,6 +4555,22 @@
             <a:spAutoFit/>
           </a:bodyPr>
           <a:lstStyle/>
+          <a:p>
+            <a:pPr>
+              <a:spcAft>
+                <a:spcPts val="800"/>
+              </a:spcAft>
+            </a:pPr>
+            <a:r>
+              <a:rPr sz="2000" b="0" i="0">
+                <a:solidFill>
+                  <a:srgbClr val="333333"/>
+                </a:solidFill>
+                <a:latin typeface="Calibri"/>
+              </a:rPr>
+              <a:t>–   El primer ejemplo anclado en CloudLite es la tabla de costos, recorrida componente por componente.</a:t>
+            </a:r>
+          </a:p>
           <a:p>
             <a:pPr>
               <a:spcAft>
@@ -4803,7 +4813,7 @@
                 </a:solidFill>
                 <a:latin typeface="Calibri"/>
               </a:rPr>
-              <a:t>Primer ejemplo: la tabla del entregable, componente por componente (2/2)</a:t>
+              <a:t>Primer ejemplo: la tabla de costos, componente por componente (2/2)</a:t>
             </a:r>
           </a:p>
         </p:txBody>

--- a/Arquitectura de Sistemas Computacionales/Clases/Clase 10 - Costos y sostenibilidad cloud/Presentacion.pptx
+++ b/Arquitectura de Sistemas Computacionales/Clases/Clase 10 - Costos y sostenibilidad cloud/Presentacion.pptx
@@ -4635,6 +4635,22 @@
               <a:t>–   Y pasan a Medio si se implementan como un worker encendido de forma permanente: el mismo requisito con dos disenos y dos costos, que es exactamente el razonamiento que se evalua.</a:t>
             </a:r>
           </a:p>
+          <a:p>
+            <a:pPr>
+              <a:spcAft>
+                <a:spcPts val="800"/>
+              </a:spcAft>
+            </a:pPr>
+            <a:r>
+              <a:rPr sz="2000" b="0" i="0">
+                <a:solidFill>
+                  <a:srgbClr val="333333"/>
+                </a:solidFill>
+                <a:latin typeface="Calibri"/>
+              </a:rPr>
+              <a:t>–   Y hay un componente que sorprende, el monitoreo de la Clase 8: un sistema que registra cada peticion con detalle puede generar mas gigabytes de logs que de datos de negocio</a:t>
+            </a:r>
+          </a:p>
         </p:txBody>
       </p:sp>
       <p:sp>
@@ -4852,7 +4868,7 @@
                 </a:solidFill>
                 <a:latin typeface="Calibri"/>
               </a:rPr>
-              <a:t>–   Y hay un componente que sorprende, el monitoreo de la Clase 8: un sistema que registra cada peticion con detalle puede generar mas gigabytes de logs que de datos de negocio</a:t>
+              <a:t>–   Y la ingesta de logs se cobra por gigabyte; existen casos reales de equipos cuya observabilidad costaba mas que la aplicacion observada.</a:t>
             </a:r>
           </a:p>
           <a:p>
@@ -4868,7 +4884,23 @@
                 </a:solidFill>
                 <a:latin typeface="Calibri"/>
               </a:rPr>
-              <a:t>–   Y la ingesta de logs se cobra por gigabyte; existen casos reales de equipos cuya observabilidad costaba mas que la aplicacion observada.</a:t>
+              <a:t>–   Los cuatro conductores que explican casi toda la factura son: computo siempre encendido, transferencia de salida o egress, almacenamiento caliente y volumen de logs.</a:t>
+            </a:r>
+          </a:p>
+          <a:p>
+            <a:pPr>
+              <a:spcAft>
+                <a:spcPts val="800"/>
+              </a:spcAft>
+            </a:pPr>
+            <a:r>
+              <a:rPr sz="2000" b="0" i="0">
+                <a:solidFill>
+                  <a:srgbClr val="333333"/>
+                </a:solidFill>
+                <a:latin typeface="Calibri"/>
+              </a:rPr>
+              <a:t>–   Un error comun es costear solo el computo y olvidar el egress: en servicios que entregan archivos a muchos usuarios, la transferencia de salida puede superar al computo.</a:t>
             </a:r>
           </a:p>
         </p:txBody>
@@ -6195,6 +6227,22 @@
               <a:t>–   Hay ademas una decision de arquitectura con efecto directo: la intensidad de carbono de la electricidad varia fuerte entre regiones, asi que elegir region no es solo latencia y cumplimiento normativo.</a:t>
             </a:r>
           </a:p>
+          <a:p>
+            <a:pPr>
+              <a:spcAft>
+                <a:spcPts val="800"/>
+              </a:spcAft>
+            </a:pPr>
+            <a:r>
+              <a:rPr sz="2000" b="0" i="0">
+                <a:solidFill>
+                  <a:srgbClr val="333333"/>
+                </a:solidFill>
+                <a:latin typeface="Calibri"/>
+              </a:rPr>
+              <a:t>–   Y hay una tercera cara que el estudiante ignora: el costo humano de mantener el diseno.</a:t>
+            </a:r>
+          </a:p>
         </p:txBody>
       </p:sp>
       <p:sp>
@@ -6412,7 +6460,7 @@
                 </a:solidFill>
                 <a:latin typeface="Calibri"/>
               </a:rPr>
-              <a:t>–   Y hay una tercera cara que el estudiante ignora: el costo humano de mantener el diseno.</a:t>
+              <a:t>–   Una arquitectura de ocho servicios que un equipo de tres personas no puede operar es insostenible aunque la infraestructura sea gratis.</a:t>
             </a:r>
           </a:p>
           <a:p>
@@ -6428,7 +6476,23 @@
                 </a:solidFill>
                 <a:latin typeface="Calibri"/>
               </a:rPr>
-              <a:t>–   Una arquitectura de ocho servicios que un equipo de tres personas no puede operar es insostenible aunque la infraestructura sea gratis.</a:t>
+              <a:t>–   Un ejemplo en CloudLite: un monolito modular de un solo contenedor es mas sostenible para un equipo de 1 o 2 personas que cinco microservicios, porque tiene 1 pipeline, 1 despliegue y 1 lugar donde buscar un error.</a:t>
+            </a:r>
+          </a:p>
+          <a:p>
+            <a:pPr>
+              <a:spcAft>
+                <a:spcPts val="800"/>
+              </a:spcAft>
+            </a:pPr>
+            <a:r>
+              <a:rPr sz="2000" b="0" i="0">
+                <a:solidFill>
+                  <a:srgbClr val="333333"/>
+                </a:solidFill>
+                <a:latin typeface="Calibri"/>
+              </a:rPr>
+              <a:t>–   La cara ambiental tambien es medible: un entorno de pruebas apagado fuera del horario de trabajo consume menos de la mitad de las horas de computo de uno encendido todo el dia.</a:t>
             </a:r>
           </a:p>
         </p:txBody>
@@ -8334,6 +8398,92 @@
               <a:t>–   CloudLite: justifiquen por qué su diseño no es «siempre XL».</a:t>
             </a:r>
           </a:p>
+          <a:p>
+            <a:pPr>
+              <a:spcAft>
+                <a:spcPts val="800"/>
+              </a:spcAft>
+            </a:pPr>
+            <a:r>
+              <a:rPr sz="2000" b="0" i="0">
+                <a:solidFill>
+                  <a:srgbClr val="333333"/>
+                </a:solidFill>
+                <a:latin typeface="Calibri"/>
+              </a:rPr>
+              <a:t>–   Ejemplo: la base de datos siempre encendida es costo </a:t>
+            </a:r>
+            <a:r>
+              <a:rPr sz="2000" b="1" i="0">
+                <a:solidFill>
+                  <a:srgbClr val="333333"/>
+                </a:solidFill>
+                <a:latin typeface="Calibri"/>
+              </a:rPr>
+              <a:t>Medio</a:t>
+            </a:r>
+            <a:r>
+              <a:rPr sz="2000" b="0" i="0">
+                <a:solidFill>
+                  <a:srgbClr val="333333"/>
+                </a:solidFill>
+                <a:latin typeface="Calibri"/>
+              </a:rPr>
+              <a:t>; un worker que solo corre cuando hay mensajes en cola es </a:t>
+            </a:r>
+            <a:r>
+              <a:rPr sz="2000" b="1" i="0">
+                <a:solidFill>
+                  <a:srgbClr val="333333"/>
+                </a:solidFill>
+                <a:latin typeface="Calibri"/>
+              </a:rPr>
+              <a:t>Bajo</a:t>
+            </a:r>
+            <a:r>
+              <a:rPr sz="2000" b="0" i="0">
+                <a:solidFill>
+                  <a:srgbClr val="333333"/>
+                </a:solidFill>
+                <a:latin typeface="Calibri"/>
+              </a:rPr>
+              <a:t>.</a:t>
+            </a:r>
+          </a:p>
+          <a:p>
+            <a:pPr>
+              <a:spcAft>
+                <a:spcPts val="800"/>
+              </a:spcAft>
+            </a:pPr>
+            <a:r>
+              <a:rPr sz="2000" b="0" i="0">
+                <a:solidFill>
+                  <a:srgbClr val="333333"/>
+                </a:solidFill>
+                <a:latin typeface="Calibri"/>
+              </a:rPr>
+              <a:t>–   </a:t>
+            </a:r>
+            <a:r>
+              <a:rPr sz="2000" b="1" i="0">
+                <a:solidFill>
+                  <a:srgbClr val="333333"/>
+                </a:solidFill>
+                <a:latin typeface="Calibri"/>
+              </a:rPr>
+              <a:t>Egress</a:t>
+            </a:r>
+            <a:r>
+              <a:rPr sz="2000" b="0" i="0">
+                <a:solidFill>
+                  <a:srgbClr val="333333"/>
+                </a:solidFill>
+                <a:latin typeface="Calibri"/>
+              </a:rPr>
+              <a:t> = datos que salen del proveedor hacia internet; suele cobrarse por gigabyte, y la entrada casi nunca.</a:t>
+            </a:r>
+          </a:p>
         </p:txBody>
       </p:sp>
       <p:sp>
@@ -8568,6 +8718,74 @@
                 <a:latin typeface="Calibri"/>
               </a:rPr>
               <a:t>–   Relación con escalabilidad: escala cuando hay carga, no por vanidad.</a:t>
+            </a:r>
+          </a:p>
+          <a:p>
+            <a:pPr>
+              <a:spcAft>
+                <a:spcPts val="800"/>
+              </a:spcAft>
+            </a:pPr>
+            <a:r>
+              <a:rPr sz="2000" b="0" i="0">
+                <a:solidFill>
+                  <a:srgbClr val="333333"/>
+                </a:solidFill>
+                <a:latin typeface="Calibri"/>
+              </a:rPr>
+              <a:t>–   Sostenibilidad </a:t>
+            </a:r>
+            <a:r>
+              <a:rPr sz="2000" b="1" i="0">
+                <a:solidFill>
+                  <a:srgbClr val="333333"/>
+                </a:solidFill>
+                <a:latin typeface="Calibri"/>
+              </a:rPr>
+              <a:t>técnica</a:t>
+            </a:r>
+            <a:r>
+              <a:rPr sz="2000" b="0" i="0">
+                <a:solidFill>
+                  <a:srgbClr val="333333"/>
+                </a:solidFill>
+                <a:latin typeface="Calibri"/>
+              </a:rPr>
+              <a:t>: que el equipo pueda operar el diseño. </a:t>
+            </a:r>
+            <a:r>
+              <a:rPr sz="2000" b="1" i="0">
+                <a:solidFill>
+                  <a:srgbClr val="333333"/>
+                </a:solidFill>
+                <a:latin typeface="Calibri"/>
+              </a:rPr>
+              <a:t>Ambiental</a:t>
+            </a:r>
+            <a:r>
+              <a:rPr sz="2000" b="0" i="0">
+                <a:solidFill>
+                  <a:srgbClr val="333333"/>
+                </a:solidFill>
+                <a:latin typeface="Calibri"/>
+              </a:rPr>
+              <a:t>: no consumir cómputo que nadie usa.</a:t>
+            </a:r>
+          </a:p>
+          <a:p>
+            <a:pPr>
+              <a:spcAft>
+                <a:spcPts val="800"/>
+              </a:spcAft>
+            </a:pPr>
+            <a:r>
+              <a:rPr sz="2000" b="0" i="0">
+                <a:solidFill>
+                  <a:srgbClr val="333333"/>
+                </a:solidFill>
+                <a:latin typeface="Calibri"/>
+              </a:rPr>
+              <a:t>–   Ejemplo: una imagen slim pesa decenas de MB frente a cerca de 1 GB de una completa: menos almacenamiento, menos transferencia y despliegues más rápidos.</a:t>
             </a:r>
           </a:p>
         </p:txBody>

--- a/Arquitectura de Sistemas Computacionales/Clases/Clase 10 - Costos y sostenibilidad cloud/Presentacion.pptx
+++ b/Arquitectura de Sistemas Computacionales/Clases/Clase 10 - Costos y sostenibilidad cloud/Presentacion.pptx
@@ -4257,7 +4257,7 @@
                 </a:solidFill>
                 <a:latin typeface="Calibri"/>
               </a:rPr>
-              <a:t>Actividad autónoma · sección PI</a:t>
+              <a:t>Actividad autónoma · sección </a:t>
             </a:r>
           </a:p>
         </p:txBody>
@@ -4348,7 +4348,7 @@
                 </a:solidFill>
                 <a:latin typeface="Calibri"/>
               </a:rPr>
-              <a:t>Conceptos del tema, ejemplos resueltos sobre CloudLite y cierre conceptual.</a:t>
+              <a:t>Conceptos del tema, ejemplos resueltos sobre la app y cierre conceptual.</a:t>
             </a:r>
           </a:p>
         </p:txBody>
@@ -4568,7 +4568,7 @@
                 </a:solidFill>
                 <a:latin typeface="Calibri"/>
               </a:rPr>
-              <a:t>–   El primer ejemplo anclado en CloudLite es la tabla de costos, recorrida componente por componente.</a:t>
+              <a:t>–   El primer ejemplo anclado en la app es la tabla de costos, recorrida componente por componente.</a:t>
             </a:r>
           </a:p>
           <a:p>
@@ -5120,7 +5120,7 @@
                 </a:solidFill>
                 <a:latin typeface="Calibri"/>
               </a:rPr>
-              <a:t>–   Suponga que CloudLite permite subir comprobantes en PDF o imagenes y que en un semestre acumula 5000 archivos de 2 MB, o sea 10 GB.</a:t>
+              <a:t>–   Suponga que la app permite subir comprobantes en PDF o imagenes y que en un semestre acumula 5000 archivos de 2 MB, o sea 10 GB.</a:t>
             </a:r>
           </a:p>
           <a:p>
@@ -6476,7 +6476,7 @@
                 </a:solidFill>
                 <a:latin typeface="Calibri"/>
               </a:rPr>
-              <a:t>–   Un ejemplo en CloudLite: un monolito modular de un solo contenedor es mas sostenible para un equipo de 1 o 2 personas que cinco microservicios, porque tiene 1 pipeline, 1 despliegue y 1 lugar donde buscar un error.</a:t>
+              <a:t>–   Un ejemplo en la app: un monolito modular de un solo contenedor es mas sostenible para un equipo de 1 o 2 personas que cinco microservicios, porque tiene 1 pipeline, 1 despliegue y 1 lugar donde buscar un error.</a:t>
             </a:r>
           </a:p>
           <a:p>
@@ -7323,7 +7323,7 @@
                 </a:solidFill>
                 <a:latin typeface="Calibri"/>
               </a:rPr>
-              <a:t> Conceptos del tema, uno por lámina, con ejemplos sobre CloudLite.</a:t>
+              <a:t> Conceptos del tema, uno por lámina, con ejemplos sobre la app.</a:t>
             </a:r>
           </a:p>
           <a:p>
@@ -8395,7 +8395,7 @@
                 </a:solidFill>
                 <a:latin typeface="Calibri"/>
               </a:rPr>
-              <a:t>–   CloudLite: justifiquen por qué su diseño no es «siempre XL».</a:t>
+              <a:t>–   la app: justifiquen por qué su diseño no es «siempre XL».</a:t>
             </a:r>
           </a:p>
           <a:p>
@@ -9234,7 +9234,7 @@
                 </a:solidFill>
                 <a:latin typeface="Calibri"/>
               </a:rPr>
-              <a:t>CloudLite no tiene factura real, y por que igual se estima (1/2)</a:t>
+              <a:t>La app no tiene factura real, y por que igual se estima (1/2)</a:t>
             </a:r>
           </a:p>
         </p:txBody>
@@ -9273,7 +9273,7 @@
                 </a:solidFill>
                 <a:latin typeface="Calibri"/>
               </a:rPr>
-              <a:t>–   CloudLite App no tiene facturacion real y no la va a tener: el curso prohibe cuentas cloud de pago y tarjetas de credito, y todo se trabaja con draw.io, Excalidraw, Killercoda y el free tier de GitHub Actions.</a:t>
+              <a:t>–   la app no tiene facturacion real y no la va a tener: el curso prohibe cuentas cloud de pago y tarjetas de credito, y todo se trabaja con draw.io, Excalidraw, Killercoda y el free tier de GitHub Actions.</a:t>
             </a:r>
           </a:p>
           <a:p>
@@ -9486,7 +9486,7 @@
                 </a:solidFill>
                 <a:latin typeface="Calibri"/>
               </a:rPr>
-              <a:t>CloudLite no tiene factura real, y por que igual se estima (2/2)</a:t>
+              <a:t>La app no tiene factura real, y por que igual se estima (2/2)</a:t>
             </a:r>
           </a:p>
         </p:txBody>

--- a/Arquitectura de Sistemas Computacionales/Clases/Clase 10 - Costos y sostenibilidad cloud/Presentacion.pptx
+++ b/Arquitectura de Sistemas Computacionales/Clases/Clase 10 - Costos y sostenibilidad cloud/Presentacion.pptx
@@ -24,8 +24,6 @@
     <p:sldId id="272" r:id="rId24"/>
     <p:sldId id="273" r:id="rId25"/>
     <p:sldId id="274" r:id="rId26"/>
-    <p:sldId id="275" r:id="rId27"/>
-    <p:sldId id="276" r:id="rId28"/>
   </p:sldIdLst>
   <p:sldSz cx="12191695" cy="6858000" type="screen4x3"/>
   <p:notesSz cx="6858000" cy="9144000"/>
@@ -522,19 +520,25 @@
           <a:lstStyle/>
           <a:p>
             <a:r>
-              <a:t>Conviene empezar por la economia, porque sin ella el tema suena a contabilidad.</a:t>
+              <a:t>Cuando cada recurso tiene precio unitario, casi cualquier decision de diseno se convierte en una cifra mensual y el arquitecto pasa a ser corresponsable del gasto.</a:t>
             </a:r>
           </a:p>
           <a:p/>
           <a:p>
             <a:r>
-              <a:t>Cuando cada recurso tiene precio unitario, casi cualquier decision de diseno se convierte en una cifra mensual y el arquitecto pasa a ser corresponsable del gasto.</a:t>
+              <a:t>Esa es la razon por la que este tema vive en un curso de arquitectura y no en uno de administracion.</a:t>
             </a:r>
           </a:p>
           <a:p/>
           <a:p>
             <a:r>
-              <a:t>Esa es la razon por la que este tema vive en un curso de arquitectura y no en uno de administracion.</a:t>
+              <a:t>(No se proyecta) Esta clase es autonoma por festivo: no hay encuentro sincronico y este fundamento se publica tal cual como material de lectura, asi que debe sostener por si solo la comprension del tema.</a:t>
+            </a:r>
+          </a:p>
+          <a:p/>
+          <a:p>
+            <a:r>
+              <a:t>(No se proyecta) Conviene empezar por la economia, porque sin ella el tema suena a contabilidad.</a:t>
             </a:r>
           </a:p>
         </p:txBody>
@@ -607,6 +611,12 @@
               <a:t>Eso no impide el analisis de costo, solo cambia la escala de medida.</a:t>
             </a:r>
           </a:p>
+          <a:p/>
+          <a:p>
+            <a:r>
+              <a:t>(No se proyecta) Un componente al que el estudiante no le sabe poner driver es un componente que todavia no entiende.</a:t>
+            </a:r>
+          </a:p>
         </p:txBody>
       </p:sp>
       <p:sp>
@@ -674,19 +684,19 @@
           <a:lstStyle/>
           <a:p>
             <a:r>
-              <a:t>El docente debe poder citar ordenes de magnitud, y conviene decir en voz alta que son convenciones aproximadas de precios de lista y no reglas duras: las cifras cambian por proveedor, region y ano, pero las proporciones se mantienen estables.</a:t>
+              <a:t>Una base de datos gestionada cuesta entre dos y tres veces la maquina desnuda equivalente, porque incluye respaldos, parches y conmutacion por falla.</a:t>
             </a:r>
           </a:p>
           <a:p/>
           <a:p>
             <a:r>
-              <a:t>Una base de datos gestionada cuesta entre dos y tres veces la maquina desnuda equivalente, porque incluye respaldos, parches y conmutacion por falla.</a:t>
+              <a:t>Una funcion serverless suele traer free tier de alrededor de un millon de invocaciones mensuales, asi que un componente poco usado cuesta cero de verdad.</a:t>
             </a:r>
           </a:p>
           <a:p/>
           <a:p>
             <a:r>
-              <a:t>Una funcion serverless suele traer free tier de alrededor de un millon de invocaciones mensuales, asi que un componente poco usado cuesta cero de verdad.</a:t>
+              <a:t>(No se proyecta) El docente debe poder citar ordenes de magnitud, y conviene decir en voz alta que son convenciones aproximadas de precios de lista y no reglas duras: las cifras cambian por proveedor, region y ano, pero las proporciones se mantienen estables.</a:t>
             </a:r>
           </a:p>
         </p:txBody>
@@ -759,6 +769,12 @@
               <a:t>El contenedor de la API queda en Medio, con driver instancias por horas encendidas.</a:t>
             </a:r>
           </a:p>
+          <a:p/>
+          <a:p>
+            <a:r>
+              <a:t>(No se proyecta) Y hay un componente que sorprende, el monitoreo de la Clase 8: un sistema que registra cada peticion con detalle puede generar mas gigabytes de logs que de datos de negocio, y la ingesta de logs se cobra por gigabyte; existen casos reales de equipos cuya observabilidad costaba mas que la aplicacion observada.</a:t>
+            </a:r>
+          </a:p>
         </p:txBody>
       </p:sp>
       <p:sp>
@@ -835,6 +851,12 @@
               <a:t>Esto tambien desarma la intuicion mas comun del estudiante, que si nadie usa el sistema el sistema no cuesta.</a:t>
             </a:r>
           </a:p>
+          <a:p/>
+          <a:p>
+            <a:r>
+              <a:t>(No se proyecta) La conclusion es contraintuitiva y por eso vale en clase: el driver del componente "almacenamiento de archivos" no es el almacenamiento, es el trafico, y la mitigacion no es contable sino arquitectonica, poner una cache o una red de distribucion de contenido delante para que el mismo archivo no salga del origen veinte veces.</a:t>
+            </a:r>
+          </a:p>
         </p:txBody>
       </p:sp>
       <p:sp>
@@ -905,6 +927,18 @@
               <a:t>De ahi salen tres acciones de right-sizing.</a:t>
             </a:r>
           </a:p>
+          <a:p/>
+          <a:p>
+            <a:r>
+              <a:t>(No se proyecta) Right-sizing es ajustar la capacidad aprovisionada a la demanda observada, y la palabra clave es observada: sin medicion es adivinanza, y la medicion viene de las senales doradas de la Clase 8, en particular la saturacion.</a:t>
+            </a:r>
+          </a:p>
+          <a:p/>
+          <a:p>
+            <a:r>
+              <a:t>(No se proyecta) La tercera es adelgazar el artefacto, que amarra con la Clase 3: una imagen basada en python:3.12 pesa del orden de 1 GB, la variante slim unos 150 MB y una construida sobre alpine puede bajar a decenas de megabytes; eso es menos registro, menos transferencia en cada despliegue y menos tiempo de arranque, dato que reaparece en la Clase 13.</a:t>
+            </a:r>
+          </a:p>
         </p:txBody>
       </p:sp>
       <p:sp>
@@ -975,6 +1009,18 @@
               <a:t>Por eso las mismas tres acciones sirven a la vez para la factura y para la huella.</a:t>
             </a:r>
           </a:p>
+          <a:p/>
+          <a:p>
+            <a:r>
+              <a:t>(No se proyecta) La sostenibilidad en este curso es tecnica antes que ambiental, y conviene decirlo asi para no caer en discurso vacio.</a:t>
+            </a:r>
+          </a:p>
+          <a:p/>
+          <a:p>
+            <a:r>
+              <a:t>(No se proyecta) Y hay una tercera cara que el estudiante ignora: el costo humano de mantener el diseno.</a:t>
+            </a:r>
+          </a:p>
         </p:txBody>
       </p:sp>
       <p:sp>
@@ -1043,18 +1089,6 @@
           <a:p>
             <a:r>
               <a:t>Tres preguntas aparecen siempre.</a:t>
-            </a:r>
-          </a:p>
-          <a:p/>
-          <a:p>
-            <a:r>
-              <a:t>Conviene advertir que en la Clase 11 la auditoria exigira que los componentes de esta tabla se llamen igual que los contenedores del C4 de la Clase 4 y las piezas del despliegue de la Clase 7, y que en la Clase 13 el limite maximo del autoescalado sera el techo de costo que se decide hoy.</a:t>
-            </a:r>
-          </a:p>
-          <a:p/>
-          <a:p>
-            <a:r>
-              <a:t>Con eso la clase se vuelve una caceria de calculadoras de precios, el estudiante copia numeros que no entiende y las acciones de right-sizing quedan cosmeticas.</a:t>
             </a:r>
           </a:p>
         </p:txBody>
@@ -4635,22 +4669,6 @@
               <a:t>–   Y pasan a Medio si se implementan como un worker encendido de forma permanente: el mismo requisito con dos disenos y dos costos, que es exactamente el razonamiento que se evalua.</a:t>
             </a:r>
           </a:p>
-          <a:p>
-            <a:pPr>
-              <a:spcAft>
-                <a:spcPts val="800"/>
-              </a:spcAft>
-            </a:pPr>
-            <a:r>
-              <a:rPr sz="2000" b="0" i="0">
-                <a:solidFill>
-                  <a:srgbClr val="333333"/>
-                </a:solidFill>
-                <a:latin typeface="Calibri"/>
-              </a:rPr>
-              <a:t>–   Y hay un componente que sorprende, el monitoreo de la Clase 8: un sistema que registra cada peticion con detalle puede generar mas gigabytes de logs que de datos de negocio</a:t>
-            </a:r>
-          </a:p>
         </p:txBody>
       </p:sp>
       <p:sp>
@@ -4868,7 +4886,7 @@
                 </a:solidFill>
                 <a:latin typeface="Calibri"/>
               </a:rPr>
-              <a:t>–   Y la ingesta de logs se cobra por gigabyte; existen casos reales de equipos cuya observabilidad costaba mas que la aplicacion observada.</a:t>
+              <a:t>–   Los cuatro conductores que explican casi toda la factura son: computo siempre encendido, transferencia de salida o egress, almacenamiento caliente y volumen de logs.</a:t>
             </a:r>
           </a:p>
           <a:p>
@@ -4884,7 +4902,7 @@
                 </a:solidFill>
                 <a:latin typeface="Calibri"/>
               </a:rPr>
-              <a:t>–   Los cuatro conductores que explican casi toda la factura son: computo siempre encendido, transferencia de salida o egress, almacenamiento caliente y volumen de logs.</a:t>
+              <a:t>–   Un error comun es costear solo el computo y olvidar el egress: en servicios que entregan archivos a muchos usuarios, la transferencia de salida puede superar al computo.</a:t>
             </a:r>
           </a:p>
           <a:p>
@@ -4900,7 +4918,7 @@
                 </a:solidFill>
                 <a:latin typeface="Calibri"/>
               </a:rPr>
-              <a:t>–   Un error comun es costear solo el computo y olvidar el egress: en servicios que entregan archivos a muchos usuarios, la transferencia de salida puede superar al computo.</a:t>
+              <a:t>–   Un ejemplo de fila es: API de turnos, nivel Medio, driver computo siempre encendido; si se mueve a un servicio que escala a cero fuera de horario, baja a Bajo.</a:t>
             </a:r>
           </a:p>
         </p:txBody>
@@ -5081,7 +5099,7 @@
                 </a:solidFill>
                 <a:latin typeface="Calibri"/>
               </a:rPr>
-              <a:t>Segundo ejemplo: por que el driver importa mas que el nivel (1/2)</a:t>
+              <a:t>Segundo ejemplo: por que el driver importa mas que el nivel</a:t>
             </a:r>
           </a:p>
         </p:txBody>
@@ -5168,7 +5186,23 @@
                 </a:solidFill>
                 <a:latin typeface="Calibri"/>
               </a:rPr>
-              <a:t>–   La conclusion es contraintuitiva y por eso vale en clase: el driver del componente "almacenamiento de archivos" no es el almacenamiento, es el trafico</a:t>
+              <a:t>–   Hay dos familias de recursos: los que cobran por uso y los que cobran por existir.</a:t>
+            </a:r>
+          </a:p>
+          <a:p>
+            <a:pPr>
+              <a:spcAft>
+                <a:spcPts val="800"/>
+              </a:spcAft>
+            </a:pPr>
+            <a:r>
+              <a:rPr sz="2000" b="0" i="0">
+                <a:solidFill>
+                  <a:srgbClr val="333333"/>
+                </a:solidFill>
+                <a:latin typeface="Calibri"/>
+              </a:rPr>
+              <a:t>–   La base de datos gestionada, el balanceador, las IP reservadas, los volumenes huerfanos y las instantaneas viejas son de la segunda y facturan aunque el ultimo usuario se haya ido hace meses.</a:t>
             </a:r>
           </a:p>
         </p:txBody>
@@ -5349,7 +5383,7 @@
                 </a:solidFill>
                 <a:latin typeface="Calibri"/>
               </a:rPr>
-              <a:t>Segundo ejemplo: por que el driver importa mas que el nivel (2/2)</a:t>
+              <a:t>Right-sizing: tres acciones ancladas en observacion (1/2)</a:t>
             </a:r>
           </a:p>
         </p:txBody>
@@ -5388,7 +5422,7 @@
                 </a:solidFill>
                 <a:latin typeface="Calibri"/>
               </a:rPr>
-              <a:t>–   Y la mitigacion no es contable sino arquitectonica, poner una cache o una red de distribucion de contenido delante para que el mismo archivo no salga del origen veinte veces.</a:t>
+              <a:t>–   La metrica que lo gobierna es la utilizacion, el porcentaje de la capacidad pagada que efectivamente se usa; una maquina al 5 por ciento de CPU durante un mes desperdicia el 95 por ciento de lo pagado.</a:t>
             </a:r>
           </a:p>
           <a:p>
@@ -5404,7 +5438,7 @@
                 </a:solidFill>
                 <a:latin typeface="Calibri"/>
               </a:rPr>
-              <a:t>–   Hay dos familias de recursos: los que cobran por uso y los que cobran por existir.</a:t>
+              <a:t>–   La convencion de industria, que es convencion y no regla, apunta a una utilizacion sostenida entre el 40 y el 70 por ciento: por debajo hay sobreaprovisionamiento y por encima no queda holgura para picos.</a:t>
             </a:r>
           </a:p>
           <a:p>
@@ -5420,7 +5454,23 @@
                 </a:solidFill>
                 <a:latin typeface="Calibri"/>
               </a:rPr>
-              <a:t>–   La base de datos gestionada, el balanceador, las IP reservadas, los volumenes huerfanos y las instantaneas viejas son de la segunda y facturan aunque el ultimo usuario se haya ido hace meses.</a:t>
+              <a:t>–   La primera accion tipica es reducir tamano o numero de replicas hasta acercarse a ese rango.</a:t>
+            </a:r>
+          </a:p>
+          <a:p>
+            <a:pPr>
+              <a:spcAft>
+                <a:spcPts val="800"/>
+              </a:spcAft>
+            </a:pPr>
+            <a:r>
+              <a:rPr sz="2000" b="0" i="0">
+                <a:solidFill>
+                  <a:srgbClr val="333333"/>
+                </a:solidFill>
+                <a:latin typeface="Calibri"/>
+              </a:rPr>
+              <a:t>–   La segunda es apagar por horario lo que no es produccion: un ambiente encendido las 24 horas los siete dias consume 168 horas semanales, y encendido solo de 8 a 6 en dias habiles consume 50, un ahorro cercano al 70 por ciento sin tocar codigo.</a:t>
             </a:r>
           </a:p>
         </p:txBody>
@@ -5601,7 +5651,7 @@
                 </a:solidFill>
                 <a:latin typeface="Calibri"/>
               </a:rPr>
-              <a:t>Right-sizing: tres acciones ancladas en observacion (1/2)</a:t>
+              <a:t>Right-sizing: tres acciones ancladas en observacion (2/2)</a:t>
             </a:r>
           </a:p>
         </p:txBody>
@@ -5640,7 +5690,7 @@
                 </a:solidFill>
                 <a:latin typeface="Calibri"/>
               </a:rPr>
-              <a:t>–   Right-sizing es ajustar la capacidad aprovisionada a la demanda observada, y la palabra clave es observada: sin medicion es adivinanza, y la medicion viene de las senales doradas de la Clase 8, en particular la saturacion.</a:t>
+              <a:t>–   Igual de validos son fijar retencion de logs a 30 dias en vez de para siempre y borrar volumenes e instantaneas sin dueno.</a:t>
             </a:r>
           </a:p>
           <a:p>
@@ -5656,7 +5706,7 @@
                 </a:solidFill>
                 <a:latin typeface="Calibri"/>
               </a:rPr>
-              <a:t>–   La metrica que lo gobierna es la utilizacion, el porcentaje de la capacidad pagada que efectivamente se usa; una maquina al 5 por ciento de CPU durante un mes desperdicia el 95 por ciento de lo pagado.</a:t>
+              <a:t>–   La tercera accion es reducir lo que esta sobredimensionado: una instancia que nunca pasa del 20 por ciento de CPU puede bajar a la mitad de su capacidad sin que nadie lo note.</a:t>
             </a:r>
           </a:p>
           <a:p>
@@ -5672,23 +5722,7 @@
                 </a:solidFill>
                 <a:latin typeface="Calibri"/>
               </a:rPr>
-              <a:t>–   La convencion de industria, que es convencion y no regla, apunta a una utilizacion sostenida entre el 40 y el 70 por ciento: por debajo hay sobreaprovisionamiento y por encima no queda holgura para picos.</a:t>
-            </a:r>
-          </a:p>
-          <a:p>
-            <a:pPr>
-              <a:spcAft>
-                <a:spcPts val="800"/>
-              </a:spcAft>
-            </a:pPr>
-            <a:r>
-              <a:rPr sz="2000" b="0" i="0">
-                <a:solidFill>
-                  <a:srgbClr val="333333"/>
-                </a:solidFill>
-                <a:latin typeface="Calibri"/>
-              </a:rPr>
-              <a:t>–   La primera accion tipica es reducir tamano o numero de replicas hasta acercarse a ese rango.</a:t>
+              <a:t>–   El orden correcto es: medir durante al menos 2 semanas, reducir un escalon y volver a medir; reducir sin datos es adivinar.</a:t>
             </a:r>
           </a:p>
         </p:txBody>
@@ -5869,7 +5903,7 @@
                 </a:solidFill>
                 <a:latin typeface="Calibri"/>
               </a:rPr>
-              <a:t>Right-sizing: tres acciones ancladas en observacion (2/2)</a:t>
+              <a:t>Sostenibilidad tecnica antes que ambiental (1/2)</a:t>
             </a:r>
           </a:p>
         </p:txBody>
@@ -5908,7 +5942,7 @@
                 </a:solidFill>
                 <a:latin typeface="Calibri"/>
               </a:rPr>
-              <a:t>–   La segunda es apagar por horario lo que no es produccion: un ambiente encendido las 24 horas los siete dias consume 168 horas semanales, y encendido solo de 8 a 6 en dias habiles consume 50, un ahorro cercano al 70 por ciento sin tocar codigo.</a:t>
+              <a:t>–   La energia que consume un servidor depende sobre todo de la capacidad encendida, no de la usada: una maquina al 5 por ciento no consume el 5 por ciento de la energia, consume mucho mas</a:t>
             </a:r>
           </a:p>
           <a:p>
@@ -5924,7 +5958,7 @@
                 </a:solidFill>
                 <a:latin typeface="Calibri"/>
               </a:rPr>
-              <a:t>–   La tercera es adelgazar el artefacto, que amarra con la Clase 3: una imagen basada en python:3.12 pesa del orden de 1 GB, la variante slim unos 150 MB y una construida sobre alpine puede bajar a decenas de megabytes</a:t>
+              <a:t>–   Porque el consumo en reposo de un servidor moderno ronda la mitad del consumo a plena carga.</a:t>
             </a:r>
           </a:p>
           <a:p>
@@ -5940,7 +5974,7 @@
                 </a:solidFill>
                 <a:latin typeface="Calibri"/>
               </a:rPr>
-              <a:t>–   Eso es menos registro, menos transferencia en cada despliegue y menos tiempo de arranque, dato que reaparece en la Clase 13.</a:t>
+              <a:t>–   Hay ademas una decision de arquitectura con efecto directo: la intensidad de carbono de la electricidad varia fuerte entre regiones, asi que elegir region no es solo latencia y cumplimiento normativo.</a:t>
             </a:r>
           </a:p>
           <a:p>
@@ -5956,7 +5990,7 @@
                 </a:solidFill>
                 <a:latin typeface="Calibri"/>
               </a:rPr>
-              <a:t>–   Igual de validos son fijar retencion de logs a 30 dias en vez de para siempre y borrar volumenes e instantaneas sin dueno.</a:t>
+              <a:t>–   Una arquitectura de ocho servicios que un equipo de tres personas no puede operar es insostenible aunque la infraestructura sea gratis.</a:t>
             </a:r>
           </a:p>
         </p:txBody>
@@ -6137,7 +6171,7 @@
                 </a:solidFill>
                 <a:latin typeface="Calibri"/>
               </a:rPr>
-              <a:t>Sostenibilidad tecnica antes que ambiental (1/2)</a:t>
+              <a:t>Sostenibilidad tecnica antes que ambiental (2/2)</a:t>
             </a:r>
           </a:p>
         </p:txBody>
@@ -6176,7 +6210,7 @@
                 </a:solidFill>
                 <a:latin typeface="Calibri"/>
               </a:rPr>
-              <a:t>–   La sostenibilidad en este curso es tecnica antes que ambiental, y conviene decirlo asi para no caer en discurso vacio.</a:t>
+              <a:t>–   Un ejemplo en la app: un monolito modular de un solo contenedor es mas sostenible para un equipo de 1 o 2 personas que cinco microservicios, porque tiene 1 pipeline, 1 despliegue y 1 lugar donde buscar un error.</a:t>
             </a:r>
           </a:p>
           <a:p>
@@ -6192,7 +6226,7 @@
                 </a:solidFill>
                 <a:latin typeface="Calibri"/>
               </a:rPr>
-              <a:t>–   La energia que consume un servidor depende sobre todo de la capacidad encendida, no de la usada: una maquina al 5 por ciento no consume el 5 por ciento de la energia, consume mucho mas</a:t>
+              <a:t>–   La cara ambiental tambien es medible: un entorno de pruebas apagado fuera del horario de trabajo consume menos de la mitad de las horas de computo de uno encendido todo el dia.</a:t>
             </a:r>
           </a:p>
           <a:p>
@@ -6208,39 +6242,7 @@
                 </a:solidFill>
                 <a:latin typeface="Calibri"/>
               </a:rPr>
-              <a:t>–   Porque el consumo en reposo de un servidor moderno ronda la mitad del consumo a plena carga.</a:t>
-            </a:r>
-          </a:p>
-          <a:p>
-            <a:pPr>
-              <a:spcAft>
-                <a:spcPts val="800"/>
-              </a:spcAft>
-            </a:pPr>
-            <a:r>
-              <a:rPr sz="2000" b="0" i="0">
-                <a:solidFill>
-                  <a:srgbClr val="333333"/>
-                </a:solidFill>
-                <a:latin typeface="Calibri"/>
-              </a:rPr>
-              <a:t>–   Hay ademas una decision de arquitectura con efecto directo: la intensidad de carbono de la electricidad varia fuerte entre regiones, asi que elegir region no es solo latencia y cumplimiento normativo.</a:t>
-            </a:r>
-          </a:p>
-          <a:p>
-            <a:pPr>
-              <a:spcAft>
-                <a:spcPts val="800"/>
-              </a:spcAft>
-            </a:pPr>
-            <a:r>
-              <a:rPr sz="2000" b="0" i="0">
-                <a:solidFill>
-                  <a:srgbClr val="333333"/>
-                </a:solidFill>
-                <a:latin typeface="Calibri"/>
-              </a:rPr>
-              <a:t>–   Y hay una tercera cara que el estudiante ignora: el costo humano de mantener el diseno.</a:t>
+              <a:t>–   Un error comun es medir la sostenibilidad solo en emisiones: un diseno que nadie del equipo entiende termina reescrito, y reescribir consume mas recursos que operarlo bien.</a:t>
             </a:r>
           </a:p>
         </p:txBody>
@@ -6421,7 +6423,7 @@
                 </a:solidFill>
                 <a:latin typeface="Calibri"/>
               </a:rPr>
-              <a:t>Sostenibilidad tecnica antes que ambiental (2/2)</a:t>
+              <a:t>Preguntas frecuentes y cierre conceptual (1/2)</a:t>
             </a:r>
           </a:p>
         </p:txBody>
@@ -6460,7 +6462,7 @@
                 </a:solidFill>
                 <a:latin typeface="Calibri"/>
               </a:rPr>
-              <a:t>–   Una arquitectura de ocho servicios que un equipo de tres personas no puede operar es insostenible aunque la infraestructura sea gratis.</a:t>
+              <a:t>–   La primera es si tiene sentido estimar costos cuando nadie va a pagar nada; la respuesta es que la estimacion no cambia la factura, cambia el diseno, y que en un trabajo real la segunda pregunta despues de "funciona" es "cuanto cuesta al mes".</a:t>
             </a:r>
           </a:p>
           <a:p>
@@ -6476,7 +6478,7 @@
                 </a:solidFill>
                 <a:latin typeface="Calibri"/>
               </a:rPr>
-              <a:t>–   Un ejemplo en la app: un monolito modular de un solo contenedor es mas sostenible para un equipo de 1 o 2 personas que cinco microservicios, porque tiene 1 pipeline, 1 despliegue y 1 lugar donde buscar un error.</a:t>
+              <a:t>–   La segunda es si entonces lo mas barato es siempre lo mejor, y la respuesta es no</a:t>
             </a:r>
           </a:p>
           <a:p>
@@ -6492,7 +6494,7 @@
                 </a:solidFill>
                 <a:latin typeface="Calibri"/>
               </a:rPr>
-              <a:t>–   La cara ambiental tambien es medible: un entorno de pruebas apagado fuera del horario de trabajo consume menos de la mitad de las horas de computo de uno encendido todo el dia.</a:t>
+              <a:t>–   Porque lo mas barato suele mover el costo hacia la operacion humana; el concepto a nombrar es costo total de propiedad, que suma infraestructura mas operacion mas incidentes mas migraciones</a:t>
             </a:r>
           </a:p>
         </p:txBody>
@@ -6673,7 +6675,7 @@
                 </a:solidFill>
                 <a:latin typeface="Calibri"/>
               </a:rPr>
-              <a:t>Preguntas frecuentes y cierre conceptual () (1/3)</a:t>
+              <a:t>Preguntas frecuentes y cierre conceptual (2/2)</a:t>
             </a:r>
           </a:p>
         </p:txBody>
@@ -6712,7 +6714,7 @@
                 </a:solidFill>
                 <a:latin typeface="Calibri"/>
               </a:rPr>
-              <a:t>–   La primera es si tiene sentido estimar costos cuando nadie va a pagar nada; la respuesta es que la estimacion no cambia la factura, cambia el diseno, y que en un trabajo real la segunda pregunta despues de "funciona" es "cuanto cuesta al mes".</a:t>
+              <a:t>–   Y bajo esa lente una base de datos autoadministrada en una maquina desnuda es mas barata al mes y mas cara al ano cuando alguien debe parcharla, respaldarla y atender su caida a las tres de la manana.</a:t>
             </a:r>
           </a:p>
           <a:p>
@@ -6728,7 +6730,7 @@
                 </a:solidFill>
                 <a:latin typeface="Calibri"/>
               </a:rPr>
-              <a:t>–   Ademas el costo es un atributo de calidad como la latencia, de los enumerados en la Clase 1, y compite con los demas: el objetivo de p95 que se definira en la Clase 12 casi siempre se compra con dinero.</a:t>
+              <a:t>–   La tercera es como asignar los niveles sin factura: se asignan comparando componentes entre si con el driver como argumento y escribiendo el supuesto</a:t>
             </a:r>
           </a:p>
           <a:p>
@@ -6744,39 +6746,7 @@
                 </a:solidFill>
                 <a:latin typeface="Calibri"/>
               </a:rPr>
-              <a:t>–   La segunda es si entonces lo mas barato es siempre lo mejor, y la respuesta es no</a:t>
-            </a:r>
-          </a:p>
-          <a:p>
-            <a:pPr>
-              <a:spcAft>
-                <a:spcPts val="800"/>
-              </a:spcAft>
-            </a:pPr>
-            <a:r>
-              <a:rPr sz="2000" b="0" i="0">
-                <a:solidFill>
-                  <a:srgbClr val="333333"/>
-                </a:solidFill>
-                <a:latin typeface="Calibri"/>
-              </a:rPr>
-              <a:t>–   Porque lo mas barato suele mover el costo hacia la operacion humana; el concepto a nombrar es costo total de propiedad, que suma infraestructura mas operacion mas incidentes mas migraciones</a:t>
-            </a:r>
-          </a:p>
-          <a:p>
-            <a:pPr>
-              <a:spcAft>
-                <a:spcPts val="800"/>
-              </a:spcAft>
-            </a:pPr>
-            <a:r>
-              <a:rPr sz="2000" b="0" i="0">
-                <a:solidFill>
-                  <a:srgbClr val="333333"/>
-                </a:solidFill>
-                <a:latin typeface="Calibri"/>
-              </a:rPr>
-              <a:t>–   Y bajo esa lente una base de datos autoadministrada en una maquina desnuda es mas barata al mes y mas cara al ano cuando alguien debe parcharla, respaldarla y atender su caida a las tres de la manana.</a:t>
+              <a:t>–   "Alto porque es computo 24/7 mas almacenamiento acumulativo mas respaldos" es defendible, "Alto porque suena caro" no.</a:t>
             </a:r>
           </a:p>
         </p:txBody>
@@ -6851,13 +6821,13 @@
         <p:spPr>
           <a:xfrm>
             <a:off x="0" y="0"/>
-            <a:ext cx="12191695" cy="960120"/>
+            <a:ext cx="12191695" cy="164592"/>
           </a:xfrm>
           <a:prstGeom prst="rect">
             <a:avLst/>
           </a:prstGeom>
           <a:solidFill>
-            <a:srgbClr val="095292"/>
+            <a:srgbClr val="269CCB"/>
           </a:solidFill>
           <a:ln>
             <a:noFill/>
@@ -6885,49 +6855,30 @@
           </a:p>
         </p:txBody>
       </p:sp>
-      <p:sp>
-        <p:nvSpPr>
-          <p:cNvPr id="3" name="Rectangle 2"/>
-          <p:cNvSpPr/>
+      <p:pic>
+        <p:nvPicPr>
+          <p:cNvPr id="3" name="Picture 2" descr="logo_uniajc_color.png"/>
+          <p:cNvPicPr>
+            <a:picLocks noChangeAspect="1"/>
+          </p:cNvPicPr>
           <p:nvPr/>
-        </p:nvSpPr>
-        <p:spPr>
-          <a:xfrm>
-            <a:off x="0" y="960120"/>
-            <a:ext cx="12191695" cy="41148"/>
-          </a:xfrm>
-          <a:prstGeom prst="rect">
-            <a:avLst/>
-          </a:prstGeom>
-          <a:solidFill>
-            <a:srgbClr val="FFD000"/>
-          </a:solidFill>
-          <a:ln>
-            <a:noFill/>
-          </a:ln>
-        </p:spPr>
-        <p:style>
-          <a:lnRef idx="1">
-            <a:schemeClr val="accent1"/>
-          </a:lnRef>
-          <a:fillRef idx="3">
-            <a:schemeClr val="accent1"/>
-          </a:fillRef>
-          <a:effectRef idx="2">
-            <a:schemeClr val="accent1"/>
-          </a:effectRef>
-          <a:fontRef idx="minor">
-            <a:schemeClr val="lt1"/>
-          </a:fontRef>
-        </p:style>
-        <p:txBody>
-          <a:bodyPr rtlCol="0" anchor="ctr"/>
-          <a:lstStyle/>
-          <a:p>
-            <a:pPr algn="ctr"/>
-          </a:p>
-        </p:txBody>
-      </p:sp>
+        </p:nvPicPr>
+        <p:blipFill>
+          <a:blip r:embed="rId2"/>
+          <a:stretch>
+            <a:fillRect/>
+          </a:stretch>
+        </p:blipFill>
+        <p:spPr>
+          <a:xfrm>
+            <a:off x="10271455" y="5998464"/>
+            <a:ext cx="1463040" cy="643233"/>
+          </a:xfrm>
+          <a:prstGeom prst="rect">
+            <a:avLst/>
+          </a:prstGeom>
+        </p:spPr>
+      </p:pic>
       <p:sp>
         <p:nvSpPr>
           <p:cNvPr id="4" name="TextBox 3"/>
@@ -6936,8 +6887,41 @@
         </p:nvSpPr>
         <p:spPr>
           <a:xfrm>
-            <a:off x="457200" y="164592"/>
-            <a:ext cx="11277295" cy="502920"/>
+            <a:off x="457200" y="1737360"/>
+            <a:ext cx="11277295" cy="1097280"/>
+          </a:xfrm>
+          <a:prstGeom prst="rect">
+            <a:avLst/>
+          </a:prstGeom>
+          <a:noFill/>
+        </p:spPr>
+        <p:txBody>
+          <a:bodyPr wrap="square" anchor="ctr"/>
+          <a:lstStyle/>
+          <a:p>
+            <a:pPr algn="ctr"/>
+            <a:r>
+              <a:rPr sz="3400" b="1" i="0">
+                <a:solidFill>
+                  <a:srgbClr val="095292"/>
+                </a:solidFill>
+                <a:latin typeface="Calibri"/>
+              </a:rPr>
+              <a:t>Clase 10 · cierre conceptual</a:t>
+            </a:r>
+          </a:p>
+        </p:txBody>
+      </p:sp>
+      <p:sp>
+        <p:nvSpPr>
+          <p:cNvPr id="5" name="TextBox 4"/>
+          <p:cNvSpPr txBox="1"/>
+          <p:nvPr/>
+        </p:nvSpPr>
+        <p:spPr>
+          <a:xfrm>
+            <a:off x="457200" y="3017520"/>
+            <a:ext cx="11277295" cy="1645920"/>
           </a:xfrm>
           <a:prstGeom prst="rect">
             <a:avLst/>
@@ -6950,28 +6934,65 @@
           </a:bodyPr>
           <a:lstStyle/>
           <a:p>
-            <a:r>
-              <a:rPr sz="2600" b="1" i="0">
-                <a:solidFill>
-                  <a:srgbClr val="FFFFFF"/>
-                </a:solidFill>
-                <a:latin typeface="Calibri"/>
-              </a:rPr>
-              <a:t>Preguntas frecuentes y cierre conceptual () (2/3)</a:t>
-            </a:r>
-          </a:p>
-        </p:txBody>
-      </p:sp>
-      <p:sp>
-        <p:nvSpPr>
-          <p:cNvPr id="5" name="TextBox 4"/>
+            <a:pPr algn="ctr">
+              <a:spcAft>
+                <a:spcPts val="600"/>
+              </a:spcAft>
+            </a:pPr>
+            <a:r>
+              <a:rPr sz="1600" b="0" i="0">
+                <a:solidFill>
+                  <a:srgbClr val="333333"/>
+                </a:solidFill>
+                <a:latin typeface="Calibri"/>
+              </a:rPr>
+              <a:t>Identificar drivers de costo (cómputo, datos, transferencia, idle).</a:t>
+            </a:r>
+          </a:p>
+          <a:p>
+            <a:pPr algn="ctr">
+              <a:spcAft>
+                <a:spcPts val="600"/>
+              </a:spcAft>
+            </a:pPr>
+            <a:r>
+              <a:rPr sz="1600" b="0" i="0">
+                <a:solidFill>
+                  <a:srgbClr val="333333"/>
+                </a:solidFill>
+                <a:latin typeface="Calibri"/>
+              </a:rPr>
+              <a:t>Proponer 3 apalancamientos de ahorro sin romper el diseño.</a:t>
+            </a:r>
+          </a:p>
+          <a:p>
+            <a:pPr algn="ctr">
+              <a:spcAft>
+                <a:spcPts val="600"/>
+              </a:spcAft>
+            </a:pPr>
+            <a:r>
+              <a:rPr sz="1600" b="0" i="0">
+                <a:solidFill>
+                  <a:srgbClr val="333333"/>
+                </a:solidFill>
+                <a:latin typeface="Calibri"/>
+              </a:rPr>
+              <a:t>Redactar sostenibilidad (apagado de labs, imágenes ligeras, sobredimensionamiento).</a:t>
+            </a:r>
+          </a:p>
+        </p:txBody>
+      </p:sp>
+      <p:sp>
+        <p:nvSpPr>
+          <p:cNvPr id="6" name="TextBox 5"/>
           <p:cNvSpPr txBox="1"/>
           <p:nvPr/>
         </p:nvSpPr>
         <p:spPr>
           <a:xfrm>
-            <a:off x="457200" y="1170432"/>
-            <a:ext cx="11277295" cy="5230368"/>
+            <a:off x="457200" y="4754880"/>
+            <a:ext cx="11277295" cy="640080"/>
           </a:xfrm>
           <a:prstGeom prst="rect">
             <a:avLst/>
@@ -6984,118 +7005,15 @@
           </a:bodyPr>
           <a:lstStyle/>
           <a:p>
-            <a:pPr>
-              <a:spcAft>
-                <a:spcPts val="800"/>
-              </a:spcAft>
-            </a:pPr>
-            <a:r>
-              <a:rPr sz="2000" b="0" i="0">
-                <a:solidFill>
-                  <a:srgbClr val="333333"/>
-                </a:solidFill>
-                <a:latin typeface="Calibri"/>
-              </a:rPr>
-              <a:t>–   La tercera es como asignar los niveles sin factura: se asignan comparando componentes entre si con el driver como argumento y escribiendo el supuesto</a:t>
-            </a:r>
-          </a:p>
-          <a:p>
-            <a:pPr>
-              <a:spcAft>
-                <a:spcPts val="800"/>
-              </a:spcAft>
-            </a:pPr>
-            <a:r>
-              <a:rPr sz="2000" b="0" i="0">
-                <a:solidFill>
-                  <a:srgbClr val="333333"/>
-                </a:solidFill>
-                <a:latin typeface="Calibri"/>
-              </a:rPr>
-              <a:t>–   "Alto porque es computo 24/7 mas almacenamiento acumulativo mas respaldos" es defendible, "Alto porque suena caro" no.</a:t>
-            </a:r>
-          </a:p>
-          <a:p>
-            <a:pPr>
-              <a:spcAft>
-                <a:spcPts val="800"/>
-              </a:spcAft>
-            </a:pPr>
-            <a:r>
-              <a:rPr sz="2000" b="0" i="0">
-                <a:solidFill>
-                  <a:srgbClr val="333333"/>
-                </a:solidFill>
-                <a:latin typeface="Calibri"/>
-              </a:rPr>
-              <a:t>–   Error tipico del docente que no domina el tema: tratar el costo como asunto "de negocio, no tecnico" y despacharlo en cinco minutos.</a:t>
-            </a:r>
-          </a:p>
-          <a:p>
-            <a:pPr>
-              <a:spcAft>
-                <a:spcPts val="800"/>
-              </a:spcAft>
-            </a:pPr>
-            <a:r>
-              <a:rPr sz="2000" b="0" i="0">
-                <a:solidFill>
-                  <a:srgbClr val="333333"/>
-                </a:solidFill>
-                <a:latin typeface="Calibri"/>
-              </a:rPr>
-              <a:t>–   Las decisiones que mas mueven la factura son decisiones de arquitectura, tomadas por quien dibuja el diagrama: gestionado o autoadministrado, con cache o sin cache, sincronico o con cola, replicas fijas o autoescalado.</a:t>
-            </a:r>
-          </a:p>
-          <a:p>
-            <a:pPr>
-              <a:spcAft>
-                <a:spcPts val="800"/>
-              </a:spcAft>
-            </a:pPr>
-            <a:r>
-              <a:rPr sz="2000" b="0" i="0">
-                <a:solidFill>
-                  <a:srgbClr val="333333"/>
-                </a:solidFill>
-                <a:latin typeface="Calibri"/>
-              </a:rPr>
-              <a:t>–   Si esta clase se salta, la consecuencia aparece dos clases despues: en la Clase 13 los estudiantes escriben politicas de autoescalado sin limite superior</a:t>
-            </a:r>
-          </a:p>
-        </p:txBody>
-      </p:sp>
-      <p:sp>
-        <p:nvSpPr>
-          <p:cNvPr id="6" name="TextBox 5"/>
-          <p:cNvSpPr txBox="1"/>
-          <p:nvPr/>
-        </p:nvSpPr>
-        <p:spPr>
-          <a:xfrm>
-            <a:off x="11185855" y="6473952"/>
-            <a:ext cx="640080" cy="274320"/>
-          </a:xfrm>
-          <a:prstGeom prst="rect">
-            <a:avLst/>
-          </a:prstGeom>
-          <a:noFill/>
-        </p:spPr>
-        <p:txBody>
-          <a:bodyPr wrap="square">
-            <a:spAutoFit/>
-          </a:bodyPr>
-          <a:lstStyle/>
-          <a:p>
-            <a:pPr algn="r"/>
-            <a:r>
-              <a:rPr sz="1100" b="0" i="0">
-                <a:solidFill>
-                  <a:srgbClr val="666666"/>
-                </a:solidFill>
-                <a:latin typeface="Calibri"/>
-              </a:rPr>
-              <a:t>19</a:t>
+            <a:pPr algn="ctr"/>
+            <a:r>
+              <a:rPr sz="2000" b="1" i="0">
+                <a:solidFill>
+                  <a:srgbClr val="269CCB"/>
+                </a:solidFill>
+                <a:latin typeface="Calibri"/>
+              </a:rPr>
+              <a:t>Teoría al servicio del diseño</a:t>
             </a:r>
           </a:p>
         </p:txBody>
@@ -7357,7 +7275,7 @@
                 </a:solidFill>
                 <a:latin typeface="Calibri"/>
               </a:rPr>
-              <a:t> Ejemplos resueltos y demo del docente sobre el tema.</a:t>
+              <a:t> Ejemplos resueltos y demostración sobre el tema.</a:t>
             </a:r>
           </a:p>
           <a:p>
@@ -7443,490 +7361,6 @@
                 <a:latin typeface="Calibri"/>
               </a:rPr>
               <a:t>2</a:t>
-            </a:r>
-          </a:p>
-        </p:txBody>
-      </p:sp>
-    </p:spTree>
-  </p:cSld>
-  <p:clrMapOvr>
-    <a:masterClrMapping/>
-  </p:clrMapOvr>
-</p:sld>
-</file>
-
-<file path=ppt/slides/slide20.xml><?xml version="1.0" encoding="utf-8"?>
-<p:sld xmlns:a="http://schemas.openxmlformats.org/drawingml/2006/main" xmlns:p="http://schemas.openxmlformats.org/presentationml/2006/main" xmlns:r="http://schemas.openxmlformats.org/officeDocument/2006/relationships">
-  <p:cSld>
-    <p:bg>
-      <p:bgPr>
-        <a:solidFill>
-          <a:srgbClr val="FFFFFF"/>
-        </a:solidFill>
-        <a:effectLst/>
-      </p:bgPr>
-    </p:bg>
-    <p:spTree>
-      <p:nvGrpSpPr>
-        <p:cNvPr id="1" name=""/>
-        <p:cNvGrpSpPr/>
-        <p:nvPr/>
-      </p:nvGrpSpPr>
-      <p:grpSpPr/>
-      <p:sp>
-        <p:nvSpPr>
-          <p:cNvPr id="2" name="Rectangle 1"/>
-          <p:cNvSpPr/>
-          <p:nvPr/>
-        </p:nvSpPr>
-        <p:spPr>
-          <a:xfrm>
-            <a:off x="0" y="0"/>
-            <a:ext cx="12191695" cy="960120"/>
-          </a:xfrm>
-          <a:prstGeom prst="rect">
-            <a:avLst/>
-          </a:prstGeom>
-          <a:solidFill>
-            <a:srgbClr val="095292"/>
-          </a:solidFill>
-          <a:ln>
-            <a:noFill/>
-          </a:ln>
-        </p:spPr>
-        <p:style>
-          <a:lnRef idx="1">
-            <a:schemeClr val="accent1"/>
-          </a:lnRef>
-          <a:fillRef idx="3">
-            <a:schemeClr val="accent1"/>
-          </a:fillRef>
-          <a:effectRef idx="2">
-            <a:schemeClr val="accent1"/>
-          </a:effectRef>
-          <a:fontRef idx="minor">
-            <a:schemeClr val="lt1"/>
-          </a:fontRef>
-        </p:style>
-        <p:txBody>
-          <a:bodyPr rtlCol="0" anchor="ctr"/>
-          <a:lstStyle/>
-          <a:p>
-            <a:pPr algn="ctr"/>
-          </a:p>
-        </p:txBody>
-      </p:sp>
-      <p:sp>
-        <p:nvSpPr>
-          <p:cNvPr id="3" name="Rectangle 2"/>
-          <p:cNvSpPr/>
-          <p:nvPr/>
-        </p:nvSpPr>
-        <p:spPr>
-          <a:xfrm>
-            <a:off x="0" y="960120"/>
-            <a:ext cx="12191695" cy="41148"/>
-          </a:xfrm>
-          <a:prstGeom prst="rect">
-            <a:avLst/>
-          </a:prstGeom>
-          <a:solidFill>
-            <a:srgbClr val="FFD000"/>
-          </a:solidFill>
-          <a:ln>
-            <a:noFill/>
-          </a:ln>
-        </p:spPr>
-        <p:style>
-          <a:lnRef idx="1">
-            <a:schemeClr val="accent1"/>
-          </a:lnRef>
-          <a:fillRef idx="3">
-            <a:schemeClr val="accent1"/>
-          </a:fillRef>
-          <a:effectRef idx="2">
-            <a:schemeClr val="accent1"/>
-          </a:effectRef>
-          <a:fontRef idx="minor">
-            <a:schemeClr val="lt1"/>
-          </a:fontRef>
-        </p:style>
-        <p:txBody>
-          <a:bodyPr rtlCol="0" anchor="ctr"/>
-          <a:lstStyle/>
-          <a:p>
-            <a:pPr algn="ctr"/>
-          </a:p>
-        </p:txBody>
-      </p:sp>
-      <p:sp>
-        <p:nvSpPr>
-          <p:cNvPr id="4" name="TextBox 3"/>
-          <p:cNvSpPr txBox="1"/>
-          <p:nvPr/>
-        </p:nvSpPr>
-        <p:spPr>
-          <a:xfrm>
-            <a:off x="457200" y="164592"/>
-            <a:ext cx="11277295" cy="502920"/>
-          </a:xfrm>
-          <a:prstGeom prst="rect">
-            <a:avLst/>
-          </a:prstGeom>
-          <a:noFill/>
-        </p:spPr>
-        <p:txBody>
-          <a:bodyPr wrap="square">
-            <a:spAutoFit/>
-          </a:bodyPr>
-          <a:lstStyle/>
-          <a:p>
-            <a:r>
-              <a:rPr sz="2600" b="1" i="0">
-                <a:solidFill>
-                  <a:srgbClr val="FFFFFF"/>
-                </a:solidFill>
-                <a:latin typeface="Calibri"/>
-              </a:rPr>
-              <a:t>Preguntas frecuentes y cierre conceptual () (3/3)</a:t>
-            </a:r>
-          </a:p>
-        </p:txBody>
-      </p:sp>
-      <p:sp>
-        <p:nvSpPr>
-          <p:cNvPr id="5" name="TextBox 4"/>
-          <p:cNvSpPr txBox="1"/>
-          <p:nvPr/>
-        </p:nvSpPr>
-        <p:spPr>
-          <a:xfrm>
-            <a:off x="457200" y="1170432"/>
-            <a:ext cx="11277295" cy="5230368"/>
-          </a:xfrm>
-          <a:prstGeom prst="rect">
-            <a:avLst/>
-          </a:prstGeom>
-          <a:noFill/>
-        </p:spPr>
-        <p:txBody>
-          <a:bodyPr wrap="square">
-            <a:spAutoFit/>
-          </a:bodyPr>
-          <a:lstStyle/>
-          <a:p>
-            <a:pPr>
-              <a:spcAft>
-                <a:spcPts val="800"/>
-              </a:spcAft>
-            </a:pPr>
-            <a:r>
-              <a:rPr sz="2000" b="0" i="0">
-                <a:solidFill>
-                  <a:srgbClr val="333333"/>
-                </a:solidFill>
-                <a:latin typeface="Calibri"/>
-              </a:rPr>
-              <a:t>–   En la Clase 15 defienden arquitecturas que nadie podria pagar y en el Parcial 3 responden la pregunta de drivers con generalidades sobre "optimizar recursos".</a:t>
-            </a:r>
-          </a:p>
-          <a:p>
-            <a:pPr>
-              <a:spcAft>
-                <a:spcPts val="800"/>
-              </a:spcAft>
-            </a:pPr>
-            <a:r>
-              <a:rPr sz="2000" b="0" i="0">
-                <a:solidFill>
-                  <a:srgbClr val="333333"/>
-                </a:solidFill>
-                <a:latin typeface="Calibri"/>
-              </a:rPr>
-              <a:t>–   El segundo error es el opuesto e igual de danino: exigir cifras exactas en dolares.</a:t>
-            </a:r>
-          </a:p>
-          <a:p>
-            <a:pPr>
-              <a:spcAft>
-                <a:spcPts val="800"/>
-              </a:spcAft>
-            </a:pPr>
-            <a:r>
-              <a:rPr sz="2000" b="0" i="0">
-                <a:solidFill>
-                  <a:srgbClr val="333333"/>
-                </a:solidFill>
-                <a:latin typeface="Calibri"/>
-              </a:rPr>
-              <a:t>–   El criterio de aprobacion no es la precision del numero sino que cada componente tenga driver nombrado y que cada accion sea verificable: "reducir a una replica el worker de notificaciones y usar imagen slim" se puede revisar, "optimizar el codigo" no.</a:t>
-            </a:r>
-          </a:p>
-        </p:txBody>
-      </p:sp>
-      <p:sp>
-        <p:nvSpPr>
-          <p:cNvPr id="6" name="TextBox 5"/>
-          <p:cNvSpPr txBox="1"/>
-          <p:nvPr/>
-        </p:nvSpPr>
-        <p:spPr>
-          <a:xfrm>
-            <a:off x="11185855" y="6473952"/>
-            <a:ext cx="640080" cy="274320"/>
-          </a:xfrm>
-          <a:prstGeom prst="rect">
-            <a:avLst/>
-          </a:prstGeom>
-          <a:noFill/>
-        </p:spPr>
-        <p:txBody>
-          <a:bodyPr wrap="square">
-            <a:spAutoFit/>
-          </a:bodyPr>
-          <a:lstStyle/>
-          <a:p>
-            <a:pPr algn="r"/>
-            <a:r>
-              <a:rPr sz="1100" b="0" i="0">
-                <a:solidFill>
-                  <a:srgbClr val="666666"/>
-                </a:solidFill>
-                <a:latin typeface="Calibri"/>
-              </a:rPr>
-              <a:t>20</a:t>
-            </a:r>
-          </a:p>
-        </p:txBody>
-      </p:sp>
-    </p:spTree>
-  </p:cSld>
-  <p:clrMapOvr>
-    <a:masterClrMapping/>
-  </p:clrMapOvr>
-</p:sld>
-</file>
-
-<file path=ppt/slides/slide21.xml><?xml version="1.0" encoding="utf-8"?>
-<p:sld xmlns:a="http://schemas.openxmlformats.org/drawingml/2006/main" xmlns:p="http://schemas.openxmlformats.org/presentationml/2006/main" xmlns:r="http://schemas.openxmlformats.org/officeDocument/2006/relationships">
-  <p:cSld>
-    <p:bg>
-      <p:bgPr>
-        <a:solidFill>
-          <a:srgbClr val="FFFFFF"/>
-        </a:solidFill>
-        <a:effectLst/>
-      </p:bgPr>
-    </p:bg>
-    <p:spTree>
-      <p:nvGrpSpPr>
-        <p:cNvPr id="1" name=""/>
-        <p:cNvGrpSpPr/>
-        <p:nvPr/>
-      </p:nvGrpSpPr>
-      <p:grpSpPr/>
-      <p:sp>
-        <p:nvSpPr>
-          <p:cNvPr id="2" name="Rectangle 1"/>
-          <p:cNvSpPr/>
-          <p:nvPr/>
-        </p:nvSpPr>
-        <p:spPr>
-          <a:xfrm>
-            <a:off x="0" y="0"/>
-            <a:ext cx="12191695" cy="164592"/>
-          </a:xfrm>
-          <a:prstGeom prst="rect">
-            <a:avLst/>
-          </a:prstGeom>
-          <a:solidFill>
-            <a:srgbClr val="269CCB"/>
-          </a:solidFill>
-          <a:ln>
-            <a:noFill/>
-          </a:ln>
-        </p:spPr>
-        <p:style>
-          <a:lnRef idx="1">
-            <a:schemeClr val="accent1"/>
-          </a:lnRef>
-          <a:fillRef idx="3">
-            <a:schemeClr val="accent1"/>
-          </a:fillRef>
-          <a:effectRef idx="2">
-            <a:schemeClr val="accent1"/>
-          </a:effectRef>
-          <a:fontRef idx="minor">
-            <a:schemeClr val="lt1"/>
-          </a:fontRef>
-        </p:style>
-        <p:txBody>
-          <a:bodyPr rtlCol="0" anchor="ctr"/>
-          <a:lstStyle/>
-          <a:p>
-            <a:pPr algn="ctr"/>
-          </a:p>
-        </p:txBody>
-      </p:sp>
-      <p:pic>
-        <p:nvPicPr>
-          <p:cNvPr id="3" name="Picture 2" descr="logo_uniajc_color.png"/>
-          <p:cNvPicPr>
-            <a:picLocks noChangeAspect="1"/>
-          </p:cNvPicPr>
-          <p:nvPr/>
-        </p:nvPicPr>
-        <p:blipFill>
-          <a:blip r:embed="rId2"/>
-          <a:stretch>
-            <a:fillRect/>
-          </a:stretch>
-        </p:blipFill>
-        <p:spPr>
-          <a:xfrm>
-            <a:off x="10271455" y="5998464"/>
-            <a:ext cx="1463040" cy="643233"/>
-          </a:xfrm>
-          <a:prstGeom prst="rect">
-            <a:avLst/>
-          </a:prstGeom>
-        </p:spPr>
-      </p:pic>
-      <p:sp>
-        <p:nvSpPr>
-          <p:cNvPr id="4" name="TextBox 3"/>
-          <p:cNvSpPr txBox="1"/>
-          <p:nvPr/>
-        </p:nvSpPr>
-        <p:spPr>
-          <a:xfrm>
-            <a:off x="457200" y="1737360"/>
-            <a:ext cx="11277295" cy="1097280"/>
-          </a:xfrm>
-          <a:prstGeom prst="rect">
-            <a:avLst/>
-          </a:prstGeom>
-          <a:noFill/>
-        </p:spPr>
-        <p:txBody>
-          <a:bodyPr wrap="square" anchor="ctr"/>
-          <a:lstStyle/>
-          <a:p>
-            <a:pPr algn="ctr"/>
-            <a:r>
-              <a:rPr sz="3400" b="1" i="0">
-                <a:solidFill>
-                  <a:srgbClr val="095292"/>
-                </a:solidFill>
-                <a:latin typeface="Calibri"/>
-              </a:rPr>
-              <a:t>Clase 10 · cierre conceptual</a:t>
-            </a:r>
-          </a:p>
-        </p:txBody>
-      </p:sp>
-      <p:sp>
-        <p:nvSpPr>
-          <p:cNvPr id="5" name="TextBox 4"/>
-          <p:cNvSpPr txBox="1"/>
-          <p:nvPr/>
-        </p:nvSpPr>
-        <p:spPr>
-          <a:xfrm>
-            <a:off x="457200" y="3017520"/>
-            <a:ext cx="11277295" cy="1645920"/>
-          </a:xfrm>
-          <a:prstGeom prst="rect">
-            <a:avLst/>
-          </a:prstGeom>
-          <a:noFill/>
-        </p:spPr>
-        <p:txBody>
-          <a:bodyPr wrap="square">
-            <a:spAutoFit/>
-          </a:bodyPr>
-          <a:lstStyle/>
-          <a:p>
-            <a:pPr algn="ctr">
-              <a:spcAft>
-                <a:spcPts val="600"/>
-              </a:spcAft>
-            </a:pPr>
-            <a:r>
-              <a:rPr sz="1600" b="0" i="0">
-                <a:solidFill>
-                  <a:srgbClr val="333333"/>
-                </a:solidFill>
-                <a:latin typeface="Calibri"/>
-              </a:rPr>
-              <a:t>Identificar drivers de costo (cómputo, datos, transferencia, idle).</a:t>
-            </a:r>
-          </a:p>
-          <a:p>
-            <a:pPr algn="ctr">
-              <a:spcAft>
-                <a:spcPts val="600"/>
-              </a:spcAft>
-            </a:pPr>
-            <a:r>
-              <a:rPr sz="1600" b="0" i="0">
-                <a:solidFill>
-                  <a:srgbClr val="333333"/>
-                </a:solidFill>
-                <a:latin typeface="Calibri"/>
-              </a:rPr>
-              <a:t>Proponer 3 apalancamientos de ahorro sin romper el diseño.</a:t>
-            </a:r>
-          </a:p>
-          <a:p>
-            <a:pPr algn="ctr">
-              <a:spcAft>
-                <a:spcPts val="600"/>
-              </a:spcAft>
-            </a:pPr>
-            <a:r>
-              <a:rPr sz="1600" b="0" i="0">
-                <a:solidFill>
-                  <a:srgbClr val="333333"/>
-                </a:solidFill>
-                <a:latin typeface="Calibri"/>
-              </a:rPr>
-              <a:t>Redactar sostenibilidad (apagado de labs, imágenes ligeras, sobredimensionamiento).</a:t>
-            </a:r>
-          </a:p>
-        </p:txBody>
-      </p:sp>
-      <p:sp>
-        <p:nvSpPr>
-          <p:cNvPr id="6" name="TextBox 5"/>
-          <p:cNvSpPr txBox="1"/>
-          <p:nvPr/>
-        </p:nvSpPr>
-        <p:spPr>
-          <a:xfrm>
-            <a:off x="457200" y="4754880"/>
-            <a:ext cx="11277295" cy="640080"/>
-          </a:xfrm>
-          <a:prstGeom prst="rect">
-            <a:avLst/>
-          </a:prstGeom>
-          <a:noFill/>
-        </p:spPr>
-        <p:txBody>
-          <a:bodyPr wrap="square">
-            <a:spAutoFit/>
-          </a:bodyPr>
-          <a:lstStyle/>
-          <a:p>
-            <a:pPr algn="ctr"/>
-            <a:r>
-              <a:rPr sz="2000" b="1" i="0">
-                <a:solidFill>
-                  <a:srgbClr val="269CCB"/>
-                </a:solidFill>
-                <a:latin typeface="Calibri"/>
-              </a:rPr>
-              <a:t>Teoría al servicio del diseño</a:t>
             </a:r>
           </a:p>
         </p:txBody>
@@ -9005,22 +8439,6 @@
                 </a:solidFill>
                 <a:latin typeface="Calibri"/>
               </a:rPr>
-              <a:t>–   Esta clase es autonoma por festivo: no hay encuentro sincronico y este fundamento se publica tal cual como material de lectura, asi que debe sostener por si solo la comprension del tema.</a:t>
-            </a:r>
-          </a:p>
-          <a:p>
-            <a:pPr>
-              <a:spcAft>
-                <a:spcPts val="800"/>
-              </a:spcAft>
-            </a:pPr>
-            <a:r>
-              <a:rPr sz="2000" b="0" i="0">
-                <a:solidFill>
-                  <a:srgbClr val="333333"/>
-                </a:solidFill>
-                <a:latin typeface="Calibri"/>
-              </a:rPr>
               <a:t>–   En un centro de datos propio el gasto es de capital: se compra un servidor, se paga por adelantado, se amortiza en tres o cinco anos, y desde ese momento dejarlo encendido una hora mas no aparece en ninguna factura visible.</a:t>
             </a:r>
           </a:p>
@@ -9560,22 +8978,6 @@
               <a:t>–   No es "el uso" en abstracto sino algo contable: instancias encendidas, horas encendidas, gigabytes almacenados, gigabytes de trafico de salida, numero de peticiones, gigabytes de logs ingeridos.</a:t>
             </a:r>
           </a:p>
-          <a:p>
-            <a:pPr>
-              <a:spcAft>
-                <a:spcPts val="800"/>
-              </a:spcAft>
-            </a:pPr>
-            <a:r>
-              <a:rPr sz="2000" b="0" i="0">
-                <a:solidFill>
-                  <a:srgbClr val="333333"/>
-                </a:solidFill>
-                <a:latin typeface="Calibri"/>
-              </a:rPr>
-              <a:t>–   Un componente al que el estudiante no le sabe poner driver es un componente que todavia no entiende.</a:t>
-            </a:r>
-          </a:p>
         </p:txBody>
       </p:sp>
       <p:sp>
@@ -9754,7 +9156,7 @@
                 </a:solidFill>
                 <a:latin typeface="Calibri"/>
               </a:rPr>
-              <a:t>Ordenes de magnitud que el docente debe poder citar</a:t>
+              <a:t>Ordenes de magnitud de costo</a:t>
             </a:r>
           </a:p>
         </p:txBody>

--- a/Arquitectura de Sistemas Computacionales/Clases/Clase 10 - Costos y sostenibilidad cloud/Presentacion.pptx
+++ b/Arquitectura de Sistemas Computacionales/Clases/Clase 10 - Costos y sostenibilidad cloud/Presentacion.pptx
@@ -9,21 +9,14 @@
     <p:sldId id="257" r:id="rId8"/>
     <p:sldId id="258" r:id="rId9"/>
     <p:sldId id="259" r:id="rId10"/>
-    <p:sldId id="260" r:id="rId11"/>
-    <p:sldId id="261" r:id="rId12"/>
+    <p:sldId id="260" r:id="rId12"/>
+    <p:sldId id="261" r:id="rId13"/>
     <p:sldId id="262" r:id="rId14"/>
     <p:sldId id="263" r:id="rId15"/>
     <p:sldId id="264" r:id="rId16"/>
     <p:sldId id="265" r:id="rId17"/>
     <p:sldId id="266" r:id="rId18"/>
     <p:sldId id="267" r:id="rId19"/>
-    <p:sldId id="268" r:id="rId20"/>
-    <p:sldId id="269" r:id="rId21"/>
-    <p:sldId id="270" r:id="rId22"/>
-    <p:sldId id="271" r:id="rId23"/>
-    <p:sldId id="272" r:id="rId24"/>
-    <p:sldId id="273" r:id="rId25"/>
-    <p:sldId id="274" r:id="rId26"/>
   </p:sldIdLst>
   <p:sldSz cx="12191695" cy="6858000" type="screen4x3"/>
   <p:notesSz cx="6858000" cy="9144000"/>
@@ -520,6 +513,36 @@
           <a:lstStyle/>
           <a:p>
             <a:r>
+              <a:t>DESARROLLO (para explicarlo, no se proyecta):</a:t>
+            </a:r>
+          </a:p>
+          <a:p/>
+          <a:p>
+            <a:r>
+              <a:t>En un centro de datos propio el gasto es de capital: se compra un servidor, se paga por adelantado, se amortiza en tres o cinco anos, y desde ese momento dejarlo encendido una hora mas no aparece en ninguna factura visible.</a:t>
+            </a:r>
+          </a:p>
+          <a:p/>
+          <a:p>
+            <a:r>
+              <a:t>En la nube el gasto es operativo y medido: se paga por segundo de computo, por gigabyte almacenado al mes, por gigabyte que sale hacia internet y por peticion atendida.</a:t>
+            </a:r>
+          </a:p>
+          <a:p/>
+          <a:p>
+            <a:r>
+              <a:t>El cambio no es contable sino arquitectonico.</a:t>
+            </a:r>
+          </a:p>
+          <a:p/>
+          <a:p>
+            <a:r>
+              <a:t>NOTAS:</a:t>
+            </a:r>
+          </a:p>
+          <a:p/>
+          <a:p>
+            <a:r>
               <a:t>Cuando cada recurso tiene precio unitario, casi cualquier decision de diseno se convierte en una cifra mensual y el arquitecto pasa a ser corresponsable del gasto.</a:t>
             </a:r>
           </a:p>
@@ -608,6 +631,54 @@
           <a:lstStyle/>
           <a:p>
             <a:r>
+              <a:t>DESARROLLO (para explicarlo, no se proyecta):</a:t>
+            </a:r>
+          </a:p>
+          <a:p/>
+          <a:p>
+            <a:r>
+              <a:t>CloudLite App no tiene facturacion real y no la va a tener: el curso prohibe cuentas cloud de pago y tarjetas de credito, y todo se trabaja con draw.io, Excalidraw, Killercoda y el free tier de GitHub Actions.</a:t>
+            </a:r>
+          </a:p>
+          <a:p/>
+          <a:p>
+            <a:r>
+              <a:t>En vez de pesos se usa una escala ordinal de tres niveles, Bajo, Medio y Alto, asignada componente por componente.</a:t>
+            </a:r>
+          </a:p>
+          <a:p/>
+          <a:p>
+            <a:r>
+              <a:t>Una escala ordinal ordena pero no mide distancias: decir que la base de datos es Alto y el frontend estatico es Bajo afirma que uno cuesta mas que el otro, no cuantas veces mas.</a:t>
+            </a:r>
+          </a:p>
+          <a:p/>
+          <a:p>
+            <a:r>
+              <a:t>Alcanza de sobra para el objetivo real, que es identificar el driver de costo de cada componente.</a:t>
+            </a:r>
+          </a:p>
+          <a:p/>
+          <a:p>
+            <a:r>
+              <a:t>Un driver de costo es la variable concreta que, si crece, hace crecer la factura de ese componente</a:t>
+            </a:r>
+          </a:p>
+          <a:p/>
+          <a:p>
+            <a:r>
+              <a:t>No es "el uso" en abstracto sino algo contable: instancias encendidas, horas encendidas, gigabytes almacenados, gigabytes de trafico de salida, numero de peticiones, gigabytes de logs ingeridos.</a:t>
+            </a:r>
+          </a:p>
+          <a:p/>
+          <a:p>
+            <a:r>
+              <a:t>NOTAS:</a:t>
+            </a:r>
+          </a:p>
+          <a:p/>
+          <a:p>
+            <a:r>
               <a:t>Eso no impide el analisis de costo, solo cambia la escala de medida.</a:t>
             </a:r>
           </a:p>
@@ -684,19 +755,37 @@
           <a:lstStyle/>
           <a:p>
             <a:r>
-              <a:t>Una base de datos gestionada cuesta entre dos y tres veces la maquina desnuda equivalente, porque incluye respaldos, parches y conmutacion por falla.</a:t>
+              <a:t>TEXTO COMPLETO DE LA LÁMINA (se proyecta resumido):</a:t>
             </a:r>
           </a:p>
           <a:p/>
           <a:p>
             <a:r>
-              <a:t>Una funcion serverless suele traer free tier de alrededor de un millon de invocaciones mensuales, asi que un componente poco usado cuesta cero de verdad.</a:t>
+              <a:t>Escala cualitativa: Bajo / Medio / Alto por componente.</a:t>
             </a:r>
           </a:p>
           <a:p/>
           <a:p>
             <a:r>
-              <a:t>(No se proyecta) El docente debe poder citar ordenes de magnitud, y conviene decir en voz alta que son convenciones aproximadas de precios de lista y no reglas duras: las cifras cambian por proveedor, region y ano, pero las proporciones se mantienen estables.</a:t>
+              <a:t>Drivers: siempre-on, egress, storage caliente, builds CI frecuentes.</a:t>
+            </a:r>
+          </a:p>
+          <a:p/>
+          <a:p>
+            <a:r>
+              <a:t>CloudLite: justifiquen por qué su diseño no es «siempre XL».</a:t>
+            </a:r>
+          </a:p>
+          <a:p/>
+          <a:p>
+            <a:r>
+              <a:t>Ejemplo: la base de datos siempre encendida es costo Medio; un worker que solo corre cuando hay mensajes en cola es Bajo.</a:t>
+            </a:r>
+          </a:p>
+          <a:p/>
+          <a:p>
+            <a:r>
+              <a:t>Egress = datos que salen del proveedor hacia internet; suele cobrarse por gigabyte, y la entrada casi nunca.</a:t>
             </a:r>
           </a:p>
         </p:txBody>
@@ -766,13 +855,61 @@
           <a:lstStyle/>
           <a:p>
             <a:r>
-              <a:t>El contenedor de la API queda en Medio, con driver instancias por horas encendidas.</a:t>
+              <a:t>DESARROLLO (para explicarlo, no se proyecta):</a:t>
             </a:r>
           </a:p>
           <a:p/>
           <a:p>
             <a:r>
-              <a:t>(No se proyecta) Y hay un componente que sorprende, el monitoreo de la Clase 8: un sistema que registra cada peticion con detalle puede generar mas gigabytes de logs que de datos de negocio, y la ingesta de logs se cobra por gigabyte; existen casos reales de equipos cuya observabilidad costaba mas que la aplicacion observada.</a:t>
+              <a:t>Una instancia pequena de 2 vCPU y 4 GB encendida todo el mes cuesta del orden de 25 a 40 dolares.</a:t>
+            </a:r>
+          </a:p>
+          <a:p/>
+          <a:p>
+            <a:r>
+              <a:t>El almacenamiento de objetos cuesta del orden de 0.02 a 0.03 dolares por gigabyte al mes, es decir casi nada.</a:t>
+            </a:r>
+          </a:p>
+          <a:p/>
+          <a:p>
+            <a:r>
+              <a:t>El trafico de salida hacia internet, llamado egress, cuesta del orden de 0.08 a 0.12 dolares por gigabyte: unas cuatro veces mas caro por gigabyte que guardarlo un mes entero.</a:t>
+            </a:r>
+          </a:p>
+          <a:p/>
+          <a:p>
+            <a:r>
+              <a:t>Un balanceador de carga cobra una tarifa fija de 18 a 25 dolares al mes incluso con cero trafico.</a:t>
+            </a:r>
+          </a:p>
+          <a:p/>
+          <a:p>
+            <a:r>
+              <a:t>La leccion durable son tres proporciones: guardar es barato, mover datos hacia afuera es caro, y estar prendido sin hacer nada tambien cuesta.</a:t>
+            </a:r>
+          </a:p>
+          <a:p/>
+          <a:p>
+            <a:r>
+              <a:t>NOTAS:</a:t>
+            </a:r>
+          </a:p>
+          <a:p/>
+          <a:p>
+            <a:r>
+              <a:t>Una base de datos gestionada cuesta entre dos y tres veces la maquina desnuda equivalente, porque incluye respaldos, parches y conmutacion por falla.</a:t>
+            </a:r>
+          </a:p>
+          <a:p/>
+          <a:p>
+            <a:r>
+              <a:t>Una funcion serverless suele traer free tier de alrededor de un millon de invocaciones mensuales, asi que un componente poco usado cuesta cero de verdad.</a:t>
+            </a:r>
+          </a:p>
+          <a:p/>
+          <a:p>
+            <a:r>
+              <a:t>(No se proyecta) El docente debe poder citar ordenes de magnitud, y conviene decir en voz alta que son convenciones aproximadas de precios de lista y no reglas duras: las cifras cambian por proveedor, region y ano, pero las proporciones se mantienen estables.</a:t>
             </a:r>
           </a:p>
         </p:txBody>
@@ -842,19 +979,73 @@
           <a:lstStyle/>
           <a:p>
             <a:r>
-              <a:t>El segundo ejemplo muestra por que el driver importa mas que el nivel.</a:t>
+              <a:t>DESARROLLO (para explicarlo, no se proyecta):</a:t>
             </a:r>
           </a:p>
           <a:p/>
           <a:p>
             <a:r>
-              <a:t>Esto tambien desarma la intuicion mas comun del estudiante, que si nadie usa el sistema el sistema no cuesta.</a:t>
+              <a:t>El primer ejemplo anclado en CloudLite es la tabla de costos, recorrida componente por componente.</a:t>
             </a:r>
           </a:p>
           <a:p/>
           <a:p>
             <a:r>
-              <a:t>(No se proyecta) La conclusion es contraintuitiva y por eso vale en clase: el driver del componente "almacenamiento de archivos" no es el almacenamiento, es el trafico, y la mitigacion no es contable sino arquitectonica, poner una cache o una red de distribucion de contenido delante para que el mismo archivo no salga del origen veinte veces.</a:t>
+              <a:t>La base de datos queda en Alto con un argumento preciso: paga computo las 24 horas de los 30 dias aunque nadie consulte, mas almacenamiento que nunca baja, mas respaldos.</a:t>
+            </a:r>
+          </a:p>
+          <a:p/>
+          <a:p>
+            <a:r>
+              <a:t>El frontend estatico queda en Bajo porque es almacenamiento mas trafico y no tiene computo propio.</a:t>
+            </a:r>
+          </a:p>
+          <a:p/>
+          <a:p>
+            <a:r>
+              <a:t>Las notificaciones quedan en Bajo si se modelan como funcion serverless de volumen pequeno</a:t>
+            </a:r>
+          </a:p>
+          <a:p/>
+          <a:p>
+            <a:r>
+              <a:t>Y pasan a Medio si se implementan como un worker encendido de forma permanente: el mismo requisito con dos disenos y dos costos, que es exactamente el razonamiento que se evalua.</a:t>
+            </a:r>
+          </a:p>
+          <a:p/>
+          <a:p>
+            <a:r>
+              <a:t>Los cuatro conductores que explican casi toda la factura son: computo siempre encendido, transferencia de salida o egress, almacenamiento caliente y volumen de logs.</a:t>
+            </a:r>
+          </a:p>
+          <a:p/>
+          <a:p>
+            <a:r>
+              <a:t>Un error comun es costear solo el computo y olvidar el egress: en servicios que entregan archivos a muchos usuarios, la transferencia de salida puede superar al computo.</a:t>
+            </a:r>
+          </a:p>
+          <a:p/>
+          <a:p>
+            <a:r>
+              <a:t>Un ejemplo de fila es: API de turnos, nivel Medio, driver computo siempre encendido; si se mueve a un servicio que escala a cero fuera de horario, baja a Bajo.</a:t>
+            </a:r>
+          </a:p>
+          <a:p/>
+          <a:p>
+            <a:r>
+              <a:t>NOTAS:</a:t>
+            </a:r>
+          </a:p>
+          <a:p/>
+          <a:p>
+            <a:r>
+              <a:t>El contenedor de la API queda en Medio, con driver instancias por horas encendidas.</a:t>
+            </a:r>
+          </a:p>
+          <a:p/>
+          <a:p>
+            <a:r>
+              <a:t>(No se proyecta) Y hay un componente que sorprende, el monitoreo de la Clase 8: un sistema que registra cada peticion con detalle puede generar mas gigabytes de logs que de datos de negocio, y la ingesta de logs se cobra por gigabyte; existen casos reales de equipos cuya observabilidad costaba mas que la aplicacion observada.</a:t>
             </a:r>
           </a:p>
         </p:txBody>
@@ -924,19 +1115,61 @@
           <a:lstStyle/>
           <a:p>
             <a:r>
-              <a:t>De ahi salen tres acciones de right-sizing.</a:t>
+              <a:t>DESARROLLO (para explicarlo, no se proyecta):</a:t>
             </a:r>
           </a:p>
           <a:p/>
           <a:p>
             <a:r>
-              <a:t>(No se proyecta) Right-sizing es ajustar la capacidad aprovisionada a la demanda observada, y la palabra clave es observada: sin medicion es adivinanza, y la medicion viene de las senales doradas de la Clase 8, en particular la saturacion.</a:t>
+              <a:t>Suponga que CloudLite permite subir comprobantes en PDF o imagenes y que en un semestre acumula 5000 archivos de 2 MB, o sea 10 GB.</a:t>
             </a:r>
           </a:p>
           <a:p/>
           <a:p>
             <a:r>
-              <a:t>(No se proyecta) La tercera es adelgazar el artefacto, que amarra con la Clase 3: una imagen basada en python:3.12 pesa del orden de 1 GB, la variante slim unos 150 MB y una construida sobre alpine puede bajar a decenas de megabytes; eso es menos registro, menos transferencia en cada despliegue y menos tiempo de arranque, dato que reaparece en la Clase 13.</a:t>
+              <a:t>Guardarlos cuesta unos 0.25 dolares al mes, despreciable.</a:t>
+            </a:r>
+          </a:p>
+          <a:p/>
+          <a:p>
+            <a:r>
+              <a:t>Pero si cada archivo se descarga en promedio 20 veces, el sistema mueve 200 GB de egress al mes, que a 0.09 dolares por gigabyte son unos 18 dolares: setenta veces mas que el almacenamiento.</a:t>
+            </a:r>
+          </a:p>
+          <a:p/>
+          <a:p>
+            <a:r>
+              <a:t>Hay dos familias de recursos: los que cobran por uso y los que cobran por existir.</a:t>
+            </a:r>
+          </a:p>
+          <a:p/>
+          <a:p>
+            <a:r>
+              <a:t>La base de datos gestionada, el balanceador, las IP reservadas, los volumenes huerfanos y las instantaneas viejas son de la segunda y facturan aunque el ultimo usuario se haya ido hace meses.</a:t>
+            </a:r>
+          </a:p>
+          <a:p/>
+          <a:p>
+            <a:r>
+              <a:t>NOTAS:</a:t>
+            </a:r>
+          </a:p>
+          <a:p/>
+          <a:p>
+            <a:r>
+              <a:t>El segundo ejemplo muestra por que el driver importa mas que el nivel.</a:t>
+            </a:r>
+          </a:p>
+          <a:p/>
+          <a:p>
+            <a:r>
+              <a:t>Esto tambien desarma la intuicion mas comun del estudiante, que si nadie usa el sistema el sistema no cuesta.</a:t>
+            </a:r>
+          </a:p>
+          <a:p/>
+          <a:p>
+            <a:r>
+              <a:t>(No se proyecta) La conclusion es contraintuitiva y por eso vale en clase: el driver del componente "almacenamiento de archivos" no es el almacenamiento, es el trafico, y la mitigacion no es contable sino arquitectonica, poner una cache o una red de distribucion de contenido delante para que el mismo archivo no salga del origen veinte veces.</a:t>
             </a:r>
           </a:p>
         </p:txBody>
@@ -1006,19 +1239,73 @@
           <a:lstStyle/>
           <a:p>
             <a:r>
-              <a:t>Por eso las mismas tres acciones sirven a la vez para la factura y para la huella.</a:t>
+              <a:t>DESARROLLO (para explicarlo, no se proyecta):</a:t>
             </a:r>
           </a:p>
           <a:p/>
           <a:p>
             <a:r>
-              <a:t>(No se proyecta) La sostenibilidad en este curso es tecnica antes que ambiental, y conviene decirlo asi para no caer en discurso vacio.</a:t>
+              <a:t>La metrica que lo gobierna es la utilizacion, el porcentaje de la capacidad pagada que efectivamente se usa; una maquina al 5 por ciento de CPU durante un mes desperdicia el 95 por ciento de lo pagado.</a:t>
             </a:r>
           </a:p>
           <a:p/>
           <a:p>
             <a:r>
-              <a:t>(No se proyecta) Y hay una tercera cara que el estudiante ignora: el costo humano de mantener el diseno.</a:t>
+              <a:t>La convencion de industria, que es convencion y no regla, apunta a una utilizacion sostenida entre el 40 y el 70 por ciento: por debajo hay sobreaprovisionamiento y por encima no queda holgura para picos.</a:t>
+            </a:r>
+          </a:p>
+          <a:p/>
+          <a:p>
+            <a:r>
+              <a:t>La primera accion tipica es reducir tamano o numero de replicas hasta acercarse a ese rango.</a:t>
+            </a:r>
+          </a:p>
+          <a:p/>
+          <a:p>
+            <a:r>
+              <a:t>La segunda es apagar por horario lo que no es produccion: un ambiente encendido las 24 horas los siete dias consume 168 horas semanales, y encendido solo de 8 a 6 en dias habiles consume 50, un ahorro cercano al 70 por ciento sin tocar codigo.</a:t>
+            </a:r>
+          </a:p>
+          <a:p/>
+          <a:p>
+            <a:r>
+              <a:t>Igual de validos son fijar retencion de logs a 30 dias en vez de para siempre y borrar volumenes e instantaneas sin dueno.</a:t>
+            </a:r>
+          </a:p>
+          <a:p/>
+          <a:p>
+            <a:r>
+              <a:t>La tercera accion es reducir lo que esta sobredimensionado: una instancia que nunca pasa del 20 por ciento de CPU puede bajar a la mitad de su capacidad sin que nadie lo note.</a:t>
+            </a:r>
+          </a:p>
+          <a:p/>
+          <a:p>
+            <a:r>
+              <a:t>El orden correcto es: medir durante al menos 2 semanas, reducir un escalon y volver a medir; reducir sin datos es adivinar.</a:t>
+            </a:r>
+          </a:p>
+          <a:p/>
+          <a:p>
+            <a:r>
+              <a:t>NOTAS:</a:t>
+            </a:r>
+          </a:p>
+          <a:p/>
+          <a:p>
+            <a:r>
+              <a:t>De ahi salen tres acciones de right-sizing.</a:t>
+            </a:r>
+          </a:p>
+          <a:p/>
+          <a:p>
+            <a:r>
+              <a:t>(No se proyecta) Right-sizing es ajustar la capacidad aprovisionada a la demanda observada, y la palabra clave es observada: sin medicion es adivinanza, y la medicion viene de las senales doradas de la Clase 8, en particular la saturacion.</a:t>
+            </a:r>
+          </a:p>
+          <a:p/>
+          <a:p>
+            <a:r>
+              <a:t>(No se proyecta) La tercera es adelgazar el artefacto, que amarra con la Clase 3: una imagen basada en python:3.12 pesa del orden de 1 GB, la variante slim unos 150 MB y una construida sobre alpine puede bajar a decenas de megabytes; eso es menos registro, menos transferencia en cada despliegue y menos tiempo de arranque, dato que reaparece en la Clase 13.</a:t>
             </a:r>
           </a:p>
         </p:txBody>
@@ -1088,7 +1375,151 @@
           <a:lstStyle/>
           <a:p>
             <a:r>
+              <a:t>TEXTO COMPLETO DE LA LÁMINA (se proyecta resumido):</a:t>
+            </a:r>
+          </a:p>
+          <a:p/>
+          <a:p>
+            <a:r>
+              <a:t>Menos capas innecesarias · imágenes slim · apagar labs · right-sizing.</a:t>
+            </a:r>
+          </a:p>
+          <a:p/>
+          <a:p>
+            <a:r>
+              <a:t>Relación con escalabilidad: escala cuando hay carga, no por vanidad.</a:t>
+            </a:r>
+          </a:p>
+          <a:p/>
+          <a:p>
+            <a:r>
+              <a:t>Sostenibilidad técnica: que el equipo pueda operar el diseño. Ambiental: no consumir cómputo que nadie usa.</a:t>
+            </a:r>
+          </a:p>
+          <a:p/>
+          <a:p>
+            <a:r>
+              <a:t>Ejemplo: una imagen slim pesa decenas de MB frente a cerca de 1 GB de una completa: menos almacenamiento, menos transferencia y despliegues más rápidos.</a:t>
+            </a:r>
+          </a:p>
+          <a:p/>
+          <a:p>
+            <a:r>
+              <a:t>DESARROLLO (para explicarlo, no se proyecta):</a:t>
+            </a:r>
+          </a:p>
+          <a:p/>
+          <a:p>
+            <a:r>
+              <a:t>La energia que consume un servidor depende sobre todo de la capacidad encendida, no de la usada: una maquina al 5 por ciento no consume el 5 por ciento de la energia, consume mucho mas</a:t>
+            </a:r>
+          </a:p>
+          <a:p/>
+          <a:p>
+            <a:r>
+              <a:t>Porque el consumo en reposo de un servidor moderno ronda la mitad del consumo a plena carga.</a:t>
+            </a:r>
+          </a:p>
+          <a:p/>
+          <a:p>
+            <a:r>
+              <a:t>Hay ademas una decision de arquitectura con efecto directo: la intensidad de carbono de la electricidad varia fuerte entre regiones, asi que elegir region no es solo latencia y cumplimiento normativo.</a:t>
+            </a:r>
+          </a:p>
+          <a:p/>
+          <a:p>
+            <a:r>
+              <a:t>Una arquitectura de ocho servicios que un equipo de tres personas no puede operar es insostenible aunque la infraestructura sea gratis.</a:t>
+            </a:r>
+          </a:p>
+          <a:p/>
+          <a:p>
+            <a:r>
+              <a:t>Un ejemplo en CloudLite: un monolito modular de un solo contenedor es mas sostenible para un equipo de 1 o 2 personas que cinco microservicios, porque tiene 1 pipeline, 1 despliegue y 1 lugar donde buscar un error.</a:t>
+            </a:r>
+          </a:p>
+          <a:p/>
+          <a:p>
+            <a:r>
+              <a:t>La cara ambiental tambien es medible: un entorno de pruebas apagado fuera del horario de trabajo consume menos de la mitad de las horas de computo de uno encendido todo el dia.</a:t>
+            </a:r>
+          </a:p>
+          <a:p/>
+          <a:p>
+            <a:r>
+              <a:t>Un error comun es medir la sostenibilidad solo en emisiones: un diseno que nadie del equipo entiende termina reescrito, y reescribir consume mas recursos que operarlo bien.</a:t>
+            </a:r>
+          </a:p>
+          <a:p/>
+          <a:p>
+            <a:r>
+              <a:t>NOTAS:</a:t>
+            </a:r>
+          </a:p>
+          <a:p/>
+          <a:p>
+            <a:r>
+              <a:t>Por eso las mismas tres acciones sirven a la vez para la factura y para la huella.</a:t>
+            </a:r>
+          </a:p>
+          <a:p/>
+          <a:p>
+            <a:r>
+              <a:t>PREGUNTAS FRECUENTES Y CIERRE CONCEPTUAL ()</a:t>
+            </a:r>
+          </a:p>
+          <a:p/>
+          <a:p>
+            <a:r>
+              <a:t>La primera es si tiene sentido estimar costos cuando nadie va a pagar nada; la respuesta es que la estimacion no cambia la factura, cambia el diseno, y que en un trabajo real la segunda pregunta despues de "funciona" es "cuanto cuesta al mes".</a:t>
+            </a:r>
+          </a:p>
+          <a:p/>
+          <a:p>
+            <a:r>
+              <a:t>La segunda es si entonces lo mas barato es siempre lo mejor, y la respuesta es no</a:t>
+            </a:r>
+          </a:p>
+          <a:p/>
+          <a:p>
+            <a:r>
+              <a:t>Porque lo mas barato suele mover el costo hacia la operacion humana; el concepto a nombrar es costo total de propiedad, que suma infraestructura mas operacion mas incidentes mas migraciones</a:t>
+            </a:r>
+          </a:p>
+          <a:p/>
+          <a:p>
+            <a:r>
+              <a:t>Y bajo esa lente una base de datos autoadministrada en una maquina desnuda es mas barata al mes y mas cara al ano cuando alguien debe parcharla, respaldarla y atender su caida a las tres de la manana.</a:t>
+            </a:r>
+          </a:p>
+          <a:p/>
+          <a:p>
+            <a:r>
+              <a:t>La tercera es como asignar los niveles sin factura: se asignan comparando componentes entre si con el driver como argumento y escribiendo el supuesto</a:t>
+            </a:r>
+          </a:p>
+          <a:p/>
+          <a:p>
+            <a:r>
+              <a:t>"Alto porque es computo 24/7 mas almacenamiento acumulativo mas respaldos" es defendible, "Alto porque suena caro" no.</a:t>
+            </a:r>
+          </a:p>
+          <a:p/>
+          <a:p>
+            <a:r>
               <a:t>Tres preguntas aparecen siempre.</a:t>
+            </a:r>
+          </a:p>
+          <a:p/>
+          <a:p>
+            <a:r>
+              <a:t>(No se proyecta) La sostenibilidad en este curso es tecnica antes que ambiental, y conviene decirlo asi para no caer en discurso vacio.</a:t>
+            </a:r>
+          </a:p>
+          <a:p/>
+          <a:p>
+            <a:r>
+              <a:t>(No se proyecta) Y hay una tercera cara que el estudiante ignora: el costo humano de mantener el diseno.</a:t>
             </a:r>
           </a:p>
         </p:txBody>
@@ -4563,21 +4994,173 @@
                 </a:solidFill>
                 <a:latin typeface="Calibri"/>
               </a:rPr>
-              <a:t>Primer ejemplo: la tabla de costos, componente por componente (1/2)</a:t>
-            </a:r>
-          </a:p>
-        </p:txBody>
-      </p:sp>
-      <p:sp>
-        <p:nvSpPr>
-          <p:cNvPr id="5" name="TextBox 4"/>
+              <a:t>Right-sizing: tres acciones ancladas en observacion</a:t>
+            </a:r>
+          </a:p>
+        </p:txBody>
+      </p:sp>
+      <p:sp>
+        <p:nvSpPr>
+          <p:cNvPr id="5" name="Rounded Rectangle 4"/>
+          <p:cNvSpPr/>
+          <p:nvPr/>
+        </p:nvSpPr>
+        <p:spPr>
+          <a:xfrm>
+            <a:off x="5803166" y="1188719"/>
+            <a:ext cx="5998464" cy="4828032"/>
+          </a:xfrm>
+          <a:prstGeom prst="roundRect">
+            <a:avLst>
+              <a:gd name="adj" fmla="val 4000"/>
+            </a:avLst>
+          </a:prstGeom>
+          <a:solidFill>
+            <a:srgbClr val="E8EEF4"/>
+          </a:solidFill>
+          <a:ln>
+            <a:noFill/>
+          </a:ln>
+        </p:spPr>
+        <p:style>
+          <a:lnRef idx="1">
+            <a:schemeClr val="accent1"/>
+          </a:lnRef>
+          <a:fillRef idx="3">
+            <a:schemeClr val="accent1"/>
+          </a:fillRef>
+          <a:effectRef idx="2">
+            <a:schemeClr val="accent1"/>
+          </a:effectRef>
+          <a:fontRef idx="minor">
+            <a:schemeClr val="lt1"/>
+          </a:fontRef>
+        </p:style>
+        <p:txBody>
+          <a:bodyPr rtlCol="0" anchor="ctr"/>
+          <a:lstStyle/>
+          <a:p>
+            <a:pPr algn="ctr"/>
+          </a:p>
+        </p:txBody>
+      </p:sp>
+      <p:pic>
+        <p:nvPicPr>
+          <p:cNvPr id="6" name="Picture 5" descr="right-sizing-paso1.png"/>
+          <p:cNvPicPr>
+            <a:picLocks noChangeAspect="1"/>
+          </p:cNvPicPr>
+          <p:nvPr/>
+        </p:nvPicPr>
+        <p:blipFill>
+          <a:blip r:embed="rId2"/>
+          <a:stretch>
+            <a:fillRect/>
+          </a:stretch>
+        </p:blipFill>
+        <p:spPr>
+          <a:xfrm>
+            <a:off x="5876318" y="1261872"/>
+            <a:ext cx="5852160" cy="4681728"/>
+          </a:xfrm>
+          <a:prstGeom prst="rect">
+            <a:avLst/>
+          </a:prstGeom>
+        </p:spPr>
+      </p:pic>
+      <p:pic>
+        <p:nvPicPr>
+          <p:cNvPr id="7" name="Picture 6" descr="right-sizing-paso2.png"/>
+          <p:cNvPicPr>
+            <a:picLocks noChangeAspect="1"/>
+          </p:cNvPicPr>
+          <p:nvPr/>
+        </p:nvPicPr>
+        <p:blipFill>
+          <a:blip r:embed="rId3"/>
+          <a:stretch>
+            <a:fillRect/>
+          </a:stretch>
+        </p:blipFill>
+        <p:spPr>
+          <a:xfrm>
+            <a:off x="5876318" y="1261872"/>
+            <a:ext cx="5852160" cy="4681728"/>
+          </a:xfrm>
+          <a:prstGeom prst="rect">
+            <a:avLst/>
+          </a:prstGeom>
+        </p:spPr>
+      </p:pic>
+      <p:pic>
+        <p:nvPicPr>
+          <p:cNvPr id="8" name="Picture 7" descr="right-sizing-paso3.png"/>
+          <p:cNvPicPr>
+            <a:picLocks noChangeAspect="1"/>
+          </p:cNvPicPr>
+          <p:nvPr/>
+        </p:nvPicPr>
+        <p:blipFill>
+          <a:blip r:embed="rId4"/>
+          <a:stretch>
+            <a:fillRect/>
+          </a:stretch>
+        </p:blipFill>
+        <p:spPr>
+          <a:xfrm>
+            <a:off x="5876318" y="1261872"/>
+            <a:ext cx="5852160" cy="4681728"/>
+          </a:xfrm>
+          <a:prstGeom prst="rect">
+            <a:avLst/>
+          </a:prstGeom>
+        </p:spPr>
+      </p:pic>
+      <p:sp>
+        <p:nvSpPr>
+          <p:cNvPr id="13" name="TextBox 12"/>
           <p:cNvSpPr txBox="1"/>
           <p:nvPr/>
         </p:nvSpPr>
         <p:spPr>
           <a:xfrm>
-            <a:off x="457200" y="1170432"/>
-            <a:ext cx="11277295" cy="5230368"/>
+            <a:off x="5870301" y="5961888"/>
+            <a:ext cx="5864193" cy="320040"/>
+          </a:xfrm>
+          <a:prstGeom prst="rect">
+            <a:avLst/>
+          </a:prstGeom>
+          <a:noFill/>
+        </p:spPr>
+        <p:txBody>
+          <a:bodyPr wrap="square">
+            <a:spAutoFit/>
+          </a:bodyPr>
+          <a:lstStyle/>
+          <a:p>
+            <a:pPr algn="ctr"/>
+            <a:r>
+              <a:rPr sz="1100" b="0" i="1">
+                <a:solidFill>
+                  <a:srgbClr val="666666"/>
+                </a:solidFill>
+                <a:latin typeface="Calibri"/>
+              </a:rPr>
+              <a:t>Clic para avanzar la animación</a:t>
+            </a:r>
+          </a:p>
+        </p:txBody>
+      </p:sp>
+      <p:sp>
+        <p:nvSpPr>
+          <p:cNvPr id="14" name="TextBox 13"/>
+          <p:cNvSpPr txBox="1"/>
+          <p:nvPr/>
+        </p:nvSpPr>
+        <p:spPr>
+          <a:xfrm>
+            <a:off x="457200" y="1353312"/>
+            <a:ext cx="5093061" cy="5047488"/>
           </a:xfrm>
           <a:prstGeom prst="rect">
             <a:avLst/>
@@ -4602,7 +5185,7 @@
                 </a:solidFill>
                 <a:latin typeface="Calibri"/>
               </a:rPr>
-              <a:t>–   El primer ejemplo anclado en la app es la tabla de costos, recorrida componente por componente.</a:t>
+              <a:t>–   La metrica que lo gobierna es la utilizacion, el porcentaje de la capacidad pagada que efectivamente se usa;</a:t>
             </a:r>
           </a:p>
           <a:p>
@@ -4618,62 +5201,14 @@
                 </a:solidFill>
                 <a:latin typeface="Calibri"/>
               </a:rPr>
-              <a:t>–   La base de datos queda en Alto con un argumento preciso: paga computo las 24 horas de los 30 dias aunque nadie consulte, mas almacenamiento que nunca baja, mas respaldos.</a:t>
-            </a:r>
-          </a:p>
-          <a:p>
-            <a:pPr>
-              <a:spcAft>
-                <a:spcPts val="800"/>
-              </a:spcAft>
-            </a:pPr>
-            <a:r>
-              <a:rPr sz="2000" b="0" i="0">
-                <a:solidFill>
-                  <a:srgbClr val="333333"/>
-                </a:solidFill>
-                <a:latin typeface="Calibri"/>
-              </a:rPr>
-              <a:t>–   El frontend estatico queda en Bajo porque es almacenamiento mas trafico y no tiene computo propio.</a:t>
-            </a:r>
-          </a:p>
-          <a:p>
-            <a:pPr>
-              <a:spcAft>
-                <a:spcPts val="800"/>
-              </a:spcAft>
-            </a:pPr>
-            <a:r>
-              <a:rPr sz="2000" b="0" i="0">
-                <a:solidFill>
-                  <a:srgbClr val="333333"/>
-                </a:solidFill>
-                <a:latin typeface="Calibri"/>
-              </a:rPr>
-              <a:t>–   Las notificaciones quedan en Bajo si se modelan como funcion serverless de volumen pequeno</a:t>
-            </a:r>
-          </a:p>
-          <a:p>
-            <a:pPr>
-              <a:spcAft>
-                <a:spcPts val="800"/>
-              </a:spcAft>
-            </a:pPr>
-            <a:r>
-              <a:rPr sz="2000" b="0" i="0">
-                <a:solidFill>
-                  <a:srgbClr val="333333"/>
-                </a:solidFill>
-                <a:latin typeface="Calibri"/>
-              </a:rPr>
-              <a:t>–   Y pasan a Medio si se implementan como un worker encendido de forma permanente: el mismo requisito con dos disenos y dos costos, que es exactamente el razonamiento que se evalua.</a:t>
-            </a:r>
-          </a:p>
-        </p:txBody>
-      </p:sp>
-      <p:sp>
-        <p:nvSpPr>
-          <p:cNvPr id="6" name="TextBox 5"/>
+              <a:t>–   La convencion de industria, que es convencion y no regla, apunta a una utilizacion sostenida entre el 40 y el 70 por ciento: por debajo hay…</a:t>
+            </a:r>
+          </a:p>
+        </p:txBody>
+      </p:sp>
+      <p:sp>
+        <p:nvSpPr>
+          <p:cNvPr id="15" name="TextBox 14"/>
           <p:cNvSpPr txBox="1"/>
           <p:nvPr/>
         </p:nvSpPr>
@@ -4711,6 +5246,142 @@
   <p:clrMapOvr>
     <a:masterClrMapping/>
   </p:clrMapOvr>
+  <p:timing>
+    <p:tnLst>
+      <p:par>
+        <p:cTn id="1" dur="indefinite" restart="never" nodeType="tmRoot">
+          <p:childTnLst>
+            <p:seq concurrent="1" nextAc="seek">
+              <p:cTn id="2" dur="indefinite" nodeType="mainSeq">
+                <p:childTnLst>
+                  <p:par>
+                    <p:cTn id="3" fill="hold">
+                      <p:stCondLst>
+                        <p:cond delay="indefinite"/>
+                      </p:stCondLst>
+                      <p:childTnLst>
+                        <p:par>
+                          <p:cTn id="4" fill="hold">
+                            <p:stCondLst>
+                              <p:cond delay="0"/>
+                            </p:stCondLst>
+                            <p:childTnLst>
+                              <p:par>
+                                <p:cTn id="5" presetID="10" presetClass="entr" presetSubtype="0" fill="hold" nodeType="clickEffect">
+                                  <p:stCondLst>
+                                    <p:cond delay="0"/>
+                                  </p:stCondLst>
+                                  <p:childTnLst>
+                                    <p:set>
+                                      <p:cBhvr>
+                                        <p:cTn id="6" dur="1" fill="hold">
+                                          <p:stCondLst>
+                                            <p:cond delay="0"/>
+                                          </p:stCondLst>
+                                        </p:cTn>
+                                        <p:tgtEl>
+                                          <p:spTgt spid="7"/>
+                                        </p:tgtEl>
+                                        <p:attrNameLst>
+                                          <p:attrName>style.visibility</p:attrName>
+                                        </p:attrNameLst>
+                                      </p:cBhvr>
+                                      <p:to>
+                                        <p:strVal val="visible"/>
+                                      </p:to>
+                                    </p:set>
+                                    <p:animEffect transition="in" filter="fade">
+                                      <p:cBhvr>
+                                        <p:cTn id="7" dur="450"/>
+                                        <p:tgtEl>
+                                          <p:spTgt spid="7"/>
+                                        </p:tgtEl>
+                                      </p:cBhvr>
+                                    </p:animEffect>
+                                  </p:childTnLst>
+                                </p:cTn>
+                              </p:par>
+                            </p:childTnLst>
+                          </p:cTn>
+                        </p:par>
+                      </p:childTnLst>
+                    </p:cTn>
+                  </p:par>
+                  <p:par>
+                    <p:cTn id="8" fill="hold">
+                      <p:stCondLst>
+                        <p:cond delay="indefinite"/>
+                      </p:stCondLst>
+                      <p:childTnLst>
+                        <p:par>
+                          <p:cTn id="9" fill="hold">
+                            <p:stCondLst>
+                              <p:cond delay="0"/>
+                            </p:stCondLst>
+                            <p:childTnLst>
+                              <p:par>
+                                <p:cTn id="10" presetID="10" presetClass="entr" presetSubtype="0" fill="hold" nodeType="clickEffect">
+                                  <p:stCondLst>
+                                    <p:cond delay="0"/>
+                                  </p:stCondLst>
+                                  <p:childTnLst>
+                                    <p:set>
+                                      <p:cBhvr>
+                                        <p:cTn id="11" dur="1" fill="hold">
+                                          <p:stCondLst>
+                                            <p:cond delay="0"/>
+                                          </p:stCondLst>
+                                        </p:cTn>
+                                        <p:tgtEl>
+                                          <p:spTgt spid="8"/>
+                                        </p:tgtEl>
+                                        <p:attrNameLst>
+                                          <p:attrName>style.visibility</p:attrName>
+                                        </p:attrNameLst>
+                                      </p:cBhvr>
+                                      <p:to>
+                                        <p:strVal val="visible"/>
+                                      </p:to>
+                                    </p:set>
+                                    <p:animEffect transition="in" filter="fade">
+                                      <p:cBhvr>
+                                        <p:cTn id="12" dur="450"/>
+                                        <p:tgtEl>
+                                          <p:spTgt spid="8"/>
+                                        </p:tgtEl>
+                                      </p:cBhvr>
+                                    </p:animEffect>
+                                  </p:childTnLst>
+                                </p:cTn>
+                              </p:par>
+                            </p:childTnLst>
+                          </p:cTn>
+                        </p:par>
+                      </p:childTnLst>
+                    </p:cTn>
+                  </p:par>
+                </p:childTnLst>
+              </p:cTn>
+              <p:prevCondLst>
+                <p:cond evt="onPrev" delay="0">
+                  <p:tgtEl>
+                    <p:sldTgt/>
+                  </p:tgtEl>
+                </p:cond>
+              </p:prevCondLst>
+              <p:nextCondLst>
+                <p:cond evt="onNext" delay="0">
+                  <p:tgtEl>
+                    <p:sldTgt/>
+                  </p:tgtEl>
+                </p:cond>
+              </p:nextCondLst>
+            </p:seq>
+          </p:childTnLst>
+        </p:cTn>
+      </p:par>
+    </p:tnLst>
+  </p:timing>
 </p:sld>
 </file>
 
@@ -4847,21 +5518,125 @@
                 </a:solidFill>
                 <a:latin typeface="Calibri"/>
               </a:rPr>
-              <a:t>Primer ejemplo: la tabla de costos, componente por componente (2/2)</a:t>
-            </a:r>
-          </a:p>
-        </p:txBody>
-      </p:sp>
-      <p:sp>
-        <p:nvSpPr>
-          <p:cNvPr id="5" name="TextBox 4"/>
+              <a:t>Sostenibilidad</a:t>
+            </a:r>
+          </a:p>
+        </p:txBody>
+      </p:sp>
+      <p:sp>
+        <p:nvSpPr>
+          <p:cNvPr id="5" name="Rounded Rectangle 4"/>
+          <p:cNvSpPr/>
+          <p:nvPr/>
+        </p:nvSpPr>
+        <p:spPr>
+          <a:xfrm>
+            <a:off x="5797149" y="1882619"/>
+            <a:ext cx="6010497" cy="3440233"/>
+          </a:xfrm>
+          <a:prstGeom prst="roundRect">
+            <a:avLst>
+              <a:gd name="adj" fmla="val 4000"/>
+            </a:avLst>
+          </a:prstGeom>
+          <a:solidFill>
+            <a:srgbClr val="E8EEF4"/>
+          </a:solidFill>
+          <a:ln>
+            <a:noFill/>
+          </a:ln>
+        </p:spPr>
+        <p:style>
+          <a:lnRef idx="1">
+            <a:schemeClr val="accent1"/>
+          </a:lnRef>
+          <a:fillRef idx="3">
+            <a:schemeClr val="accent1"/>
+          </a:fillRef>
+          <a:effectRef idx="2">
+            <a:schemeClr val="accent1"/>
+          </a:effectRef>
+          <a:fontRef idx="minor">
+            <a:schemeClr val="lt1"/>
+          </a:fontRef>
+        </p:style>
+        <p:txBody>
+          <a:bodyPr rtlCol="0" anchor="ctr"/>
+          <a:lstStyle/>
+          <a:p>
+            <a:pPr algn="ctr"/>
+          </a:p>
+        </p:txBody>
+      </p:sp>
+      <p:pic>
+        <p:nvPicPr>
+          <p:cNvPr id="6" name="Picture 5" descr="green-energy-solar-panels.jpg"/>
+          <p:cNvPicPr>
+            <a:picLocks noChangeAspect="1"/>
+          </p:cNvPicPr>
+          <p:nvPr/>
+        </p:nvPicPr>
+        <p:blipFill>
+          <a:blip r:embed="rId2"/>
+          <a:stretch>
+            <a:fillRect/>
+          </a:stretch>
+        </p:blipFill>
+        <p:spPr>
+          <a:xfrm>
+            <a:off x="5870301" y="1955771"/>
+            <a:ext cx="5864193" cy="3293929"/>
+          </a:xfrm>
+          <a:prstGeom prst="rect">
+            <a:avLst/>
+          </a:prstGeom>
+        </p:spPr>
+      </p:pic>
+      <p:sp>
+        <p:nvSpPr>
+          <p:cNvPr id="7" name="TextBox 6"/>
           <p:cNvSpPr txBox="1"/>
           <p:nvPr/>
         </p:nvSpPr>
         <p:spPr>
           <a:xfrm>
-            <a:off x="457200" y="1170432"/>
-            <a:ext cx="11277295" cy="5230368"/>
+            <a:off x="5870301" y="5961888"/>
+            <a:ext cx="5864193" cy="320040"/>
+          </a:xfrm>
+          <a:prstGeom prst="rect">
+            <a:avLst/>
+          </a:prstGeom>
+          <a:noFill/>
+        </p:spPr>
+        <p:txBody>
+          <a:bodyPr wrap="square">
+            <a:spAutoFit/>
+          </a:bodyPr>
+          <a:lstStyle/>
+          <a:p>
+            <a:pPr algn="ctr"/>
+            <a:r>
+              <a:rPr sz="1100" b="0" i="1">
+                <a:solidFill>
+                  <a:srgbClr val="666666"/>
+                </a:solidFill>
+                <a:latin typeface="Calibri"/>
+              </a:rPr>
+              <a:t>Foto: K · Pexels</a:t>
+            </a:r>
+          </a:p>
+        </p:txBody>
+      </p:sp>
+      <p:sp>
+        <p:nvSpPr>
+          <p:cNvPr id="8" name="TextBox 7"/>
+          <p:cNvSpPr txBox="1"/>
+          <p:nvPr/>
+        </p:nvSpPr>
+        <p:spPr>
+          <a:xfrm>
+            <a:off x="457200" y="1353312"/>
+            <a:ext cx="5093061" cy="5047488"/>
           </a:xfrm>
           <a:prstGeom prst="rect">
             <a:avLst/>
@@ -4886,7 +5661,7 @@
                 </a:solidFill>
                 <a:latin typeface="Calibri"/>
               </a:rPr>
-              <a:t>–   Los cuatro conductores que explican casi toda la factura son: computo siempre encendido, transferencia de salida o egress, almacenamiento caliente y volumen de logs.</a:t>
+              <a:t>–   Menos capas innecesarias · imágenes slim · apagar labs · right-sizing.</a:t>
             </a:r>
           </a:p>
           <a:p>
@@ -4902,7 +5677,7 @@
                 </a:solidFill>
                 <a:latin typeface="Calibri"/>
               </a:rPr>
-              <a:t>–   Un error comun es costear solo el computo y olvidar el egress: en servicios que entregan archivos a muchos usuarios, la transferencia de salida puede superar al computo.</a:t>
+              <a:t>–   Relación con escalabilidad: escala cuando hay carga, no por vanidad.</a:t>
             </a:r>
           </a:p>
           <a:p>
@@ -4918,14 +5693,66 @@
                 </a:solidFill>
                 <a:latin typeface="Calibri"/>
               </a:rPr>
-              <a:t>–   Un ejemplo de fila es: API de turnos, nivel Medio, driver computo siempre encendido; si se mueve a un servicio que escala a cero fuera de horario, baja a Bajo.</a:t>
-            </a:r>
-          </a:p>
-        </p:txBody>
-      </p:sp>
-      <p:sp>
-        <p:nvSpPr>
-          <p:cNvPr id="6" name="TextBox 5"/>
+              <a:t>–   Sostenibilidad </a:t>
+            </a:r>
+            <a:r>
+              <a:rPr sz="2000" b="1" i="0">
+                <a:solidFill>
+                  <a:srgbClr val="333333"/>
+                </a:solidFill>
+                <a:latin typeface="Calibri"/>
+              </a:rPr>
+              <a:t>técnica</a:t>
+            </a:r>
+            <a:r>
+              <a:rPr sz="2000" b="0" i="0">
+                <a:solidFill>
+                  <a:srgbClr val="333333"/>
+                </a:solidFill>
+                <a:latin typeface="Calibri"/>
+              </a:rPr>
+              <a:t>: que el equipo pueda operar el diseño. </a:t>
+            </a:r>
+            <a:r>
+              <a:rPr sz="2000" b="1" i="0">
+                <a:solidFill>
+                  <a:srgbClr val="333333"/>
+                </a:solidFill>
+                <a:latin typeface="Calibri"/>
+              </a:rPr>
+              <a:t>Ambiental</a:t>
+            </a:r>
+            <a:r>
+              <a:rPr sz="2000" b="0" i="0">
+                <a:solidFill>
+                  <a:srgbClr val="333333"/>
+                </a:solidFill>
+                <a:latin typeface="Calibri"/>
+              </a:rPr>
+              <a:t>: no consumir cómputo que nadie usa.</a:t>
+            </a:r>
+          </a:p>
+          <a:p>
+            <a:pPr>
+              <a:spcAft>
+                <a:spcPts val="800"/>
+              </a:spcAft>
+            </a:pPr>
+            <a:r>
+              <a:rPr sz="2000" b="0" i="0">
+                <a:solidFill>
+                  <a:srgbClr val="333333"/>
+                </a:solidFill>
+                <a:latin typeface="Calibri"/>
+              </a:rPr>
+              <a:t>–   Ejemplo: una imagen slim pesa decenas de MB frente a cerca de 1 GB de una completa: menos almacenamiento, menos transferencia y despliegues más…</a:t>
+            </a:r>
+          </a:p>
+        </p:txBody>
+      </p:sp>
+      <p:sp>
+        <p:nvSpPr>
+          <p:cNvPr id="9" name="TextBox 8"/>
           <p:cNvSpPr txBox="1"/>
           <p:nvPr/>
         </p:nvSpPr>
@@ -4993,1834 +5820,6 @@
         <p:spPr>
           <a:xfrm>
             <a:off x="0" y="0"/>
-            <a:ext cx="12191695" cy="960120"/>
-          </a:xfrm>
-          <a:prstGeom prst="rect">
-            <a:avLst/>
-          </a:prstGeom>
-          <a:solidFill>
-            <a:srgbClr val="095292"/>
-          </a:solidFill>
-          <a:ln>
-            <a:noFill/>
-          </a:ln>
-        </p:spPr>
-        <p:style>
-          <a:lnRef idx="1">
-            <a:schemeClr val="accent1"/>
-          </a:lnRef>
-          <a:fillRef idx="3">
-            <a:schemeClr val="accent1"/>
-          </a:fillRef>
-          <a:effectRef idx="2">
-            <a:schemeClr val="accent1"/>
-          </a:effectRef>
-          <a:fontRef idx="minor">
-            <a:schemeClr val="lt1"/>
-          </a:fontRef>
-        </p:style>
-        <p:txBody>
-          <a:bodyPr rtlCol="0" anchor="ctr"/>
-          <a:lstStyle/>
-          <a:p>
-            <a:pPr algn="ctr"/>
-          </a:p>
-        </p:txBody>
-      </p:sp>
-      <p:sp>
-        <p:nvSpPr>
-          <p:cNvPr id="3" name="Rectangle 2"/>
-          <p:cNvSpPr/>
-          <p:nvPr/>
-        </p:nvSpPr>
-        <p:spPr>
-          <a:xfrm>
-            <a:off x="0" y="960120"/>
-            <a:ext cx="12191695" cy="41148"/>
-          </a:xfrm>
-          <a:prstGeom prst="rect">
-            <a:avLst/>
-          </a:prstGeom>
-          <a:solidFill>
-            <a:srgbClr val="FFD000"/>
-          </a:solidFill>
-          <a:ln>
-            <a:noFill/>
-          </a:ln>
-        </p:spPr>
-        <p:style>
-          <a:lnRef idx="1">
-            <a:schemeClr val="accent1"/>
-          </a:lnRef>
-          <a:fillRef idx="3">
-            <a:schemeClr val="accent1"/>
-          </a:fillRef>
-          <a:effectRef idx="2">
-            <a:schemeClr val="accent1"/>
-          </a:effectRef>
-          <a:fontRef idx="minor">
-            <a:schemeClr val="lt1"/>
-          </a:fontRef>
-        </p:style>
-        <p:txBody>
-          <a:bodyPr rtlCol="0" anchor="ctr"/>
-          <a:lstStyle/>
-          <a:p>
-            <a:pPr algn="ctr"/>
-          </a:p>
-        </p:txBody>
-      </p:sp>
-      <p:sp>
-        <p:nvSpPr>
-          <p:cNvPr id="4" name="TextBox 3"/>
-          <p:cNvSpPr txBox="1"/>
-          <p:nvPr/>
-        </p:nvSpPr>
-        <p:spPr>
-          <a:xfrm>
-            <a:off x="457200" y="164592"/>
-            <a:ext cx="11277295" cy="502920"/>
-          </a:xfrm>
-          <a:prstGeom prst="rect">
-            <a:avLst/>
-          </a:prstGeom>
-          <a:noFill/>
-        </p:spPr>
-        <p:txBody>
-          <a:bodyPr wrap="square">
-            <a:spAutoFit/>
-          </a:bodyPr>
-          <a:lstStyle/>
-          <a:p>
-            <a:r>
-              <a:rPr sz="2600" b="1" i="0">
-                <a:solidFill>
-                  <a:srgbClr val="FFFFFF"/>
-                </a:solidFill>
-                <a:latin typeface="Calibri"/>
-              </a:rPr>
-              <a:t>Segundo ejemplo: por que el driver importa mas que el nivel</a:t>
-            </a:r>
-          </a:p>
-        </p:txBody>
-      </p:sp>
-      <p:sp>
-        <p:nvSpPr>
-          <p:cNvPr id="5" name="TextBox 4"/>
-          <p:cNvSpPr txBox="1"/>
-          <p:nvPr/>
-        </p:nvSpPr>
-        <p:spPr>
-          <a:xfrm>
-            <a:off x="457200" y="1170432"/>
-            <a:ext cx="11277295" cy="5230368"/>
-          </a:xfrm>
-          <a:prstGeom prst="rect">
-            <a:avLst/>
-          </a:prstGeom>
-          <a:noFill/>
-        </p:spPr>
-        <p:txBody>
-          <a:bodyPr wrap="square">
-            <a:spAutoFit/>
-          </a:bodyPr>
-          <a:lstStyle/>
-          <a:p>
-            <a:pPr>
-              <a:spcAft>
-                <a:spcPts val="800"/>
-              </a:spcAft>
-            </a:pPr>
-            <a:r>
-              <a:rPr sz="2000" b="0" i="0">
-                <a:solidFill>
-                  <a:srgbClr val="333333"/>
-                </a:solidFill>
-                <a:latin typeface="Calibri"/>
-              </a:rPr>
-              <a:t>–   Suponga que la app permite subir comprobantes en PDF o imagenes y que en un semestre acumula 5000 archivos de 2 MB, o sea 10 GB.</a:t>
-            </a:r>
-          </a:p>
-          <a:p>
-            <a:pPr>
-              <a:spcAft>
-                <a:spcPts val="800"/>
-              </a:spcAft>
-            </a:pPr>
-            <a:r>
-              <a:rPr sz="2000" b="0" i="0">
-                <a:solidFill>
-                  <a:srgbClr val="333333"/>
-                </a:solidFill>
-                <a:latin typeface="Calibri"/>
-              </a:rPr>
-              <a:t>–   Guardarlos cuesta unos 0.25 dolares al mes, despreciable.</a:t>
-            </a:r>
-          </a:p>
-          <a:p>
-            <a:pPr>
-              <a:spcAft>
-                <a:spcPts val="800"/>
-              </a:spcAft>
-            </a:pPr>
-            <a:r>
-              <a:rPr sz="2000" b="0" i="0">
-                <a:solidFill>
-                  <a:srgbClr val="333333"/>
-                </a:solidFill>
-                <a:latin typeface="Calibri"/>
-              </a:rPr>
-              <a:t>–   Pero si cada archivo se descarga en promedio 20 veces, el sistema mueve 200 GB de egress al mes, que a 0.09 dolares por gigabyte son unos 18 dolares: setenta veces mas que el almacenamiento.</a:t>
-            </a:r>
-          </a:p>
-          <a:p>
-            <a:pPr>
-              <a:spcAft>
-                <a:spcPts val="800"/>
-              </a:spcAft>
-            </a:pPr>
-            <a:r>
-              <a:rPr sz="2000" b="0" i="0">
-                <a:solidFill>
-                  <a:srgbClr val="333333"/>
-                </a:solidFill>
-                <a:latin typeface="Calibri"/>
-              </a:rPr>
-              <a:t>–   Hay dos familias de recursos: los que cobran por uso y los que cobran por existir.</a:t>
-            </a:r>
-          </a:p>
-          <a:p>
-            <a:pPr>
-              <a:spcAft>
-                <a:spcPts val="800"/>
-              </a:spcAft>
-            </a:pPr>
-            <a:r>
-              <a:rPr sz="2000" b="0" i="0">
-                <a:solidFill>
-                  <a:srgbClr val="333333"/>
-                </a:solidFill>
-                <a:latin typeface="Calibri"/>
-              </a:rPr>
-              <a:t>–   La base de datos gestionada, el balanceador, las IP reservadas, los volumenes huerfanos y las instantaneas viejas son de la segunda y facturan aunque el ultimo usuario se haya ido hace meses.</a:t>
-            </a:r>
-          </a:p>
-        </p:txBody>
-      </p:sp>
-      <p:sp>
-        <p:nvSpPr>
-          <p:cNvPr id="6" name="TextBox 5"/>
-          <p:cNvSpPr txBox="1"/>
-          <p:nvPr/>
-        </p:nvSpPr>
-        <p:spPr>
-          <a:xfrm>
-            <a:off x="11185855" y="6473952"/>
-            <a:ext cx="640080" cy="274320"/>
-          </a:xfrm>
-          <a:prstGeom prst="rect">
-            <a:avLst/>
-          </a:prstGeom>
-          <a:noFill/>
-        </p:spPr>
-        <p:txBody>
-          <a:bodyPr wrap="square">
-            <a:spAutoFit/>
-          </a:bodyPr>
-          <a:lstStyle/>
-          <a:p>
-            <a:pPr algn="r"/>
-            <a:r>
-              <a:rPr sz="1100" b="0" i="0">
-                <a:solidFill>
-                  <a:srgbClr val="666666"/>
-                </a:solidFill>
-                <a:latin typeface="Calibri"/>
-              </a:rPr>
-              <a:t>12</a:t>
-            </a:r>
-          </a:p>
-        </p:txBody>
-      </p:sp>
-    </p:spTree>
-  </p:cSld>
-  <p:clrMapOvr>
-    <a:masterClrMapping/>
-  </p:clrMapOvr>
-</p:sld>
-</file>
-
-<file path=ppt/slides/slide13.xml><?xml version="1.0" encoding="utf-8"?>
-<p:sld xmlns:a="http://schemas.openxmlformats.org/drawingml/2006/main" xmlns:p="http://schemas.openxmlformats.org/presentationml/2006/main" xmlns:r="http://schemas.openxmlformats.org/officeDocument/2006/relationships">
-  <p:cSld>
-    <p:bg>
-      <p:bgPr>
-        <a:solidFill>
-          <a:srgbClr val="FFFFFF"/>
-        </a:solidFill>
-        <a:effectLst/>
-      </p:bgPr>
-    </p:bg>
-    <p:spTree>
-      <p:nvGrpSpPr>
-        <p:cNvPr id="1" name=""/>
-        <p:cNvGrpSpPr/>
-        <p:nvPr/>
-      </p:nvGrpSpPr>
-      <p:grpSpPr/>
-      <p:sp>
-        <p:nvSpPr>
-          <p:cNvPr id="2" name="Rectangle 1"/>
-          <p:cNvSpPr/>
-          <p:nvPr/>
-        </p:nvSpPr>
-        <p:spPr>
-          <a:xfrm>
-            <a:off x="0" y="0"/>
-            <a:ext cx="12191695" cy="960120"/>
-          </a:xfrm>
-          <a:prstGeom prst="rect">
-            <a:avLst/>
-          </a:prstGeom>
-          <a:solidFill>
-            <a:srgbClr val="095292"/>
-          </a:solidFill>
-          <a:ln>
-            <a:noFill/>
-          </a:ln>
-        </p:spPr>
-        <p:style>
-          <a:lnRef idx="1">
-            <a:schemeClr val="accent1"/>
-          </a:lnRef>
-          <a:fillRef idx="3">
-            <a:schemeClr val="accent1"/>
-          </a:fillRef>
-          <a:effectRef idx="2">
-            <a:schemeClr val="accent1"/>
-          </a:effectRef>
-          <a:fontRef idx="minor">
-            <a:schemeClr val="lt1"/>
-          </a:fontRef>
-        </p:style>
-        <p:txBody>
-          <a:bodyPr rtlCol="0" anchor="ctr"/>
-          <a:lstStyle/>
-          <a:p>
-            <a:pPr algn="ctr"/>
-          </a:p>
-        </p:txBody>
-      </p:sp>
-      <p:sp>
-        <p:nvSpPr>
-          <p:cNvPr id="3" name="Rectangle 2"/>
-          <p:cNvSpPr/>
-          <p:nvPr/>
-        </p:nvSpPr>
-        <p:spPr>
-          <a:xfrm>
-            <a:off x="0" y="960120"/>
-            <a:ext cx="12191695" cy="41148"/>
-          </a:xfrm>
-          <a:prstGeom prst="rect">
-            <a:avLst/>
-          </a:prstGeom>
-          <a:solidFill>
-            <a:srgbClr val="FFD000"/>
-          </a:solidFill>
-          <a:ln>
-            <a:noFill/>
-          </a:ln>
-        </p:spPr>
-        <p:style>
-          <a:lnRef idx="1">
-            <a:schemeClr val="accent1"/>
-          </a:lnRef>
-          <a:fillRef idx="3">
-            <a:schemeClr val="accent1"/>
-          </a:fillRef>
-          <a:effectRef idx="2">
-            <a:schemeClr val="accent1"/>
-          </a:effectRef>
-          <a:fontRef idx="minor">
-            <a:schemeClr val="lt1"/>
-          </a:fontRef>
-        </p:style>
-        <p:txBody>
-          <a:bodyPr rtlCol="0" anchor="ctr"/>
-          <a:lstStyle/>
-          <a:p>
-            <a:pPr algn="ctr"/>
-          </a:p>
-        </p:txBody>
-      </p:sp>
-      <p:sp>
-        <p:nvSpPr>
-          <p:cNvPr id="4" name="TextBox 3"/>
-          <p:cNvSpPr txBox="1"/>
-          <p:nvPr/>
-        </p:nvSpPr>
-        <p:spPr>
-          <a:xfrm>
-            <a:off x="457200" y="164592"/>
-            <a:ext cx="11277295" cy="502920"/>
-          </a:xfrm>
-          <a:prstGeom prst="rect">
-            <a:avLst/>
-          </a:prstGeom>
-          <a:noFill/>
-        </p:spPr>
-        <p:txBody>
-          <a:bodyPr wrap="square">
-            <a:spAutoFit/>
-          </a:bodyPr>
-          <a:lstStyle/>
-          <a:p>
-            <a:r>
-              <a:rPr sz="2600" b="1" i="0">
-                <a:solidFill>
-                  <a:srgbClr val="FFFFFF"/>
-                </a:solidFill>
-                <a:latin typeface="Calibri"/>
-              </a:rPr>
-              <a:t>Right-sizing: tres acciones ancladas en observacion (1/2)</a:t>
-            </a:r>
-          </a:p>
-        </p:txBody>
-      </p:sp>
-      <p:sp>
-        <p:nvSpPr>
-          <p:cNvPr id="5" name="TextBox 4"/>
-          <p:cNvSpPr txBox="1"/>
-          <p:nvPr/>
-        </p:nvSpPr>
-        <p:spPr>
-          <a:xfrm>
-            <a:off x="457200" y="1170432"/>
-            <a:ext cx="11277295" cy="5230368"/>
-          </a:xfrm>
-          <a:prstGeom prst="rect">
-            <a:avLst/>
-          </a:prstGeom>
-          <a:noFill/>
-        </p:spPr>
-        <p:txBody>
-          <a:bodyPr wrap="square">
-            <a:spAutoFit/>
-          </a:bodyPr>
-          <a:lstStyle/>
-          <a:p>
-            <a:pPr>
-              <a:spcAft>
-                <a:spcPts val="800"/>
-              </a:spcAft>
-            </a:pPr>
-            <a:r>
-              <a:rPr sz="2000" b="0" i="0">
-                <a:solidFill>
-                  <a:srgbClr val="333333"/>
-                </a:solidFill>
-                <a:latin typeface="Calibri"/>
-              </a:rPr>
-              <a:t>–   La metrica que lo gobierna es la utilizacion, el porcentaje de la capacidad pagada que efectivamente se usa; una maquina al 5 por ciento de CPU durante un mes desperdicia el 95 por ciento de lo pagado.</a:t>
-            </a:r>
-          </a:p>
-          <a:p>
-            <a:pPr>
-              <a:spcAft>
-                <a:spcPts val="800"/>
-              </a:spcAft>
-            </a:pPr>
-            <a:r>
-              <a:rPr sz="2000" b="0" i="0">
-                <a:solidFill>
-                  <a:srgbClr val="333333"/>
-                </a:solidFill>
-                <a:latin typeface="Calibri"/>
-              </a:rPr>
-              <a:t>–   La convencion de industria, que es convencion y no regla, apunta a una utilizacion sostenida entre el 40 y el 70 por ciento: por debajo hay sobreaprovisionamiento y por encima no queda holgura para picos.</a:t>
-            </a:r>
-          </a:p>
-          <a:p>
-            <a:pPr>
-              <a:spcAft>
-                <a:spcPts val="800"/>
-              </a:spcAft>
-            </a:pPr>
-            <a:r>
-              <a:rPr sz="2000" b="0" i="0">
-                <a:solidFill>
-                  <a:srgbClr val="333333"/>
-                </a:solidFill>
-                <a:latin typeface="Calibri"/>
-              </a:rPr>
-              <a:t>–   La primera accion tipica es reducir tamano o numero de replicas hasta acercarse a ese rango.</a:t>
-            </a:r>
-          </a:p>
-          <a:p>
-            <a:pPr>
-              <a:spcAft>
-                <a:spcPts val="800"/>
-              </a:spcAft>
-            </a:pPr>
-            <a:r>
-              <a:rPr sz="2000" b="0" i="0">
-                <a:solidFill>
-                  <a:srgbClr val="333333"/>
-                </a:solidFill>
-                <a:latin typeface="Calibri"/>
-              </a:rPr>
-              <a:t>–   La segunda es apagar por horario lo que no es produccion: un ambiente encendido las 24 horas los siete dias consume 168 horas semanales, y encendido solo de 8 a 6 en dias habiles consume 50, un ahorro cercano al 70 por ciento sin tocar codigo.</a:t>
-            </a:r>
-          </a:p>
-        </p:txBody>
-      </p:sp>
-      <p:sp>
-        <p:nvSpPr>
-          <p:cNvPr id="6" name="TextBox 5"/>
-          <p:cNvSpPr txBox="1"/>
-          <p:nvPr/>
-        </p:nvSpPr>
-        <p:spPr>
-          <a:xfrm>
-            <a:off x="11185855" y="6473952"/>
-            <a:ext cx="640080" cy="274320"/>
-          </a:xfrm>
-          <a:prstGeom prst="rect">
-            <a:avLst/>
-          </a:prstGeom>
-          <a:noFill/>
-        </p:spPr>
-        <p:txBody>
-          <a:bodyPr wrap="square">
-            <a:spAutoFit/>
-          </a:bodyPr>
-          <a:lstStyle/>
-          <a:p>
-            <a:pPr algn="r"/>
-            <a:r>
-              <a:rPr sz="1100" b="0" i="0">
-                <a:solidFill>
-                  <a:srgbClr val="666666"/>
-                </a:solidFill>
-                <a:latin typeface="Calibri"/>
-              </a:rPr>
-              <a:t>13</a:t>
-            </a:r>
-          </a:p>
-        </p:txBody>
-      </p:sp>
-    </p:spTree>
-  </p:cSld>
-  <p:clrMapOvr>
-    <a:masterClrMapping/>
-  </p:clrMapOvr>
-</p:sld>
-</file>
-
-<file path=ppt/slides/slide14.xml><?xml version="1.0" encoding="utf-8"?>
-<p:sld xmlns:a="http://schemas.openxmlformats.org/drawingml/2006/main" xmlns:p="http://schemas.openxmlformats.org/presentationml/2006/main" xmlns:r="http://schemas.openxmlformats.org/officeDocument/2006/relationships">
-  <p:cSld>
-    <p:bg>
-      <p:bgPr>
-        <a:solidFill>
-          <a:srgbClr val="FFFFFF"/>
-        </a:solidFill>
-        <a:effectLst/>
-      </p:bgPr>
-    </p:bg>
-    <p:spTree>
-      <p:nvGrpSpPr>
-        <p:cNvPr id="1" name=""/>
-        <p:cNvGrpSpPr/>
-        <p:nvPr/>
-      </p:nvGrpSpPr>
-      <p:grpSpPr/>
-      <p:sp>
-        <p:nvSpPr>
-          <p:cNvPr id="2" name="Rectangle 1"/>
-          <p:cNvSpPr/>
-          <p:nvPr/>
-        </p:nvSpPr>
-        <p:spPr>
-          <a:xfrm>
-            <a:off x="0" y="0"/>
-            <a:ext cx="12191695" cy="960120"/>
-          </a:xfrm>
-          <a:prstGeom prst="rect">
-            <a:avLst/>
-          </a:prstGeom>
-          <a:solidFill>
-            <a:srgbClr val="095292"/>
-          </a:solidFill>
-          <a:ln>
-            <a:noFill/>
-          </a:ln>
-        </p:spPr>
-        <p:style>
-          <a:lnRef idx="1">
-            <a:schemeClr val="accent1"/>
-          </a:lnRef>
-          <a:fillRef idx="3">
-            <a:schemeClr val="accent1"/>
-          </a:fillRef>
-          <a:effectRef idx="2">
-            <a:schemeClr val="accent1"/>
-          </a:effectRef>
-          <a:fontRef idx="minor">
-            <a:schemeClr val="lt1"/>
-          </a:fontRef>
-        </p:style>
-        <p:txBody>
-          <a:bodyPr rtlCol="0" anchor="ctr"/>
-          <a:lstStyle/>
-          <a:p>
-            <a:pPr algn="ctr"/>
-          </a:p>
-        </p:txBody>
-      </p:sp>
-      <p:sp>
-        <p:nvSpPr>
-          <p:cNvPr id="3" name="Rectangle 2"/>
-          <p:cNvSpPr/>
-          <p:nvPr/>
-        </p:nvSpPr>
-        <p:spPr>
-          <a:xfrm>
-            <a:off x="0" y="960120"/>
-            <a:ext cx="12191695" cy="41148"/>
-          </a:xfrm>
-          <a:prstGeom prst="rect">
-            <a:avLst/>
-          </a:prstGeom>
-          <a:solidFill>
-            <a:srgbClr val="FFD000"/>
-          </a:solidFill>
-          <a:ln>
-            <a:noFill/>
-          </a:ln>
-        </p:spPr>
-        <p:style>
-          <a:lnRef idx="1">
-            <a:schemeClr val="accent1"/>
-          </a:lnRef>
-          <a:fillRef idx="3">
-            <a:schemeClr val="accent1"/>
-          </a:fillRef>
-          <a:effectRef idx="2">
-            <a:schemeClr val="accent1"/>
-          </a:effectRef>
-          <a:fontRef idx="minor">
-            <a:schemeClr val="lt1"/>
-          </a:fontRef>
-        </p:style>
-        <p:txBody>
-          <a:bodyPr rtlCol="0" anchor="ctr"/>
-          <a:lstStyle/>
-          <a:p>
-            <a:pPr algn="ctr"/>
-          </a:p>
-        </p:txBody>
-      </p:sp>
-      <p:sp>
-        <p:nvSpPr>
-          <p:cNvPr id="4" name="TextBox 3"/>
-          <p:cNvSpPr txBox="1"/>
-          <p:nvPr/>
-        </p:nvSpPr>
-        <p:spPr>
-          <a:xfrm>
-            <a:off x="457200" y="164592"/>
-            <a:ext cx="11277295" cy="502920"/>
-          </a:xfrm>
-          <a:prstGeom prst="rect">
-            <a:avLst/>
-          </a:prstGeom>
-          <a:noFill/>
-        </p:spPr>
-        <p:txBody>
-          <a:bodyPr wrap="square">
-            <a:spAutoFit/>
-          </a:bodyPr>
-          <a:lstStyle/>
-          <a:p>
-            <a:r>
-              <a:rPr sz="2600" b="1" i="0">
-                <a:solidFill>
-                  <a:srgbClr val="FFFFFF"/>
-                </a:solidFill>
-                <a:latin typeface="Calibri"/>
-              </a:rPr>
-              <a:t>Right-sizing: tres acciones ancladas en observacion (2/2)</a:t>
-            </a:r>
-          </a:p>
-        </p:txBody>
-      </p:sp>
-      <p:sp>
-        <p:nvSpPr>
-          <p:cNvPr id="5" name="TextBox 4"/>
-          <p:cNvSpPr txBox="1"/>
-          <p:nvPr/>
-        </p:nvSpPr>
-        <p:spPr>
-          <a:xfrm>
-            <a:off x="457200" y="1170432"/>
-            <a:ext cx="11277295" cy="5230368"/>
-          </a:xfrm>
-          <a:prstGeom prst="rect">
-            <a:avLst/>
-          </a:prstGeom>
-          <a:noFill/>
-        </p:spPr>
-        <p:txBody>
-          <a:bodyPr wrap="square">
-            <a:spAutoFit/>
-          </a:bodyPr>
-          <a:lstStyle/>
-          <a:p>
-            <a:pPr>
-              <a:spcAft>
-                <a:spcPts val="800"/>
-              </a:spcAft>
-            </a:pPr>
-            <a:r>
-              <a:rPr sz="2000" b="0" i="0">
-                <a:solidFill>
-                  <a:srgbClr val="333333"/>
-                </a:solidFill>
-                <a:latin typeface="Calibri"/>
-              </a:rPr>
-              <a:t>–   Igual de validos son fijar retencion de logs a 30 dias en vez de para siempre y borrar volumenes e instantaneas sin dueno.</a:t>
-            </a:r>
-          </a:p>
-          <a:p>
-            <a:pPr>
-              <a:spcAft>
-                <a:spcPts val="800"/>
-              </a:spcAft>
-            </a:pPr>
-            <a:r>
-              <a:rPr sz="2000" b="0" i="0">
-                <a:solidFill>
-                  <a:srgbClr val="333333"/>
-                </a:solidFill>
-                <a:latin typeface="Calibri"/>
-              </a:rPr>
-              <a:t>–   La tercera accion es reducir lo que esta sobredimensionado: una instancia que nunca pasa del 20 por ciento de CPU puede bajar a la mitad de su capacidad sin que nadie lo note.</a:t>
-            </a:r>
-          </a:p>
-          <a:p>
-            <a:pPr>
-              <a:spcAft>
-                <a:spcPts val="800"/>
-              </a:spcAft>
-            </a:pPr>
-            <a:r>
-              <a:rPr sz="2000" b="0" i="0">
-                <a:solidFill>
-                  <a:srgbClr val="333333"/>
-                </a:solidFill>
-                <a:latin typeface="Calibri"/>
-              </a:rPr>
-              <a:t>–   El orden correcto es: medir durante al menos 2 semanas, reducir un escalon y volver a medir; reducir sin datos es adivinar.</a:t>
-            </a:r>
-          </a:p>
-        </p:txBody>
-      </p:sp>
-      <p:sp>
-        <p:nvSpPr>
-          <p:cNvPr id="6" name="TextBox 5"/>
-          <p:cNvSpPr txBox="1"/>
-          <p:nvPr/>
-        </p:nvSpPr>
-        <p:spPr>
-          <a:xfrm>
-            <a:off x="11185855" y="6473952"/>
-            <a:ext cx="640080" cy="274320"/>
-          </a:xfrm>
-          <a:prstGeom prst="rect">
-            <a:avLst/>
-          </a:prstGeom>
-          <a:noFill/>
-        </p:spPr>
-        <p:txBody>
-          <a:bodyPr wrap="square">
-            <a:spAutoFit/>
-          </a:bodyPr>
-          <a:lstStyle/>
-          <a:p>
-            <a:pPr algn="r"/>
-            <a:r>
-              <a:rPr sz="1100" b="0" i="0">
-                <a:solidFill>
-                  <a:srgbClr val="666666"/>
-                </a:solidFill>
-                <a:latin typeface="Calibri"/>
-              </a:rPr>
-              <a:t>14</a:t>
-            </a:r>
-          </a:p>
-        </p:txBody>
-      </p:sp>
-    </p:spTree>
-  </p:cSld>
-  <p:clrMapOvr>
-    <a:masterClrMapping/>
-  </p:clrMapOvr>
-</p:sld>
-</file>
-
-<file path=ppt/slides/slide15.xml><?xml version="1.0" encoding="utf-8"?>
-<p:sld xmlns:a="http://schemas.openxmlformats.org/drawingml/2006/main" xmlns:p="http://schemas.openxmlformats.org/presentationml/2006/main" xmlns:r="http://schemas.openxmlformats.org/officeDocument/2006/relationships">
-  <p:cSld>
-    <p:bg>
-      <p:bgPr>
-        <a:solidFill>
-          <a:srgbClr val="FFFFFF"/>
-        </a:solidFill>
-        <a:effectLst/>
-      </p:bgPr>
-    </p:bg>
-    <p:spTree>
-      <p:nvGrpSpPr>
-        <p:cNvPr id="1" name=""/>
-        <p:cNvGrpSpPr/>
-        <p:nvPr/>
-      </p:nvGrpSpPr>
-      <p:grpSpPr/>
-      <p:sp>
-        <p:nvSpPr>
-          <p:cNvPr id="2" name="Rectangle 1"/>
-          <p:cNvSpPr/>
-          <p:nvPr/>
-        </p:nvSpPr>
-        <p:spPr>
-          <a:xfrm>
-            <a:off x="0" y="0"/>
-            <a:ext cx="12191695" cy="960120"/>
-          </a:xfrm>
-          <a:prstGeom prst="rect">
-            <a:avLst/>
-          </a:prstGeom>
-          <a:solidFill>
-            <a:srgbClr val="095292"/>
-          </a:solidFill>
-          <a:ln>
-            <a:noFill/>
-          </a:ln>
-        </p:spPr>
-        <p:style>
-          <a:lnRef idx="1">
-            <a:schemeClr val="accent1"/>
-          </a:lnRef>
-          <a:fillRef idx="3">
-            <a:schemeClr val="accent1"/>
-          </a:fillRef>
-          <a:effectRef idx="2">
-            <a:schemeClr val="accent1"/>
-          </a:effectRef>
-          <a:fontRef idx="minor">
-            <a:schemeClr val="lt1"/>
-          </a:fontRef>
-        </p:style>
-        <p:txBody>
-          <a:bodyPr rtlCol="0" anchor="ctr"/>
-          <a:lstStyle/>
-          <a:p>
-            <a:pPr algn="ctr"/>
-          </a:p>
-        </p:txBody>
-      </p:sp>
-      <p:sp>
-        <p:nvSpPr>
-          <p:cNvPr id="3" name="Rectangle 2"/>
-          <p:cNvSpPr/>
-          <p:nvPr/>
-        </p:nvSpPr>
-        <p:spPr>
-          <a:xfrm>
-            <a:off x="0" y="960120"/>
-            <a:ext cx="12191695" cy="41148"/>
-          </a:xfrm>
-          <a:prstGeom prst="rect">
-            <a:avLst/>
-          </a:prstGeom>
-          <a:solidFill>
-            <a:srgbClr val="FFD000"/>
-          </a:solidFill>
-          <a:ln>
-            <a:noFill/>
-          </a:ln>
-        </p:spPr>
-        <p:style>
-          <a:lnRef idx="1">
-            <a:schemeClr val="accent1"/>
-          </a:lnRef>
-          <a:fillRef idx="3">
-            <a:schemeClr val="accent1"/>
-          </a:fillRef>
-          <a:effectRef idx="2">
-            <a:schemeClr val="accent1"/>
-          </a:effectRef>
-          <a:fontRef idx="minor">
-            <a:schemeClr val="lt1"/>
-          </a:fontRef>
-        </p:style>
-        <p:txBody>
-          <a:bodyPr rtlCol="0" anchor="ctr"/>
-          <a:lstStyle/>
-          <a:p>
-            <a:pPr algn="ctr"/>
-          </a:p>
-        </p:txBody>
-      </p:sp>
-      <p:sp>
-        <p:nvSpPr>
-          <p:cNvPr id="4" name="TextBox 3"/>
-          <p:cNvSpPr txBox="1"/>
-          <p:nvPr/>
-        </p:nvSpPr>
-        <p:spPr>
-          <a:xfrm>
-            <a:off x="457200" y="164592"/>
-            <a:ext cx="11277295" cy="502920"/>
-          </a:xfrm>
-          <a:prstGeom prst="rect">
-            <a:avLst/>
-          </a:prstGeom>
-          <a:noFill/>
-        </p:spPr>
-        <p:txBody>
-          <a:bodyPr wrap="square">
-            <a:spAutoFit/>
-          </a:bodyPr>
-          <a:lstStyle/>
-          <a:p>
-            <a:r>
-              <a:rPr sz="2600" b="1" i="0">
-                <a:solidFill>
-                  <a:srgbClr val="FFFFFF"/>
-                </a:solidFill>
-                <a:latin typeface="Calibri"/>
-              </a:rPr>
-              <a:t>Sostenibilidad tecnica antes que ambiental (1/2)</a:t>
-            </a:r>
-          </a:p>
-        </p:txBody>
-      </p:sp>
-      <p:sp>
-        <p:nvSpPr>
-          <p:cNvPr id="5" name="TextBox 4"/>
-          <p:cNvSpPr txBox="1"/>
-          <p:nvPr/>
-        </p:nvSpPr>
-        <p:spPr>
-          <a:xfrm>
-            <a:off x="457200" y="1170432"/>
-            <a:ext cx="11277295" cy="5230368"/>
-          </a:xfrm>
-          <a:prstGeom prst="rect">
-            <a:avLst/>
-          </a:prstGeom>
-          <a:noFill/>
-        </p:spPr>
-        <p:txBody>
-          <a:bodyPr wrap="square">
-            <a:spAutoFit/>
-          </a:bodyPr>
-          <a:lstStyle/>
-          <a:p>
-            <a:pPr>
-              <a:spcAft>
-                <a:spcPts val="800"/>
-              </a:spcAft>
-            </a:pPr>
-            <a:r>
-              <a:rPr sz="2000" b="0" i="0">
-                <a:solidFill>
-                  <a:srgbClr val="333333"/>
-                </a:solidFill>
-                <a:latin typeface="Calibri"/>
-              </a:rPr>
-              <a:t>–   La energia que consume un servidor depende sobre todo de la capacidad encendida, no de la usada: una maquina al 5 por ciento no consume el 5 por ciento de la energia, consume mucho mas</a:t>
-            </a:r>
-          </a:p>
-          <a:p>
-            <a:pPr>
-              <a:spcAft>
-                <a:spcPts val="800"/>
-              </a:spcAft>
-            </a:pPr>
-            <a:r>
-              <a:rPr sz="2000" b="0" i="0">
-                <a:solidFill>
-                  <a:srgbClr val="333333"/>
-                </a:solidFill>
-                <a:latin typeface="Calibri"/>
-              </a:rPr>
-              <a:t>–   Porque el consumo en reposo de un servidor moderno ronda la mitad del consumo a plena carga.</a:t>
-            </a:r>
-          </a:p>
-          <a:p>
-            <a:pPr>
-              <a:spcAft>
-                <a:spcPts val="800"/>
-              </a:spcAft>
-            </a:pPr>
-            <a:r>
-              <a:rPr sz="2000" b="0" i="0">
-                <a:solidFill>
-                  <a:srgbClr val="333333"/>
-                </a:solidFill>
-                <a:latin typeface="Calibri"/>
-              </a:rPr>
-              <a:t>–   Hay ademas una decision de arquitectura con efecto directo: la intensidad de carbono de la electricidad varia fuerte entre regiones, asi que elegir region no es solo latencia y cumplimiento normativo.</a:t>
-            </a:r>
-          </a:p>
-          <a:p>
-            <a:pPr>
-              <a:spcAft>
-                <a:spcPts val="800"/>
-              </a:spcAft>
-            </a:pPr>
-            <a:r>
-              <a:rPr sz="2000" b="0" i="0">
-                <a:solidFill>
-                  <a:srgbClr val="333333"/>
-                </a:solidFill>
-                <a:latin typeface="Calibri"/>
-              </a:rPr>
-              <a:t>–   Una arquitectura de ocho servicios que un equipo de tres personas no puede operar es insostenible aunque la infraestructura sea gratis.</a:t>
-            </a:r>
-          </a:p>
-        </p:txBody>
-      </p:sp>
-      <p:sp>
-        <p:nvSpPr>
-          <p:cNvPr id="6" name="TextBox 5"/>
-          <p:cNvSpPr txBox="1"/>
-          <p:nvPr/>
-        </p:nvSpPr>
-        <p:spPr>
-          <a:xfrm>
-            <a:off x="11185855" y="6473952"/>
-            <a:ext cx="640080" cy="274320"/>
-          </a:xfrm>
-          <a:prstGeom prst="rect">
-            <a:avLst/>
-          </a:prstGeom>
-          <a:noFill/>
-        </p:spPr>
-        <p:txBody>
-          <a:bodyPr wrap="square">
-            <a:spAutoFit/>
-          </a:bodyPr>
-          <a:lstStyle/>
-          <a:p>
-            <a:pPr algn="r"/>
-            <a:r>
-              <a:rPr sz="1100" b="0" i="0">
-                <a:solidFill>
-                  <a:srgbClr val="666666"/>
-                </a:solidFill>
-                <a:latin typeface="Calibri"/>
-              </a:rPr>
-              <a:t>15</a:t>
-            </a:r>
-          </a:p>
-        </p:txBody>
-      </p:sp>
-    </p:spTree>
-  </p:cSld>
-  <p:clrMapOvr>
-    <a:masterClrMapping/>
-  </p:clrMapOvr>
-</p:sld>
-</file>
-
-<file path=ppt/slides/slide16.xml><?xml version="1.0" encoding="utf-8"?>
-<p:sld xmlns:a="http://schemas.openxmlformats.org/drawingml/2006/main" xmlns:p="http://schemas.openxmlformats.org/presentationml/2006/main" xmlns:r="http://schemas.openxmlformats.org/officeDocument/2006/relationships">
-  <p:cSld>
-    <p:bg>
-      <p:bgPr>
-        <a:solidFill>
-          <a:srgbClr val="FFFFFF"/>
-        </a:solidFill>
-        <a:effectLst/>
-      </p:bgPr>
-    </p:bg>
-    <p:spTree>
-      <p:nvGrpSpPr>
-        <p:cNvPr id="1" name=""/>
-        <p:cNvGrpSpPr/>
-        <p:nvPr/>
-      </p:nvGrpSpPr>
-      <p:grpSpPr/>
-      <p:sp>
-        <p:nvSpPr>
-          <p:cNvPr id="2" name="Rectangle 1"/>
-          <p:cNvSpPr/>
-          <p:nvPr/>
-        </p:nvSpPr>
-        <p:spPr>
-          <a:xfrm>
-            <a:off x="0" y="0"/>
-            <a:ext cx="12191695" cy="960120"/>
-          </a:xfrm>
-          <a:prstGeom prst="rect">
-            <a:avLst/>
-          </a:prstGeom>
-          <a:solidFill>
-            <a:srgbClr val="095292"/>
-          </a:solidFill>
-          <a:ln>
-            <a:noFill/>
-          </a:ln>
-        </p:spPr>
-        <p:style>
-          <a:lnRef idx="1">
-            <a:schemeClr val="accent1"/>
-          </a:lnRef>
-          <a:fillRef idx="3">
-            <a:schemeClr val="accent1"/>
-          </a:fillRef>
-          <a:effectRef idx="2">
-            <a:schemeClr val="accent1"/>
-          </a:effectRef>
-          <a:fontRef idx="minor">
-            <a:schemeClr val="lt1"/>
-          </a:fontRef>
-        </p:style>
-        <p:txBody>
-          <a:bodyPr rtlCol="0" anchor="ctr"/>
-          <a:lstStyle/>
-          <a:p>
-            <a:pPr algn="ctr"/>
-          </a:p>
-        </p:txBody>
-      </p:sp>
-      <p:sp>
-        <p:nvSpPr>
-          <p:cNvPr id="3" name="Rectangle 2"/>
-          <p:cNvSpPr/>
-          <p:nvPr/>
-        </p:nvSpPr>
-        <p:spPr>
-          <a:xfrm>
-            <a:off x="0" y="960120"/>
-            <a:ext cx="12191695" cy="41148"/>
-          </a:xfrm>
-          <a:prstGeom prst="rect">
-            <a:avLst/>
-          </a:prstGeom>
-          <a:solidFill>
-            <a:srgbClr val="FFD000"/>
-          </a:solidFill>
-          <a:ln>
-            <a:noFill/>
-          </a:ln>
-        </p:spPr>
-        <p:style>
-          <a:lnRef idx="1">
-            <a:schemeClr val="accent1"/>
-          </a:lnRef>
-          <a:fillRef idx="3">
-            <a:schemeClr val="accent1"/>
-          </a:fillRef>
-          <a:effectRef idx="2">
-            <a:schemeClr val="accent1"/>
-          </a:effectRef>
-          <a:fontRef idx="minor">
-            <a:schemeClr val="lt1"/>
-          </a:fontRef>
-        </p:style>
-        <p:txBody>
-          <a:bodyPr rtlCol="0" anchor="ctr"/>
-          <a:lstStyle/>
-          <a:p>
-            <a:pPr algn="ctr"/>
-          </a:p>
-        </p:txBody>
-      </p:sp>
-      <p:sp>
-        <p:nvSpPr>
-          <p:cNvPr id="4" name="TextBox 3"/>
-          <p:cNvSpPr txBox="1"/>
-          <p:nvPr/>
-        </p:nvSpPr>
-        <p:spPr>
-          <a:xfrm>
-            <a:off x="457200" y="164592"/>
-            <a:ext cx="11277295" cy="502920"/>
-          </a:xfrm>
-          <a:prstGeom prst="rect">
-            <a:avLst/>
-          </a:prstGeom>
-          <a:noFill/>
-        </p:spPr>
-        <p:txBody>
-          <a:bodyPr wrap="square">
-            <a:spAutoFit/>
-          </a:bodyPr>
-          <a:lstStyle/>
-          <a:p>
-            <a:r>
-              <a:rPr sz="2600" b="1" i="0">
-                <a:solidFill>
-                  <a:srgbClr val="FFFFFF"/>
-                </a:solidFill>
-                <a:latin typeface="Calibri"/>
-              </a:rPr>
-              <a:t>Sostenibilidad tecnica antes que ambiental (2/2)</a:t>
-            </a:r>
-          </a:p>
-        </p:txBody>
-      </p:sp>
-      <p:sp>
-        <p:nvSpPr>
-          <p:cNvPr id="5" name="TextBox 4"/>
-          <p:cNvSpPr txBox="1"/>
-          <p:nvPr/>
-        </p:nvSpPr>
-        <p:spPr>
-          <a:xfrm>
-            <a:off x="457200" y="1170432"/>
-            <a:ext cx="11277295" cy="5230368"/>
-          </a:xfrm>
-          <a:prstGeom prst="rect">
-            <a:avLst/>
-          </a:prstGeom>
-          <a:noFill/>
-        </p:spPr>
-        <p:txBody>
-          <a:bodyPr wrap="square">
-            <a:spAutoFit/>
-          </a:bodyPr>
-          <a:lstStyle/>
-          <a:p>
-            <a:pPr>
-              <a:spcAft>
-                <a:spcPts val="800"/>
-              </a:spcAft>
-            </a:pPr>
-            <a:r>
-              <a:rPr sz="2000" b="0" i="0">
-                <a:solidFill>
-                  <a:srgbClr val="333333"/>
-                </a:solidFill>
-                <a:latin typeface="Calibri"/>
-              </a:rPr>
-              <a:t>–   Un ejemplo en la app: un monolito modular de un solo contenedor es mas sostenible para un equipo de 1 o 2 personas que cinco microservicios, porque tiene 1 pipeline, 1 despliegue y 1 lugar donde buscar un error.</a:t>
-            </a:r>
-          </a:p>
-          <a:p>
-            <a:pPr>
-              <a:spcAft>
-                <a:spcPts val="800"/>
-              </a:spcAft>
-            </a:pPr>
-            <a:r>
-              <a:rPr sz="2000" b="0" i="0">
-                <a:solidFill>
-                  <a:srgbClr val="333333"/>
-                </a:solidFill>
-                <a:latin typeface="Calibri"/>
-              </a:rPr>
-              <a:t>–   La cara ambiental tambien es medible: un entorno de pruebas apagado fuera del horario de trabajo consume menos de la mitad de las horas de computo de uno encendido todo el dia.</a:t>
-            </a:r>
-          </a:p>
-          <a:p>
-            <a:pPr>
-              <a:spcAft>
-                <a:spcPts val="800"/>
-              </a:spcAft>
-            </a:pPr>
-            <a:r>
-              <a:rPr sz="2000" b="0" i="0">
-                <a:solidFill>
-                  <a:srgbClr val="333333"/>
-                </a:solidFill>
-                <a:latin typeface="Calibri"/>
-              </a:rPr>
-              <a:t>–   Un error comun es medir la sostenibilidad solo en emisiones: un diseno que nadie del equipo entiende termina reescrito, y reescribir consume mas recursos que operarlo bien.</a:t>
-            </a:r>
-          </a:p>
-        </p:txBody>
-      </p:sp>
-      <p:sp>
-        <p:nvSpPr>
-          <p:cNvPr id="6" name="TextBox 5"/>
-          <p:cNvSpPr txBox="1"/>
-          <p:nvPr/>
-        </p:nvSpPr>
-        <p:spPr>
-          <a:xfrm>
-            <a:off x="11185855" y="6473952"/>
-            <a:ext cx="640080" cy="274320"/>
-          </a:xfrm>
-          <a:prstGeom prst="rect">
-            <a:avLst/>
-          </a:prstGeom>
-          <a:noFill/>
-        </p:spPr>
-        <p:txBody>
-          <a:bodyPr wrap="square">
-            <a:spAutoFit/>
-          </a:bodyPr>
-          <a:lstStyle/>
-          <a:p>
-            <a:pPr algn="r"/>
-            <a:r>
-              <a:rPr sz="1100" b="0" i="0">
-                <a:solidFill>
-                  <a:srgbClr val="666666"/>
-                </a:solidFill>
-                <a:latin typeface="Calibri"/>
-              </a:rPr>
-              <a:t>16</a:t>
-            </a:r>
-          </a:p>
-        </p:txBody>
-      </p:sp>
-    </p:spTree>
-  </p:cSld>
-  <p:clrMapOvr>
-    <a:masterClrMapping/>
-  </p:clrMapOvr>
-</p:sld>
-</file>
-
-<file path=ppt/slides/slide17.xml><?xml version="1.0" encoding="utf-8"?>
-<p:sld xmlns:a="http://schemas.openxmlformats.org/drawingml/2006/main" xmlns:p="http://schemas.openxmlformats.org/presentationml/2006/main" xmlns:r="http://schemas.openxmlformats.org/officeDocument/2006/relationships">
-  <p:cSld>
-    <p:bg>
-      <p:bgPr>
-        <a:solidFill>
-          <a:srgbClr val="FFFFFF"/>
-        </a:solidFill>
-        <a:effectLst/>
-      </p:bgPr>
-    </p:bg>
-    <p:spTree>
-      <p:nvGrpSpPr>
-        <p:cNvPr id="1" name=""/>
-        <p:cNvGrpSpPr/>
-        <p:nvPr/>
-      </p:nvGrpSpPr>
-      <p:grpSpPr/>
-      <p:sp>
-        <p:nvSpPr>
-          <p:cNvPr id="2" name="Rectangle 1"/>
-          <p:cNvSpPr/>
-          <p:nvPr/>
-        </p:nvSpPr>
-        <p:spPr>
-          <a:xfrm>
-            <a:off x="0" y="0"/>
-            <a:ext cx="12191695" cy="960120"/>
-          </a:xfrm>
-          <a:prstGeom prst="rect">
-            <a:avLst/>
-          </a:prstGeom>
-          <a:solidFill>
-            <a:srgbClr val="095292"/>
-          </a:solidFill>
-          <a:ln>
-            <a:noFill/>
-          </a:ln>
-        </p:spPr>
-        <p:style>
-          <a:lnRef idx="1">
-            <a:schemeClr val="accent1"/>
-          </a:lnRef>
-          <a:fillRef idx="3">
-            <a:schemeClr val="accent1"/>
-          </a:fillRef>
-          <a:effectRef idx="2">
-            <a:schemeClr val="accent1"/>
-          </a:effectRef>
-          <a:fontRef idx="minor">
-            <a:schemeClr val="lt1"/>
-          </a:fontRef>
-        </p:style>
-        <p:txBody>
-          <a:bodyPr rtlCol="0" anchor="ctr"/>
-          <a:lstStyle/>
-          <a:p>
-            <a:pPr algn="ctr"/>
-          </a:p>
-        </p:txBody>
-      </p:sp>
-      <p:sp>
-        <p:nvSpPr>
-          <p:cNvPr id="3" name="Rectangle 2"/>
-          <p:cNvSpPr/>
-          <p:nvPr/>
-        </p:nvSpPr>
-        <p:spPr>
-          <a:xfrm>
-            <a:off x="0" y="960120"/>
-            <a:ext cx="12191695" cy="41148"/>
-          </a:xfrm>
-          <a:prstGeom prst="rect">
-            <a:avLst/>
-          </a:prstGeom>
-          <a:solidFill>
-            <a:srgbClr val="FFD000"/>
-          </a:solidFill>
-          <a:ln>
-            <a:noFill/>
-          </a:ln>
-        </p:spPr>
-        <p:style>
-          <a:lnRef idx="1">
-            <a:schemeClr val="accent1"/>
-          </a:lnRef>
-          <a:fillRef idx="3">
-            <a:schemeClr val="accent1"/>
-          </a:fillRef>
-          <a:effectRef idx="2">
-            <a:schemeClr val="accent1"/>
-          </a:effectRef>
-          <a:fontRef idx="minor">
-            <a:schemeClr val="lt1"/>
-          </a:fontRef>
-        </p:style>
-        <p:txBody>
-          <a:bodyPr rtlCol="0" anchor="ctr"/>
-          <a:lstStyle/>
-          <a:p>
-            <a:pPr algn="ctr"/>
-          </a:p>
-        </p:txBody>
-      </p:sp>
-      <p:sp>
-        <p:nvSpPr>
-          <p:cNvPr id="4" name="TextBox 3"/>
-          <p:cNvSpPr txBox="1"/>
-          <p:nvPr/>
-        </p:nvSpPr>
-        <p:spPr>
-          <a:xfrm>
-            <a:off x="457200" y="164592"/>
-            <a:ext cx="11277295" cy="502920"/>
-          </a:xfrm>
-          <a:prstGeom prst="rect">
-            <a:avLst/>
-          </a:prstGeom>
-          <a:noFill/>
-        </p:spPr>
-        <p:txBody>
-          <a:bodyPr wrap="square">
-            <a:spAutoFit/>
-          </a:bodyPr>
-          <a:lstStyle/>
-          <a:p>
-            <a:r>
-              <a:rPr sz="2600" b="1" i="0">
-                <a:solidFill>
-                  <a:srgbClr val="FFFFFF"/>
-                </a:solidFill>
-                <a:latin typeface="Calibri"/>
-              </a:rPr>
-              <a:t>Preguntas frecuentes y cierre conceptual (1/2)</a:t>
-            </a:r>
-          </a:p>
-        </p:txBody>
-      </p:sp>
-      <p:sp>
-        <p:nvSpPr>
-          <p:cNvPr id="5" name="TextBox 4"/>
-          <p:cNvSpPr txBox="1"/>
-          <p:nvPr/>
-        </p:nvSpPr>
-        <p:spPr>
-          <a:xfrm>
-            <a:off x="457200" y="1170432"/>
-            <a:ext cx="11277295" cy="5230368"/>
-          </a:xfrm>
-          <a:prstGeom prst="rect">
-            <a:avLst/>
-          </a:prstGeom>
-          <a:noFill/>
-        </p:spPr>
-        <p:txBody>
-          <a:bodyPr wrap="square">
-            <a:spAutoFit/>
-          </a:bodyPr>
-          <a:lstStyle/>
-          <a:p>
-            <a:pPr>
-              <a:spcAft>
-                <a:spcPts val="800"/>
-              </a:spcAft>
-            </a:pPr>
-            <a:r>
-              <a:rPr sz="2000" b="0" i="0">
-                <a:solidFill>
-                  <a:srgbClr val="333333"/>
-                </a:solidFill>
-                <a:latin typeface="Calibri"/>
-              </a:rPr>
-              <a:t>–   La primera es si tiene sentido estimar costos cuando nadie va a pagar nada; la respuesta es que la estimacion no cambia la factura, cambia el diseno, y que en un trabajo real la segunda pregunta despues de "funciona" es "cuanto cuesta al mes".</a:t>
-            </a:r>
-          </a:p>
-          <a:p>
-            <a:pPr>
-              <a:spcAft>
-                <a:spcPts val="800"/>
-              </a:spcAft>
-            </a:pPr>
-            <a:r>
-              <a:rPr sz="2000" b="0" i="0">
-                <a:solidFill>
-                  <a:srgbClr val="333333"/>
-                </a:solidFill>
-                <a:latin typeface="Calibri"/>
-              </a:rPr>
-              <a:t>–   La segunda es si entonces lo mas barato es siempre lo mejor, y la respuesta es no</a:t>
-            </a:r>
-          </a:p>
-          <a:p>
-            <a:pPr>
-              <a:spcAft>
-                <a:spcPts val="800"/>
-              </a:spcAft>
-            </a:pPr>
-            <a:r>
-              <a:rPr sz="2000" b="0" i="0">
-                <a:solidFill>
-                  <a:srgbClr val="333333"/>
-                </a:solidFill>
-                <a:latin typeface="Calibri"/>
-              </a:rPr>
-              <a:t>–   Porque lo mas barato suele mover el costo hacia la operacion humana; el concepto a nombrar es costo total de propiedad, que suma infraestructura mas operacion mas incidentes mas migraciones</a:t>
-            </a:r>
-          </a:p>
-        </p:txBody>
-      </p:sp>
-      <p:sp>
-        <p:nvSpPr>
-          <p:cNvPr id="6" name="TextBox 5"/>
-          <p:cNvSpPr txBox="1"/>
-          <p:nvPr/>
-        </p:nvSpPr>
-        <p:spPr>
-          <a:xfrm>
-            <a:off x="11185855" y="6473952"/>
-            <a:ext cx="640080" cy="274320"/>
-          </a:xfrm>
-          <a:prstGeom prst="rect">
-            <a:avLst/>
-          </a:prstGeom>
-          <a:noFill/>
-        </p:spPr>
-        <p:txBody>
-          <a:bodyPr wrap="square">
-            <a:spAutoFit/>
-          </a:bodyPr>
-          <a:lstStyle/>
-          <a:p>
-            <a:pPr algn="r"/>
-            <a:r>
-              <a:rPr sz="1100" b="0" i="0">
-                <a:solidFill>
-                  <a:srgbClr val="666666"/>
-                </a:solidFill>
-                <a:latin typeface="Calibri"/>
-              </a:rPr>
-              <a:t>17</a:t>
-            </a:r>
-          </a:p>
-        </p:txBody>
-      </p:sp>
-    </p:spTree>
-  </p:cSld>
-  <p:clrMapOvr>
-    <a:masterClrMapping/>
-  </p:clrMapOvr>
-</p:sld>
-</file>
-
-<file path=ppt/slides/slide18.xml><?xml version="1.0" encoding="utf-8"?>
-<p:sld xmlns:a="http://schemas.openxmlformats.org/drawingml/2006/main" xmlns:p="http://schemas.openxmlformats.org/presentationml/2006/main" xmlns:r="http://schemas.openxmlformats.org/officeDocument/2006/relationships">
-  <p:cSld>
-    <p:bg>
-      <p:bgPr>
-        <a:solidFill>
-          <a:srgbClr val="FFFFFF"/>
-        </a:solidFill>
-        <a:effectLst/>
-      </p:bgPr>
-    </p:bg>
-    <p:spTree>
-      <p:nvGrpSpPr>
-        <p:cNvPr id="1" name=""/>
-        <p:cNvGrpSpPr/>
-        <p:nvPr/>
-      </p:nvGrpSpPr>
-      <p:grpSpPr/>
-      <p:sp>
-        <p:nvSpPr>
-          <p:cNvPr id="2" name="Rectangle 1"/>
-          <p:cNvSpPr/>
-          <p:nvPr/>
-        </p:nvSpPr>
-        <p:spPr>
-          <a:xfrm>
-            <a:off x="0" y="0"/>
-            <a:ext cx="12191695" cy="960120"/>
-          </a:xfrm>
-          <a:prstGeom prst="rect">
-            <a:avLst/>
-          </a:prstGeom>
-          <a:solidFill>
-            <a:srgbClr val="095292"/>
-          </a:solidFill>
-          <a:ln>
-            <a:noFill/>
-          </a:ln>
-        </p:spPr>
-        <p:style>
-          <a:lnRef idx="1">
-            <a:schemeClr val="accent1"/>
-          </a:lnRef>
-          <a:fillRef idx="3">
-            <a:schemeClr val="accent1"/>
-          </a:fillRef>
-          <a:effectRef idx="2">
-            <a:schemeClr val="accent1"/>
-          </a:effectRef>
-          <a:fontRef idx="minor">
-            <a:schemeClr val="lt1"/>
-          </a:fontRef>
-        </p:style>
-        <p:txBody>
-          <a:bodyPr rtlCol="0" anchor="ctr"/>
-          <a:lstStyle/>
-          <a:p>
-            <a:pPr algn="ctr"/>
-          </a:p>
-        </p:txBody>
-      </p:sp>
-      <p:sp>
-        <p:nvSpPr>
-          <p:cNvPr id="3" name="Rectangle 2"/>
-          <p:cNvSpPr/>
-          <p:nvPr/>
-        </p:nvSpPr>
-        <p:spPr>
-          <a:xfrm>
-            <a:off x="0" y="960120"/>
-            <a:ext cx="12191695" cy="41148"/>
-          </a:xfrm>
-          <a:prstGeom prst="rect">
-            <a:avLst/>
-          </a:prstGeom>
-          <a:solidFill>
-            <a:srgbClr val="FFD000"/>
-          </a:solidFill>
-          <a:ln>
-            <a:noFill/>
-          </a:ln>
-        </p:spPr>
-        <p:style>
-          <a:lnRef idx="1">
-            <a:schemeClr val="accent1"/>
-          </a:lnRef>
-          <a:fillRef idx="3">
-            <a:schemeClr val="accent1"/>
-          </a:fillRef>
-          <a:effectRef idx="2">
-            <a:schemeClr val="accent1"/>
-          </a:effectRef>
-          <a:fontRef idx="minor">
-            <a:schemeClr val="lt1"/>
-          </a:fontRef>
-        </p:style>
-        <p:txBody>
-          <a:bodyPr rtlCol="0" anchor="ctr"/>
-          <a:lstStyle/>
-          <a:p>
-            <a:pPr algn="ctr"/>
-          </a:p>
-        </p:txBody>
-      </p:sp>
-      <p:sp>
-        <p:nvSpPr>
-          <p:cNvPr id="4" name="TextBox 3"/>
-          <p:cNvSpPr txBox="1"/>
-          <p:nvPr/>
-        </p:nvSpPr>
-        <p:spPr>
-          <a:xfrm>
-            <a:off x="457200" y="164592"/>
-            <a:ext cx="11277295" cy="502920"/>
-          </a:xfrm>
-          <a:prstGeom prst="rect">
-            <a:avLst/>
-          </a:prstGeom>
-          <a:noFill/>
-        </p:spPr>
-        <p:txBody>
-          <a:bodyPr wrap="square">
-            <a:spAutoFit/>
-          </a:bodyPr>
-          <a:lstStyle/>
-          <a:p>
-            <a:r>
-              <a:rPr sz="2600" b="1" i="0">
-                <a:solidFill>
-                  <a:srgbClr val="FFFFFF"/>
-                </a:solidFill>
-                <a:latin typeface="Calibri"/>
-              </a:rPr>
-              <a:t>Preguntas frecuentes y cierre conceptual (2/2)</a:t>
-            </a:r>
-          </a:p>
-        </p:txBody>
-      </p:sp>
-      <p:sp>
-        <p:nvSpPr>
-          <p:cNvPr id="5" name="TextBox 4"/>
-          <p:cNvSpPr txBox="1"/>
-          <p:nvPr/>
-        </p:nvSpPr>
-        <p:spPr>
-          <a:xfrm>
-            <a:off x="457200" y="1170432"/>
-            <a:ext cx="11277295" cy="5230368"/>
-          </a:xfrm>
-          <a:prstGeom prst="rect">
-            <a:avLst/>
-          </a:prstGeom>
-          <a:noFill/>
-        </p:spPr>
-        <p:txBody>
-          <a:bodyPr wrap="square">
-            <a:spAutoFit/>
-          </a:bodyPr>
-          <a:lstStyle/>
-          <a:p>
-            <a:pPr>
-              <a:spcAft>
-                <a:spcPts val="800"/>
-              </a:spcAft>
-            </a:pPr>
-            <a:r>
-              <a:rPr sz="2000" b="0" i="0">
-                <a:solidFill>
-                  <a:srgbClr val="333333"/>
-                </a:solidFill>
-                <a:latin typeface="Calibri"/>
-              </a:rPr>
-              <a:t>–   Y bajo esa lente una base de datos autoadministrada en una maquina desnuda es mas barata al mes y mas cara al ano cuando alguien debe parcharla, respaldarla y atender su caida a las tres de la manana.</a:t>
-            </a:r>
-          </a:p>
-          <a:p>
-            <a:pPr>
-              <a:spcAft>
-                <a:spcPts val="800"/>
-              </a:spcAft>
-            </a:pPr>
-            <a:r>
-              <a:rPr sz="2000" b="0" i="0">
-                <a:solidFill>
-                  <a:srgbClr val="333333"/>
-                </a:solidFill>
-                <a:latin typeface="Calibri"/>
-              </a:rPr>
-              <a:t>–   La tercera es como asignar los niveles sin factura: se asignan comparando componentes entre si con el driver como argumento y escribiendo el supuesto</a:t>
-            </a:r>
-          </a:p>
-          <a:p>
-            <a:pPr>
-              <a:spcAft>
-                <a:spcPts val="800"/>
-              </a:spcAft>
-            </a:pPr>
-            <a:r>
-              <a:rPr sz="2000" b="0" i="0">
-                <a:solidFill>
-                  <a:srgbClr val="333333"/>
-                </a:solidFill>
-                <a:latin typeface="Calibri"/>
-              </a:rPr>
-              <a:t>–   "Alto porque es computo 24/7 mas almacenamiento acumulativo mas respaldos" es defendible, "Alto porque suena caro" no.</a:t>
-            </a:r>
-          </a:p>
-        </p:txBody>
-      </p:sp>
-      <p:sp>
-        <p:nvSpPr>
-          <p:cNvPr id="6" name="TextBox 5"/>
-          <p:cNvSpPr txBox="1"/>
-          <p:nvPr/>
-        </p:nvSpPr>
-        <p:spPr>
-          <a:xfrm>
-            <a:off x="11185855" y="6473952"/>
-            <a:ext cx="640080" cy="274320"/>
-          </a:xfrm>
-          <a:prstGeom prst="rect">
-            <a:avLst/>
-          </a:prstGeom>
-          <a:noFill/>
-        </p:spPr>
-        <p:txBody>
-          <a:bodyPr wrap="square">
-            <a:spAutoFit/>
-          </a:bodyPr>
-          <a:lstStyle/>
-          <a:p>
-            <a:pPr algn="r"/>
-            <a:r>
-              <a:rPr sz="1100" b="0" i="0">
-                <a:solidFill>
-                  <a:srgbClr val="666666"/>
-                </a:solidFill>
-                <a:latin typeface="Calibri"/>
-              </a:rPr>
-              <a:t>18</a:t>
-            </a:r>
-          </a:p>
-        </p:txBody>
-      </p:sp>
-    </p:spTree>
-  </p:cSld>
-  <p:clrMapOvr>
-    <a:masterClrMapping/>
-  </p:clrMapOvr>
-</p:sld>
-</file>
-
-<file path=ppt/slides/slide19.xml><?xml version="1.0" encoding="utf-8"?>
-<p:sld xmlns:a="http://schemas.openxmlformats.org/drawingml/2006/main" xmlns:p="http://schemas.openxmlformats.org/presentationml/2006/main" xmlns:r="http://schemas.openxmlformats.org/officeDocument/2006/relationships">
-  <p:cSld>
-    <p:bg>
-      <p:bgPr>
-        <a:solidFill>
-          <a:srgbClr val="FFFFFF"/>
-        </a:solidFill>
-        <a:effectLst/>
-      </p:bgPr>
-    </p:bg>
-    <p:spTree>
-      <p:nvGrpSpPr>
-        <p:cNvPr id="1" name=""/>
-        <p:cNvGrpSpPr/>
-        <p:nvPr/>
-      </p:nvGrpSpPr>
-      <p:grpSpPr/>
-      <p:sp>
-        <p:nvSpPr>
-          <p:cNvPr id="2" name="Rectangle 1"/>
-          <p:cNvSpPr/>
-          <p:nvPr/>
-        </p:nvSpPr>
-        <p:spPr>
-          <a:xfrm>
-            <a:off x="0" y="0"/>
             <a:ext cx="12191695" cy="164592"/>
           </a:xfrm>
           <a:prstGeom prst="rect">
@@ -7513,14 +6512,118 @@
       </p:sp>
       <p:sp>
         <p:nvSpPr>
-          <p:cNvPr id="5" name="TextBox 4"/>
+          <p:cNvPr id="5" name="Rounded Rectangle 4"/>
+          <p:cNvSpPr/>
+          <p:nvPr/>
+        </p:nvSpPr>
+        <p:spPr>
+          <a:xfrm>
+            <a:off x="5797149" y="1573813"/>
+            <a:ext cx="6010497" cy="4057845"/>
+          </a:xfrm>
+          <a:prstGeom prst="roundRect">
+            <a:avLst>
+              <a:gd name="adj" fmla="val 4000"/>
+            </a:avLst>
+          </a:prstGeom>
+          <a:solidFill>
+            <a:srgbClr val="E8EEF4"/>
+          </a:solidFill>
+          <a:ln>
+            <a:noFill/>
+          </a:ln>
+        </p:spPr>
+        <p:style>
+          <a:lnRef idx="1">
+            <a:schemeClr val="accent1"/>
+          </a:lnRef>
+          <a:fillRef idx="3">
+            <a:schemeClr val="accent1"/>
+          </a:fillRef>
+          <a:effectRef idx="2">
+            <a:schemeClr val="accent1"/>
+          </a:effectRef>
+          <a:fontRef idx="minor">
+            <a:schemeClr val="lt1"/>
+          </a:fontRef>
+        </p:style>
+        <p:txBody>
+          <a:bodyPr rtlCol="0" anchor="ctr"/>
+          <a:lstStyle/>
+          <a:p>
+            <a:pPr algn="ctr"/>
+          </a:p>
+        </p:txBody>
+      </p:sp>
+      <p:pic>
+        <p:nvPicPr>
+          <p:cNvPr id="6" name="Picture 5" descr="students-learning-laptops-classroom.jpg"/>
+          <p:cNvPicPr>
+            <a:picLocks noChangeAspect="1"/>
+          </p:cNvPicPr>
+          <p:nvPr/>
+        </p:nvPicPr>
+        <p:blipFill>
+          <a:blip r:embed="rId2"/>
+          <a:stretch>
+            <a:fillRect/>
+          </a:stretch>
+        </p:blipFill>
+        <p:spPr>
+          <a:xfrm>
+            <a:off x="5870301" y="1646965"/>
+            <a:ext cx="5864193" cy="3911541"/>
+          </a:xfrm>
+          <a:prstGeom prst="rect">
+            <a:avLst/>
+          </a:prstGeom>
+        </p:spPr>
+      </p:pic>
+      <p:sp>
+        <p:nvSpPr>
+          <p:cNvPr id="7" name="TextBox 6"/>
           <p:cNvSpPr txBox="1"/>
           <p:nvPr/>
         </p:nvSpPr>
         <p:spPr>
           <a:xfrm>
-            <a:off x="457200" y="1170432"/>
-            <a:ext cx="11277295" cy="5230368"/>
+            <a:off x="5870301" y="5961888"/>
+            <a:ext cx="5864193" cy="320040"/>
+          </a:xfrm>
+          <a:prstGeom prst="rect">
+            <a:avLst/>
+          </a:prstGeom>
+          <a:noFill/>
+        </p:spPr>
+        <p:txBody>
+          <a:bodyPr wrap="square">
+            <a:spAutoFit/>
+          </a:bodyPr>
+          <a:lstStyle/>
+          <a:p>
+            <a:pPr algn="ctr"/>
+            <a:r>
+              <a:rPr sz="1100" b="0" i="1">
+                <a:solidFill>
+                  <a:srgbClr val="666666"/>
+                </a:solidFill>
+                <a:latin typeface="Calibri"/>
+              </a:rPr>
+              <a:t>Foto: Mikhail Nilov · Pexels</a:t>
+            </a:r>
+          </a:p>
+        </p:txBody>
+      </p:sp>
+      <p:sp>
+        <p:nvSpPr>
+          <p:cNvPr id="8" name="TextBox 7"/>
+          <p:cNvSpPr txBox="1"/>
+          <p:nvPr/>
+        </p:nvSpPr>
+        <p:spPr>
+          <a:xfrm>
+            <a:off x="457200" y="1353312"/>
+            <a:ext cx="5093061" cy="5047488"/>
           </a:xfrm>
           <a:prstGeom prst="rect">
             <a:avLst/>
@@ -7584,7 +6687,7 @@
       </p:sp>
       <p:sp>
         <p:nvSpPr>
-          <p:cNvPr id="6" name="TextBox 5"/>
+          <p:cNvPr id="9" name="TextBox 8"/>
           <p:cNvSpPr txBox="1"/>
           <p:nvPr/>
         </p:nvSpPr>
@@ -7758,21 +6861,149 @@
                 </a:solidFill>
                 <a:latin typeface="Calibri"/>
               </a:rPr>
-              <a:t>Costos sin factura real</a:t>
-            </a:r>
-          </a:p>
-        </p:txBody>
-      </p:sp>
-      <p:sp>
-        <p:nvSpPr>
-          <p:cNvPr id="5" name="TextBox 4"/>
+              <a:t>Clase autonoma: de gasto de capital a gasto operativo medido</a:t>
+            </a:r>
+          </a:p>
+        </p:txBody>
+      </p:sp>
+      <p:sp>
+        <p:nvSpPr>
+          <p:cNvPr id="5" name="Rounded Rectangle 4"/>
+          <p:cNvSpPr/>
+          <p:nvPr/>
+        </p:nvSpPr>
+        <p:spPr>
+          <a:xfrm>
+            <a:off x="5803166" y="1188719"/>
+            <a:ext cx="5998464" cy="4828032"/>
+          </a:xfrm>
+          <a:prstGeom prst="roundRect">
+            <a:avLst>
+              <a:gd name="adj" fmla="val 4000"/>
+            </a:avLst>
+          </a:prstGeom>
+          <a:solidFill>
+            <a:srgbClr val="E8EEF4"/>
+          </a:solidFill>
+          <a:ln>
+            <a:noFill/>
+          </a:ln>
+        </p:spPr>
+        <p:style>
+          <a:lnRef idx="1">
+            <a:schemeClr val="accent1"/>
+          </a:lnRef>
+          <a:fillRef idx="3">
+            <a:schemeClr val="accent1"/>
+          </a:fillRef>
+          <a:effectRef idx="2">
+            <a:schemeClr val="accent1"/>
+          </a:effectRef>
+          <a:fontRef idx="minor">
+            <a:schemeClr val="lt1"/>
+          </a:fontRef>
+        </p:style>
+        <p:txBody>
+          <a:bodyPr rtlCol="0" anchor="ctr"/>
+          <a:lstStyle/>
+          <a:p>
+            <a:pPr algn="ctr"/>
+          </a:p>
+        </p:txBody>
+      </p:sp>
+      <p:pic>
+        <p:nvPicPr>
+          <p:cNvPr id="6" name="Picture 5" descr="capex-opex-paso1.png"/>
+          <p:cNvPicPr>
+            <a:picLocks noChangeAspect="1"/>
+          </p:cNvPicPr>
+          <p:nvPr/>
+        </p:nvPicPr>
+        <p:blipFill>
+          <a:blip r:embed="rId2"/>
+          <a:stretch>
+            <a:fillRect/>
+          </a:stretch>
+        </p:blipFill>
+        <p:spPr>
+          <a:xfrm>
+            <a:off x="5876318" y="1261872"/>
+            <a:ext cx="5852160" cy="4681728"/>
+          </a:xfrm>
+          <a:prstGeom prst="rect">
+            <a:avLst/>
+          </a:prstGeom>
+        </p:spPr>
+      </p:pic>
+      <p:pic>
+        <p:nvPicPr>
+          <p:cNvPr id="7" name="Picture 6" descr="capex-opex-paso2.png"/>
+          <p:cNvPicPr>
+            <a:picLocks noChangeAspect="1"/>
+          </p:cNvPicPr>
+          <p:nvPr/>
+        </p:nvPicPr>
+        <p:blipFill>
+          <a:blip r:embed="rId3"/>
+          <a:stretch>
+            <a:fillRect/>
+          </a:stretch>
+        </p:blipFill>
+        <p:spPr>
+          <a:xfrm>
+            <a:off x="5876318" y="1261872"/>
+            <a:ext cx="5852160" cy="4681728"/>
+          </a:xfrm>
+          <a:prstGeom prst="rect">
+            <a:avLst/>
+          </a:prstGeom>
+        </p:spPr>
+      </p:pic>
+      <p:sp>
+        <p:nvSpPr>
+          <p:cNvPr id="8" name="TextBox 7"/>
           <p:cNvSpPr txBox="1"/>
           <p:nvPr/>
         </p:nvSpPr>
         <p:spPr>
           <a:xfrm>
-            <a:off x="457200" y="1170432"/>
-            <a:ext cx="11277295" cy="5230368"/>
+            <a:off x="5870301" y="5961888"/>
+            <a:ext cx="5864193" cy="320040"/>
+          </a:xfrm>
+          <a:prstGeom prst="rect">
+            <a:avLst/>
+          </a:prstGeom>
+          <a:noFill/>
+        </p:spPr>
+        <p:txBody>
+          <a:bodyPr wrap="square">
+            <a:spAutoFit/>
+          </a:bodyPr>
+          <a:lstStyle/>
+          <a:p>
+            <a:pPr algn="ctr"/>
+            <a:r>
+              <a:rPr sz="1100" b="0" i="1">
+                <a:solidFill>
+                  <a:srgbClr val="666666"/>
+                </a:solidFill>
+                <a:latin typeface="Calibri"/>
+              </a:rPr>
+              <a:t>Clic para avanzar la animación</a:t>
+            </a:r>
+          </a:p>
+        </p:txBody>
+      </p:sp>
+      <p:sp>
+        <p:nvSpPr>
+          <p:cNvPr id="9" name="TextBox 8"/>
+          <p:cNvSpPr txBox="1"/>
+          <p:nvPr/>
+        </p:nvSpPr>
+        <p:spPr>
+          <a:xfrm>
+            <a:off x="457200" y="1353312"/>
+            <a:ext cx="5093061" cy="5047488"/>
           </a:xfrm>
           <a:prstGeom prst="rect">
             <a:avLst/>
@@ -7797,7 +7028,7 @@
                 </a:solidFill>
                 <a:latin typeface="Calibri"/>
               </a:rPr>
-              <a:t>–   Escala cualitativa: Bajo / Medio / Alto por componente.</a:t>
+              <a:t>–   En la nube el gasto es operativo y medido: se paga por segundo de computo, por gigabyte almacenado al mes, por gigabyte que sale hacia internet y por…</a:t>
             </a:r>
           </a:p>
           <a:p>
@@ -7813,116 +7044,14 @@
                 </a:solidFill>
                 <a:latin typeface="Calibri"/>
               </a:rPr>
-              <a:t>–   Drivers: siempre-on, egress, storage caliente, builds CI frecuentes.</a:t>
-            </a:r>
-          </a:p>
-          <a:p>
-            <a:pPr>
-              <a:spcAft>
-                <a:spcPts val="800"/>
-              </a:spcAft>
-            </a:pPr>
-            <a:r>
-              <a:rPr sz="2000" b="0" i="0">
-                <a:solidFill>
-                  <a:srgbClr val="333333"/>
-                </a:solidFill>
-                <a:latin typeface="Calibri"/>
-              </a:rPr>
-              <a:t>–   la app: justifiquen por qué su diseño no es «siempre XL».</a:t>
-            </a:r>
-          </a:p>
-          <a:p>
-            <a:pPr>
-              <a:spcAft>
-                <a:spcPts val="800"/>
-              </a:spcAft>
-            </a:pPr>
-            <a:r>
-              <a:rPr sz="2000" b="0" i="0">
-                <a:solidFill>
-                  <a:srgbClr val="333333"/>
-                </a:solidFill>
-                <a:latin typeface="Calibri"/>
-              </a:rPr>
-              <a:t>–   Ejemplo: la base de datos siempre encendida es costo </a:t>
-            </a:r>
-            <a:r>
-              <a:rPr sz="2000" b="1" i="0">
-                <a:solidFill>
-                  <a:srgbClr val="333333"/>
-                </a:solidFill>
-                <a:latin typeface="Calibri"/>
-              </a:rPr>
-              <a:t>Medio</a:t>
-            </a:r>
-            <a:r>
-              <a:rPr sz="2000" b="0" i="0">
-                <a:solidFill>
-                  <a:srgbClr val="333333"/>
-                </a:solidFill>
-                <a:latin typeface="Calibri"/>
-              </a:rPr>
-              <a:t>; un worker que solo corre cuando hay mensajes en cola es </a:t>
-            </a:r>
-            <a:r>
-              <a:rPr sz="2000" b="1" i="0">
-                <a:solidFill>
-                  <a:srgbClr val="333333"/>
-                </a:solidFill>
-                <a:latin typeface="Calibri"/>
-              </a:rPr>
-              <a:t>Bajo</a:t>
-            </a:r>
-            <a:r>
-              <a:rPr sz="2000" b="0" i="0">
-                <a:solidFill>
-                  <a:srgbClr val="333333"/>
-                </a:solidFill>
-                <a:latin typeface="Calibri"/>
-              </a:rPr>
-              <a:t>.</a:t>
-            </a:r>
-          </a:p>
-          <a:p>
-            <a:pPr>
-              <a:spcAft>
-                <a:spcPts val="800"/>
-              </a:spcAft>
-            </a:pPr>
-            <a:r>
-              <a:rPr sz="2000" b="0" i="0">
-                <a:solidFill>
-                  <a:srgbClr val="333333"/>
-                </a:solidFill>
-                <a:latin typeface="Calibri"/>
-              </a:rPr>
-              <a:t>–   </a:t>
-            </a:r>
-            <a:r>
-              <a:rPr sz="2000" b="1" i="0">
-                <a:solidFill>
-                  <a:srgbClr val="333333"/>
-                </a:solidFill>
-                <a:latin typeface="Calibri"/>
-              </a:rPr>
-              <a:t>Egress</a:t>
-            </a:r>
-            <a:r>
-              <a:rPr sz="2000" b="0" i="0">
-                <a:solidFill>
-                  <a:srgbClr val="333333"/>
-                </a:solidFill>
-                <a:latin typeface="Calibri"/>
-              </a:rPr>
-              <a:t> = datos que salen del proveedor hacia internet; suele cobrarse por gigabyte, y la entrada casi nunca.</a:t>
-            </a:r>
-          </a:p>
-        </p:txBody>
-      </p:sp>
-      <p:sp>
-        <p:nvSpPr>
-          <p:cNvPr id="6" name="TextBox 5"/>
+              <a:t>–   El cambio no es contable sino arquitectonico.</a:t>
+            </a:r>
+          </a:p>
+        </p:txBody>
+      </p:sp>
+      <p:sp>
+        <p:nvSpPr>
+          <p:cNvPr id="10" name="TextBox 9"/>
           <p:cNvSpPr txBox="1"/>
           <p:nvPr/>
         </p:nvSpPr>
@@ -7960,6 +7089,89 @@
   <p:clrMapOvr>
     <a:masterClrMapping/>
   </p:clrMapOvr>
+  <p:timing>
+    <p:tnLst>
+      <p:par>
+        <p:cTn id="1" dur="indefinite" restart="never" nodeType="tmRoot">
+          <p:childTnLst>
+            <p:seq concurrent="1" nextAc="seek">
+              <p:cTn id="2" dur="indefinite" nodeType="mainSeq">
+                <p:childTnLst>
+                  <p:par>
+                    <p:cTn id="3" fill="hold">
+                      <p:stCondLst>
+                        <p:cond delay="indefinite"/>
+                      </p:stCondLst>
+                      <p:childTnLst>
+                        <p:par>
+                          <p:cTn id="4" fill="hold">
+                            <p:stCondLst>
+                              <p:cond delay="0"/>
+                            </p:stCondLst>
+                            <p:childTnLst>
+                              <p:par>
+                                <p:cTn id="5" presetID="10" presetClass="entr" presetSubtype="0" fill="hold" nodeType="clickEffect">
+                                  <p:stCondLst>
+                                    <p:cond delay="0"/>
+                                  </p:stCondLst>
+                                  <p:childTnLst>
+                                    <p:set>
+                                      <p:cBhvr>
+                                        <p:cTn id="6" dur="1" fill="hold">
+                                          <p:stCondLst>
+                                            <p:cond delay="0"/>
+                                          </p:stCondLst>
+                                        </p:cTn>
+                                        <p:tgtEl>
+                                          <p:spTgt spid="7"/>
+                                        </p:tgtEl>
+                                        <p:attrNameLst>
+                                          <p:attrName>style.visibility</p:attrName>
+                                        </p:attrNameLst>
+                                      </p:cBhvr>
+                                      <p:to>
+                                        <p:strVal val="visible"/>
+                                      </p:to>
+                                    </p:set>
+                                    <p:animEffect transition="in" filter="fade">
+                                      <p:cBhvr>
+                                        <p:cTn id="7" dur="450"/>
+                                        <p:tgtEl>
+                                          <p:spTgt spid="7"/>
+                                        </p:tgtEl>
+                                      </p:cBhvr>
+                                    </p:animEffect>
+                                  </p:childTnLst>
+                                </p:cTn>
+                              </p:par>
+                            </p:childTnLst>
+                          </p:cTn>
+                        </p:par>
+                      </p:childTnLst>
+                    </p:cTn>
+                  </p:par>
+                </p:childTnLst>
+              </p:cTn>
+              <p:prevCondLst>
+                <p:cond evt="onPrev" delay="0">
+                  <p:tgtEl>
+                    <p:sldTgt/>
+                  </p:tgtEl>
+                </p:cond>
+              </p:prevCondLst>
+              <p:nextCondLst>
+                <p:cond evt="onNext" delay="0">
+                  <p:tgtEl>
+                    <p:sldTgt/>
+                  </p:tgtEl>
+                </p:cond>
+              </p:nextCondLst>
+            </p:seq>
+          </p:childTnLst>
+        </p:cTn>
+      </p:par>
+    </p:tnLst>
+  </p:timing>
 </p:sld>
 </file>
 
@@ -8096,21 +7308,125 @@
                 </a:solidFill>
                 <a:latin typeface="Calibri"/>
               </a:rPr>
-              <a:t>Sostenibilidad</a:t>
-            </a:r>
-          </a:p>
-        </p:txBody>
-      </p:sp>
-      <p:sp>
-        <p:nvSpPr>
-          <p:cNvPr id="5" name="TextBox 4"/>
+              <a:t>La app no tiene factura real, y por que igual se estima</a:t>
+            </a:r>
+          </a:p>
+        </p:txBody>
+      </p:sp>
+      <p:sp>
+        <p:nvSpPr>
+          <p:cNvPr id="5" name="Rounded Rectangle 4"/>
+          <p:cNvSpPr/>
+          <p:nvPr/>
+        </p:nvSpPr>
+        <p:spPr>
+          <a:xfrm>
+            <a:off x="5797149" y="1573813"/>
+            <a:ext cx="6010497" cy="4057845"/>
+          </a:xfrm>
+          <a:prstGeom prst="roundRect">
+            <a:avLst>
+              <a:gd name="adj" fmla="val 4000"/>
+            </a:avLst>
+          </a:prstGeom>
+          <a:solidFill>
+            <a:srgbClr val="E8EEF4"/>
+          </a:solidFill>
+          <a:ln>
+            <a:noFill/>
+          </a:ln>
+        </p:spPr>
+        <p:style>
+          <a:lnRef idx="1">
+            <a:schemeClr val="accent1"/>
+          </a:lnRef>
+          <a:fillRef idx="3">
+            <a:schemeClr val="accent1"/>
+          </a:fillRef>
+          <a:effectRef idx="2">
+            <a:schemeClr val="accent1"/>
+          </a:effectRef>
+          <a:fontRef idx="minor">
+            <a:schemeClr val="lt1"/>
+          </a:fontRef>
+        </p:style>
+        <p:txBody>
+          <a:bodyPr rtlCol="0" anchor="ctr"/>
+          <a:lstStyle/>
+          <a:p>
+            <a:pPr algn="ctr"/>
+          </a:p>
+        </p:txBody>
+      </p:sp>
+      <p:pic>
+        <p:nvPicPr>
+          <p:cNvPr id="6" name="Picture 5" descr="calculator-budget-notebook.jpg"/>
+          <p:cNvPicPr>
+            <a:picLocks noChangeAspect="1"/>
+          </p:cNvPicPr>
+          <p:nvPr/>
+        </p:nvPicPr>
+        <p:blipFill>
+          <a:blip r:embed="rId2"/>
+          <a:stretch>
+            <a:fillRect/>
+          </a:stretch>
+        </p:blipFill>
+        <p:spPr>
+          <a:xfrm>
+            <a:off x="5870301" y="1646965"/>
+            <a:ext cx="5864193" cy="3911541"/>
+          </a:xfrm>
+          <a:prstGeom prst="rect">
+            <a:avLst/>
+          </a:prstGeom>
+        </p:spPr>
+      </p:pic>
+      <p:sp>
+        <p:nvSpPr>
+          <p:cNvPr id="7" name="TextBox 6"/>
           <p:cNvSpPr txBox="1"/>
           <p:nvPr/>
         </p:nvSpPr>
         <p:spPr>
           <a:xfrm>
-            <a:off x="457200" y="1170432"/>
-            <a:ext cx="11277295" cy="5230368"/>
+            <a:off x="5870301" y="5961888"/>
+            <a:ext cx="5864193" cy="320040"/>
+          </a:xfrm>
+          <a:prstGeom prst="rect">
+            <a:avLst/>
+          </a:prstGeom>
+          <a:noFill/>
+        </p:spPr>
+        <p:txBody>
+          <a:bodyPr wrap="square">
+            <a:spAutoFit/>
+          </a:bodyPr>
+          <a:lstStyle/>
+          <a:p>
+            <a:pPr algn="ctr"/>
+            <a:r>
+              <a:rPr sz="1100" b="0" i="1">
+                <a:solidFill>
+                  <a:srgbClr val="666666"/>
+                </a:solidFill>
+                <a:latin typeface="Calibri"/>
+              </a:rPr>
+              <a:t>Foto: olia danilevich · Pexels</a:t>
+            </a:r>
+          </a:p>
+        </p:txBody>
+      </p:sp>
+      <p:sp>
+        <p:nvSpPr>
+          <p:cNvPr id="8" name="TextBox 7"/>
+          <p:cNvSpPr txBox="1"/>
+          <p:nvPr/>
+        </p:nvSpPr>
+        <p:spPr>
+          <a:xfrm>
+            <a:off x="457200" y="1353312"/>
+            <a:ext cx="5093061" cy="5047488"/>
           </a:xfrm>
           <a:prstGeom prst="rect">
             <a:avLst/>
@@ -8135,7 +7451,7 @@
                 </a:solidFill>
                 <a:latin typeface="Calibri"/>
               </a:rPr>
-              <a:t>–   Menos capas innecesarias · imágenes slim · apagar labs · right-sizing.</a:t>
+              <a:t>–   la app no tiene facturacion real y no la va a tener: el curso prohibe cuentas cloud de pago y tarjetas de credito, y todo se trabaja con…</a:t>
             </a:r>
           </a:p>
           <a:p>
@@ -8151,82 +7467,14 @@
                 </a:solidFill>
                 <a:latin typeface="Calibri"/>
               </a:rPr>
-              <a:t>–   Relación con escalabilidad: escala cuando hay carga, no por vanidad.</a:t>
-            </a:r>
-          </a:p>
-          <a:p>
-            <a:pPr>
-              <a:spcAft>
-                <a:spcPts val="800"/>
-              </a:spcAft>
-            </a:pPr>
-            <a:r>
-              <a:rPr sz="2000" b="0" i="0">
-                <a:solidFill>
-                  <a:srgbClr val="333333"/>
-                </a:solidFill>
-                <a:latin typeface="Calibri"/>
-              </a:rPr>
-              <a:t>–   Sostenibilidad </a:t>
-            </a:r>
-            <a:r>
-              <a:rPr sz="2000" b="1" i="0">
-                <a:solidFill>
-                  <a:srgbClr val="333333"/>
-                </a:solidFill>
-                <a:latin typeface="Calibri"/>
-              </a:rPr>
-              <a:t>técnica</a:t>
-            </a:r>
-            <a:r>
-              <a:rPr sz="2000" b="0" i="0">
-                <a:solidFill>
-                  <a:srgbClr val="333333"/>
-                </a:solidFill>
-                <a:latin typeface="Calibri"/>
-              </a:rPr>
-              <a:t>: que el equipo pueda operar el diseño. </a:t>
-            </a:r>
-            <a:r>
-              <a:rPr sz="2000" b="1" i="0">
-                <a:solidFill>
-                  <a:srgbClr val="333333"/>
-                </a:solidFill>
-                <a:latin typeface="Calibri"/>
-              </a:rPr>
-              <a:t>Ambiental</a:t>
-            </a:r>
-            <a:r>
-              <a:rPr sz="2000" b="0" i="0">
-                <a:solidFill>
-                  <a:srgbClr val="333333"/>
-                </a:solidFill>
-                <a:latin typeface="Calibri"/>
-              </a:rPr>
-              <a:t>: no consumir cómputo que nadie usa.</a:t>
-            </a:r>
-          </a:p>
-          <a:p>
-            <a:pPr>
-              <a:spcAft>
-                <a:spcPts val="800"/>
-              </a:spcAft>
-            </a:pPr>
-            <a:r>
-              <a:rPr sz="2000" b="0" i="0">
-                <a:solidFill>
-                  <a:srgbClr val="333333"/>
-                </a:solidFill>
-                <a:latin typeface="Calibri"/>
-              </a:rPr>
-              <a:t>–   Ejemplo: una imagen slim pesa decenas de MB frente a cerca de 1 GB de una completa: menos almacenamiento, menos transferencia y despliegues más rápidos.</a:t>
-            </a:r>
-          </a:p>
-        </p:txBody>
-      </p:sp>
-      <p:sp>
-        <p:nvSpPr>
-          <p:cNvPr id="6" name="TextBox 5"/>
+              <a:t>–   En vez de pesos se usa una escala ordinal de tres niveles, Bajo, Medio y Alto, asignada componente por componente.</a:t>
+            </a:r>
+          </a:p>
+        </p:txBody>
+      </p:sp>
+      <p:sp>
+        <p:nvSpPr>
+          <p:cNvPr id="9" name="TextBox 8"/>
           <p:cNvSpPr txBox="1"/>
           <p:nvPr/>
         </p:nvSpPr>
@@ -8400,21 +7648,125 @@
                 </a:solidFill>
                 <a:latin typeface="Calibri"/>
               </a:rPr>
-              <a:t>Clase autonoma: de gasto de capital a gasto operativo medido</a:t>
-            </a:r>
-          </a:p>
-        </p:txBody>
-      </p:sp>
-      <p:sp>
-        <p:nvSpPr>
-          <p:cNvPr id="5" name="TextBox 4"/>
+              <a:t>Costos sin factura real</a:t>
+            </a:r>
+          </a:p>
+        </p:txBody>
+      </p:sp>
+      <p:sp>
+        <p:nvSpPr>
+          <p:cNvPr id="5" name="Rounded Rectangle 4"/>
+          <p:cNvSpPr/>
+          <p:nvPr/>
+        </p:nvSpPr>
+        <p:spPr>
+          <a:xfrm>
+            <a:off x="5797149" y="1879499"/>
+            <a:ext cx="6010497" cy="3446472"/>
+          </a:xfrm>
+          <a:prstGeom prst="roundRect">
+            <a:avLst>
+              <a:gd name="adj" fmla="val 4000"/>
+            </a:avLst>
+          </a:prstGeom>
+          <a:solidFill>
+            <a:srgbClr val="E8EEF4"/>
+          </a:solidFill>
+          <a:ln>
+            <a:noFill/>
+          </a:ln>
+        </p:spPr>
+        <p:style>
+          <a:lnRef idx="1">
+            <a:schemeClr val="accent1"/>
+          </a:lnRef>
+          <a:fillRef idx="3">
+            <a:schemeClr val="accent1"/>
+          </a:fillRef>
+          <a:effectRef idx="2">
+            <a:schemeClr val="accent1"/>
+          </a:effectRef>
+          <a:fontRef idx="minor">
+            <a:schemeClr val="lt1"/>
+          </a:fontRef>
+        </p:style>
+        <p:txBody>
+          <a:bodyPr rtlCol="0" anchor="ctr"/>
+          <a:lstStyle/>
+          <a:p>
+            <a:pPr algn="ctr"/>
+          </a:p>
+        </p:txBody>
+      </p:sp>
+      <p:pic>
+        <p:nvPicPr>
+          <p:cNvPr id="6" name="Picture 5" descr="calculator-budget-spreadsheet.jpg"/>
+          <p:cNvPicPr>
+            <a:picLocks noChangeAspect="1"/>
+          </p:cNvPicPr>
+          <p:nvPr/>
+        </p:nvPicPr>
+        <p:blipFill>
+          <a:blip r:embed="rId2"/>
+          <a:stretch>
+            <a:fillRect/>
+          </a:stretch>
+        </p:blipFill>
+        <p:spPr>
+          <a:xfrm>
+            <a:off x="5870301" y="1952651"/>
+            <a:ext cx="5864193" cy="3300168"/>
+          </a:xfrm>
+          <a:prstGeom prst="rect">
+            <a:avLst/>
+          </a:prstGeom>
+        </p:spPr>
+      </p:pic>
+      <p:sp>
+        <p:nvSpPr>
+          <p:cNvPr id="7" name="TextBox 6"/>
           <p:cNvSpPr txBox="1"/>
           <p:nvPr/>
         </p:nvSpPr>
         <p:spPr>
           <a:xfrm>
-            <a:off x="457200" y="1170432"/>
-            <a:ext cx="11277295" cy="5230368"/>
+            <a:off x="5870301" y="5961888"/>
+            <a:ext cx="5864193" cy="320040"/>
+          </a:xfrm>
+          <a:prstGeom prst="rect">
+            <a:avLst/>
+          </a:prstGeom>
+          <a:noFill/>
+        </p:spPr>
+        <p:txBody>
+          <a:bodyPr wrap="square">
+            <a:spAutoFit/>
+          </a:bodyPr>
+          <a:lstStyle/>
+          <a:p>
+            <a:pPr algn="ctr"/>
+            <a:r>
+              <a:rPr sz="1100" b="0" i="1">
+                <a:solidFill>
+                  <a:srgbClr val="666666"/>
+                </a:solidFill>
+                <a:latin typeface="Calibri"/>
+              </a:rPr>
+              <a:t>Foto: Kindel Media · Pexels</a:t>
+            </a:r>
+          </a:p>
+        </p:txBody>
+      </p:sp>
+      <p:sp>
+        <p:nvSpPr>
+          <p:cNvPr id="8" name="TextBox 7"/>
+          <p:cNvSpPr txBox="1"/>
+          <p:nvPr/>
+        </p:nvSpPr>
+        <p:spPr>
+          <a:xfrm>
+            <a:off x="457200" y="1353312"/>
+            <a:ext cx="5093061" cy="5047488"/>
           </a:xfrm>
           <a:prstGeom prst="rect">
             <a:avLst/>
@@ -8439,7 +7791,7 @@
                 </a:solidFill>
                 <a:latin typeface="Calibri"/>
               </a:rPr>
-              <a:t>–   En un centro de datos propio el gasto es de capital: se compra un servidor, se paga por adelantado, se amortiza en tres o cinco anos, y desde ese momento dejarlo encendido una hora mas no aparece en ninguna factura visible.</a:t>
+              <a:t>–   Escala cualitativa: Bajo / Medio / Alto por componente.</a:t>
             </a:r>
           </a:p>
           <a:p>
@@ -8455,7 +7807,7 @@
                 </a:solidFill>
                 <a:latin typeface="Calibri"/>
               </a:rPr>
-              <a:t>–   En la nube el gasto es operativo y medido: se paga por segundo de computo, por gigabyte almacenado al mes, por gigabyte que sale hacia internet y por peticion atendida.</a:t>
+              <a:t>–   Drivers: siempre-on, egress, storage caliente, builds CI frecuentes.</a:t>
             </a:r>
           </a:p>
           <a:p>
@@ -8471,14 +7823,66 @@
                 </a:solidFill>
                 <a:latin typeface="Calibri"/>
               </a:rPr>
-              <a:t>–   El cambio no es contable sino arquitectonico.</a:t>
-            </a:r>
-          </a:p>
-        </p:txBody>
-      </p:sp>
-      <p:sp>
-        <p:nvSpPr>
-          <p:cNvPr id="6" name="TextBox 5"/>
+              <a:t>–   la app: justifiquen por qué su diseño no es «siempre XL».</a:t>
+            </a:r>
+          </a:p>
+          <a:p>
+            <a:pPr>
+              <a:spcAft>
+                <a:spcPts val="800"/>
+              </a:spcAft>
+            </a:pPr>
+            <a:r>
+              <a:rPr sz="2000" b="0" i="0">
+                <a:solidFill>
+                  <a:srgbClr val="333333"/>
+                </a:solidFill>
+                <a:latin typeface="Calibri"/>
+              </a:rPr>
+              <a:t>–   Ejemplo: la base de datos siempre encendida es costo </a:t>
+            </a:r>
+            <a:r>
+              <a:rPr sz="2000" b="1" i="0">
+                <a:solidFill>
+                  <a:srgbClr val="333333"/>
+                </a:solidFill>
+                <a:latin typeface="Calibri"/>
+              </a:rPr>
+              <a:t>Medio</a:t>
+            </a:r>
+            <a:r>
+              <a:rPr sz="2000" b="0" i="0">
+                <a:solidFill>
+                  <a:srgbClr val="333333"/>
+                </a:solidFill>
+                <a:latin typeface="Calibri"/>
+              </a:rPr>
+              <a:t>; un worker que solo corre cuando hay mensajes en cola es </a:t>
+            </a:r>
+            <a:r>
+              <a:rPr sz="2000" b="1" i="0">
+                <a:solidFill>
+                  <a:srgbClr val="333333"/>
+                </a:solidFill>
+                <a:latin typeface="Calibri"/>
+              </a:rPr>
+              <a:t>Bajo</a:t>
+            </a:r>
+            <a:r>
+              <a:rPr sz="2000" b="0" i="0">
+                <a:solidFill>
+                  <a:srgbClr val="333333"/>
+                </a:solidFill>
+                <a:latin typeface="Calibri"/>
+              </a:rPr>
+              <a:t>.</a:t>
+            </a:r>
+          </a:p>
+        </p:txBody>
+      </p:sp>
+      <p:sp>
+        <p:nvSpPr>
+          <p:cNvPr id="9" name="TextBox 8"/>
           <p:cNvSpPr txBox="1"/>
           <p:nvPr/>
         </p:nvSpPr>
@@ -8652,21 +8056,149 @@
                 </a:solidFill>
                 <a:latin typeface="Calibri"/>
               </a:rPr>
-              <a:t>La app no tiene factura real, y por que igual se estima (1/2)</a:t>
-            </a:r>
-          </a:p>
-        </p:txBody>
-      </p:sp>
-      <p:sp>
-        <p:nvSpPr>
-          <p:cNvPr id="5" name="TextBox 4"/>
+              <a:t>Ordenes de magnitud de costo</a:t>
+            </a:r>
+          </a:p>
+        </p:txBody>
+      </p:sp>
+      <p:sp>
+        <p:nvSpPr>
+          <p:cNvPr id="5" name="Rounded Rectangle 4"/>
+          <p:cNvSpPr/>
+          <p:nvPr/>
+        </p:nvSpPr>
+        <p:spPr>
+          <a:xfrm>
+            <a:off x="5803166" y="1188719"/>
+            <a:ext cx="5998464" cy="4828032"/>
+          </a:xfrm>
+          <a:prstGeom prst="roundRect">
+            <a:avLst>
+              <a:gd name="adj" fmla="val 4000"/>
+            </a:avLst>
+          </a:prstGeom>
+          <a:solidFill>
+            <a:srgbClr val="E8EEF4"/>
+          </a:solidFill>
+          <a:ln>
+            <a:noFill/>
+          </a:ln>
+        </p:spPr>
+        <p:style>
+          <a:lnRef idx="1">
+            <a:schemeClr val="accent1"/>
+          </a:lnRef>
+          <a:fillRef idx="3">
+            <a:schemeClr val="accent1"/>
+          </a:fillRef>
+          <a:effectRef idx="2">
+            <a:schemeClr val="accent1"/>
+          </a:effectRef>
+          <a:fontRef idx="minor">
+            <a:schemeClr val="lt1"/>
+          </a:fontRef>
+        </p:style>
+        <p:txBody>
+          <a:bodyPr rtlCol="0" anchor="ctr"/>
+          <a:lstStyle/>
+          <a:p>
+            <a:pPr algn="ctr"/>
+          </a:p>
+        </p:txBody>
+      </p:sp>
+      <p:pic>
+        <p:nvPicPr>
+          <p:cNvPr id="6" name="Picture 5" descr="ordenes-magnitud-paso1.png"/>
+          <p:cNvPicPr>
+            <a:picLocks noChangeAspect="1"/>
+          </p:cNvPicPr>
+          <p:nvPr/>
+        </p:nvPicPr>
+        <p:blipFill>
+          <a:blip r:embed="rId2"/>
+          <a:stretch>
+            <a:fillRect/>
+          </a:stretch>
+        </p:blipFill>
+        <p:spPr>
+          <a:xfrm>
+            <a:off x="5876318" y="1261872"/>
+            <a:ext cx="5852160" cy="4681728"/>
+          </a:xfrm>
+          <a:prstGeom prst="rect">
+            <a:avLst/>
+          </a:prstGeom>
+        </p:spPr>
+      </p:pic>
+      <p:pic>
+        <p:nvPicPr>
+          <p:cNvPr id="7" name="Picture 6" descr="ordenes-magnitud-paso2.png"/>
+          <p:cNvPicPr>
+            <a:picLocks noChangeAspect="1"/>
+          </p:cNvPicPr>
+          <p:nvPr/>
+        </p:nvPicPr>
+        <p:blipFill>
+          <a:blip r:embed="rId3"/>
+          <a:stretch>
+            <a:fillRect/>
+          </a:stretch>
+        </p:blipFill>
+        <p:spPr>
+          <a:xfrm>
+            <a:off x="5876318" y="1261872"/>
+            <a:ext cx="5852160" cy="4681728"/>
+          </a:xfrm>
+          <a:prstGeom prst="rect">
+            <a:avLst/>
+          </a:prstGeom>
+        </p:spPr>
+      </p:pic>
+      <p:sp>
+        <p:nvSpPr>
+          <p:cNvPr id="8" name="TextBox 7"/>
           <p:cNvSpPr txBox="1"/>
           <p:nvPr/>
         </p:nvSpPr>
         <p:spPr>
           <a:xfrm>
-            <a:off x="457200" y="1170432"/>
-            <a:ext cx="11277295" cy="5230368"/>
+            <a:off x="5870301" y="5961888"/>
+            <a:ext cx="5864193" cy="320040"/>
+          </a:xfrm>
+          <a:prstGeom prst="rect">
+            <a:avLst/>
+          </a:prstGeom>
+          <a:noFill/>
+        </p:spPr>
+        <p:txBody>
+          <a:bodyPr wrap="square">
+            <a:spAutoFit/>
+          </a:bodyPr>
+          <a:lstStyle/>
+          <a:p>
+            <a:pPr algn="ctr"/>
+            <a:r>
+              <a:rPr sz="1100" b="0" i="1">
+                <a:solidFill>
+                  <a:srgbClr val="666666"/>
+                </a:solidFill>
+                <a:latin typeface="Calibri"/>
+              </a:rPr>
+              <a:t>Clic para avanzar la animación</a:t>
+            </a:r>
+          </a:p>
+        </p:txBody>
+      </p:sp>
+      <p:sp>
+        <p:nvSpPr>
+          <p:cNvPr id="9" name="TextBox 8"/>
+          <p:cNvSpPr txBox="1"/>
+          <p:nvPr/>
+        </p:nvSpPr>
+        <p:spPr>
+          <a:xfrm>
+            <a:off x="457200" y="1353312"/>
+            <a:ext cx="5093061" cy="5047488"/>
           </a:xfrm>
           <a:prstGeom prst="rect">
             <a:avLst/>
@@ -8691,7 +8223,7 @@
                 </a:solidFill>
                 <a:latin typeface="Calibri"/>
               </a:rPr>
-              <a:t>–   la app no tiene facturacion real y no la va a tener: el curso prohibe cuentas cloud de pago y tarjetas de credito, y todo se trabaja con draw.io, Excalidraw, Killercoda y el free tier de GitHub Actions.</a:t>
+              <a:t>–   Una instancia pequena de 2 vCPU y 4 GB encendida todo el mes cuesta del orden de 25 a 40 dolares.</a:t>
             </a:r>
           </a:p>
           <a:p>
@@ -8707,7 +8239,7 @@
                 </a:solidFill>
                 <a:latin typeface="Calibri"/>
               </a:rPr>
-              <a:t>–   En vez de pesos se usa una escala ordinal de tres niveles, Bajo, Medio y Alto, asignada componente por componente.</a:t>
+              <a:t>–   El almacenamiento de objetos cuesta del orden de 0.02 a 0.03 dolares por gigabyte al mes, es decir casi nada.</a:t>
             </a:r>
           </a:p>
           <a:p>
@@ -8723,14 +8255,14 @@
                 </a:solidFill>
                 <a:latin typeface="Calibri"/>
               </a:rPr>
-              <a:t>–   Una escala ordinal ordena pero no mide distancias: decir que la base de datos es Alto y el frontend estatico es Bajo afirma que uno cuesta mas que el otro, no cuantas veces mas.</a:t>
-            </a:r>
-          </a:p>
-        </p:txBody>
-      </p:sp>
-      <p:sp>
-        <p:nvSpPr>
-          <p:cNvPr id="6" name="TextBox 5"/>
+              <a:t>–   El trafico de salida hacia internet, llamado egress, cuesta del orden de 0.08 a 0.12 dolares por gigabyte: unas cuatro veces mas caro por gigabyte…</a:t>
+            </a:r>
+          </a:p>
+        </p:txBody>
+      </p:sp>
+      <p:sp>
+        <p:nvSpPr>
+          <p:cNvPr id="10" name="TextBox 9"/>
           <p:cNvSpPr txBox="1"/>
           <p:nvPr/>
         </p:nvSpPr>
@@ -8768,6 +8300,89 @@
   <p:clrMapOvr>
     <a:masterClrMapping/>
   </p:clrMapOvr>
+  <p:timing>
+    <p:tnLst>
+      <p:par>
+        <p:cTn id="1" dur="indefinite" restart="never" nodeType="tmRoot">
+          <p:childTnLst>
+            <p:seq concurrent="1" nextAc="seek">
+              <p:cTn id="2" dur="indefinite" nodeType="mainSeq">
+                <p:childTnLst>
+                  <p:par>
+                    <p:cTn id="3" fill="hold">
+                      <p:stCondLst>
+                        <p:cond delay="indefinite"/>
+                      </p:stCondLst>
+                      <p:childTnLst>
+                        <p:par>
+                          <p:cTn id="4" fill="hold">
+                            <p:stCondLst>
+                              <p:cond delay="0"/>
+                            </p:stCondLst>
+                            <p:childTnLst>
+                              <p:par>
+                                <p:cTn id="5" presetID="10" presetClass="entr" presetSubtype="0" fill="hold" nodeType="clickEffect">
+                                  <p:stCondLst>
+                                    <p:cond delay="0"/>
+                                  </p:stCondLst>
+                                  <p:childTnLst>
+                                    <p:set>
+                                      <p:cBhvr>
+                                        <p:cTn id="6" dur="1" fill="hold">
+                                          <p:stCondLst>
+                                            <p:cond delay="0"/>
+                                          </p:stCondLst>
+                                        </p:cTn>
+                                        <p:tgtEl>
+                                          <p:spTgt spid="7"/>
+                                        </p:tgtEl>
+                                        <p:attrNameLst>
+                                          <p:attrName>style.visibility</p:attrName>
+                                        </p:attrNameLst>
+                                      </p:cBhvr>
+                                      <p:to>
+                                        <p:strVal val="visible"/>
+                                      </p:to>
+                                    </p:set>
+                                    <p:animEffect transition="in" filter="fade">
+                                      <p:cBhvr>
+                                        <p:cTn id="7" dur="450"/>
+                                        <p:tgtEl>
+                                          <p:spTgt spid="7"/>
+                                        </p:tgtEl>
+                                      </p:cBhvr>
+                                    </p:animEffect>
+                                  </p:childTnLst>
+                                </p:cTn>
+                              </p:par>
+                            </p:childTnLst>
+                          </p:cTn>
+                        </p:par>
+                      </p:childTnLst>
+                    </p:cTn>
+                  </p:par>
+                </p:childTnLst>
+              </p:cTn>
+              <p:prevCondLst>
+                <p:cond evt="onPrev" delay="0">
+                  <p:tgtEl>
+                    <p:sldTgt/>
+                  </p:tgtEl>
+                </p:cond>
+              </p:prevCondLst>
+              <p:nextCondLst>
+                <p:cond evt="onNext" delay="0">
+                  <p:tgtEl>
+                    <p:sldTgt/>
+                  </p:tgtEl>
+                </p:cond>
+              </p:nextCondLst>
+            </p:seq>
+          </p:childTnLst>
+        </p:cTn>
+      </p:par>
+    </p:tnLst>
+  </p:timing>
 </p:sld>
 </file>
 
@@ -8904,21 +8519,173 @@
                 </a:solidFill>
                 <a:latin typeface="Calibri"/>
               </a:rPr>
-              <a:t>La app no tiene factura real, y por que igual se estima (2/2)</a:t>
-            </a:r>
-          </a:p>
-        </p:txBody>
-      </p:sp>
-      <p:sp>
-        <p:nvSpPr>
-          <p:cNvPr id="5" name="TextBox 4"/>
+              <a:t>Primer ejemplo: la tabla de costos, componente por componente</a:t>
+            </a:r>
+          </a:p>
+        </p:txBody>
+      </p:sp>
+      <p:sp>
+        <p:nvSpPr>
+          <p:cNvPr id="5" name="Rounded Rectangle 4"/>
+          <p:cNvSpPr/>
+          <p:nvPr/>
+        </p:nvSpPr>
+        <p:spPr>
+          <a:xfrm>
+            <a:off x="5803166" y="1188719"/>
+            <a:ext cx="5998464" cy="4828032"/>
+          </a:xfrm>
+          <a:prstGeom prst="roundRect">
+            <a:avLst>
+              <a:gd name="adj" fmla="val 4000"/>
+            </a:avLst>
+          </a:prstGeom>
+          <a:solidFill>
+            <a:srgbClr val="E8EEF4"/>
+          </a:solidFill>
+          <a:ln>
+            <a:noFill/>
+          </a:ln>
+        </p:spPr>
+        <p:style>
+          <a:lnRef idx="1">
+            <a:schemeClr val="accent1"/>
+          </a:lnRef>
+          <a:fillRef idx="3">
+            <a:schemeClr val="accent1"/>
+          </a:fillRef>
+          <a:effectRef idx="2">
+            <a:schemeClr val="accent1"/>
+          </a:effectRef>
+          <a:fontRef idx="minor">
+            <a:schemeClr val="lt1"/>
+          </a:fontRef>
+        </p:style>
+        <p:txBody>
+          <a:bodyPr rtlCol="0" anchor="ctr"/>
+          <a:lstStyle/>
+          <a:p>
+            <a:pPr algn="ctr"/>
+          </a:p>
+        </p:txBody>
+      </p:sp>
+      <p:pic>
+        <p:nvPicPr>
+          <p:cNvPr id="6" name="Picture 5" descr="escala-ordinal-paso1.png"/>
+          <p:cNvPicPr>
+            <a:picLocks noChangeAspect="1"/>
+          </p:cNvPicPr>
+          <p:nvPr/>
+        </p:nvPicPr>
+        <p:blipFill>
+          <a:blip r:embed="rId2"/>
+          <a:stretch>
+            <a:fillRect/>
+          </a:stretch>
+        </p:blipFill>
+        <p:spPr>
+          <a:xfrm>
+            <a:off x="5876318" y="1261872"/>
+            <a:ext cx="5852160" cy="4681728"/>
+          </a:xfrm>
+          <a:prstGeom prst="rect">
+            <a:avLst/>
+          </a:prstGeom>
+        </p:spPr>
+      </p:pic>
+      <p:pic>
+        <p:nvPicPr>
+          <p:cNvPr id="7" name="Picture 6" descr="escala-ordinal-paso2.png"/>
+          <p:cNvPicPr>
+            <a:picLocks noChangeAspect="1"/>
+          </p:cNvPicPr>
+          <p:nvPr/>
+        </p:nvPicPr>
+        <p:blipFill>
+          <a:blip r:embed="rId3"/>
+          <a:stretch>
+            <a:fillRect/>
+          </a:stretch>
+        </p:blipFill>
+        <p:spPr>
+          <a:xfrm>
+            <a:off x="5876318" y="1261872"/>
+            <a:ext cx="5852160" cy="4681728"/>
+          </a:xfrm>
+          <a:prstGeom prst="rect">
+            <a:avLst/>
+          </a:prstGeom>
+        </p:spPr>
+      </p:pic>
+      <p:pic>
+        <p:nvPicPr>
+          <p:cNvPr id="8" name="Picture 7" descr="escala-ordinal-paso3.png"/>
+          <p:cNvPicPr>
+            <a:picLocks noChangeAspect="1"/>
+          </p:cNvPicPr>
+          <p:nvPr/>
+        </p:nvPicPr>
+        <p:blipFill>
+          <a:blip r:embed="rId4"/>
+          <a:stretch>
+            <a:fillRect/>
+          </a:stretch>
+        </p:blipFill>
+        <p:spPr>
+          <a:xfrm>
+            <a:off x="5876318" y="1261872"/>
+            <a:ext cx="5852160" cy="4681728"/>
+          </a:xfrm>
+          <a:prstGeom prst="rect">
+            <a:avLst/>
+          </a:prstGeom>
+        </p:spPr>
+      </p:pic>
+      <p:sp>
+        <p:nvSpPr>
+          <p:cNvPr id="13" name="TextBox 12"/>
           <p:cNvSpPr txBox="1"/>
           <p:nvPr/>
         </p:nvSpPr>
         <p:spPr>
           <a:xfrm>
-            <a:off x="457200" y="1170432"/>
-            <a:ext cx="11277295" cy="5230368"/>
+            <a:off x="5870301" y="5961888"/>
+            <a:ext cx="5864193" cy="320040"/>
+          </a:xfrm>
+          <a:prstGeom prst="rect">
+            <a:avLst/>
+          </a:prstGeom>
+          <a:noFill/>
+        </p:spPr>
+        <p:txBody>
+          <a:bodyPr wrap="square">
+            <a:spAutoFit/>
+          </a:bodyPr>
+          <a:lstStyle/>
+          <a:p>
+            <a:pPr algn="ctr"/>
+            <a:r>
+              <a:rPr sz="1100" b="0" i="1">
+                <a:solidFill>
+                  <a:srgbClr val="666666"/>
+                </a:solidFill>
+                <a:latin typeface="Calibri"/>
+              </a:rPr>
+              <a:t>Clic para avanzar la animación</a:t>
+            </a:r>
+          </a:p>
+        </p:txBody>
+      </p:sp>
+      <p:sp>
+        <p:nvSpPr>
+          <p:cNvPr id="14" name="TextBox 13"/>
+          <p:cNvSpPr txBox="1"/>
+          <p:nvPr/>
+        </p:nvSpPr>
+        <p:spPr>
+          <a:xfrm>
+            <a:off x="457200" y="1353312"/>
+            <a:ext cx="5093061" cy="5047488"/>
           </a:xfrm>
           <a:prstGeom prst="rect">
             <a:avLst/>
@@ -8943,7 +8710,7 @@
                 </a:solidFill>
                 <a:latin typeface="Calibri"/>
               </a:rPr>
-              <a:t>–   Alcanza de sobra para el objetivo real, que es identificar el driver de costo de cada componente.</a:t>
+              <a:t>–   El primer ejemplo anclado en la app es la tabla de costos, recorrida componente por componente.</a:t>
             </a:r>
           </a:p>
           <a:p>
@@ -8959,7 +8726,7 @@
                 </a:solidFill>
                 <a:latin typeface="Calibri"/>
               </a:rPr>
-              <a:t>–   Un driver de costo es la variable concreta que, si crece, hace crecer la factura de ese componente</a:t>
+              <a:t>–   La base de datos queda en Alto con un argumento preciso: paga computo las 24 horas de los 30 dias aunque nadie consulte, mas almacenamiento que nunca…</a:t>
             </a:r>
           </a:p>
           <a:p>
@@ -8975,14 +8742,14 @@
                 </a:solidFill>
                 <a:latin typeface="Calibri"/>
               </a:rPr>
-              <a:t>–   No es "el uso" en abstracto sino algo contable: instancias encendidas, horas encendidas, gigabytes almacenados, gigabytes de trafico de salida, numero de peticiones, gigabytes de logs ingeridos.</a:t>
-            </a:r>
-          </a:p>
-        </p:txBody>
-      </p:sp>
-      <p:sp>
-        <p:nvSpPr>
-          <p:cNvPr id="6" name="TextBox 5"/>
+              <a:t>–   El frontend estatico queda en Bajo porque es almacenamiento mas trafico y no tiene computo propio.</a:t>
+            </a:r>
+          </a:p>
+        </p:txBody>
+      </p:sp>
+      <p:sp>
+        <p:nvSpPr>
+          <p:cNvPr id="15" name="TextBox 14"/>
           <p:cNvSpPr txBox="1"/>
           <p:nvPr/>
         </p:nvSpPr>
@@ -9020,6 +8787,142 @@
   <p:clrMapOvr>
     <a:masterClrMapping/>
   </p:clrMapOvr>
+  <p:timing>
+    <p:tnLst>
+      <p:par>
+        <p:cTn id="1" dur="indefinite" restart="never" nodeType="tmRoot">
+          <p:childTnLst>
+            <p:seq concurrent="1" nextAc="seek">
+              <p:cTn id="2" dur="indefinite" nodeType="mainSeq">
+                <p:childTnLst>
+                  <p:par>
+                    <p:cTn id="3" fill="hold">
+                      <p:stCondLst>
+                        <p:cond delay="indefinite"/>
+                      </p:stCondLst>
+                      <p:childTnLst>
+                        <p:par>
+                          <p:cTn id="4" fill="hold">
+                            <p:stCondLst>
+                              <p:cond delay="0"/>
+                            </p:stCondLst>
+                            <p:childTnLst>
+                              <p:par>
+                                <p:cTn id="5" presetID="10" presetClass="entr" presetSubtype="0" fill="hold" nodeType="clickEffect">
+                                  <p:stCondLst>
+                                    <p:cond delay="0"/>
+                                  </p:stCondLst>
+                                  <p:childTnLst>
+                                    <p:set>
+                                      <p:cBhvr>
+                                        <p:cTn id="6" dur="1" fill="hold">
+                                          <p:stCondLst>
+                                            <p:cond delay="0"/>
+                                          </p:stCondLst>
+                                        </p:cTn>
+                                        <p:tgtEl>
+                                          <p:spTgt spid="7"/>
+                                        </p:tgtEl>
+                                        <p:attrNameLst>
+                                          <p:attrName>style.visibility</p:attrName>
+                                        </p:attrNameLst>
+                                      </p:cBhvr>
+                                      <p:to>
+                                        <p:strVal val="visible"/>
+                                      </p:to>
+                                    </p:set>
+                                    <p:animEffect transition="in" filter="fade">
+                                      <p:cBhvr>
+                                        <p:cTn id="7" dur="450"/>
+                                        <p:tgtEl>
+                                          <p:spTgt spid="7"/>
+                                        </p:tgtEl>
+                                      </p:cBhvr>
+                                    </p:animEffect>
+                                  </p:childTnLst>
+                                </p:cTn>
+                              </p:par>
+                            </p:childTnLst>
+                          </p:cTn>
+                        </p:par>
+                      </p:childTnLst>
+                    </p:cTn>
+                  </p:par>
+                  <p:par>
+                    <p:cTn id="8" fill="hold">
+                      <p:stCondLst>
+                        <p:cond delay="indefinite"/>
+                      </p:stCondLst>
+                      <p:childTnLst>
+                        <p:par>
+                          <p:cTn id="9" fill="hold">
+                            <p:stCondLst>
+                              <p:cond delay="0"/>
+                            </p:stCondLst>
+                            <p:childTnLst>
+                              <p:par>
+                                <p:cTn id="10" presetID="10" presetClass="entr" presetSubtype="0" fill="hold" nodeType="clickEffect">
+                                  <p:stCondLst>
+                                    <p:cond delay="0"/>
+                                  </p:stCondLst>
+                                  <p:childTnLst>
+                                    <p:set>
+                                      <p:cBhvr>
+                                        <p:cTn id="11" dur="1" fill="hold">
+                                          <p:stCondLst>
+                                            <p:cond delay="0"/>
+                                          </p:stCondLst>
+                                        </p:cTn>
+                                        <p:tgtEl>
+                                          <p:spTgt spid="8"/>
+                                        </p:tgtEl>
+                                        <p:attrNameLst>
+                                          <p:attrName>style.visibility</p:attrName>
+                                        </p:attrNameLst>
+                                      </p:cBhvr>
+                                      <p:to>
+                                        <p:strVal val="visible"/>
+                                      </p:to>
+                                    </p:set>
+                                    <p:animEffect transition="in" filter="fade">
+                                      <p:cBhvr>
+                                        <p:cTn id="12" dur="450"/>
+                                        <p:tgtEl>
+                                          <p:spTgt spid="8"/>
+                                        </p:tgtEl>
+                                      </p:cBhvr>
+                                    </p:animEffect>
+                                  </p:childTnLst>
+                                </p:cTn>
+                              </p:par>
+                            </p:childTnLst>
+                          </p:cTn>
+                        </p:par>
+                      </p:childTnLst>
+                    </p:cTn>
+                  </p:par>
+                </p:childTnLst>
+              </p:cTn>
+              <p:prevCondLst>
+                <p:cond evt="onPrev" delay="0">
+                  <p:tgtEl>
+                    <p:sldTgt/>
+                  </p:tgtEl>
+                </p:cond>
+              </p:prevCondLst>
+              <p:nextCondLst>
+                <p:cond evt="onNext" delay="0">
+                  <p:tgtEl>
+                    <p:sldTgt/>
+                  </p:tgtEl>
+                </p:cond>
+              </p:nextCondLst>
+            </p:seq>
+          </p:childTnLst>
+        </p:cTn>
+      </p:par>
+    </p:tnLst>
+  </p:timing>
 </p:sld>
 </file>
 
@@ -9156,21 +9059,173 @@
                 </a:solidFill>
                 <a:latin typeface="Calibri"/>
               </a:rPr>
-              <a:t>Ordenes de magnitud de costo</a:t>
-            </a:r>
-          </a:p>
-        </p:txBody>
-      </p:sp>
-      <p:sp>
-        <p:nvSpPr>
-          <p:cNvPr id="5" name="TextBox 4"/>
+              <a:t>Segundo ejemplo: por que el driver importa mas que el nivel</a:t>
+            </a:r>
+          </a:p>
+        </p:txBody>
+      </p:sp>
+      <p:sp>
+        <p:nvSpPr>
+          <p:cNvPr id="5" name="Rounded Rectangle 4"/>
+          <p:cNvSpPr/>
+          <p:nvPr/>
+        </p:nvSpPr>
+        <p:spPr>
+          <a:xfrm>
+            <a:off x="5803166" y="1188719"/>
+            <a:ext cx="5998464" cy="4828032"/>
+          </a:xfrm>
+          <a:prstGeom prst="roundRect">
+            <a:avLst>
+              <a:gd name="adj" fmla="val 4000"/>
+            </a:avLst>
+          </a:prstGeom>
+          <a:solidFill>
+            <a:srgbClr val="E8EEF4"/>
+          </a:solidFill>
+          <a:ln>
+            <a:noFill/>
+          </a:ln>
+        </p:spPr>
+        <p:style>
+          <a:lnRef idx="1">
+            <a:schemeClr val="accent1"/>
+          </a:lnRef>
+          <a:fillRef idx="3">
+            <a:schemeClr val="accent1"/>
+          </a:fillRef>
+          <a:effectRef idx="2">
+            <a:schemeClr val="accent1"/>
+          </a:effectRef>
+          <a:fontRef idx="minor">
+            <a:schemeClr val="lt1"/>
+          </a:fontRef>
+        </p:style>
+        <p:txBody>
+          <a:bodyPr rtlCol="0" anchor="ctr"/>
+          <a:lstStyle/>
+          <a:p>
+            <a:pPr algn="ctr"/>
+          </a:p>
+        </p:txBody>
+      </p:sp>
+      <p:pic>
+        <p:nvPicPr>
+          <p:cNvPr id="6" name="Picture 5" descr="egress-driver-paso1.png"/>
+          <p:cNvPicPr>
+            <a:picLocks noChangeAspect="1"/>
+          </p:cNvPicPr>
+          <p:nvPr/>
+        </p:nvPicPr>
+        <p:blipFill>
+          <a:blip r:embed="rId2"/>
+          <a:stretch>
+            <a:fillRect/>
+          </a:stretch>
+        </p:blipFill>
+        <p:spPr>
+          <a:xfrm>
+            <a:off x="5876318" y="1261872"/>
+            <a:ext cx="5852160" cy="4681728"/>
+          </a:xfrm>
+          <a:prstGeom prst="rect">
+            <a:avLst/>
+          </a:prstGeom>
+        </p:spPr>
+      </p:pic>
+      <p:pic>
+        <p:nvPicPr>
+          <p:cNvPr id="7" name="Picture 6" descr="egress-driver-paso2.png"/>
+          <p:cNvPicPr>
+            <a:picLocks noChangeAspect="1"/>
+          </p:cNvPicPr>
+          <p:nvPr/>
+        </p:nvPicPr>
+        <p:blipFill>
+          <a:blip r:embed="rId3"/>
+          <a:stretch>
+            <a:fillRect/>
+          </a:stretch>
+        </p:blipFill>
+        <p:spPr>
+          <a:xfrm>
+            <a:off x="5876318" y="1261872"/>
+            <a:ext cx="5852160" cy="4681728"/>
+          </a:xfrm>
+          <a:prstGeom prst="rect">
+            <a:avLst/>
+          </a:prstGeom>
+        </p:spPr>
+      </p:pic>
+      <p:pic>
+        <p:nvPicPr>
+          <p:cNvPr id="8" name="Picture 7" descr="egress-driver-paso3.png"/>
+          <p:cNvPicPr>
+            <a:picLocks noChangeAspect="1"/>
+          </p:cNvPicPr>
+          <p:nvPr/>
+        </p:nvPicPr>
+        <p:blipFill>
+          <a:blip r:embed="rId4"/>
+          <a:stretch>
+            <a:fillRect/>
+          </a:stretch>
+        </p:blipFill>
+        <p:spPr>
+          <a:xfrm>
+            <a:off x="5876318" y="1261872"/>
+            <a:ext cx="5852160" cy="4681728"/>
+          </a:xfrm>
+          <a:prstGeom prst="rect">
+            <a:avLst/>
+          </a:prstGeom>
+        </p:spPr>
+      </p:pic>
+      <p:sp>
+        <p:nvSpPr>
+          <p:cNvPr id="13" name="TextBox 12"/>
           <p:cNvSpPr txBox="1"/>
           <p:nvPr/>
         </p:nvSpPr>
         <p:spPr>
           <a:xfrm>
-            <a:off x="457200" y="1170432"/>
-            <a:ext cx="11277295" cy="5230368"/>
+            <a:off x="5870301" y="5961888"/>
+            <a:ext cx="5864193" cy="320040"/>
+          </a:xfrm>
+          <a:prstGeom prst="rect">
+            <a:avLst/>
+          </a:prstGeom>
+          <a:noFill/>
+        </p:spPr>
+        <p:txBody>
+          <a:bodyPr wrap="square">
+            <a:spAutoFit/>
+          </a:bodyPr>
+          <a:lstStyle/>
+          <a:p>
+            <a:pPr algn="ctr"/>
+            <a:r>
+              <a:rPr sz="1100" b="0" i="1">
+                <a:solidFill>
+                  <a:srgbClr val="666666"/>
+                </a:solidFill>
+                <a:latin typeface="Calibri"/>
+              </a:rPr>
+              <a:t>Clic para avanzar la animación</a:t>
+            </a:r>
+          </a:p>
+        </p:txBody>
+      </p:sp>
+      <p:sp>
+        <p:nvSpPr>
+          <p:cNvPr id="14" name="TextBox 13"/>
+          <p:cNvSpPr txBox="1"/>
+          <p:nvPr/>
+        </p:nvSpPr>
+        <p:spPr>
+          <a:xfrm>
+            <a:off x="457200" y="1353312"/>
+            <a:ext cx="5093061" cy="5047488"/>
           </a:xfrm>
           <a:prstGeom prst="rect">
             <a:avLst/>
@@ -9195,7 +9250,7 @@
                 </a:solidFill>
                 <a:latin typeface="Calibri"/>
               </a:rPr>
-              <a:t>–   Una instancia pequena de 2 vCPU y 4 GB encendida todo el mes cuesta del orden de 25 a 40 dolares.</a:t>
+              <a:t>–   5000 archivos de 2 MB son 10 GB: guardarlos cuesta unos US$ 0.25 al mes.</a:t>
             </a:r>
           </a:p>
           <a:p>
@@ -9211,7 +9266,7 @@
                 </a:solidFill>
                 <a:latin typeface="Calibri"/>
               </a:rPr>
-              <a:t>–   El almacenamiento de objetos cuesta del orden de 0.02 a 0.03 dolares por gigabyte al mes, es decir casi nada.</a:t>
+              <a:t>–   Si cada uno se descarga 20 veces, salen 200 GB al mes: a US$ 0.09 el GB, unos US$ 18, setenta veces más.</a:t>
             </a:r>
           </a:p>
           <a:p>
@@ -9227,7 +9282,7 @@
                 </a:solidFill>
                 <a:latin typeface="Calibri"/>
               </a:rPr>
-              <a:t>–   El trafico de salida hacia internet, llamado egress, cuesta del orden de 0.08 a 0.12 dolares por gigabyte: unas cuatro veces mas caro por gigabyte que guardarlo un mes entero.</a:t>
+              <a:t>–   El driver es el tráfico, y la mitigación es de arquitectura: una caché o una CDN delante.</a:t>
             </a:r>
           </a:p>
           <a:p>
@@ -9243,30 +9298,14 @@
                 </a:solidFill>
                 <a:latin typeface="Calibri"/>
               </a:rPr>
-              <a:t>–   Un balanceador de carga cobra una tarifa fija de 18 a 25 dolares al mes incluso con cero trafico.</a:t>
-            </a:r>
-          </a:p>
-          <a:p>
-            <a:pPr>
-              <a:spcAft>
-                <a:spcPts val="800"/>
-              </a:spcAft>
-            </a:pPr>
-            <a:r>
-              <a:rPr sz="2000" b="0" i="0">
-                <a:solidFill>
-                  <a:srgbClr val="333333"/>
-                </a:solidFill>
-                <a:latin typeface="Calibri"/>
-              </a:rPr>
-              <a:t>–   La leccion durable son tres proporciones: guardar es barato, mover datos hacia afuera es caro, y estar prendido sin hacer nada tambien cuesta.</a:t>
-            </a:r>
-          </a:p>
-        </p:txBody>
-      </p:sp>
-      <p:sp>
-        <p:nvSpPr>
-          <p:cNvPr id="6" name="TextBox 5"/>
+              <a:t>–   Unos recursos cobran por uso y otros por existir, aunque nadie use el sistema.</a:t>
+            </a:r>
+          </a:p>
+        </p:txBody>
+      </p:sp>
+      <p:sp>
+        <p:nvSpPr>
+          <p:cNvPr id="15" name="TextBox 14"/>
           <p:cNvSpPr txBox="1"/>
           <p:nvPr/>
         </p:nvSpPr>
@@ -9304,6 +9343,142 @@
   <p:clrMapOvr>
     <a:masterClrMapping/>
   </p:clrMapOvr>
+  <p:timing>
+    <p:tnLst>
+      <p:par>
+        <p:cTn id="1" dur="indefinite" restart="never" nodeType="tmRoot">
+          <p:childTnLst>
+            <p:seq concurrent="1" nextAc="seek">
+              <p:cTn id="2" dur="indefinite" nodeType="mainSeq">
+                <p:childTnLst>
+                  <p:par>
+                    <p:cTn id="3" fill="hold">
+                      <p:stCondLst>
+                        <p:cond delay="indefinite"/>
+                      </p:stCondLst>
+                      <p:childTnLst>
+                        <p:par>
+                          <p:cTn id="4" fill="hold">
+                            <p:stCondLst>
+                              <p:cond delay="0"/>
+                            </p:stCondLst>
+                            <p:childTnLst>
+                              <p:par>
+                                <p:cTn id="5" presetID="10" presetClass="entr" presetSubtype="0" fill="hold" nodeType="clickEffect">
+                                  <p:stCondLst>
+                                    <p:cond delay="0"/>
+                                  </p:stCondLst>
+                                  <p:childTnLst>
+                                    <p:set>
+                                      <p:cBhvr>
+                                        <p:cTn id="6" dur="1" fill="hold">
+                                          <p:stCondLst>
+                                            <p:cond delay="0"/>
+                                          </p:stCondLst>
+                                        </p:cTn>
+                                        <p:tgtEl>
+                                          <p:spTgt spid="7"/>
+                                        </p:tgtEl>
+                                        <p:attrNameLst>
+                                          <p:attrName>style.visibility</p:attrName>
+                                        </p:attrNameLst>
+                                      </p:cBhvr>
+                                      <p:to>
+                                        <p:strVal val="visible"/>
+                                      </p:to>
+                                    </p:set>
+                                    <p:animEffect transition="in" filter="fade">
+                                      <p:cBhvr>
+                                        <p:cTn id="7" dur="450"/>
+                                        <p:tgtEl>
+                                          <p:spTgt spid="7"/>
+                                        </p:tgtEl>
+                                      </p:cBhvr>
+                                    </p:animEffect>
+                                  </p:childTnLst>
+                                </p:cTn>
+                              </p:par>
+                            </p:childTnLst>
+                          </p:cTn>
+                        </p:par>
+                      </p:childTnLst>
+                    </p:cTn>
+                  </p:par>
+                  <p:par>
+                    <p:cTn id="8" fill="hold">
+                      <p:stCondLst>
+                        <p:cond delay="indefinite"/>
+                      </p:stCondLst>
+                      <p:childTnLst>
+                        <p:par>
+                          <p:cTn id="9" fill="hold">
+                            <p:stCondLst>
+                              <p:cond delay="0"/>
+                            </p:stCondLst>
+                            <p:childTnLst>
+                              <p:par>
+                                <p:cTn id="10" presetID="10" presetClass="entr" presetSubtype="0" fill="hold" nodeType="clickEffect">
+                                  <p:stCondLst>
+                                    <p:cond delay="0"/>
+                                  </p:stCondLst>
+                                  <p:childTnLst>
+                                    <p:set>
+                                      <p:cBhvr>
+                                        <p:cTn id="11" dur="1" fill="hold">
+                                          <p:stCondLst>
+                                            <p:cond delay="0"/>
+                                          </p:stCondLst>
+                                        </p:cTn>
+                                        <p:tgtEl>
+                                          <p:spTgt spid="8"/>
+                                        </p:tgtEl>
+                                        <p:attrNameLst>
+                                          <p:attrName>style.visibility</p:attrName>
+                                        </p:attrNameLst>
+                                      </p:cBhvr>
+                                      <p:to>
+                                        <p:strVal val="visible"/>
+                                      </p:to>
+                                    </p:set>
+                                    <p:animEffect transition="in" filter="fade">
+                                      <p:cBhvr>
+                                        <p:cTn id="12" dur="450"/>
+                                        <p:tgtEl>
+                                          <p:spTgt spid="8"/>
+                                        </p:tgtEl>
+                                      </p:cBhvr>
+                                    </p:animEffect>
+                                  </p:childTnLst>
+                                </p:cTn>
+                              </p:par>
+                            </p:childTnLst>
+                          </p:cTn>
+                        </p:par>
+                      </p:childTnLst>
+                    </p:cTn>
+                  </p:par>
+                </p:childTnLst>
+              </p:cTn>
+              <p:prevCondLst>
+                <p:cond evt="onPrev" delay="0">
+                  <p:tgtEl>
+                    <p:sldTgt/>
+                  </p:tgtEl>
+                </p:cond>
+              </p:prevCondLst>
+              <p:nextCondLst>
+                <p:cond evt="onNext" delay="0">
+                  <p:tgtEl>
+                    <p:sldTgt/>
+                  </p:tgtEl>
+                </p:cond>
+              </p:nextCondLst>
+            </p:seq>
+          </p:childTnLst>
+        </p:cTn>
+      </p:par>
+    </p:tnLst>
+  </p:timing>
 </p:sld>
 </file>
 

--- a/Arquitectura de Sistemas Computacionales/Clases/Clase 10 - Costos y sostenibilidad cloud/Presentacion.pptx
+++ b/Arquitectura de Sistemas Computacionales/Clases/Clase 10 - Costos y sostenibilidad cloud/Presentacion.pptx
@@ -755,37 +755,61 @@
           <a:lstStyle/>
           <a:p>
             <a:r>
-              <a:t>TEXTO COMPLETO DE LA LÁMINA (se proyecta resumido):</a:t>
+              <a:t>DESARROLLO (para explicarlo, no se proyecta):</a:t>
             </a:r>
           </a:p>
           <a:p/>
           <a:p>
             <a:r>
-              <a:t>Escala cualitativa: Bajo / Medio / Alto por componente.</a:t>
+              <a:t>Una instancia pequena de 2 vCPU y 4 GB encendida todo el mes cuesta del orden de 25 a 40 dolares.</a:t>
             </a:r>
           </a:p>
           <a:p/>
           <a:p>
             <a:r>
-              <a:t>Drivers: siempre-on, egress, storage caliente, builds CI frecuentes.</a:t>
+              <a:t>El almacenamiento de objetos cuesta del orden de 0.02 a 0.03 dolares por gigabyte al mes, es decir casi nada.</a:t>
             </a:r>
           </a:p>
           <a:p/>
           <a:p>
             <a:r>
-              <a:t>CloudLite: justifiquen por qué su diseño no es «siempre XL».</a:t>
+              <a:t>El trafico de salida hacia internet, llamado egress, cuesta del orden de 0.08 a 0.12 dolares por gigabyte: unas cuatro veces mas caro por gigabyte que guardarlo un mes entero.</a:t>
             </a:r>
           </a:p>
           <a:p/>
           <a:p>
             <a:r>
-              <a:t>Ejemplo: la base de datos siempre encendida es costo Medio; un worker que solo corre cuando hay mensajes en cola es Bajo.</a:t>
+              <a:t>Un balanceador de carga cobra una tarifa fija de 18 a 25 dolares al mes incluso con cero trafico.</a:t>
             </a:r>
           </a:p>
           <a:p/>
           <a:p>
             <a:r>
-              <a:t>Egress = datos que salen del proveedor hacia internet; suele cobrarse por gigabyte, y la entrada casi nunca.</a:t>
+              <a:t>La leccion durable son tres proporciones: guardar es barato, mover datos hacia afuera es caro, y estar prendido sin hacer nada tambien cuesta.</a:t>
+            </a:r>
+          </a:p>
+          <a:p/>
+          <a:p>
+            <a:r>
+              <a:t>NOTAS:</a:t>
+            </a:r>
+          </a:p>
+          <a:p/>
+          <a:p>
+            <a:r>
+              <a:t>Una base de datos gestionada cuesta entre dos y tres veces la maquina desnuda equivalente, porque incluye respaldos, parches y conmutacion por falla.</a:t>
+            </a:r>
+          </a:p>
+          <a:p/>
+          <a:p>
+            <a:r>
+              <a:t>Una funcion serverless suele traer free tier de alrededor de un millon de invocaciones mensuales, asi que un componente poco usado cuesta cero de verdad.</a:t>
+            </a:r>
+          </a:p>
+          <a:p/>
+          <a:p>
+            <a:r>
+              <a:t>(No se proyecta) El docente debe poder citar ordenes de magnitud, y conviene decir en voz alta que son convenciones aproximadas de precios de lista y no reglas duras: las cifras cambian por proveedor, region y ano, pero las proporciones se mantienen estables.</a:t>
             </a:r>
           </a:p>
         </p:txBody>
@@ -861,55 +885,67 @@
           <a:p/>
           <a:p>
             <a:r>
-              <a:t>Una instancia pequena de 2 vCPU y 4 GB encendida todo el mes cuesta del orden de 25 a 40 dolares.</a:t>
+              <a:t>El primer ejemplo anclado en CloudLite es la tabla de costos, recorrida componente por componente.</a:t>
             </a:r>
           </a:p>
           <a:p/>
           <a:p>
             <a:r>
-              <a:t>El almacenamiento de objetos cuesta del orden de 0.02 a 0.03 dolares por gigabyte al mes, es decir casi nada.</a:t>
+              <a:t>La base de datos queda en Alto con un argumento preciso: paga computo las 24 horas de los 30 dias aunque nadie consulte, mas almacenamiento que nunca baja, mas respaldos.</a:t>
             </a:r>
           </a:p>
           <a:p/>
           <a:p>
             <a:r>
-              <a:t>El trafico de salida hacia internet, llamado egress, cuesta del orden de 0.08 a 0.12 dolares por gigabyte: unas cuatro veces mas caro por gigabyte que guardarlo un mes entero.</a:t>
+              <a:t>El frontend estatico queda en Bajo porque es almacenamiento mas trafico y no tiene computo propio.</a:t>
             </a:r>
           </a:p>
           <a:p/>
           <a:p>
             <a:r>
-              <a:t>Un balanceador de carga cobra una tarifa fija de 18 a 25 dolares al mes incluso con cero trafico.</a:t>
+              <a:t>Las notificaciones quedan en Bajo si se modelan como funcion serverless de volumen pequeno</a:t>
             </a:r>
           </a:p>
           <a:p/>
           <a:p>
             <a:r>
-              <a:t>La leccion durable son tres proporciones: guardar es barato, mover datos hacia afuera es caro, y estar prendido sin hacer nada tambien cuesta.</a:t>
+              <a:t>Y pasan a Medio si se implementan como un worker encendido de forma permanente: el mismo requisito con dos disenos y dos costos, que es exactamente el razonamiento que se evalua.</a:t>
             </a:r>
           </a:p>
           <a:p/>
           <a:p>
             <a:r>
+              <a:t>Los cuatro conductores que explican casi toda la factura son: computo siempre encendido, transferencia de salida o egress, almacenamiento caliente y volumen de logs.</a:t>
+            </a:r>
+          </a:p>
+          <a:p/>
+          <a:p>
+            <a:r>
+              <a:t>Un error comun es costear solo el computo y olvidar el egress: en servicios que entregan archivos a muchos usuarios, la transferencia de salida puede superar al computo.</a:t>
+            </a:r>
+          </a:p>
+          <a:p/>
+          <a:p>
+            <a:r>
+              <a:t>Un ejemplo de fila es: API de turnos, nivel Medio, driver computo siempre encendido; si se mueve a un servicio que escala a cero fuera de horario, baja a Bajo.</a:t>
+            </a:r>
+          </a:p>
+          <a:p/>
+          <a:p>
+            <a:r>
               <a:t>NOTAS:</a:t>
             </a:r>
           </a:p>
           <a:p/>
           <a:p>
             <a:r>
-              <a:t>Una base de datos gestionada cuesta entre dos y tres veces la maquina desnuda equivalente, porque incluye respaldos, parches y conmutacion por falla.</a:t>
+              <a:t>El contenedor de la API queda en Medio, con driver instancias por horas encendidas.</a:t>
             </a:r>
           </a:p>
           <a:p/>
           <a:p>
             <a:r>
-              <a:t>Una funcion serverless suele traer free tier de alrededor de un millon de invocaciones mensuales, asi que un componente poco usado cuesta cero de verdad.</a:t>
-            </a:r>
-          </a:p>
-          <a:p/>
-          <a:p>
-            <a:r>
-              <a:t>(No se proyecta) El docente debe poder citar ordenes de magnitud, y conviene decir en voz alta que son convenciones aproximadas de precios de lista y no reglas duras: las cifras cambian por proveedor, region y ano, pero las proporciones se mantienen estables.</a:t>
+              <a:t>(No se proyecta) Y hay un componente que sorprende, el monitoreo de la Clase 8: un sistema que registra cada peticion con detalle puede generar mas gigabytes de logs que de datos de negocio, y la ingesta de logs se cobra por gigabyte; existen casos reales de equipos cuya observabilidad costaba mas que la aplicacion observada.</a:t>
             </a:r>
           </a:p>
         </p:txBody>
@@ -985,67 +1021,55 @@
           <a:p/>
           <a:p>
             <a:r>
-              <a:t>El primer ejemplo anclado en CloudLite es la tabla de costos, recorrida componente por componente.</a:t>
+              <a:t>Suponga que CloudLite permite subir comprobantes en PDF o imagenes y que en un semestre acumula 5000 archivos de 2 MB, o sea 10 GB.</a:t>
             </a:r>
           </a:p>
           <a:p/>
           <a:p>
             <a:r>
-              <a:t>La base de datos queda en Alto con un argumento preciso: paga computo las 24 horas de los 30 dias aunque nadie consulte, mas almacenamiento que nunca baja, mas respaldos.</a:t>
+              <a:t>Guardarlos cuesta unos 0.25 dolares al mes, despreciable.</a:t>
             </a:r>
           </a:p>
           <a:p/>
           <a:p>
             <a:r>
-              <a:t>El frontend estatico queda en Bajo porque es almacenamiento mas trafico y no tiene computo propio.</a:t>
+              <a:t>Pero si cada archivo se descarga en promedio 20 veces, el sistema mueve 200 GB de egress al mes, que a 0.09 dolares por gigabyte son unos 18 dolares: setenta veces mas que el almacenamiento.</a:t>
             </a:r>
           </a:p>
           <a:p/>
           <a:p>
             <a:r>
-              <a:t>Las notificaciones quedan en Bajo si se modelan como funcion serverless de volumen pequeno</a:t>
+              <a:t>Hay dos familias de recursos: los que cobran por uso y los que cobran por existir.</a:t>
             </a:r>
           </a:p>
           <a:p/>
           <a:p>
             <a:r>
-              <a:t>Y pasan a Medio si se implementan como un worker encendido de forma permanente: el mismo requisito con dos disenos y dos costos, que es exactamente el razonamiento que se evalua.</a:t>
+              <a:t>La base de datos gestionada, el balanceador, las IP reservadas, los volumenes huerfanos y las instantaneas viejas son de la segunda y facturan aunque el ultimo usuario se haya ido hace meses.</a:t>
             </a:r>
           </a:p>
           <a:p/>
           <a:p>
             <a:r>
-              <a:t>Los cuatro conductores que explican casi toda la factura son: computo siempre encendido, transferencia de salida o egress, almacenamiento caliente y volumen de logs.</a:t>
+              <a:t>NOTAS:</a:t>
             </a:r>
           </a:p>
           <a:p/>
           <a:p>
             <a:r>
-              <a:t>Un error comun es costear solo el computo y olvidar el egress: en servicios que entregan archivos a muchos usuarios, la transferencia de salida puede superar al computo.</a:t>
+              <a:t>El segundo ejemplo muestra por que el driver importa mas que el nivel.</a:t>
             </a:r>
           </a:p>
           <a:p/>
           <a:p>
             <a:r>
-              <a:t>Un ejemplo de fila es: API de turnos, nivel Medio, driver computo siempre encendido; si se mueve a un servicio que escala a cero fuera de horario, baja a Bajo.</a:t>
+              <a:t>Esto tambien desarma la intuicion mas comun del estudiante, que si nadie usa el sistema el sistema no cuesta.</a:t>
             </a:r>
           </a:p>
           <a:p/>
           <a:p>
             <a:r>
-              <a:t>NOTAS:</a:t>
-            </a:r>
-          </a:p>
-          <a:p/>
-          <a:p>
-            <a:r>
-              <a:t>El contenedor de la API queda en Medio, con driver instancias por horas encendidas.</a:t>
-            </a:r>
-          </a:p>
-          <a:p/>
-          <a:p>
-            <a:r>
-              <a:t>(No se proyecta) Y hay un componente que sorprende, el monitoreo de la Clase 8: un sistema que registra cada peticion con detalle puede generar mas gigabytes de logs que de datos de negocio, y la ingesta de logs se cobra por gigabyte; existen casos reales de equipos cuya observabilidad costaba mas que la aplicacion observada.</a:t>
+              <a:t>(No se proyecta) La conclusion es contraintuitiva y por eso vale en clase: el driver del componente "almacenamiento de archivos" no es el almacenamiento, es el trafico, y la mitigacion no es contable sino arquitectonica, poner una cache o una red de distribucion de contenido delante para que el mismo archivo no salga del origen veinte veces.</a:t>
             </a:r>
           </a:p>
         </p:txBody>
@@ -1121,55 +1145,67 @@
           <a:p/>
           <a:p>
             <a:r>
-              <a:t>Suponga que CloudLite permite subir comprobantes en PDF o imagenes y que en un semestre acumula 5000 archivos de 2 MB, o sea 10 GB.</a:t>
+              <a:t>La metrica que lo gobierna es la utilizacion, el porcentaje de la capacidad pagada que efectivamente se usa; una maquina al 5 por ciento de CPU durante un mes desperdicia el 95 por ciento de lo pagado.</a:t>
             </a:r>
           </a:p>
           <a:p/>
           <a:p>
             <a:r>
-              <a:t>Guardarlos cuesta unos 0.25 dolares al mes, despreciable.</a:t>
+              <a:t>La convencion de industria, que es convencion y no regla, apunta a una utilizacion sostenida entre el 40 y el 70 por ciento: por debajo hay sobreaprovisionamiento y por encima no queda holgura para picos.</a:t>
             </a:r>
           </a:p>
           <a:p/>
           <a:p>
             <a:r>
-              <a:t>Pero si cada archivo se descarga en promedio 20 veces, el sistema mueve 200 GB de egress al mes, que a 0.09 dolares por gigabyte son unos 18 dolares: setenta veces mas que el almacenamiento.</a:t>
+              <a:t>La primera accion tipica es reducir tamano o numero de replicas hasta acercarse a ese rango.</a:t>
             </a:r>
           </a:p>
           <a:p/>
           <a:p>
             <a:r>
-              <a:t>Hay dos familias de recursos: los que cobran por uso y los que cobran por existir.</a:t>
+              <a:t>La segunda es apagar por horario lo que no es produccion: un ambiente encendido las 24 horas los siete dias consume 168 horas semanales, y encendido solo de 8 a 6 en dias habiles consume 50, un ahorro cercano al 70 por ciento sin tocar codigo.</a:t>
             </a:r>
           </a:p>
           <a:p/>
           <a:p>
             <a:r>
-              <a:t>La base de datos gestionada, el balanceador, las IP reservadas, los volumenes huerfanos y las instantaneas viejas son de la segunda y facturan aunque el ultimo usuario se haya ido hace meses.</a:t>
+              <a:t>Igual de validos son fijar retencion de logs a 30 dias en vez de para siempre y borrar volumenes e instantaneas sin dueno.</a:t>
             </a:r>
           </a:p>
           <a:p/>
           <a:p>
             <a:r>
+              <a:t>La tercera accion es reducir lo que esta sobredimensionado: una instancia que nunca pasa del 20 por ciento de CPU puede bajar a la mitad de su capacidad sin que nadie lo note.</a:t>
+            </a:r>
+          </a:p>
+          <a:p/>
+          <a:p>
+            <a:r>
+              <a:t>El orden correcto es: medir durante al menos 2 semanas, reducir un escalon y volver a medir; reducir sin datos es adivinar.</a:t>
+            </a:r>
+          </a:p>
+          <a:p/>
+          <a:p>
+            <a:r>
               <a:t>NOTAS:</a:t>
             </a:r>
           </a:p>
           <a:p/>
           <a:p>
             <a:r>
-              <a:t>El segundo ejemplo muestra por que el driver importa mas que el nivel.</a:t>
+              <a:t>De ahi salen tres acciones de right-sizing.</a:t>
             </a:r>
           </a:p>
           <a:p/>
           <a:p>
             <a:r>
-              <a:t>Esto tambien desarma la intuicion mas comun del estudiante, que si nadie usa el sistema el sistema no cuesta.</a:t>
+              <a:t>(No se proyecta) Right-sizing es ajustar la capacidad aprovisionada a la demanda observada, y la palabra clave es observada: sin medicion es adivinanza, y la medicion viene de las senales doradas de la Clase 8, en particular la saturacion.</a:t>
             </a:r>
           </a:p>
           <a:p/>
           <a:p>
             <a:r>
-              <a:t>(No se proyecta) La conclusion es contraintuitiva y por eso vale en clase: el driver del componente "almacenamiento de archivos" no es el almacenamiento, es el trafico, y la mitigacion no es contable sino arquitectonica, poner una cache o una red de distribucion de contenido delante para que el mismo archivo no salga del origen veinte veces.</a:t>
+              <a:t>(No se proyecta) La tercera es adelgazar el artefacto, que amarra con la Clase 3: una imagen basada en python:3.12 pesa del orden de 1 GB, la variante slim unos 150 MB y una construida sobre alpine puede bajar a decenas de megabytes; eso es menos registro, menos transferencia en cada despliegue y menos tiempo de arranque, dato que reaparece en la Clase 13.</a:t>
             </a:r>
           </a:p>
         </p:txBody>
@@ -1237,172 +1273,6 @@
         <p:txBody>
           <a:bodyPr/>
           <a:lstStyle/>
-          <a:p>
-            <a:r>
-              <a:t>DESARROLLO (para explicarlo, no se proyecta):</a:t>
-            </a:r>
-          </a:p>
-          <a:p/>
-          <a:p>
-            <a:r>
-              <a:t>La metrica que lo gobierna es la utilizacion, el porcentaje de la capacidad pagada que efectivamente se usa; una maquina al 5 por ciento de CPU durante un mes desperdicia el 95 por ciento de lo pagado.</a:t>
-            </a:r>
-          </a:p>
-          <a:p/>
-          <a:p>
-            <a:r>
-              <a:t>La convencion de industria, que es convencion y no regla, apunta a una utilizacion sostenida entre el 40 y el 70 por ciento: por debajo hay sobreaprovisionamiento y por encima no queda holgura para picos.</a:t>
-            </a:r>
-          </a:p>
-          <a:p/>
-          <a:p>
-            <a:r>
-              <a:t>La primera accion tipica es reducir tamano o numero de replicas hasta acercarse a ese rango.</a:t>
-            </a:r>
-          </a:p>
-          <a:p/>
-          <a:p>
-            <a:r>
-              <a:t>La segunda es apagar por horario lo que no es produccion: un ambiente encendido las 24 horas los siete dias consume 168 horas semanales, y encendido solo de 8 a 6 en dias habiles consume 50, un ahorro cercano al 70 por ciento sin tocar codigo.</a:t>
-            </a:r>
-          </a:p>
-          <a:p/>
-          <a:p>
-            <a:r>
-              <a:t>Igual de validos son fijar retencion de logs a 30 dias en vez de para siempre y borrar volumenes e instantaneas sin dueno.</a:t>
-            </a:r>
-          </a:p>
-          <a:p/>
-          <a:p>
-            <a:r>
-              <a:t>La tercera accion es reducir lo que esta sobredimensionado: una instancia que nunca pasa del 20 por ciento de CPU puede bajar a la mitad de su capacidad sin que nadie lo note.</a:t>
-            </a:r>
-          </a:p>
-          <a:p/>
-          <a:p>
-            <a:r>
-              <a:t>El orden correcto es: medir durante al menos 2 semanas, reducir un escalon y volver a medir; reducir sin datos es adivinar.</a:t>
-            </a:r>
-          </a:p>
-          <a:p/>
-          <a:p>
-            <a:r>
-              <a:t>NOTAS:</a:t>
-            </a:r>
-          </a:p>
-          <a:p/>
-          <a:p>
-            <a:r>
-              <a:t>De ahi salen tres acciones de right-sizing.</a:t>
-            </a:r>
-          </a:p>
-          <a:p/>
-          <a:p>
-            <a:r>
-              <a:t>(No se proyecta) Right-sizing es ajustar la capacidad aprovisionada a la demanda observada, y la palabra clave es observada: sin medicion es adivinanza, y la medicion viene de las senales doradas de la Clase 8, en particular la saturacion.</a:t>
-            </a:r>
-          </a:p>
-          <a:p/>
-          <a:p>
-            <a:r>
-              <a:t>(No se proyecta) La tercera es adelgazar el artefacto, que amarra con la Clase 3: una imagen basada en python:3.12 pesa del orden de 1 GB, la variante slim unos 150 MB y una construida sobre alpine puede bajar a decenas de megabytes; eso es menos registro, menos transferencia en cada despliegue y menos tiempo de arranque, dato que reaparece en la Clase 13.</a:t>
-            </a:r>
-          </a:p>
-        </p:txBody>
-      </p:sp>
-      <p:sp>
-        <p:nvSpPr>
-          <p:cNvPr id="4" name="Slide Number Placeholder 3"/>
-          <p:cNvSpPr>
-            <a:spLocks noGrp="1"/>
-          </p:cNvSpPr>
-          <p:nvPr>
-            <p:ph type="sldNum" idx="5" sz="quarter"/>
-          </p:nvPr>
-        </p:nvSpPr>
-        <p:spPr/>
-      </p:sp>
-    </p:spTree>
-  </p:cSld>
-  <p:clrMapOvr>
-    <a:masterClrMapping/>
-  </p:clrMapOvr>
-</p:notes>
-</file>
-
-<file path=ppt/notesSlides/notesSlide8.xml><?xml version="1.0" encoding="utf-8"?>
-<p:notes xmlns:a="http://schemas.openxmlformats.org/drawingml/2006/main" xmlns:p="http://schemas.openxmlformats.org/presentationml/2006/main" xmlns:r="http://schemas.openxmlformats.org/officeDocument/2006/relationships">
-  <p:cSld>
-    <p:spTree>
-      <p:nvGrpSpPr>
-        <p:cNvPr id="1" name=""/>
-        <p:cNvGrpSpPr/>
-        <p:nvPr/>
-      </p:nvGrpSpPr>
-      <p:grpSpPr>
-        <a:xfrm>
-          <a:off x="0" y="0"/>
-          <a:ext cx="0" cy="0"/>
-          <a:chOff x="0" y="0"/>
-          <a:chExt cx="0" cy="0"/>
-        </a:xfrm>
-      </p:grpSpPr>
-      <p:sp>
-        <p:nvSpPr>
-          <p:cNvPr id="2" name="Slide Image Placeholder 1"/>
-          <p:cNvSpPr>
-            <a:spLocks noGrp="1"/>
-          </p:cNvSpPr>
-          <p:nvPr>
-            <p:ph type="sldImg" idx="2"/>
-          </p:nvPr>
-        </p:nvSpPr>
-        <p:spPr/>
-      </p:sp>
-      <p:sp>
-        <p:nvSpPr>
-          <p:cNvPr id="3" name="Notes Placeholder 2"/>
-          <p:cNvSpPr>
-            <a:spLocks noGrp="1"/>
-          </p:cNvSpPr>
-          <p:nvPr>
-            <p:ph type="body" idx="3" sz="quarter"/>
-          </p:nvPr>
-        </p:nvSpPr>
-        <p:spPr/>
-        <p:txBody>
-          <a:bodyPr/>
-          <a:lstStyle/>
-          <a:p>
-            <a:r>
-              <a:t>TEXTO COMPLETO DE LA LÁMINA (se proyecta resumido):</a:t>
-            </a:r>
-          </a:p>
-          <a:p/>
-          <a:p>
-            <a:r>
-              <a:t>Menos capas innecesarias · imágenes slim · apagar labs · right-sizing.</a:t>
-            </a:r>
-          </a:p>
-          <a:p/>
-          <a:p>
-            <a:r>
-              <a:t>Relación con escalabilidad: escala cuando hay carga, no por vanidad.</a:t>
-            </a:r>
-          </a:p>
-          <a:p/>
-          <a:p>
-            <a:r>
-              <a:t>Sostenibilidad técnica: que el equipo pueda operar el diseño. Ambiental: no consumir cómputo que nadie usa.</a:t>
-            </a:r>
-          </a:p>
-          <a:p/>
-          <a:p>
-            <a:r>
-              <a:t>Ejemplo: una imagen slim pesa decenas de MB frente a cerca de 1 GB de una completa: menos almacenamiento, menos transferencia y despliegues más rápidos.</a:t>
-            </a:r>
-          </a:p>
-          <a:p/>
           <a:p>
             <a:r>
               <a:t>DESARROLLO (para explicarlo, no se proyecta):</a:t>
@@ -5525,118 +5395,14 @@
       </p:sp>
       <p:sp>
         <p:nvSpPr>
-          <p:cNvPr id="5" name="Rounded Rectangle 4"/>
-          <p:cNvSpPr/>
-          <p:nvPr/>
-        </p:nvSpPr>
-        <p:spPr>
-          <a:xfrm>
-            <a:off x="5797149" y="1882619"/>
-            <a:ext cx="6010497" cy="3440233"/>
-          </a:xfrm>
-          <a:prstGeom prst="roundRect">
-            <a:avLst>
-              <a:gd name="adj" fmla="val 4000"/>
-            </a:avLst>
-          </a:prstGeom>
-          <a:solidFill>
-            <a:srgbClr val="E8EEF4"/>
-          </a:solidFill>
-          <a:ln>
-            <a:noFill/>
-          </a:ln>
-        </p:spPr>
-        <p:style>
-          <a:lnRef idx="1">
-            <a:schemeClr val="accent1"/>
-          </a:lnRef>
-          <a:fillRef idx="3">
-            <a:schemeClr val="accent1"/>
-          </a:fillRef>
-          <a:effectRef idx="2">
-            <a:schemeClr val="accent1"/>
-          </a:effectRef>
-          <a:fontRef idx="minor">
-            <a:schemeClr val="lt1"/>
-          </a:fontRef>
-        </p:style>
-        <p:txBody>
-          <a:bodyPr rtlCol="0" anchor="ctr"/>
-          <a:lstStyle/>
-          <a:p>
-            <a:pPr algn="ctr"/>
-          </a:p>
-        </p:txBody>
-      </p:sp>
-      <p:pic>
-        <p:nvPicPr>
-          <p:cNvPr id="6" name="Picture 5" descr="green-energy-solar-panels.jpg"/>
-          <p:cNvPicPr>
-            <a:picLocks noChangeAspect="1"/>
-          </p:cNvPicPr>
-          <p:nvPr/>
-        </p:nvPicPr>
-        <p:blipFill>
-          <a:blip r:embed="rId2"/>
-          <a:stretch>
-            <a:fillRect/>
-          </a:stretch>
-        </p:blipFill>
-        <p:spPr>
-          <a:xfrm>
-            <a:off x="5870301" y="1955771"/>
-            <a:ext cx="5864193" cy="3293929"/>
-          </a:xfrm>
-          <a:prstGeom prst="rect">
-            <a:avLst/>
-          </a:prstGeom>
-        </p:spPr>
-      </p:pic>
-      <p:sp>
-        <p:nvSpPr>
-          <p:cNvPr id="7" name="TextBox 6"/>
+          <p:cNvPr id="5" name="TextBox 4"/>
           <p:cNvSpPr txBox="1"/>
           <p:nvPr/>
         </p:nvSpPr>
         <p:spPr>
           <a:xfrm>
-            <a:off x="5870301" y="5961888"/>
-            <a:ext cx="5864193" cy="320040"/>
-          </a:xfrm>
-          <a:prstGeom prst="rect">
-            <a:avLst/>
-          </a:prstGeom>
-          <a:noFill/>
-        </p:spPr>
-        <p:txBody>
-          <a:bodyPr wrap="square">
-            <a:spAutoFit/>
-          </a:bodyPr>
-          <a:lstStyle/>
-          <a:p>
-            <a:pPr algn="ctr"/>
-            <a:r>
-              <a:rPr sz="1100" b="0" i="1">
-                <a:solidFill>
-                  <a:srgbClr val="666666"/>
-                </a:solidFill>
-                <a:latin typeface="Calibri"/>
-              </a:rPr>
-              <a:t>Foto: K · Pexels</a:t>
-            </a:r>
-          </a:p>
-        </p:txBody>
-      </p:sp>
-      <p:sp>
-        <p:nvSpPr>
-          <p:cNvPr id="8" name="TextBox 7"/>
-          <p:cNvSpPr txBox="1"/>
-          <p:nvPr/>
-        </p:nvSpPr>
-        <p:spPr>
-          <a:xfrm>
-            <a:off x="457200" y="1353312"/>
-            <a:ext cx="5093061" cy="5047488"/>
+            <a:off x="457200" y="1170432"/>
+            <a:ext cx="11277295" cy="5230368"/>
           </a:xfrm>
           <a:prstGeom prst="rect">
             <a:avLst/>
@@ -5745,14 +5511,14 @@
                 </a:solidFill>
                 <a:latin typeface="Calibri"/>
               </a:rPr>
-              <a:t>–   Ejemplo: una imagen slim pesa decenas de MB frente a cerca de 1 GB de una completa: menos almacenamiento, menos transferencia y despliegues más…</a:t>
-            </a:r>
-          </a:p>
-        </p:txBody>
-      </p:sp>
-      <p:sp>
-        <p:nvSpPr>
-          <p:cNvPr id="9" name="TextBox 8"/>
+              <a:t>–   Ejemplo: una imagen slim pesa decenas de MB frente a cerca de 1 GB de una completa: menos almacenamiento, menos transferencia y despliegues más rápidos.</a:t>
+            </a:r>
+          </a:p>
+        </p:txBody>
+      </p:sp>
+      <p:sp>
+        <p:nvSpPr>
+          <p:cNvPr id="6" name="TextBox 5"/>
           <p:cNvSpPr txBox="1"/>
           <p:nvPr/>
         </p:nvSpPr>
@@ -6512,118 +6278,14 @@
       </p:sp>
       <p:sp>
         <p:nvSpPr>
-          <p:cNvPr id="5" name="Rounded Rectangle 4"/>
-          <p:cNvSpPr/>
-          <p:nvPr/>
-        </p:nvSpPr>
-        <p:spPr>
-          <a:xfrm>
-            <a:off x="5797149" y="1573813"/>
-            <a:ext cx="6010497" cy="4057845"/>
-          </a:xfrm>
-          <a:prstGeom prst="roundRect">
-            <a:avLst>
-              <a:gd name="adj" fmla="val 4000"/>
-            </a:avLst>
-          </a:prstGeom>
-          <a:solidFill>
-            <a:srgbClr val="E8EEF4"/>
-          </a:solidFill>
-          <a:ln>
-            <a:noFill/>
-          </a:ln>
-        </p:spPr>
-        <p:style>
-          <a:lnRef idx="1">
-            <a:schemeClr val="accent1"/>
-          </a:lnRef>
-          <a:fillRef idx="3">
-            <a:schemeClr val="accent1"/>
-          </a:fillRef>
-          <a:effectRef idx="2">
-            <a:schemeClr val="accent1"/>
-          </a:effectRef>
-          <a:fontRef idx="minor">
-            <a:schemeClr val="lt1"/>
-          </a:fontRef>
-        </p:style>
-        <p:txBody>
-          <a:bodyPr rtlCol="0" anchor="ctr"/>
-          <a:lstStyle/>
-          <a:p>
-            <a:pPr algn="ctr"/>
-          </a:p>
-        </p:txBody>
-      </p:sp>
-      <p:pic>
-        <p:nvPicPr>
-          <p:cNvPr id="6" name="Picture 5" descr="students-learning-laptops-classroom.jpg"/>
-          <p:cNvPicPr>
-            <a:picLocks noChangeAspect="1"/>
-          </p:cNvPicPr>
-          <p:nvPr/>
-        </p:nvPicPr>
-        <p:blipFill>
-          <a:blip r:embed="rId2"/>
-          <a:stretch>
-            <a:fillRect/>
-          </a:stretch>
-        </p:blipFill>
-        <p:spPr>
-          <a:xfrm>
-            <a:off x="5870301" y="1646965"/>
-            <a:ext cx="5864193" cy="3911541"/>
-          </a:xfrm>
-          <a:prstGeom prst="rect">
-            <a:avLst/>
-          </a:prstGeom>
-        </p:spPr>
-      </p:pic>
-      <p:sp>
-        <p:nvSpPr>
-          <p:cNvPr id="7" name="TextBox 6"/>
+          <p:cNvPr id="5" name="TextBox 4"/>
           <p:cNvSpPr txBox="1"/>
           <p:nvPr/>
         </p:nvSpPr>
         <p:spPr>
           <a:xfrm>
-            <a:off x="5870301" y="5961888"/>
-            <a:ext cx="5864193" cy="320040"/>
-          </a:xfrm>
-          <a:prstGeom prst="rect">
-            <a:avLst/>
-          </a:prstGeom>
-          <a:noFill/>
-        </p:spPr>
-        <p:txBody>
-          <a:bodyPr wrap="square">
-            <a:spAutoFit/>
-          </a:bodyPr>
-          <a:lstStyle/>
-          <a:p>
-            <a:pPr algn="ctr"/>
-            <a:r>
-              <a:rPr sz="1100" b="0" i="1">
-                <a:solidFill>
-                  <a:srgbClr val="666666"/>
-                </a:solidFill>
-                <a:latin typeface="Calibri"/>
-              </a:rPr>
-              <a:t>Foto: Mikhail Nilov · Pexels</a:t>
-            </a:r>
-          </a:p>
-        </p:txBody>
-      </p:sp>
-      <p:sp>
-        <p:nvSpPr>
-          <p:cNvPr id="8" name="TextBox 7"/>
-          <p:cNvSpPr txBox="1"/>
-          <p:nvPr/>
-        </p:nvSpPr>
-        <p:spPr>
-          <a:xfrm>
-            <a:off x="457200" y="1353312"/>
-            <a:ext cx="5093061" cy="5047488"/>
+            <a:off x="457200" y="1170432"/>
+            <a:ext cx="11277295" cy="5230368"/>
           </a:xfrm>
           <a:prstGeom prst="rect">
             <a:avLst/>
@@ -6687,7 +6349,7 @@
       </p:sp>
       <p:sp>
         <p:nvSpPr>
-          <p:cNvPr id="9" name="TextBox 8"/>
+          <p:cNvPr id="6" name="TextBox 5"/>
           <p:cNvSpPr txBox="1"/>
           <p:nvPr/>
         </p:nvSpPr>
@@ -7315,118 +6977,14 @@
       </p:sp>
       <p:sp>
         <p:nvSpPr>
-          <p:cNvPr id="5" name="Rounded Rectangle 4"/>
-          <p:cNvSpPr/>
-          <p:nvPr/>
-        </p:nvSpPr>
-        <p:spPr>
-          <a:xfrm>
-            <a:off x="5797149" y="1573813"/>
-            <a:ext cx="6010497" cy="4057845"/>
-          </a:xfrm>
-          <a:prstGeom prst="roundRect">
-            <a:avLst>
-              <a:gd name="adj" fmla="val 4000"/>
-            </a:avLst>
-          </a:prstGeom>
-          <a:solidFill>
-            <a:srgbClr val="E8EEF4"/>
-          </a:solidFill>
-          <a:ln>
-            <a:noFill/>
-          </a:ln>
-        </p:spPr>
-        <p:style>
-          <a:lnRef idx="1">
-            <a:schemeClr val="accent1"/>
-          </a:lnRef>
-          <a:fillRef idx="3">
-            <a:schemeClr val="accent1"/>
-          </a:fillRef>
-          <a:effectRef idx="2">
-            <a:schemeClr val="accent1"/>
-          </a:effectRef>
-          <a:fontRef idx="minor">
-            <a:schemeClr val="lt1"/>
-          </a:fontRef>
-        </p:style>
-        <p:txBody>
-          <a:bodyPr rtlCol="0" anchor="ctr"/>
-          <a:lstStyle/>
-          <a:p>
-            <a:pPr algn="ctr"/>
-          </a:p>
-        </p:txBody>
-      </p:sp>
-      <p:pic>
-        <p:nvPicPr>
-          <p:cNvPr id="6" name="Picture 5" descr="calculator-budget-notebook.jpg"/>
-          <p:cNvPicPr>
-            <a:picLocks noChangeAspect="1"/>
-          </p:cNvPicPr>
-          <p:nvPr/>
-        </p:nvPicPr>
-        <p:blipFill>
-          <a:blip r:embed="rId2"/>
-          <a:stretch>
-            <a:fillRect/>
-          </a:stretch>
-        </p:blipFill>
-        <p:spPr>
-          <a:xfrm>
-            <a:off x="5870301" y="1646965"/>
-            <a:ext cx="5864193" cy="3911541"/>
-          </a:xfrm>
-          <a:prstGeom prst="rect">
-            <a:avLst/>
-          </a:prstGeom>
-        </p:spPr>
-      </p:pic>
-      <p:sp>
-        <p:nvSpPr>
-          <p:cNvPr id="7" name="TextBox 6"/>
+          <p:cNvPr id="5" name="TextBox 4"/>
           <p:cNvSpPr txBox="1"/>
           <p:nvPr/>
         </p:nvSpPr>
         <p:spPr>
           <a:xfrm>
-            <a:off x="5870301" y="5961888"/>
-            <a:ext cx="5864193" cy="320040"/>
-          </a:xfrm>
-          <a:prstGeom prst="rect">
-            <a:avLst/>
-          </a:prstGeom>
-          <a:noFill/>
-        </p:spPr>
-        <p:txBody>
-          <a:bodyPr wrap="square">
-            <a:spAutoFit/>
-          </a:bodyPr>
-          <a:lstStyle/>
-          <a:p>
-            <a:pPr algn="ctr"/>
-            <a:r>
-              <a:rPr sz="1100" b="0" i="1">
-                <a:solidFill>
-                  <a:srgbClr val="666666"/>
-                </a:solidFill>
-                <a:latin typeface="Calibri"/>
-              </a:rPr>
-              <a:t>Foto: olia danilevich · Pexels</a:t>
-            </a:r>
-          </a:p>
-        </p:txBody>
-      </p:sp>
-      <p:sp>
-        <p:nvSpPr>
-          <p:cNvPr id="8" name="TextBox 7"/>
-          <p:cNvSpPr txBox="1"/>
-          <p:nvPr/>
-        </p:nvSpPr>
-        <p:spPr>
-          <a:xfrm>
-            <a:off x="457200" y="1353312"/>
-            <a:ext cx="5093061" cy="5047488"/>
+            <a:off x="457200" y="1170432"/>
+            <a:ext cx="11277295" cy="5230368"/>
           </a:xfrm>
           <a:prstGeom prst="rect">
             <a:avLst/>
@@ -7451,7 +7009,7 @@
                 </a:solidFill>
                 <a:latin typeface="Calibri"/>
               </a:rPr>
-              <a:t>–   la app no tiene facturacion real y no la va a tener: el curso prohibe cuentas cloud de pago y tarjetas de credito, y todo se trabaja con…</a:t>
+              <a:t>–   la app no tiene facturacion real y no la va a tener: el curso prohibe cuentas cloud de pago y tarjetas de credito, y todo se trabaja con draw.io, Excalidraw, Killercoda y el free tier de GitHub Actions.</a:t>
             </a:r>
           </a:p>
           <a:p>
@@ -7474,7 +7032,7 @@
       </p:sp>
       <p:sp>
         <p:nvSpPr>
-          <p:cNvPr id="9" name="TextBox 8"/>
+          <p:cNvPr id="6" name="TextBox 5"/>
           <p:cNvSpPr txBox="1"/>
           <p:nvPr/>
         </p:nvSpPr>
@@ -7655,118 +7213,14 @@
       </p:sp>
       <p:sp>
         <p:nvSpPr>
-          <p:cNvPr id="5" name="Rounded Rectangle 4"/>
-          <p:cNvSpPr/>
-          <p:nvPr/>
-        </p:nvSpPr>
-        <p:spPr>
-          <a:xfrm>
-            <a:off x="5797149" y="1879499"/>
-            <a:ext cx="6010497" cy="3446472"/>
-          </a:xfrm>
-          <a:prstGeom prst="roundRect">
-            <a:avLst>
-              <a:gd name="adj" fmla="val 4000"/>
-            </a:avLst>
-          </a:prstGeom>
-          <a:solidFill>
-            <a:srgbClr val="E8EEF4"/>
-          </a:solidFill>
-          <a:ln>
-            <a:noFill/>
-          </a:ln>
-        </p:spPr>
-        <p:style>
-          <a:lnRef idx="1">
-            <a:schemeClr val="accent1"/>
-          </a:lnRef>
-          <a:fillRef idx="3">
-            <a:schemeClr val="accent1"/>
-          </a:fillRef>
-          <a:effectRef idx="2">
-            <a:schemeClr val="accent1"/>
-          </a:effectRef>
-          <a:fontRef idx="minor">
-            <a:schemeClr val="lt1"/>
-          </a:fontRef>
-        </p:style>
-        <p:txBody>
-          <a:bodyPr rtlCol="0" anchor="ctr"/>
-          <a:lstStyle/>
-          <a:p>
-            <a:pPr algn="ctr"/>
-          </a:p>
-        </p:txBody>
-      </p:sp>
-      <p:pic>
-        <p:nvPicPr>
-          <p:cNvPr id="6" name="Picture 5" descr="calculator-budget-spreadsheet.jpg"/>
-          <p:cNvPicPr>
-            <a:picLocks noChangeAspect="1"/>
-          </p:cNvPicPr>
-          <p:nvPr/>
-        </p:nvPicPr>
-        <p:blipFill>
-          <a:blip r:embed="rId2"/>
-          <a:stretch>
-            <a:fillRect/>
-          </a:stretch>
-        </p:blipFill>
-        <p:spPr>
-          <a:xfrm>
-            <a:off x="5870301" y="1952651"/>
-            <a:ext cx="5864193" cy="3300168"/>
-          </a:xfrm>
-          <a:prstGeom prst="rect">
-            <a:avLst/>
-          </a:prstGeom>
-        </p:spPr>
-      </p:pic>
-      <p:sp>
-        <p:nvSpPr>
-          <p:cNvPr id="7" name="TextBox 6"/>
+          <p:cNvPr id="5" name="TextBox 4"/>
           <p:cNvSpPr txBox="1"/>
           <p:nvPr/>
         </p:nvSpPr>
         <p:spPr>
           <a:xfrm>
-            <a:off x="5870301" y="5961888"/>
-            <a:ext cx="5864193" cy="320040"/>
-          </a:xfrm>
-          <a:prstGeom prst="rect">
-            <a:avLst/>
-          </a:prstGeom>
-          <a:noFill/>
-        </p:spPr>
-        <p:txBody>
-          <a:bodyPr wrap="square">
-            <a:spAutoFit/>
-          </a:bodyPr>
-          <a:lstStyle/>
-          <a:p>
-            <a:pPr algn="ctr"/>
-            <a:r>
-              <a:rPr sz="1100" b="0" i="1">
-                <a:solidFill>
-                  <a:srgbClr val="666666"/>
-                </a:solidFill>
-                <a:latin typeface="Calibri"/>
-              </a:rPr>
-              <a:t>Foto: Kindel Media · Pexels</a:t>
-            </a:r>
-          </a:p>
-        </p:txBody>
-      </p:sp>
-      <p:sp>
-        <p:nvSpPr>
-          <p:cNvPr id="8" name="TextBox 7"/>
-          <p:cNvSpPr txBox="1"/>
-          <p:nvPr/>
-        </p:nvSpPr>
-        <p:spPr>
-          <a:xfrm>
-            <a:off x="457200" y="1353312"/>
-            <a:ext cx="5093061" cy="5047488"/>
+            <a:off x="457200" y="1170432"/>
+            <a:ext cx="11277295" cy="5230368"/>
           </a:xfrm>
           <a:prstGeom prst="rect">
             <a:avLst/>
@@ -7878,11 +7332,45 @@
               <a:t>.</a:t>
             </a:r>
           </a:p>
-        </p:txBody>
-      </p:sp>
-      <p:sp>
-        <p:nvSpPr>
-          <p:cNvPr id="9" name="TextBox 8"/>
+          <a:p>
+            <a:pPr>
+              <a:spcAft>
+                <a:spcPts val="800"/>
+              </a:spcAft>
+            </a:pPr>
+            <a:r>
+              <a:rPr sz="2000" b="0" i="0">
+                <a:solidFill>
+                  <a:srgbClr val="333333"/>
+                </a:solidFill>
+                <a:latin typeface="Calibri"/>
+              </a:rPr>
+              <a:t>–   </a:t>
+            </a:r>
+            <a:r>
+              <a:rPr sz="2000" b="1" i="0">
+                <a:solidFill>
+                  <a:srgbClr val="333333"/>
+                </a:solidFill>
+                <a:latin typeface="Calibri"/>
+              </a:rPr>
+              <a:t>Egress</a:t>
+            </a:r>
+            <a:r>
+              <a:rPr sz="2000" b="0" i="0">
+                <a:solidFill>
+                  <a:srgbClr val="333333"/>
+                </a:solidFill>
+                <a:latin typeface="Calibri"/>
+              </a:rPr>
+              <a:t> = datos que salen del proveedor hacia internet; suele cobrarse por gigabyte, y la entrada casi nunca.</a:t>
+            </a:r>
+          </a:p>
+        </p:txBody>
+      </p:sp>
+      <p:sp>
+        <p:nvSpPr>
+          <p:cNvPr id="6" name="TextBox 5"/>
           <p:cNvSpPr txBox="1"/>
           <p:nvPr/>
         </p:nvSpPr>

--- a/Arquitectura de Sistemas Computacionales/Clases/Clase 10 - Costos y sostenibilidad cloud/Presentacion.pptx
+++ b/Arquitectura de Sistemas Computacionales/Clases/Clase 10 - Costos y sostenibilidad cloud/Presentacion.pptx
@@ -631,6 +631,24 @@
           <a:lstStyle/>
           <a:p>
             <a:r>
+              <a:t>TEXTO COMPLETO DE LA LÁMINA (se proyecta resumido):</a:t>
+            </a:r>
+          </a:p>
+          <a:p/>
+          <a:p>
+            <a:r>
+              <a:t>CloudLite App no tiene facturacion real y no la va a tener: el curso prohibe cuentas cloud de pago y tarjetas de credito, y todo se trabaja con draw.io, Excalidraw, Killercoda y el free tier de GitHub Actions.</a:t>
+            </a:r>
+          </a:p>
+          <a:p/>
+          <a:p>
+            <a:r>
+              <a:t>En vez de pesos se usa una escala ordinal de tres niveles, Bajo, Medio y Alto, asignada componente por componente.</a:t>
+            </a:r>
+          </a:p>
+          <a:p/>
+          <a:p>
+            <a:r>
               <a:t>DESARROLLO (para explicarlo, no se proyecta):</a:t>
             </a:r>
           </a:p>
@@ -755,61 +773,37 @@
           <a:lstStyle/>
           <a:p>
             <a:r>
-              <a:t>DESARROLLO (para explicarlo, no se proyecta):</a:t>
+              <a:t>TEXTO COMPLETO DE LA LÁMINA (se proyecta resumido):</a:t>
             </a:r>
           </a:p>
           <a:p/>
           <a:p>
             <a:r>
-              <a:t>Una instancia pequena de 2 vCPU y 4 GB encendida todo el mes cuesta del orden de 25 a 40 dolares.</a:t>
+              <a:t>Escala cualitativa: Bajo / Medio / Alto por componente.</a:t>
             </a:r>
           </a:p>
           <a:p/>
           <a:p>
             <a:r>
-              <a:t>El almacenamiento de objetos cuesta del orden de 0.02 a 0.03 dolares por gigabyte al mes, es decir casi nada.</a:t>
+              <a:t>Drivers: siempre-on, egress, storage caliente, builds CI frecuentes.</a:t>
             </a:r>
           </a:p>
           <a:p/>
           <a:p>
             <a:r>
-              <a:t>El trafico de salida hacia internet, llamado egress, cuesta del orden de 0.08 a 0.12 dolares por gigabyte: unas cuatro veces mas caro por gigabyte que guardarlo un mes entero.</a:t>
+              <a:t>CloudLite: justifiquen por qué su diseño no es «siempre XL».</a:t>
             </a:r>
           </a:p>
           <a:p/>
           <a:p>
             <a:r>
-              <a:t>Un balanceador de carga cobra una tarifa fija de 18 a 25 dolares al mes incluso con cero trafico.</a:t>
+              <a:t>Ejemplo: la base de datos siempre encendida es costo Medio; un worker que solo corre cuando hay mensajes en cola es Bajo.</a:t>
             </a:r>
           </a:p>
           <a:p/>
           <a:p>
             <a:r>
-              <a:t>La leccion durable son tres proporciones: guardar es barato, mover datos hacia afuera es caro, y estar prendido sin hacer nada tambien cuesta.</a:t>
-            </a:r>
-          </a:p>
-          <a:p/>
-          <a:p>
-            <a:r>
-              <a:t>NOTAS:</a:t>
-            </a:r>
-          </a:p>
-          <a:p/>
-          <a:p>
-            <a:r>
-              <a:t>Una base de datos gestionada cuesta entre dos y tres veces la maquina desnuda equivalente, porque incluye respaldos, parches y conmutacion por falla.</a:t>
-            </a:r>
-          </a:p>
-          <a:p/>
-          <a:p>
-            <a:r>
-              <a:t>Una funcion serverless suele traer free tier de alrededor de un millon de invocaciones mensuales, asi que un componente poco usado cuesta cero de verdad.</a:t>
-            </a:r>
-          </a:p>
-          <a:p/>
-          <a:p>
-            <a:r>
-              <a:t>(No se proyecta) El docente debe poder citar ordenes de magnitud, y conviene decir en voz alta que son convenciones aproximadas de precios de lista y no reglas duras: las cifras cambian por proveedor, region y ano, pero las proporciones se mantienen estables.</a:t>
+              <a:t>Egress = datos que salen del proveedor hacia internet; suele cobrarse por gigabyte, y la entrada casi nunca.</a:t>
             </a:r>
           </a:p>
         </p:txBody>
@@ -885,67 +879,55 @@
           <a:p/>
           <a:p>
             <a:r>
-              <a:t>El primer ejemplo anclado en CloudLite es la tabla de costos, recorrida componente por componente.</a:t>
+              <a:t>Una instancia pequena de 2 vCPU y 4 GB encendida todo el mes cuesta del orden de 25 a 40 dolares.</a:t>
             </a:r>
           </a:p>
           <a:p/>
           <a:p>
             <a:r>
-              <a:t>La base de datos queda en Alto con un argumento preciso: paga computo las 24 horas de los 30 dias aunque nadie consulte, mas almacenamiento que nunca baja, mas respaldos.</a:t>
+              <a:t>El almacenamiento de objetos cuesta del orden de 0.02 a 0.03 dolares por gigabyte al mes, es decir casi nada.</a:t>
             </a:r>
           </a:p>
           <a:p/>
           <a:p>
             <a:r>
-              <a:t>El frontend estatico queda en Bajo porque es almacenamiento mas trafico y no tiene computo propio.</a:t>
+              <a:t>El trafico de salida hacia internet, llamado egress, cuesta del orden de 0.08 a 0.12 dolares por gigabyte: unas cuatro veces mas caro por gigabyte que guardarlo un mes entero.</a:t>
             </a:r>
           </a:p>
           <a:p/>
           <a:p>
             <a:r>
-              <a:t>Las notificaciones quedan en Bajo si se modelan como funcion serverless de volumen pequeno</a:t>
+              <a:t>Un balanceador de carga cobra una tarifa fija de 18 a 25 dolares al mes incluso con cero trafico.</a:t>
             </a:r>
           </a:p>
           <a:p/>
           <a:p>
             <a:r>
-              <a:t>Y pasan a Medio si se implementan como un worker encendido de forma permanente: el mismo requisito con dos disenos y dos costos, que es exactamente el razonamiento que se evalua.</a:t>
+              <a:t>La leccion durable son tres proporciones: guardar es barato, mover datos hacia afuera es caro, y estar prendido sin hacer nada tambien cuesta.</a:t>
             </a:r>
           </a:p>
           <a:p/>
           <a:p>
             <a:r>
-              <a:t>Los cuatro conductores que explican casi toda la factura son: computo siempre encendido, transferencia de salida o egress, almacenamiento caliente y volumen de logs.</a:t>
+              <a:t>NOTAS:</a:t>
             </a:r>
           </a:p>
           <a:p/>
           <a:p>
             <a:r>
-              <a:t>Un error comun es costear solo el computo y olvidar el egress: en servicios que entregan archivos a muchos usuarios, la transferencia de salida puede superar al computo.</a:t>
+              <a:t>Una base de datos gestionada cuesta entre dos y tres veces la maquina desnuda equivalente, porque incluye respaldos, parches y conmutacion por falla.</a:t>
             </a:r>
           </a:p>
           <a:p/>
           <a:p>
             <a:r>
-              <a:t>Un ejemplo de fila es: API de turnos, nivel Medio, driver computo siempre encendido; si se mueve a un servicio que escala a cero fuera de horario, baja a Bajo.</a:t>
+              <a:t>Una funcion serverless suele traer free tier de alrededor de un millon de invocaciones mensuales, asi que un componente poco usado cuesta cero de verdad.</a:t>
             </a:r>
           </a:p>
           <a:p/>
           <a:p>
             <a:r>
-              <a:t>NOTAS:</a:t>
-            </a:r>
-          </a:p>
-          <a:p/>
-          <a:p>
-            <a:r>
-              <a:t>El contenedor de la API queda en Medio, con driver instancias por horas encendidas.</a:t>
-            </a:r>
-          </a:p>
-          <a:p/>
-          <a:p>
-            <a:r>
-              <a:t>(No se proyecta) Y hay un componente que sorprende, el monitoreo de la Clase 8: un sistema que registra cada peticion con detalle puede generar mas gigabytes de logs que de datos de negocio, y la ingesta de logs se cobra por gigabyte; existen casos reales de equipos cuya observabilidad costaba mas que la aplicacion observada.</a:t>
+              <a:t>(No se proyecta) El docente debe poder citar ordenes de magnitud, y conviene decir en voz alta que son convenciones aproximadas de precios de lista y no reglas duras: las cifras cambian por proveedor, region y ano, pero las proporciones se mantienen estables.</a:t>
             </a:r>
           </a:p>
         </p:txBody>
@@ -1021,55 +1003,67 @@
           <a:p/>
           <a:p>
             <a:r>
-              <a:t>Suponga que CloudLite permite subir comprobantes en PDF o imagenes y que en un semestre acumula 5000 archivos de 2 MB, o sea 10 GB.</a:t>
+              <a:t>El primer ejemplo anclado en CloudLite es la tabla de costos, recorrida componente por componente.</a:t>
             </a:r>
           </a:p>
           <a:p/>
           <a:p>
             <a:r>
-              <a:t>Guardarlos cuesta unos 0.25 dolares al mes, despreciable.</a:t>
+              <a:t>La base de datos queda en Alto con un argumento preciso: paga computo las 24 horas de los 30 dias aunque nadie consulte, mas almacenamiento que nunca baja, mas respaldos.</a:t>
             </a:r>
           </a:p>
           <a:p/>
           <a:p>
             <a:r>
-              <a:t>Pero si cada archivo se descarga en promedio 20 veces, el sistema mueve 200 GB de egress al mes, que a 0.09 dolares por gigabyte son unos 18 dolares: setenta veces mas que el almacenamiento.</a:t>
+              <a:t>El frontend estatico queda en Bajo porque es almacenamiento mas trafico y no tiene computo propio.</a:t>
             </a:r>
           </a:p>
           <a:p/>
           <a:p>
             <a:r>
-              <a:t>Hay dos familias de recursos: los que cobran por uso y los que cobran por existir.</a:t>
+              <a:t>Las notificaciones quedan en Bajo si se modelan como funcion serverless de volumen pequeno</a:t>
             </a:r>
           </a:p>
           <a:p/>
           <a:p>
             <a:r>
-              <a:t>La base de datos gestionada, el balanceador, las IP reservadas, los volumenes huerfanos y las instantaneas viejas son de la segunda y facturan aunque el ultimo usuario se haya ido hace meses.</a:t>
+              <a:t>Y pasan a Medio si se implementan como un worker encendido de forma permanente: el mismo requisito con dos disenos y dos costos, que es exactamente el razonamiento que se evalua.</a:t>
             </a:r>
           </a:p>
           <a:p/>
           <a:p>
             <a:r>
+              <a:t>Los cuatro conductores que explican casi toda la factura son: computo siempre encendido, transferencia de salida o egress, almacenamiento caliente y volumen de logs.</a:t>
+            </a:r>
+          </a:p>
+          <a:p/>
+          <a:p>
+            <a:r>
+              <a:t>Un error comun es costear solo el computo y olvidar el egress: en servicios que entregan archivos a muchos usuarios, la transferencia de salida puede superar al computo.</a:t>
+            </a:r>
+          </a:p>
+          <a:p/>
+          <a:p>
+            <a:r>
+              <a:t>Un ejemplo de fila es: API de turnos, nivel Medio, driver computo siempre encendido; si se mueve a un servicio que escala a cero fuera de horario, baja a Bajo.</a:t>
+            </a:r>
+          </a:p>
+          <a:p/>
+          <a:p>
+            <a:r>
               <a:t>NOTAS:</a:t>
             </a:r>
           </a:p>
           <a:p/>
           <a:p>
             <a:r>
-              <a:t>El segundo ejemplo muestra por que el driver importa mas que el nivel.</a:t>
+              <a:t>El contenedor de la API queda en Medio, con driver instancias por horas encendidas.</a:t>
             </a:r>
           </a:p>
           <a:p/>
           <a:p>
             <a:r>
-              <a:t>Esto tambien desarma la intuicion mas comun del estudiante, que si nadie usa el sistema el sistema no cuesta.</a:t>
-            </a:r>
-          </a:p>
-          <a:p/>
-          <a:p>
-            <a:r>
-              <a:t>(No se proyecta) La conclusion es contraintuitiva y por eso vale en clase: el driver del componente "almacenamiento de archivos" no es el almacenamiento, es el trafico, y la mitigacion no es contable sino arquitectonica, poner una cache o una red de distribucion de contenido delante para que el mismo archivo no salga del origen veinte veces.</a:t>
+              <a:t>(No se proyecta) Y hay un componente que sorprende, el monitoreo de la Clase 8: un sistema que registra cada peticion con detalle puede generar mas gigabytes de logs que de datos de negocio, y la ingesta de logs se cobra por gigabyte; existen casos reales de equipos cuya observabilidad costaba mas que la aplicacion observada.</a:t>
             </a:r>
           </a:p>
         </p:txBody>
@@ -1145,67 +1139,55 @@
           <a:p/>
           <a:p>
             <a:r>
-              <a:t>La metrica que lo gobierna es la utilizacion, el porcentaje de la capacidad pagada que efectivamente se usa; una maquina al 5 por ciento de CPU durante un mes desperdicia el 95 por ciento de lo pagado.</a:t>
+              <a:t>Suponga que CloudLite permite subir comprobantes en PDF o imagenes y que en un semestre acumula 5000 archivos de 2 MB, o sea 10 GB.</a:t>
             </a:r>
           </a:p>
           <a:p/>
           <a:p>
             <a:r>
-              <a:t>La convencion de industria, que es convencion y no regla, apunta a una utilizacion sostenida entre el 40 y el 70 por ciento: por debajo hay sobreaprovisionamiento y por encima no queda holgura para picos.</a:t>
+              <a:t>Guardarlos cuesta unos 0.25 dolares al mes, despreciable.</a:t>
             </a:r>
           </a:p>
           <a:p/>
           <a:p>
             <a:r>
-              <a:t>La primera accion tipica es reducir tamano o numero de replicas hasta acercarse a ese rango.</a:t>
+              <a:t>Pero si cada archivo se descarga en promedio 20 veces, el sistema mueve 200 GB de egress al mes, que a 0.09 dolares por gigabyte son unos 18 dolares: setenta veces mas que el almacenamiento.</a:t>
             </a:r>
           </a:p>
           <a:p/>
           <a:p>
             <a:r>
-              <a:t>La segunda es apagar por horario lo que no es produccion: un ambiente encendido las 24 horas los siete dias consume 168 horas semanales, y encendido solo de 8 a 6 en dias habiles consume 50, un ahorro cercano al 70 por ciento sin tocar codigo.</a:t>
+              <a:t>Hay dos familias de recursos: los que cobran por uso y los que cobran por existir.</a:t>
             </a:r>
           </a:p>
           <a:p/>
           <a:p>
             <a:r>
-              <a:t>Igual de validos son fijar retencion de logs a 30 dias en vez de para siempre y borrar volumenes e instantaneas sin dueno.</a:t>
+              <a:t>La base de datos gestionada, el balanceador, las IP reservadas, los volumenes huerfanos y las instantaneas viejas son de la segunda y facturan aunque el ultimo usuario se haya ido hace meses.</a:t>
             </a:r>
           </a:p>
           <a:p/>
           <a:p>
             <a:r>
-              <a:t>La tercera accion es reducir lo que esta sobredimensionado: una instancia que nunca pasa del 20 por ciento de CPU puede bajar a la mitad de su capacidad sin que nadie lo note.</a:t>
+              <a:t>NOTAS:</a:t>
             </a:r>
           </a:p>
           <a:p/>
           <a:p>
             <a:r>
-              <a:t>El orden correcto es: medir durante al menos 2 semanas, reducir un escalon y volver a medir; reducir sin datos es adivinar.</a:t>
+              <a:t>El segundo ejemplo muestra por que el driver importa mas que el nivel.</a:t>
             </a:r>
           </a:p>
           <a:p/>
           <a:p>
             <a:r>
-              <a:t>NOTAS:</a:t>
+              <a:t>Esto tambien desarma la intuicion mas comun del estudiante, que si nadie usa el sistema el sistema no cuesta.</a:t>
             </a:r>
           </a:p>
           <a:p/>
           <a:p>
             <a:r>
-              <a:t>De ahi salen tres acciones de right-sizing.</a:t>
-            </a:r>
-          </a:p>
-          <a:p/>
-          <a:p>
-            <a:r>
-              <a:t>(No se proyecta) Right-sizing es ajustar la capacidad aprovisionada a la demanda observada, y la palabra clave es observada: sin medicion es adivinanza, y la medicion viene de las senales doradas de la Clase 8, en particular la saturacion.</a:t>
-            </a:r>
-          </a:p>
-          <a:p/>
-          <a:p>
-            <a:r>
-              <a:t>(No se proyecta) La tercera es adelgazar el artefacto, que amarra con la Clase 3: una imagen basada en python:3.12 pesa del orden de 1 GB, la variante slim unos 150 MB y una construida sobre alpine puede bajar a decenas de megabytes; eso es menos registro, menos transferencia en cada despliegue y menos tiempo de arranque, dato que reaparece en la Clase 13.</a:t>
+              <a:t>(No se proyecta) La conclusion es contraintuitiva y por eso vale en clase: el driver del componente "almacenamiento de archivos" no es el almacenamiento, es el trafico, y la mitigacion no es contable sino arquitectonica, poner una cache o una red de distribucion de contenido delante para que el mismo archivo no salga del origen veinte veces.</a:t>
             </a:r>
           </a:p>
         </p:txBody>
@@ -1273,6 +1255,172 @@
         <p:txBody>
           <a:bodyPr/>
           <a:lstStyle/>
+          <a:p>
+            <a:r>
+              <a:t>DESARROLLO (para explicarlo, no se proyecta):</a:t>
+            </a:r>
+          </a:p>
+          <a:p/>
+          <a:p>
+            <a:r>
+              <a:t>La metrica que lo gobierna es la utilizacion, el porcentaje de la capacidad pagada que efectivamente se usa; una maquina al 5 por ciento de CPU durante un mes desperdicia el 95 por ciento de lo pagado.</a:t>
+            </a:r>
+          </a:p>
+          <a:p/>
+          <a:p>
+            <a:r>
+              <a:t>La convencion de industria, que es convencion y no regla, apunta a una utilizacion sostenida entre el 40 y el 70 por ciento: por debajo hay sobreaprovisionamiento y por encima no queda holgura para picos.</a:t>
+            </a:r>
+          </a:p>
+          <a:p/>
+          <a:p>
+            <a:r>
+              <a:t>La primera accion tipica es reducir tamano o numero de replicas hasta acercarse a ese rango.</a:t>
+            </a:r>
+          </a:p>
+          <a:p/>
+          <a:p>
+            <a:r>
+              <a:t>La segunda es apagar por horario lo que no es produccion: un ambiente encendido las 24 horas los siete dias consume 168 horas semanales, y encendido solo de 8 a 6 en dias habiles consume 50, un ahorro cercano al 70 por ciento sin tocar codigo.</a:t>
+            </a:r>
+          </a:p>
+          <a:p/>
+          <a:p>
+            <a:r>
+              <a:t>Igual de validos son fijar retencion de logs a 30 dias en vez de para siempre y borrar volumenes e instantaneas sin dueno.</a:t>
+            </a:r>
+          </a:p>
+          <a:p/>
+          <a:p>
+            <a:r>
+              <a:t>La tercera accion es reducir lo que esta sobredimensionado: una instancia que nunca pasa del 20 por ciento de CPU puede bajar a la mitad de su capacidad sin que nadie lo note.</a:t>
+            </a:r>
+          </a:p>
+          <a:p/>
+          <a:p>
+            <a:r>
+              <a:t>El orden correcto es: medir durante al menos 2 semanas, reducir un escalon y volver a medir; reducir sin datos es adivinar.</a:t>
+            </a:r>
+          </a:p>
+          <a:p/>
+          <a:p>
+            <a:r>
+              <a:t>NOTAS:</a:t>
+            </a:r>
+          </a:p>
+          <a:p/>
+          <a:p>
+            <a:r>
+              <a:t>De ahi salen tres acciones de right-sizing.</a:t>
+            </a:r>
+          </a:p>
+          <a:p/>
+          <a:p>
+            <a:r>
+              <a:t>(No se proyecta) Right-sizing es ajustar la capacidad aprovisionada a la demanda observada, y la palabra clave es observada: sin medicion es adivinanza, y la medicion viene de las senales doradas de la Clase 8, en particular la saturacion.</a:t>
+            </a:r>
+          </a:p>
+          <a:p/>
+          <a:p>
+            <a:r>
+              <a:t>(No se proyecta) La tercera es adelgazar el artefacto, que amarra con la Clase 3: una imagen basada en python:3.12 pesa del orden de 1 GB, la variante slim unos 150 MB y una construida sobre alpine puede bajar a decenas de megabytes; eso es menos registro, menos transferencia en cada despliegue y menos tiempo de arranque, dato que reaparece en la Clase 13.</a:t>
+            </a:r>
+          </a:p>
+        </p:txBody>
+      </p:sp>
+      <p:sp>
+        <p:nvSpPr>
+          <p:cNvPr id="4" name="Slide Number Placeholder 3"/>
+          <p:cNvSpPr>
+            <a:spLocks noGrp="1"/>
+          </p:cNvSpPr>
+          <p:nvPr>
+            <p:ph type="sldNum" idx="5" sz="quarter"/>
+          </p:nvPr>
+        </p:nvSpPr>
+        <p:spPr/>
+      </p:sp>
+    </p:spTree>
+  </p:cSld>
+  <p:clrMapOvr>
+    <a:masterClrMapping/>
+  </p:clrMapOvr>
+</p:notes>
+</file>
+
+<file path=ppt/notesSlides/notesSlide8.xml><?xml version="1.0" encoding="utf-8"?>
+<p:notes xmlns:a="http://schemas.openxmlformats.org/drawingml/2006/main" xmlns:p="http://schemas.openxmlformats.org/presentationml/2006/main" xmlns:r="http://schemas.openxmlformats.org/officeDocument/2006/relationships">
+  <p:cSld>
+    <p:spTree>
+      <p:nvGrpSpPr>
+        <p:cNvPr id="1" name=""/>
+        <p:cNvGrpSpPr/>
+        <p:nvPr/>
+      </p:nvGrpSpPr>
+      <p:grpSpPr>
+        <a:xfrm>
+          <a:off x="0" y="0"/>
+          <a:ext cx="0" cy="0"/>
+          <a:chOff x="0" y="0"/>
+          <a:chExt cx="0" cy="0"/>
+        </a:xfrm>
+      </p:grpSpPr>
+      <p:sp>
+        <p:nvSpPr>
+          <p:cNvPr id="2" name="Slide Image Placeholder 1"/>
+          <p:cNvSpPr>
+            <a:spLocks noGrp="1"/>
+          </p:cNvSpPr>
+          <p:nvPr>
+            <p:ph type="sldImg" idx="2"/>
+          </p:nvPr>
+        </p:nvSpPr>
+        <p:spPr/>
+      </p:sp>
+      <p:sp>
+        <p:nvSpPr>
+          <p:cNvPr id="3" name="Notes Placeholder 2"/>
+          <p:cNvSpPr>
+            <a:spLocks noGrp="1"/>
+          </p:cNvSpPr>
+          <p:nvPr>
+            <p:ph type="body" idx="3" sz="quarter"/>
+          </p:nvPr>
+        </p:nvSpPr>
+        <p:spPr/>
+        <p:txBody>
+          <a:bodyPr/>
+          <a:lstStyle/>
+          <a:p>
+            <a:r>
+              <a:t>TEXTO COMPLETO DE LA LÁMINA (se proyecta resumido):</a:t>
+            </a:r>
+          </a:p>
+          <a:p/>
+          <a:p>
+            <a:r>
+              <a:t>Menos capas innecesarias · imágenes slim · apagar labs · right-sizing.</a:t>
+            </a:r>
+          </a:p>
+          <a:p/>
+          <a:p>
+            <a:r>
+              <a:t>Relación con escalabilidad: escala cuando hay carga, no por vanidad.</a:t>
+            </a:r>
+          </a:p>
+          <a:p/>
+          <a:p>
+            <a:r>
+              <a:t>Sostenibilidad técnica: que el equipo pueda operar el diseño. Ambiental: no consumir cómputo que nadie usa.</a:t>
+            </a:r>
+          </a:p>
+          <a:p/>
+          <a:p>
+            <a:r>
+              <a:t>Ejemplo: una imagen slim pesa decenas de MB frente a cerca de 1 GB de una completa: menos almacenamiento, menos transferencia y despliegues más rápidos.</a:t>
+            </a:r>
+          </a:p>
+          <a:p/>
           <a:p>
             <a:r>
               <a:t>DESARROLLO (para explicarlo, no se proyecta):</a:t>
@@ -5395,14 +5543,83 @@
       </p:sp>
       <p:sp>
         <p:nvSpPr>
-          <p:cNvPr id="5" name="TextBox 4"/>
+          <p:cNvPr id="5" name="Rounded Rectangle 4"/>
+          <p:cNvSpPr/>
+          <p:nvPr/>
+        </p:nvSpPr>
+        <p:spPr>
+          <a:xfrm>
+            <a:off x="5797149" y="1343926"/>
+            <a:ext cx="6010497" cy="4837658"/>
+          </a:xfrm>
+          <a:prstGeom prst="roundRect">
+            <a:avLst>
+              <a:gd name="adj" fmla="val 4000"/>
+            </a:avLst>
+          </a:prstGeom>
+          <a:solidFill>
+            <a:srgbClr val="E8EEF4"/>
+          </a:solidFill>
+          <a:ln>
+            <a:noFill/>
+          </a:ln>
+        </p:spPr>
+        <p:style>
+          <a:lnRef idx="1">
+            <a:schemeClr val="accent1"/>
+          </a:lnRef>
+          <a:fillRef idx="3">
+            <a:schemeClr val="accent1"/>
+          </a:fillRef>
+          <a:effectRef idx="2">
+            <a:schemeClr val="accent1"/>
+          </a:effectRef>
+          <a:fontRef idx="minor">
+            <a:schemeClr val="lt1"/>
+          </a:fontRef>
+        </p:style>
+        <p:txBody>
+          <a:bodyPr rtlCol="0" anchor="ctr"/>
+          <a:lstStyle/>
+          <a:p>
+            <a:pPr algn="ctr"/>
+          </a:p>
+        </p:txBody>
+      </p:sp>
+      <p:pic>
+        <p:nvPicPr>
+          <p:cNvPr id="6" name="Picture 5" descr="ilus-sostenibilidad-paso1.png"/>
+          <p:cNvPicPr>
+            <a:picLocks noChangeAspect="1"/>
+          </p:cNvPicPr>
+          <p:nvPr/>
+        </p:nvPicPr>
+        <p:blipFill>
+          <a:blip r:embed="rId2"/>
+          <a:stretch>
+            <a:fillRect/>
+          </a:stretch>
+        </p:blipFill>
+        <p:spPr>
+          <a:xfrm>
+            <a:off x="5870301" y="1417078"/>
+            <a:ext cx="5864193" cy="4691354"/>
+          </a:xfrm>
+          <a:prstGeom prst="rect">
+            <a:avLst/>
+          </a:prstGeom>
+        </p:spPr>
+      </p:pic>
+      <p:sp>
+        <p:nvSpPr>
+          <p:cNvPr id="7" name="TextBox 6"/>
           <p:cNvSpPr txBox="1"/>
           <p:nvPr/>
         </p:nvSpPr>
         <p:spPr>
           <a:xfrm>
-            <a:off x="457200" y="1170432"/>
-            <a:ext cx="11277295" cy="5230368"/>
+            <a:off x="457200" y="1353312"/>
+            <a:ext cx="5093061" cy="5047488"/>
           </a:xfrm>
           <a:prstGeom prst="rect">
             <a:avLst/>
@@ -5511,14 +5728,14 @@
                 </a:solidFill>
                 <a:latin typeface="Calibri"/>
               </a:rPr>
-              <a:t>–   Ejemplo: una imagen slim pesa decenas de MB frente a cerca de 1 GB de una completa: menos almacenamiento, menos transferencia y despliegues más rápidos.</a:t>
-            </a:r>
-          </a:p>
-        </p:txBody>
-      </p:sp>
-      <p:sp>
-        <p:nvSpPr>
-          <p:cNvPr id="6" name="TextBox 5"/>
+              <a:t>–   Ejemplo: una imagen slim pesa decenas de MB frente a cerca de 1 GB de una completa: menos almacenamiento, menos transferencia y despliegues más…</a:t>
+            </a:r>
+          </a:p>
+        </p:txBody>
+      </p:sp>
+      <p:sp>
+        <p:nvSpPr>
+          <p:cNvPr id="8" name="TextBox 7"/>
           <p:cNvSpPr txBox="1"/>
           <p:nvPr/>
         </p:nvSpPr>
@@ -6621,9 +6838,33 @@
           </a:prstGeom>
         </p:spPr>
       </p:pic>
-      <p:sp>
-        <p:nvSpPr>
-          <p:cNvPr id="8" name="TextBox 7"/>
+      <p:pic>
+        <p:nvPicPr>
+          <p:cNvPr id="8" name="Picture 7" descr="capex-opex-paso3.png"/>
+          <p:cNvPicPr>
+            <a:picLocks noChangeAspect="1"/>
+          </p:cNvPicPr>
+          <p:nvPr/>
+        </p:nvPicPr>
+        <p:blipFill>
+          <a:blip r:embed="rId4"/>
+          <a:stretch>
+            <a:fillRect/>
+          </a:stretch>
+        </p:blipFill>
+        <p:spPr>
+          <a:xfrm>
+            <a:off x="5876318" y="1261872"/>
+            <a:ext cx="5852160" cy="4681728"/>
+          </a:xfrm>
+          <a:prstGeom prst="rect">
+            <a:avLst/>
+          </a:prstGeom>
+        </p:spPr>
+      </p:pic>
+      <p:sp>
+        <p:nvSpPr>
+          <p:cNvPr id="13" name="TextBox 12"/>
           <p:cNvSpPr txBox="1"/>
           <p:nvPr/>
         </p:nvSpPr>
@@ -6658,7 +6899,7 @@
       </p:sp>
       <p:sp>
         <p:nvSpPr>
-          <p:cNvPr id="9" name="TextBox 8"/>
+          <p:cNvPr id="14" name="TextBox 13"/>
           <p:cNvSpPr txBox="1"/>
           <p:nvPr/>
         </p:nvSpPr>
@@ -6713,7 +6954,7 @@
       </p:sp>
       <p:sp>
         <p:nvSpPr>
-          <p:cNvPr id="10" name="TextBox 9"/>
+          <p:cNvPr id="15" name="TextBox 14"/>
           <p:cNvSpPr txBox="1"/>
           <p:nvPr/>
         </p:nvSpPr>
@@ -6812,6 +7053,59 @@
                       </p:childTnLst>
                     </p:cTn>
                   </p:par>
+                  <p:par>
+                    <p:cTn id="8" fill="hold">
+                      <p:stCondLst>
+                        <p:cond delay="indefinite"/>
+                      </p:stCondLst>
+                      <p:childTnLst>
+                        <p:par>
+                          <p:cTn id="9" fill="hold">
+                            <p:stCondLst>
+                              <p:cond delay="0"/>
+                            </p:stCondLst>
+                            <p:childTnLst>
+                              <p:par>
+                                <p:cTn id="10" presetID="10" presetClass="entr" presetSubtype="0" fill="hold" nodeType="clickEffect">
+                                  <p:stCondLst>
+                                    <p:cond delay="0"/>
+                                  </p:stCondLst>
+                                  <p:childTnLst>
+                                    <p:set>
+                                      <p:cBhvr>
+                                        <p:cTn id="11" dur="1" fill="hold">
+                                          <p:stCondLst>
+                                            <p:cond delay="0"/>
+                                          </p:stCondLst>
+                                        </p:cTn>
+                                        <p:tgtEl>
+                                          <p:spTgt spid="8"/>
+                                        </p:tgtEl>
+                                        <p:attrNameLst>
+                                          <p:attrName>style.visibility</p:attrName>
+                                        </p:attrNameLst>
+                                      </p:cBhvr>
+                                      <p:to>
+                                        <p:strVal val="visible"/>
+                                      </p:to>
+                                    </p:set>
+                                    <p:animEffect transition="in" filter="fade">
+                                      <p:cBhvr>
+                                        <p:cTn id="12" dur="450"/>
+                                        <p:tgtEl>
+                                          <p:spTgt spid="8"/>
+                                        </p:tgtEl>
+                                      </p:cBhvr>
+                                    </p:animEffect>
+                                  </p:childTnLst>
+                                </p:cTn>
+                              </p:par>
+                            </p:childTnLst>
+                          </p:cTn>
+                        </p:par>
+                      </p:childTnLst>
+                    </p:cTn>
+                  </p:par>
                 </p:childTnLst>
               </p:cTn>
               <p:prevCondLst>
@@ -6977,14 +7271,83 @@
       </p:sp>
       <p:sp>
         <p:nvSpPr>
-          <p:cNvPr id="5" name="TextBox 4"/>
+          <p:cNvPr id="5" name="Rounded Rectangle 4"/>
+          <p:cNvSpPr/>
+          <p:nvPr/>
+        </p:nvSpPr>
+        <p:spPr>
+          <a:xfrm>
+            <a:off x="5797149" y="1343926"/>
+            <a:ext cx="6010497" cy="4837658"/>
+          </a:xfrm>
+          <a:prstGeom prst="roundRect">
+            <a:avLst>
+              <a:gd name="adj" fmla="val 4000"/>
+            </a:avLst>
+          </a:prstGeom>
+          <a:solidFill>
+            <a:srgbClr val="E8EEF4"/>
+          </a:solidFill>
+          <a:ln>
+            <a:noFill/>
+          </a:ln>
+        </p:spPr>
+        <p:style>
+          <a:lnRef idx="1">
+            <a:schemeClr val="accent1"/>
+          </a:lnRef>
+          <a:fillRef idx="3">
+            <a:schemeClr val="accent1"/>
+          </a:fillRef>
+          <a:effectRef idx="2">
+            <a:schemeClr val="accent1"/>
+          </a:effectRef>
+          <a:fontRef idx="minor">
+            <a:schemeClr val="lt1"/>
+          </a:fontRef>
+        </p:style>
+        <p:txBody>
+          <a:bodyPr rtlCol="0" anchor="ctr"/>
+          <a:lstStyle/>
+          <a:p>
+            <a:pPr algn="ctr"/>
+          </a:p>
+        </p:txBody>
+      </p:sp>
+      <p:pic>
+        <p:nvPicPr>
+          <p:cNvPr id="6" name="Picture 5" descr="ilus-estimar-sin-factura-paso1.png"/>
+          <p:cNvPicPr>
+            <a:picLocks noChangeAspect="1"/>
+          </p:cNvPicPr>
+          <p:nvPr/>
+        </p:nvPicPr>
+        <p:blipFill>
+          <a:blip r:embed="rId2"/>
+          <a:stretch>
+            <a:fillRect/>
+          </a:stretch>
+        </p:blipFill>
+        <p:spPr>
+          <a:xfrm>
+            <a:off x="5870301" y="1417078"/>
+            <a:ext cx="5864193" cy="4691354"/>
+          </a:xfrm>
+          <a:prstGeom prst="rect">
+            <a:avLst/>
+          </a:prstGeom>
+        </p:spPr>
+      </p:pic>
+      <p:sp>
+        <p:nvSpPr>
+          <p:cNvPr id="7" name="TextBox 6"/>
           <p:cNvSpPr txBox="1"/>
           <p:nvPr/>
         </p:nvSpPr>
         <p:spPr>
           <a:xfrm>
-            <a:off x="457200" y="1170432"/>
-            <a:ext cx="11277295" cy="5230368"/>
+            <a:off x="457200" y="1353312"/>
+            <a:ext cx="5093061" cy="5047488"/>
           </a:xfrm>
           <a:prstGeom prst="rect">
             <a:avLst/>
@@ -7009,7 +7372,7 @@
                 </a:solidFill>
                 <a:latin typeface="Calibri"/>
               </a:rPr>
-              <a:t>–   la app no tiene facturacion real y no la va a tener: el curso prohibe cuentas cloud de pago y tarjetas de credito, y todo se trabaja con draw.io, Excalidraw, Killercoda y el free tier de GitHub Actions.</a:t>
+              <a:t>–   la app no tiene facturacion real y no la va a tener: el curso prohibe cuentas cloud de pago y tarjetas de credito, y todo se trabaja con…</a:t>
             </a:r>
           </a:p>
           <a:p>
@@ -7032,7 +7395,7 @@
       </p:sp>
       <p:sp>
         <p:nvSpPr>
-          <p:cNvPr id="6" name="TextBox 5"/>
+          <p:cNvPr id="8" name="TextBox 7"/>
           <p:cNvSpPr txBox="1"/>
           <p:nvPr/>
         </p:nvSpPr>
@@ -7213,14 +7576,83 @@
       </p:sp>
       <p:sp>
         <p:nvSpPr>
-          <p:cNvPr id="5" name="TextBox 4"/>
+          <p:cNvPr id="5" name="Rounded Rectangle 4"/>
+          <p:cNvSpPr/>
+          <p:nvPr/>
+        </p:nvSpPr>
+        <p:spPr>
+          <a:xfrm>
+            <a:off x="5797149" y="1343926"/>
+            <a:ext cx="6010497" cy="4837658"/>
+          </a:xfrm>
+          <a:prstGeom prst="roundRect">
+            <a:avLst>
+              <a:gd name="adj" fmla="val 4000"/>
+            </a:avLst>
+          </a:prstGeom>
+          <a:solidFill>
+            <a:srgbClr val="E8EEF4"/>
+          </a:solidFill>
+          <a:ln>
+            <a:noFill/>
+          </a:ln>
+        </p:spPr>
+        <p:style>
+          <a:lnRef idx="1">
+            <a:schemeClr val="accent1"/>
+          </a:lnRef>
+          <a:fillRef idx="3">
+            <a:schemeClr val="accent1"/>
+          </a:fillRef>
+          <a:effectRef idx="2">
+            <a:schemeClr val="accent1"/>
+          </a:effectRef>
+          <a:fontRef idx="minor">
+            <a:schemeClr val="lt1"/>
+          </a:fontRef>
+        </p:style>
+        <p:txBody>
+          <a:bodyPr rtlCol="0" anchor="ctr"/>
+          <a:lstStyle/>
+          <a:p>
+            <a:pPr algn="ctr"/>
+          </a:p>
+        </p:txBody>
+      </p:sp>
+      <p:pic>
+        <p:nvPicPr>
+          <p:cNvPr id="6" name="Picture 5" descr="ilus-drivers-costo-paso1.png"/>
+          <p:cNvPicPr>
+            <a:picLocks noChangeAspect="1"/>
+          </p:cNvPicPr>
+          <p:nvPr/>
+        </p:nvPicPr>
+        <p:blipFill>
+          <a:blip r:embed="rId2"/>
+          <a:stretch>
+            <a:fillRect/>
+          </a:stretch>
+        </p:blipFill>
+        <p:spPr>
+          <a:xfrm>
+            <a:off x="5870301" y="1417078"/>
+            <a:ext cx="5864193" cy="4691354"/>
+          </a:xfrm>
+          <a:prstGeom prst="rect">
+            <a:avLst/>
+          </a:prstGeom>
+        </p:spPr>
+      </p:pic>
+      <p:sp>
+        <p:nvSpPr>
+          <p:cNvPr id="7" name="TextBox 6"/>
           <p:cNvSpPr txBox="1"/>
           <p:nvPr/>
         </p:nvSpPr>
         <p:spPr>
           <a:xfrm>
-            <a:off x="457200" y="1170432"/>
-            <a:ext cx="11277295" cy="5230368"/>
+            <a:off x="457200" y="1353312"/>
+            <a:ext cx="5093061" cy="5047488"/>
           </a:xfrm>
           <a:prstGeom prst="rect">
             <a:avLst/>
@@ -7332,45 +7764,11 @@
               <a:t>.</a:t>
             </a:r>
           </a:p>
-          <a:p>
-            <a:pPr>
-              <a:spcAft>
-                <a:spcPts val="800"/>
-              </a:spcAft>
-            </a:pPr>
-            <a:r>
-              <a:rPr sz="2000" b="0" i="0">
-                <a:solidFill>
-                  <a:srgbClr val="333333"/>
-                </a:solidFill>
-                <a:latin typeface="Calibri"/>
-              </a:rPr>
-              <a:t>–   </a:t>
-            </a:r>
-            <a:r>
-              <a:rPr sz="2000" b="1" i="0">
-                <a:solidFill>
-                  <a:srgbClr val="333333"/>
-                </a:solidFill>
-                <a:latin typeface="Calibri"/>
-              </a:rPr>
-              <a:t>Egress</a:t>
-            </a:r>
-            <a:r>
-              <a:rPr sz="2000" b="0" i="0">
-                <a:solidFill>
-                  <a:srgbClr val="333333"/>
-                </a:solidFill>
-                <a:latin typeface="Calibri"/>
-              </a:rPr>
-              <a:t> = datos que salen del proveedor hacia internet; suele cobrarse por gigabyte, y la entrada casi nunca.</a:t>
-            </a:r>
-          </a:p>
-        </p:txBody>
-      </p:sp>
-      <p:sp>
-        <p:nvSpPr>
-          <p:cNvPr id="6" name="TextBox 5"/>
+        </p:txBody>
+      </p:sp>
+      <p:sp>
+        <p:nvSpPr>
+          <p:cNvPr id="8" name="TextBox 7"/>
           <p:cNvSpPr txBox="1"/>
           <p:nvPr/>
         </p:nvSpPr>
@@ -7642,9 +8040,33 @@
           </a:prstGeom>
         </p:spPr>
       </p:pic>
-      <p:sp>
-        <p:nvSpPr>
-          <p:cNvPr id="8" name="TextBox 7"/>
+      <p:pic>
+        <p:nvPicPr>
+          <p:cNvPr id="8" name="Picture 7" descr="ordenes-magnitud-paso3.png"/>
+          <p:cNvPicPr>
+            <a:picLocks noChangeAspect="1"/>
+          </p:cNvPicPr>
+          <p:nvPr/>
+        </p:nvPicPr>
+        <p:blipFill>
+          <a:blip r:embed="rId4"/>
+          <a:stretch>
+            <a:fillRect/>
+          </a:stretch>
+        </p:blipFill>
+        <p:spPr>
+          <a:xfrm>
+            <a:off x="5876318" y="1261872"/>
+            <a:ext cx="5852160" cy="4681728"/>
+          </a:xfrm>
+          <a:prstGeom prst="rect">
+            <a:avLst/>
+          </a:prstGeom>
+        </p:spPr>
+      </p:pic>
+      <p:sp>
+        <p:nvSpPr>
+          <p:cNvPr id="13" name="TextBox 12"/>
           <p:cNvSpPr txBox="1"/>
           <p:nvPr/>
         </p:nvSpPr>
@@ -7679,7 +8101,7 @@
       </p:sp>
       <p:sp>
         <p:nvSpPr>
-          <p:cNvPr id="9" name="TextBox 8"/>
+          <p:cNvPr id="14" name="TextBox 13"/>
           <p:cNvSpPr txBox="1"/>
           <p:nvPr/>
         </p:nvSpPr>
@@ -7750,7 +8172,7 @@
       </p:sp>
       <p:sp>
         <p:nvSpPr>
-          <p:cNvPr id="10" name="TextBox 9"/>
+          <p:cNvPr id="15" name="TextBox 14"/>
           <p:cNvSpPr txBox="1"/>
           <p:nvPr/>
         </p:nvSpPr>
@@ -7837,6 +8259,59 @@
                                         <p:cTn id="7" dur="450"/>
                                         <p:tgtEl>
                                           <p:spTgt spid="7"/>
+                                        </p:tgtEl>
+                                      </p:cBhvr>
+                                    </p:animEffect>
+                                  </p:childTnLst>
+                                </p:cTn>
+                              </p:par>
+                            </p:childTnLst>
+                          </p:cTn>
+                        </p:par>
+                      </p:childTnLst>
+                    </p:cTn>
+                  </p:par>
+                  <p:par>
+                    <p:cTn id="8" fill="hold">
+                      <p:stCondLst>
+                        <p:cond delay="indefinite"/>
+                      </p:stCondLst>
+                      <p:childTnLst>
+                        <p:par>
+                          <p:cTn id="9" fill="hold">
+                            <p:stCondLst>
+                              <p:cond delay="0"/>
+                            </p:stCondLst>
+                            <p:childTnLst>
+                              <p:par>
+                                <p:cTn id="10" presetID="10" presetClass="entr" presetSubtype="0" fill="hold" nodeType="clickEffect">
+                                  <p:stCondLst>
+                                    <p:cond delay="0"/>
+                                  </p:stCondLst>
+                                  <p:childTnLst>
+                                    <p:set>
+                                      <p:cBhvr>
+                                        <p:cTn id="11" dur="1" fill="hold">
+                                          <p:stCondLst>
+                                            <p:cond delay="0"/>
+                                          </p:stCondLst>
+                                        </p:cTn>
+                                        <p:tgtEl>
+                                          <p:spTgt spid="8"/>
+                                        </p:tgtEl>
+                                        <p:attrNameLst>
+                                          <p:attrName>style.visibility</p:attrName>
+                                        </p:attrNameLst>
+                                      </p:cBhvr>
+                                      <p:to>
+                                        <p:strVal val="visible"/>
+                                      </p:to>
+                                    </p:set>
+                                    <p:animEffect transition="in" filter="fade">
+                                      <p:cBhvr>
+                                        <p:cTn id="12" dur="450"/>
+                                        <p:tgtEl>
+                                          <p:spTgt spid="8"/>
                                         </p:tgtEl>
                                       </p:cBhvr>
                                     </p:animEffect>

--- a/Arquitectura de Sistemas Computacionales/Clases/Clase 10 - Costos y sostenibilidad cloud/Presentacion.pptx
+++ b/Arquitectura de Sistemas Computacionales/Clases/Clase 10 - Costos y sostenibilidad cloud/Presentacion.pptx
@@ -519,7 +519,7 @@
           <a:p/>
           <a:p>
             <a:r>
-              <a:t>En un centro de datos propio el gasto es de capital: se compra un servidor, se paga por adelantado, se amortiza en tres o cinco anos, y desde ese momento dejarlo encendido una hora mas no aparece en ninguna factura visible.</a:t>
+              <a:t>En un centro de datos propio el gasto es de capital: se compra un servidor, se paga por adelantado, su costo se reparte en tres o cinco anos, y desde ese momento dejarlo encendido una hora mas no aparece en ninguna factura visible.</a:t>
             </a:r>
           </a:p>
           <a:p/>
@@ -1039,7 +1039,7 @@
           <a:p/>
           <a:p>
             <a:r>
-              <a:t>Un error comun es costear solo el computo y olvidar el egress: en servicios que entregan archivos a muchos usuarios, la transferencia de salida puede superar al computo.</a:t>
+              <a:t>Un error comun es calcular solo el costo del computo y olvidar el egress: en servicios que entregan archivos a muchos usuarios, la transferencia de salida puede superar al computo.</a:t>
             </a:r>
           </a:p>
           <a:p/>
@@ -1187,7 +1187,7 @@
           <a:p/>
           <a:p>
             <a:r>
-              <a:t>(No se proyecta) La conclusion es contraintuitiva y por eso vale en clase: el driver del componente "almacenamiento de archivos" no es el almacenamiento, es el trafico, y la mitigacion no es contable sino arquitectonica, poner una cache o una red de distribucion de contenido delante para que el mismo archivo no salga del origen veinte veces.</a:t>
+              <a:t>(No se proyecta) La conclusion sorprende y por eso vale en clase: el driver del componente "almacenamiento de archivos" no es el almacenamiento, es el trafico, y la mitigacion no es contable sino arquitectonica, poner una cache o una red de distribucion de contenido delante para que el mismo archivo no salga del origen veinte veces.</a:t>
             </a:r>
           </a:p>
         </p:txBody>
@@ -5944,7 +5944,7 @@
                 </a:solidFill>
                 <a:latin typeface="Calibri"/>
               </a:rPr>
-              <a:t>Proponer 3 apalancamientos de ahorro sin romper el diseño.</a:t>
+              <a:t>Proponer 3 medidas de ahorro sin romper el diseño.</a:t>
             </a:r>
           </a:p>
           <a:p>
@@ -6543,7 +6543,7 @@
                 </a:solidFill>
                 <a:latin typeface="Calibri"/>
               </a:rPr>
-              <a:t>–   Proponer 3 apalancamientos de ahorro sin romper el diseño.</a:t>
+              <a:t>–   Proponer 3 medidas de ahorro sin romper el diseño.</a:t>
             </a:r>
           </a:p>
           <a:p>
